--- a/IUEA_Teaching_Plan/decks/CML3112_Week13_Design_Infrastructure.pptx
+++ b/IUEA_Teaching_Plan/decks/CML3112_Week13_Design_Infrastructure.pptx
@@ -2,37 +2,37 @@
 <file path=ppt/presentation.xml><?xml version="1.0" encoding="utf-8"?>
 <p:presentation xmlns:p="http://schemas.openxmlformats.org/presentationml/2006/main">
   <p:sldMasterIdLst>
-    <p:sldMasterId xmlns:r="http://schemas.openxmlformats.org/officeDocument/2006/relationships" id="2147483648" r:id="R7491112d9a464865"/>
+    <p:sldMasterId xmlns:r="http://schemas.openxmlformats.org/officeDocument/2006/relationships" id="2147483648" r:id="Rb4c29c4eb0514967"/>
   </p:sldMasterIdLst>
   <p:notesMasterIdLst>
-    <p:notesMasterId xmlns:r="http://schemas.openxmlformats.org/officeDocument/2006/relationships" r:id="Re82236b8ed834ed1"/>
+    <p:notesMasterId xmlns:r="http://schemas.openxmlformats.org/officeDocument/2006/relationships" r:id="R75ee615cdad2496d"/>
   </p:notesMasterIdLst>
   <p:sldIdLst>
-    <p:sldId xmlns:r="http://schemas.openxmlformats.org/officeDocument/2006/relationships" id="256" r:id="R5276b9d162d04ca6"/>
-    <p:sldId xmlns:r="http://schemas.openxmlformats.org/officeDocument/2006/relationships" id="257" r:id="R774a6590f9254493"/>
-    <p:sldId xmlns:r="http://schemas.openxmlformats.org/officeDocument/2006/relationships" id="258" r:id="R365449cdf4654b87"/>
-    <p:sldId xmlns:r="http://schemas.openxmlformats.org/officeDocument/2006/relationships" id="259" r:id="R09e0e8a0f63c437e"/>
-    <p:sldId xmlns:r="http://schemas.openxmlformats.org/officeDocument/2006/relationships" id="260" r:id="R5385457f60694aff"/>
-    <p:sldId xmlns:r="http://schemas.openxmlformats.org/officeDocument/2006/relationships" id="261" r:id="R2ec1230aceb94778"/>
-    <p:sldId xmlns:r="http://schemas.openxmlformats.org/officeDocument/2006/relationships" id="262" r:id="Re55aacb698c144d1"/>
-    <p:sldId xmlns:r="http://schemas.openxmlformats.org/officeDocument/2006/relationships" id="263" r:id="R84c6d99bda724a0d"/>
-    <p:sldId xmlns:r="http://schemas.openxmlformats.org/officeDocument/2006/relationships" id="264" r:id="R71fac5981d9e4bd1"/>
-    <p:sldId xmlns:r="http://schemas.openxmlformats.org/officeDocument/2006/relationships" id="265" r:id="R4926bdb08bf545df"/>
-    <p:sldId xmlns:r="http://schemas.openxmlformats.org/officeDocument/2006/relationships" id="266" r:id="R6c4842e2f70f4c23"/>
-    <p:sldId xmlns:r="http://schemas.openxmlformats.org/officeDocument/2006/relationships" id="267" r:id="R49c91551dbe24937"/>
-    <p:sldId xmlns:r="http://schemas.openxmlformats.org/officeDocument/2006/relationships" id="268" r:id="R5f6b625300384914"/>
-    <p:sldId xmlns:r="http://schemas.openxmlformats.org/officeDocument/2006/relationships" id="269" r:id="Rc94a6a8c7ff34703"/>
-    <p:sldId xmlns:r="http://schemas.openxmlformats.org/officeDocument/2006/relationships" id="270" r:id="Rb8ec1937a58848e8"/>
-    <p:sldId xmlns:r="http://schemas.openxmlformats.org/officeDocument/2006/relationships" id="271" r:id="Radb01f5d54d04d23"/>
-    <p:sldId xmlns:r="http://schemas.openxmlformats.org/officeDocument/2006/relationships" id="272" r:id="R3815f1ce72364bfa"/>
-    <p:sldId xmlns:r="http://schemas.openxmlformats.org/officeDocument/2006/relationships" id="273" r:id="R8932f7ae841b4758"/>
-    <p:sldId xmlns:r="http://schemas.openxmlformats.org/officeDocument/2006/relationships" id="274" r:id="Re9c100690d844e26"/>
-    <p:sldId xmlns:r="http://schemas.openxmlformats.org/officeDocument/2006/relationships" id="275" r:id="Ra5e9e9ba338b477d"/>
-    <p:sldId xmlns:r="http://schemas.openxmlformats.org/officeDocument/2006/relationships" id="276" r:id="Rd3cec595a1c24d08"/>
-    <p:sldId xmlns:r="http://schemas.openxmlformats.org/officeDocument/2006/relationships" id="277" r:id="R5b20bf3a3d00493c"/>
-    <p:sldId xmlns:r="http://schemas.openxmlformats.org/officeDocument/2006/relationships" id="278" r:id="R2a597231f5d945ff"/>
-    <p:sldId xmlns:r="http://schemas.openxmlformats.org/officeDocument/2006/relationships" id="279" r:id="R7aaaa51f5caf4aa7"/>
-    <p:sldId xmlns:r="http://schemas.openxmlformats.org/officeDocument/2006/relationships" id="280" r:id="Re7b3a6e6af26401b"/>
+    <p:sldId xmlns:r="http://schemas.openxmlformats.org/officeDocument/2006/relationships" id="256" r:id="R8e5f201a47634a30"/>
+    <p:sldId xmlns:r="http://schemas.openxmlformats.org/officeDocument/2006/relationships" id="257" r:id="Rd1a1a85ec21444a8"/>
+    <p:sldId xmlns:r="http://schemas.openxmlformats.org/officeDocument/2006/relationships" id="258" r:id="R9fdeb7b741ad4283"/>
+    <p:sldId xmlns:r="http://schemas.openxmlformats.org/officeDocument/2006/relationships" id="259" r:id="R7c822084ac6a4e98"/>
+    <p:sldId xmlns:r="http://schemas.openxmlformats.org/officeDocument/2006/relationships" id="260" r:id="R4b1ffbacd4024e3d"/>
+    <p:sldId xmlns:r="http://schemas.openxmlformats.org/officeDocument/2006/relationships" id="261" r:id="Rb4057e635cec430a"/>
+    <p:sldId xmlns:r="http://schemas.openxmlformats.org/officeDocument/2006/relationships" id="262" r:id="Rd6ca900556724314"/>
+    <p:sldId xmlns:r="http://schemas.openxmlformats.org/officeDocument/2006/relationships" id="263" r:id="Rcb2aa062b3114d4b"/>
+    <p:sldId xmlns:r="http://schemas.openxmlformats.org/officeDocument/2006/relationships" id="264" r:id="R38ff158d5c544695"/>
+    <p:sldId xmlns:r="http://schemas.openxmlformats.org/officeDocument/2006/relationships" id="265" r:id="R1b14a09ec8d04967"/>
+    <p:sldId xmlns:r="http://schemas.openxmlformats.org/officeDocument/2006/relationships" id="266" r:id="R6693e61bb4e14f55"/>
+    <p:sldId xmlns:r="http://schemas.openxmlformats.org/officeDocument/2006/relationships" id="267" r:id="R39a61c11a82f4866"/>
+    <p:sldId xmlns:r="http://schemas.openxmlformats.org/officeDocument/2006/relationships" id="268" r:id="Rd530ed9555a243cf"/>
+    <p:sldId xmlns:r="http://schemas.openxmlformats.org/officeDocument/2006/relationships" id="269" r:id="R59d068e6e01d41a1"/>
+    <p:sldId xmlns:r="http://schemas.openxmlformats.org/officeDocument/2006/relationships" id="270" r:id="Rb2ddd3b153ce4dd5"/>
+    <p:sldId xmlns:r="http://schemas.openxmlformats.org/officeDocument/2006/relationships" id="271" r:id="R2dd6c1c1bac742ff"/>
+    <p:sldId xmlns:r="http://schemas.openxmlformats.org/officeDocument/2006/relationships" id="272" r:id="Rd87ce3020ce541b3"/>
+    <p:sldId xmlns:r="http://schemas.openxmlformats.org/officeDocument/2006/relationships" id="273" r:id="R9931280ff7cf4120"/>
+    <p:sldId xmlns:r="http://schemas.openxmlformats.org/officeDocument/2006/relationships" id="274" r:id="R77006aa81d364a7b"/>
+    <p:sldId xmlns:r="http://schemas.openxmlformats.org/officeDocument/2006/relationships" id="275" r:id="Rdec0cc59391a4254"/>
+    <p:sldId xmlns:r="http://schemas.openxmlformats.org/officeDocument/2006/relationships" id="276" r:id="R7b6e96a563834339"/>
+    <p:sldId xmlns:r="http://schemas.openxmlformats.org/officeDocument/2006/relationships" id="277" r:id="R75a243f062e34c5e"/>
+    <p:sldId xmlns:r="http://schemas.openxmlformats.org/officeDocument/2006/relationships" id="278" r:id="Rde9e68bd5cdd4aac"/>
+    <p:sldId xmlns:r="http://schemas.openxmlformats.org/officeDocument/2006/relationships" id="279" r:id="R25c8d6edeccb4b9e"/>
+    <p:sldId xmlns:r="http://schemas.openxmlformats.org/officeDocument/2006/relationships" id="280" r:id="R991509ab68444afa"/>
   </p:sldIdLst>
   <p:sldSz cx="12191695" cy="6858000"/>
   <p:notesSz cx="6858000" cy="9144000"/>
@@ -486,7 +486,7 @@
           </a:p>
           <a:p xmlns:a="http://schemas.openxmlformats.org/drawingml/2006/main">
             <a:r>
-              <a:t>Build on the preceding week. Explain why this example is needed before running it.</a:t>
+              <a:t>Previous slide: the preceding week.</a:t>
             </a:r>
           </a:p>
           <a:p xmlns:a="http://schemas.openxmlformats.org/drawingml/2006/main">
@@ -511,26 +511,6 @@
           </a:p>
           <a:p xmlns:a="http://schemas.openxmlformats.org/drawingml/2006/main">
             <a:r>
-              <a:t>LECTURER DETAIL</a:t>
-            </a:r>
-          </a:p>
-          <a:p xmlns:a="http://schemas.openxmlformats.org/drawingml/2006/main">
-            <a:r>
-              <a:t>TEACHING PURPOSE</a:t>
-            </a:r>
-          </a:p>
-          <a:p xmlns:a="http://schemas.openxmlformats.org/drawingml/2006/main">
-            <a:r>
-              <a:t>Making the project understandable and runnable</a:t>
-            </a:r>
-          </a:p>
-          <a:p xmlns:a="http://schemas.openxmlformats.org/drawingml/2006/main">
-            <a:r>
-              <a:t/>
-            </a:r>
-          </a:p>
-          <a:p xmlns:a="http://schemas.openxmlformats.org/drawingml/2006/main">
-            <a:r>
               <a:t>LECTURER CUE</a:t>
             </a:r>
           </a:p>
@@ -546,42 +526,42 @@
           </a:p>
           <a:p xmlns:a="http://schemas.openxmlformats.org/drawingml/2006/main">
             <a:r>
+              <a:t>TEACHING MODE</a:t>
+            </a:r>
+          </a:p>
+          <a:p xmlns:a="http://schemas.openxmlformats.org/drawingml/2006/main">
+            <a:r>
+              <a:t>Demonstrate first. Read each new symbol aloud, trace the values and compare the shown output. Learners repeat worked examples individually after class.</a:t>
+            </a:r>
+          </a:p>
+          <a:p xmlns:a="http://schemas.openxmlformats.org/drawingml/2006/main">
+            <a:r>
+              <a:t/>
+            </a:r>
+          </a:p>
+          <a:p xmlns:a="http://schemas.openxmlformats.org/drawingml/2006/main">
+            <a:r>
               <a:t>NEXT</a:t>
             </a:r>
           </a:p>
           <a:p xmlns:a="http://schemas.openxmlformats.org/drawingml/2006/main">
             <a:r>
-              <a:t>Today’s learning. Move on after a learner can explain the current example or required action.</a:t>
-            </a:r>
-          </a:p>
-          <a:p xmlns:a="http://schemas.openxmlformats.org/drawingml/2006/main">
-            <a:r>
-              <a:t/>
-            </a:r>
-          </a:p>
-          <a:p xmlns:a="http://schemas.openxmlformats.org/drawingml/2006/main">
-            <a:r>
-              <a:t>TEACHING MODE</a:t>
-            </a:r>
-          </a:p>
-          <a:p xmlns:a="http://schemas.openxmlformats.org/drawingml/2006/main">
-            <a:r>
-              <a:t>Demonstrate the example directly. Explain each new name, symbol and output. Use the revision example for an individual check after class; no live partner activity is required.</a:t>
-            </a:r>
-          </a:p>
-          <a:p xmlns:a="http://schemas.openxmlformats.org/drawingml/2006/main">
-            <a:r>
-              <a:t/>
-            </a:r>
-          </a:p>
-          <a:p xmlns:a="http://schemas.openxmlformats.org/drawingml/2006/main">
-            <a:r>
-              <a:t>NEXT</a:t>
-            </a:r>
-          </a:p>
-          <a:p xmlns:a="http://schemas.openxmlformats.org/drawingml/2006/main">
-            <a:r>
               <a:t>Today’s learning.</a:t>
+            </a:r>
+          </a:p>
+          <a:p xmlns:a="http://schemas.openxmlformats.org/drawingml/2006/main">
+            <a:r>
+              <a:t/>
+            </a:r>
+          </a:p>
+          <a:p xmlns:a="http://schemas.openxmlformats.org/drawingml/2006/main">
+            <a:r>
+              <a:t>REFERENCES</a:t>
+            </a:r>
+          </a:p>
+          <a:p xmlns:a="http://schemas.openxmlformats.org/drawingml/2006/main">
+            <a:r>
+              <a:t/>
             </a:r>
           </a:p>
         </p:txBody>
@@ -671,7 +651,7 @@
           </a:p>
           <a:p xmlns:a="http://schemas.openxmlformats.org/drawingml/2006/main">
             <a:r>
-              <a:t>Build on A reproducible notebook starts fresh. Explain why this example is needed before running it.</a:t>
+              <a:t>Previous slide: A reproducible notebook starts fresh.</a:t>
             </a:r>
           </a:p>
           <a:p xmlns:a="http://schemas.openxmlformats.org/drawingml/2006/main">
@@ -716,41 +696,6 @@
           </a:p>
           <a:p xmlns:a="http://schemas.openxmlformats.org/drawingml/2006/main">
             <a:r>
-              <a:t>LECTURER DETAIL</a:t>
-            </a:r>
-          </a:p>
-          <a:p xmlns:a="http://schemas.openxmlformats.org/drawingml/2006/main">
-            <a:r>
-              <a:t>TEACHING PURPOSE</a:t>
-            </a:r>
-          </a:p>
-          <a:p xmlns:a="http://schemas.openxmlformats.org/drawingml/2006/main">
-            <a:r>
-              <a:t>Saved outputs can hide missing steps</a:t>
-            </a:r>
-          </a:p>
-          <a:p xmlns:a="http://schemas.openxmlformats.org/drawingml/2006/main">
-            <a:r>
-              <a:t/>
-            </a:r>
-          </a:p>
-          <a:p xmlns:a="http://schemas.openxmlformats.org/drawingml/2006/main">
-            <a:r>
-              <a:t>CONNECT</a:t>
-            </a:r>
-          </a:p>
-          <a:p xmlns:a="http://schemas.openxmlformats.org/drawingml/2006/main">
-            <a:r>
-              <a:t>Build on the preceding slide: A reproducible notebook starts fresh.</a:t>
-            </a:r>
-          </a:p>
-          <a:p xmlns:a="http://schemas.openxmlformats.org/drawingml/2006/main">
-            <a:r>
-              <a:t/>
-            </a:r>
-          </a:p>
-          <a:p xmlns:a="http://schemas.openxmlformats.org/drawingml/2006/main">
-            <a:r>
               <a:t>LECTURER CUE</a:t>
             </a:r>
           </a:p>
@@ -766,42 +711,12 @@
           </a:p>
           <a:p xmlns:a="http://schemas.openxmlformats.org/drawingml/2006/main">
             <a:r>
-              <a:t>EXPLAIN IN ORDINARY WORDS</a:t>
-            </a:r>
-          </a:p>
-          <a:p xmlns:a="http://schemas.openxmlformats.org/drawingml/2006/main">
-            <a:r>
-              <a:t>Missing means not recorded, not automatically zero. Decide why it is missing and document the rule. Fitted fill values must come from training data when evaluating a model.</a:t>
-            </a:r>
-          </a:p>
-          <a:p xmlns:a="http://schemas.openxmlformats.org/drawingml/2006/main">
-            <a:r>
-              <a:t/>
-            </a:r>
-          </a:p>
-          <a:p xmlns:a="http://schemas.openxmlformats.org/drawingml/2006/main">
-            <a:r>
-              <a:t>CHECK AND EXPECTED ANSWER</a:t>
-            </a:r>
-          </a:p>
-          <a:p xmlns:a="http://schemas.openxmlformats.org/drawingml/2006/main">
-            <a:r>
-              <a:t>Is an unrecorded energy reading evidence of zero consumption? No.</a:t>
-            </a:r>
-          </a:p>
-          <a:p xmlns:a="http://schemas.openxmlformats.org/drawingml/2006/main">
-            <a:r>
-              <a:t/>
-            </a:r>
-          </a:p>
-          <a:p xmlns:a="http://schemas.openxmlformats.org/drawingml/2006/main">
-            <a:r>
-              <a:t>IF LEARNERS ARE STUCK</a:t>
-            </a:r>
-          </a:p>
-          <a:p xmlns:a="http://schemas.openxmlformats.org/drawingml/2006/main">
-            <a:r>
-              <a:t>Use three rows: a recorded zero, a recorded positive value and a blank. Explain their different meanings before cleaning.</a:t>
+              <a:t>TEACHING MODE</a:t>
+            </a:r>
+          </a:p>
+          <a:p xmlns:a="http://schemas.openxmlformats.org/drawingml/2006/main">
+            <a:r>
+              <a:t>Demonstrate first. Read each new symbol aloud, trace the values and compare the shown output. Learners repeat worked examples individually after class.</a:t>
             </a:r>
           </a:p>
           <a:p xmlns:a="http://schemas.openxmlformats.org/drawingml/2006/main">
@@ -816,37 +731,22 @@
           </a:p>
           <a:p xmlns:a="http://schemas.openxmlformats.org/drawingml/2006/main">
             <a:r>
-              <a:t>A path names where a file is found. Move on after a learner can explain the current example or required action.</a:t>
-            </a:r>
-          </a:p>
-          <a:p xmlns:a="http://schemas.openxmlformats.org/drawingml/2006/main">
-            <a:r>
-              <a:t/>
-            </a:r>
-          </a:p>
-          <a:p xmlns:a="http://schemas.openxmlformats.org/drawingml/2006/main">
-            <a:r>
-              <a:t>TEACHING MODE</a:t>
-            </a:r>
-          </a:p>
-          <a:p xmlns:a="http://schemas.openxmlformats.org/drawingml/2006/main">
-            <a:r>
-              <a:t>Demonstrate the example directly. Explain each new name, symbol and output. Use the revision example for an individual check after class; no live partner activity is required.</a:t>
-            </a:r>
-          </a:p>
-          <a:p xmlns:a="http://schemas.openxmlformats.org/drawingml/2006/main">
-            <a:r>
-              <a:t/>
-            </a:r>
-          </a:p>
-          <a:p xmlns:a="http://schemas.openxmlformats.org/drawingml/2006/main">
-            <a:r>
-              <a:t>NEXT</a:t>
-            </a:r>
-          </a:p>
-          <a:p xmlns:a="http://schemas.openxmlformats.org/drawingml/2006/main">
-            <a:r>
               <a:t>A path names where a file is found.</a:t>
+            </a:r>
+          </a:p>
+          <a:p xmlns:a="http://schemas.openxmlformats.org/drawingml/2006/main">
+            <a:r>
+              <a:t/>
+            </a:r>
+          </a:p>
+          <a:p xmlns:a="http://schemas.openxmlformats.org/drawingml/2006/main">
+            <a:r>
+              <a:t>REFERENCES</a:t>
+            </a:r>
+          </a:p>
+          <a:p xmlns:a="http://schemas.openxmlformats.org/drawingml/2006/main">
+            <a:r>
+              <a:t/>
             </a:r>
           </a:p>
         </p:txBody>
@@ -936,7 +836,7 @@
           </a:p>
           <a:p xmlns:a="http://schemas.openxmlformats.org/drawingml/2006/main">
             <a:r>
-              <a:t>Build on Saved outputs can hide missing steps. Explain why this example is needed before running it.</a:t>
+              <a:t>Previous slide: Saved outputs can hide missing steps.</a:t>
             </a:r>
           </a:p>
           <a:p xmlns:a="http://schemas.openxmlformats.org/drawingml/2006/main">
@@ -981,41 +881,6 @@
           </a:p>
           <a:p xmlns:a="http://schemas.openxmlformats.org/drawingml/2006/main">
             <a:r>
-              <a:t>LECTURER DETAIL</a:t>
-            </a:r>
-          </a:p>
-          <a:p xmlns:a="http://schemas.openxmlformats.org/drawingml/2006/main">
-            <a:r>
-              <a:t>TEACHING PURPOSE</a:t>
-            </a:r>
-          </a:p>
-          <a:p xmlns:a="http://schemas.openxmlformats.org/drawingml/2006/main">
-            <a:r>
-              <a:t>A path names where a file is found</a:t>
-            </a:r>
-          </a:p>
-          <a:p xmlns:a="http://schemas.openxmlformats.org/drawingml/2006/main">
-            <a:r>
-              <a:t/>
-            </a:r>
-          </a:p>
-          <a:p xmlns:a="http://schemas.openxmlformats.org/drawingml/2006/main">
-            <a:r>
-              <a:t>CONNECT</a:t>
-            </a:r>
-          </a:p>
-          <a:p xmlns:a="http://schemas.openxmlformats.org/drawingml/2006/main">
-            <a:r>
-              <a:t>Build on the preceding slide: Saved outputs can hide missing steps.</a:t>
-            </a:r>
-          </a:p>
-          <a:p xmlns:a="http://schemas.openxmlformats.org/drawingml/2006/main">
-            <a:r>
-              <a:t/>
-            </a:r>
-          </a:p>
-          <a:p xmlns:a="http://schemas.openxmlformats.org/drawingml/2006/main">
-            <a:r>
               <a:t>LECTURER CUE</a:t>
             </a:r>
           </a:p>
@@ -1031,42 +896,12 @@
           </a:p>
           <a:p xmlns:a="http://schemas.openxmlformats.org/drawingml/2006/main">
             <a:r>
-              <a:t>EXPLAIN IN ORDINARY WORDS</a:t>
-            </a:r>
-          </a:p>
-          <a:p xmlns:a="http://schemas.openxmlformats.org/drawingml/2006/main">
-            <a:r>
-              <a:t>A CSV is a text table. The header supplies column names. With csv.DictReader, values start as text, even if they look like numbers. A path tells Python where the file is.</a:t>
-            </a:r>
-          </a:p>
-          <a:p xmlns:a="http://schemas.openxmlformats.org/drawingml/2006/main">
-            <a:r>
-              <a:t/>
-            </a:r>
-          </a:p>
-          <a:p xmlns:a="http://schemas.openxmlformats.org/drawingml/2006/main">
-            <a:r>
-              <a:t>CHECK AND EXPECTED ANSWER</a:t>
-            </a:r>
-          </a:p>
-          <a:p xmlns:a="http://schemas.openxmlformats.org/drawingml/2006/main">
-            <a:r>
-              <a:t>Can "2.5" from csv.DictReader be added as a number without conversion? No; convert valid numeric text first.</a:t>
-            </a:r>
-          </a:p>
-          <a:p xmlns:a="http://schemas.openxmlformats.org/drawingml/2006/main">
-            <a:r>
-              <a:t/>
-            </a:r>
-          </a:p>
-          <a:p xmlns:a="http://schemas.openxmlformats.org/drawingml/2006/main">
-            <a:r>
-              <a:t>IF LEARNERS ARE STUCK</a:t>
-            </a:r>
-          </a:p>
-          <a:p xmlns:a="http://schemas.openxmlformats.org/drawingml/2006/main">
-            <a:r>
-              <a:t>Show the file in the runtime folder and compare its exact filename, case and column headers. Upload data again after a fresh Colab runtime.</a:t>
+              <a:t>TEACHING MODE</a:t>
+            </a:r>
+          </a:p>
+          <a:p xmlns:a="http://schemas.openxmlformats.org/drawingml/2006/main">
+            <a:r>
+              <a:t>Demonstrate first. Read each new symbol aloud, trace the values and compare the shown output. Learners repeat worked examples individually after class.</a:t>
             </a:r>
           </a:p>
           <a:p xmlns:a="http://schemas.openxmlformats.org/drawingml/2006/main">
@@ -1081,37 +916,22 @@
           </a:p>
           <a:p xmlns:a="http://schemas.openxmlformats.org/drawingml/2006/main">
             <a:r>
-              <a:t>Read the path example. Move on after a learner can explain the current example or required action.</a:t>
-            </a:r>
-          </a:p>
-          <a:p xmlns:a="http://schemas.openxmlformats.org/drawingml/2006/main">
-            <a:r>
-              <a:t/>
-            </a:r>
-          </a:p>
-          <a:p xmlns:a="http://schemas.openxmlformats.org/drawingml/2006/main">
-            <a:r>
-              <a:t>TEACHING MODE</a:t>
-            </a:r>
-          </a:p>
-          <a:p xmlns:a="http://schemas.openxmlformats.org/drawingml/2006/main">
-            <a:r>
-              <a:t>Demonstrate the example directly. Explain each new name, symbol and output. Use the revision example for an individual check after class; no live partner activity is required.</a:t>
-            </a:r>
-          </a:p>
-          <a:p xmlns:a="http://schemas.openxmlformats.org/drawingml/2006/main">
-            <a:r>
-              <a:t/>
-            </a:r>
-          </a:p>
-          <a:p xmlns:a="http://schemas.openxmlformats.org/drawingml/2006/main">
-            <a:r>
-              <a:t>NEXT</a:t>
-            </a:r>
-          </a:p>
-          <a:p xmlns:a="http://schemas.openxmlformats.org/drawingml/2006/main">
-            <a:r>
               <a:t>Read the path example.</a:t>
+            </a:r>
+          </a:p>
+          <a:p xmlns:a="http://schemas.openxmlformats.org/drawingml/2006/main">
+            <a:r>
+              <a:t/>
+            </a:r>
+          </a:p>
+          <a:p xmlns:a="http://schemas.openxmlformats.org/drawingml/2006/main">
+            <a:r>
+              <a:t>REFERENCES</a:t>
+            </a:r>
+          </a:p>
+          <a:p xmlns:a="http://schemas.openxmlformats.org/drawingml/2006/main">
+            <a:r>
+              <a:t/>
             </a:r>
           </a:p>
         </p:txBody>
@@ -1201,7 +1021,7 @@
           </a:p>
           <a:p xmlns:a="http://schemas.openxmlformats.org/drawingml/2006/main">
             <a:r>
-              <a:t>Build on A path names where a file is found. Explain why this example is needed before running it.</a:t>
+              <a:t>Previous slide: A path names where a file is found.</a:t>
             </a:r>
           </a:p>
           <a:p xmlns:a="http://schemas.openxmlformats.org/drawingml/2006/main">
@@ -1221,6 +1041,11 @@
           </a:p>
           <a:p xmlns:a="http://schemas.openxmlformats.org/drawingml/2006/main">
             <a:r>
+              <a:t/>
+            </a:r>
+          </a:p>
+          <a:p xmlns:a="http://schemas.openxmlformats.org/drawingml/2006/main">
+            <a:r>
               <a:t>name: The .name property gives the last folder component as text. It depends on your runtime. A different folder name is expected on another computer.</a:t>
             </a:r>
           </a:p>
@@ -1231,97 +1056,27 @@
           </a:p>
           <a:p xmlns:a="http://schemas.openxmlformats.org/drawingml/2006/main">
             <a:r>
-              <a:t>LECTURER DETAIL</a:t>
-            </a:r>
-          </a:p>
-          <a:p xmlns:a="http://schemas.openxmlformats.org/drawingml/2006/main">
-            <a:r>
-              <a:t>TEACHING PURPOSE</a:t>
-            </a:r>
-          </a:p>
-          <a:p xmlns:a="http://schemas.openxmlformats.org/drawingml/2006/main">
-            <a:r>
-              <a:t>Read the path example</a:t>
-            </a:r>
-          </a:p>
-          <a:p xmlns:a="http://schemas.openxmlformats.org/drawingml/2006/main">
-            <a:r>
-              <a:t/>
-            </a:r>
-          </a:p>
-          <a:p xmlns:a="http://schemas.openxmlformats.org/drawingml/2006/main">
-            <a:r>
-              <a:t>CONNECT</a:t>
-            </a:r>
-          </a:p>
-          <a:p xmlns:a="http://schemas.openxmlformats.org/drawingml/2006/main">
-            <a:r>
-              <a:t>Build on the preceding slide: A path names where a file is found.</a:t>
-            </a:r>
-          </a:p>
-          <a:p xmlns:a="http://schemas.openxmlformats.org/drawingml/2006/main">
-            <a:r>
-              <a:t/>
-            </a:r>
-          </a:p>
-          <a:p xmlns:a="http://schemas.openxmlformats.org/drawingml/2006/main">
-            <a:r>
-              <a:t>EXPLAIN IN ORDINARY WORDS</a:t>
-            </a:r>
-          </a:p>
-          <a:p xmlns:a="http://schemas.openxmlformats.org/drawingml/2006/main">
-            <a:r>
-              <a:t>A function is a named set of instructions. def defines it; a call runs it with inputs. Parameters are input names, arguments are supplied values, and return sends the result back.</a:t>
-            </a:r>
-          </a:p>
-          <a:p xmlns:a="http://schemas.openxmlformats.org/drawingml/2006/main">
-            <a:r>
-              <a:t/>
-            </a:r>
-          </a:p>
-          <a:p xmlns:a="http://schemas.openxmlformats.org/drawingml/2006/main">
-            <a:r>
-              <a:t>CHECK AND EXPECTED ANSWER</a:t>
-            </a:r>
-          </a:p>
-          <a:p xmlns:a="http://schemas.openxmlformats.org/drawingml/2006/main">
-            <a:r>
-              <a:t>Does print(8) return the number 8 to the caller? No; it displays 8 and returns None. A function needing a numeric result should return it.</a:t>
-            </a:r>
-          </a:p>
-          <a:p xmlns:a="http://schemas.openxmlformats.org/drawingml/2006/main">
-            <a:r>
-              <a:t/>
-            </a:r>
-          </a:p>
-          <a:p xmlns:a="http://schemas.openxmlformats.org/drawingml/2006/main">
-            <a:r>
-              <a:t>IF LEARNERS ARE STUCK</a:t>
-            </a:r>
-          </a:p>
-          <a:p xmlns:a="http://schemas.openxmlformats.org/drawingml/2006/main">
-            <a:r>
-              <a:t>Trace one call: bind input names, run the indented body, reach return, then put the returned result back into the calling expression.</a:t>
-            </a:r>
-          </a:p>
-          <a:p xmlns:a="http://schemas.openxmlformats.org/drawingml/2006/main">
-            <a:r>
-              <a:t/>
-            </a:r>
-          </a:p>
-          <a:p xmlns:a="http://schemas.openxmlformats.org/drawingml/2006/main">
-            <a:r>
-              <a:t>POINT TO THE DEFINITION</a:t>
-            </a:r>
-          </a:p>
-          <a:p xmlns:a="http://schemas.openxmlformats.org/drawingml/2006/main">
-            <a:r>
-              <a:t>Path and cwd: Path is a tool imported from Python’s pathlib module. Path.cwd() returns the folder where Python is currently running.</a:t>
-            </a:r>
-          </a:p>
-          <a:p xmlns:a="http://schemas.openxmlformats.org/drawingml/2006/main">
-            <a:r>
-              <a:t>name: The .name property gives the last folder component as text. It depends on your runtime. A different folder name is expected on another computer.</a:t>
+              <a:t>LECTURER CUE</a:t>
+            </a:r>
+          </a:p>
+          <a:p xmlns:a="http://schemas.openxmlformats.org/drawingml/2006/main">
+            <a:r>
+              <a:t>Explain the definitions before running or tracing the example. Point to the line or table row that produces each result.</a:t>
+            </a:r>
+          </a:p>
+          <a:p xmlns:a="http://schemas.openxmlformats.org/drawingml/2006/main">
+            <a:r>
+              <a:t/>
+            </a:r>
+          </a:p>
+          <a:p xmlns:a="http://schemas.openxmlformats.org/drawingml/2006/main">
+            <a:r>
+              <a:t>TEACHING MODE</a:t>
+            </a:r>
+          </a:p>
+          <a:p xmlns:a="http://schemas.openxmlformats.org/drawingml/2006/main">
+            <a:r>
+              <a:t>Demonstrate first. Read each new symbol aloud, trace the values and compare the shown output. Learners repeat worked examples individually after class.</a:t>
             </a:r>
           </a:p>
           <a:p xmlns:a="http://schemas.openxmlformats.org/drawingml/2006/main">
@@ -1336,37 +1091,22 @@
           </a:p>
           <a:p xmlns:a="http://schemas.openxmlformats.org/drawingml/2006/main">
             <a:r>
-              <a:t>Worked example. Move on after a learner can explain the current example or required action.</a:t>
-            </a:r>
-          </a:p>
-          <a:p xmlns:a="http://schemas.openxmlformats.org/drawingml/2006/main">
-            <a:r>
-              <a:t/>
-            </a:r>
-          </a:p>
-          <a:p xmlns:a="http://schemas.openxmlformats.org/drawingml/2006/main">
-            <a:r>
-              <a:t>TEACHING MODE</a:t>
-            </a:r>
-          </a:p>
-          <a:p xmlns:a="http://schemas.openxmlformats.org/drawingml/2006/main">
-            <a:r>
-              <a:t>Demonstrate the example directly. Explain each new name, symbol and output. Use the revision example for an individual check after class; no live partner activity is required.</a:t>
-            </a:r>
-          </a:p>
-          <a:p xmlns:a="http://schemas.openxmlformats.org/drawingml/2006/main">
-            <a:r>
-              <a:t/>
-            </a:r>
-          </a:p>
-          <a:p xmlns:a="http://schemas.openxmlformats.org/drawingml/2006/main">
-            <a:r>
-              <a:t>NEXT</a:t>
-            </a:r>
-          </a:p>
-          <a:p xmlns:a="http://schemas.openxmlformats.org/drawingml/2006/main">
-            <a:r>
               <a:t>Worked example.</a:t>
+            </a:r>
+          </a:p>
+          <a:p xmlns:a="http://schemas.openxmlformats.org/drawingml/2006/main">
+            <a:r>
+              <a:t/>
+            </a:r>
+          </a:p>
+          <a:p xmlns:a="http://schemas.openxmlformats.org/drawingml/2006/main">
+            <a:r>
+              <a:t>REFERENCES</a:t>
+            </a:r>
+          </a:p>
+          <a:p xmlns:a="http://schemas.openxmlformats.org/drawingml/2006/main">
+            <a:r>
+              <a:t/>
             </a:r>
           </a:p>
         </p:txBody>
@@ -1456,7 +1196,7 @@
           </a:p>
           <a:p xmlns:a="http://schemas.openxmlformats.org/drawingml/2006/main">
             <a:r>
-              <a:t>Build on Read the path example. Explain why this example is needed before running it.</a:t>
+              <a:t>Previous slide: Read the path example.</a:t>
             </a:r>
           </a:p>
           <a:p xmlns:a="http://schemas.openxmlformats.org/drawingml/2006/main">
@@ -1471,6 +1211,51 @@
           </a:p>
           <a:p xmlns:a="http://schemas.openxmlformats.org/drawingml/2006/main">
             <a:r>
+              <a:t>Read the code in this order:</a:t>
+            </a:r>
+          </a:p>
+          <a:p xmlns:a="http://schemas.openxmlformats.org/drawingml/2006/main">
+            <a:r>
+              <a:t>from pathlib import Path</a:t>
+            </a:r>
+          </a:p>
+          <a:p xmlns:a="http://schemas.openxmlformats.org/drawingml/2006/main">
+            <a:r>
+              <a:t>print(Path.cwd().name)</a:t>
+            </a:r>
+          </a:p>
+          <a:p xmlns:a="http://schemas.openxmlformats.org/drawingml/2006/main">
+            <a:r>
+              <a:t># The name depends on the folder where Python is running.</a:t>
+            </a:r>
+          </a:p>
+          <a:p xmlns:a="http://schemas.openxmlformats.org/drawingml/2006/main">
+            <a:r>
+              <a:t/>
+            </a:r>
+          </a:p>
+          <a:p xmlns:a="http://schemas.openxmlformats.org/drawingml/2006/main">
+            <a:r>
+              <a:t>import loads a library. from selects a tool from it.</a:t>
+            </a:r>
+          </a:p>
+          <a:p xmlns:a="http://schemas.openxmlformats.org/drawingml/2006/main">
+            <a:r>
+              <a:t/>
+            </a:r>
+          </a:p>
+          <a:p xmlns:a="http://schemas.openxmlformats.org/drawingml/2006/main">
+            <a:r>
+              <a:t>print displays a value below the cell.</a:t>
+            </a:r>
+          </a:p>
+          <a:p xmlns:a="http://schemas.openxmlformats.org/drawingml/2006/main">
+            <a:r>
+              <a:t/>
+            </a:r>
+          </a:p>
+          <a:p xmlns:a="http://schemas.openxmlformats.org/drawingml/2006/main">
+            <a:r>
               <a:t>Read top to bottom. Run the complete example in the matching practice notebook.</a:t>
             </a:r>
           </a:p>
@@ -1481,41 +1266,6 @@
           </a:p>
           <a:p xmlns:a="http://schemas.openxmlformats.org/drawingml/2006/main">
             <a:r>
-              <a:t>LECTURER DETAIL</a:t>
-            </a:r>
-          </a:p>
-          <a:p xmlns:a="http://schemas.openxmlformats.org/drawingml/2006/main">
-            <a:r>
-              <a:t>TEACHING PURPOSE</a:t>
-            </a:r>
-          </a:p>
-          <a:p xmlns:a="http://schemas.openxmlformats.org/drawingml/2006/main">
-            <a:r>
-              <a:t>Worked example</a:t>
-            </a:r>
-          </a:p>
-          <a:p xmlns:a="http://schemas.openxmlformats.org/drawingml/2006/main">
-            <a:r>
-              <a:t/>
-            </a:r>
-          </a:p>
-          <a:p xmlns:a="http://schemas.openxmlformats.org/drawingml/2006/main">
-            <a:r>
-              <a:t>CONNECT</a:t>
-            </a:r>
-          </a:p>
-          <a:p xmlns:a="http://schemas.openxmlformats.org/drawingml/2006/main">
-            <a:r>
-              <a:t>Build on the preceding slide: Read the path example.</a:t>
-            </a:r>
-          </a:p>
-          <a:p xmlns:a="http://schemas.openxmlformats.org/drawingml/2006/main">
-            <a:r>
-              <a:t/>
-            </a:r>
-          </a:p>
-          <a:p xmlns:a="http://schemas.openxmlformats.org/drawingml/2006/main">
-            <a:r>
               <a:t>LECTURER CUE</a:t>
             </a:r>
           </a:p>
@@ -1556,22 +1306,12 @@
           </a:p>
           <a:p xmlns:a="http://schemas.openxmlformats.org/drawingml/2006/main">
             <a:r>
-              <a:t>WALK THROUGH THIS CODE</a:t>
-            </a:r>
-          </a:p>
-          <a:p xmlns:a="http://schemas.openxmlformats.org/drawingml/2006/main">
-            <a:r>
-              <a:t>import loads a library. from selects a tool from it.</a:t>
-            </a:r>
-          </a:p>
-          <a:p xmlns:a="http://schemas.openxmlformats.org/drawingml/2006/main">
-            <a:r>
-              <a:t>print displays a value below the cell.</a:t>
-            </a:r>
-          </a:p>
-          <a:p xmlns:a="http://schemas.openxmlformats.org/drawingml/2006/main">
-            <a:r>
-              <a:t>Read the displayed lines in order, with the preceding code block if this example continues. Ask for the next value before running. The complete matching example is in guided_practice.ipynb; do not type a fragment into a new empty notebook.</a:t>
+              <a:t>TEACHING MODE</a:t>
+            </a:r>
+          </a:p>
+          <a:p xmlns:a="http://schemas.openxmlformats.org/drawingml/2006/main">
+            <a:r>
+              <a:t>Demonstrate first. Read each new symbol aloud, trace the values and compare the shown output. Learners repeat worked examples individually after class.</a:t>
             </a:r>
           </a:p>
           <a:p xmlns:a="http://schemas.openxmlformats.org/drawingml/2006/main">
@@ -1586,37 +1326,22 @@
           </a:p>
           <a:p xmlns:a="http://schemas.openxmlformats.org/drawingml/2006/main">
             <a:r>
-              <a:t>Expected output. Move on after a learner can explain the current example or required action.</a:t>
-            </a:r>
-          </a:p>
-          <a:p xmlns:a="http://schemas.openxmlformats.org/drawingml/2006/main">
-            <a:r>
-              <a:t/>
-            </a:r>
-          </a:p>
-          <a:p xmlns:a="http://schemas.openxmlformats.org/drawingml/2006/main">
-            <a:r>
-              <a:t>TEACHING MODE</a:t>
-            </a:r>
-          </a:p>
-          <a:p xmlns:a="http://schemas.openxmlformats.org/drawingml/2006/main">
-            <a:r>
-              <a:t>Demonstrate the example directly. Explain each new name, symbol and output. Use the revision example for an individual check after class; no live partner activity is required.</a:t>
-            </a:r>
-          </a:p>
-          <a:p xmlns:a="http://schemas.openxmlformats.org/drawingml/2006/main">
-            <a:r>
-              <a:t/>
-            </a:r>
-          </a:p>
-          <a:p xmlns:a="http://schemas.openxmlformats.org/drawingml/2006/main">
-            <a:r>
-              <a:t>NEXT</a:t>
-            </a:r>
-          </a:p>
-          <a:p xmlns:a="http://schemas.openxmlformats.org/drawingml/2006/main">
-            <a:r>
               <a:t>Expected output.</a:t>
+            </a:r>
+          </a:p>
+          <a:p xmlns:a="http://schemas.openxmlformats.org/drawingml/2006/main">
+            <a:r>
+              <a:t/>
+            </a:r>
+          </a:p>
+          <a:p xmlns:a="http://schemas.openxmlformats.org/drawingml/2006/main">
+            <a:r>
+              <a:t>REFERENCES</a:t>
+            </a:r>
+          </a:p>
+          <a:p xmlns:a="http://schemas.openxmlformats.org/drawingml/2006/main">
+            <a:r>
+              <a:t/>
             </a:r>
           </a:p>
         </p:txBody>
@@ -1706,7 +1431,7 @@
           </a:p>
           <a:p xmlns:a="http://schemas.openxmlformats.org/drawingml/2006/main">
             <a:r>
-              <a:t>Build on Project handover in Python. Explain why this example is needed before running it.</a:t>
+              <a:t>Previous slide: Project handover in Python.</a:t>
             </a:r>
           </a:p>
           <a:p xmlns:a="http://schemas.openxmlformats.org/drawingml/2006/main">
@@ -1731,41 +1456,6 @@
           </a:p>
           <a:p xmlns:a="http://schemas.openxmlformats.org/drawingml/2006/main">
             <a:r>
-              <a:t>LECTURER DETAIL</a:t>
-            </a:r>
-          </a:p>
-          <a:p xmlns:a="http://schemas.openxmlformats.org/drawingml/2006/main">
-            <a:r>
-              <a:t>TEACHING PURPOSE</a:t>
-            </a:r>
-          </a:p>
-          <a:p xmlns:a="http://schemas.openxmlformats.org/drawingml/2006/main">
-            <a:r>
-              <a:t>Expected output</a:t>
-            </a:r>
-          </a:p>
-          <a:p xmlns:a="http://schemas.openxmlformats.org/drawingml/2006/main">
-            <a:r>
-              <a:t/>
-            </a:r>
-          </a:p>
-          <a:p xmlns:a="http://schemas.openxmlformats.org/drawingml/2006/main">
-            <a:r>
-              <a:t>CONNECT</a:t>
-            </a:r>
-          </a:p>
-          <a:p xmlns:a="http://schemas.openxmlformats.org/drawingml/2006/main">
-            <a:r>
-              <a:t>Build on the preceding slide: Worked example.</a:t>
-            </a:r>
-          </a:p>
-          <a:p xmlns:a="http://schemas.openxmlformats.org/drawingml/2006/main">
-            <a:r>
-              <a:t/>
-            </a:r>
-          </a:p>
-          <a:p xmlns:a="http://schemas.openxmlformats.org/drawingml/2006/main">
-            <a:r>
               <a:t>LECTURER CUE</a:t>
             </a:r>
           </a:p>
@@ -1781,42 +1471,42 @@
           </a:p>
           <a:p xmlns:a="http://schemas.openxmlformats.org/drawingml/2006/main">
             <a:r>
+              <a:t>TEACHING MODE</a:t>
+            </a:r>
+          </a:p>
+          <a:p xmlns:a="http://schemas.openxmlformats.org/drawingml/2006/main">
+            <a:r>
+              <a:t>Demonstrate first. Read each new symbol aloud, trace the values and compare the shown output. Learners repeat worked examples individually after class.</a:t>
+            </a:r>
+          </a:p>
+          <a:p xmlns:a="http://schemas.openxmlformats.org/drawingml/2006/main">
+            <a:r>
+              <a:t/>
+            </a:r>
+          </a:p>
+          <a:p xmlns:a="http://schemas.openxmlformats.org/drawingml/2006/main">
+            <a:r>
               <a:t>NEXT</a:t>
             </a:r>
           </a:p>
           <a:p xmlns:a="http://schemas.openxmlformats.org/drawingml/2006/main">
             <a:r>
-              <a:t>Tell another person what the project needs. Move on after a learner can explain the current example or required action.</a:t>
-            </a:r>
-          </a:p>
-          <a:p xmlns:a="http://schemas.openxmlformats.org/drawingml/2006/main">
-            <a:r>
-              <a:t/>
-            </a:r>
-          </a:p>
-          <a:p xmlns:a="http://schemas.openxmlformats.org/drawingml/2006/main">
-            <a:r>
-              <a:t>TEACHING MODE</a:t>
-            </a:r>
-          </a:p>
-          <a:p xmlns:a="http://schemas.openxmlformats.org/drawingml/2006/main">
-            <a:r>
-              <a:t>Demonstrate the example directly. Explain each new name, symbol and output. Use the revision example for an individual check after class; no live partner activity is required.</a:t>
-            </a:r>
-          </a:p>
-          <a:p xmlns:a="http://schemas.openxmlformats.org/drawingml/2006/main">
-            <a:r>
-              <a:t/>
-            </a:r>
-          </a:p>
-          <a:p xmlns:a="http://schemas.openxmlformats.org/drawingml/2006/main">
-            <a:r>
-              <a:t>NEXT</a:t>
-            </a:r>
-          </a:p>
-          <a:p xmlns:a="http://schemas.openxmlformats.org/drawingml/2006/main">
-            <a:r>
               <a:t>Tell another person what the project needs.</a:t>
+            </a:r>
+          </a:p>
+          <a:p xmlns:a="http://schemas.openxmlformats.org/drawingml/2006/main">
+            <a:r>
+              <a:t/>
+            </a:r>
+          </a:p>
+          <a:p xmlns:a="http://schemas.openxmlformats.org/drawingml/2006/main">
+            <a:r>
+              <a:t>REFERENCES</a:t>
+            </a:r>
+          </a:p>
+          <a:p xmlns:a="http://schemas.openxmlformats.org/drawingml/2006/main">
+            <a:r>
+              <a:t/>
             </a:r>
           </a:p>
         </p:txBody>
@@ -1906,7 +1596,7 @@
           </a:p>
           <a:p xmlns:a="http://schemas.openxmlformats.org/drawingml/2006/main">
             <a:r>
-              <a:t>Build on Project handover results. Explain why this example is needed before running it.</a:t>
+              <a:t>Previous slide: Project handover results.</a:t>
             </a:r>
           </a:p>
           <a:p xmlns:a="http://schemas.openxmlformats.org/drawingml/2006/main">
@@ -1926,6 +1616,11 @@
           </a:p>
           <a:p xmlns:a="http://schemas.openxmlformats.org/drawingml/2006/main">
             <a:r>
+              <a:t/>
+            </a:r>
+          </a:p>
+          <a:p xmlns:a="http://schemas.openxmlformats.org/drawingml/2006/main">
+            <a:r>
               <a:t>Data source, permission and seed: Name the data source and any licence or permission for reuse. Record random seeds used in modelling. A seed supports repeatability; it does not repair data leakage.</a:t>
             </a:r>
           </a:p>
@@ -1936,97 +1631,27 @@
           </a:p>
           <a:p xmlns:a="http://schemas.openxmlformats.org/drawingml/2006/main">
             <a:r>
-              <a:t>LECTURER DETAIL</a:t>
-            </a:r>
-          </a:p>
-          <a:p xmlns:a="http://schemas.openxmlformats.org/drawingml/2006/main">
-            <a:r>
-              <a:t>TEACHING PURPOSE</a:t>
-            </a:r>
-          </a:p>
-          <a:p xmlns:a="http://schemas.openxmlformats.org/drawingml/2006/main">
-            <a:r>
-              <a:t>Tell another person what the project needs</a:t>
-            </a:r>
-          </a:p>
-          <a:p xmlns:a="http://schemas.openxmlformats.org/drawingml/2006/main">
-            <a:r>
-              <a:t/>
-            </a:r>
-          </a:p>
-          <a:p xmlns:a="http://schemas.openxmlformats.org/drawingml/2006/main">
-            <a:r>
-              <a:t>CONNECT</a:t>
-            </a:r>
-          </a:p>
-          <a:p xmlns:a="http://schemas.openxmlformats.org/drawingml/2006/main">
-            <a:r>
-              <a:t>Build on the preceding slide: Expected output.</a:t>
-            </a:r>
-          </a:p>
-          <a:p xmlns:a="http://schemas.openxmlformats.org/drawingml/2006/main">
-            <a:r>
-              <a:t/>
-            </a:r>
-          </a:p>
-          <a:p xmlns:a="http://schemas.openxmlformats.org/drawingml/2006/main">
-            <a:r>
-              <a:t>EXPLAIN IN ORDINARY WORDS</a:t>
-            </a:r>
-          </a:p>
-          <a:p xmlns:a="http://schemas.openxmlformats.org/drawingml/2006/main">
-            <a:r>
-              <a:t>Training fits rules. Validation helps choose among rules. The final test estimates performance after choices are fixed. Information that would be unavailable at the real prediction time must stay out of the inputs.</a:t>
-            </a:r>
-          </a:p>
-          <a:p xmlns:a="http://schemas.openxmlformats.org/drawingml/2006/main">
-            <a:r>
-              <a:t/>
-            </a:r>
-          </a:p>
-          <a:p xmlns:a="http://schemas.openxmlformats.org/drawingml/2006/main">
-            <a:r>
-              <a:t>CHECK AND EXPECTED ANSWER</a:t>
-            </a:r>
-          </a:p>
-          <a:p xmlns:a="http://schemas.openxmlformats.org/drawingml/2006/main">
-            <a:r>
-              <a:t>May two readings of the same machine appear on both sides when evaluating new machines? No; split by machine. For forecasting, train on the past and evaluate later time.</a:t>
-            </a:r>
-          </a:p>
-          <a:p xmlns:a="http://schemas.openxmlformats.org/drawingml/2006/main">
-            <a:r>
-              <a:t/>
-            </a:r>
-          </a:p>
-          <a:p xmlns:a="http://schemas.openxmlformats.org/drawingml/2006/main">
-            <a:r>
-              <a:t>IF LEARNERS ARE STUCK</a:t>
-            </a:r>
-          </a:p>
-          <a:p xmlns:a="http://schemas.openxmlformats.org/drawingml/2006/main">
-            <a:r>
-              <a:t>Use three envelopes. Keep the final-test envelope closed while selecting features or settings.</a:t>
-            </a:r>
-          </a:p>
-          <a:p xmlns:a="http://schemas.openxmlformats.org/drawingml/2006/main">
-            <a:r>
-              <a:t/>
-            </a:r>
-          </a:p>
-          <a:p xmlns:a="http://schemas.openxmlformats.org/drawingml/2006/main">
-            <a:r>
-              <a:t>POINT TO THE DEFINITION</a:t>
-            </a:r>
-          </a:p>
-          <a:p xmlns:a="http://schemas.openxmlformats.org/drawingml/2006/main">
-            <a:r>
-              <a:t>requirements.txt and versions: This text file lists required Python packages and their versions. Record the versions used in the working environment; test them with the supplied run instructions.</a:t>
-            </a:r>
-          </a:p>
-          <a:p xmlns:a="http://schemas.openxmlformats.org/drawingml/2006/main">
-            <a:r>
-              <a:t>Data source, permission and seed: Name the data source and any licence or permission for reuse. Record random seeds used in modelling. A seed supports repeatability; it does not repair data leakage.</a:t>
+              <a:t>LECTURER CUE</a:t>
+            </a:r>
+          </a:p>
+          <a:p xmlns:a="http://schemas.openxmlformats.org/drawingml/2006/main">
+            <a:r>
+              <a:t>Explain the definitions before running or tracing the example. Point to the line or table row that produces each result.</a:t>
+            </a:r>
+          </a:p>
+          <a:p xmlns:a="http://schemas.openxmlformats.org/drawingml/2006/main">
+            <a:r>
+              <a:t/>
+            </a:r>
+          </a:p>
+          <a:p xmlns:a="http://schemas.openxmlformats.org/drawingml/2006/main">
+            <a:r>
+              <a:t>TEACHING MODE</a:t>
+            </a:r>
+          </a:p>
+          <a:p xmlns:a="http://schemas.openxmlformats.org/drawingml/2006/main">
+            <a:r>
+              <a:t>Demonstrate first. Read each new symbol aloud, trace the values and compare the shown output. Learners repeat worked examples individually after class.</a:t>
             </a:r>
           </a:p>
           <a:p xmlns:a="http://schemas.openxmlformats.org/drawingml/2006/main">
@@ -2041,37 +1666,22 @@
           </a:p>
           <a:p xmlns:a="http://schemas.openxmlformats.org/drawingml/2006/main">
             <a:r>
-              <a:t>Words we will use. Move on after a learner can explain the current example or required action.</a:t>
-            </a:r>
-          </a:p>
-          <a:p xmlns:a="http://schemas.openxmlformats.org/drawingml/2006/main">
-            <a:r>
-              <a:t/>
-            </a:r>
-          </a:p>
-          <a:p xmlns:a="http://schemas.openxmlformats.org/drawingml/2006/main">
-            <a:r>
-              <a:t>TEACHING MODE</a:t>
-            </a:r>
-          </a:p>
-          <a:p xmlns:a="http://schemas.openxmlformats.org/drawingml/2006/main">
-            <a:r>
-              <a:t>Demonstrate the example directly. Explain each new name, symbol and output. Use the revision example for an individual check after class; no live partner activity is required.</a:t>
-            </a:r>
-          </a:p>
-          <a:p xmlns:a="http://schemas.openxmlformats.org/drawingml/2006/main">
-            <a:r>
-              <a:t/>
-            </a:r>
-          </a:p>
-          <a:p xmlns:a="http://schemas.openxmlformats.org/drawingml/2006/main">
-            <a:r>
-              <a:t>NEXT</a:t>
-            </a:r>
-          </a:p>
-          <a:p xmlns:a="http://schemas.openxmlformats.org/drawingml/2006/main">
-            <a:r>
               <a:t>Run checks and contribution evidence.</a:t>
+            </a:r>
+          </a:p>
+          <a:p xmlns:a="http://schemas.openxmlformats.org/drawingml/2006/main">
+            <a:r>
+              <a:t/>
+            </a:r>
+          </a:p>
+          <a:p xmlns:a="http://schemas.openxmlformats.org/drawingml/2006/main">
+            <a:r>
+              <a:t>REFERENCES</a:t>
+            </a:r>
+          </a:p>
+          <a:p xmlns:a="http://schemas.openxmlformats.org/drawingml/2006/main">
+            <a:r>
+              <a:t/>
             </a:r>
           </a:p>
         </p:txBody>
@@ -2161,7 +1771,7 @@
           </a:p>
           <a:p xmlns:a="http://schemas.openxmlformats.org/drawingml/2006/main">
             <a:r>
-              <a:t>Build on Tell another person what the project needs. Explain why this example is needed before running it.</a:t>
+              <a:t>Previous slide: Tell another person what the project needs.</a:t>
             </a:r>
           </a:p>
           <a:p xmlns:a="http://schemas.openxmlformats.org/drawingml/2006/main">
@@ -2181,6 +1791,11 @@
           </a:p>
           <a:p xmlns:a="http://schemas.openxmlformats.org/drawingml/2006/main">
             <a:r>
+              <a:t/>
+            </a:r>
+          </a:p>
+          <a:p xmlns:a="http://schemas.openxmlformats.org/drawingml/2006/main">
+            <a:r>
               <a:t>Contribution evidence: A record of each person’s work, tied to files, commits or explanations. It does not require making a private repository public.</a:t>
             </a:r>
           </a:p>
@@ -2191,92 +1806,27 @@
           </a:p>
           <a:p xmlns:a="http://schemas.openxmlformats.org/drawingml/2006/main">
             <a:r>
-              <a:t>LECTURER DETAIL</a:t>
-            </a:r>
-          </a:p>
-          <a:p xmlns:a="http://schemas.openxmlformats.org/drawingml/2006/main">
-            <a:r>
-              <a:t>TEACHING PURPOSE</a:t>
-            </a:r>
-          </a:p>
-          <a:p xmlns:a="http://schemas.openxmlformats.org/drawingml/2006/main">
-            <a:r>
-              <a:t>Words we will use</a:t>
-            </a:r>
-          </a:p>
-          <a:p xmlns:a="http://schemas.openxmlformats.org/drawingml/2006/main">
-            <a:r>
-              <a:t/>
-            </a:r>
-          </a:p>
-          <a:p xmlns:a="http://schemas.openxmlformats.org/drawingml/2006/main">
-            <a:r>
-              <a:t>CONNECT</a:t>
-            </a:r>
-          </a:p>
-          <a:p xmlns:a="http://schemas.openxmlformats.org/drawingml/2006/main">
-            <a:r>
-              <a:t>Build on the preceding slide: Tell another person what the project needs.</a:t>
-            </a:r>
-          </a:p>
-          <a:p xmlns:a="http://schemas.openxmlformats.org/drawingml/2006/main">
-            <a:r>
-              <a:t/>
-            </a:r>
-          </a:p>
-          <a:p xmlns:a="http://schemas.openxmlformats.org/drawingml/2006/main">
-            <a:r>
-              <a:t>EXPLAIN IN ORDINARY WORDS</a:t>
-            </a:r>
-          </a:p>
-          <a:p xmlns:a="http://schemas.openxmlformats.org/drawingml/2006/main">
-            <a:r>
-              <a:t>A repository is the project folder and recorded history. A commit records a chosen change; uploading or pushing shares it. A README tells someone else how to run the work.</a:t>
-            </a:r>
-          </a:p>
-          <a:p xmlns:a="http://schemas.openxmlformats.org/drawingml/2006/main">
-            <a:r>
-              <a:t/>
-            </a:r>
-          </a:p>
-          <a:p xmlns:a="http://schemas.openxmlformats.org/drawingml/2006/main">
-            <a:r>
-              <a:t>CHECK AND EXPECTED ANSWER</a:t>
-            </a:r>
-          </a:p>
-          <a:p xmlns:a="http://schemas.openxmlformats.org/drawingml/2006/main">
-            <a:r>
-              <a:t>Does saving to GitHub hand in the assignment? No; submission requires the correct form and its confirmation.</a:t>
-            </a:r>
-          </a:p>
-          <a:p xmlns:a="http://schemas.openxmlformats.org/drawingml/2006/main">
-            <a:r>
-              <a:t/>
-            </a:r>
-          </a:p>
-          <a:p xmlns:a="http://schemas.openxmlformats.org/drawingml/2006/main">
-            <a:r>
-              <a:t>IF LEARNERS ARE STUCK</a:t>
-            </a:r>
-          </a:p>
-          <a:p xmlns:a="http://schemas.openxmlformats.org/drawingml/2006/main">
-            <a:r>
-              <a:t/>
-            </a:r>
-          </a:p>
-          <a:p xmlns:a="http://schemas.openxmlformats.org/drawingml/2006/main">
-            <a:r>
-              <a:t>POINT TO THE DEFINITION</a:t>
-            </a:r>
-          </a:p>
-          <a:p xmlns:a="http://schemas.openxmlformats.org/drawingml/2006/main">
-            <a:r>
-              <a:t>Peer review: Someone else tests the instructions and reports a specific observation and suggested improvement.</a:t>
-            </a:r>
-          </a:p>
-          <a:p xmlns:a="http://schemas.openxmlformats.org/drawingml/2006/main">
-            <a:r>
-              <a:t>Contribution evidence: A record of each person’s work, tied to files, commits or explanations. It does not require making a private repository public.</a:t>
+              <a:t>LECTURER CUE</a:t>
+            </a:r>
+          </a:p>
+          <a:p xmlns:a="http://schemas.openxmlformats.org/drawingml/2006/main">
+            <a:r>
+              <a:t>Explain the definitions before running or tracing the example. Point to the line or table row that produces each result.</a:t>
+            </a:r>
+          </a:p>
+          <a:p xmlns:a="http://schemas.openxmlformats.org/drawingml/2006/main">
+            <a:r>
+              <a:t/>
+            </a:r>
+          </a:p>
+          <a:p xmlns:a="http://schemas.openxmlformats.org/drawingml/2006/main">
+            <a:r>
+              <a:t>TEACHING MODE</a:t>
+            </a:r>
+          </a:p>
+          <a:p xmlns:a="http://schemas.openxmlformats.org/drawingml/2006/main">
+            <a:r>
+              <a:t>Demonstrate first. Read each new symbol aloud, trace the values and compare the shown output. Learners repeat worked examples individually after class.</a:t>
             </a:r>
           </a:p>
           <a:p xmlns:a="http://schemas.openxmlformats.org/drawingml/2006/main">
@@ -2291,37 +1841,22 @@
           </a:p>
           <a:p xmlns:a="http://schemas.openxmlformats.org/drawingml/2006/main">
             <a:r>
-              <a:t>Useful feedback identifies an exact repair. Move on after a learner can explain the current example or required action.</a:t>
-            </a:r>
-          </a:p>
-          <a:p xmlns:a="http://schemas.openxmlformats.org/drawingml/2006/main">
-            <a:r>
-              <a:t/>
-            </a:r>
-          </a:p>
-          <a:p xmlns:a="http://schemas.openxmlformats.org/drawingml/2006/main">
-            <a:r>
-              <a:t>TEACHING MODE</a:t>
-            </a:r>
-          </a:p>
-          <a:p xmlns:a="http://schemas.openxmlformats.org/drawingml/2006/main">
-            <a:r>
-              <a:t>Demonstrate the example directly. Explain each new name, symbol and output. Use the revision example for an individual check after class; no live partner activity is required.</a:t>
-            </a:r>
-          </a:p>
-          <a:p xmlns:a="http://schemas.openxmlformats.org/drawingml/2006/main">
-            <a:r>
-              <a:t/>
-            </a:r>
-          </a:p>
-          <a:p xmlns:a="http://schemas.openxmlformats.org/drawingml/2006/main">
-            <a:r>
-              <a:t>NEXT</a:t>
-            </a:r>
-          </a:p>
-          <a:p xmlns:a="http://schemas.openxmlformats.org/drawingml/2006/main">
-            <a:r>
               <a:t>Useful feedback identifies an exact repair.</a:t>
+            </a:r>
+          </a:p>
+          <a:p xmlns:a="http://schemas.openxmlformats.org/drawingml/2006/main">
+            <a:r>
+              <a:t/>
+            </a:r>
+          </a:p>
+          <a:p xmlns:a="http://schemas.openxmlformats.org/drawingml/2006/main">
+            <a:r>
+              <a:t>REFERENCES</a:t>
+            </a:r>
+          </a:p>
+          <a:p xmlns:a="http://schemas.openxmlformats.org/drawingml/2006/main">
+            <a:r>
+              <a:t/>
             </a:r>
           </a:p>
         </p:txBody>
@@ -2411,7 +1946,7 @@
           </a:p>
           <a:p xmlns:a="http://schemas.openxmlformats.org/drawingml/2006/main">
             <a:r>
-              <a:t>Build on Run checks and contribution evidence. Explain why this example is needed before running it.</a:t>
+              <a:t>Previous slide: Run checks and contribution evidence.</a:t>
             </a:r>
           </a:p>
           <a:p xmlns:a="http://schemas.openxmlformats.org/drawingml/2006/main">
@@ -2456,41 +1991,6 @@
           </a:p>
           <a:p xmlns:a="http://schemas.openxmlformats.org/drawingml/2006/main">
             <a:r>
-              <a:t>LECTURER DETAIL</a:t>
-            </a:r>
-          </a:p>
-          <a:p xmlns:a="http://schemas.openxmlformats.org/drawingml/2006/main">
-            <a:r>
-              <a:t>TEACHING PURPOSE</a:t>
-            </a:r>
-          </a:p>
-          <a:p xmlns:a="http://schemas.openxmlformats.org/drawingml/2006/main">
-            <a:r>
-              <a:t>Useful feedback identifies an exact repair</a:t>
-            </a:r>
-          </a:p>
-          <a:p xmlns:a="http://schemas.openxmlformats.org/drawingml/2006/main">
-            <a:r>
-              <a:t/>
-            </a:r>
-          </a:p>
-          <a:p xmlns:a="http://schemas.openxmlformats.org/drawingml/2006/main">
-            <a:r>
-              <a:t>CONNECT</a:t>
-            </a:r>
-          </a:p>
-          <a:p xmlns:a="http://schemas.openxmlformats.org/drawingml/2006/main">
-            <a:r>
-              <a:t>Build on the preceding slide: Words we will use.</a:t>
-            </a:r>
-          </a:p>
-          <a:p xmlns:a="http://schemas.openxmlformats.org/drawingml/2006/main">
-            <a:r>
-              <a:t/>
-            </a:r>
-          </a:p>
-          <a:p xmlns:a="http://schemas.openxmlformats.org/drawingml/2006/main">
-            <a:r>
               <a:t>LECTURER CUE</a:t>
             </a:r>
           </a:p>
@@ -2506,57 +2006,12 @@
           </a:p>
           <a:p xmlns:a="http://schemas.openxmlformats.org/drawingml/2006/main">
             <a:r>
-              <a:t>EXPLAIN IN ORDINARY WORDS</a:t>
-            </a:r>
-          </a:p>
-          <a:p xmlns:a="http://schemas.openxmlformats.org/drawingml/2006/main">
-            <a:r>
-              <a:t>A CSV is a text table. The header supplies column names. With csv.DictReader, values start as text, even if they look like numbers. A path tells Python where the file is.</a:t>
-            </a:r>
-          </a:p>
-          <a:p xmlns:a="http://schemas.openxmlformats.org/drawingml/2006/main">
-            <a:r>
-              <a:t/>
-            </a:r>
-          </a:p>
-          <a:p xmlns:a="http://schemas.openxmlformats.org/drawingml/2006/main">
-            <a:r>
-              <a:t>CHECK AND EXPECTED ANSWER</a:t>
-            </a:r>
-          </a:p>
-          <a:p xmlns:a="http://schemas.openxmlformats.org/drawingml/2006/main">
-            <a:r>
-              <a:t>Can "2.5" from csv.DictReader be added as a number without conversion? No; convert valid numeric text first.</a:t>
-            </a:r>
-          </a:p>
-          <a:p xmlns:a="http://schemas.openxmlformats.org/drawingml/2006/main">
-            <a:r>
-              <a:t/>
-            </a:r>
-          </a:p>
-          <a:p xmlns:a="http://schemas.openxmlformats.org/drawingml/2006/main">
-            <a:r>
-              <a:t>IF LEARNERS ARE STUCK</a:t>
-            </a:r>
-          </a:p>
-          <a:p xmlns:a="http://schemas.openxmlformats.org/drawingml/2006/main">
-            <a:r>
-              <a:t>Show the file in the runtime folder and compare its exact filename, case and column headers. Upload data again after a fresh Colab runtime.</a:t>
-            </a:r>
-          </a:p>
-          <a:p xmlns:a="http://schemas.openxmlformats.org/drawingml/2006/main">
-            <a:r>
-              <a:t/>
-            </a:r>
-          </a:p>
-          <a:p xmlns:a="http://schemas.openxmlformats.org/drawingml/2006/main">
-            <a:r>
-              <a:t>ASSIGNMENT HANDOVER</a:t>
-            </a:r>
-          </a:p>
-          <a:p xmlns:a="http://schemas.openxmlformats.org/drawingml/2006/main">
-            <a:r>
-              <a:t>Open the matching public student guide and show the exact starter filename, required outputs and upload set. Ask one learner to repeat what to submit and where. IUEA Student Registration Number is required freeform text; learners enter their own number. A saved repository is not a submitted form. Read the live deadline and keep the submission confirmation. Do not release an assessment that is still awaiting grading validation.</a:t>
+              <a:t>TEACHING MODE</a:t>
+            </a:r>
+          </a:p>
+          <a:p xmlns:a="http://schemas.openxmlformats.org/drawingml/2006/main">
+            <a:r>
+              <a:t>Demonstrate first. Read each new symbol aloud, trace the values and compare the shown output. Learners repeat worked examples individually after class.</a:t>
             </a:r>
           </a:p>
           <a:p xmlns:a="http://schemas.openxmlformats.org/drawingml/2006/main">
@@ -2571,37 +2026,22 @@
           </a:p>
           <a:p xmlns:a="http://schemas.openxmlformats.org/drawingml/2006/main">
             <a:r>
-              <a:t>You are a new project user. Move on after a learner can explain the current example or required action.</a:t>
-            </a:r>
-          </a:p>
-          <a:p xmlns:a="http://schemas.openxmlformats.org/drawingml/2006/main">
-            <a:r>
-              <a:t/>
-            </a:r>
-          </a:p>
-          <a:p xmlns:a="http://schemas.openxmlformats.org/drawingml/2006/main">
-            <a:r>
-              <a:t>TEACHING MODE</a:t>
-            </a:r>
-          </a:p>
-          <a:p xmlns:a="http://schemas.openxmlformats.org/drawingml/2006/main">
-            <a:r>
-              <a:t>Demonstrate the example directly. Explain each new name, symbol and output. Use the revision example for an individual check after class; no live partner activity is required.</a:t>
-            </a:r>
-          </a:p>
-          <a:p xmlns:a="http://schemas.openxmlformats.org/drawingml/2006/main">
-            <a:r>
-              <a:t/>
-            </a:r>
-          </a:p>
-          <a:p xmlns:a="http://schemas.openxmlformats.org/drawingml/2006/main">
-            <a:r>
-              <a:t>NEXT</a:t>
-            </a:r>
-          </a:p>
-          <a:p xmlns:a="http://schemas.openxmlformats.org/drawingml/2006/main">
-            <a:r>
               <a:t>Revision example and answer.</a:t>
+            </a:r>
+          </a:p>
+          <a:p xmlns:a="http://schemas.openxmlformats.org/drawingml/2006/main">
+            <a:r>
+              <a:t/>
+            </a:r>
+          </a:p>
+          <a:p xmlns:a="http://schemas.openxmlformats.org/drawingml/2006/main">
+            <a:r>
+              <a:t>REFERENCES</a:t>
+            </a:r>
+          </a:p>
+          <a:p xmlns:a="http://schemas.openxmlformats.org/drawingml/2006/main">
+            <a:r>
+              <a:t/>
             </a:r>
           </a:p>
         </p:txBody>
@@ -2691,7 +2131,7 @@
           </a:p>
           <a:p xmlns:a="http://schemas.openxmlformats.org/drawingml/2006/main">
             <a:r>
-              <a:t>Build on Useful feedback identifies an exact repair. Explain why this example is needed before running it.</a:t>
+              <a:t>Previous slide: Useful feedback identifies an exact repair.</a:t>
             </a:r>
           </a:p>
           <a:p xmlns:a="http://schemas.openxmlformats.org/drawingml/2006/main">
@@ -2726,41 +2166,6 @@
           </a:p>
           <a:p xmlns:a="http://schemas.openxmlformats.org/drawingml/2006/main">
             <a:r>
-              <a:t>LECTURER DETAIL</a:t>
-            </a:r>
-          </a:p>
-          <a:p xmlns:a="http://schemas.openxmlformats.org/drawingml/2006/main">
-            <a:r>
-              <a:t>TEACHING PURPOSE</a:t>
-            </a:r>
-          </a:p>
-          <a:p xmlns:a="http://schemas.openxmlformats.org/drawingml/2006/main">
-            <a:r>
-              <a:t>Your turn</a:t>
-            </a:r>
-          </a:p>
-          <a:p xmlns:a="http://schemas.openxmlformats.org/drawingml/2006/main">
-            <a:r>
-              <a:t/>
-            </a:r>
-          </a:p>
-          <a:p xmlns:a="http://schemas.openxmlformats.org/drawingml/2006/main">
-            <a:r>
-              <a:t>CONNECT</a:t>
-            </a:r>
-          </a:p>
-          <a:p xmlns:a="http://schemas.openxmlformats.org/drawingml/2006/main">
-            <a:r>
-              <a:t>Build on the preceding slide: What the activity shows.</a:t>
-            </a:r>
-          </a:p>
-          <a:p xmlns:a="http://schemas.openxmlformats.org/drawingml/2006/main">
-            <a:r>
-              <a:t/>
-            </a:r>
-          </a:p>
-          <a:p xmlns:a="http://schemas.openxmlformats.org/drawingml/2006/main">
-            <a:r>
               <a:t>LECTURER CUE</a:t>
             </a:r>
           </a:p>
@@ -2776,77 +2181,12 @@
           </a:p>
           <a:p xmlns:a="http://schemas.openxmlformats.org/drawingml/2006/main">
             <a:r>
-              <a:t>EXPLAIN IN ORDINARY WORDS</a:t>
-            </a:r>
-          </a:p>
-          <a:p xmlns:a="http://schemas.openxmlformats.org/drawingml/2006/main">
-            <a:r>
-              <a:t>A repository is the project folder and recorded history. A commit records a chosen change; uploading or pushing shares it. A README tells someone else how to run the work.</a:t>
-            </a:r>
-          </a:p>
-          <a:p xmlns:a="http://schemas.openxmlformats.org/drawingml/2006/main">
-            <a:r>
-              <a:t/>
-            </a:r>
-          </a:p>
-          <a:p xmlns:a="http://schemas.openxmlformats.org/drawingml/2006/main">
-            <a:r>
-              <a:t>CHECK AND EXPECTED ANSWER</a:t>
-            </a:r>
-          </a:p>
-          <a:p xmlns:a="http://schemas.openxmlformats.org/drawingml/2006/main">
-            <a:r>
-              <a:t>Does saving to GitHub hand in the assignment? No; submission requires the correct form and its confirmation.</a:t>
-            </a:r>
-          </a:p>
-          <a:p xmlns:a="http://schemas.openxmlformats.org/drawingml/2006/main">
-            <a:r>
-              <a:t/>
-            </a:r>
-          </a:p>
-          <a:p xmlns:a="http://schemas.openxmlformats.org/drawingml/2006/main">
-            <a:r>
-              <a:t>IF LEARNERS ARE STUCK</a:t>
-            </a:r>
-          </a:p>
-          <a:p xmlns:a="http://schemas.openxmlformats.org/drawingml/2006/main">
-            <a:r>
-              <a:t/>
-            </a:r>
-          </a:p>
-          <a:p xmlns:a="http://schemas.openxmlformats.org/drawingml/2006/main">
-            <a:r>
-              <a:t>DISCUSSION KEY FOR THIS SLIDE</a:t>
-            </a:r>
-          </a:p>
-          <a:p xmlns:a="http://schemas.openxmlformats.org/drawingml/2006/main">
-            <a:r>
-              <a:t>DISCUSS THE REASONING</a:t>
-            </a:r>
-          </a:p>
-          <a:p xmlns:a="http://schemas.openxmlformats.org/drawingml/2006/main">
-            <a:r>
-              <a:t>Practice discussion</a:t>
-            </a:r>
-          </a:p>
-          <a:p xmlns:a="http://schemas.openxmlformats.org/drawingml/2006/main">
-            <a:r>
-              <a:t>Revise that step and repeat. A claim that the notebook runs is supported by a fresh run, not by saved outputs alone.</a:t>
-            </a:r>
-          </a:p>
-          <a:p xmlns:a="http://schemas.openxmlformats.org/drawingml/2006/main">
-            <a:r>
-              <a:t>Which step produced this result? What changes if one input changes?</a:t>
-            </a:r>
-          </a:p>
-          <a:p xmlns:a="http://schemas.openxmlformats.org/drawingml/2006/main">
-            <a:r>
-              <a:t>CML3112   Week 13   21</a:t>
-            </a:r>
-          </a:p>
-          <a:p xmlns:a="http://schemas.openxmlformats.org/drawingml/2006/main">
-            <a:r>
-              <a:t>Let learners attempt first; use this to explain the reasoning, not just reveal the answer.</a:t>
+              <a:t>TEACHING MODE</a:t>
+            </a:r>
+          </a:p>
+          <a:p xmlns:a="http://schemas.openxmlformats.org/drawingml/2006/main">
+            <a:r>
+              <a:t>Demonstrate first. Read each new symbol aloud, trace the values and compare the shown output. Learners repeat worked examples individually after class.</a:t>
             </a:r>
           </a:p>
           <a:p xmlns:a="http://schemas.openxmlformats.org/drawingml/2006/main">
@@ -2861,37 +2201,22 @@
           </a:p>
           <a:p xmlns:a="http://schemas.openxmlformats.org/drawingml/2006/main">
             <a:r>
-              <a:t>Practice discussion. Move on after a learner can explain the current example or required action.</a:t>
-            </a:r>
-          </a:p>
-          <a:p xmlns:a="http://schemas.openxmlformats.org/drawingml/2006/main">
-            <a:r>
-              <a:t/>
-            </a:r>
-          </a:p>
-          <a:p xmlns:a="http://schemas.openxmlformats.org/drawingml/2006/main">
-            <a:r>
-              <a:t>TEACHING MODE</a:t>
-            </a:r>
-          </a:p>
-          <a:p xmlns:a="http://schemas.openxmlformats.org/drawingml/2006/main">
-            <a:r>
-              <a:t>Demonstrate the example directly. Explain each new name, symbol and output. Use the revision example for an individual check after class; no live partner activity is required.</a:t>
-            </a:r>
-          </a:p>
-          <a:p xmlns:a="http://schemas.openxmlformats.org/drawingml/2006/main">
-            <a:r>
-              <a:t/>
-            </a:r>
-          </a:p>
-          <a:p xmlns:a="http://schemas.openxmlformats.org/drawingml/2006/main">
-            <a:r>
-              <a:t>NEXT</a:t>
-            </a:r>
-          </a:p>
-          <a:p xmlns:a="http://schemas.openxmlformats.org/drawingml/2006/main">
-            <a:r>
               <a:t>Preparing for the assignment.</a:t>
+            </a:r>
+          </a:p>
+          <a:p xmlns:a="http://schemas.openxmlformats.org/drawingml/2006/main">
+            <a:r>
+              <a:t/>
+            </a:r>
+          </a:p>
+          <a:p xmlns:a="http://schemas.openxmlformats.org/drawingml/2006/main">
+            <a:r>
+              <a:t>REFERENCES</a:t>
+            </a:r>
+          </a:p>
+          <a:p xmlns:a="http://schemas.openxmlformats.org/drawingml/2006/main">
+            <a:r>
+              <a:t/>
             </a:r>
           </a:p>
         </p:txBody>
@@ -2981,7 +2306,7 @@
           </a:p>
           <a:p xmlns:a="http://schemas.openxmlformats.org/drawingml/2006/main">
             <a:r>
-              <a:t>Build on Revision example and answer. Explain why this example is needed before running it.</a:t>
+              <a:t>Previous slide: Revision example and answer.</a:t>
             </a:r>
           </a:p>
           <a:p xmlns:a="http://schemas.openxmlformats.org/drawingml/2006/main">
@@ -3036,41 +2361,6 @@
           </a:p>
           <a:p xmlns:a="http://schemas.openxmlformats.org/drawingml/2006/main">
             <a:r>
-              <a:t>LECTURER DETAIL</a:t>
-            </a:r>
-          </a:p>
-          <a:p xmlns:a="http://schemas.openxmlformats.org/drawingml/2006/main">
-            <a:r>
-              <a:t>TEACHING PURPOSE</a:t>
-            </a:r>
-          </a:p>
-          <a:p xmlns:a="http://schemas.openxmlformats.org/drawingml/2006/main">
-            <a:r>
-              <a:t>Preparing for the assignment</a:t>
-            </a:r>
-          </a:p>
-          <a:p xmlns:a="http://schemas.openxmlformats.org/drawingml/2006/main">
-            <a:r>
-              <a:t/>
-            </a:r>
-          </a:p>
-          <a:p xmlns:a="http://schemas.openxmlformats.org/drawingml/2006/main">
-            <a:r>
-              <a:t>CONNECT</a:t>
-            </a:r>
-          </a:p>
-          <a:p xmlns:a="http://schemas.openxmlformats.org/drawingml/2006/main">
-            <a:r>
-              <a:t>Build on the preceding slide: After the video.</a:t>
-            </a:r>
-          </a:p>
-          <a:p xmlns:a="http://schemas.openxmlformats.org/drawingml/2006/main">
-            <a:r>
-              <a:t/>
-            </a:r>
-          </a:p>
-          <a:p xmlns:a="http://schemas.openxmlformats.org/drawingml/2006/main">
-            <a:r>
               <a:t>LECTURER CUE</a:t>
             </a:r>
           </a:p>
@@ -3086,57 +2376,12 @@
           </a:p>
           <a:p xmlns:a="http://schemas.openxmlformats.org/drawingml/2006/main">
             <a:r>
-              <a:t>EXPLAIN IN ORDINARY WORDS</a:t>
-            </a:r>
-          </a:p>
-          <a:p xmlns:a="http://schemas.openxmlformats.org/drawingml/2006/main">
-            <a:r>
-              <a:t>A function is a named set of instructions. def defines it; a call runs it with inputs. Parameters are input names, arguments are supplied values, and return sends the result back.</a:t>
-            </a:r>
-          </a:p>
-          <a:p xmlns:a="http://schemas.openxmlformats.org/drawingml/2006/main">
-            <a:r>
-              <a:t/>
-            </a:r>
-          </a:p>
-          <a:p xmlns:a="http://schemas.openxmlformats.org/drawingml/2006/main">
-            <a:r>
-              <a:t>CHECK AND EXPECTED ANSWER</a:t>
-            </a:r>
-          </a:p>
-          <a:p xmlns:a="http://schemas.openxmlformats.org/drawingml/2006/main">
-            <a:r>
-              <a:t>Does print(8) return the number 8 to the caller? No; it displays 8 and returns None. A function needing a numeric result should return it.</a:t>
-            </a:r>
-          </a:p>
-          <a:p xmlns:a="http://schemas.openxmlformats.org/drawingml/2006/main">
-            <a:r>
-              <a:t/>
-            </a:r>
-          </a:p>
-          <a:p xmlns:a="http://schemas.openxmlformats.org/drawingml/2006/main">
-            <a:r>
-              <a:t>IF LEARNERS ARE STUCK</a:t>
-            </a:r>
-          </a:p>
-          <a:p xmlns:a="http://schemas.openxmlformats.org/drawingml/2006/main">
-            <a:r>
-              <a:t>Trace one call: bind input names, run the indented body, reach return, then put the returned result back into the calling expression.</a:t>
-            </a:r>
-          </a:p>
-          <a:p xmlns:a="http://schemas.openxmlformats.org/drawingml/2006/main">
-            <a:r>
-              <a:t/>
-            </a:r>
-          </a:p>
-          <a:p xmlns:a="http://schemas.openxmlformats.org/drawingml/2006/main">
-            <a:r>
-              <a:t>ASSIGNMENT HANDOVER</a:t>
-            </a:r>
-          </a:p>
-          <a:p xmlns:a="http://schemas.openxmlformats.org/drawingml/2006/main">
-            <a:r>
-              <a:t>Open the matching public student guide and show the exact starter filename, required outputs and upload set. Ask one learner to repeat what to submit and where. IUEA Student Registration Number is required freeform text; learners enter their own number. A saved repository is not a submitted form. Read the live deadline and keep the submission confirmation. Do not release an assessment that is still awaiting grading validation.</a:t>
+              <a:t>TEACHING MODE</a:t>
+            </a:r>
+          </a:p>
+          <a:p xmlns:a="http://schemas.openxmlformats.org/drawingml/2006/main">
+            <a:r>
+              <a:t>Demonstrate first. Read each new symbol aloud, trace the values and compare the shown output. Learners repeat worked examples individually after class.</a:t>
             </a:r>
           </a:p>
           <a:p xmlns:a="http://schemas.openxmlformats.org/drawingml/2006/main">
@@ -3151,37 +2396,22 @@
           </a:p>
           <a:p xmlns:a="http://schemas.openxmlformats.org/drawingml/2006/main">
             <a:r>
-              <a:t>A reproducible handover. Move on after a learner can explain the current example or required action.</a:t>
-            </a:r>
-          </a:p>
-          <a:p xmlns:a="http://schemas.openxmlformats.org/drawingml/2006/main">
-            <a:r>
-              <a:t/>
-            </a:r>
-          </a:p>
-          <a:p xmlns:a="http://schemas.openxmlformats.org/drawingml/2006/main">
-            <a:r>
-              <a:t>TEACHING MODE</a:t>
-            </a:r>
-          </a:p>
-          <a:p xmlns:a="http://schemas.openxmlformats.org/drawingml/2006/main">
-            <a:r>
-              <a:t>Demonstrate the example directly. Explain each new name, symbol and output. Use the revision example for an individual check after class; no live partner activity is required.</a:t>
-            </a:r>
-          </a:p>
-          <a:p xmlns:a="http://schemas.openxmlformats.org/drawingml/2006/main">
-            <a:r>
-              <a:t/>
-            </a:r>
-          </a:p>
-          <a:p xmlns:a="http://schemas.openxmlformats.org/drawingml/2006/main">
-            <a:r>
-              <a:t>NEXT</a:t>
-            </a:r>
-          </a:p>
-          <a:p xmlns:a="http://schemas.openxmlformats.org/drawingml/2006/main">
-            <a:r>
               <a:t>A reproducible handover.</a:t>
+            </a:r>
+          </a:p>
+          <a:p xmlns:a="http://schemas.openxmlformats.org/drawingml/2006/main">
+            <a:r>
+              <a:t/>
+            </a:r>
+          </a:p>
+          <a:p xmlns:a="http://schemas.openxmlformats.org/drawingml/2006/main">
+            <a:r>
+              <a:t>REFERENCES</a:t>
+            </a:r>
+          </a:p>
+          <a:p xmlns:a="http://schemas.openxmlformats.org/drawingml/2006/main">
+            <a:r>
+              <a:t/>
             </a:r>
           </a:p>
         </p:txBody>
@@ -3271,7 +2501,7 @@
           </a:p>
           <a:p xmlns:a="http://schemas.openxmlformats.org/drawingml/2006/main">
             <a:r>
-              <a:t>Build on Making the project understandable and runnable. Explain why this example is needed before running it.</a:t>
+              <a:t>Previous slide: Making the project understandable and runnable.</a:t>
             </a:r>
           </a:p>
           <a:p xmlns:a="http://schemas.openxmlformats.org/drawingml/2006/main">
@@ -3306,41 +2536,6 @@
           </a:p>
           <a:p xmlns:a="http://schemas.openxmlformats.org/drawingml/2006/main">
             <a:r>
-              <a:t>LECTURER DETAIL</a:t>
-            </a:r>
-          </a:p>
-          <a:p xmlns:a="http://schemas.openxmlformats.org/drawingml/2006/main">
-            <a:r>
-              <a:t>TEACHING PURPOSE</a:t>
-            </a:r>
-          </a:p>
-          <a:p xmlns:a="http://schemas.openxmlformats.org/drawingml/2006/main">
-            <a:r>
-              <a:t>Today’s learning</a:t>
-            </a:r>
-          </a:p>
-          <a:p xmlns:a="http://schemas.openxmlformats.org/drawingml/2006/main">
-            <a:r>
-              <a:t/>
-            </a:r>
-          </a:p>
-          <a:p xmlns:a="http://schemas.openxmlformats.org/drawingml/2006/main">
-            <a:r>
-              <a:t>CONNECT</a:t>
-            </a:r>
-          </a:p>
-          <a:p xmlns:a="http://schemas.openxmlformats.org/drawingml/2006/main">
-            <a:r>
-              <a:t>Build on the preceding slide: Making the project understandable and runnable.</a:t>
-            </a:r>
-          </a:p>
-          <a:p xmlns:a="http://schemas.openxmlformats.org/drawingml/2006/main">
-            <a:r>
-              <a:t/>
-            </a:r>
-          </a:p>
-          <a:p xmlns:a="http://schemas.openxmlformats.org/drawingml/2006/main">
-            <a:r>
               <a:t>LECTURER CUE</a:t>
             </a:r>
           </a:p>
@@ -3356,37 +2551,12 @@
           </a:p>
           <a:p xmlns:a="http://schemas.openxmlformats.org/drawingml/2006/main">
             <a:r>
-              <a:t>EXPLAIN IN ORDINARY WORDS</a:t>
-            </a:r>
-          </a:p>
-          <a:p xmlns:a="http://schemas.openxmlformats.org/drawingml/2006/main">
-            <a:r>
-              <a:t>A repository is the project folder and recorded history. A commit records a chosen change; uploading or pushing shares it. A README tells someone else how to run the work.</a:t>
-            </a:r>
-          </a:p>
-          <a:p xmlns:a="http://schemas.openxmlformats.org/drawingml/2006/main">
-            <a:r>
-              <a:t/>
-            </a:r>
-          </a:p>
-          <a:p xmlns:a="http://schemas.openxmlformats.org/drawingml/2006/main">
-            <a:r>
-              <a:t>CHECK AND EXPECTED ANSWER</a:t>
-            </a:r>
-          </a:p>
-          <a:p xmlns:a="http://schemas.openxmlformats.org/drawingml/2006/main">
-            <a:r>
-              <a:t>Does saving to GitHub hand in the assignment? No; submission requires the correct form and its confirmation.</a:t>
-            </a:r>
-          </a:p>
-          <a:p xmlns:a="http://schemas.openxmlformats.org/drawingml/2006/main">
-            <a:r>
-              <a:t/>
-            </a:r>
-          </a:p>
-          <a:p xmlns:a="http://schemas.openxmlformats.org/drawingml/2006/main">
-            <a:r>
-              <a:t>IF LEARNERS ARE STUCK</a:t>
+              <a:t>TEACHING MODE</a:t>
+            </a:r>
+          </a:p>
+          <a:p xmlns:a="http://schemas.openxmlformats.org/drawingml/2006/main">
+            <a:r>
+              <a:t>Demonstrate first. Read each new symbol aloud, trace the values and compare the shown output. Learners repeat worked examples individually after class.</a:t>
             </a:r>
           </a:p>
           <a:p xmlns:a="http://schemas.openxmlformats.org/drawingml/2006/main">
@@ -3401,37 +2571,22 @@
           </a:p>
           <a:p xmlns:a="http://schemas.openxmlformats.org/drawingml/2006/main">
             <a:r>
-              <a:t>Recall and a first attempt. Move on after a learner can explain the current example or required action.</a:t>
-            </a:r>
-          </a:p>
-          <a:p xmlns:a="http://schemas.openxmlformats.org/drawingml/2006/main">
-            <a:r>
-              <a:t/>
-            </a:r>
-          </a:p>
-          <a:p xmlns:a="http://schemas.openxmlformats.org/drawingml/2006/main">
-            <a:r>
-              <a:t>TEACHING MODE</a:t>
-            </a:r>
-          </a:p>
-          <a:p xmlns:a="http://schemas.openxmlformats.org/drawingml/2006/main">
-            <a:r>
-              <a:t>Demonstrate the example directly. Explain each new name, symbol and output. Use the revision example for an individual check after class; no live partner activity is required.</a:t>
-            </a:r>
-          </a:p>
-          <a:p xmlns:a="http://schemas.openxmlformats.org/drawingml/2006/main">
-            <a:r>
-              <a:t/>
-            </a:r>
-          </a:p>
-          <a:p xmlns:a="http://schemas.openxmlformats.org/drawingml/2006/main">
-            <a:r>
-              <a:t>NEXT</a:t>
-            </a:r>
-          </a:p>
-          <a:p xmlns:a="http://schemas.openxmlformats.org/drawingml/2006/main">
-            <a:r>
               <a:t>Connection to the previous lesson.</a:t>
+            </a:r>
+          </a:p>
+          <a:p xmlns:a="http://schemas.openxmlformats.org/drawingml/2006/main">
+            <a:r>
+              <a:t/>
+            </a:r>
+          </a:p>
+          <a:p xmlns:a="http://schemas.openxmlformats.org/drawingml/2006/main">
+            <a:r>
+              <a:t>REFERENCES</a:t>
+            </a:r>
+          </a:p>
+          <a:p xmlns:a="http://schemas.openxmlformats.org/drawingml/2006/main">
+            <a:r>
+              <a:t/>
             </a:r>
           </a:p>
         </p:txBody>
@@ -3521,7 +2676,7 @@
           </a:p>
           <a:p xmlns:a="http://schemas.openxmlformats.org/drawingml/2006/main">
             <a:r>
-              <a:t>Build on Preparing for the assignment. Explain why this example is needed before running it.</a:t>
+              <a:t>Previous slide: Preparing for the assignment.</a:t>
             </a:r>
           </a:p>
           <a:p xmlns:a="http://schemas.openxmlformats.org/drawingml/2006/main">
@@ -3576,41 +2731,6 @@
           </a:p>
           <a:p xmlns:a="http://schemas.openxmlformats.org/drawingml/2006/main">
             <a:r>
-              <a:t>LECTURER DETAIL</a:t>
-            </a:r>
-          </a:p>
-          <a:p xmlns:a="http://schemas.openxmlformats.org/drawingml/2006/main">
-            <a:r>
-              <a:t>TEACHING PURPOSE</a:t>
-            </a:r>
-          </a:p>
-          <a:p xmlns:a="http://schemas.openxmlformats.org/drawingml/2006/main">
-            <a:r>
-              <a:t>A reproducible handover</a:t>
-            </a:r>
-          </a:p>
-          <a:p xmlns:a="http://schemas.openxmlformats.org/drawingml/2006/main">
-            <a:r>
-              <a:t/>
-            </a:r>
-          </a:p>
-          <a:p xmlns:a="http://schemas.openxmlformats.org/drawingml/2006/main">
-            <a:r>
-              <a:t>CONNECT</a:t>
-            </a:r>
-          </a:p>
-          <a:p xmlns:a="http://schemas.openxmlformats.org/drawingml/2006/main">
-            <a:r>
-              <a:t>Build on the preceding slide: Preparing for the assignment.</a:t>
-            </a:r>
-          </a:p>
-          <a:p xmlns:a="http://schemas.openxmlformats.org/drawingml/2006/main">
-            <a:r>
-              <a:t/>
-            </a:r>
-          </a:p>
-          <a:p xmlns:a="http://schemas.openxmlformats.org/drawingml/2006/main">
-            <a:r>
               <a:t>LECTURER CUE</a:t>
             </a:r>
           </a:p>
@@ -3626,37 +2746,12 @@
           </a:p>
           <a:p xmlns:a="http://schemas.openxmlformats.org/drawingml/2006/main">
             <a:r>
-              <a:t>EXPLAIN IN ORDINARY WORDS</a:t>
-            </a:r>
-          </a:p>
-          <a:p xmlns:a="http://schemas.openxmlformats.org/drawingml/2006/main">
-            <a:r>
-              <a:t>A repository is the project folder and recorded history. A commit records a chosen change; uploading or pushing shares it. A README tells someone else how to run the work.</a:t>
-            </a:r>
-          </a:p>
-          <a:p xmlns:a="http://schemas.openxmlformats.org/drawingml/2006/main">
-            <a:r>
-              <a:t/>
-            </a:r>
-          </a:p>
-          <a:p xmlns:a="http://schemas.openxmlformats.org/drawingml/2006/main">
-            <a:r>
-              <a:t>CHECK AND EXPECTED ANSWER</a:t>
-            </a:r>
-          </a:p>
-          <a:p xmlns:a="http://schemas.openxmlformats.org/drawingml/2006/main">
-            <a:r>
-              <a:t>Does saving to GitHub hand in the assignment? No; submission requires the correct form and its confirmation.</a:t>
-            </a:r>
-          </a:p>
-          <a:p xmlns:a="http://schemas.openxmlformats.org/drawingml/2006/main">
-            <a:r>
-              <a:t/>
-            </a:r>
-          </a:p>
-          <a:p xmlns:a="http://schemas.openxmlformats.org/drawingml/2006/main">
-            <a:r>
-              <a:t>IF LEARNERS ARE STUCK</a:t>
+              <a:t>TEACHING MODE</a:t>
+            </a:r>
+          </a:p>
+          <a:p xmlns:a="http://schemas.openxmlformats.org/drawingml/2006/main">
+            <a:r>
+              <a:t>Demonstrate first. Read each new symbol aloud, trace the values and compare the shown output. Learners repeat worked examples individually after class.</a:t>
             </a:r>
           </a:p>
           <a:p xmlns:a="http://schemas.openxmlformats.org/drawingml/2006/main">
@@ -3671,37 +2766,22 @@
           </a:p>
           <a:p xmlns:a="http://schemas.openxmlformats.org/drawingml/2006/main">
             <a:r>
-              <a:t>A reproducible handover continued. Move on after a learner can explain the current example or required action.</a:t>
-            </a:r>
-          </a:p>
-          <a:p xmlns:a="http://schemas.openxmlformats.org/drawingml/2006/main">
-            <a:r>
-              <a:t/>
-            </a:r>
-          </a:p>
-          <a:p xmlns:a="http://schemas.openxmlformats.org/drawingml/2006/main">
-            <a:r>
-              <a:t>TEACHING MODE</a:t>
-            </a:r>
-          </a:p>
-          <a:p xmlns:a="http://schemas.openxmlformats.org/drawingml/2006/main">
-            <a:r>
-              <a:t>Demonstrate the example directly. Explain each new name, symbol and output. Use the revision example for an individual check after class; no live partner activity is required.</a:t>
-            </a:r>
-          </a:p>
-          <a:p xmlns:a="http://schemas.openxmlformats.org/drawingml/2006/main">
-            <a:r>
-              <a:t/>
-            </a:r>
-          </a:p>
-          <a:p xmlns:a="http://schemas.openxmlformats.org/drawingml/2006/main">
-            <a:r>
-              <a:t>NEXT</a:t>
-            </a:r>
-          </a:p>
-          <a:p xmlns:a="http://schemas.openxmlformats.org/drawingml/2006/main">
-            <a:r>
               <a:t>A reproducible handover continued.</a:t>
+            </a:r>
+          </a:p>
+          <a:p xmlns:a="http://schemas.openxmlformats.org/drawingml/2006/main">
+            <a:r>
+              <a:t/>
+            </a:r>
+          </a:p>
+          <a:p xmlns:a="http://schemas.openxmlformats.org/drawingml/2006/main">
+            <a:r>
+              <a:t>REFERENCES</a:t>
+            </a:r>
+          </a:p>
+          <a:p xmlns:a="http://schemas.openxmlformats.org/drawingml/2006/main">
+            <a:r>
+              <a:t/>
             </a:r>
           </a:p>
         </p:txBody>
@@ -3791,7 +2871,7 @@
           </a:p>
           <a:p xmlns:a="http://schemas.openxmlformats.org/drawingml/2006/main">
             <a:r>
-              <a:t>Build on A reproducible handover. Explain why this example is needed before running it.</a:t>
+              <a:t>Previous slide: A reproducible handover.</a:t>
             </a:r>
           </a:p>
           <a:p xmlns:a="http://schemas.openxmlformats.org/drawingml/2006/main">
@@ -3816,41 +2896,6 @@
           </a:p>
           <a:p xmlns:a="http://schemas.openxmlformats.org/drawingml/2006/main">
             <a:r>
-              <a:t>LECTURER DETAIL</a:t>
-            </a:r>
-          </a:p>
-          <a:p xmlns:a="http://schemas.openxmlformats.org/drawingml/2006/main">
-            <a:r>
-              <a:t>TEACHING PURPOSE</a:t>
-            </a:r>
-          </a:p>
-          <a:p xmlns:a="http://schemas.openxmlformats.org/drawingml/2006/main">
-            <a:r>
-              <a:t>A reproducible handover continued</a:t>
-            </a:r>
-          </a:p>
-          <a:p xmlns:a="http://schemas.openxmlformats.org/drawingml/2006/main">
-            <a:r>
-              <a:t/>
-            </a:r>
-          </a:p>
-          <a:p xmlns:a="http://schemas.openxmlformats.org/drawingml/2006/main">
-            <a:r>
-              <a:t>CONNECT</a:t>
-            </a:r>
-          </a:p>
-          <a:p xmlns:a="http://schemas.openxmlformats.org/drawingml/2006/main">
-            <a:r>
-              <a:t>Build on the preceding slide: A reproducible handover.</a:t>
-            </a:r>
-          </a:p>
-          <a:p xmlns:a="http://schemas.openxmlformats.org/drawingml/2006/main">
-            <a:r>
-              <a:t/>
-            </a:r>
-          </a:p>
-          <a:p xmlns:a="http://schemas.openxmlformats.org/drawingml/2006/main">
-            <a:r>
               <a:t>LECTURER CUE</a:t>
             </a:r>
           </a:p>
@@ -3866,37 +2911,12 @@
           </a:p>
           <a:p xmlns:a="http://schemas.openxmlformats.org/drawingml/2006/main">
             <a:r>
-              <a:t>EXPLAIN IN ORDINARY WORDS</a:t>
-            </a:r>
-          </a:p>
-          <a:p xmlns:a="http://schemas.openxmlformats.org/drawingml/2006/main">
-            <a:r>
-              <a:t>A repository is the project folder and recorded history. A commit records a chosen change; uploading or pushing shares it. A README tells someone else how to run the work.</a:t>
-            </a:r>
-          </a:p>
-          <a:p xmlns:a="http://schemas.openxmlformats.org/drawingml/2006/main">
-            <a:r>
-              <a:t/>
-            </a:r>
-          </a:p>
-          <a:p xmlns:a="http://schemas.openxmlformats.org/drawingml/2006/main">
-            <a:r>
-              <a:t>CHECK AND EXPECTED ANSWER</a:t>
-            </a:r>
-          </a:p>
-          <a:p xmlns:a="http://schemas.openxmlformats.org/drawingml/2006/main">
-            <a:r>
-              <a:t>Does saving to GitHub hand in the assignment? No; submission requires the correct form and its confirmation.</a:t>
-            </a:r>
-          </a:p>
-          <a:p xmlns:a="http://schemas.openxmlformats.org/drawingml/2006/main">
-            <a:r>
-              <a:t/>
-            </a:r>
-          </a:p>
-          <a:p xmlns:a="http://schemas.openxmlformats.org/drawingml/2006/main">
-            <a:r>
-              <a:t>IF LEARNERS ARE STUCK</a:t>
+              <a:t>TEACHING MODE</a:t>
+            </a:r>
+          </a:p>
+          <a:p xmlns:a="http://schemas.openxmlformats.org/drawingml/2006/main">
+            <a:r>
+              <a:t>Demonstrate first. Read each new symbol aloud, trace the values and compare the shown output. Learners repeat worked examples individually after class.</a:t>
             </a:r>
           </a:p>
           <a:p xmlns:a="http://schemas.openxmlformats.org/drawingml/2006/main">
@@ -3911,37 +2931,22 @@
           </a:p>
           <a:p xmlns:a="http://schemas.openxmlformats.org/drawingml/2006/main">
             <a:r>
-              <a:t>Project preparation. Move on after a learner can explain the current example or required action.</a:t>
-            </a:r>
-          </a:p>
-          <a:p xmlns:a="http://schemas.openxmlformats.org/drawingml/2006/main">
-            <a:r>
-              <a:t/>
-            </a:r>
-          </a:p>
-          <a:p xmlns:a="http://schemas.openxmlformats.org/drawingml/2006/main">
-            <a:r>
-              <a:t>TEACHING MODE</a:t>
-            </a:r>
-          </a:p>
-          <a:p xmlns:a="http://schemas.openxmlformats.org/drawingml/2006/main">
-            <a:r>
-              <a:t>Demonstrate the example directly. Explain each new name, symbol and output. Use the revision example for an individual check after class; no live partner activity is required.</a:t>
-            </a:r>
-          </a:p>
-          <a:p xmlns:a="http://schemas.openxmlformats.org/drawingml/2006/main">
-            <a:r>
-              <a:t/>
-            </a:r>
-          </a:p>
-          <a:p xmlns:a="http://schemas.openxmlformats.org/drawingml/2006/main">
-            <a:r>
-              <a:t>NEXT</a:t>
-            </a:r>
-          </a:p>
-          <a:p xmlns:a="http://schemas.openxmlformats.org/drawingml/2006/main">
-            <a:r>
               <a:t>Project preparation.</a:t>
+            </a:r>
+          </a:p>
+          <a:p xmlns:a="http://schemas.openxmlformats.org/drawingml/2006/main">
+            <a:r>
+              <a:t/>
+            </a:r>
+          </a:p>
+          <a:p xmlns:a="http://schemas.openxmlformats.org/drawingml/2006/main">
+            <a:r>
+              <a:t>REFERENCES</a:t>
+            </a:r>
+          </a:p>
+          <a:p xmlns:a="http://schemas.openxmlformats.org/drawingml/2006/main">
+            <a:r>
+              <a:t/>
             </a:r>
           </a:p>
         </p:txBody>
@@ -4031,7 +3036,7 @@
           </a:p>
           <a:p xmlns:a="http://schemas.openxmlformats.org/drawingml/2006/main">
             <a:r>
-              <a:t>Build on A reproducible handover continued. Explain why this example is needed before running it.</a:t>
+              <a:t>Previous slide: A reproducible handover continued.</a:t>
             </a:r>
           </a:p>
           <a:p xmlns:a="http://schemas.openxmlformats.org/drawingml/2006/main">
@@ -4086,41 +3091,6 @@
           </a:p>
           <a:p xmlns:a="http://schemas.openxmlformats.org/drawingml/2006/main">
             <a:r>
-              <a:t>LECTURER DETAIL</a:t>
-            </a:r>
-          </a:p>
-          <a:p xmlns:a="http://schemas.openxmlformats.org/drawingml/2006/main">
-            <a:r>
-              <a:t>TEACHING PURPOSE</a:t>
-            </a:r>
-          </a:p>
-          <a:p xmlns:a="http://schemas.openxmlformats.org/drawingml/2006/main">
-            <a:r>
-              <a:t>Project preparation</a:t>
-            </a:r>
-          </a:p>
-          <a:p xmlns:a="http://schemas.openxmlformats.org/drawingml/2006/main">
-            <a:r>
-              <a:t/>
-            </a:r>
-          </a:p>
-          <a:p xmlns:a="http://schemas.openxmlformats.org/drawingml/2006/main">
-            <a:r>
-              <a:t>CONNECT</a:t>
-            </a:r>
-          </a:p>
-          <a:p xmlns:a="http://schemas.openxmlformats.org/drawingml/2006/main">
-            <a:r>
-              <a:t>Build on the preceding slide: A reproducible handover continued.</a:t>
-            </a:r>
-          </a:p>
-          <a:p xmlns:a="http://schemas.openxmlformats.org/drawingml/2006/main">
-            <a:r>
-              <a:t/>
-            </a:r>
-          </a:p>
-          <a:p xmlns:a="http://schemas.openxmlformats.org/drawingml/2006/main">
-            <a:r>
               <a:t>LECTURER CUE</a:t>
             </a:r>
           </a:p>
@@ -4136,57 +3106,12 @@
           </a:p>
           <a:p xmlns:a="http://schemas.openxmlformats.org/drawingml/2006/main">
             <a:r>
-              <a:t>EXPLAIN IN ORDINARY WORDS</a:t>
-            </a:r>
-          </a:p>
-          <a:p xmlns:a="http://schemas.openxmlformats.org/drawingml/2006/main">
-            <a:r>
-              <a:t>A notebook contains code cells and explanatory text cells. The runtime remembers values from cells that actually ran, which may differ from their visual order.</a:t>
-            </a:r>
-          </a:p>
-          <a:p xmlns:a="http://schemas.openxmlformats.org/drawingml/2006/main">
-            <a:r>
-              <a:t/>
-            </a:r>
-          </a:p>
-          <a:p xmlns:a="http://schemas.openxmlformats.org/drawingml/2006/main">
-            <a:r>
-              <a:t>CHECK AND EXPECTED ANSWER</a:t>
-            </a:r>
-          </a:p>
-          <a:p xmlns:a="http://schemas.openxmlformats.org/drawingml/2006/main">
-            <a:r>
-              <a:t>Does editing a cell update a value already stored in memory? No; the cell must run.</a:t>
-            </a:r>
-          </a:p>
-          <a:p xmlns:a="http://schemas.openxmlformats.org/drawingml/2006/main">
-            <a:r>
-              <a:t/>
-            </a:r>
-          </a:p>
-          <a:p xmlns:a="http://schemas.openxmlformats.org/drawingml/2006/main">
-            <a:r>
-              <a:t>IF LEARNERS ARE STUCK</a:t>
-            </a:r>
-          </a:p>
-          <a:p xmlns:a="http://schemas.openxmlformats.org/drawingml/2006/main">
-            <a:r>
-              <a:t>Outside an assessment restriction, restart and run from the top after loading data. Fix the first error before later cells; save the successful notebook.</a:t>
-            </a:r>
-          </a:p>
-          <a:p xmlns:a="http://schemas.openxmlformats.org/drawingml/2006/main">
-            <a:r>
-              <a:t/>
-            </a:r>
-          </a:p>
-          <a:p xmlns:a="http://schemas.openxmlformats.org/drawingml/2006/main">
-            <a:r>
-              <a:t>ASSIGNMENT HANDOVER</a:t>
-            </a:r>
-          </a:p>
-          <a:p xmlns:a="http://schemas.openxmlformats.org/drawingml/2006/main">
-            <a:r>
-              <a:t>Open the matching public student guide and show the exact starter filename, required outputs and upload set. Ask one learner to repeat what to submit and where. IUEA Student Registration Number is required freeform text; learners enter their own number. A saved repository is not a submitted form. Read the live deadline and keep the submission confirmation. Do not release an assessment that is still awaiting grading validation.</a:t>
+              <a:t>TEACHING MODE</a:t>
+            </a:r>
+          </a:p>
+          <a:p xmlns:a="http://schemas.openxmlformats.org/drawingml/2006/main">
+            <a:r>
+              <a:t>Demonstrate first. Read each new symbol aloud, trace the values and compare the shown output. Learners repeat worked examples individually after class.</a:t>
             </a:r>
           </a:p>
           <a:p xmlns:a="http://schemas.openxmlformats.org/drawingml/2006/main">
@@ -4201,37 +3126,22 @@
           </a:p>
           <a:p xmlns:a="http://schemas.openxmlformats.org/drawingml/2006/main">
             <a:r>
-              <a:t>Week 13 quiz. Move on after a learner can explain the current example or required action.</a:t>
-            </a:r>
-          </a:p>
-          <a:p xmlns:a="http://schemas.openxmlformats.org/drawingml/2006/main">
-            <a:r>
-              <a:t/>
-            </a:r>
-          </a:p>
-          <a:p xmlns:a="http://schemas.openxmlformats.org/drawingml/2006/main">
-            <a:r>
-              <a:t>TEACHING MODE</a:t>
-            </a:r>
-          </a:p>
-          <a:p xmlns:a="http://schemas.openxmlformats.org/drawingml/2006/main">
-            <a:r>
-              <a:t>Demonstrate the example directly. Explain each new name, symbol and output. Use the revision example for an individual check after class; no live partner activity is required.</a:t>
-            </a:r>
-          </a:p>
-          <a:p xmlns:a="http://schemas.openxmlformats.org/drawingml/2006/main">
-            <a:r>
-              <a:t/>
-            </a:r>
-          </a:p>
-          <a:p xmlns:a="http://schemas.openxmlformats.org/drawingml/2006/main">
-            <a:r>
-              <a:t>NEXT</a:t>
-            </a:r>
-          </a:p>
-          <a:p xmlns:a="http://schemas.openxmlformats.org/drawingml/2006/main">
-            <a:r>
               <a:t>Week 13 quiz.</a:t>
+            </a:r>
+          </a:p>
+          <a:p xmlns:a="http://schemas.openxmlformats.org/drawingml/2006/main">
+            <a:r>
+              <a:t/>
+            </a:r>
+          </a:p>
+          <a:p xmlns:a="http://schemas.openxmlformats.org/drawingml/2006/main">
+            <a:r>
+              <a:t>REFERENCES</a:t>
+            </a:r>
+          </a:p>
+          <a:p xmlns:a="http://schemas.openxmlformats.org/drawingml/2006/main">
+            <a:r>
+              <a:t/>
             </a:r>
           </a:p>
         </p:txBody>
@@ -4321,7 +3231,7 @@
           </a:p>
           <a:p xmlns:a="http://schemas.openxmlformats.org/drawingml/2006/main">
             <a:r>
-              <a:t>Build on Project preparation. Explain why this example is needed before running it.</a:t>
+              <a:t>Previous slide: Project preparation.</a:t>
             </a:r>
           </a:p>
           <a:p xmlns:a="http://schemas.openxmlformats.org/drawingml/2006/main">
@@ -4376,41 +3286,6 @@
           </a:p>
           <a:p xmlns:a="http://schemas.openxmlformats.org/drawingml/2006/main">
             <a:r>
-              <a:t>LECTURER DETAIL</a:t>
-            </a:r>
-          </a:p>
-          <a:p xmlns:a="http://schemas.openxmlformats.org/drawingml/2006/main">
-            <a:r>
-              <a:t>TEACHING PURPOSE</a:t>
-            </a:r>
-          </a:p>
-          <a:p xmlns:a="http://schemas.openxmlformats.org/drawingml/2006/main">
-            <a:r>
-              <a:t>Week 13 quiz</a:t>
-            </a:r>
-          </a:p>
-          <a:p xmlns:a="http://schemas.openxmlformats.org/drawingml/2006/main">
-            <a:r>
-              <a:t/>
-            </a:r>
-          </a:p>
-          <a:p xmlns:a="http://schemas.openxmlformats.org/drawingml/2006/main">
-            <a:r>
-              <a:t>CONNECT</a:t>
-            </a:r>
-          </a:p>
-          <a:p xmlns:a="http://schemas.openxmlformats.org/drawingml/2006/main">
-            <a:r>
-              <a:t>Build on the preceding slide: Project preparation.</a:t>
-            </a:r>
-          </a:p>
-          <a:p xmlns:a="http://schemas.openxmlformats.org/drawingml/2006/main">
-            <a:r>
-              <a:t/>
-            </a:r>
-          </a:p>
-          <a:p xmlns:a="http://schemas.openxmlformats.org/drawingml/2006/main">
-            <a:r>
               <a:t>LECTURER CUE</a:t>
             </a:r>
           </a:p>
@@ -4426,12 +3301,12 @@
           </a:p>
           <a:p xmlns:a="http://schemas.openxmlformats.org/drawingml/2006/main">
             <a:r>
-              <a:t>QUIZ OPERATION</a:t>
-            </a:r>
-          </a:p>
-          <a:p xmlns:a="http://schemas.openxmlformats.org/drawingml/2006/main">
-            <a:r>
-              <a:t>Opening the student link does not activate the quiz. In Quiz Controls run the matching open_W&lt;week&gt;_&lt;cohort&gt; function once when ready. Announce the logged closing time: 24 hours after activation. Five minutes describes expected answering time, not the availability window. Quiz 1 and Quiz 2 require separate activation when collecting catch-up work.</a:t>
+              <a:t>TEACHING MODE</a:t>
+            </a:r>
+          </a:p>
+          <a:p xmlns:a="http://schemas.openxmlformats.org/drawingml/2006/main">
+            <a:r>
+              <a:t>Demonstrate first. Read each new symbol aloud, trace the values and compare the shown output. Learners repeat worked examples individually after class.</a:t>
             </a:r>
           </a:p>
           <a:p xmlns:a="http://schemas.openxmlformats.org/drawingml/2006/main">
@@ -4446,37 +3321,22 @@
           </a:p>
           <a:p xmlns:a="http://schemas.openxmlformats.org/drawingml/2006/main">
             <a:r>
-              <a:t>Before you leave. Move on after a learner can explain the current example or required action.</a:t>
-            </a:r>
-          </a:p>
-          <a:p xmlns:a="http://schemas.openxmlformats.org/drawingml/2006/main">
-            <a:r>
-              <a:t/>
-            </a:r>
-          </a:p>
-          <a:p xmlns:a="http://schemas.openxmlformats.org/drawingml/2006/main">
-            <a:r>
-              <a:t>TEACHING MODE</a:t>
-            </a:r>
-          </a:p>
-          <a:p xmlns:a="http://schemas.openxmlformats.org/drawingml/2006/main">
-            <a:r>
-              <a:t>Demonstrate the example directly. Explain each new name, symbol and output. Use the revision example for an individual check after class; no live partner activity is required.</a:t>
-            </a:r>
-          </a:p>
-          <a:p xmlns:a="http://schemas.openxmlformats.org/drawingml/2006/main">
-            <a:r>
-              <a:t/>
-            </a:r>
-          </a:p>
-          <a:p xmlns:a="http://schemas.openxmlformats.org/drawingml/2006/main">
-            <a:r>
-              <a:t>NEXT</a:t>
-            </a:r>
-          </a:p>
-          <a:p xmlns:a="http://schemas.openxmlformats.org/drawingml/2006/main">
-            <a:r>
               <a:t>Before you leave.</a:t>
+            </a:r>
+          </a:p>
+          <a:p xmlns:a="http://schemas.openxmlformats.org/drawingml/2006/main">
+            <a:r>
+              <a:t/>
+            </a:r>
+          </a:p>
+          <a:p xmlns:a="http://schemas.openxmlformats.org/drawingml/2006/main">
+            <a:r>
+              <a:t>REFERENCES</a:t>
+            </a:r>
+          </a:p>
+          <a:p xmlns:a="http://schemas.openxmlformats.org/drawingml/2006/main">
+            <a:r>
+              <a:t/>
             </a:r>
           </a:p>
         </p:txBody>
@@ -4566,7 +3426,7 @@
           </a:p>
           <a:p xmlns:a="http://schemas.openxmlformats.org/drawingml/2006/main">
             <a:r>
-              <a:t>Build on Week 13 quiz. Explain why this example is needed before running it.</a:t>
+              <a:t>Previous slide: Week 13 quiz.</a:t>
             </a:r>
           </a:p>
           <a:p xmlns:a="http://schemas.openxmlformats.org/drawingml/2006/main">
@@ -4601,41 +3461,6 @@
           </a:p>
           <a:p xmlns:a="http://schemas.openxmlformats.org/drawingml/2006/main">
             <a:r>
-              <a:t>LECTURER DETAIL</a:t>
-            </a:r>
-          </a:p>
-          <a:p xmlns:a="http://schemas.openxmlformats.org/drawingml/2006/main">
-            <a:r>
-              <a:t>TEACHING PURPOSE</a:t>
-            </a:r>
-          </a:p>
-          <a:p xmlns:a="http://schemas.openxmlformats.org/drawingml/2006/main">
-            <a:r>
-              <a:t>Before you leave</a:t>
-            </a:r>
-          </a:p>
-          <a:p xmlns:a="http://schemas.openxmlformats.org/drawingml/2006/main">
-            <a:r>
-              <a:t/>
-            </a:r>
-          </a:p>
-          <a:p xmlns:a="http://schemas.openxmlformats.org/drawingml/2006/main">
-            <a:r>
-              <a:t>CONNECT</a:t>
-            </a:r>
-          </a:p>
-          <a:p xmlns:a="http://schemas.openxmlformats.org/drawingml/2006/main">
-            <a:r>
-              <a:t>Build on the preceding slide: Week 13 quiz.</a:t>
-            </a:r>
-          </a:p>
-          <a:p xmlns:a="http://schemas.openxmlformats.org/drawingml/2006/main">
-            <a:r>
-              <a:t/>
-            </a:r>
-          </a:p>
-          <a:p xmlns:a="http://schemas.openxmlformats.org/drawingml/2006/main">
-            <a:r>
               <a:t>LECTURER CUE</a:t>
             </a:r>
           </a:p>
@@ -4651,52 +3476,12 @@
           </a:p>
           <a:p xmlns:a="http://schemas.openxmlformats.org/drawingml/2006/main">
             <a:r>
-              <a:t>EXPLAIN IN ORDINARY WORDS</a:t>
-            </a:r>
-          </a:p>
-          <a:p xmlns:a="http://schemas.openxmlformats.org/drawingml/2006/main">
-            <a:r>
-              <a:t>A repository is the project folder and recorded history. A commit records a chosen change; uploading or pushing shares it. A README tells someone else how to run the work.</a:t>
-            </a:r>
-          </a:p>
-          <a:p xmlns:a="http://schemas.openxmlformats.org/drawingml/2006/main">
-            <a:r>
-              <a:t/>
-            </a:r>
-          </a:p>
-          <a:p xmlns:a="http://schemas.openxmlformats.org/drawingml/2006/main">
-            <a:r>
-              <a:t>CHECK AND EXPECTED ANSWER</a:t>
-            </a:r>
-          </a:p>
-          <a:p xmlns:a="http://schemas.openxmlformats.org/drawingml/2006/main">
-            <a:r>
-              <a:t>Does saving to GitHub hand in the assignment? No; submission requires the correct form and its confirmation.</a:t>
-            </a:r>
-          </a:p>
-          <a:p xmlns:a="http://schemas.openxmlformats.org/drawingml/2006/main">
-            <a:r>
-              <a:t/>
-            </a:r>
-          </a:p>
-          <a:p xmlns:a="http://schemas.openxmlformats.org/drawingml/2006/main">
-            <a:r>
-              <a:t>IF LEARNERS ARE STUCK</a:t>
-            </a:r>
-          </a:p>
-          <a:p xmlns:a="http://schemas.openxmlformats.org/drawingml/2006/main">
-            <a:r>
-              <a:t/>
-            </a:r>
-          </a:p>
-          <a:p xmlns:a="http://schemas.openxmlformats.org/drawingml/2006/main">
-            <a:r>
               <a:t>TEACHING MODE</a:t>
             </a:r>
           </a:p>
           <a:p xmlns:a="http://schemas.openxmlformats.org/drawingml/2006/main">
             <a:r>
-              <a:t>Demonstrate the example directly. Explain each new name, symbol and output. Use the revision example for an individual check after class; no live partner activity is required.</a:t>
+              <a:t>Demonstrate first. Read each new symbol aloud, trace the values and compare the shown output. Learners repeat worked examples individually after class.</a:t>
             </a:r>
           </a:p>
           <a:p xmlns:a="http://schemas.openxmlformats.org/drawingml/2006/main">
@@ -4712,6 +3497,21 @@
           <a:p xmlns:a="http://schemas.openxmlformats.org/drawingml/2006/main">
             <a:r>
               <a:t>Optional revision video.</a:t>
+            </a:r>
+          </a:p>
+          <a:p xmlns:a="http://schemas.openxmlformats.org/drawingml/2006/main">
+            <a:r>
+              <a:t/>
+            </a:r>
+          </a:p>
+          <a:p xmlns:a="http://schemas.openxmlformats.org/drawingml/2006/main">
+            <a:r>
+              <a:t>REFERENCES</a:t>
+            </a:r>
+          </a:p>
+          <a:p xmlns:a="http://schemas.openxmlformats.org/drawingml/2006/main">
+            <a:r>
+              <a:t/>
             </a:r>
           </a:p>
         </p:txBody>
@@ -4801,7 +3601,7 @@
           </a:p>
           <a:p xmlns:a="http://schemas.openxmlformats.org/drawingml/2006/main">
             <a:r>
-              <a:t>Build on Revision and submission checklist. Explain why this example is needed before running it.</a:t>
+              <a:t>Previous slide: Revision and submission checklist.</a:t>
             </a:r>
           </a:p>
           <a:p xmlns:a="http://schemas.openxmlformats.org/drawingml/2006/main">
@@ -4861,41 +3661,6 @@
           </a:p>
           <a:p xmlns:a="http://schemas.openxmlformats.org/drawingml/2006/main">
             <a:r>
-              <a:t>LECTURER DETAIL</a:t>
-            </a:r>
-          </a:p>
-          <a:p xmlns:a="http://schemas.openxmlformats.org/drawingml/2006/main">
-            <a:r>
-              <a:t>TEACHING PURPOSE</a:t>
-            </a:r>
-          </a:p>
-          <a:p xmlns:a="http://schemas.openxmlformats.org/drawingml/2006/main">
-            <a:r>
-              <a:t>Short explainer and discussion</a:t>
-            </a:r>
-          </a:p>
-          <a:p xmlns:a="http://schemas.openxmlformats.org/drawingml/2006/main">
-            <a:r>
-              <a:t/>
-            </a:r>
-          </a:p>
-          <a:p xmlns:a="http://schemas.openxmlformats.org/drawingml/2006/main">
-            <a:r>
-              <a:t>CONNECT</a:t>
-            </a:r>
-          </a:p>
-          <a:p xmlns:a="http://schemas.openxmlformats.org/drawingml/2006/main">
-            <a:r>
-              <a:t>Build on the preceding slide: Practice discussion.</a:t>
-            </a:r>
-          </a:p>
-          <a:p xmlns:a="http://schemas.openxmlformats.org/drawingml/2006/main">
-            <a:r>
-              <a:t/>
-            </a:r>
-          </a:p>
-          <a:p xmlns:a="http://schemas.openxmlformats.org/drawingml/2006/main">
-            <a:r>
               <a:t>LECTURER CUE</a:t>
             </a:r>
           </a:p>
@@ -4921,57 +3686,12 @@
           </a:p>
           <a:p xmlns:a="http://schemas.openxmlformats.org/drawingml/2006/main">
             <a:r>
-              <a:t>EXPLAIN IN ORDINARY WORDS</a:t>
-            </a:r>
-          </a:p>
-          <a:p xmlns:a="http://schemas.openxmlformats.org/drawingml/2006/main">
-            <a:r>
-              <a:t>A list keeps items in order. Python positions start at zero. In [2,4,6], position 0 contains 2 and position 2 contains 6. A slice excludes its stop position.</a:t>
-            </a:r>
-          </a:p>
-          <a:p xmlns:a="http://schemas.openxmlformats.org/drawingml/2006/main">
-            <a:r>
-              <a:t/>
-            </a:r>
-          </a:p>
-          <a:p xmlns:a="http://schemas.openxmlformats.org/drawingml/2006/main">
-            <a:r>
-              <a:t>CHECK AND EXPECTED ANSWER</a:t>
-            </a:r>
-          </a:p>
-          <a:p xmlns:a="http://schemas.openxmlformats.org/drawingml/2006/main">
-            <a:r>
-              <a:t>What is [2,4,6][1]? 4. Is there a position 3? No.</a:t>
-            </a:r>
-          </a:p>
-          <a:p xmlns:a="http://schemas.openxmlformats.org/drawingml/2006/main">
-            <a:r>
-              <a:t/>
-            </a:r>
-          </a:p>
-          <a:p xmlns:a="http://schemas.openxmlformats.org/drawingml/2006/main">
-            <a:r>
-              <a:t>IF LEARNERS ARE STUCK</a:t>
-            </a:r>
-          </a:p>
-          <a:p xmlns:a="http://schemas.openxmlformats.org/drawingml/2006/main">
-            <a:r>
-              <a:t>Draw three numbered boxes starting at zero. Keep the position separate from the value stored in it.</a:t>
-            </a:r>
-          </a:p>
-          <a:p xmlns:a="http://schemas.openxmlformats.org/drawingml/2006/main">
-            <a:r>
-              <a:t/>
-            </a:r>
-          </a:p>
-          <a:p xmlns:a="http://schemas.openxmlformats.org/drawingml/2006/main">
-            <a:r>
-              <a:t>VIDEO ROUTINE</a:t>
-            </a:r>
-          </a:p>
-          <a:p xmlns:a="http://schemas.openxmlformats.org/drawingml/2006/main">
-            <a:r>
-              <a:t>Preview the exact link and stated excerpt before class. State the viewing question first, pause after the example, and ask a learner to explain it. If access fails, use the adjacent worked example and discussion rather than spend class time troubleshooting streaming.</a:t>
+              <a:t>TEACHING MODE</a:t>
+            </a:r>
+          </a:p>
+          <a:p xmlns:a="http://schemas.openxmlformats.org/drawingml/2006/main">
+            <a:r>
+              <a:t>Demonstrate first. Read each new symbol aloud, trace the values and compare the shown output. Learners repeat worked examples individually after class.</a:t>
             </a:r>
           </a:p>
           <a:p xmlns:a="http://schemas.openxmlformats.org/drawingml/2006/main">
@@ -4986,37 +3706,22 @@
           </a:p>
           <a:p xmlns:a="http://schemas.openxmlformats.org/drawingml/2006/main">
             <a:r>
-              <a:t>After the video. Move on after a learner can explain the current example or required action.</a:t>
-            </a:r>
-          </a:p>
-          <a:p xmlns:a="http://schemas.openxmlformats.org/drawingml/2006/main">
-            <a:r>
-              <a:t/>
-            </a:r>
-          </a:p>
-          <a:p xmlns:a="http://schemas.openxmlformats.org/drawingml/2006/main">
-            <a:r>
-              <a:t>TEACHING MODE</a:t>
-            </a:r>
-          </a:p>
-          <a:p xmlns:a="http://schemas.openxmlformats.org/drawingml/2006/main">
-            <a:r>
-              <a:t>Demonstrate the example directly. Explain each new name, symbol and output. Use the revision example for an individual check after class; no live partner activity is required.</a:t>
-            </a:r>
-          </a:p>
-          <a:p xmlns:a="http://schemas.openxmlformats.org/drawingml/2006/main">
-            <a:r>
-              <a:t/>
-            </a:r>
-          </a:p>
-          <a:p xmlns:a="http://schemas.openxmlformats.org/drawingml/2006/main">
-            <a:r>
-              <a:t>NEXT</a:t>
-            </a:r>
-          </a:p>
-          <a:p xmlns:a="http://schemas.openxmlformats.org/drawingml/2006/main">
-            <a:r>
               <a:t>independent revision and the issued task.</a:t>
+            </a:r>
+          </a:p>
+          <a:p xmlns:a="http://schemas.openxmlformats.org/drawingml/2006/main">
+            <a:r>
+              <a:t/>
+            </a:r>
+          </a:p>
+          <a:p xmlns:a="http://schemas.openxmlformats.org/drawingml/2006/main">
+            <a:r>
+              <a:t>REFERENCES</a:t>
+            </a:r>
+          </a:p>
+          <a:p xmlns:a="http://schemas.openxmlformats.org/drawingml/2006/main">
+            <a:r>
+              <a:t/>
             </a:r>
           </a:p>
         </p:txBody>
@@ -5106,7 +3811,7 @@
           </a:p>
           <a:p xmlns:a="http://schemas.openxmlformats.org/drawingml/2006/main">
             <a:r>
-              <a:t>Build on Today’s learning. Explain why this example is needed before running it.</a:t>
+              <a:t>Previous slide: Today’s learning.</a:t>
             </a:r>
           </a:p>
           <a:p xmlns:a="http://schemas.openxmlformats.org/drawingml/2006/main">
@@ -5131,87 +3836,27 @@
           </a:p>
           <a:p xmlns:a="http://schemas.openxmlformats.org/drawingml/2006/main">
             <a:r>
-              <a:t>LECTURER DETAIL</a:t>
-            </a:r>
-          </a:p>
-          <a:p xmlns:a="http://schemas.openxmlformats.org/drawingml/2006/main">
-            <a:r>
-              <a:t>TEACHING PURPOSE</a:t>
-            </a:r>
-          </a:p>
-          <a:p xmlns:a="http://schemas.openxmlformats.org/drawingml/2006/main">
-            <a:r>
-              <a:t>Recall and a first attempt</a:t>
-            </a:r>
-          </a:p>
-          <a:p xmlns:a="http://schemas.openxmlformats.org/drawingml/2006/main">
-            <a:r>
-              <a:t/>
-            </a:r>
-          </a:p>
-          <a:p xmlns:a="http://schemas.openxmlformats.org/drawingml/2006/main">
-            <a:r>
-              <a:t>CONNECT</a:t>
-            </a:r>
-          </a:p>
-          <a:p xmlns:a="http://schemas.openxmlformats.org/drawingml/2006/main">
-            <a:r>
-              <a:t>Build on the preceding slide: Today’s learning.</a:t>
-            </a:r>
-          </a:p>
-          <a:p xmlns:a="http://schemas.openxmlformats.org/drawingml/2006/main">
-            <a:r>
-              <a:t/>
-            </a:r>
-          </a:p>
-          <a:p xmlns:a="http://schemas.openxmlformats.org/drawingml/2006/main">
-            <a:r>
               <a:t>LECTURER CUE</a:t>
             </a:r>
           </a:p>
           <a:p xmlns:a="http://schemas.openxmlformats.org/drawingml/2006/main">
             <a:r>
-              <a:t/>
-            </a:r>
-          </a:p>
-          <a:p xmlns:a="http://schemas.openxmlformats.org/drawingml/2006/main">
-            <a:r>
-              <a:t>EXPLAIN IN ORDINARY WORDS</a:t>
-            </a:r>
-          </a:p>
-          <a:p xmlns:a="http://schemas.openxmlformats.org/drawingml/2006/main">
-            <a:r>
-              <a:t>Name the positive class first. Actual is what happened; predicted is the model decision. Precision asks how many predicted positives were right. Recall asks how many actual positives were found.</a:t>
-            </a:r>
-          </a:p>
-          <a:p xmlns:a="http://schemas.openxmlformats.org/drawingml/2006/main">
-            <a:r>
-              <a:t/>
-            </a:r>
-          </a:p>
-          <a:p xmlns:a="http://schemas.openxmlformats.org/drawingml/2006/main">
-            <a:r>
-              <a:t>CHECK AND EXPECTED ANSWER</a:t>
-            </a:r>
-          </a:p>
-          <a:p xmlns:a="http://schemas.openxmlformats.org/drawingml/2006/main">
-            <a:r>
-              <a:t>With TP=2, FP=1, FN=2: precision=2/3 and recall=2/4. A missed actual positive is a false negative.</a:t>
-            </a:r>
-          </a:p>
-          <a:p xmlns:a="http://schemas.openxmlformats.org/drawingml/2006/main">
-            <a:r>
-              <a:t/>
-            </a:r>
-          </a:p>
-          <a:p xmlns:a="http://schemas.openxmlformats.org/drawingml/2006/main">
-            <a:r>
-              <a:t>IF LEARNERS ARE STUCK</a:t>
-            </a:r>
-          </a:p>
-          <a:p xmlns:a="http://schemas.openxmlformats.org/drawingml/2006/main">
-            <a:r>
-              <a:t>Draw actual/predicted headings. Place one case at a time before calculating a fraction. Explain the task rule for a zero denominator.</a:t>
+              <a:t>Explain the definitions before running or tracing the example. Point to the line or table row that produces each result.</a:t>
+            </a:r>
+          </a:p>
+          <a:p xmlns:a="http://schemas.openxmlformats.org/drawingml/2006/main">
+            <a:r>
+              <a:t/>
+            </a:r>
+          </a:p>
+          <a:p xmlns:a="http://schemas.openxmlformats.org/drawingml/2006/main">
+            <a:r>
+              <a:t>TEACHING MODE</a:t>
+            </a:r>
+          </a:p>
+          <a:p xmlns:a="http://schemas.openxmlformats.org/drawingml/2006/main">
+            <a:r>
+              <a:t>Demonstrate first. Read each new symbol aloud, trace the values and compare the shown output. Learners repeat worked examples individually after class.</a:t>
             </a:r>
           </a:p>
           <a:p xmlns:a="http://schemas.openxmlformats.org/drawingml/2006/main">
@@ -5226,37 +3871,22 @@
           </a:p>
           <a:p xmlns:a="http://schemas.openxmlformats.org/drawingml/2006/main">
             <a:r>
-              <a:t>The engineering context. Move on after a learner can explain the current example or required action.</a:t>
-            </a:r>
-          </a:p>
-          <a:p xmlns:a="http://schemas.openxmlformats.org/drawingml/2006/main">
-            <a:r>
-              <a:t/>
-            </a:r>
-          </a:p>
-          <a:p xmlns:a="http://schemas.openxmlformats.org/drawingml/2006/main">
-            <a:r>
-              <a:t>TEACHING MODE</a:t>
-            </a:r>
-          </a:p>
-          <a:p xmlns:a="http://schemas.openxmlformats.org/drawingml/2006/main">
-            <a:r>
-              <a:t>Demonstrate the example directly. Explain each new name, symbol and output. Use the revision example for an individual check after class; no live partner activity is required.</a:t>
-            </a:r>
-          </a:p>
-          <a:p xmlns:a="http://schemas.openxmlformats.org/drawingml/2006/main">
-            <a:r>
-              <a:t/>
-            </a:r>
-          </a:p>
-          <a:p xmlns:a="http://schemas.openxmlformats.org/drawingml/2006/main">
-            <a:r>
-              <a:t>NEXT</a:t>
-            </a:r>
-          </a:p>
-          <a:p xmlns:a="http://schemas.openxmlformats.org/drawingml/2006/main">
-            <a:r>
               <a:t>Why this week’s tools are needed.</a:t>
+            </a:r>
+          </a:p>
+          <a:p xmlns:a="http://schemas.openxmlformats.org/drawingml/2006/main">
+            <a:r>
+              <a:t/>
+            </a:r>
+          </a:p>
+          <a:p xmlns:a="http://schemas.openxmlformats.org/drawingml/2006/main">
+            <a:r>
+              <a:t>REFERENCES</a:t>
+            </a:r>
+          </a:p>
+          <a:p xmlns:a="http://schemas.openxmlformats.org/drawingml/2006/main">
+            <a:r>
+              <a:t/>
             </a:r>
           </a:p>
         </p:txBody>
@@ -5346,7 +3976,7 @@
           </a:p>
           <a:p xmlns:a="http://schemas.openxmlformats.org/drawingml/2006/main">
             <a:r>
-              <a:t>Build on Connection to the previous lesson. Explain why this example is needed before running it.</a:t>
+              <a:t>Previous slide: Connection to the previous lesson.</a:t>
             </a:r>
           </a:p>
           <a:p xmlns:a="http://schemas.openxmlformats.org/drawingml/2006/main">
@@ -5371,41 +4001,6 @@
           </a:p>
           <a:p xmlns:a="http://schemas.openxmlformats.org/drawingml/2006/main">
             <a:r>
-              <a:t>LECTURER DETAIL</a:t>
-            </a:r>
-          </a:p>
-          <a:p xmlns:a="http://schemas.openxmlformats.org/drawingml/2006/main">
-            <a:r>
-              <a:t>TEACHING PURPOSE</a:t>
-            </a:r>
-          </a:p>
-          <a:p xmlns:a="http://schemas.openxmlformats.org/drawingml/2006/main">
-            <a:r>
-              <a:t>The engineering context</a:t>
-            </a:r>
-          </a:p>
-          <a:p xmlns:a="http://schemas.openxmlformats.org/drawingml/2006/main">
-            <a:r>
-              <a:t/>
-            </a:r>
-          </a:p>
-          <a:p xmlns:a="http://schemas.openxmlformats.org/drawingml/2006/main">
-            <a:r>
-              <a:t>CONNECT</a:t>
-            </a:r>
-          </a:p>
-          <a:p xmlns:a="http://schemas.openxmlformats.org/drawingml/2006/main">
-            <a:r>
-              <a:t>Build on the preceding slide: Recall and a first attempt.</a:t>
-            </a:r>
-          </a:p>
-          <a:p xmlns:a="http://schemas.openxmlformats.org/drawingml/2006/main">
-            <a:r>
-              <a:t/>
-            </a:r>
-          </a:p>
-          <a:p xmlns:a="http://schemas.openxmlformats.org/drawingml/2006/main">
-            <a:r>
               <a:t>LECTURER CUE</a:t>
             </a:r>
           </a:p>
@@ -5421,42 +4016,12 @@
           </a:p>
           <a:p xmlns:a="http://schemas.openxmlformats.org/drawingml/2006/main">
             <a:r>
-              <a:t>EXPLAIN IN ORDINARY WORDS</a:t>
-            </a:r>
-          </a:p>
-          <a:p xmlns:a="http://schemas.openxmlformats.org/drawingml/2006/main">
-            <a:r>
-              <a:t>A calculated column stores a result for each row at refresh. A measure is evaluated under the filters of the current visual. SUMX evaluates an expression for each row before adding it.</a:t>
-            </a:r>
-          </a:p>
-          <a:p xmlns:a="http://schemas.openxmlformats.org/drawingml/2006/main">
-            <a:r>
-              <a:t/>
-            </a:r>
-          </a:p>
-          <a:p xmlns:a="http://schemas.openxmlformats.org/drawingml/2006/main">
-            <a:r>
-              <a:t>CHECK AND EXPECTED ANSWER</a:t>
-            </a:r>
-          </a:p>
-          <a:p xmlns:a="http://schemas.openxmlformats.org/drawingml/2006/main">
-            <a:r>
-              <a:t>Should revenue respond to a selected region? Yes; test the measure with that filter and reconcile it to known data.</a:t>
-            </a:r>
-          </a:p>
-          <a:p xmlns:a="http://schemas.openxmlformats.org/drawingml/2006/main">
-            <a:r>
-              <a:t/>
-            </a:r>
-          </a:p>
-          <a:p xmlns:a="http://schemas.openxmlformats.org/drawingml/2006/main">
-            <a:r>
-              <a:t>IF LEARNERS ARE STUCK</a:t>
-            </a:r>
-          </a:p>
-          <a:p xmlns:a="http://schemas.openxmlformats.org/drawingml/2006/main">
-            <a:r>
-              <a:t>Work one order line by hand, then two lines. Name the numerator and denominator populations before an average-order-value measure.</a:t>
+              <a:t>TEACHING MODE</a:t>
+            </a:r>
+          </a:p>
+          <a:p xmlns:a="http://schemas.openxmlformats.org/drawingml/2006/main">
+            <a:r>
+              <a:t>Demonstrate first. Read each new symbol aloud, trace the values and compare the shown output. Learners repeat worked examples individually after class.</a:t>
             </a:r>
           </a:p>
           <a:p xmlns:a="http://schemas.openxmlformats.org/drawingml/2006/main">
@@ -5471,37 +4036,22 @@
           </a:p>
           <a:p xmlns:a="http://schemas.openxmlformats.org/drawingml/2006/main">
             <a:r>
-              <a:t>Words we will use. Move on after a learner can explain the current example or required action.</a:t>
-            </a:r>
-          </a:p>
-          <a:p xmlns:a="http://schemas.openxmlformats.org/drawingml/2006/main">
-            <a:r>
-              <a:t/>
-            </a:r>
-          </a:p>
-          <a:p xmlns:a="http://schemas.openxmlformats.org/drawingml/2006/main">
-            <a:r>
-              <a:t>TEACHING MODE</a:t>
-            </a:r>
-          </a:p>
-          <a:p xmlns:a="http://schemas.openxmlformats.org/drawingml/2006/main">
-            <a:r>
-              <a:t>Demonstrate the example directly. Explain each new name, symbol and output. Use the revision example for an individual check after class; no live partner activity is required.</a:t>
-            </a:r>
-          </a:p>
-          <a:p xmlns:a="http://schemas.openxmlformats.org/drawingml/2006/main">
-            <a:r>
-              <a:t/>
-            </a:r>
-          </a:p>
-          <a:p xmlns:a="http://schemas.openxmlformats.org/drawingml/2006/main">
-            <a:r>
-              <a:t>NEXT</a:t>
-            </a:r>
-          </a:p>
-          <a:p xmlns:a="http://schemas.openxmlformats.org/drawingml/2006/main">
-            <a:r>
               <a:t>Reproducibility and Dependency.</a:t>
+            </a:r>
+          </a:p>
+          <a:p xmlns:a="http://schemas.openxmlformats.org/drawingml/2006/main">
+            <a:r>
+              <a:t/>
+            </a:r>
+          </a:p>
+          <a:p xmlns:a="http://schemas.openxmlformats.org/drawingml/2006/main">
+            <a:r>
+              <a:t>REFERENCES</a:t>
+            </a:r>
+          </a:p>
+          <a:p xmlns:a="http://schemas.openxmlformats.org/drawingml/2006/main">
+            <a:r>
+              <a:t/>
             </a:r>
           </a:p>
         </p:txBody>
@@ -5591,7 +4141,7 @@
           </a:p>
           <a:p xmlns:a="http://schemas.openxmlformats.org/drawingml/2006/main">
             <a:r>
-              <a:t>Build on Why this week’s tools are needed. Explain why this example is needed before running it.</a:t>
+              <a:t>Previous slide: Why this week’s tools are needed.</a:t>
             </a:r>
           </a:p>
           <a:p xmlns:a="http://schemas.openxmlformats.org/drawingml/2006/main">
@@ -5611,6 +4161,11 @@
           </a:p>
           <a:p xmlns:a="http://schemas.openxmlformats.org/drawingml/2006/main">
             <a:r>
+              <a:t/>
+            </a:r>
+          </a:p>
+          <a:p xmlns:a="http://schemas.openxmlformats.org/drawingml/2006/main">
+            <a:r>
               <a:t>Dependency: A package your code needs. Record versions actually used, rather than guessing them.</a:t>
             </a:r>
           </a:p>
@@ -5621,92 +4176,27 @@
           </a:p>
           <a:p xmlns:a="http://schemas.openxmlformats.org/drawingml/2006/main">
             <a:r>
-              <a:t>LECTURER DETAIL</a:t>
-            </a:r>
-          </a:p>
-          <a:p xmlns:a="http://schemas.openxmlformats.org/drawingml/2006/main">
-            <a:r>
-              <a:t>TEACHING PURPOSE</a:t>
-            </a:r>
-          </a:p>
-          <a:p xmlns:a="http://schemas.openxmlformats.org/drawingml/2006/main">
-            <a:r>
-              <a:t>Words we will use</a:t>
-            </a:r>
-          </a:p>
-          <a:p xmlns:a="http://schemas.openxmlformats.org/drawingml/2006/main">
-            <a:r>
-              <a:t/>
-            </a:r>
-          </a:p>
-          <a:p xmlns:a="http://schemas.openxmlformats.org/drawingml/2006/main">
-            <a:r>
-              <a:t>CONNECT</a:t>
-            </a:r>
-          </a:p>
-          <a:p xmlns:a="http://schemas.openxmlformats.org/drawingml/2006/main">
-            <a:r>
-              <a:t>Build on the preceding slide: The engineering context.</a:t>
-            </a:r>
-          </a:p>
-          <a:p xmlns:a="http://schemas.openxmlformats.org/drawingml/2006/main">
-            <a:r>
-              <a:t/>
-            </a:r>
-          </a:p>
-          <a:p xmlns:a="http://schemas.openxmlformats.org/drawingml/2006/main">
-            <a:r>
-              <a:t>EXPLAIN IN ORDINARY WORDS</a:t>
-            </a:r>
-          </a:p>
-          <a:p xmlns:a="http://schemas.openxmlformats.org/drawingml/2006/main">
-            <a:r>
-              <a:t>A repository is the project folder and recorded history. A commit records a chosen change; uploading or pushing shares it. A README tells someone else how to run the work.</a:t>
-            </a:r>
-          </a:p>
-          <a:p xmlns:a="http://schemas.openxmlformats.org/drawingml/2006/main">
-            <a:r>
-              <a:t/>
-            </a:r>
-          </a:p>
-          <a:p xmlns:a="http://schemas.openxmlformats.org/drawingml/2006/main">
-            <a:r>
-              <a:t>CHECK AND EXPECTED ANSWER</a:t>
-            </a:r>
-          </a:p>
-          <a:p xmlns:a="http://schemas.openxmlformats.org/drawingml/2006/main">
-            <a:r>
-              <a:t>Does saving to GitHub hand in the assignment? No; submission requires the correct form and its confirmation.</a:t>
-            </a:r>
-          </a:p>
-          <a:p xmlns:a="http://schemas.openxmlformats.org/drawingml/2006/main">
-            <a:r>
-              <a:t/>
-            </a:r>
-          </a:p>
-          <a:p xmlns:a="http://schemas.openxmlformats.org/drawingml/2006/main">
-            <a:r>
-              <a:t>IF LEARNERS ARE STUCK</a:t>
-            </a:r>
-          </a:p>
-          <a:p xmlns:a="http://schemas.openxmlformats.org/drawingml/2006/main">
-            <a:r>
-              <a:t/>
-            </a:r>
-          </a:p>
-          <a:p xmlns:a="http://schemas.openxmlformats.org/drawingml/2006/main">
-            <a:r>
-              <a:t>POINT TO THE DEFINITION</a:t>
-            </a:r>
-          </a:p>
-          <a:p xmlns:a="http://schemas.openxmlformats.org/drawingml/2006/main">
-            <a:r>
-              <a:t>Reproducibility: Another person can use the stated data, environment and steps to check the result. Terminology varies; state the operational test.</a:t>
-            </a:r>
-          </a:p>
-          <a:p xmlns:a="http://schemas.openxmlformats.org/drawingml/2006/main">
-            <a:r>
-              <a:t>Dependency: A package your code needs. Record versions actually used, rather than guessing them.</a:t>
+              <a:t>LECTURER CUE</a:t>
+            </a:r>
+          </a:p>
+          <a:p xmlns:a="http://schemas.openxmlformats.org/drawingml/2006/main">
+            <a:r>
+              <a:t>Explain the definitions before running or tracing the example. Point to the line or table row that produces each result.</a:t>
+            </a:r>
+          </a:p>
+          <a:p xmlns:a="http://schemas.openxmlformats.org/drawingml/2006/main">
+            <a:r>
+              <a:t/>
+            </a:r>
+          </a:p>
+          <a:p xmlns:a="http://schemas.openxmlformats.org/drawingml/2006/main">
+            <a:r>
+              <a:t>TEACHING MODE</a:t>
+            </a:r>
+          </a:p>
+          <a:p xmlns:a="http://schemas.openxmlformats.org/drawingml/2006/main">
+            <a:r>
+              <a:t>Demonstrate first. Read each new symbol aloud, trace the values and compare the shown output. Learners repeat worked examples individually after class.</a:t>
             </a:r>
           </a:p>
           <a:p xmlns:a="http://schemas.openxmlformats.org/drawingml/2006/main">
@@ -5721,37 +4211,22 @@
           </a:p>
           <a:p xmlns:a="http://schemas.openxmlformats.org/drawingml/2006/main">
             <a:r>
-              <a:t>Words we will use. Move on after a learner can explain the current example or required action.</a:t>
-            </a:r>
-          </a:p>
-          <a:p xmlns:a="http://schemas.openxmlformats.org/drawingml/2006/main">
-            <a:r>
-              <a:t/>
-            </a:r>
-          </a:p>
-          <a:p xmlns:a="http://schemas.openxmlformats.org/drawingml/2006/main">
-            <a:r>
-              <a:t>TEACHING MODE</a:t>
-            </a:r>
-          </a:p>
-          <a:p xmlns:a="http://schemas.openxmlformats.org/drawingml/2006/main">
-            <a:r>
-              <a:t>Demonstrate the example directly. Explain each new name, symbol and output. Use the revision example for an individual check after class; no live partner activity is required.</a:t>
-            </a:r>
-          </a:p>
-          <a:p xmlns:a="http://schemas.openxmlformats.org/drawingml/2006/main">
-            <a:r>
-              <a:t/>
-            </a:r>
-          </a:p>
-          <a:p xmlns:a="http://schemas.openxmlformats.org/drawingml/2006/main">
-            <a:r>
-              <a:t>NEXT</a:t>
-            </a:r>
-          </a:p>
-          <a:p xmlns:a="http://schemas.openxmlformats.org/drawingml/2006/main">
-            <a:r>
               <a:t>Relative path and README.</a:t>
+            </a:r>
+          </a:p>
+          <a:p xmlns:a="http://schemas.openxmlformats.org/drawingml/2006/main">
+            <a:r>
+              <a:t/>
+            </a:r>
+          </a:p>
+          <a:p xmlns:a="http://schemas.openxmlformats.org/drawingml/2006/main">
+            <a:r>
+              <a:t>REFERENCES</a:t>
+            </a:r>
+          </a:p>
+          <a:p xmlns:a="http://schemas.openxmlformats.org/drawingml/2006/main">
+            <a:r>
+              <a:t/>
             </a:r>
           </a:p>
         </p:txBody>
@@ -5841,7 +4316,7 @@
           </a:p>
           <a:p xmlns:a="http://schemas.openxmlformats.org/drawingml/2006/main">
             <a:r>
-              <a:t>Build on Reproducibility and Dependency. Explain why this example is needed before running it.</a:t>
+              <a:t>Previous slide: Reproducibility and Dependency.</a:t>
             </a:r>
           </a:p>
           <a:p xmlns:a="http://schemas.openxmlformats.org/drawingml/2006/main">
@@ -5861,6 +4336,11 @@
           </a:p>
           <a:p xmlns:a="http://schemas.openxmlformats.org/drawingml/2006/main">
             <a:r>
+              <a:t/>
+            </a:r>
+          </a:p>
+          <a:p xmlns:a="http://schemas.openxmlformats.org/drawingml/2006/main">
+            <a:r>
               <a:t>README: The project’s instructions: question, files, data source, environment, run order, results and limitations.</a:t>
             </a:r>
           </a:p>
@@ -5871,97 +4351,27 @@
           </a:p>
           <a:p xmlns:a="http://schemas.openxmlformats.org/drawingml/2006/main">
             <a:r>
-              <a:t>LECTURER DETAIL</a:t>
-            </a:r>
-          </a:p>
-          <a:p xmlns:a="http://schemas.openxmlformats.org/drawingml/2006/main">
-            <a:r>
-              <a:t>TEACHING PURPOSE</a:t>
-            </a:r>
-          </a:p>
-          <a:p xmlns:a="http://schemas.openxmlformats.org/drawingml/2006/main">
-            <a:r>
-              <a:t>Words we will use</a:t>
-            </a:r>
-          </a:p>
-          <a:p xmlns:a="http://schemas.openxmlformats.org/drawingml/2006/main">
-            <a:r>
-              <a:t/>
-            </a:r>
-          </a:p>
-          <a:p xmlns:a="http://schemas.openxmlformats.org/drawingml/2006/main">
-            <a:r>
-              <a:t>CONNECT</a:t>
-            </a:r>
-          </a:p>
-          <a:p xmlns:a="http://schemas.openxmlformats.org/drawingml/2006/main">
-            <a:r>
-              <a:t>Build on the preceding slide: Words we will use.</a:t>
-            </a:r>
-          </a:p>
-          <a:p xmlns:a="http://schemas.openxmlformats.org/drawingml/2006/main">
-            <a:r>
-              <a:t/>
-            </a:r>
-          </a:p>
-          <a:p xmlns:a="http://schemas.openxmlformats.org/drawingml/2006/main">
-            <a:r>
-              <a:t>EXPLAIN IN ORDINARY WORDS</a:t>
-            </a:r>
-          </a:p>
-          <a:p xmlns:a="http://schemas.openxmlformats.org/drawingml/2006/main">
-            <a:r>
-              <a:t>A notebook contains code cells and explanatory text cells. The runtime remembers values from cells that actually ran, which may differ from their visual order.</a:t>
-            </a:r>
-          </a:p>
-          <a:p xmlns:a="http://schemas.openxmlformats.org/drawingml/2006/main">
-            <a:r>
-              <a:t/>
-            </a:r>
-          </a:p>
-          <a:p xmlns:a="http://schemas.openxmlformats.org/drawingml/2006/main">
-            <a:r>
-              <a:t>CHECK AND EXPECTED ANSWER</a:t>
-            </a:r>
-          </a:p>
-          <a:p xmlns:a="http://schemas.openxmlformats.org/drawingml/2006/main">
-            <a:r>
-              <a:t>Does editing a cell update a value already stored in memory? No; the cell must run.</a:t>
-            </a:r>
-          </a:p>
-          <a:p xmlns:a="http://schemas.openxmlformats.org/drawingml/2006/main">
-            <a:r>
-              <a:t/>
-            </a:r>
-          </a:p>
-          <a:p xmlns:a="http://schemas.openxmlformats.org/drawingml/2006/main">
-            <a:r>
-              <a:t>IF LEARNERS ARE STUCK</a:t>
-            </a:r>
-          </a:p>
-          <a:p xmlns:a="http://schemas.openxmlformats.org/drawingml/2006/main">
-            <a:r>
-              <a:t>Outside an assessment restriction, restart and run from the top after loading data. Fix the first error before later cells; save the successful notebook.</a:t>
-            </a:r>
-          </a:p>
-          <a:p xmlns:a="http://schemas.openxmlformats.org/drawingml/2006/main">
-            <a:r>
-              <a:t/>
-            </a:r>
-          </a:p>
-          <a:p xmlns:a="http://schemas.openxmlformats.org/drawingml/2006/main">
-            <a:r>
-              <a:t>POINT TO THE DEFINITION</a:t>
-            </a:r>
-          </a:p>
-          <a:p xmlns:a="http://schemas.openxmlformats.org/drawingml/2006/main">
-            <a:r>
-              <a:t>Relative path: A location interpreted from the current working folder. It is not always relative to the notebook file itself.</a:t>
-            </a:r>
-          </a:p>
-          <a:p xmlns:a="http://schemas.openxmlformats.org/drawingml/2006/main">
-            <a:r>
-              <a:t>README: The project’s instructions: question, files, data source, environment, run order, results and limitations.</a:t>
+              <a:t>LECTURER CUE</a:t>
+            </a:r>
+          </a:p>
+          <a:p xmlns:a="http://schemas.openxmlformats.org/drawingml/2006/main">
+            <a:r>
+              <a:t>Explain the definitions before running or tracing the example. Point to the line or table row that produces each result.</a:t>
+            </a:r>
+          </a:p>
+          <a:p xmlns:a="http://schemas.openxmlformats.org/drawingml/2006/main">
+            <a:r>
+              <a:t/>
+            </a:r>
+          </a:p>
+          <a:p xmlns:a="http://schemas.openxmlformats.org/drawingml/2006/main">
+            <a:r>
+              <a:t>TEACHING MODE</a:t>
+            </a:r>
+          </a:p>
+          <a:p xmlns:a="http://schemas.openxmlformats.org/drawingml/2006/main">
+            <a:r>
+              <a:t>Demonstrate first. Read each new symbol aloud, trace the values and compare the shown output. Learners repeat worked examples individually after class.</a:t>
             </a:r>
           </a:p>
           <a:p xmlns:a="http://schemas.openxmlformats.org/drawingml/2006/main">
@@ -5976,37 +4386,22 @@
           </a:p>
           <a:p xmlns:a="http://schemas.openxmlformats.org/drawingml/2006/main">
             <a:r>
-              <a:t>A useful README. Move on after a learner can explain the current example or required action.</a:t>
-            </a:r>
-          </a:p>
-          <a:p xmlns:a="http://schemas.openxmlformats.org/drawingml/2006/main">
-            <a:r>
-              <a:t/>
-            </a:r>
-          </a:p>
-          <a:p xmlns:a="http://schemas.openxmlformats.org/drawingml/2006/main">
-            <a:r>
-              <a:t>TEACHING MODE</a:t>
-            </a:r>
-          </a:p>
-          <a:p xmlns:a="http://schemas.openxmlformats.org/drawingml/2006/main">
-            <a:r>
-              <a:t>Demonstrate the example directly. Explain each new name, symbol and output. Use the revision example for an individual check after class; no live partner activity is required.</a:t>
-            </a:r>
-          </a:p>
-          <a:p xmlns:a="http://schemas.openxmlformats.org/drawingml/2006/main">
-            <a:r>
-              <a:t/>
-            </a:r>
-          </a:p>
-          <a:p xmlns:a="http://schemas.openxmlformats.org/drawingml/2006/main">
-            <a:r>
-              <a:t>NEXT</a:t>
-            </a:r>
-          </a:p>
-          <a:p xmlns:a="http://schemas.openxmlformats.org/drawingml/2006/main">
-            <a:r>
               <a:t>A useful README.</a:t>
+            </a:r>
+          </a:p>
+          <a:p xmlns:a="http://schemas.openxmlformats.org/drawingml/2006/main">
+            <a:r>
+              <a:t/>
+            </a:r>
+          </a:p>
+          <a:p xmlns:a="http://schemas.openxmlformats.org/drawingml/2006/main">
+            <a:r>
+              <a:t>REFERENCES</a:t>
+            </a:r>
+          </a:p>
+          <a:p xmlns:a="http://schemas.openxmlformats.org/drawingml/2006/main">
+            <a:r>
+              <a:t/>
             </a:r>
           </a:p>
         </p:txBody>
@@ -6096,7 +4491,7 @@
           </a:p>
           <a:p xmlns:a="http://schemas.openxmlformats.org/drawingml/2006/main">
             <a:r>
-              <a:t>Build on Relative path and README. Explain why this example is needed before running it.</a:t>
+              <a:t>Previous slide: Relative path and README.</a:t>
             </a:r>
           </a:p>
           <a:p xmlns:a="http://schemas.openxmlformats.org/drawingml/2006/main">
@@ -6151,72 +4546,27 @@
           </a:p>
           <a:p xmlns:a="http://schemas.openxmlformats.org/drawingml/2006/main">
             <a:r>
-              <a:t>LECTURER DETAIL</a:t>
-            </a:r>
-          </a:p>
-          <a:p xmlns:a="http://schemas.openxmlformats.org/drawingml/2006/main">
-            <a:r>
-              <a:t>TEACHING PURPOSE</a:t>
-            </a:r>
-          </a:p>
-          <a:p xmlns:a="http://schemas.openxmlformats.org/drawingml/2006/main">
-            <a:r>
-              <a:t>A useful README</a:t>
-            </a:r>
-          </a:p>
-          <a:p xmlns:a="http://schemas.openxmlformats.org/drawingml/2006/main">
-            <a:r>
-              <a:t/>
-            </a:r>
-          </a:p>
-          <a:p xmlns:a="http://schemas.openxmlformats.org/drawingml/2006/main">
-            <a:r>
-              <a:t>CONNECT</a:t>
-            </a:r>
-          </a:p>
-          <a:p xmlns:a="http://schemas.openxmlformats.org/drawingml/2006/main">
-            <a:r>
-              <a:t>Build on the preceding slide: Words we will use.</a:t>
-            </a:r>
-          </a:p>
-          <a:p xmlns:a="http://schemas.openxmlformats.org/drawingml/2006/main">
-            <a:r>
-              <a:t/>
-            </a:r>
-          </a:p>
-          <a:p xmlns:a="http://schemas.openxmlformats.org/drawingml/2006/main">
-            <a:r>
-              <a:t>EXPLAIN IN ORDINARY WORDS</a:t>
-            </a:r>
-          </a:p>
-          <a:p xmlns:a="http://schemas.openxmlformats.org/drawingml/2006/main">
-            <a:r>
-              <a:t>A repository is the project folder and recorded history. A commit records a chosen change; uploading or pushing shares it. A README tells someone else how to run the work.</a:t>
-            </a:r>
-          </a:p>
-          <a:p xmlns:a="http://schemas.openxmlformats.org/drawingml/2006/main">
-            <a:r>
-              <a:t/>
-            </a:r>
-          </a:p>
-          <a:p xmlns:a="http://schemas.openxmlformats.org/drawingml/2006/main">
-            <a:r>
-              <a:t>CHECK AND EXPECTED ANSWER</a:t>
-            </a:r>
-          </a:p>
-          <a:p xmlns:a="http://schemas.openxmlformats.org/drawingml/2006/main">
-            <a:r>
-              <a:t>Does saving to GitHub hand in the assignment? No; submission requires the correct form and its confirmation.</a:t>
-            </a:r>
-          </a:p>
-          <a:p xmlns:a="http://schemas.openxmlformats.org/drawingml/2006/main">
-            <a:r>
-              <a:t/>
-            </a:r>
-          </a:p>
-          <a:p xmlns:a="http://schemas.openxmlformats.org/drawingml/2006/main">
-            <a:r>
-              <a:t>IF LEARNERS ARE STUCK</a:t>
+              <a:t>LECTURER CUE</a:t>
+            </a:r>
+          </a:p>
+          <a:p xmlns:a="http://schemas.openxmlformats.org/drawingml/2006/main">
+            <a:r>
+              <a:t>Explain the definitions before running or tracing the example. Point to the line or table row that produces each result.</a:t>
+            </a:r>
+          </a:p>
+          <a:p xmlns:a="http://schemas.openxmlformats.org/drawingml/2006/main">
+            <a:r>
+              <a:t/>
+            </a:r>
+          </a:p>
+          <a:p xmlns:a="http://schemas.openxmlformats.org/drawingml/2006/main">
+            <a:r>
+              <a:t>TEACHING MODE</a:t>
+            </a:r>
+          </a:p>
+          <a:p xmlns:a="http://schemas.openxmlformats.org/drawingml/2006/main">
+            <a:r>
+              <a:t>Demonstrate first. Read each new symbol aloud, trace the values and compare the shown output. Learners repeat worked examples individually after class.</a:t>
             </a:r>
           </a:p>
           <a:p xmlns:a="http://schemas.openxmlformats.org/drawingml/2006/main">
@@ -6231,37 +4581,22 @@
           </a:p>
           <a:p xmlns:a="http://schemas.openxmlformats.org/drawingml/2006/main">
             <a:r>
-              <a:t>Someone else needs to reproduce the result. Move on after a learner can explain the current example or required action.</a:t>
-            </a:r>
-          </a:p>
-          <a:p xmlns:a="http://schemas.openxmlformats.org/drawingml/2006/main">
-            <a:r>
-              <a:t/>
-            </a:r>
-          </a:p>
-          <a:p xmlns:a="http://schemas.openxmlformats.org/drawingml/2006/main">
-            <a:r>
-              <a:t>TEACHING MODE</a:t>
-            </a:r>
-          </a:p>
-          <a:p xmlns:a="http://schemas.openxmlformats.org/drawingml/2006/main">
-            <a:r>
-              <a:t>Demonstrate the example directly. Explain each new name, symbol and output. Use the revision example for an individual check after class; no live partner activity is required.</a:t>
-            </a:r>
-          </a:p>
-          <a:p xmlns:a="http://schemas.openxmlformats.org/drawingml/2006/main">
-            <a:r>
-              <a:t/>
-            </a:r>
-          </a:p>
-          <a:p xmlns:a="http://schemas.openxmlformats.org/drawingml/2006/main">
-            <a:r>
-              <a:t>NEXT</a:t>
-            </a:r>
-          </a:p>
-          <a:p xmlns:a="http://schemas.openxmlformats.org/drawingml/2006/main">
-            <a:r>
               <a:t>Someone else needs to reproduce the result.</a:t>
+            </a:r>
+          </a:p>
+          <a:p xmlns:a="http://schemas.openxmlformats.org/drawingml/2006/main">
+            <a:r>
+              <a:t/>
+            </a:r>
+          </a:p>
+          <a:p xmlns:a="http://schemas.openxmlformats.org/drawingml/2006/main">
+            <a:r>
+              <a:t>REFERENCES</a:t>
+            </a:r>
+          </a:p>
+          <a:p xmlns:a="http://schemas.openxmlformats.org/drawingml/2006/main">
+            <a:r>
+              <a:t/>
             </a:r>
           </a:p>
         </p:txBody>
@@ -6351,7 +4686,7 @@
           </a:p>
           <a:p xmlns:a="http://schemas.openxmlformats.org/drawingml/2006/main">
             <a:r>
-              <a:t>Build on A useful README. Explain why this example is needed before running it.</a:t>
+              <a:t>Previous slide: A useful README.</a:t>
             </a:r>
           </a:p>
           <a:p xmlns:a="http://schemas.openxmlformats.org/drawingml/2006/main">
@@ -6376,41 +4711,6 @@
           </a:p>
           <a:p xmlns:a="http://schemas.openxmlformats.org/drawingml/2006/main">
             <a:r>
-              <a:t>LECTURER DETAIL</a:t>
-            </a:r>
-          </a:p>
-          <a:p xmlns:a="http://schemas.openxmlformats.org/drawingml/2006/main">
-            <a:r>
-              <a:t>TEACHING PURPOSE</a:t>
-            </a:r>
-          </a:p>
-          <a:p xmlns:a="http://schemas.openxmlformats.org/drawingml/2006/main">
-            <a:r>
-              <a:t>Someone else needs to reproduce the result</a:t>
-            </a:r>
-          </a:p>
-          <a:p xmlns:a="http://schemas.openxmlformats.org/drawingml/2006/main">
-            <a:r>
-              <a:t/>
-            </a:r>
-          </a:p>
-          <a:p xmlns:a="http://schemas.openxmlformats.org/drawingml/2006/main">
-            <a:r>
-              <a:t>CONNECT</a:t>
-            </a:r>
-          </a:p>
-          <a:p xmlns:a="http://schemas.openxmlformats.org/drawingml/2006/main">
-            <a:r>
-              <a:t>Build on the preceding slide: A useful README.</a:t>
-            </a:r>
-          </a:p>
-          <a:p xmlns:a="http://schemas.openxmlformats.org/drawingml/2006/main">
-            <a:r>
-              <a:t/>
-            </a:r>
-          </a:p>
-          <a:p xmlns:a="http://schemas.openxmlformats.org/drawingml/2006/main">
-            <a:r>
               <a:t>LECTURER CUE</a:t>
             </a:r>
           </a:p>
@@ -6426,42 +4726,42 @@
           </a:p>
           <a:p xmlns:a="http://schemas.openxmlformats.org/drawingml/2006/main">
             <a:r>
+              <a:t>TEACHING MODE</a:t>
+            </a:r>
+          </a:p>
+          <a:p xmlns:a="http://schemas.openxmlformats.org/drawingml/2006/main">
+            <a:r>
+              <a:t>Demonstrate first. Read each new symbol aloud, trace the values and compare the shown output. Learners repeat worked examples individually after class.</a:t>
+            </a:r>
+          </a:p>
+          <a:p xmlns:a="http://schemas.openxmlformats.org/drawingml/2006/main">
+            <a:r>
+              <a:t/>
+            </a:r>
+          </a:p>
+          <a:p xmlns:a="http://schemas.openxmlformats.org/drawingml/2006/main">
+            <a:r>
               <a:t>NEXT</a:t>
             </a:r>
           </a:p>
           <a:p xmlns:a="http://schemas.openxmlformats.org/drawingml/2006/main">
             <a:r>
-              <a:t>A reproducible notebook starts fresh. Move on after a learner can explain the current example or required action.</a:t>
-            </a:r>
-          </a:p>
-          <a:p xmlns:a="http://schemas.openxmlformats.org/drawingml/2006/main">
-            <a:r>
-              <a:t/>
-            </a:r>
-          </a:p>
-          <a:p xmlns:a="http://schemas.openxmlformats.org/drawingml/2006/main">
-            <a:r>
-              <a:t>TEACHING MODE</a:t>
-            </a:r>
-          </a:p>
-          <a:p xmlns:a="http://schemas.openxmlformats.org/drawingml/2006/main">
-            <a:r>
-              <a:t>Demonstrate the example directly. Explain each new name, symbol and output. Use the revision example for an individual check after class; no live partner activity is required.</a:t>
-            </a:r>
-          </a:p>
-          <a:p xmlns:a="http://schemas.openxmlformats.org/drawingml/2006/main">
-            <a:r>
-              <a:t/>
-            </a:r>
-          </a:p>
-          <a:p xmlns:a="http://schemas.openxmlformats.org/drawingml/2006/main">
-            <a:r>
-              <a:t>NEXT</a:t>
-            </a:r>
-          </a:p>
-          <a:p xmlns:a="http://schemas.openxmlformats.org/drawingml/2006/main">
-            <a:r>
               <a:t>A reproducible notebook starts fresh.</a:t>
+            </a:r>
+          </a:p>
+          <a:p xmlns:a="http://schemas.openxmlformats.org/drawingml/2006/main">
+            <a:r>
+              <a:t/>
+            </a:r>
+          </a:p>
+          <a:p xmlns:a="http://schemas.openxmlformats.org/drawingml/2006/main">
+            <a:r>
+              <a:t>REFERENCES</a:t>
+            </a:r>
+          </a:p>
+          <a:p xmlns:a="http://schemas.openxmlformats.org/drawingml/2006/main">
+            <a:r>
+              <a:t/>
             </a:r>
           </a:p>
         </p:txBody>
@@ -6551,7 +4851,7 @@
           </a:p>
           <a:p xmlns:a="http://schemas.openxmlformats.org/drawingml/2006/main">
             <a:r>
-              <a:t>Build on Someone else needs to reproduce the result. Explain why this example is needed before running it.</a:t>
+              <a:t>Previous slide: Someone else needs to reproduce the result.</a:t>
             </a:r>
           </a:p>
           <a:p xmlns:a="http://schemas.openxmlformats.org/drawingml/2006/main">
@@ -6576,41 +4876,6 @@
           </a:p>
           <a:p xmlns:a="http://schemas.openxmlformats.org/drawingml/2006/main">
             <a:r>
-              <a:t>LECTURER DETAIL</a:t>
-            </a:r>
-          </a:p>
-          <a:p xmlns:a="http://schemas.openxmlformats.org/drawingml/2006/main">
-            <a:r>
-              <a:t>TEACHING PURPOSE</a:t>
-            </a:r>
-          </a:p>
-          <a:p xmlns:a="http://schemas.openxmlformats.org/drawingml/2006/main">
-            <a:r>
-              <a:t>A reproducible notebook starts fresh</a:t>
-            </a:r>
-          </a:p>
-          <a:p xmlns:a="http://schemas.openxmlformats.org/drawingml/2006/main">
-            <a:r>
-              <a:t/>
-            </a:r>
-          </a:p>
-          <a:p xmlns:a="http://schemas.openxmlformats.org/drawingml/2006/main">
-            <a:r>
-              <a:t>CONNECT</a:t>
-            </a:r>
-          </a:p>
-          <a:p xmlns:a="http://schemas.openxmlformats.org/drawingml/2006/main">
-            <a:r>
-              <a:t>Build on the preceding slide: Someone else needs to reproduce the result.</a:t>
-            </a:r>
-          </a:p>
-          <a:p xmlns:a="http://schemas.openxmlformats.org/drawingml/2006/main">
-            <a:r>
-              <a:t/>
-            </a:r>
-          </a:p>
-          <a:p xmlns:a="http://schemas.openxmlformats.org/drawingml/2006/main">
-            <a:r>
               <a:t>LECTURER CUE</a:t>
             </a:r>
           </a:p>
@@ -6631,42 +4896,12 @@
           </a:p>
           <a:p xmlns:a="http://schemas.openxmlformats.org/drawingml/2006/main">
             <a:r>
-              <a:t>EXPLAIN IN ORDINARY WORDS</a:t>
-            </a:r>
-          </a:p>
-          <a:p xmlns:a="http://schemas.openxmlformats.org/drawingml/2006/main">
-            <a:r>
-              <a:t>A notebook contains code cells and explanatory text cells. The runtime remembers values from cells that actually ran, which may differ from their visual order.</a:t>
-            </a:r>
-          </a:p>
-          <a:p xmlns:a="http://schemas.openxmlformats.org/drawingml/2006/main">
-            <a:r>
-              <a:t/>
-            </a:r>
-          </a:p>
-          <a:p xmlns:a="http://schemas.openxmlformats.org/drawingml/2006/main">
-            <a:r>
-              <a:t>CHECK AND EXPECTED ANSWER</a:t>
-            </a:r>
-          </a:p>
-          <a:p xmlns:a="http://schemas.openxmlformats.org/drawingml/2006/main">
-            <a:r>
-              <a:t>Does editing a cell update a value already stored in memory? No; the cell must run.</a:t>
-            </a:r>
-          </a:p>
-          <a:p xmlns:a="http://schemas.openxmlformats.org/drawingml/2006/main">
-            <a:r>
-              <a:t/>
-            </a:r>
-          </a:p>
-          <a:p xmlns:a="http://schemas.openxmlformats.org/drawingml/2006/main">
-            <a:r>
-              <a:t>IF LEARNERS ARE STUCK</a:t>
-            </a:r>
-          </a:p>
-          <a:p xmlns:a="http://schemas.openxmlformats.org/drawingml/2006/main">
-            <a:r>
-              <a:t>Outside an assessment restriction, restart and run from the top after loading data. Fix the first error before later cells; save the successful notebook.</a:t>
+              <a:t>TEACHING MODE</a:t>
+            </a:r>
+          </a:p>
+          <a:p xmlns:a="http://schemas.openxmlformats.org/drawingml/2006/main">
+            <a:r>
+              <a:t>Demonstrate first. Read each new symbol aloud, trace the values and compare the shown output. Learners repeat worked examples individually after class.</a:t>
             </a:r>
           </a:p>
           <a:p xmlns:a="http://schemas.openxmlformats.org/drawingml/2006/main">
@@ -6681,37 +4916,22 @@
           </a:p>
           <a:p xmlns:a="http://schemas.openxmlformats.org/drawingml/2006/main">
             <a:r>
-              <a:t>Saved outputs can hide missing steps. Move on after a learner can explain the current example or required action.</a:t>
-            </a:r>
-          </a:p>
-          <a:p xmlns:a="http://schemas.openxmlformats.org/drawingml/2006/main">
-            <a:r>
-              <a:t/>
-            </a:r>
-          </a:p>
-          <a:p xmlns:a="http://schemas.openxmlformats.org/drawingml/2006/main">
-            <a:r>
-              <a:t>TEACHING MODE</a:t>
-            </a:r>
-          </a:p>
-          <a:p xmlns:a="http://schemas.openxmlformats.org/drawingml/2006/main">
-            <a:r>
-              <a:t>Demonstrate the example directly. Explain each new name, symbol and output. Use the revision example for an individual check after class; no live partner activity is required.</a:t>
-            </a:r>
-          </a:p>
-          <a:p xmlns:a="http://schemas.openxmlformats.org/drawingml/2006/main">
-            <a:r>
-              <a:t/>
-            </a:r>
-          </a:p>
-          <a:p xmlns:a="http://schemas.openxmlformats.org/drawingml/2006/main">
-            <a:r>
-              <a:t>NEXT</a:t>
-            </a:r>
-          </a:p>
-          <a:p xmlns:a="http://schemas.openxmlformats.org/drawingml/2006/main">
-            <a:r>
               <a:t>Saved outputs can hide missing steps.</a:t>
+            </a:r>
+          </a:p>
+          <a:p xmlns:a="http://schemas.openxmlformats.org/drawingml/2006/main">
+            <a:r>
+              <a:t/>
+            </a:r>
+          </a:p>
+          <a:p xmlns:a="http://schemas.openxmlformats.org/drawingml/2006/main">
+            <a:r>
+              <a:t>REFERENCES</a:t>
+            </a:r>
+          </a:p>
+          <a:p xmlns:a="http://schemas.openxmlformats.org/drawingml/2006/main">
+            <a:r>
+              <a:t>Source: existing course illustration figs/execution_trap.png. These are illustrative examples, not this cohort’s assessed results.</a:t>
             </a:r>
           </a:p>
         </p:txBody>
@@ -6758,7 +4978,7 @@
           <p:cNvPr id="4" name="Accent rule">
             <a:extLst xmlns:a="http://schemas.openxmlformats.org/drawingml/2006/main">
               <a:ext uri="{FF2B5EF4-FFF2-40B4-BE49-F238E27FC236}">
-                <a16:creationId xmlns:a16="http://schemas.microsoft.com/office/drawing/2014/main" id="{17272A57-B0D7-4A06-8F9E-CA6DCF87DDA4}"/>
+                <a16:creationId xmlns:a16="http://schemas.microsoft.com/office/drawing/2014/main" id="{4082DAB4-E4D8-4AE6-AFFC-FCCC409E2611}"/>
               </a:ext>
             </a:extLst>
           </p:cNvPr>
@@ -6789,7 +5009,7 @@
           <p:cNvPr id="2" name="Title">
             <a:extLst xmlns:a="http://schemas.openxmlformats.org/drawingml/2006/main">
               <a:ext uri="{FF2B5EF4-FFF2-40B4-BE49-F238E27FC236}">
-                <a16:creationId xmlns:a16="http://schemas.microsoft.com/office/drawing/2014/main" id="{3CDA6ED2-1794-43A5-A260-1D8A4021E2AA}"/>
+                <a16:creationId xmlns:a16="http://schemas.microsoft.com/office/drawing/2014/main" id="{BEE44F74-73E3-4EF2-A603-C23637C1FFF1}"/>
               </a:ext>
             </a:extLst>
           </p:cNvPr>
@@ -6936,7 +5156,7 @@
           <p:cNvPr id="3" name="Subtitle">
             <a:extLst xmlns:a="http://schemas.openxmlformats.org/drawingml/2006/main">
               <a:ext uri="{FF2B5EF4-FFF2-40B4-BE49-F238E27FC236}">
-                <a16:creationId xmlns:a16="http://schemas.microsoft.com/office/drawing/2014/main" id="{F50D5DEF-3ACD-4ACC-ADC9-30D1E10C07DE}"/>
+                <a16:creationId xmlns:a16="http://schemas.microsoft.com/office/drawing/2014/main" id="{7756A1AB-C021-4241-B426-8F03247412DB}"/>
               </a:ext>
             </a:extLst>
           </p:cNvPr>
@@ -7100,7 +5320,7 @@
           <p:cNvPr id="3" name="Accent rule">
             <a:extLst xmlns:a="http://schemas.openxmlformats.org/drawingml/2006/main">
               <a:ext uri="{FF2B5EF4-FFF2-40B4-BE49-F238E27FC236}">
-                <a16:creationId xmlns:a16="http://schemas.microsoft.com/office/drawing/2014/main" id="{0E6F42D3-42D5-4E00-BAFE-643B44038E10}"/>
+                <a16:creationId xmlns:a16="http://schemas.microsoft.com/office/drawing/2014/main" id="{7FC901AE-2105-4C00-8DA7-DF7E87E974CC}"/>
               </a:ext>
             </a:extLst>
           </p:cNvPr>
@@ -7131,7 +5351,7 @@
           <p:cNvPr id="2" name="Section title">
             <a:extLst xmlns:a="http://schemas.openxmlformats.org/drawingml/2006/main">
               <a:ext uri="{FF2B5EF4-FFF2-40B4-BE49-F238E27FC236}">
-                <a16:creationId xmlns:a16="http://schemas.microsoft.com/office/drawing/2014/main" id="{E9B6BB82-5691-4A13-BDDF-93AC3CA8224F}"/>
+                <a16:creationId xmlns:a16="http://schemas.microsoft.com/office/drawing/2014/main" id="{B66071C1-C7BB-452C-B503-257E24B2EC11}"/>
               </a:ext>
             </a:extLst>
           </p:cNvPr>
@@ -7295,7 +5515,7 @@
           <p:cNvPr id="4" name="Accent rule">
             <a:extLst xmlns:a="http://schemas.openxmlformats.org/drawingml/2006/main">
               <a:ext uri="{FF2B5EF4-FFF2-40B4-BE49-F238E27FC236}">
-                <a16:creationId xmlns:a16="http://schemas.microsoft.com/office/drawing/2014/main" id="{1B66DBB9-509C-4F9F-A1FE-36CA25CD90DC}"/>
+                <a16:creationId xmlns:a16="http://schemas.microsoft.com/office/drawing/2014/main" id="{0E85B71D-B19F-4DAD-807A-27621D773A40}"/>
               </a:ext>
             </a:extLst>
           </p:cNvPr>
@@ -7326,7 +5546,7 @@
           <p:cNvPr id="2" name="Title">
             <a:extLst xmlns:a="http://schemas.openxmlformats.org/drawingml/2006/main">
               <a:ext uri="{FF2B5EF4-FFF2-40B4-BE49-F238E27FC236}">
-                <a16:creationId xmlns:a16="http://schemas.microsoft.com/office/drawing/2014/main" id="{EF3F59E0-5EAF-4A25-841E-13EDAC9EE300}"/>
+                <a16:creationId xmlns:a16="http://schemas.microsoft.com/office/drawing/2014/main" id="{899CAE3F-CDDE-4DB3-A71A-506F83D79D20}"/>
               </a:ext>
             </a:extLst>
           </p:cNvPr>
@@ -7473,7 +5693,7 @@
           <p:cNvPr id="3" name="Body">
             <a:extLst xmlns:a="http://schemas.openxmlformats.org/drawingml/2006/main">
               <a:ext uri="{FF2B5EF4-FFF2-40B4-BE49-F238E27FC236}">
-                <a16:creationId xmlns:a16="http://schemas.microsoft.com/office/drawing/2014/main" id="{D2CCB8CE-250B-465B-94B8-4F6E1252A74E}"/>
+                <a16:creationId xmlns:a16="http://schemas.microsoft.com/office/drawing/2014/main" id="{FA55A835-6694-4AB3-B83E-D9E46A77F7F8}"/>
               </a:ext>
             </a:extLst>
           </p:cNvPr>
@@ -7637,7 +5857,7 @@
           <p:cNvPr id="5" name="Accent rule">
             <a:extLst xmlns:a="http://schemas.openxmlformats.org/drawingml/2006/main">
               <a:ext uri="{FF2B5EF4-FFF2-40B4-BE49-F238E27FC236}">
-                <a16:creationId xmlns:a16="http://schemas.microsoft.com/office/drawing/2014/main" id="{1DB39669-81F5-4E48-9518-E98E0D516A87}"/>
+                <a16:creationId xmlns:a16="http://schemas.microsoft.com/office/drawing/2014/main" id="{8DD37BE6-526F-4DE0-9786-25A10C41D642}"/>
               </a:ext>
             </a:extLst>
           </p:cNvPr>
@@ -7668,7 +5888,7 @@
           <p:cNvPr id="2" name="Title">
             <a:extLst xmlns:a="http://schemas.openxmlformats.org/drawingml/2006/main">
               <a:ext uri="{FF2B5EF4-FFF2-40B4-BE49-F238E27FC236}">
-                <a16:creationId xmlns:a16="http://schemas.microsoft.com/office/drawing/2014/main" id="{BFA75AB0-7391-48FD-AC55-25EE7ECF1390}"/>
+                <a16:creationId xmlns:a16="http://schemas.microsoft.com/office/drawing/2014/main" id="{734068A8-07FD-48B7-8AE4-9E8384337F82}"/>
               </a:ext>
             </a:extLst>
           </p:cNvPr>
@@ -7815,7 +6035,7 @@
           <p:cNvPr id="3" name="Left column">
             <a:extLst xmlns:a="http://schemas.openxmlformats.org/drawingml/2006/main">
               <a:ext uri="{FF2B5EF4-FFF2-40B4-BE49-F238E27FC236}">
-                <a16:creationId xmlns:a16="http://schemas.microsoft.com/office/drawing/2014/main" id="{621767FD-C08A-4A58-AF08-9AAC10502EF3}"/>
+                <a16:creationId xmlns:a16="http://schemas.microsoft.com/office/drawing/2014/main" id="{8D42D88B-C3E0-4878-BDDF-6978D2D05F6D}"/>
               </a:ext>
             </a:extLst>
           </p:cNvPr>
@@ -7962,7 +6182,7 @@
           <p:cNvPr id="4" name="Right column">
             <a:extLst xmlns:a="http://schemas.openxmlformats.org/drawingml/2006/main">
               <a:ext uri="{FF2B5EF4-FFF2-40B4-BE49-F238E27FC236}">
-                <a16:creationId xmlns:a16="http://schemas.microsoft.com/office/drawing/2014/main" id="{C4D466FD-1B51-493F-A56D-4DF91854908B}"/>
+                <a16:creationId xmlns:a16="http://schemas.microsoft.com/office/drawing/2014/main" id="{8D328411-C693-423D-BE64-39B1607B20C5}"/>
               </a:ext>
             </a:extLst>
           </p:cNvPr>
@@ -8126,7 +6346,7 @@
           <p:cNvPr id="4" name="Accent rule">
             <a:extLst xmlns:a="http://schemas.openxmlformats.org/drawingml/2006/main">
               <a:ext uri="{FF2B5EF4-FFF2-40B4-BE49-F238E27FC236}">
-                <a16:creationId xmlns:a16="http://schemas.microsoft.com/office/drawing/2014/main" id="{3174932E-7B5F-459D-A8DD-9D4B46D21609}"/>
+                <a16:creationId xmlns:a16="http://schemas.microsoft.com/office/drawing/2014/main" id="{B9482E05-2C09-4943-AA07-9E42A2923FAF}"/>
               </a:ext>
             </a:extLst>
           </p:cNvPr>
@@ -8157,7 +6377,7 @@
           <p:cNvPr id="2" name="Title">
             <a:extLst xmlns:a="http://schemas.openxmlformats.org/drawingml/2006/main">
               <a:ext uri="{FF2B5EF4-FFF2-40B4-BE49-F238E27FC236}">
-                <a16:creationId xmlns:a16="http://schemas.microsoft.com/office/drawing/2014/main" id="{B756575B-F1F9-4A55-8ED0-A6413DE47A88}"/>
+                <a16:creationId xmlns:a16="http://schemas.microsoft.com/office/drawing/2014/main" id="{27838B86-4319-4E59-895A-AEFD8F6469ED}"/>
               </a:ext>
             </a:extLst>
           </p:cNvPr>
@@ -8304,7 +6524,7 @@
           <p:cNvPr id="3" name="Left column">
             <a:extLst xmlns:a="http://schemas.openxmlformats.org/drawingml/2006/main">
               <a:ext uri="{FF2B5EF4-FFF2-40B4-BE49-F238E27FC236}">
-                <a16:creationId xmlns:a16="http://schemas.microsoft.com/office/drawing/2014/main" id="{7523F844-FEAD-417C-953E-3731843CE29E}"/>
+                <a16:creationId xmlns:a16="http://schemas.microsoft.com/office/drawing/2014/main" id="{054C6CEE-2206-4092-9E8A-A2081E9DCE9A}"/>
               </a:ext>
             </a:extLst>
           </p:cNvPr>
@@ -8489,12 +6709,12 @@
   </p:cSld>
   <p:clrMap bg1="lt1" tx1="dk1" bg2="lt2" tx2="dk2" accent1="accent1" accent2="accent2" accent3="accent3" accent4="accent4" accent5="accent5" accent6="accent6" hlink="hlink" folHlink="folHlink"/>
   <p:sldLayoutIdLst>
-    <p:sldLayoutId xmlns:r="http://schemas.openxmlformats.org/officeDocument/2006/relationships" id="2147483649" r:id="R6a84fed50a774d47"/>
-    <p:sldLayoutId xmlns:r="http://schemas.openxmlformats.org/officeDocument/2006/relationships" id="2147483650" r:id="R85ad7cff576f4b63"/>
-    <p:sldLayoutId xmlns:r="http://schemas.openxmlformats.org/officeDocument/2006/relationships" id="2147483651" r:id="Re582d932cc2445c6"/>
-    <p:sldLayoutId xmlns:r="http://schemas.openxmlformats.org/officeDocument/2006/relationships" id="2147483652" r:id="Re9615388d12d4889"/>
-    <p:sldLayoutId xmlns:r="http://schemas.openxmlformats.org/officeDocument/2006/relationships" id="2147483653" r:id="R5b5a52dd0cfd408d"/>
-    <p:sldLayoutId xmlns:r="http://schemas.openxmlformats.org/officeDocument/2006/relationships" id="2147483654" r:id="R76259b65fa8a4047"/>
+    <p:sldLayoutId xmlns:r="http://schemas.openxmlformats.org/officeDocument/2006/relationships" id="2147483649" r:id="R4cda57df35a143e0"/>
+    <p:sldLayoutId xmlns:r="http://schemas.openxmlformats.org/officeDocument/2006/relationships" id="2147483650" r:id="R895a3537db0149e5"/>
+    <p:sldLayoutId xmlns:r="http://schemas.openxmlformats.org/officeDocument/2006/relationships" id="2147483651" r:id="R46ea0c1a20cf4282"/>
+    <p:sldLayoutId xmlns:r="http://schemas.openxmlformats.org/officeDocument/2006/relationships" id="2147483652" r:id="R3ee241fa965848bf"/>
+    <p:sldLayoutId xmlns:r="http://schemas.openxmlformats.org/officeDocument/2006/relationships" id="2147483653" r:id="Rebed751cb8304c5c"/>
+    <p:sldLayoutId xmlns:r="http://schemas.openxmlformats.org/officeDocument/2006/relationships" id="2147483654" r:id="Rea7ff5b3328e4535"/>
   </p:sldLayoutIdLst>
   <p:txStyles>
     <p:titleStyle>
@@ -9049,7 +7269,7 @@
           <p:nvPr/>
         </p:nvPicPr>
         <p:blipFill>
-          <a:blip xmlns:r="http://schemas.openxmlformats.org/officeDocument/2006/relationships" xmlns:a="http://schemas.openxmlformats.org/drawingml/2006/main" r:embed="Rbaaa82c7fbdd4305"/>
+          <a:blip xmlns:r="http://schemas.openxmlformats.org/officeDocument/2006/relationships" xmlns:a="http://schemas.openxmlformats.org/drawingml/2006/main" r:embed="R6fe56c10a1a24a80"/>
           <a:stretch xmlns:a="http://schemas.openxmlformats.org/drawingml/2006/main"/>
         </p:blipFill>
         <p:spPr>
@@ -9067,7 +7287,7 @@
           <p:cNvPr id="2" name="">
             <a:extLst xmlns:a="http://schemas.openxmlformats.org/drawingml/2006/main">
               <a:ext uri="{FF2B5EF4-FFF2-40B4-BE49-F238E27FC236}">
-                <a16:creationId xmlns:a16="http://schemas.microsoft.com/office/drawing/2014/main" id="{985F26BA-5B07-4F77-98A5-CFA78679EE6B}"/>
+                <a16:creationId xmlns:a16="http://schemas.microsoft.com/office/drawing/2014/main" id="{6E603D42-7BE9-4FC1-8427-B7FF11489759}"/>
               </a:ext>
             </a:extLst>
           </p:cNvPr>
@@ -9097,7 +7317,7 @@
           <p:cNvPr id="3" name="">
             <a:extLst xmlns:a="http://schemas.openxmlformats.org/drawingml/2006/main">
               <a:ext uri="{FF2B5EF4-FFF2-40B4-BE49-F238E27FC236}">
-                <a16:creationId xmlns:a16="http://schemas.microsoft.com/office/drawing/2014/main" id="{FC19AB93-BF7E-4CD9-93DC-C74031A95A89}"/>
+                <a16:creationId xmlns:a16="http://schemas.microsoft.com/office/drawing/2014/main" id="{5C72A446-DCEC-49A3-AF98-BD3261592B4F}"/>
               </a:ext>
             </a:extLst>
           </p:cNvPr>
@@ -9154,7 +7374,7 @@
           <p:cNvPr id="4" name="">
             <a:extLst xmlns:a="http://schemas.openxmlformats.org/drawingml/2006/main">
               <a:ext uri="{FF2B5EF4-FFF2-40B4-BE49-F238E27FC236}">
-                <a16:creationId xmlns:a16="http://schemas.microsoft.com/office/drawing/2014/main" id="{46685675-87F3-4FD0-9B52-C46A2F9715F0}"/>
+                <a16:creationId xmlns:a16="http://schemas.microsoft.com/office/drawing/2014/main" id="{40DF5211-447C-4EB1-93A3-328AA7A27DBD}"/>
               </a:ext>
             </a:extLst>
           </p:cNvPr>
@@ -9211,7 +7431,7 @@
           <p:cNvPr id="5" name="">
             <a:extLst xmlns:a="http://schemas.openxmlformats.org/drawingml/2006/main">
               <a:ext uri="{FF2B5EF4-FFF2-40B4-BE49-F238E27FC236}">
-                <a16:creationId xmlns:a16="http://schemas.microsoft.com/office/drawing/2014/main" id="{4AC8AA2F-6651-4D3D-8B8B-108ED1A9DDDA}"/>
+                <a16:creationId xmlns:a16="http://schemas.microsoft.com/office/drawing/2014/main" id="{00D3B09F-BB0E-40D3-9F07-0AEE2FB5B486}"/>
               </a:ext>
             </a:extLst>
           </p:cNvPr>
@@ -9268,7 +7488,7 @@
           <p:cNvPr id="6" name="">
             <a:extLst xmlns:a="http://schemas.openxmlformats.org/drawingml/2006/main">
               <a:ext uri="{FF2B5EF4-FFF2-40B4-BE49-F238E27FC236}">
-                <a16:creationId xmlns:a16="http://schemas.microsoft.com/office/drawing/2014/main" id="{1BE595B8-6974-4E0C-A5D4-1C5ABDA02788}"/>
+                <a16:creationId xmlns:a16="http://schemas.microsoft.com/office/drawing/2014/main" id="{C4F54775-CA0E-44E4-9736-EB9B34953F17}"/>
               </a:ext>
             </a:extLst>
           </p:cNvPr>
@@ -9346,7 +7566,7 @@
     </p:spTree>
     <p:extLst>
       <p:ext uri="{BB962C8B-B14F-4D97-AF65-F5344CB8AC3E}">
-        <p14:creationId xmlns:p14="http://schemas.microsoft.com/office/powerpoint/2010/main" val="433567993"/>
+        <p14:creationId xmlns:p14="http://schemas.microsoft.com/office/powerpoint/2010/main" val="488060459"/>
       </p:ext>
     </p:extLst>
   </p:cSld>
@@ -9377,7 +7597,7 @@
           <p:cNvPr id="11" name="">
             <a:extLst xmlns:a="http://schemas.openxmlformats.org/drawingml/2006/main">
               <a:ext uri="{FF2B5EF4-FFF2-40B4-BE49-F238E27FC236}">
-                <a16:creationId xmlns:a16="http://schemas.microsoft.com/office/drawing/2014/main" id="{60663E98-1C34-4BF6-B77B-27B16EBC799C}"/>
+                <a16:creationId xmlns:a16="http://schemas.microsoft.com/office/drawing/2014/main" id="{628718D9-D3BD-4354-A6F4-1F52187225B4}"/>
               </a:ext>
             </a:extLst>
           </p:cNvPr>
@@ -9407,7 +7627,7 @@
           <p:cNvPr id="2" name="">
             <a:extLst xmlns:a="http://schemas.openxmlformats.org/drawingml/2006/main">
               <a:ext uri="{FF2B5EF4-FFF2-40B4-BE49-F238E27FC236}">
-                <a16:creationId xmlns:a16="http://schemas.microsoft.com/office/drawing/2014/main" id="{5539B625-53F8-4735-83A0-B12CF84BE08C}"/>
+                <a16:creationId xmlns:a16="http://schemas.microsoft.com/office/drawing/2014/main" id="{6EC8E921-531A-44FE-9C3D-C00BC936284B}"/>
               </a:ext>
             </a:extLst>
           </p:cNvPr>
@@ -9464,7 +7684,7 @@
           <p:cNvPr id="3" name="">
             <a:extLst xmlns:a="http://schemas.openxmlformats.org/drawingml/2006/main">
               <a:ext uri="{FF2B5EF4-FFF2-40B4-BE49-F238E27FC236}">
-                <a16:creationId xmlns:a16="http://schemas.microsoft.com/office/drawing/2014/main" id="{6A5D66A8-2A54-496C-AC18-6853D703F89C}"/>
+                <a16:creationId xmlns:a16="http://schemas.microsoft.com/office/drawing/2014/main" id="{570088FE-444C-4270-A4E8-0AD47C5F3848}"/>
               </a:ext>
             </a:extLst>
           </p:cNvPr>
@@ -9521,7 +7741,7 @@
           <p:cNvPr id="4" name="">
             <a:extLst xmlns:a="http://schemas.openxmlformats.org/drawingml/2006/main">
               <a:ext uri="{FF2B5EF4-FFF2-40B4-BE49-F238E27FC236}">
-                <a16:creationId xmlns:a16="http://schemas.microsoft.com/office/drawing/2014/main" id="{D0A15E96-0564-4500-A5EE-0298C7648B3B}"/>
+                <a16:creationId xmlns:a16="http://schemas.microsoft.com/office/drawing/2014/main" id="{FEF10A43-4349-4765-9CC8-418F5809007E}"/>
               </a:ext>
             </a:extLst>
           </p:cNvPr>
@@ -9578,7 +7798,7 @@
           <p:cNvPr id="5" name="">
             <a:extLst xmlns:a="http://schemas.openxmlformats.org/drawingml/2006/main">
               <a:ext uri="{FF2B5EF4-FFF2-40B4-BE49-F238E27FC236}">
-                <a16:creationId xmlns:a16="http://schemas.microsoft.com/office/drawing/2014/main" id="{6390ADB1-5C34-4318-8A3C-6946E9689C7C}"/>
+                <a16:creationId xmlns:a16="http://schemas.microsoft.com/office/drawing/2014/main" id="{9265C9FC-0807-4F3E-99A1-94F8DF699819}"/>
               </a:ext>
             </a:extLst>
           </p:cNvPr>
@@ -9635,7 +7855,7 @@
           <p:cNvPr id="6" name="">
             <a:extLst xmlns:a="http://schemas.openxmlformats.org/drawingml/2006/main">
               <a:ext uri="{FF2B5EF4-FFF2-40B4-BE49-F238E27FC236}">
-                <a16:creationId xmlns:a16="http://schemas.microsoft.com/office/drawing/2014/main" id="{7E470410-6840-455F-AF4B-0C11C3163A95}"/>
+                <a16:creationId xmlns:a16="http://schemas.microsoft.com/office/drawing/2014/main" id="{0DA6631E-515B-4652-A567-DAB7D5732B60}"/>
               </a:ext>
             </a:extLst>
           </p:cNvPr>
@@ -9692,7 +7912,7 @@
           <p:cNvPr id="7" name="">
             <a:extLst xmlns:a="http://schemas.openxmlformats.org/drawingml/2006/main">
               <a:ext uri="{FF2B5EF4-FFF2-40B4-BE49-F238E27FC236}">
-                <a16:creationId xmlns:a16="http://schemas.microsoft.com/office/drawing/2014/main" id="{5D5A7A58-7039-4CFC-81F7-9E8E36E299FE}"/>
+                <a16:creationId xmlns:a16="http://schemas.microsoft.com/office/drawing/2014/main" id="{6176C4F2-ED46-4F93-A2F2-91FBCD02F366}"/>
               </a:ext>
             </a:extLst>
           </p:cNvPr>
@@ -9749,7 +7969,7 @@
           <p:cNvPr id="8" name="">
             <a:extLst xmlns:a="http://schemas.openxmlformats.org/drawingml/2006/main">
               <a:ext uri="{FF2B5EF4-FFF2-40B4-BE49-F238E27FC236}">
-                <a16:creationId xmlns:a16="http://schemas.microsoft.com/office/drawing/2014/main" id="{997C622A-166E-4A83-B73D-08EAB0559BF5}"/>
+                <a16:creationId xmlns:a16="http://schemas.microsoft.com/office/drawing/2014/main" id="{68727AAB-05E5-4389-9BD9-AB36298E767C}"/>
               </a:ext>
             </a:extLst>
           </p:cNvPr>
@@ -9806,7 +8026,7 @@
           <p:cNvPr id="9" name="">
             <a:extLst xmlns:a="http://schemas.openxmlformats.org/drawingml/2006/main">
               <a:ext uri="{FF2B5EF4-FFF2-40B4-BE49-F238E27FC236}">
-                <a16:creationId xmlns:a16="http://schemas.microsoft.com/office/drawing/2014/main" id="{8B45C27A-B874-45F9-BFAD-8456119744B8}"/>
+                <a16:creationId xmlns:a16="http://schemas.microsoft.com/office/drawing/2014/main" id="{98EFF853-0F1E-4E74-A8C2-570034244E77}"/>
               </a:ext>
             </a:extLst>
           </p:cNvPr>
@@ -9863,7 +8083,7 @@
           <p:cNvPr id="10" name="">
             <a:extLst xmlns:a="http://schemas.openxmlformats.org/drawingml/2006/main">
               <a:ext uri="{FF2B5EF4-FFF2-40B4-BE49-F238E27FC236}">
-                <a16:creationId xmlns:a16="http://schemas.microsoft.com/office/drawing/2014/main" id="{E7CE2981-6F1D-4F97-8D42-92092842BCF2}"/>
+                <a16:creationId xmlns:a16="http://schemas.microsoft.com/office/drawing/2014/main" id="{F8B58983-E6C4-48E3-AD99-61187C9D7FB1}"/>
               </a:ext>
             </a:extLst>
           </p:cNvPr>
@@ -9918,7 +8138,7 @@
     </p:spTree>
     <p:extLst>
       <p:ext uri="{BB962C8B-B14F-4D97-AF65-F5344CB8AC3E}">
-        <p14:creationId xmlns:p14="http://schemas.microsoft.com/office/powerpoint/2010/main" val="327315042"/>
+        <p14:creationId xmlns:p14="http://schemas.microsoft.com/office/powerpoint/2010/main" val="1298967768"/>
       </p:ext>
     </p:extLst>
   </p:cSld>
@@ -9949,7 +8169,7 @@
           <p:cNvPr id="11" name="">
             <a:extLst xmlns:a="http://schemas.openxmlformats.org/drawingml/2006/main">
               <a:ext uri="{FF2B5EF4-FFF2-40B4-BE49-F238E27FC236}">
-                <a16:creationId xmlns:a16="http://schemas.microsoft.com/office/drawing/2014/main" id="{F309B2A8-1A09-4D46-8BCF-495251EF3B65}"/>
+                <a16:creationId xmlns:a16="http://schemas.microsoft.com/office/drawing/2014/main" id="{0B83B471-CA1C-49AB-8664-0875EF03B21A}"/>
               </a:ext>
             </a:extLst>
           </p:cNvPr>
@@ -9979,7 +8199,7 @@
           <p:cNvPr id="2" name="">
             <a:extLst xmlns:a="http://schemas.openxmlformats.org/drawingml/2006/main">
               <a:ext uri="{FF2B5EF4-FFF2-40B4-BE49-F238E27FC236}">
-                <a16:creationId xmlns:a16="http://schemas.microsoft.com/office/drawing/2014/main" id="{92916E18-3909-4D35-87C4-82FC6554939C}"/>
+                <a16:creationId xmlns:a16="http://schemas.microsoft.com/office/drawing/2014/main" id="{9122BFD6-D713-460C-A574-EB1E23545DFE}"/>
               </a:ext>
             </a:extLst>
           </p:cNvPr>
@@ -10036,7 +8256,7 @@
           <p:cNvPr id="3" name="">
             <a:extLst xmlns:a="http://schemas.openxmlformats.org/drawingml/2006/main">
               <a:ext uri="{FF2B5EF4-FFF2-40B4-BE49-F238E27FC236}">
-                <a16:creationId xmlns:a16="http://schemas.microsoft.com/office/drawing/2014/main" id="{EF818E75-7497-4079-88D4-00B6728FEEDC}"/>
+                <a16:creationId xmlns:a16="http://schemas.microsoft.com/office/drawing/2014/main" id="{5FC8D42D-E98E-4262-962B-A4833CEEC6F4}"/>
               </a:ext>
             </a:extLst>
           </p:cNvPr>
@@ -10093,7 +8313,7 @@
           <p:cNvPr id="4" name="">
             <a:extLst xmlns:a="http://schemas.openxmlformats.org/drawingml/2006/main">
               <a:ext uri="{FF2B5EF4-FFF2-40B4-BE49-F238E27FC236}">
-                <a16:creationId xmlns:a16="http://schemas.microsoft.com/office/drawing/2014/main" id="{DAE204B2-33AE-42C4-B082-ED65D4033079}"/>
+                <a16:creationId xmlns:a16="http://schemas.microsoft.com/office/drawing/2014/main" id="{F455A4BE-448F-4A92-BCBD-DC2544F0BB77}"/>
               </a:ext>
             </a:extLst>
           </p:cNvPr>
@@ -10150,7 +8370,7 @@
           <p:cNvPr id="5" name="">
             <a:extLst xmlns:a="http://schemas.openxmlformats.org/drawingml/2006/main">
               <a:ext uri="{FF2B5EF4-FFF2-40B4-BE49-F238E27FC236}">
-                <a16:creationId xmlns:a16="http://schemas.microsoft.com/office/drawing/2014/main" id="{7C2FEEA6-8EBC-4768-A4E7-69091DFD36F5}"/>
+                <a16:creationId xmlns:a16="http://schemas.microsoft.com/office/drawing/2014/main" id="{4F67E4FC-9B28-4AF7-84D4-8BF5EE7473FE}"/>
               </a:ext>
             </a:extLst>
           </p:cNvPr>
@@ -10207,7 +8427,7 @@
           <p:cNvPr id="6" name="">
             <a:extLst xmlns:a="http://schemas.openxmlformats.org/drawingml/2006/main">
               <a:ext uri="{FF2B5EF4-FFF2-40B4-BE49-F238E27FC236}">
-                <a16:creationId xmlns:a16="http://schemas.microsoft.com/office/drawing/2014/main" id="{73A788AD-D54F-49AB-9ED1-24E791EA9D17}"/>
+                <a16:creationId xmlns:a16="http://schemas.microsoft.com/office/drawing/2014/main" id="{719C2DC0-0877-4A4E-94A9-BA17CBF0D5CA}"/>
               </a:ext>
             </a:extLst>
           </p:cNvPr>
@@ -10264,7 +8484,7 @@
           <p:cNvPr id="7" name="">
             <a:extLst xmlns:a="http://schemas.openxmlformats.org/drawingml/2006/main">
               <a:ext uri="{FF2B5EF4-FFF2-40B4-BE49-F238E27FC236}">
-                <a16:creationId xmlns:a16="http://schemas.microsoft.com/office/drawing/2014/main" id="{7CB42800-4896-49B3-962C-E2D4044BB65D}"/>
+                <a16:creationId xmlns:a16="http://schemas.microsoft.com/office/drawing/2014/main" id="{214EBDB2-720C-4495-86FC-1200552A82ED}"/>
               </a:ext>
             </a:extLst>
           </p:cNvPr>
@@ -10321,7 +8541,7 @@
           <p:cNvPr id="8" name="">
             <a:extLst xmlns:a="http://schemas.openxmlformats.org/drawingml/2006/main">
               <a:ext uri="{FF2B5EF4-FFF2-40B4-BE49-F238E27FC236}">
-                <a16:creationId xmlns:a16="http://schemas.microsoft.com/office/drawing/2014/main" id="{BB0BA6EE-6C15-4548-8177-0C6ED6DB8E62}"/>
+                <a16:creationId xmlns:a16="http://schemas.microsoft.com/office/drawing/2014/main" id="{E7E0813C-3107-4803-BDC9-D26D77CAAB97}"/>
               </a:ext>
             </a:extLst>
           </p:cNvPr>
@@ -10378,7 +8598,7 @@
           <p:cNvPr id="9" name="">
             <a:extLst xmlns:a="http://schemas.openxmlformats.org/drawingml/2006/main">
               <a:ext uri="{FF2B5EF4-FFF2-40B4-BE49-F238E27FC236}">
-                <a16:creationId xmlns:a16="http://schemas.microsoft.com/office/drawing/2014/main" id="{7856978E-D688-413F-B9E8-53910F96A7AE}"/>
+                <a16:creationId xmlns:a16="http://schemas.microsoft.com/office/drawing/2014/main" id="{4156B3EA-F812-445F-B7E9-8A8F0D61C6EA}"/>
               </a:ext>
             </a:extLst>
           </p:cNvPr>
@@ -10435,7 +8655,7 @@
           <p:cNvPr id="10" name="">
             <a:extLst xmlns:a="http://schemas.openxmlformats.org/drawingml/2006/main">
               <a:ext uri="{FF2B5EF4-FFF2-40B4-BE49-F238E27FC236}">
-                <a16:creationId xmlns:a16="http://schemas.microsoft.com/office/drawing/2014/main" id="{B52A2D4D-B9D4-43E3-8DE0-B7AC6E7CD94C}"/>
+                <a16:creationId xmlns:a16="http://schemas.microsoft.com/office/drawing/2014/main" id="{88C35223-38E5-4C5D-BE3C-0FA92402FD4D}"/>
               </a:ext>
             </a:extLst>
           </p:cNvPr>
@@ -10490,7 +8710,7 @@
     </p:spTree>
     <p:extLst>
       <p:ext uri="{BB962C8B-B14F-4D97-AF65-F5344CB8AC3E}">
-        <p14:creationId xmlns:p14="http://schemas.microsoft.com/office/powerpoint/2010/main" val="1853124825"/>
+        <p14:creationId xmlns:p14="http://schemas.microsoft.com/office/powerpoint/2010/main" val="1482850352"/>
       </p:ext>
     </p:extLst>
   </p:cSld>
@@ -10521,7 +8741,7 @@
           <p:cNvPr id="11" name="">
             <a:extLst xmlns:a="http://schemas.openxmlformats.org/drawingml/2006/main">
               <a:ext uri="{FF2B5EF4-FFF2-40B4-BE49-F238E27FC236}">
-                <a16:creationId xmlns:a16="http://schemas.microsoft.com/office/drawing/2014/main" id="{2E88913D-E53B-469C-B028-D27790B7213D}"/>
+                <a16:creationId xmlns:a16="http://schemas.microsoft.com/office/drawing/2014/main" id="{F2EA0177-26B7-4EDC-A375-3D0F80DD54EB}"/>
               </a:ext>
             </a:extLst>
           </p:cNvPr>
@@ -10551,7 +8771,7 @@
           <p:cNvPr id="2" name="">
             <a:extLst xmlns:a="http://schemas.openxmlformats.org/drawingml/2006/main">
               <a:ext uri="{FF2B5EF4-FFF2-40B4-BE49-F238E27FC236}">
-                <a16:creationId xmlns:a16="http://schemas.microsoft.com/office/drawing/2014/main" id="{53D45ACA-93FC-490F-866C-F12657A55467}"/>
+                <a16:creationId xmlns:a16="http://schemas.microsoft.com/office/drawing/2014/main" id="{23895CF2-BE03-4A64-A8D1-8980FD2B1BCD}"/>
               </a:ext>
             </a:extLst>
           </p:cNvPr>
@@ -10608,7 +8828,7 @@
           <p:cNvPr id="3" name="">
             <a:extLst xmlns:a="http://schemas.openxmlformats.org/drawingml/2006/main">
               <a:ext uri="{FF2B5EF4-FFF2-40B4-BE49-F238E27FC236}">
-                <a16:creationId xmlns:a16="http://schemas.microsoft.com/office/drawing/2014/main" id="{B31D040E-1FD4-437C-8537-0A5226A807C1}"/>
+                <a16:creationId xmlns:a16="http://schemas.microsoft.com/office/drawing/2014/main" id="{9D70BF2A-4A06-4D0E-9059-36266A9DA129}"/>
               </a:ext>
             </a:extLst>
           </p:cNvPr>
@@ -10665,7 +8885,7 @@
           <p:cNvPr id="4" name="">
             <a:extLst xmlns:a="http://schemas.openxmlformats.org/drawingml/2006/main">
               <a:ext uri="{FF2B5EF4-FFF2-40B4-BE49-F238E27FC236}">
-                <a16:creationId xmlns:a16="http://schemas.microsoft.com/office/drawing/2014/main" id="{D0A882DC-68B1-4454-B304-3C23A8F71EB6}"/>
+                <a16:creationId xmlns:a16="http://schemas.microsoft.com/office/drawing/2014/main" id="{DEF08E3F-E099-4EBD-9DE8-042B48827758}"/>
               </a:ext>
             </a:extLst>
           </p:cNvPr>
@@ -10695,7 +8915,7 @@
           <p:cNvPr id="5" name="">
             <a:extLst xmlns:a="http://schemas.openxmlformats.org/drawingml/2006/main">
               <a:ext uri="{FF2B5EF4-FFF2-40B4-BE49-F238E27FC236}">
-                <a16:creationId xmlns:a16="http://schemas.microsoft.com/office/drawing/2014/main" id="{E753ECBB-0F0E-4128-93BB-F9CEC531E9F9}"/>
+                <a16:creationId xmlns:a16="http://schemas.microsoft.com/office/drawing/2014/main" id="{A8F8DED5-CE27-499F-A7D3-0BA5F7407187}"/>
               </a:ext>
             </a:extLst>
           </p:cNvPr>
@@ -10752,7 +8972,7 @@
           <p:cNvPr id="6" name="">
             <a:extLst xmlns:a="http://schemas.openxmlformats.org/drawingml/2006/main">
               <a:ext uri="{FF2B5EF4-FFF2-40B4-BE49-F238E27FC236}">
-                <a16:creationId xmlns:a16="http://schemas.microsoft.com/office/drawing/2014/main" id="{AD84BB94-5601-4894-99C0-A6FD6E125DF4}"/>
+                <a16:creationId xmlns:a16="http://schemas.microsoft.com/office/drawing/2014/main" id="{32C753D0-BFC1-4A05-8F15-31E873E39A64}"/>
               </a:ext>
             </a:extLst>
           </p:cNvPr>
@@ -10809,7 +9029,7 @@
           <p:cNvPr id="7" name="">
             <a:extLst xmlns:a="http://schemas.openxmlformats.org/drawingml/2006/main">
               <a:ext uri="{FF2B5EF4-FFF2-40B4-BE49-F238E27FC236}">
-                <a16:creationId xmlns:a16="http://schemas.microsoft.com/office/drawing/2014/main" id="{20B116DF-69B1-472A-B977-7109867D9EC7}"/>
+                <a16:creationId xmlns:a16="http://schemas.microsoft.com/office/drawing/2014/main" id="{AD2FD1F6-9521-4B68-BDC5-35BAC94E0EAB}"/>
               </a:ext>
             </a:extLst>
           </p:cNvPr>
@@ -10839,7 +9059,7 @@
           <p:cNvPr id="8" name="">
             <a:extLst xmlns:a="http://schemas.openxmlformats.org/drawingml/2006/main">
               <a:ext uri="{FF2B5EF4-FFF2-40B4-BE49-F238E27FC236}">
-                <a16:creationId xmlns:a16="http://schemas.microsoft.com/office/drawing/2014/main" id="{816181B9-DA2E-4FDA-9293-0178EE937879}"/>
+                <a16:creationId xmlns:a16="http://schemas.microsoft.com/office/drawing/2014/main" id="{50324CE5-7A75-461A-96EF-CDCF0B4199DC}"/>
               </a:ext>
             </a:extLst>
           </p:cNvPr>
@@ -10896,7 +9116,7 @@
           <p:cNvPr id="9" name="">
             <a:extLst xmlns:a="http://schemas.openxmlformats.org/drawingml/2006/main">
               <a:ext uri="{FF2B5EF4-FFF2-40B4-BE49-F238E27FC236}">
-                <a16:creationId xmlns:a16="http://schemas.microsoft.com/office/drawing/2014/main" id="{684B0393-7558-4F3C-9C8E-52C6833741A3}"/>
+                <a16:creationId xmlns:a16="http://schemas.microsoft.com/office/drawing/2014/main" id="{C5A74418-8DB6-40B4-B9CD-EFA72ABF925C}"/>
               </a:ext>
             </a:extLst>
           </p:cNvPr>
@@ -10953,7 +9173,7 @@
           <p:cNvPr id="10" name="">
             <a:extLst xmlns:a="http://schemas.openxmlformats.org/drawingml/2006/main">
               <a:ext uri="{FF2B5EF4-FFF2-40B4-BE49-F238E27FC236}">
-                <a16:creationId xmlns:a16="http://schemas.microsoft.com/office/drawing/2014/main" id="{DE71E5B3-134B-487D-8BAB-ACE054B793C2}"/>
+                <a16:creationId xmlns:a16="http://schemas.microsoft.com/office/drawing/2014/main" id="{84692D73-BF94-48E2-9D64-900FEE1F1786}"/>
               </a:ext>
             </a:extLst>
           </p:cNvPr>
@@ -11008,7 +9228,7 @@
     </p:spTree>
     <p:extLst>
       <p:ext uri="{BB962C8B-B14F-4D97-AF65-F5344CB8AC3E}">
-        <p14:creationId xmlns:p14="http://schemas.microsoft.com/office/powerpoint/2010/main" val="804328867"/>
+        <p14:creationId xmlns:p14="http://schemas.microsoft.com/office/powerpoint/2010/main" val="92210720"/>
       </p:ext>
     </p:extLst>
   </p:cSld>
@@ -11039,7 +9259,7 @@
           <p:cNvPr id="9" name="">
             <a:extLst xmlns:a="http://schemas.openxmlformats.org/drawingml/2006/main">
               <a:ext uri="{FF2B5EF4-FFF2-40B4-BE49-F238E27FC236}">
-                <a16:creationId xmlns:a16="http://schemas.microsoft.com/office/drawing/2014/main" id="{DB988A43-5CCD-4000-8913-7E0CF365ADAE}"/>
+                <a16:creationId xmlns:a16="http://schemas.microsoft.com/office/drawing/2014/main" id="{17788ACF-F451-41CA-BBA1-68E4AE871219}"/>
               </a:ext>
             </a:extLst>
           </p:cNvPr>
@@ -11069,7 +9289,7 @@
           <p:cNvPr id="2" name="">
             <a:extLst xmlns:a="http://schemas.openxmlformats.org/drawingml/2006/main">
               <a:ext uri="{FF2B5EF4-FFF2-40B4-BE49-F238E27FC236}">
-                <a16:creationId xmlns:a16="http://schemas.microsoft.com/office/drawing/2014/main" id="{41BB3024-36B0-46BF-B599-64C9661082DD}"/>
+                <a16:creationId xmlns:a16="http://schemas.microsoft.com/office/drawing/2014/main" id="{BAF87A12-59CB-4020-B6B4-154DF0C967B9}"/>
               </a:ext>
             </a:extLst>
           </p:cNvPr>
@@ -11126,7 +9346,7 @@
           <p:cNvPr id="3" name="">
             <a:extLst xmlns:a="http://schemas.openxmlformats.org/drawingml/2006/main">
               <a:ext uri="{FF2B5EF4-FFF2-40B4-BE49-F238E27FC236}">
-                <a16:creationId xmlns:a16="http://schemas.microsoft.com/office/drawing/2014/main" id="{642430FF-8D26-496F-8F10-C416A3D06133}"/>
+                <a16:creationId xmlns:a16="http://schemas.microsoft.com/office/drawing/2014/main" id="{2177E504-DD37-40C7-8B3E-82F97B83A5B1}"/>
               </a:ext>
             </a:extLst>
           </p:cNvPr>
@@ -11183,7 +9403,7 @@
           <p:cNvPr id="4" name="">
             <a:extLst xmlns:a="http://schemas.openxmlformats.org/drawingml/2006/main">
               <a:ext uri="{FF2B5EF4-FFF2-40B4-BE49-F238E27FC236}">
-                <a16:creationId xmlns:a16="http://schemas.microsoft.com/office/drawing/2014/main" id="{A228EF49-2645-47B6-B3A5-263E44EBC440}"/>
+                <a16:creationId xmlns:a16="http://schemas.microsoft.com/office/drawing/2014/main" id="{BF6CAE92-5F3C-4268-B680-567DC0E3376C}"/>
               </a:ext>
             </a:extLst>
           </p:cNvPr>
@@ -11213,7 +9433,7 @@
           <p:cNvPr id="5" name="">
             <a:extLst xmlns:a="http://schemas.openxmlformats.org/drawingml/2006/main">
               <a:ext uri="{FF2B5EF4-FFF2-40B4-BE49-F238E27FC236}">
-                <a16:creationId xmlns:a16="http://schemas.microsoft.com/office/drawing/2014/main" id="{7F90EF33-F00B-49D6-AE6E-BAD458182FCD}"/>
+                <a16:creationId xmlns:a16="http://schemas.microsoft.com/office/drawing/2014/main" id="{C0AF4988-7334-4166-AB0F-A5614979DD1B}"/>
               </a:ext>
             </a:extLst>
           </p:cNvPr>
@@ -11349,7 +9569,7 @@
           <p:cNvPr id="6" name="">
             <a:extLst xmlns:a="http://schemas.openxmlformats.org/drawingml/2006/main">
               <a:ext uri="{FF2B5EF4-FFF2-40B4-BE49-F238E27FC236}">
-                <a16:creationId xmlns:a16="http://schemas.microsoft.com/office/drawing/2014/main" id="{B03FEFBC-1946-40EE-9660-33EA71323A8F}"/>
+                <a16:creationId xmlns:a16="http://schemas.microsoft.com/office/drawing/2014/main" id="{C4A43C35-8AB2-4DFB-9FCE-9A730729C68F}"/>
               </a:ext>
             </a:extLst>
           </p:cNvPr>
@@ -11406,7 +9626,7 @@
           <p:cNvPr id="7" name="">
             <a:extLst xmlns:a="http://schemas.openxmlformats.org/drawingml/2006/main">
               <a:ext uri="{FF2B5EF4-FFF2-40B4-BE49-F238E27FC236}">
-                <a16:creationId xmlns:a16="http://schemas.microsoft.com/office/drawing/2014/main" id="{8ED13952-0384-40AB-B362-3C2EEC76AF78}"/>
+                <a16:creationId xmlns:a16="http://schemas.microsoft.com/office/drawing/2014/main" id="{46B76A9F-5649-4ACD-8B3C-416F346E9530}"/>
               </a:ext>
             </a:extLst>
           </p:cNvPr>
@@ -11463,7 +9683,7 @@
           <p:cNvPr id="8" name="">
             <a:extLst xmlns:a="http://schemas.openxmlformats.org/drawingml/2006/main">
               <a:ext uri="{FF2B5EF4-FFF2-40B4-BE49-F238E27FC236}">
-                <a16:creationId xmlns:a16="http://schemas.microsoft.com/office/drawing/2014/main" id="{588BE4D5-FB98-4B11-BF98-F15EAB3B113D}"/>
+                <a16:creationId xmlns:a16="http://schemas.microsoft.com/office/drawing/2014/main" id="{E7BA892F-8D8B-4E73-9D45-4A5DE066437A}"/>
               </a:ext>
             </a:extLst>
           </p:cNvPr>
@@ -11518,7 +9738,7 @@
     </p:spTree>
     <p:extLst>
       <p:ext uri="{BB962C8B-B14F-4D97-AF65-F5344CB8AC3E}">
-        <p14:creationId xmlns:p14="http://schemas.microsoft.com/office/powerpoint/2010/main" val="829041377"/>
+        <p14:creationId xmlns:p14="http://schemas.microsoft.com/office/powerpoint/2010/main" val="1055062983"/>
       </p:ext>
     </p:extLst>
   </p:cSld>
@@ -11549,7 +9769,7 @@
           <p:cNvPr id="8" name="">
             <a:extLst xmlns:a="http://schemas.openxmlformats.org/drawingml/2006/main">
               <a:ext uri="{FF2B5EF4-FFF2-40B4-BE49-F238E27FC236}">
-                <a16:creationId xmlns:a16="http://schemas.microsoft.com/office/drawing/2014/main" id="{BACEF4B8-C939-45AF-B843-286AEFB13AF7}"/>
+                <a16:creationId xmlns:a16="http://schemas.microsoft.com/office/drawing/2014/main" id="{9B1C67A0-4A0F-42CC-8C40-7B59B35E7B3A}"/>
               </a:ext>
             </a:extLst>
           </p:cNvPr>
@@ -11579,7 +9799,7 @@
           <p:cNvPr id="2" name="">
             <a:extLst xmlns:a="http://schemas.openxmlformats.org/drawingml/2006/main">
               <a:ext uri="{FF2B5EF4-FFF2-40B4-BE49-F238E27FC236}">
-                <a16:creationId xmlns:a16="http://schemas.microsoft.com/office/drawing/2014/main" id="{7D89D0C8-6557-440A-8ABF-AA6517F9299F}"/>
+                <a16:creationId xmlns:a16="http://schemas.microsoft.com/office/drawing/2014/main" id="{A49FF06E-252B-40AE-9D1B-907A3196A903}"/>
               </a:ext>
             </a:extLst>
           </p:cNvPr>
@@ -11636,7 +9856,7 @@
           <p:cNvPr id="3" name="">
             <a:extLst xmlns:a="http://schemas.openxmlformats.org/drawingml/2006/main">
               <a:ext uri="{FF2B5EF4-FFF2-40B4-BE49-F238E27FC236}">
-                <a16:creationId xmlns:a16="http://schemas.microsoft.com/office/drawing/2014/main" id="{7779F231-E41F-4598-925B-8F6A3310620E}"/>
+                <a16:creationId xmlns:a16="http://schemas.microsoft.com/office/drawing/2014/main" id="{8E72123A-B638-4C95-BC8C-19B46026967E}"/>
               </a:ext>
             </a:extLst>
           </p:cNvPr>
@@ -11693,7 +9913,7 @@
           <p:cNvPr id="4" name="">
             <a:extLst xmlns:a="http://schemas.openxmlformats.org/drawingml/2006/main">
               <a:ext uri="{FF2B5EF4-FFF2-40B4-BE49-F238E27FC236}">
-                <a16:creationId xmlns:a16="http://schemas.microsoft.com/office/drawing/2014/main" id="{7BF6A6A5-520D-409D-B49A-5CE572F368E7}"/>
+                <a16:creationId xmlns:a16="http://schemas.microsoft.com/office/drawing/2014/main" id="{D9AD0AE4-BBCD-4E49-8F35-40A2EB91AD6D}"/>
               </a:ext>
             </a:extLst>
           </p:cNvPr>
@@ -11723,7 +9943,7 @@
           <p:cNvPr id="5" name="">
             <a:extLst xmlns:a="http://schemas.openxmlformats.org/drawingml/2006/main">
               <a:ext uri="{FF2B5EF4-FFF2-40B4-BE49-F238E27FC236}">
-                <a16:creationId xmlns:a16="http://schemas.microsoft.com/office/drawing/2014/main" id="{7B3DE39A-EC87-4440-84C8-7B5126B36383}"/>
+                <a16:creationId xmlns:a16="http://schemas.microsoft.com/office/drawing/2014/main" id="{13135DCE-5C71-4A5E-B9D2-3721379302EA}"/>
               </a:ext>
             </a:extLst>
           </p:cNvPr>
@@ -11780,7 +10000,7 @@
           <p:cNvPr id="6" name="">
             <a:extLst xmlns:a="http://schemas.openxmlformats.org/drawingml/2006/main">
               <a:ext uri="{FF2B5EF4-FFF2-40B4-BE49-F238E27FC236}">
-                <a16:creationId xmlns:a16="http://schemas.microsoft.com/office/drawing/2014/main" id="{B754FF2F-CE78-4082-8C6A-57D1A5C32BC6}"/>
+                <a16:creationId xmlns:a16="http://schemas.microsoft.com/office/drawing/2014/main" id="{705DDB41-F13C-478A-8653-0ED8FC06028E}"/>
               </a:ext>
             </a:extLst>
           </p:cNvPr>
@@ -11837,7 +10057,7 @@
           <p:cNvPr id="7" name="">
             <a:extLst xmlns:a="http://schemas.openxmlformats.org/drawingml/2006/main">
               <a:ext uri="{FF2B5EF4-FFF2-40B4-BE49-F238E27FC236}">
-                <a16:creationId xmlns:a16="http://schemas.microsoft.com/office/drawing/2014/main" id="{C41924BC-7811-4AC7-823C-7F7608E49B0E}"/>
+                <a16:creationId xmlns:a16="http://schemas.microsoft.com/office/drawing/2014/main" id="{8D321496-AC37-489B-B42B-F8B0BEEABD93}"/>
               </a:ext>
             </a:extLst>
           </p:cNvPr>
@@ -11892,7 +10112,7 @@
     </p:spTree>
     <p:extLst>
       <p:ext uri="{BB962C8B-B14F-4D97-AF65-F5344CB8AC3E}">
-        <p14:creationId xmlns:p14="http://schemas.microsoft.com/office/powerpoint/2010/main" val="1705791221"/>
+        <p14:creationId xmlns:p14="http://schemas.microsoft.com/office/powerpoint/2010/main" val="1585055179"/>
       </p:ext>
     </p:extLst>
   </p:cSld>
@@ -11923,7 +10143,7 @@
           <p:cNvPr id="11" name="">
             <a:extLst xmlns:a="http://schemas.openxmlformats.org/drawingml/2006/main">
               <a:ext uri="{FF2B5EF4-FFF2-40B4-BE49-F238E27FC236}">
-                <a16:creationId xmlns:a16="http://schemas.microsoft.com/office/drawing/2014/main" id="{C957E080-7CA1-4459-9608-F3D25A1E8B2D}"/>
+                <a16:creationId xmlns:a16="http://schemas.microsoft.com/office/drawing/2014/main" id="{9603F679-2BC8-44F5-AD5A-E98299C59476}"/>
               </a:ext>
             </a:extLst>
           </p:cNvPr>
@@ -11953,7 +10173,7 @@
           <p:cNvPr id="2" name="">
             <a:extLst xmlns:a="http://schemas.openxmlformats.org/drawingml/2006/main">
               <a:ext uri="{FF2B5EF4-FFF2-40B4-BE49-F238E27FC236}">
-                <a16:creationId xmlns:a16="http://schemas.microsoft.com/office/drawing/2014/main" id="{73D7E282-EC91-477C-96A6-0A295D84F67E}"/>
+                <a16:creationId xmlns:a16="http://schemas.microsoft.com/office/drawing/2014/main" id="{0C7ACA73-D184-48BF-9E58-32D7243DD083}"/>
               </a:ext>
             </a:extLst>
           </p:cNvPr>
@@ -12010,7 +10230,7 @@
           <p:cNvPr id="3" name="">
             <a:extLst xmlns:a="http://schemas.openxmlformats.org/drawingml/2006/main">
               <a:ext uri="{FF2B5EF4-FFF2-40B4-BE49-F238E27FC236}">
-                <a16:creationId xmlns:a16="http://schemas.microsoft.com/office/drawing/2014/main" id="{6697875D-97F5-4841-A126-56F1912A033D}"/>
+                <a16:creationId xmlns:a16="http://schemas.microsoft.com/office/drawing/2014/main" id="{7D1B20A0-2782-468E-A193-8A0713759BD7}"/>
               </a:ext>
             </a:extLst>
           </p:cNvPr>
@@ -12067,7 +10287,7 @@
           <p:cNvPr id="4" name="">
             <a:extLst xmlns:a="http://schemas.openxmlformats.org/drawingml/2006/main">
               <a:ext uri="{FF2B5EF4-FFF2-40B4-BE49-F238E27FC236}">
-                <a16:creationId xmlns:a16="http://schemas.microsoft.com/office/drawing/2014/main" id="{BCF59A5F-BBD7-4371-88DC-76ACDEF712F6}"/>
+                <a16:creationId xmlns:a16="http://schemas.microsoft.com/office/drawing/2014/main" id="{E60B11F0-0695-4CA6-9453-134B4ADAFB16}"/>
               </a:ext>
             </a:extLst>
           </p:cNvPr>
@@ -12097,7 +10317,7 @@
           <p:cNvPr id="5" name="">
             <a:extLst xmlns:a="http://schemas.openxmlformats.org/drawingml/2006/main">
               <a:ext uri="{FF2B5EF4-FFF2-40B4-BE49-F238E27FC236}">
-                <a16:creationId xmlns:a16="http://schemas.microsoft.com/office/drawing/2014/main" id="{C5F74F4D-3990-49A7-A298-82049FCAF634}"/>
+                <a16:creationId xmlns:a16="http://schemas.microsoft.com/office/drawing/2014/main" id="{872CFEDF-6CC9-4B98-B90A-FFD9183364A5}"/>
               </a:ext>
             </a:extLst>
           </p:cNvPr>
@@ -12154,7 +10374,7 @@
           <p:cNvPr id="6" name="">
             <a:extLst xmlns:a="http://schemas.openxmlformats.org/drawingml/2006/main">
               <a:ext uri="{FF2B5EF4-FFF2-40B4-BE49-F238E27FC236}">
-                <a16:creationId xmlns:a16="http://schemas.microsoft.com/office/drawing/2014/main" id="{31A95E88-F594-4999-A26A-ECB998C0E457}"/>
+                <a16:creationId xmlns:a16="http://schemas.microsoft.com/office/drawing/2014/main" id="{209A6FB4-F282-4933-83F9-AF7733BB41D9}"/>
               </a:ext>
             </a:extLst>
           </p:cNvPr>
@@ -12211,7 +10431,7 @@
           <p:cNvPr id="7" name="">
             <a:extLst xmlns:a="http://schemas.openxmlformats.org/drawingml/2006/main">
               <a:ext uri="{FF2B5EF4-FFF2-40B4-BE49-F238E27FC236}">
-                <a16:creationId xmlns:a16="http://schemas.microsoft.com/office/drawing/2014/main" id="{16C5C53A-9C18-409C-961D-62F71D49A957}"/>
+                <a16:creationId xmlns:a16="http://schemas.microsoft.com/office/drawing/2014/main" id="{6E5E4118-F853-4EE3-8E9F-7790B06A32CF}"/>
               </a:ext>
             </a:extLst>
           </p:cNvPr>
@@ -12241,7 +10461,7 @@
           <p:cNvPr id="8" name="">
             <a:extLst xmlns:a="http://schemas.openxmlformats.org/drawingml/2006/main">
               <a:ext uri="{FF2B5EF4-FFF2-40B4-BE49-F238E27FC236}">
-                <a16:creationId xmlns:a16="http://schemas.microsoft.com/office/drawing/2014/main" id="{8C7A398F-D97E-4238-BC98-EDC73E9108CD}"/>
+                <a16:creationId xmlns:a16="http://schemas.microsoft.com/office/drawing/2014/main" id="{A9171EF6-F324-4384-9FC7-CB5BA037C3C8}"/>
               </a:ext>
             </a:extLst>
           </p:cNvPr>
@@ -12298,7 +10518,7 @@
           <p:cNvPr id="9" name="">
             <a:extLst xmlns:a="http://schemas.openxmlformats.org/drawingml/2006/main">
               <a:ext uri="{FF2B5EF4-FFF2-40B4-BE49-F238E27FC236}">
-                <a16:creationId xmlns:a16="http://schemas.microsoft.com/office/drawing/2014/main" id="{919C8605-DF6C-4D84-B842-36484A22327B}"/>
+                <a16:creationId xmlns:a16="http://schemas.microsoft.com/office/drawing/2014/main" id="{2865153A-2525-4A45-AE16-AA20364F4AEE}"/>
               </a:ext>
             </a:extLst>
           </p:cNvPr>
@@ -12355,7 +10575,7 @@
           <p:cNvPr id="10" name="">
             <a:extLst xmlns:a="http://schemas.openxmlformats.org/drawingml/2006/main">
               <a:ext uri="{FF2B5EF4-FFF2-40B4-BE49-F238E27FC236}">
-                <a16:creationId xmlns:a16="http://schemas.microsoft.com/office/drawing/2014/main" id="{A0AB6ABF-88B9-4B9B-955E-8B68821B2DE3}"/>
+                <a16:creationId xmlns:a16="http://schemas.microsoft.com/office/drawing/2014/main" id="{A5F36297-975F-4552-9C3C-6CB726038A52}"/>
               </a:ext>
             </a:extLst>
           </p:cNvPr>
@@ -12410,7 +10630,7 @@
     </p:spTree>
     <p:extLst>
       <p:ext uri="{BB962C8B-B14F-4D97-AF65-F5344CB8AC3E}">
-        <p14:creationId xmlns:p14="http://schemas.microsoft.com/office/powerpoint/2010/main" val="1619283303"/>
+        <p14:creationId xmlns:p14="http://schemas.microsoft.com/office/powerpoint/2010/main" val="874540457"/>
       </p:ext>
     </p:extLst>
   </p:cSld>
@@ -12441,7 +10661,7 @@
           <p:cNvPr id="11" name="">
             <a:extLst xmlns:a="http://schemas.openxmlformats.org/drawingml/2006/main">
               <a:ext uri="{FF2B5EF4-FFF2-40B4-BE49-F238E27FC236}">
-                <a16:creationId xmlns:a16="http://schemas.microsoft.com/office/drawing/2014/main" id="{3422E5D0-34AE-4546-9679-E45A5F05FB99}"/>
+                <a16:creationId xmlns:a16="http://schemas.microsoft.com/office/drawing/2014/main" id="{0B7F7D85-9DB5-4CA6-81C5-D8B5C4466EF5}"/>
               </a:ext>
             </a:extLst>
           </p:cNvPr>
@@ -12471,7 +10691,7 @@
           <p:cNvPr id="2" name="">
             <a:extLst xmlns:a="http://schemas.openxmlformats.org/drawingml/2006/main">
               <a:ext uri="{FF2B5EF4-FFF2-40B4-BE49-F238E27FC236}">
-                <a16:creationId xmlns:a16="http://schemas.microsoft.com/office/drawing/2014/main" id="{10DA8BFC-E655-4A4B-BB83-F3A27E9F8648}"/>
+                <a16:creationId xmlns:a16="http://schemas.microsoft.com/office/drawing/2014/main" id="{4241484F-9495-4966-AB2F-D9DD2FE984AB}"/>
               </a:ext>
             </a:extLst>
           </p:cNvPr>
@@ -12528,7 +10748,7 @@
           <p:cNvPr id="3" name="">
             <a:extLst xmlns:a="http://schemas.openxmlformats.org/drawingml/2006/main">
               <a:ext uri="{FF2B5EF4-FFF2-40B4-BE49-F238E27FC236}">
-                <a16:creationId xmlns:a16="http://schemas.microsoft.com/office/drawing/2014/main" id="{E4F94333-C6F3-4279-B113-EB5126F51399}"/>
+                <a16:creationId xmlns:a16="http://schemas.microsoft.com/office/drawing/2014/main" id="{79FB7611-DBFD-43B9-A6FF-693889C23D54}"/>
               </a:ext>
             </a:extLst>
           </p:cNvPr>
@@ -12585,7 +10805,7 @@
           <p:cNvPr id="4" name="">
             <a:extLst xmlns:a="http://schemas.openxmlformats.org/drawingml/2006/main">
               <a:ext uri="{FF2B5EF4-FFF2-40B4-BE49-F238E27FC236}">
-                <a16:creationId xmlns:a16="http://schemas.microsoft.com/office/drawing/2014/main" id="{15BD8147-6312-4587-A9F2-F4E1BD69F3B2}"/>
+                <a16:creationId xmlns:a16="http://schemas.microsoft.com/office/drawing/2014/main" id="{457DE100-1E07-42BD-BAF1-8DBEBEC8D548}"/>
               </a:ext>
             </a:extLst>
           </p:cNvPr>
@@ -12615,7 +10835,7 @@
           <p:cNvPr id="5" name="">
             <a:extLst xmlns:a="http://schemas.openxmlformats.org/drawingml/2006/main">
               <a:ext uri="{FF2B5EF4-FFF2-40B4-BE49-F238E27FC236}">
-                <a16:creationId xmlns:a16="http://schemas.microsoft.com/office/drawing/2014/main" id="{9E3786C3-BAF3-4C78-B081-45EB462FA259}"/>
+                <a16:creationId xmlns:a16="http://schemas.microsoft.com/office/drawing/2014/main" id="{D39DD691-E58E-43A8-A71A-6162FB736BB4}"/>
               </a:ext>
             </a:extLst>
           </p:cNvPr>
@@ -12672,7 +10892,7 @@
           <p:cNvPr id="6" name="">
             <a:extLst xmlns:a="http://schemas.openxmlformats.org/drawingml/2006/main">
               <a:ext uri="{FF2B5EF4-FFF2-40B4-BE49-F238E27FC236}">
-                <a16:creationId xmlns:a16="http://schemas.microsoft.com/office/drawing/2014/main" id="{ED6382DB-0F36-440B-93BE-9BBA3FE1D2F7}"/>
+                <a16:creationId xmlns:a16="http://schemas.microsoft.com/office/drawing/2014/main" id="{4B965274-5FF8-492A-BEF3-809A1C98F1D1}"/>
               </a:ext>
             </a:extLst>
           </p:cNvPr>
@@ -12729,7 +10949,7 @@
           <p:cNvPr id="7" name="">
             <a:extLst xmlns:a="http://schemas.openxmlformats.org/drawingml/2006/main">
               <a:ext uri="{FF2B5EF4-FFF2-40B4-BE49-F238E27FC236}">
-                <a16:creationId xmlns:a16="http://schemas.microsoft.com/office/drawing/2014/main" id="{ADC5236D-4394-458F-8593-3439975C8854}"/>
+                <a16:creationId xmlns:a16="http://schemas.microsoft.com/office/drawing/2014/main" id="{70AAE425-CF8A-411B-AAA6-1F24704E9218}"/>
               </a:ext>
             </a:extLst>
           </p:cNvPr>
@@ -12759,7 +10979,7 @@
           <p:cNvPr id="8" name="">
             <a:extLst xmlns:a="http://schemas.openxmlformats.org/drawingml/2006/main">
               <a:ext uri="{FF2B5EF4-FFF2-40B4-BE49-F238E27FC236}">
-                <a16:creationId xmlns:a16="http://schemas.microsoft.com/office/drawing/2014/main" id="{E5674C84-266B-4711-A220-FEF0DB7583DE}"/>
+                <a16:creationId xmlns:a16="http://schemas.microsoft.com/office/drawing/2014/main" id="{5FA70B4E-8807-4988-8189-BE8BC51539E2}"/>
               </a:ext>
             </a:extLst>
           </p:cNvPr>
@@ -12816,7 +11036,7 @@
           <p:cNvPr id="9" name="">
             <a:extLst xmlns:a="http://schemas.openxmlformats.org/drawingml/2006/main">
               <a:ext uri="{FF2B5EF4-FFF2-40B4-BE49-F238E27FC236}">
-                <a16:creationId xmlns:a16="http://schemas.microsoft.com/office/drawing/2014/main" id="{CEF37150-568E-403B-92CB-EAAAE3213D59}"/>
+                <a16:creationId xmlns:a16="http://schemas.microsoft.com/office/drawing/2014/main" id="{5AE145F9-AC5D-4F80-BFBC-DDD88B25AEA6}"/>
               </a:ext>
             </a:extLst>
           </p:cNvPr>
@@ -12873,7 +11093,7 @@
           <p:cNvPr id="10" name="">
             <a:extLst xmlns:a="http://schemas.openxmlformats.org/drawingml/2006/main">
               <a:ext uri="{FF2B5EF4-FFF2-40B4-BE49-F238E27FC236}">
-                <a16:creationId xmlns:a16="http://schemas.microsoft.com/office/drawing/2014/main" id="{E2319E9E-D34E-42AB-BDC0-B0D0DDB2F202}"/>
+                <a16:creationId xmlns:a16="http://schemas.microsoft.com/office/drawing/2014/main" id="{9805FE7E-1568-41E0-9761-944A82FAD300}"/>
               </a:ext>
             </a:extLst>
           </p:cNvPr>
@@ -12928,7 +11148,7 @@
     </p:spTree>
     <p:extLst>
       <p:ext uri="{BB962C8B-B14F-4D97-AF65-F5344CB8AC3E}">
-        <p14:creationId xmlns:p14="http://schemas.microsoft.com/office/powerpoint/2010/main" val="515649120"/>
+        <p14:creationId xmlns:p14="http://schemas.microsoft.com/office/powerpoint/2010/main" val="1259767362"/>
       </p:ext>
     </p:extLst>
   </p:cSld>
@@ -12959,7 +11179,7 @@
           <p:cNvPr id="11" name="">
             <a:extLst xmlns:a="http://schemas.openxmlformats.org/drawingml/2006/main">
               <a:ext uri="{FF2B5EF4-FFF2-40B4-BE49-F238E27FC236}">
-                <a16:creationId xmlns:a16="http://schemas.microsoft.com/office/drawing/2014/main" id="{D65BA40B-6837-437C-973B-CAB60A356BFE}"/>
+                <a16:creationId xmlns:a16="http://schemas.microsoft.com/office/drawing/2014/main" id="{94DEDAA8-165F-4C72-A6D5-69A70773A724}"/>
               </a:ext>
             </a:extLst>
           </p:cNvPr>
@@ -12989,7 +11209,7 @@
           <p:cNvPr id="2" name="">
             <a:extLst xmlns:a="http://schemas.openxmlformats.org/drawingml/2006/main">
               <a:ext uri="{FF2B5EF4-FFF2-40B4-BE49-F238E27FC236}">
-                <a16:creationId xmlns:a16="http://schemas.microsoft.com/office/drawing/2014/main" id="{10249ACD-36F8-4061-803F-548EB881ADB8}"/>
+                <a16:creationId xmlns:a16="http://schemas.microsoft.com/office/drawing/2014/main" id="{FDE50E1F-1EC7-4289-B33D-87AD103673A9}"/>
               </a:ext>
             </a:extLst>
           </p:cNvPr>
@@ -13046,7 +11266,7 @@
           <p:cNvPr id="3" name="">
             <a:extLst xmlns:a="http://schemas.openxmlformats.org/drawingml/2006/main">
               <a:ext uri="{FF2B5EF4-FFF2-40B4-BE49-F238E27FC236}">
-                <a16:creationId xmlns:a16="http://schemas.microsoft.com/office/drawing/2014/main" id="{5A7C9BDE-52A4-4754-8076-243B96418E43}"/>
+                <a16:creationId xmlns:a16="http://schemas.microsoft.com/office/drawing/2014/main" id="{ED9C49B2-6456-419E-886C-3959F2A006E8}"/>
               </a:ext>
             </a:extLst>
           </p:cNvPr>
@@ -13103,7 +11323,7 @@
           <p:cNvPr id="4" name="">
             <a:extLst xmlns:a="http://schemas.openxmlformats.org/drawingml/2006/main">
               <a:ext uri="{FF2B5EF4-FFF2-40B4-BE49-F238E27FC236}">
-                <a16:creationId xmlns:a16="http://schemas.microsoft.com/office/drawing/2014/main" id="{E70EA301-E9F3-4F53-B8EF-E851C46100AE}"/>
+                <a16:creationId xmlns:a16="http://schemas.microsoft.com/office/drawing/2014/main" id="{50F0F46C-228B-4E5C-AC89-04188CCDB8E5}"/>
               </a:ext>
             </a:extLst>
           </p:cNvPr>
@@ -13160,7 +11380,7 @@
           <p:cNvPr id="5" name="">
             <a:extLst xmlns:a="http://schemas.openxmlformats.org/drawingml/2006/main">
               <a:ext uri="{FF2B5EF4-FFF2-40B4-BE49-F238E27FC236}">
-                <a16:creationId xmlns:a16="http://schemas.microsoft.com/office/drawing/2014/main" id="{FDDA37F4-4E9A-4684-AB4C-6AF644EC509F}"/>
+                <a16:creationId xmlns:a16="http://schemas.microsoft.com/office/drawing/2014/main" id="{6777D046-357B-4270-8E8C-66B14BD9FE8F}"/>
               </a:ext>
             </a:extLst>
           </p:cNvPr>
@@ -13217,7 +11437,7 @@
           <p:cNvPr id="6" name="">
             <a:extLst xmlns:a="http://schemas.openxmlformats.org/drawingml/2006/main">
               <a:ext uri="{FF2B5EF4-FFF2-40B4-BE49-F238E27FC236}">
-                <a16:creationId xmlns:a16="http://schemas.microsoft.com/office/drawing/2014/main" id="{1A3C226D-5EE5-402B-AC35-F7981150F418}"/>
+                <a16:creationId xmlns:a16="http://schemas.microsoft.com/office/drawing/2014/main" id="{87BCB486-FF32-400A-B1CE-5827A0C20E1C}"/>
               </a:ext>
             </a:extLst>
           </p:cNvPr>
@@ -13274,7 +11494,7 @@
           <p:cNvPr id="7" name="">
             <a:extLst xmlns:a="http://schemas.openxmlformats.org/drawingml/2006/main">
               <a:ext uri="{FF2B5EF4-FFF2-40B4-BE49-F238E27FC236}">
-                <a16:creationId xmlns:a16="http://schemas.microsoft.com/office/drawing/2014/main" id="{917D47C4-1663-42BB-A61F-55FD57648642}"/>
+                <a16:creationId xmlns:a16="http://schemas.microsoft.com/office/drawing/2014/main" id="{6517F7D7-05D4-4765-93FA-4E4537DF3616}"/>
               </a:ext>
             </a:extLst>
           </p:cNvPr>
@@ -13331,7 +11551,7 @@
           <p:cNvPr id="8" name="">
             <a:extLst xmlns:a="http://schemas.openxmlformats.org/drawingml/2006/main">
               <a:ext uri="{FF2B5EF4-FFF2-40B4-BE49-F238E27FC236}">
-                <a16:creationId xmlns:a16="http://schemas.microsoft.com/office/drawing/2014/main" id="{1F78A649-0288-495D-8641-4DA426584B32}"/>
+                <a16:creationId xmlns:a16="http://schemas.microsoft.com/office/drawing/2014/main" id="{CA04C357-1D97-4660-B358-12FF1DBABDA8}"/>
               </a:ext>
             </a:extLst>
           </p:cNvPr>
@@ -13388,7 +11608,7 @@
           <p:cNvPr id="9" name="">
             <a:extLst xmlns:a="http://schemas.openxmlformats.org/drawingml/2006/main">
               <a:ext uri="{FF2B5EF4-FFF2-40B4-BE49-F238E27FC236}">
-                <a16:creationId xmlns:a16="http://schemas.microsoft.com/office/drawing/2014/main" id="{3D13E5EA-9CE0-48E9-801D-87C0B8C52145}"/>
+                <a16:creationId xmlns:a16="http://schemas.microsoft.com/office/drawing/2014/main" id="{C9928680-E7E2-4213-AAFE-BF1D22856781}"/>
               </a:ext>
             </a:extLst>
           </p:cNvPr>
@@ -13445,7 +11665,7 @@
           <p:cNvPr id="10" name="">
             <a:extLst xmlns:a="http://schemas.openxmlformats.org/drawingml/2006/main">
               <a:ext uri="{FF2B5EF4-FFF2-40B4-BE49-F238E27FC236}">
-                <a16:creationId xmlns:a16="http://schemas.microsoft.com/office/drawing/2014/main" id="{D12C3D5B-1D3C-407C-BC55-B8CE0D4D8751}"/>
+                <a16:creationId xmlns:a16="http://schemas.microsoft.com/office/drawing/2014/main" id="{93AE9ADA-3549-4F54-A5DE-1482B15C3CB9}"/>
               </a:ext>
             </a:extLst>
           </p:cNvPr>
@@ -13500,7 +11720,7 @@
     </p:spTree>
     <p:extLst>
       <p:ext uri="{BB962C8B-B14F-4D97-AF65-F5344CB8AC3E}">
-        <p14:creationId xmlns:p14="http://schemas.microsoft.com/office/powerpoint/2010/main" val="516059348"/>
+        <p14:creationId xmlns:p14="http://schemas.microsoft.com/office/powerpoint/2010/main" val="495764677"/>
       </p:ext>
     </p:extLst>
   </p:cSld>
@@ -13531,7 +11751,7 @@
           <p:cNvPr id="9" name="">
             <a:extLst xmlns:a="http://schemas.openxmlformats.org/drawingml/2006/main">
               <a:ext uri="{FF2B5EF4-FFF2-40B4-BE49-F238E27FC236}">
-                <a16:creationId xmlns:a16="http://schemas.microsoft.com/office/drawing/2014/main" id="{1FF82197-5747-48CA-AB30-834FE663713E}"/>
+                <a16:creationId xmlns:a16="http://schemas.microsoft.com/office/drawing/2014/main" id="{CDACC8D0-0873-4E60-8320-E55F3F5FD5B2}"/>
               </a:ext>
             </a:extLst>
           </p:cNvPr>
@@ -13561,7 +11781,7 @@
           <p:cNvPr id="2" name="">
             <a:extLst xmlns:a="http://schemas.openxmlformats.org/drawingml/2006/main">
               <a:ext uri="{FF2B5EF4-FFF2-40B4-BE49-F238E27FC236}">
-                <a16:creationId xmlns:a16="http://schemas.microsoft.com/office/drawing/2014/main" id="{49FC35F7-0975-48C9-9DA2-62EE634BF64D}"/>
+                <a16:creationId xmlns:a16="http://schemas.microsoft.com/office/drawing/2014/main" id="{69781DEA-6DF2-4EF2-A5C5-15F11BEEFC41}"/>
               </a:ext>
             </a:extLst>
           </p:cNvPr>
@@ -13618,7 +11838,7 @@
           <p:cNvPr id="3" name="">
             <a:extLst xmlns:a="http://schemas.openxmlformats.org/drawingml/2006/main">
               <a:ext uri="{FF2B5EF4-FFF2-40B4-BE49-F238E27FC236}">
-                <a16:creationId xmlns:a16="http://schemas.microsoft.com/office/drawing/2014/main" id="{22C49EBA-74DB-4BF4-A532-D4B288D182F4}"/>
+                <a16:creationId xmlns:a16="http://schemas.microsoft.com/office/drawing/2014/main" id="{6B868525-01EA-4029-82E5-7E48FD9CE72A}"/>
               </a:ext>
             </a:extLst>
           </p:cNvPr>
@@ -13675,7 +11895,7 @@
           <p:cNvPr id="4" name="">
             <a:extLst xmlns:a="http://schemas.openxmlformats.org/drawingml/2006/main">
               <a:ext uri="{FF2B5EF4-FFF2-40B4-BE49-F238E27FC236}">
-                <a16:creationId xmlns:a16="http://schemas.microsoft.com/office/drawing/2014/main" id="{B3A998CA-CF00-4384-B1AF-EBBFD7047F0B}"/>
+                <a16:creationId xmlns:a16="http://schemas.microsoft.com/office/drawing/2014/main" id="{864E7BC7-9E69-41D5-BB85-5E929DF1DB87}"/>
               </a:ext>
             </a:extLst>
           </p:cNvPr>
@@ -13705,7 +11925,7 @@
           <p:cNvPr id="5" name="">
             <a:extLst xmlns:a="http://schemas.openxmlformats.org/drawingml/2006/main">
               <a:ext uri="{FF2B5EF4-FFF2-40B4-BE49-F238E27FC236}">
-                <a16:creationId xmlns:a16="http://schemas.microsoft.com/office/drawing/2014/main" id="{A31E265E-C4FC-4F7B-B7B0-36DE4D985BD4}"/>
+                <a16:creationId xmlns:a16="http://schemas.microsoft.com/office/drawing/2014/main" id="{9CA6F006-B385-4046-A8DD-7CECA9F64668}"/>
               </a:ext>
             </a:extLst>
           </p:cNvPr>
@@ -13735,7 +11955,7 @@
           <p:cNvPr id="6" name="">
             <a:extLst xmlns:a="http://schemas.openxmlformats.org/drawingml/2006/main">
               <a:ext uri="{FF2B5EF4-FFF2-40B4-BE49-F238E27FC236}">
-                <a16:creationId xmlns:a16="http://schemas.microsoft.com/office/drawing/2014/main" id="{46148E58-FABB-4327-B63C-232A534410F3}"/>
+                <a16:creationId xmlns:a16="http://schemas.microsoft.com/office/drawing/2014/main" id="{76D90BB2-431F-41F1-840B-A41D98AA5D0E}"/>
               </a:ext>
             </a:extLst>
           </p:cNvPr>
@@ -13792,7 +12012,7 @@
           <p:cNvPr id="7" name="">
             <a:extLst xmlns:a="http://schemas.openxmlformats.org/drawingml/2006/main">
               <a:ext uri="{FF2B5EF4-FFF2-40B4-BE49-F238E27FC236}">
-                <a16:creationId xmlns:a16="http://schemas.microsoft.com/office/drawing/2014/main" id="{04BC627B-842B-4F82-B708-3EECD5E36109}"/>
+                <a16:creationId xmlns:a16="http://schemas.microsoft.com/office/drawing/2014/main" id="{51B92BA2-E3A3-425E-AAF7-D80C459F3CC2}"/>
               </a:ext>
             </a:extLst>
           </p:cNvPr>
@@ -13849,7 +12069,7 @@
           <p:cNvPr id="8" name="">
             <a:extLst xmlns:a="http://schemas.openxmlformats.org/drawingml/2006/main">
               <a:ext uri="{FF2B5EF4-FFF2-40B4-BE49-F238E27FC236}">
-                <a16:creationId xmlns:a16="http://schemas.microsoft.com/office/drawing/2014/main" id="{8D04F49A-C8C6-4D45-B54D-C70C54D4D80F}"/>
+                <a16:creationId xmlns:a16="http://schemas.microsoft.com/office/drawing/2014/main" id="{0956DFBD-E3C5-43F1-8FE5-DAEC9924FF8E}"/>
               </a:ext>
             </a:extLst>
           </p:cNvPr>
@@ -13904,7 +12124,7 @@
     </p:spTree>
     <p:extLst>
       <p:ext uri="{BB962C8B-B14F-4D97-AF65-F5344CB8AC3E}">
-        <p14:creationId xmlns:p14="http://schemas.microsoft.com/office/powerpoint/2010/main" val="411621425"/>
+        <p14:creationId xmlns:p14="http://schemas.microsoft.com/office/powerpoint/2010/main" val="415328668"/>
       </p:ext>
     </p:extLst>
   </p:cSld>
@@ -13935,7 +12155,7 @@
           <p:cNvPr id="13" name="">
             <a:extLst xmlns:a="http://schemas.openxmlformats.org/drawingml/2006/main">
               <a:ext uri="{FF2B5EF4-FFF2-40B4-BE49-F238E27FC236}">
-                <a16:creationId xmlns:a16="http://schemas.microsoft.com/office/drawing/2014/main" id="{15E1C2B7-E624-448C-8C85-98A8AF7EC5A0}"/>
+                <a16:creationId xmlns:a16="http://schemas.microsoft.com/office/drawing/2014/main" id="{73EEC30A-F16D-46A2-8102-ADE8C82C8772}"/>
               </a:ext>
             </a:extLst>
           </p:cNvPr>
@@ -13965,7 +12185,7 @@
           <p:cNvPr id="2" name="">
             <a:extLst xmlns:a="http://schemas.openxmlformats.org/drawingml/2006/main">
               <a:ext uri="{FF2B5EF4-FFF2-40B4-BE49-F238E27FC236}">
-                <a16:creationId xmlns:a16="http://schemas.microsoft.com/office/drawing/2014/main" id="{7BFD097E-247A-4A49-8C13-95E63B2F9C1C}"/>
+                <a16:creationId xmlns:a16="http://schemas.microsoft.com/office/drawing/2014/main" id="{2F368A0E-0DD9-427E-8C6B-0F9EAE3F69A1}"/>
               </a:ext>
             </a:extLst>
           </p:cNvPr>
@@ -14022,7 +12242,7 @@
           <p:cNvPr id="3" name="">
             <a:extLst xmlns:a="http://schemas.openxmlformats.org/drawingml/2006/main">
               <a:ext uri="{FF2B5EF4-FFF2-40B4-BE49-F238E27FC236}">
-                <a16:creationId xmlns:a16="http://schemas.microsoft.com/office/drawing/2014/main" id="{6EB87BD1-6DED-4F7B-B758-424D79117FF7}"/>
+                <a16:creationId xmlns:a16="http://schemas.microsoft.com/office/drawing/2014/main" id="{C111F3EA-4D59-4F87-8F40-61B0F36B980E}"/>
               </a:ext>
             </a:extLst>
           </p:cNvPr>
@@ -14079,7 +12299,7 @@
           <p:cNvPr id="4" name="">
             <a:extLst xmlns:a="http://schemas.openxmlformats.org/drawingml/2006/main">
               <a:ext uri="{FF2B5EF4-FFF2-40B4-BE49-F238E27FC236}">
-                <a16:creationId xmlns:a16="http://schemas.microsoft.com/office/drawing/2014/main" id="{97CE8BFB-5544-44FA-BDB0-D138EDF6B7EB}"/>
+                <a16:creationId xmlns:a16="http://schemas.microsoft.com/office/drawing/2014/main" id="{BE1915C7-D5E3-4AF8-BBBA-1DD8E0875419}"/>
               </a:ext>
             </a:extLst>
           </p:cNvPr>
@@ -14136,7 +12356,7 @@
           <p:cNvPr id="5" name="">
             <a:extLst xmlns:a="http://schemas.openxmlformats.org/drawingml/2006/main">
               <a:ext uri="{FF2B5EF4-FFF2-40B4-BE49-F238E27FC236}">
-                <a16:creationId xmlns:a16="http://schemas.microsoft.com/office/drawing/2014/main" id="{004527B3-00B9-4D10-B7F5-3BE696528C80}"/>
+                <a16:creationId xmlns:a16="http://schemas.microsoft.com/office/drawing/2014/main" id="{2AB4069C-BCC1-4F1D-A5DB-9508665D7324}"/>
               </a:ext>
             </a:extLst>
           </p:cNvPr>
@@ -14193,7 +12413,7 @@
           <p:cNvPr id="6" name="">
             <a:extLst xmlns:a="http://schemas.openxmlformats.org/drawingml/2006/main">
               <a:ext uri="{FF2B5EF4-FFF2-40B4-BE49-F238E27FC236}">
-                <a16:creationId xmlns:a16="http://schemas.microsoft.com/office/drawing/2014/main" id="{21379D41-8ED8-44CB-87BC-D9346968F4CC}"/>
+                <a16:creationId xmlns:a16="http://schemas.microsoft.com/office/drawing/2014/main" id="{B1796C28-D69B-4D41-AA7D-227AA27C5725}"/>
               </a:ext>
             </a:extLst>
           </p:cNvPr>
@@ -14250,7 +12470,7 @@
           <p:cNvPr id="7" name="">
             <a:extLst xmlns:a="http://schemas.openxmlformats.org/drawingml/2006/main">
               <a:ext uri="{FF2B5EF4-FFF2-40B4-BE49-F238E27FC236}">
-                <a16:creationId xmlns:a16="http://schemas.microsoft.com/office/drawing/2014/main" id="{CB6F2850-0799-46BC-A5B5-4F49ECD51E55}"/>
+                <a16:creationId xmlns:a16="http://schemas.microsoft.com/office/drawing/2014/main" id="{D3E206A0-32C5-46EB-AADB-0FC55C149585}"/>
               </a:ext>
             </a:extLst>
           </p:cNvPr>
@@ -14307,7 +12527,7 @@
           <p:cNvPr id="8" name="">
             <a:extLst xmlns:a="http://schemas.openxmlformats.org/drawingml/2006/main">
               <a:ext uri="{FF2B5EF4-FFF2-40B4-BE49-F238E27FC236}">
-                <a16:creationId xmlns:a16="http://schemas.microsoft.com/office/drawing/2014/main" id="{F6FFDC9B-D902-4882-BAE2-5365D4B3A12D}"/>
+                <a16:creationId xmlns:a16="http://schemas.microsoft.com/office/drawing/2014/main" id="{974C7A96-1356-4C6F-94F1-A29FACE656A5}"/>
               </a:ext>
             </a:extLst>
           </p:cNvPr>
@@ -14364,7 +12584,7 @@
           <p:cNvPr id="9" name="">
             <a:extLst xmlns:a="http://schemas.openxmlformats.org/drawingml/2006/main">
               <a:ext uri="{FF2B5EF4-FFF2-40B4-BE49-F238E27FC236}">
-                <a16:creationId xmlns:a16="http://schemas.microsoft.com/office/drawing/2014/main" id="{0DF975AD-D04A-4C4D-8670-6DD7DD0BE459}"/>
+                <a16:creationId xmlns:a16="http://schemas.microsoft.com/office/drawing/2014/main" id="{5FD54955-F23A-42E4-B04A-B22DF3B826DE}"/>
               </a:ext>
             </a:extLst>
           </p:cNvPr>
@@ -14421,7 +12641,7 @@
           <p:cNvPr id="10" name="">
             <a:extLst xmlns:a="http://schemas.openxmlformats.org/drawingml/2006/main">
               <a:ext uri="{FF2B5EF4-FFF2-40B4-BE49-F238E27FC236}">
-                <a16:creationId xmlns:a16="http://schemas.microsoft.com/office/drawing/2014/main" id="{A3BB0C6D-E973-448B-AEE1-63C3CF288ABE}"/>
+                <a16:creationId xmlns:a16="http://schemas.microsoft.com/office/drawing/2014/main" id="{127E4760-B84E-411A-A0DE-CFD572912834}"/>
               </a:ext>
             </a:extLst>
           </p:cNvPr>
@@ -14478,7 +12698,7 @@
           <p:cNvPr id="11" name="">
             <a:extLst xmlns:a="http://schemas.openxmlformats.org/drawingml/2006/main">
               <a:ext uri="{FF2B5EF4-FFF2-40B4-BE49-F238E27FC236}">
-                <a16:creationId xmlns:a16="http://schemas.microsoft.com/office/drawing/2014/main" id="{3C7E6042-4E7E-46A3-9C74-60CEF47BD26F}"/>
+                <a16:creationId xmlns:a16="http://schemas.microsoft.com/office/drawing/2014/main" id="{2902D6C3-788F-4B90-9FC1-BB69205D04A1}"/>
               </a:ext>
             </a:extLst>
           </p:cNvPr>
@@ -14535,7 +12755,7 @@
           <p:cNvPr id="12" name="">
             <a:extLst xmlns:a="http://schemas.openxmlformats.org/drawingml/2006/main">
               <a:ext uri="{FF2B5EF4-FFF2-40B4-BE49-F238E27FC236}">
-                <a16:creationId xmlns:a16="http://schemas.microsoft.com/office/drawing/2014/main" id="{6F9D0FB7-C87C-4556-8A03-2149A4A733D8}"/>
+                <a16:creationId xmlns:a16="http://schemas.microsoft.com/office/drawing/2014/main" id="{FFA5DC45-01A9-498E-BB70-7EA2EB53808C}"/>
               </a:ext>
             </a:extLst>
           </p:cNvPr>
@@ -14590,7 +12810,7 @@
     </p:spTree>
     <p:extLst>
       <p:ext uri="{BB962C8B-B14F-4D97-AF65-F5344CB8AC3E}">
-        <p14:creationId xmlns:p14="http://schemas.microsoft.com/office/powerpoint/2010/main" val="1778806487"/>
+        <p14:creationId xmlns:p14="http://schemas.microsoft.com/office/powerpoint/2010/main" val="1069247605"/>
       </p:ext>
     </p:extLst>
   </p:cSld>
@@ -14621,7 +12841,7 @@
           <p:cNvPr id="10" name="">
             <a:extLst xmlns:a="http://schemas.openxmlformats.org/drawingml/2006/main">
               <a:ext uri="{FF2B5EF4-FFF2-40B4-BE49-F238E27FC236}">
-                <a16:creationId xmlns:a16="http://schemas.microsoft.com/office/drawing/2014/main" id="{37C57987-19E7-410A-8F1F-3AF2BF0C3319}"/>
+                <a16:creationId xmlns:a16="http://schemas.microsoft.com/office/drawing/2014/main" id="{856E26B8-75DF-47EE-B8B9-9AF1ABA3A901}"/>
               </a:ext>
             </a:extLst>
           </p:cNvPr>
@@ -14651,7 +12871,7 @@
           <p:cNvPr id="2" name="">
             <a:extLst xmlns:a="http://schemas.openxmlformats.org/drawingml/2006/main">
               <a:ext uri="{FF2B5EF4-FFF2-40B4-BE49-F238E27FC236}">
-                <a16:creationId xmlns:a16="http://schemas.microsoft.com/office/drawing/2014/main" id="{F63E6E8E-3C9F-474F-B4F2-4D78B0145768}"/>
+                <a16:creationId xmlns:a16="http://schemas.microsoft.com/office/drawing/2014/main" id="{03D17F9C-6DF8-4B6D-98F7-DF187F9D207D}"/>
               </a:ext>
             </a:extLst>
           </p:cNvPr>
@@ -14708,7 +12928,7 @@
           <p:cNvPr id="3" name="">
             <a:extLst xmlns:a="http://schemas.openxmlformats.org/drawingml/2006/main">
               <a:ext uri="{FF2B5EF4-FFF2-40B4-BE49-F238E27FC236}">
-                <a16:creationId xmlns:a16="http://schemas.microsoft.com/office/drawing/2014/main" id="{3D040E41-68EF-499E-8AE2-14D3A3C4843F}"/>
+                <a16:creationId xmlns:a16="http://schemas.microsoft.com/office/drawing/2014/main" id="{0488A475-5A43-4C5F-81E6-35D0570BFE7D}"/>
               </a:ext>
             </a:extLst>
           </p:cNvPr>
@@ -14765,7 +12985,7 @@
           <p:cNvPr id="4" name="">
             <a:extLst xmlns:a="http://schemas.openxmlformats.org/drawingml/2006/main">
               <a:ext uri="{FF2B5EF4-FFF2-40B4-BE49-F238E27FC236}">
-                <a16:creationId xmlns:a16="http://schemas.microsoft.com/office/drawing/2014/main" id="{B40DD3B3-1661-4D15-BD29-D5A872C90817}"/>
+                <a16:creationId xmlns:a16="http://schemas.microsoft.com/office/drawing/2014/main" id="{2C3B4727-6992-4614-9D11-D618E3DA32AF}"/>
               </a:ext>
             </a:extLst>
           </p:cNvPr>
@@ -14795,7 +13015,7 @@
           <p:cNvPr id="5" name="">
             <a:extLst xmlns:a="http://schemas.openxmlformats.org/drawingml/2006/main">
               <a:ext uri="{FF2B5EF4-FFF2-40B4-BE49-F238E27FC236}">
-                <a16:creationId xmlns:a16="http://schemas.microsoft.com/office/drawing/2014/main" id="{386664D3-8991-4A48-8255-B13B48A35A90}"/>
+                <a16:creationId xmlns:a16="http://schemas.microsoft.com/office/drawing/2014/main" id="{0A5E0119-A719-4605-8C62-A6439E582C51}"/>
               </a:ext>
             </a:extLst>
           </p:cNvPr>
@@ -14852,7 +13072,7 @@
           <p:cNvPr id="6" name="">
             <a:extLst xmlns:a="http://schemas.openxmlformats.org/drawingml/2006/main">
               <a:ext uri="{FF2B5EF4-FFF2-40B4-BE49-F238E27FC236}">
-                <a16:creationId xmlns:a16="http://schemas.microsoft.com/office/drawing/2014/main" id="{A94A3900-5EA9-4B62-94D8-9FAD71E26674}"/>
+                <a16:creationId xmlns:a16="http://schemas.microsoft.com/office/drawing/2014/main" id="{EDC9B5F8-3D00-46F9-8E1E-99E4E7112D2A}"/>
               </a:ext>
             </a:extLst>
           </p:cNvPr>
@@ -14937,7 +13157,7 @@
           <p:cNvPr id="7" name="">
             <a:extLst xmlns:a="http://schemas.openxmlformats.org/drawingml/2006/main">
               <a:ext uri="{FF2B5EF4-FFF2-40B4-BE49-F238E27FC236}">
-                <a16:creationId xmlns:a16="http://schemas.microsoft.com/office/drawing/2014/main" id="{B11D60A7-0E98-4B5D-91E1-8210F1F3FAD5}"/>
+                <a16:creationId xmlns:a16="http://schemas.microsoft.com/office/drawing/2014/main" id="{481063A8-8837-4806-9341-19E445988B4F}"/>
               </a:ext>
             </a:extLst>
           </p:cNvPr>
@@ -14994,7 +13214,7 @@
           <p:cNvPr id="8" name="">
             <a:extLst xmlns:a="http://schemas.openxmlformats.org/drawingml/2006/main">
               <a:ext uri="{FF2B5EF4-FFF2-40B4-BE49-F238E27FC236}">
-                <a16:creationId xmlns:a16="http://schemas.microsoft.com/office/drawing/2014/main" id="{6CD848FE-1DCB-4070-A0A1-A4624573330D}"/>
+                <a16:creationId xmlns:a16="http://schemas.microsoft.com/office/drawing/2014/main" id="{536B2887-2F2F-412E-8E3E-7086D685C4BE}"/>
               </a:ext>
             </a:extLst>
           </p:cNvPr>
@@ -15051,7 +13271,7 @@
           <p:cNvPr id="9" name="">
             <a:extLst xmlns:a="http://schemas.openxmlformats.org/drawingml/2006/main">
               <a:ext uri="{FF2B5EF4-FFF2-40B4-BE49-F238E27FC236}">
-                <a16:creationId xmlns:a16="http://schemas.microsoft.com/office/drawing/2014/main" id="{0F32FDC7-3C73-4F59-90AB-92D9D5809C28}"/>
+                <a16:creationId xmlns:a16="http://schemas.microsoft.com/office/drawing/2014/main" id="{6757718B-69EA-4419-B93C-CB01D1BDD5B4}"/>
               </a:ext>
             </a:extLst>
           </p:cNvPr>
@@ -15106,7 +13326,7 @@
     </p:spTree>
     <p:extLst>
       <p:ext uri="{BB962C8B-B14F-4D97-AF65-F5344CB8AC3E}">
-        <p14:creationId xmlns:p14="http://schemas.microsoft.com/office/powerpoint/2010/main" val="709327678"/>
+        <p14:creationId xmlns:p14="http://schemas.microsoft.com/office/powerpoint/2010/main" val="419769050"/>
       </p:ext>
     </p:extLst>
   </p:cSld>
@@ -15137,7 +13357,7 @@
           <p:cNvPr id="13" name="">
             <a:extLst xmlns:a="http://schemas.openxmlformats.org/drawingml/2006/main">
               <a:ext uri="{FF2B5EF4-FFF2-40B4-BE49-F238E27FC236}">
-                <a16:creationId xmlns:a16="http://schemas.microsoft.com/office/drawing/2014/main" id="{76E14921-B675-4153-A9DE-9CAF3A938BC6}"/>
+                <a16:creationId xmlns:a16="http://schemas.microsoft.com/office/drawing/2014/main" id="{5BE8084A-B6D7-4867-B8DA-4BEEB9854B3E}"/>
               </a:ext>
             </a:extLst>
           </p:cNvPr>
@@ -15167,7 +13387,7 @@
           <p:cNvPr id="2" name="">
             <a:extLst xmlns:a="http://schemas.openxmlformats.org/drawingml/2006/main">
               <a:ext uri="{FF2B5EF4-FFF2-40B4-BE49-F238E27FC236}">
-                <a16:creationId xmlns:a16="http://schemas.microsoft.com/office/drawing/2014/main" id="{B11B16D9-06FE-4FB6-B5B0-DF80B64AA13D}"/>
+                <a16:creationId xmlns:a16="http://schemas.microsoft.com/office/drawing/2014/main" id="{9931F709-BB07-4A34-A5A1-741E124920DA}"/>
               </a:ext>
             </a:extLst>
           </p:cNvPr>
@@ -15224,7 +13444,7 @@
           <p:cNvPr id="3" name="">
             <a:extLst xmlns:a="http://schemas.openxmlformats.org/drawingml/2006/main">
               <a:ext uri="{FF2B5EF4-FFF2-40B4-BE49-F238E27FC236}">
-                <a16:creationId xmlns:a16="http://schemas.microsoft.com/office/drawing/2014/main" id="{CEBCF4AF-AB34-4D13-8A27-54AF8660A7E0}"/>
+                <a16:creationId xmlns:a16="http://schemas.microsoft.com/office/drawing/2014/main" id="{45704A13-5C25-4D6E-96FC-1CD0FCA60335}"/>
               </a:ext>
             </a:extLst>
           </p:cNvPr>
@@ -15281,7 +13501,7 @@
           <p:cNvPr id="4" name="">
             <a:extLst xmlns:a="http://schemas.openxmlformats.org/drawingml/2006/main">
               <a:ext uri="{FF2B5EF4-FFF2-40B4-BE49-F238E27FC236}">
-                <a16:creationId xmlns:a16="http://schemas.microsoft.com/office/drawing/2014/main" id="{4443361C-76BE-46BC-8ED6-47FF0BE56993}"/>
+                <a16:creationId xmlns:a16="http://schemas.microsoft.com/office/drawing/2014/main" id="{1067E32E-8BB3-43D1-BAB0-A9E5BD21171A}"/>
               </a:ext>
             </a:extLst>
           </p:cNvPr>
@@ -15338,7 +13558,7 @@
           <p:cNvPr id="5" name="">
             <a:extLst xmlns:a="http://schemas.openxmlformats.org/drawingml/2006/main">
               <a:ext uri="{FF2B5EF4-FFF2-40B4-BE49-F238E27FC236}">
-                <a16:creationId xmlns:a16="http://schemas.microsoft.com/office/drawing/2014/main" id="{8828CCD8-A5CE-4246-9C78-AF6BAC0CD04D}"/>
+                <a16:creationId xmlns:a16="http://schemas.microsoft.com/office/drawing/2014/main" id="{E8279D8A-4DE8-4F9F-B7F9-04C0DDB392FE}"/>
               </a:ext>
             </a:extLst>
           </p:cNvPr>
@@ -15395,7 +13615,7 @@
           <p:cNvPr id="6" name="">
             <a:extLst xmlns:a="http://schemas.openxmlformats.org/drawingml/2006/main">
               <a:ext uri="{FF2B5EF4-FFF2-40B4-BE49-F238E27FC236}">
-                <a16:creationId xmlns:a16="http://schemas.microsoft.com/office/drawing/2014/main" id="{7322D551-9CF0-4559-A711-381144E3F8D7}"/>
+                <a16:creationId xmlns:a16="http://schemas.microsoft.com/office/drawing/2014/main" id="{A19415F1-15A2-40C8-BA73-A67389B47319}"/>
               </a:ext>
             </a:extLst>
           </p:cNvPr>
@@ -15452,7 +13672,7 @@
           <p:cNvPr id="7" name="">
             <a:extLst xmlns:a="http://schemas.openxmlformats.org/drawingml/2006/main">
               <a:ext uri="{FF2B5EF4-FFF2-40B4-BE49-F238E27FC236}">
-                <a16:creationId xmlns:a16="http://schemas.microsoft.com/office/drawing/2014/main" id="{25641D87-07A6-45D0-BE11-2C8E25E575EC}"/>
+                <a16:creationId xmlns:a16="http://schemas.microsoft.com/office/drawing/2014/main" id="{38680DCF-59B3-4E56-B298-23CEDD0D68AB}"/>
               </a:ext>
             </a:extLst>
           </p:cNvPr>
@@ -15509,7 +13729,7 @@
           <p:cNvPr id="8" name="">
             <a:extLst xmlns:a="http://schemas.openxmlformats.org/drawingml/2006/main">
               <a:ext uri="{FF2B5EF4-FFF2-40B4-BE49-F238E27FC236}">
-                <a16:creationId xmlns:a16="http://schemas.microsoft.com/office/drawing/2014/main" id="{C87F5C56-6976-4CE3-A8F4-235BC2D3AA0C}"/>
+                <a16:creationId xmlns:a16="http://schemas.microsoft.com/office/drawing/2014/main" id="{08981C88-8F05-4055-96BC-A3562FE98D1D}"/>
               </a:ext>
             </a:extLst>
           </p:cNvPr>
@@ -15566,7 +13786,7 @@
           <p:cNvPr id="9" name="">
             <a:extLst xmlns:a="http://schemas.openxmlformats.org/drawingml/2006/main">
               <a:ext uri="{FF2B5EF4-FFF2-40B4-BE49-F238E27FC236}">
-                <a16:creationId xmlns:a16="http://schemas.microsoft.com/office/drawing/2014/main" id="{0356712E-CC4C-43DD-A322-FC72B4290732}"/>
+                <a16:creationId xmlns:a16="http://schemas.microsoft.com/office/drawing/2014/main" id="{9548A232-F204-4DC5-AC6F-0754CEF9D4A9}"/>
               </a:ext>
             </a:extLst>
           </p:cNvPr>
@@ -15623,7 +13843,7 @@
           <p:cNvPr id="10" name="">
             <a:extLst xmlns:a="http://schemas.openxmlformats.org/drawingml/2006/main">
               <a:ext uri="{FF2B5EF4-FFF2-40B4-BE49-F238E27FC236}">
-                <a16:creationId xmlns:a16="http://schemas.microsoft.com/office/drawing/2014/main" id="{ED70380D-0B0E-4E26-9D8F-A3CA6F9355A8}"/>
+                <a16:creationId xmlns:a16="http://schemas.microsoft.com/office/drawing/2014/main" id="{9DDF4C71-BFF7-4FB4-ACAB-17B0E3976D85}"/>
               </a:ext>
             </a:extLst>
           </p:cNvPr>
@@ -15680,7 +13900,7 @@
           <p:cNvPr id="11" name="">
             <a:extLst xmlns:a="http://schemas.openxmlformats.org/drawingml/2006/main">
               <a:ext uri="{FF2B5EF4-FFF2-40B4-BE49-F238E27FC236}">
-                <a16:creationId xmlns:a16="http://schemas.microsoft.com/office/drawing/2014/main" id="{AA878CA7-DB08-45E5-89AE-1B0764B7A5C5}"/>
+                <a16:creationId xmlns:a16="http://schemas.microsoft.com/office/drawing/2014/main" id="{E0C751AC-889E-46D6-9D89-2486A0DC19CF}"/>
               </a:ext>
             </a:extLst>
           </p:cNvPr>
@@ -15737,7 +13957,7 @@
           <p:cNvPr id="12" name="">
             <a:extLst xmlns:a="http://schemas.openxmlformats.org/drawingml/2006/main">
               <a:ext uri="{FF2B5EF4-FFF2-40B4-BE49-F238E27FC236}">
-                <a16:creationId xmlns:a16="http://schemas.microsoft.com/office/drawing/2014/main" id="{07970EF2-6551-4D48-8C41-4B8677A5943B}"/>
+                <a16:creationId xmlns:a16="http://schemas.microsoft.com/office/drawing/2014/main" id="{2269F686-8CA0-4984-B463-CF1F0F8FFA81}"/>
               </a:ext>
             </a:extLst>
           </p:cNvPr>
@@ -15792,7 +14012,7 @@
     </p:spTree>
     <p:extLst>
       <p:ext uri="{BB962C8B-B14F-4D97-AF65-F5344CB8AC3E}">
-        <p14:creationId xmlns:p14="http://schemas.microsoft.com/office/powerpoint/2010/main" val="43265248"/>
+        <p14:creationId xmlns:p14="http://schemas.microsoft.com/office/powerpoint/2010/main" val="1423437542"/>
       </p:ext>
     </p:extLst>
   </p:cSld>
@@ -15823,7 +14043,7 @@
           <p:cNvPr id="7" name="">
             <a:extLst xmlns:a="http://schemas.openxmlformats.org/drawingml/2006/main">
               <a:ext uri="{FF2B5EF4-FFF2-40B4-BE49-F238E27FC236}">
-                <a16:creationId xmlns:a16="http://schemas.microsoft.com/office/drawing/2014/main" id="{4DBE2A75-AD04-4406-A32F-1DDA1051C20F}"/>
+                <a16:creationId xmlns:a16="http://schemas.microsoft.com/office/drawing/2014/main" id="{DCA679E4-5214-4369-AA2D-592CA83155DD}"/>
               </a:ext>
             </a:extLst>
           </p:cNvPr>
@@ -15853,7 +14073,7 @@
           <p:cNvPr id="2" name="">
             <a:extLst xmlns:a="http://schemas.openxmlformats.org/drawingml/2006/main">
               <a:ext uri="{FF2B5EF4-FFF2-40B4-BE49-F238E27FC236}">
-                <a16:creationId xmlns:a16="http://schemas.microsoft.com/office/drawing/2014/main" id="{CDCC3442-4967-4CAD-B524-72A88BAE0EEA}"/>
+                <a16:creationId xmlns:a16="http://schemas.microsoft.com/office/drawing/2014/main" id="{E4AE0F09-AA1B-47F7-9F48-C143B24D455F}"/>
               </a:ext>
             </a:extLst>
           </p:cNvPr>
@@ -15910,7 +14130,7 @@
           <p:cNvPr id="3" name="">
             <a:extLst xmlns:a="http://schemas.openxmlformats.org/drawingml/2006/main">
               <a:ext uri="{FF2B5EF4-FFF2-40B4-BE49-F238E27FC236}">
-                <a16:creationId xmlns:a16="http://schemas.microsoft.com/office/drawing/2014/main" id="{B906D754-C31C-49B9-8AA9-D0BA128A564D}"/>
+                <a16:creationId xmlns:a16="http://schemas.microsoft.com/office/drawing/2014/main" id="{940E55DB-86FD-4BCD-A4FD-A211EFC2F057}"/>
               </a:ext>
             </a:extLst>
           </p:cNvPr>
@@ -15967,7 +14187,7 @@
           <p:cNvPr id="4" name="">
             <a:extLst xmlns:a="http://schemas.openxmlformats.org/drawingml/2006/main">
               <a:ext uri="{FF2B5EF4-FFF2-40B4-BE49-F238E27FC236}">
-                <a16:creationId xmlns:a16="http://schemas.microsoft.com/office/drawing/2014/main" id="{3CF3360D-D9D5-44B8-A4DE-7722B5F7D477}"/>
+                <a16:creationId xmlns:a16="http://schemas.microsoft.com/office/drawing/2014/main" id="{C2E2CD57-611D-43D6-B952-A85E36DCC38C}"/>
               </a:ext>
             </a:extLst>
           </p:cNvPr>
@@ -15997,7 +14217,7 @@
           <p:cNvPr id="5" name="">
             <a:extLst xmlns:a="http://schemas.openxmlformats.org/drawingml/2006/main">
               <a:ext uri="{FF2B5EF4-FFF2-40B4-BE49-F238E27FC236}">
-                <a16:creationId xmlns:a16="http://schemas.microsoft.com/office/drawing/2014/main" id="{E967B6BB-F8A9-49C2-BBAC-9D492C2FE673}"/>
+                <a16:creationId xmlns:a16="http://schemas.microsoft.com/office/drawing/2014/main" id="{E2DA12AF-EE37-4D0C-8E4B-780FE2102130}"/>
               </a:ext>
             </a:extLst>
           </p:cNvPr>
@@ -16054,7 +14274,7 @@
           <p:cNvPr id="6" name="">
             <a:extLst xmlns:a="http://schemas.openxmlformats.org/drawingml/2006/main">
               <a:ext uri="{FF2B5EF4-FFF2-40B4-BE49-F238E27FC236}">
-                <a16:creationId xmlns:a16="http://schemas.microsoft.com/office/drawing/2014/main" id="{06C8AAAA-ED8E-4C06-AAB7-1FEEA3ADC5D8}"/>
+                <a16:creationId xmlns:a16="http://schemas.microsoft.com/office/drawing/2014/main" id="{15075449-05C4-478D-BD6A-A6CDAA9D2CF6}"/>
               </a:ext>
             </a:extLst>
           </p:cNvPr>
@@ -16109,7 +14329,7 @@
     </p:spTree>
     <p:extLst>
       <p:ext uri="{BB962C8B-B14F-4D97-AF65-F5344CB8AC3E}">
-        <p14:creationId xmlns:p14="http://schemas.microsoft.com/office/powerpoint/2010/main" val="495176169"/>
+        <p14:creationId xmlns:p14="http://schemas.microsoft.com/office/powerpoint/2010/main" val="1054965162"/>
       </p:ext>
     </p:extLst>
   </p:cSld>
@@ -16140,7 +14360,7 @@
           <p:cNvPr id="13" name="">
             <a:extLst xmlns:a="http://schemas.openxmlformats.org/drawingml/2006/main">
               <a:ext uri="{FF2B5EF4-FFF2-40B4-BE49-F238E27FC236}">
-                <a16:creationId xmlns:a16="http://schemas.microsoft.com/office/drawing/2014/main" id="{4BC65B6C-BB27-4400-8410-080EE476ACA1}"/>
+                <a16:creationId xmlns:a16="http://schemas.microsoft.com/office/drawing/2014/main" id="{09C62EC4-517F-4996-89BA-5D7E6E27EB54}"/>
               </a:ext>
             </a:extLst>
           </p:cNvPr>
@@ -16170,7 +14390,7 @@
           <p:cNvPr id="2" name="">
             <a:extLst xmlns:a="http://schemas.openxmlformats.org/drawingml/2006/main">
               <a:ext uri="{FF2B5EF4-FFF2-40B4-BE49-F238E27FC236}">
-                <a16:creationId xmlns:a16="http://schemas.microsoft.com/office/drawing/2014/main" id="{AA74FC03-C588-4225-98DD-71D55F5E5CB7}"/>
+                <a16:creationId xmlns:a16="http://schemas.microsoft.com/office/drawing/2014/main" id="{2EC92527-9D75-4C6A-B31B-84528F9E3D5E}"/>
               </a:ext>
             </a:extLst>
           </p:cNvPr>
@@ -16227,7 +14447,7 @@
           <p:cNvPr id="3" name="">
             <a:extLst xmlns:a="http://schemas.openxmlformats.org/drawingml/2006/main">
               <a:ext uri="{FF2B5EF4-FFF2-40B4-BE49-F238E27FC236}">
-                <a16:creationId xmlns:a16="http://schemas.microsoft.com/office/drawing/2014/main" id="{88F45689-2BDC-4327-835E-3924EA201C70}"/>
+                <a16:creationId xmlns:a16="http://schemas.microsoft.com/office/drawing/2014/main" id="{4CC6F9F4-F49B-42CA-8483-674B4F7F3B0F}"/>
               </a:ext>
             </a:extLst>
           </p:cNvPr>
@@ -16284,7 +14504,7 @@
           <p:cNvPr id="4" name="">
             <a:extLst xmlns:a="http://schemas.openxmlformats.org/drawingml/2006/main">
               <a:ext uri="{FF2B5EF4-FFF2-40B4-BE49-F238E27FC236}">
-                <a16:creationId xmlns:a16="http://schemas.microsoft.com/office/drawing/2014/main" id="{2FE5054F-5272-405E-A148-46A34A0A3164}"/>
+                <a16:creationId xmlns:a16="http://schemas.microsoft.com/office/drawing/2014/main" id="{16531019-3DC5-4717-867D-6F9739149903}"/>
               </a:ext>
             </a:extLst>
           </p:cNvPr>
@@ -16341,7 +14561,7 @@
           <p:cNvPr id="5" name="">
             <a:extLst xmlns:a="http://schemas.openxmlformats.org/drawingml/2006/main">
               <a:ext uri="{FF2B5EF4-FFF2-40B4-BE49-F238E27FC236}">
-                <a16:creationId xmlns:a16="http://schemas.microsoft.com/office/drawing/2014/main" id="{114AD8E1-9FA0-49A0-A734-9929A606ED1A}"/>
+                <a16:creationId xmlns:a16="http://schemas.microsoft.com/office/drawing/2014/main" id="{CFB084D7-51B3-4529-BCCD-71CCE45CDF58}"/>
               </a:ext>
             </a:extLst>
           </p:cNvPr>
@@ -16398,7 +14618,7 @@
           <p:cNvPr id="6" name="">
             <a:extLst xmlns:a="http://schemas.openxmlformats.org/drawingml/2006/main">
               <a:ext uri="{FF2B5EF4-FFF2-40B4-BE49-F238E27FC236}">
-                <a16:creationId xmlns:a16="http://schemas.microsoft.com/office/drawing/2014/main" id="{91B02065-EE87-4364-9F00-AFCE0A1664DE}"/>
+                <a16:creationId xmlns:a16="http://schemas.microsoft.com/office/drawing/2014/main" id="{DD5D68B1-B9DB-40F8-8DE9-F1E94B78D023}"/>
               </a:ext>
             </a:extLst>
           </p:cNvPr>
@@ -16455,7 +14675,7 @@
           <p:cNvPr id="7" name="">
             <a:extLst xmlns:a="http://schemas.openxmlformats.org/drawingml/2006/main">
               <a:ext uri="{FF2B5EF4-FFF2-40B4-BE49-F238E27FC236}">
-                <a16:creationId xmlns:a16="http://schemas.microsoft.com/office/drawing/2014/main" id="{253933C4-4D1A-45A7-A6BC-437A0ADE27B9}"/>
+                <a16:creationId xmlns:a16="http://schemas.microsoft.com/office/drawing/2014/main" id="{A64CA33B-CC5F-406D-B4C2-B2D6870C4F49}"/>
               </a:ext>
             </a:extLst>
           </p:cNvPr>
@@ -16512,7 +14732,7 @@
           <p:cNvPr id="8" name="">
             <a:extLst xmlns:a="http://schemas.openxmlformats.org/drawingml/2006/main">
               <a:ext uri="{FF2B5EF4-FFF2-40B4-BE49-F238E27FC236}">
-                <a16:creationId xmlns:a16="http://schemas.microsoft.com/office/drawing/2014/main" id="{7AA3B8E6-C7EA-4E0D-8823-FACA8AE88842}"/>
+                <a16:creationId xmlns:a16="http://schemas.microsoft.com/office/drawing/2014/main" id="{1FFB752F-F17E-4910-BC65-4FF0BCE6B179}"/>
               </a:ext>
             </a:extLst>
           </p:cNvPr>
@@ -16569,7 +14789,7 @@
           <p:cNvPr id="9" name="">
             <a:extLst xmlns:a="http://schemas.openxmlformats.org/drawingml/2006/main">
               <a:ext uri="{FF2B5EF4-FFF2-40B4-BE49-F238E27FC236}">
-                <a16:creationId xmlns:a16="http://schemas.microsoft.com/office/drawing/2014/main" id="{431A0FEF-F6B6-46F0-819A-4C4CDF62C765}"/>
+                <a16:creationId xmlns:a16="http://schemas.microsoft.com/office/drawing/2014/main" id="{8A5B6741-1302-47FE-BBD1-E5908F5D69A0}"/>
               </a:ext>
             </a:extLst>
           </p:cNvPr>
@@ -16626,7 +14846,7 @@
           <p:cNvPr id="10" name="">
             <a:extLst xmlns:a="http://schemas.openxmlformats.org/drawingml/2006/main">
               <a:ext uri="{FF2B5EF4-FFF2-40B4-BE49-F238E27FC236}">
-                <a16:creationId xmlns:a16="http://schemas.microsoft.com/office/drawing/2014/main" id="{2CCCF2BA-CEC0-4D47-A55D-58BC5A62C36A}"/>
+                <a16:creationId xmlns:a16="http://schemas.microsoft.com/office/drawing/2014/main" id="{0AD361E0-F28D-4A92-A347-CF9E4DFD49BB}"/>
               </a:ext>
             </a:extLst>
           </p:cNvPr>
@@ -16683,7 +14903,7 @@
           <p:cNvPr id="11" name="">
             <a:extLst xmlns:a="http://schemas.openxmlformats.org/drawingml/2006/main">
               <a:ext uri="{FF2B5EF4-FFF2-40B4-BE49-F238E27FC236}">
-                <a16:creationId xmlns:a16="http://schemas.microsoft.com/office/drawing/2014/main" id="{5D4DC502-7A84-4D85-B8D9-00871E72C012}"/>
+                <a16:creationId xmlns:a16="http://schemas.microsoft.com/office/drawing/2014/main" id="{6D167F96-67D5-477E-AEF6-71159B2C3EE8}"/>
               </a:ext>
             </a:extLst>
           </p:cNvPr>
@@ -16740,7 +14960,7 @@
           <p:cNvPr id="12" name="">
             <a:extLst xmlns:a="http://schemas.openxmlformats.org/drawingml/2006/main">
               <a:ext uri="{FF2B5EF4-FFF2-40B4-BE49-F238E27FC236}">
-                <a16:creationId xmlns:a16="http://schemas.microsoft.com/office/drawing/2014/main" id="{5F651401-EED9-45A3-9D3E-9455C5A67C98}"/>
+                <a16:creationId xmlns:a16="http://schemas.microsoft.com/office/drawing/2014/main" id="{E8C8F20A-4A5D-4B60-A1FE-2F1595E0CB27}"/>
               </a:ext>
             </a:extLst>
           </p:cNvPr>
@@ -16795,7 +15015,7 @@
     </p:spTree>
     <p:extLst>
       <p:ext uri="{BB962C8B-B14F-4D97-AF65-F5344CB8AC3E}">
-        <p14:creationId xmlns:p14="http://schemas.microsoft.com/office/powerpoint/2010/main" val="1968049875"/>
+        <p14:creationId xmlns:p14="http://schemas.microsoft.com/office/powerpoint/2010/main" val="446918112"/>
       </p:ext>
     </p:extLst>
   </p:cSld>
@@ -16826,7 +15046,7 @@
           <p:cNvPr id="18" name="">
             <a:extLst xmlns:a="http://schemas.openxmlformats.org/drawingml/2006/main">
               <a:ext uri="{FF2B5EF4-FFF2-40B4-BE49-F238E27FC236}">
-                <a16:creationId xmlns:a16="http://schemas.microsoft.com/office/drawing/2014/main" id="{A4F93091-DD5E-4419-BF6B-26592C90F494}"/>
+                <a16:creationId xmlns:a16="http://schemas.microsoft.com/office/drawing/2014/main" id="{CB4796DF-237E-4AB0-A784-101EB2EFEFC3}"/>
               </a:ext>
             </a:extLst>
           </p:cNvPr>
@@ -16856,7 +15076,7 @@
           <p:cNvPr id="2" name="">
             <a:extLst xmlns:a="http://schemas.openxmlformats.org/drawingml/2006/main">
               <a:ext uri="{FF2B5EF4-FFF2-40B4-BE49-F238E27FC236}">
-                <a16:creationId xmlns:a16="http://schemas.microsoft.com/office/drawing/2014/main" id="{F31271ED-DB5E-431E-8A71-9B19B21BFDAE}"/>
+                <a16:creationId xmlns:a16="http://schemas.microsoft.com/office/drawing/2014/main" id="{F8963FE1-0F6D-46BF-A210-E9EA2741F27C}"/>
               </a:ext>
             </a:extLst>
           </p:cNvPr>
@@ -16913,7 +15133,7 @@
           <p:cNvPr id="3" name="">
             <a:extLst xmlns:a="http://schemas.openxmlformats.org/drawingml/2006/main">
               <a:ext uri="{FF2B5EF4-FFF2-40B4-BE49-F238E27FC236}">
-                <a16:creationId xmlns:a16="http://schemas.microsoft.com/office/drawing/2014/main" id="{85FCEC33-0787-48CF-A11F-1B973F31C874}"/>
+                <a16:creationId xmlns:a16="http://schemas.microsoft.com/office/drawing/2014/main" id="{E1E30B5E-9A82-4BB4-BB13-D7B971BA02B2}"/>
               </a:ext>
             </a:extLst>
           </p:cNvPr>
@@ -16970,7 +15190,7 @@
           <p:cNvPr id="4" name="">
             <a:extLst xmlns:a="http://schemas.openxmlformats.org/drawingml/2006/main">
               <a:ext uri="{FF2B5EF4-FFF2-40B4-BE49-F238E27FC236}">
-                <a16:creationId xmlns:a16="http://schemas.microsoft.com/office/drawing/2014/main" id="{6DBD1C31-51E4-4E28-9CF2-1B8E0B5B6F59}"/>
+                <a16:creationId xmlns:a16="http://schemas.microsoft.com/office/drawing/2014/main" id="{E6574369-8734-41CB-8FF0-F8FBD225280C}"/>
               </a:ext>
             </a:extLst>
           </p:cNvPr>
@@ -17027,7 +15247,7 @@
           <p:cNvPr id="5" name="">
             <a:extLst xmlns:a="http://schemas.openxmlformats.org/drawingml/2006/main">
               <a:ext uri="{FF2B5EF4-FFF2-40B4-BE49-F238E27FC236}">
-                <a16:creationId xmlns:a16="http://schemas.microsoft.com/office/drawing/2014/main" id="{97E5FCCA-0CA1-44D8-AA4D-2F08CFD111B1}"/>
+                <a16:creationId xmlns:a16="http://schemas.microsoft.com/office/drawing/2014/main" id="{644D5B76-5D40-4FA4-BB57-D7522C66E542}"/>
               </a:ext>
             </a:extLst>
           </p:cNvPr>
@@ -17084,7 +15304,7 @@
           <p:cNvPr id="6" name="">
             <a:extLst xmlns:a="http://schemas.openxmlformats.org/drawingml/2006/main">
               <a:ext uri="{FF2B5EF4-FFF2-40B4-BE49-F238E27FC236}">
-                <a16:creationId xmlns:a16="http://schemas.microsoft.com/office/drawing/2014/main" id="{564DFCC3-0BDB-42E1-B73D-6E426D869A6F}"/>
+                <a16:creationId xmlns:a16="http://schemas.microsoft.com/office/drawing/2014/main" id="{4C549966-FAB8-467F-A767-688707230381}"/>
               </a:ext>
             </a:extLst>
           </p:cNvPr>
@@ -17141,7 +15361,7 @@
           <p:cNvPr id="7" name="">
             <a:extLst xmlns:a="http://schemas.openxmlformats.org/drawingml/2006/main">
               <a:ext uri="{FF2B5EF4-FFF2-40B4-BE49-F238E27FC236}">
-                <a16:creationId xmlns:a16="http://schemas.microsoft.com/office/drawing/2014/main" id="{ED45ADAD-0605-47D6-A55F-F8CE519A8710}"/>
+                <a16:creationId xmlns:a16="http://schemas.microsoft.com/office/drawing/2014/main" id="{949EDB49-11A8-44E9-8BB5-563F9512231F}"/>
               </a:ext>
             </a:extLst>
           </p:cNvPr>
@@ -17198,7 +15418,7 @@
           <p:cNvPr id="8" name="">
             <a:extLst xmlns:a="http://schemas.openxmlformats.org/drawingml/2006/main">
               <a:ext uri="{FF2B5EF4-FFF2-40B4-BE49-F238E27FC236}">
-                <a16:creationId xmlns:a16="http://schemas.microsoft.com/office/drawing/2014/main" id="{F3080BF9-59E4-414A-AFF1-670C26C798E4}"/>
+                <a16:creationId xmlns:a16="http://schemas.microsoft.com/office/drawing/2014/main" id="{8479EDB4-F9DF-4A77-880E-EB31EA0E16BB}"/>
               </a:ext>
             </a:extLst>
           </p:cNvPr>
@@ -17255,7 +15475,7 @@
           <p:cNvPr id="9" name="">
             <a:extLst xmlns:a="http://schemas.openxmlformats.org/drawingml/2006/main">
               <a:ext uri="{FF2B5EF4-FFF2-40B4-BE49-F238E27FC236}">
-                <a16:creationId xmlns:a16="http://schemas.microsoft.com/office/drawing/2014/main" id="{7D10964E-C59E-41E9-A6C6-2384B8783471}"/>
+                <a16:creationId xmlns:a16="http://schemas.microsoft.com/office/drawing/2014/main" id="{F001566A-45A6-45F0-8B6F-5C07C49DAB9E}"/>
               </a:ext>
             </a:extLst>
           </p:cNvPr>
@@ -17312,7 +15532,7 @@
           <p:cNvPr id="10" name="">
             <a:extLst xmlns:a="http://schemas.openxmlformats.org/drawingml/2006/main">
               <a:ext uri="{FF2B5EF4-FFF2-40B4-BE49-F238E27FC236}">
-                <a16:creationId xmlns:a16="http://schemas.microsoft.com/office/drawing/2014/main" id="{083DAB8D-DB5C-4C3C-8A9D-178E1C9BE793}"/>
+                <a16:creationId xmlns:a16="http://schemas.microsoft.com/office/drawing/2014/main" id="{14822BAB-243B-4D60-8F8E-C4F5DC2D223A}"/>
               </a:ext>
             </a:extLst>
           </p:cNvPr>
@@ -17369,7 +15589,7 @@
           <p:cNvPr id="11" name="">
             <a:extLst xmlns:a="http://schemas.openxmlformats.org/drawingml/2006/main">
               <a:ext uri="{FF2B5EF4-FFF2-40B4-BE49-F238E27FC236}">
-                <a16:creationId xmlns:a16="http://schemas.microsoft.com/office/drawing/2014/main" id="{1F4996A3-6BEC-46F2-B97B-461CFF076B66}"/>
+                <a16:creationId xmlns:a16="http://schemas.microsoft.com/office/drawing/2014/main" id="{6EF53307-1A49-4812-BFF5-1A41C1490E4C}"/>
               </a:ext>
             </a:extLst>
           </p:cNvPr>
@@ -17430,7 +15650,7 @@
           <p:nvPr/>
         </p:nvPicPr>
         <p:blipFill>
-          <a:blip xmlns:r="http://schemas.openxmlformats.org/officeDocument/2006/relationships" xmlns:a="http://schemas.openxmlformats.org/drawingml/2006/main" r:embed="R09324dd85b2c474c"/>
+          <a:blip xmlns:r="http://schemas.openxmlformats.org/officeDocument/2006/relationships" xmlns:a="http://schemas.openxmlformats.org/drawingml/2006/main" r:embed="R908b455da4d14d1c"/>
           <a:stretch xmlns:a="http://schemas.openxmlformats.org/drawingml/2006/main"/>
         </p:blipFill>
         <p:spPr>
@@ -17448,7 +15668,7 @@
           <p:cNvPr id="13" name="">
             <a:extLst xmlns:a="http://schemas.openxmlformats.org/drawingml/2006/main">
               <a:ext uri="{FF2B5EF4-FFF2-40B4-BE49-F238E27FC236}">
-                <a16:creationId xmlns:a16="http://schemas.microsoft.com/office/drawing/2014/main" id="{ABF22453-45CD-4EC6-9831-6DB048990E70}"/>
+                <a16:creationId xmlns:a16="http://schemas.microsoft.com/office/drawing/2014/main" id="{1633EC32-D95C-4D1F-B216-60D06E31C111}"/>
               </a:ext>
             </a:extLst>
           </p:cNvPr>
@@ -17505,7 +15725,7 @@
           <p:cNvPr id="14" name="">
             <a:extLst xmlns:a="http://schemas.openxmlformats.org/drawingml/2006/main">
               <a:ext uri="{FF2B5EF4-FFF2-40B4-BE49-F238E27FC236}">
-                <a16:creationId xmlns:a16="http://schemas.microsoft.com/office/drawing/2014/main" id="{6AE56B11-24FA-42DB-8546-42C88FB05E63}"/>
+                <a16:creationId xmlns:a16="http://schemas.microsoft.com/office/drawing/2014/main" id="{6466F8D5-ECC7-4913-8058-1939055D48C0}"/>
               </a:ext>
             </a:extLst>
           </p:cNvPr>
@@ -17535,7 +15755,7 @@
           <p:cNvPr id="15" name="">
             <a:extLst xmlns:a="http://schemas.openxmlformats.org/drawingml/2006/main">
               <a:ext uri="{FF2B5EF4-FFF2-40B4-BE49-F238E27FC236}">
-                <a16:creationId xmlns:a16="http://schemas.microsoft.com/office/drawing/2014/main" id="{06424C46-FE58-4D93-8F86-1A06DDBD6409}"/>
+                <a16:creationId xmlns:a16="http://schemas.microsoft.com/office/drawing/2014/main" id="{B1938A7D-4B54-4A90-8052-1F1A4AF026F3}"/>
               </a:ext>
             </a:extLst>
           </p:cNvPr>
@@ -17581,7 +15801,7 @@
                 <a:latin typeface="Calibri"/>
                 <a:ea typeface="Calibri"/>
                 <a:cs typeface="Calibri"/>
-                <a:hlinkClick xmlns:r="http://schemas.openxmlformats.org/officeDocument/2006/relationships" r:id="R8af61c322d634422"/>
+                <a:hlinkClick xmlns:r="http://schemas.openxmlformats.org/officeDocument/2006/relationships" r:id="Rf1dffac276874c77"/>
               </a:rPr>
               <a:t>Open this week’s quiz</a:t>
             </a:r>
@@ -17593,7 +15813,7 @@
           <p:cNvPr id="16" name="">
             <a:extLst xmlns:a="http://schemas.openxmlformats.org/drawingml/2006/main">
               <a:ext uri="{FF2B5EF4-FFF2-40B4-BE49-F238E27FC236}">
-                <a16:creationId xmlns:a16="http://schemas.microsoft.com/office/drawing/2014/main" id="{B312E27F-6C6A-4A57-A80E-340A6658BBE1}"/>
+                <a16:creationId xmlns:a16="http://schemas.microsoft.com/office/drawing/2014/main" id="{AF732491-56BD-472B-8202-570C4B3F2F99}"/>
               </a:ext>
             </a:extLst>
           </p:cNvPr>
@@ -17650,7 +15870,7 @@
           <p:cNvPr id="17" name="">
             <a:extLst xmlns:a="http://schemas.openxmlformats.org/drawingml/2006/main">
               <a:ext uri="{FF2B5EF4-FFF2-40B4-BE49-F238E27FC236}">
-                <a16:creationId xmlns:a16="http://schemas.microsoft.com/office/drawing/2014/main" id="{A28DBC15-C31A-4DE2-BE49-CB0743CBC092}"/>
+                <a16:creationId xmlns:a16="http://schemas.microsoft.com/office/drawing/2014/main" id="{209EA90E-5F1F-4496-AC3A-B54CA9F9EF7E}"/>
               </a:ext>
             </a:extLst>
           </p:cNvPr>
@@ -17705,7 +15925,7 @@
     </p:spTree>
     <p:extLst>
       <p:ext uri="{BB962C8B-B14F-4D97-AF65-F5344CB8AC3E}">
-        <p14:creationId xmlns:p14="http://schemas.microsoft.com/office/powerpoint/2010/main" val="1691990039"/>
+        <p14:creationId xmlns:p14="http://schemas.microsoft.com/office/powerpoint/2010/main" val="1845507475"/>
       </p:ext>
     </p:extLst>
   </p:cSld>
@@ -17736,7 +15956,7 @@
           <p:cNvPr id="7" name="">
             <a:extLst xmlns:a="http://schemas.openxmlformats.org/drawingml/2006/main">
               <a:ext uri="{FF2B5EF4-FFF2-40B4-BE49-F238E27FC236}">
-                <a16:creationId xmlns:a16="http://schemas.microsoft.com/office/drawing/2014/main" id="{6023EA60-1357-4A73-B357-6A34AF2C7FEF}"/>
+                <a16:creationId xmlns:a16="http://schemas.microsoft.com/office/drawing/2014/main" id="{731B9F94-74E6-4C0D-BB9E-140A92AB050C}"/>
               </a:ext>
             </a:extLst>
           </p:cNvPr>
@@ -17793,7 +16013,7 @@
           <p:cNvPr id="2" name="">
             <a:extLst xmlns:a="http://schemas.openxmlformats.org/drawingml/2006/main">
               <a:ext uri="{FF2B5EF4-FFF2-40B4-BE49-F238E27FC236}">
-                <a16:creationId xmlns:a16="http://schemas.microsoft.com/office/drawing/2014/main" id="{033BBEE2-48EB-420A-8318-95AB2CFEC841}"/>
+                <a16:creationId xmlns:a16="http://schemas.microsoft.com/office/drawing/2014/main" id="{4CE049DC-74B3-4331-B91A-FA2CF4161DC8}"/>
               </a:ext>
             </a:extLst>
           </p:cNvPr>
@@ -17850,7 +16070,7 @@
           <p:cNvPr id="3" name="">
             <a:extLst xmlns:a="http://schemas.openxmlformats.org/drawingml/2006/main">
               <a:ext uri="{FF2B5EF4-FFF2-40B4-BE49-F238E27FC236}">
-                <a16:creationId xmlns:a16="http://schemas.microsoft.com/office/drawing/2014/main" id="{A7FAC765-7A76-47BD-9686-6BBB5014156D}"/>
+                <a16:creationId xmlns:a16="http://schemas.microsoft.com/office/drawing/2014/main" id="{C4178C6A-8E71-49F0-ABC5-14B8577E3E84}"/>
               </a:ext>
             </a:extLst>
           </p:cNvPr>
@@ -17907,7 +16127,7 @@
           <p:cNvPr id="4" name="">
             <a:extLst xmlns:a="http://schemas.openxmlformats.org/drawingml/2006/main">
               <a:ext uri="{FF2B5EF4-FFF2-40B4-BE49-F238E27FC236}">
-                <a16:creationId xmlns:a16="http://schemas.microsoft.com/office/drawing/2014/main" id="{26E37D5A-3CE0-44A0-A1EA-179BE64A9224}"/>
+                <a16:creationId xmlns:a16="http://schemas.microsoft.com/office/drawing/2014/main" id="{17C3C600-BC82-416D-A770-72C84B8D0CFE}"/>
               </a:ext>
             </a:extLst>
           </p:cNvPr>
@@ -17992,7 +16212,7 @@
           <p:cNvPr id="5" name="">
             <a:extLst xmlns:a="http://schemas.openxmlformats.org/drawingml/2006/main">
               <a:ext uri="{FF2B5EF4-FFF2-40B4-BE49-F238E27FC236}">
-                <a16:creationId xmlns:a16="http://schemas.microsoft.com/office/drawing/2014/main" id="{C84ED7F5-6F04-4C73-8386-C9F5D3A33C82}"/>
+                <a16:creationId xmlns:a16="http://schemas.microsoft.com/office/drawing/2014/main" id="{582DB20B-7BA7-42F4-B62C-31445EE9A754}"/>
               </a:ext>
             </a:extLst>
           </p:cNvPr>
@@ -18049,7 +16269,7 @@
           <p:cNvPr id="6" name="">
             <a:extLst xmlns:a="http://schemas.openxmlformats.org/drawingml/2006/main">
               <a:ext uri="{FF2B5EF4-FFF2-40B4-BE49-F238E27FC236}">
-                <a16:creationId xmlns:a16="http://schemas.microsoft.com/office/drawing/2014/main" id="{B8DC22D5-CB5A-44AB-81A4-C6C6DF3EE048}"/>
+                <a16:creationId xmlns:a16="http://schemas.microsoft.com/office/drawing/2014/main" id="{3D445078-840B-45DF-A28B-062F8111F6F5}"/>
               </a:ext>
             </a:extLst>
           </p:cNvPr>
@@ -18104,7 +16324,7 @@
     </p:spTree>
     <p:extLst>
       <p:ext uri="{BB962C8B-B14F-4D97-AF65-F5344CB8AC3E}">
-        <p14:creationId xmlns:p14="http://schemas.microsoft.com/office/powerpoint/2010/main" val="1459282318"/>
+        <p14:creationId xmlns:p14="http://schemas.microsoft.com/office/powerpoint/2010/main" val="1639421737"/>
       </p:ext>
     </p:extLst>
   </p:cSld>
@@ -18135,7 +16355,7 @@
           <p:cNvPr id="16" name="">
             <a:extLst xmlns:a="http://schemas.openxmlformats.org/drawingml/2006/main">
               <a:ext uri="{FF2B5EF4-FFF2-40B4-BE49-F238E27FC236}">
-                <a16:creationId xmlns:a16="http://schemas.microsoft.com/office/drawing/2014/main" id="{2830E9A8-4876-46C3-BB8C-FA7A5FC5864D}"/>
+                <a16:creationId xmlns:a16="http://schemas.microsoft.com/office/drawing/2014/main" id="{FCB4148A-4EE0-4D38-A038-3D5F193B5904}"/>
               </a:ext>
             </a:extLst>
           </p:cNvPr>
@@ -18165,7 +16385,7 @@
           <p:cNvPr id="2" name="">
             <a:extLst xmlns:a="http://schemas.openxmlformats.org/drawingml/2006/main">
               <a:ext uri="{FF2B5EF4-FFF2-40B4-BE49-F238E27FC236}">
-                <a16:creationId xmlns:a16="http://schemas.microsoft.com/office/drawing/2014/main" id="{11025546-3405-4A3D-BD5F-89847D67CFE8}"/>
+                <a16:creationId xmlns:a16="http://schemas.microsoft.com/office/drawing/2014/main" id="{B4FA71DA-3213-497E-972C-011DC82B1F7A}"/>
               </a:ext>
             </a:extLst>
           </p:cNvPr>
@@ -18222,7 +16442,7 @@
           <p:cNvPr id="3" name="">
             <a:extLst xmlns:a="http://schemas.openxmlformats.org/drawingml/2006/main">
               <a:ext uri="{FF2B5EF4-FFF2-40B4-BE49-F238E27FC236}">
-                <a16:creationId xmlns:a16="http://schemas.microsoft.com/office/drawing/2014/main" id="{7A5C3DC2-7B4D-411E-BB11-D710359AC846}"/>
+                <a16:creationId xmlns:a16="http://schemas.microsoft.com/office/drawing/2014/main" id="{7ADA8986-F5F6-409C-AE21-0F1B97DFBC69}"/>
               </a:ext>
             </a:extLst>
           </p:cNvPr>
@@ -18279,7 +16499,7 @@
           <p:cNvPr id="4" name="">
             <a:extLst xmlns:a="http://schemas.openxmlformats.org/drawingml/2006/main">
               <a:ext uri="{FF2B5EF4-FFF2-40B4-BE49-F238E27FC236}">
-                <a16:creationId xmlns:a16="http://schemas.microsoft.com/office/drawing/2014/main" id="{9DA0CA4F-F9B0-4B0D-A393-68DDC0FB4BB4}"/>
+                <a16:creationId xmlns:a16="http://schemas.microsoft.com/office/drawing/2014/main" id="{A6C8E660-9ADD-4241-BE91-4FB55EA369B1}"/>
               </a:ext>
             </a:extLst>
           </p:cNvPr>
@@ -18336,7 +16556,7 @@
           <p:cNvPr id="5" name="">
             <a:extLst xmlns:a="http://schemas.openxmlformats.org/drawingml/2006/main">
               <a:ext uri="{FF2B5EF4-FFF2-40B4-BE49-F238E27FC236}">
-                <a16:creationId xmlns:a16="http://schemas.microsoft.com/office/drawing/2014/main" id="{89453659-4923-4AD2-BEF4-A447A60437D0}"/>
+                <a16:creationId xmlns:a16="http://schemas.microsoft.com/office/drawing/2014/main" id="{3A63D713-038E-4CAE-9F9D-D1BF3C963425}"/>
               </a:ext>
             </a:extLst>
           </p:cNvPr>
@@ -18393,7 +16613,7 @@
           <p:cNvPr id="6" name="">
             <a:extLst xmlns:a="http://schemas.openxmlformats.org/drawingml/2006/main">
               <a:ext uri="{FF2B5EF4-FFF2-40B4-BE49-F238E27FC236}">
-                <a16:creationId xmlns:a16="http://schemas.microsoft.com/office/drawing/2014/main" id="{09E22190-A9E5-41EF-BDDE-F30FDA6D6766}"/>
+                <a16:creationId xmlns:a16="http://schemas.microsoft.com/office/drawing/2014/main" id="{2E735792-AC91-4711-AD53-7B4AABDA73B8}"/>
               </a:ext>
             </a:extLst>
           </p:cNvPr>
@@ -18450,7 +16670,7 @@
           <p:cNvPr id="7" name="">
             <a:extLst xmlns:a="http://schemas.openxmlformats.org/drawingml/2006/main">
               <a:ext uri="{FF2B5EF4-FFF2-40B4-BE49-F238E27FC236}">
-                <a16:creationId xmlns:a16="http://schemas.microsoft.com/office/drawing/2014/main" id="{A2ECF44A-8444-4996-BA8C-43CC740112B2}"/>
+                <a16:creationId xmlns:a16="http://schemas.microsoft.com/office/drawing/2014/main" id="{D5CEF320-53DE-4884-8E5A-EC08D63AE5A4}"/>
               </a:ext>
             </a:extLst>
           </p:cNvPr>
@@ -18530,7 +16750,7 @@
           <p:cNvPr id="8" name="">
             <a:extLst xmlns:a="http://schemas.openxmlformats.org/drawingml/2006/main">
               <a:ext uri="{FF2B5EF4-FFF2-40B4-BE49-F238E27FC236}">
-                <a16:creationId xmlns:a16="http://schemas.microsoft.com/office/drawing/2014/main" id="{A4F1602E-C20E-49EA-8859-CF533B31EBB3}"/>
+                <a16:creationId xmlns:a16="http://schemas.microsoft.com/office/drawing/2014/main" id="{F81334ED-1B20-4C49-9E78-1D6985F3C88F}"/>
               </a:ext>
             </a:extLst>
           </p:cNvPr>
@@ -18587,7 +16807,7 @@
           <p:cNvPr id="9" name="">
             <a:extLst xmlns:a="http://schemas.openxmlformats.org/drawingml/2006/main">
               <a:ext uri="{FF2B5EF4-FFF2-40B4-BE49-F238E27FC236}">
-                <a16:creationId xmlns:a16="http://schemas.microsoft.com/office/drawing/2014/main" id="{6425864A-C498-4786-98D2-F3C49FBDD3A7}"/>
+                <a16:creationId xmlns:a16="http://schemas.microsoft.com/office/drawing/2014/main" id="{F55E7D69-EE1A-472B-B193-2E3FFD82BF6C}"/>
               </a:ext>
             </a:extLst>
           </p:cNvPr>
@@ -18644,7 +16864,7 @@
           <p:cNvPr id="10" name="">
             <a:extLst xmlns:a="http://schemas.openxmlformats.org/drawingml/2006/main">
               <a:ext uri="{FF2B5EF4-FFF2-40B4-BE49-F238E27FC236}">
-                <a16:creationId xmlns:a16="http://schemas.microsoft.com/office/drawing/2014/main" id="{58C5ECD4-0FAA-4D2F-A14D-A36B90738539}"/>
+                <a16:creationId xmlns:a16="http://schemas.microsoft.com/office/drawing/2014/main" id="{6221C20E-F5FD-46D7-9D5B-564EE8B41A3C}"/>
               </a:ext>
             </a:extLst>
           </p:cNvPr>
@@ -18701,7 +16921,7 @@
           <p:cNvPr id="11" name="">
             <a:extLst xmlns:a="http://schemas.openxmlformats.org/drawingml/2006/main">
               <a:ext uri="{FF2B5EF4-FFF2-40B4-BE49-F238E27FC236}">
-                <a16:creationId xmlns:a16="http://schemas.microsoft.com/office/drawing/2014/main" id="{AA172DA5-A4AA-4729-9835-30ADFA210597}"/>
+                <a16:creationId xmlns:a16="http://schemas.microsoft.com/office/drawing/2014/main" id="{F8C37B2F-8A33-4CAE-9D4F-BF8F8AD4B688}"/>
               </a:ext>
             </a:extLst>
           </p:cNvPr>
@@ -18758,7 +16978,7 @@
           <p:cNvPr id="12" name="">
             <a:extLst xmlns:a="http://schemas.openxmlformats.org/drawingml/2006/main">
               <a:ext uri="{FF2B5EF4-FFF2-40B4-BE49-F238E27FC236}">
-                <a16:creationId xmlns:a16="http://schemas.microsoft.com/office/drawing/2014/main" id="{C0A4C24B-3CA1-45B3-8E32-B6EC4A6D8F8E}"/>
+                <a16:creationId xmlns:a16="http://schemas.microsoft.com/office/drawing/2014/main" id="{159AA05B-C6DA-4731-9826-A674A8B7CD54}"/>
               </a:ext>
             </a:extLst>
           </p:cNvPr>
@@ -18788,7 +17008,7 @@
           <p:cNvPr id="13" name="">
             <a:extLst xmlns:a="http://schemas.openxmlformats.org/drawingml/2006/main">
               <a:ext uri="{FF2B5EF4-FFF2-40B4-BE49-F238E27FC236}">
-                <a16:creationId xmlns:a16="http://schemas.microsoft.com/office/drawing/2014/main" id="{F6F566B3-6515-48C2-A035-1F094009CB02}"/>
+                <a16:creationId xmlns:a16="http://schemas.microsoft.com/office/drawing/2014/main" id="{DE8D98F7-A6EA-4909-8F50-D4DB9071BFCA}"/>
               </a:ext>
             </a:extLst>
           </p:cNvPr>
@@ -18834,7 +17054,7 @@
                 <a:latin typeface="Calibri"/>
                 <a:ea typeface="Calibri"/>
                 <a:cs typeface="Calibri"/>
-                <a:hlinkClick xmlns:r="http://schemas.openxmlformats.org/officeDocument/2006/relationships" r:id="R66de19158e164ff1"/>
+                <a:hlinkClick xmlns:r="http://schemas.openxmlformats.org/officeDocument/2006/relationships" r:id="Rfd489a28f9144bc2"/>
               </a:rPr>
               <a:t>Open explainer video</a:t>
             </a:r>
@@ -18846,7 +17066,7 @@
           <p:cNvPr id="14" name="">
             <a:extLst xmlns:a="http://schemas.openxmlformats.org/drawingml/2006/main">
               <a:ext uri="{FF2B5EF4-FFF2-40B4-BE49-F238E27FC236}">
-                <a16:creationId xmlns:a16="http://schemas.microsoft.com/office/drawing/2014/main" id="{60257D3A-64D8-4118-989E-9A59F26DD738}"/>
+                <a16:creationId xmlns:a16="http://schemas.microsoft.com/office/drawing/2014/main" id="{04E3DDD0-CF52-478F-A9A6-4FE66F9AD8FF}"/>
               </a:ext>
             </a:extLst>
           </p:cNvPr>
@@ -18903,7 +17123,7 @@
           <p:cNvPr id="15" name="">
             <a:extLst xmlns:a="http://schemas.openxmlformats.org/drawingml/2006/main">
               <a:ext uri="{FF2B5EF4-FFF2-40B4-BE49-F238E27FC236}">
-                <a16:creationId xmlns:a16="http://schemas.microsoft.com/office/drawing/2014/main" id="{B9056071-AB21-4C42-8257-4823A75D169F}"/>
+                <a16:creationId xmlns:a16="http://schemas.microsoft.com/office/drawing/2014/main" id="{8B591084-6634-4275-A010-5D080CA1B866}"/>
               </a:ext>
             </a:extLst>
           </p:cNvPr>
@@ -18958,7 +17178,7 @@
     </p:spTree>
     <p:extLst>
       <p:ext uri="{BB962C8B-B14F-4D97-AF65-F5344CB8AC3E}">
-        <p14:creationId xmlns:p14="http://schemas.microsoft.com/office/powerpoint/2010/main" val="1493093589"/>
+        <p14:creationId xmlns:p14="http://schemas.microsoft.com/office/powerpoint/2010/main" val="395495984"/>
       </p:ext>
     </p:extLst>
   </p:cSld>
@@ -18989,7 +17209,7 @@
           <p:cNvPr id="8" name="">
             <a:extLst xmlns:a="http://schemas.openxmlformats.org/drawingml/2006/main">
               <a:ext uri="{FF2B5EF4-FFF2-40B4-BE49-F238E27FC236}">
-                <a16:creationId xmlns:a16="http://schemas.microsoft.com/office/drawing/2014/main" id="{E39C9207-13A3-417F-9FB0-AA0E4ABF29A9}"/>
+                <a16:creationId xmlns:a16="http://schemas.microsoft.com/office/drawing/2014/main" id="{C2EB836B-FD6D-4C02-AD72-A62EBE4EA41C}"/>
               </a:ext>
             </a:extLst>
           </p:cNvPr>
@@ -19019,7 +17239,7 @@
           <p:cNvPr id="2" name="">
             <a:extLst xmlns:a="http://schemas.openxmlformats.org/drawingml/2006/main">
               <a:ext uri="{FF2B5EF4-FFF2-40B4-BE49-F238E27FC236}">
-                <a16:creationId xmlns:a16="http://schemas.microsoft.com/office/drawing/2014/main" id="{533AF8A7-BA88-493D-96D3-8BD591E8E5BC}"/>
+                <a16:creationId xmlns:a16="http://schemas.microsoft.com/office/drawing/2014/main" id="{51DE87CD-CE07-45F7-A030-1EBE4A4F4592}"/>
               </a:ext>
             </a:extLst>
           </p:cNvPr>
@@ -19076,7 +17296,7 @@
           <p:cNvPr id="3" name="">
             <a:extLst xmlns:a="http://schemas.openxmlformats.org/drawingml/2006/main">
               <a:ext uri="{FF2B5EF4-FFF2-40B4-BE49-F238E27FC236}">
-                <a16:creationId xmlns:a16="http://schemas.microsoft.com/office/drawing/2014/main" id="{6ED4DC8D-2FCB-4A9B-AF8C-690B323DD8F8}"/>
+                <a16:creationId xmlns:a16="http://schemas.microsoft.com/office/drawing/2014/main" id="{56BC478A-294E-4781-ACEB-186A09622A7B}"/>
               </a:ext>
             </a:extLst>
           </p:cNvPr>
@@ -19133,7 +17353,7 @@
           <p:cNvPr id="4" name="">
             <a:extLst xmlns:a="http://schemas.openxmlformats.org/drawingml/2006/main">
               <a:ext uri="{FF2B5EF4-FFF2-40B4-BE49-F238E27FC236}">
-                <a16:creationId xmlns:a16="http://schemas.microsoft.com/office/drawing/2014/main" id="{65B02A14-8D80-4E5A-9688-E2A57F883B4E}"/>
+                <a16:creationId xmlns:a16="http://schemas.microsoft.com/office/drawing/2014/main" id="{6AAA357F-E063-446D-884C-73BC3E3852CC}"/>
               </a:ext>
             </a:extLst>
           </p:cNvPr>
@@ -19163,7 +17383,7 @@
           <p:cNvPr id="5" name="">
             <a:extLst xmlns:a="http://schemas.openxmlformats.org/drawingml/2006/main">
               <a:ext uri="{FF2B5EF4-FFF2-40B4-BE49-F238E27FC236}">
-                <a16:creationId xmlns:a16="http://schemas.microsoft.com/office/drawing/2014/main" id="{44A39528-4BD6-466B-9106-8DD51376E9DB}"/>
+                <a16:creationId xmlns:a16="http://schemas.microsoft.com/office/drawing/2014/main" id="{7D3F5CB7-C8BE-4773-801E-B07C1F09A6C4}"/>
               </a:ext>
             </a:extLst>
           </p:cNvPr>
@@ -19220,7 +17440,7 @@
           <p:cNvPr id="6" name="">
             <a:extLst xmlns:a="http://schemas.openxmlformats.org/drawingml/2006/main">
               <a:ext uri="{FF2B5EF4-FFF2-40B4-BE49-F238E27FC236}">
-                <a16:creationId xmlns:a16="http://schemas.microsoft.com/office/drawing/2014/main" id="{099D3886-6AC8-4351-AC57-985EBE942BFA}"/>
+                <a16:creationId xmlns:a16="http://schemas.microsoft.com/office/drawing/2014/main" id="{78A214B6-8C44-4AF8-9459-06AD39833079}"/>
               </a:ext>
             </a:extLst>
           </p:cNvPr>
@@ -19277,7 +17497,7 @@
           <p:cNvPr id="7" name="">
             <a:extLst xmlns:a="http://schemas.openxmlformats.org/drawingml/2006/main">
               <a:ext uri="{FF2B5EF4-FFF2-40B4-BE49-F238E27FC236}">
-                <a16:creationId xmlns:a16="http://schemas.microsoft.com/office/drawing/2014/main" id="{2D8ADB75-4260-43D0-A32B-6B84F23350C0}"/>
+                <a16:creationId xmlns:a16="http://schemas.microsoft.com/office/drawing/2014/main" id="{F380C9F3-E0C6-4E61-BFCD-45E3AA08FF71}"/>
               </a:ext>
             </a:extLst>
           </p:cNvPr>
@@ -19332,7 +17552,7 @@
     </p:spTree>
     <p:extLst>
       <p:ext uri="{BB962C8B-B14F-4D97-AF65-F5344CB8AC3E}">
-        <p14:creationId xmlns:p14="http://schemas.microsoft.com/office/powerpoint/2010/main" val="1677723310"/>
+        <p14:creationId xmlns:p14="http://schemas.microsoft.com/office/powerpoint/2010/main" val="755874641"/>
       </p:ext>
     </p:extLst>
   </p:cSld>
@@ -19363,7 +17583,7 @@
           <p:cNvPr id="8" name="">
             <a:extLst xmlns:a="http://schemas.openxmlformats.org/drawingml/2006/main">
               <a:ext uri="{FF2B5EF4-FFF2-40B4-BE49-F238E27FC236}">
-                <a16:creationId xmlns:a16="http://schemas.microsoft.com/office/drawing/2014/main" id="{5372CE65-DD4C-42E1-B09E-C52B590512C6}"/>
+                <a16:creationId xmlns:a16="http://schemas.microsoft.com/office/drawing/2014/main" id="{95AE2998-1526-4F90-A34B-D61B25EA286B}"/>
               </a:ext>
             </a:extLst>
           </p:cNvPr>
@@ -19393,7 +17613,7 @@
           <p:cNvPr id="2" name="">
             <a:extLst xmlns:a="http://schemas.openxmlformats.org/drawingml/2006/main">
               <a:ext uri="{FF2B5EF4-FFF2-40B4-BE49-F238E27FC236}">
-                <a16:creationId xmlns:a16="http://schemas.microsoft.com/office/drawing/2014/main" id="{C067D00F-084F-452E-8BE3-E78AB5917EDE}"/>
+                <a16:creationId xmlns:a16="http://schemas.microsoft.com/office/drawing/2014/main" id="{073E37FD-CBDE-4569-AE7F-DFBA9689ED9A}"/>
               </a:ext>
             </a:extLst>
           </p:cNvPr>
@@ -19450,7 +17670,7 @@
           <p:cNvPr id="3" name="">
             <a:extLst xmlns:a="http://schemas.openxmlformats.org/drawingml/2006/main">
               <a:ext uri="{FF2B5EF4-FFF2-40B4-BE49-F238E27FC236}">
-                <a16:creationId xmlns:a16="http://schemas.microsoft.com/office/drawing/2014/main" id="{A6F32A16-1727-4A84-B01F-F2ED163EF3E0}"/>
+                <a16:creationId xmlns:a16="http://schemas.microsoft.com/office/drawing/2014/main" id="{D15158E0-15D4-422A-BCC6-E11E857B6927}"/>
               </a:ext>
             </a:extLst>
           </p:cNvPr>
@@ -19507,7 +17727,7 @@
           <p:cNvPr id="4" name="">
             <a:extLst xmlns:a="http://schemas.openxmlformats.org/drawingml/2006/main">
               <a:ext uri="{FF2B5EF4-FFF2-40B4-BE49-F238E27FC236}">
-                <a16:creationId xmlns:a16="http://schemas.microsoft.com/office/drawing/2014/main" id="{FB6A6DDF-7EAE-45AD-921C-8C169005391A}"/>
+                <a16:creationId xmlns:a16="http://schemas.microsoft.com/office/drawing/2014/main" id="{E7CD5203-855F-477F-9D95-9BC2629947B1}"/>
               </a:ext>
             </a:extLst>
           </p:cNvPr>
@@ -19537,7 +17757,7 @@
           <p:cNvPr id="5" name="">
             <a:extLst xmlns:a="http://schemas.openxmlformats.org/drawingml/2006/main">
               <a:ext uri="{FF2B5EF4-FFF2-40B4-BE49-F238E27FC236}">
-                <a16:creationId xmlns:a16="http://schemas.microsoft.com/office/drawing/2014/main" id="{A7B73BB2-6B78-4777-BD41-DAF7B12D1103}"/>
+                <a16:creationId xmlns:a16="http://schemas.microsoft.com/office/drawing/2014/main" id="{A4C8FE03-D12E-48CA-B170-CDE376898AAC}"/>
               </a:ext>
             </a:extLst>
           </p:cNvPr>
@@ -19594,7 +17814,7 @@
           <p:cNvPr id="6" name="">
             <a:extLst xmlns:a="http://schemas.openxmlformats.org/drawingml/2006/main">
               <a:ext uri="{FF2B5EF4-FFF2-40B4-BE49-F238E27FC236}">
-                <a16:creationId xmlns:a16="http://schemas.microsoft.com/office/drawing/2014/main" id="{3C65DCC2-CEF1-4680-A9DE-EBDBCB618117}"/>
+                <a16:creationId xmlns:a16="http://schemas.microsoft.com/office/drawing/2014/main" id="{328A6272-3460-4AB1-A032-D5719D98DF03}"/>
               </a:ext>
             </a:extLst>
           </p:cNvPr>
@@ -19651,7 +17871,7 @@
           <p:cNvPr id="7" name="">
             <a:extLst xmlns:a="http://schemas.openxmlformats.org/drawingml/2006/main">
               <a:ext uri="{FF2B5EF4-FFF2-40B4-BE49-F238E27FC236}">
-                <a16:creationId xmlns:a16="http://schemas.microsoft.com/office/drawing/2014/main" id="{84CB4D6C-A3E1-4184-9953-EE4BF61AC589}"/>
+                <a16:creationId xmlns:a16="http://schemas.microsoft.com/office/drawing/2014/main" id="{EABF7038-2072-428C-AE32-1203D6A728CC}"/>
               </a:ext>
             </a:extLst>
           </p:cNvPr>
@@ -19706,7 +17926,7 @@
     </p:spTree>
     <p:extLst>
       <p:ext uri="{BB962C8B-B14F-4D97-AF65-F5344CB8AC3E}">
-        <p14:creationId xmlns:p14="http://schemas.microsoft.com/office/powerpoint/2010/main" val="736477898"/>
+        <p14:creationId xmlns:p14="http://schemas.microsoft.com/office/powerpoint/2010/main" val="5382248"/>
       </p:ext>
     </p:extLst>
   </p:cSld>
@@ -19737,7 +17957,7 @@
           <p:cNvPr id="11" name="">
             <a:extLst xmlns:a="http://schemas.openxmlformats.org/drawingml/2006/main">
               <a:ext uri="{FF2B5EF4-FFF2-40B4-BE49-F238E27FC236}">
-                <a16:creationId xmlns:a16="http://schemas.microsoft.com/office/drawing/2014/main" id="{92B653CF-BED2-4E0C-81F7-E9E5A35D1B9D}"/>
+                <a16:creationId xmlns:a16="http://schemas.microsoft.com/office/drawing/2014/main" id="{F6B32A1B-C6F4-473A-9CC3-6FE5085FD298}"/>
               </a:ext>
             </a:extLst>
           </p:cNvPr>
@@ -19767,7 +17987,7 @@
           <p:cNvPr id="2" name="">
             <a:extLst xmlns:a="http://schemas.openxmlformats.org/drawingml/2006/main">
               <a:ext uri="{FF2B5EF4-FFF2-40B4-BE49-F238E27FC236}">
-                <a16:creationId xmlns:a16="http://schemas.microsoft.com/office/drawing/2014/main" id="{C7B1C334-6997-4508-A17C-33E347D68B18}"/>
+                <a16:creationId xmlns:a16="http://schemas.microsoft.com/office/drawing/2014/main" id="{EAD3EFAD-3BD3-4637-AE7F-9D74001D831E}"/>
               </a:ext>
             </a:extLst>
           </p:cNvPr>
@@ -19824,7 +18044,7 @@
           <p:cNvPr id="3" name="">
             <a:extLst xmlns:a="http://schemas.openxmlformats.org/drawingml/2006/main">
               <a:ext uri="{FF2B5EF4-FFF2-40B4-BE49-F238E27FC236}">
-                <a16:creationId xmlns:a16="http://schemas.microsoft.com/office/drawing/2014/main" id="{77A543ED-1338-4E36-99F2-9343C7081F17}"/>
+                <a16:creationId xmlns:a16="http://schemas.microsoft.com/office/drawing/2014/main" id="{6311EECC-4760-48D0-AB6A-B515D2266E88}"/>
               </a:ext>
             </a:extLst>
           </p:cNvPr>
@@ -19881,7 +18101,7 @@
           <p:cNvPr id="4" name="">
             <a:extLst xmlns:a="http://schemas.openxmlformats.org/drawingml/2006/main">
               <a:ext uri="{FF2B5EF4-FFF2-40B4-BE49-F238E27FC236}">
-                <a16:creationId xmlns:a16="http://schemas.microsoft.com/office/drawing/2014/main" id="{972D26C8-D169-4CAC-A94C-F9449D7BCB99}"/>
+                <a16:creationId xmlns:a16="http://schemas.microsoft.com/office/drawing/2014/main" id="{EE6C62AB-183D-4588-87EA-0581C882A345}"/>
               </a:ext>
             </a:extLst>
           </p:cNvPr>
@@ -19911,7 +18131,7 @@
           <p:cNvPr id="5" name="">
             <a:extLst xmlns:a="http://schemas.openxmlformats.org/drawingml/2006/main">
               <a:ext uri="{FF2B5EF4-FFF2-40B4-BE49-F238E27FC236}">
-                <a16:creationId xmlns:a16="http://schemas.microsoft.com/office/drawing/2014/main" id="{18DB1628-40FB-419B-A32B-F9EC87D467E6}"/>
+                <a16:creationId xmlns:a16="http://schemas.microsoft.com/office/drawing/2014/main" id="{45F535E2-4B9A-4A2B-9F44-0E7F936C66F4}"/>
               </a:ext>
             </a:extLst>
           </p:cNvPr>
@@ -19968,7 +18188,7 @@
           <p:cNvPr id="6" name="">
             <a:extLst xmlns:a="http://schemas.openxmlformats.org/drawingml/2006/main">
               <a:ext uri="{FF2B5EF4-FFF2-40B4-BE49-F238E27FC236}">
-                <a16:creationId xmlns:a16="http://schemas.microsoft.com/office/drawing/2014/main" id="{4F0E4E92-DACA-4D21-955C-709926A5EF42}"/>
+                <a16:creationId xmlns:a16="http://schemas.microsoft.com/office/drawing/2014/main" id="{D91A91D5-F5D3-450A-91DB-CD4F7DBA6D70}"/>
               </a:ext>
             </a:extLst>
           </p:cNvPr>
@@ -20025,7 +18245,7 @@
           <p:cNvPr id="7" name="">
             <a:extLst xmlns:a="http://schemas.openxmlformats.org/drawingml/2006/main">
               <a:ext uri="{FF2B5EF4-FFF2-40B4-BE49-F238E27FC236}">
-                <a16:creationId xmlns:a16="http://schemas.microsoft.com/office/drawing/2014/main" id="{F94EF41F-E143-4CDB-BFBC-F2C6C3EE63E8}"/>
+                <a16:creationId xmlns:a16="http://schemas.microsoft.com/office/drawing/2014/main" id="{1B16B14A-560B-4C59-8FC8-DA8986945A35}"/>
               </a:ext>
             </a:extLst>
           </p:cNvPr>
@@ -20055,7 +18275,7 @@
           <p:cNvPr id="8" name="">
             <a:extLst xmlns:a="http://schemas.openxmlformats.org/drawingml/2006/main">
               <a:ext uri="{FF2B5EF4-FFF2-40B4-BE49-F238E27FC236}">
-                <a16:creationId xmlns:a16="http://schemas.microsoft.com/office/drawing/2014/main" id="{64EF691F-84F6-4CE2-BD40-63C8E1EAD8B6}"/>
+                <a16:creationId xmlns:a16="http://schemas.microsoft.com/office/drawing/2014/main" id="{F80460A9-E2D6-4B76-8B44-345D90CA88D2}"/>
               </a:ext>
             </a:extLst>
           </p:cNvPr>
@@ -20112,7 +18332,7 @@
           <p:cNvPr id="9" name="">
             <a:extLst xmlns:a="http://schemas.openxmlformats.org/drawingml/2006/main">
               <a:ext uri="{FF2B5EF4-FFF2-40B4-BE49-F238E27FC236}">
-                <a16:creationId xmlns:a16="http://schemas.microsoft.com/office/drawing/2014/main" id="{0B816A76-8AF7-418D-8410-08FDDC0D80FB}"/>
+                <a16:creationId xmlns:a16="http://schemas.microsoft.com/office/drawing/2014/main" id="{07E4E393-2621-43EA-BA5E-989DFA986357}"/>
               </a:ext>
             </a:extLst>
           </p:cNvPr>
@@ -20169,7 +18389,7 @@
           <p:cNvPr id="10" name="">
             <a:extLst xmlns:a="http://schemas.openxmlformats.org/drawingml/2006/main">
               <a:ext uri="{FF2B5EF4-FFF2-40B4-BE49-F238E27FC236}">
-                <a16:creationId xmlns:a16="http://schemas.microsoft.com/office/drawing/2014/main" id="{C8A60CF1-7CB0-433F-9AE5-51C7E0550F02}"/>
+                <a16:creationId xmlns:a16="http://schemas.microsoft.com/office/drawing/2014/main" id="{00516699-C260-462E-BDE1-19391083B342}"/>
               </a:ext>
             </a:extLst>
           </p:cNvPr>
@@ -20224,7 +18444,7 @@
     </p:spTree>
     <p:extLst>
       <p:ext uri="{BB962C8B-B14F-4D97-AF65-F5344CB8AC3E}">
-        <p14:creationId xmlns:p14="http://schemas.microsoft.com/office/powerpoint/2010/main" val="1166948372"/>
+        <p14:creationId xmlns:p14="http://schemas.microsoft.com/office/powerpoint/2010/main" val="1807041164"/>
       </p:ext>
     </p:extLst>
   </p:cSld>
@@ -20255,7 +18475,7 @@
           <p:cNvPr id="11" name="">
             <a:extLst xmlns:a="http://schemas.openxmlformats.org/drawingml/2006/main">
               <a:ext uri="{FF2B5EF4-FFF2-40B4-BE49-F238E27FC236}">
-                <a16:creationId xmlns:a16="http://schemas.microsoft.com/office/drawing/2014/main" id="{BA253F92-31BA-41FA-9562-3BFF8F2F3564}"/>
+                <a16:creationId xmlns:a16="http://schemas.microsoft.com/office/drawing/2014/main" id="{C215D507-543F-4EE3-AE23-22C43ADC2AFD}"/>
               </a:ext>
             </a:extLst>
           </p:cNvPr>
@@ -20285,7 +18505,7 @@
           <p:cNvPr id="2" name="">
             <a:extLst xmlns:a="http://schemas.openxmlformats.org/drawingml/2006/main">
               <a:ext uri="{FF2B5EF4-FFF2-40B4-BE49-F238E27FC236}">
-                <a16:creationId xmlns:a16="http://schemas.microsoft.com/office/drawing/2014/main" id="{EFC031AF-5A76-4EE1-ABCB-7E39E01F5264}"/>
+                <a16:creationId xmlns:a16="http://schemas.microsoft.com/office/drawing/2014/main" id="{F2ED98AB-DB49-406D-8D11-7685B9E07027}"/>
               </a:ext>
             </a:extLst>
           </p:cNvPr>
@@ -20342,7 +18562,7 @@
           <p:cNvPr id="3" name="">
             <a:extLst xmlns:a="http://schemas.openxmlformats.org/drawingml/2006/main">
               <a:ext uri="{FF2B5EF4-FFF2-40B4-BE49-F238E27FC236}">
-                <a16:creationId xmlns:a16="http://schemas.microsoft.com/office/drawing/2014/main" id="{66BEFE1C-FCC9-45F9-B9EF-9EBD3E87BB7A}"/>
+                <a16:creationId xmlns:a16="http://schemas.microsoft.com/office/drawing/2014/main" id="{5D0FE847-3A81-4CC5-9CDB-0E8680F4A2BC}"/>
               </a:ext>
             </a:extLst>
           </p:cNvPr>
@@ -20399,7 +18619,7 @@
           <p:cNvPr id="4" name="">
             <a:extLst xmlns:a="http://schemas.openxmlformats.org/drawingml/2006/main">
               <a:ext uri="{FF2B5EF4-FFF2-40B4-BE49-F238E27FC236}">
-                <a16:creationId xmlns:a16="http://schemas.microsoft.com/office/drawing/2014/main" id="{E346BB52-93EF-4EF4-ACA7-C9BF52EB3449}"/>
+                <a16:creationId xmlns:a16="http://schemas.microsoft.com/office/drawing/2014/main" id="{2458537F-6905-4814-AE8E-577FD5813DC5}"/>
               </a:ext>
             </a:extLst>
           </p:cNvPr>
@@ -20429,7 +18649,7 @@
           <p:cNvPr id="5" name="">
             <a:extLst xmlns:a="http://schemas.openxmlformats.org/drawingml/2006/main">
               <a:ext uri="{FF2B5EF4-FFF2-40B4-BE49-F238E27FC236}">
-                <a16:creationId xmlns:a16="http://schemas.microsoft.com/office/drawing/2014/main" id="{6C1E6AA2-63B7-4861-BE47-AEC6E6ECF701}"/>
+                <a16:creationId xmlns:a16="http://schemas.microsoft.com/office/drawing/2014/main" id="{47F0FB18-277C-477F-B7B0-02AF2369EDDC}"/>
               </a:ext>
             </a:extLst>
           </p:cNvPr>
@@ -20486,7 +18706,7 @@
           <p:cNvPr id="6" name="">
             <a:extLst xmlns:a="http://schemas.openxmlformats.org/drawingml/2006/main">
               <a:ext uri="{FF2B5EF4-FFF2-40B4-BE49-F238E27FC236}">
-                <a16:creationId xmlns:a16="http://schemas.microsoft.com/office/drawing/2014/main" id="{A48F6321-1DF2-4F1F-A65A-D2BFAA58A5ED}"/>
+                <a16:creationId xmlns:a16="http://schemas.microsoft.com/office/drawing/2014/main" id="{87A19454-E653-499B-B30A-13673AE10792}"/>
               </a:ext>
             </a:extLst>
           </p:cNvPr>
@@ -20543,7 +18763,7 @@
           <p:cNvPr id="7" name="">
             <a:extLst xmlns:a="http://schemas.openxmlformats.org/drawingml/2006/main">
               <a:ext uri="{FF2B5EF4-FFF2-40B4-BE49-F238E27FC236}">
-                <a16:creationId xmlns:a16="http://schemas.microsoft.com/office/drawing/2014/main" id="{8237119A-1F01-4CEC-9378-BD19DE79C9DA}"/>
+                <a16:creationId xmlns:a16="http://schemas.microsoft.com/office/drawing/2014/main" id="{461842D8-780D-43DE-B817-A1C4B4EE55B0}"/>
               </a:ext>
             </a:extLst>
           </p:cNvPr>
@@ -20573,7 +18793,7 @@
           <p:cNvPr id="8" name="">
             <a:extLst xmlns:a="http://schemas.openxmlformats.org/drawingml/2006/main">
               <a:ext uri="{FF2B5EF4-FFF2-40B4-BE49-F238E27FC236}">
-                <a16:creationId xmlns:a16="http://schemas.microsoft.com/office/drawing/2014/main" id="{6F281CF7-DE26-4A7F-896E-C741146EDFB5}"/>
+                <a16:creationId xmlns:a16="http://schemas.microsoft.com/office/drawing/2014/main" id="{1C048959-3BB5-42B3-AFF4-627288060D6F}"/>
               </a:ext>
             </a:extLst>
           </p:cNvPr>
@@ -20630,7 +18850,7 @@
           <p:cNvPr id="9" name="">
             <a:extLst xmlns:a="http://schemas.openxmlformats.org/drawingml/2006/main">
               <a:ext uri="{FF2B5EF4-FFF2-40B4-BE49-F238E27FC236}">
-                <a16:creationId xmlns:a16="http://schemas.microsoft.com/office/drawing/2014/main" id="{5CD9EB83-AA44-49A0-900E-F2E59FDD0B3E}"/>
+                <a16:creationId xmlns:a16="http://schemas.microsoft.com/office/drawing/2014/main" id="{46611018-3264-45D3-A7DC-F17755A816F1}"/>
               </a:ext>
             </a:extLst>
           </p:cNvPr>
@@ -20687,7 +18907,7 @@
           <p:cNvPr id="10" name="">
             <a:extLst xmlns:a="http://schemas.openxmlformats.org/drawingml/2006/main">
               <a:ext uri="{FF2B5EF4-FFF2-40B4-BE49-F238E27FC236}">
-                <a16:creationId xmlns:a16="http://schemas.microsoft.com/office/drawing/2014/main" id="{6EF513F5-2321-4D82-B235-8DBC6B8E176C}"/>
+                <a16:creationId xmlns:a16="http://schemas.microsoft.com/office/drawing/2014/main" id="{580A19B2-F63E-4035-A2A4-C3205D6C6C65}"/>
               </a:ext>
             </a:extLst>
           </p:cNvPr>
@@ -20742,7 +18962,7 @@
     </p:spTree>
     <p:extLst>
       <p:ext uri="{BB962C8B-B14F-4D97-AF65-F5344CB8AC3E}">
-        <p14:creationId xmlns:p14="http://schemas.microsoft.com/office/powerpoint/2010/main" val="68065236"/>
+        <p14:creationId xmlns:p14="http://schemas.microsoft.com/office/powerpoint/2010/main" val="974076067"/>
       </p:ext>
     </p:extLst>
   </p:cSld>
@@ -20773,7 +18993,7 @@
           <p:cNvPr id="13" name="">
             <a:extLst xmlns:a="http://schemas.openxmlformats.org/drawingml/2006/main">
               <a:ext uri="{FF2B5EF4-FFF2-40B4-BE49-F238E27FC236}">
-                <a16:creationId xmlns:a16="http://schemas.microsoft.com/office/drawing/2014/main" id="{6C48EB4E-E2F5-4219-BDD4-F0E9B65B49F4}"/>
+                <a16:creationId xmlns:a16="http://schemas.microsoft.com/office/drawing/2014/main" id="{45D46449-5EE6-4896-9A7E-4BAFE0F13369}"/>
               </a:ext>
             </a:extLst>
           </p:cNvPr>
@@ -20803,7 +19023,7 @@
           <p:cNvPr id="2" name="">
             <a:extLst xmlns:a="http://schemas.openxmlformats.org/drawingml/2006/main">
               <a:ext uri="{FF2B5EF4-FFF2-40B4-BE49-F238E27FC236}">
-                <a16:creationId xmlns:a16="http://schemas.microsoft.com/office/drawing/2014/main" id="{FE10D233-E2DB-4B72-A583-6711CD3AF94A}"/>
+                <a16:creationId xmlns:a16="http://schemas.microsoft.com/office/drawing/2014/main" id="{FBB62F96-DE28-4F52-8F40-8E7C07FF37D6}"/>
               </a:ext>
             </a:extLst>
           </p:cNvPr>
@@ -20860,7 +19080,7 @@
           <p:cNvPr id="3" name="">
             <a:extLst xmlns:a="http://schemas.openxmlformats.org/drawingml/2006/main">
               <a:ext uri="{FF2B5EF4-FFF2-40B4-BE49-F238E27FC236}">
-                <a16:creationId xmlns:a16="http://schemas.microsoft.com/office/drawing/2014/main" id="{94C0A381-79C5-48DC-B319-B44837DB3875}"/>
+                <a16:creationId xmlns:a16="http://schemas.microsoft.com/office/drawing/2014/main" id="{0986BAA5-5578-47C7-ADC7-8B4419C78705}"/>
               </a:ext>
             </a:extLst>
           </p:cNvPr>
@@ -20917,7 +19137,7 @@
           <p:cNvPr id="4" name="">
             <a:extLst xmlns:a="http://schemas.openxmlformats.org/drawingml/2006/main">
               <a:ext uri="{FF2B5EF4-FFF2-40B4-BE49-F238E27FC236}">
-                <a16:creationId xmlns:a16="http://schemas.microsoft.com/office/drawing/2014/main" id="{DF8E0760-A719-40A1-895F-C59EA9ACBA8E}"/>
+                <a16:creationId xmlns:a16="http://schemas.microsoft.com/office/drawing/2014/main" id="{463B51F1-B248-4606-B3E2-3201C48C8F98}"/>
               </a:ext>
             </a:extLst>
           </p:cNvPr>
@@ -20974,7 +19194,7 @@
           <p:cNvPr id="5" name="">
             <a:extLst xmlns:a="http://schemas.openxmlformats.org/drawingml/2006/main">
               <a:ext uri="{FF2B5EF4-FFF2-40B4-BE49-F238E27FC236}">
-                <a16:creationId xmlns:a16="http://schemas.microsoft.com/office/drawing/2014/main" id="{38FFAC9D-E239-4F39-BE9A-E784A396421C}"/>
+                <a16:creationId xmlns:a16="http://schemas.microsoft.com/office/drawing/2014/main" id="{6DDF3E37-BC24-49D5-A0FF-6D01CAF75B27}"/>
               </a:ext>
             </a:extLst>
           </p:cNvPr>
@@ -21031,7 +19251,7 @@
           <p:cNvPr id="6" name="">
             <a:extLst xmlns:a="http://schemas.openxmlformats.org/drawingml/2006/main">
               <a:ext uri="{FF2B5EF4-FFF2-40B4-BE49-F238E27FC236}">
-                <a16:creationId xmlns:a16="http://schemas.microsoft.com/office/drawing/2014/main" id="{22CBFC15-3B96-44E1-AECE-742B7E4EF1F0}"/>
+                <a16:creationId xmlns:a16="http://schemas.microsoft.com/office/drawing/2014/main" id="{0FE3DA9F-787C-42A9-9DA4-85F78CD1B686}"/>
               </a:ext>
             </a:extLst>
           </p:cNvPr>
@@ -21088,7 +19308,7 @@
           <p:cNvPr id="7" name="">
             <a:extLst xmlns:a="http://schemas.openxmlformats.org/drawingml/2006/main">
               <a:ext uri="{FF2B5EF4-FFF2-40B4-BE49-F238E27FC236}">
-                <a16:creationId xmlns:a16="http://schemas.microsoft.com/office/drawing/2014/main" id="{B1390E07-FE18-43C9-A545-C20C722E30FC}"/>
+                <a16:creationId xmlns:a16="http://schemas.microsoft.com/office/drawing/2014/main" id="{2D0D47F4-86C4-40E8-9F8A-5B363F6AC7A7}"/>
               </a:ext>
             </a:extLst>
           </p:cNvPr>
@@ -21145,7 +19365,7 @@
           <p:cNvPr id="8" name="">
             <a:extLst xmlns:a="http://schemas.openxmlformats.org/drawingml/2006/main">
               <a:ext uri="{FF2B5EF4-FFF2-40B4-BE49-F238E27FC236}">
-                <a16:creationId xmlns:a16="http://schemas.microsoft.com/office/drawing/2014/main" id="{EBF5FA35-0D55-46B4-B926-86B662076183}"/>
+                <a16:creationId xmlns:a16="http://schemas.microsoft.com/office/drawing/2014/main" id="{87C59C2C-988B-4EB2-BF8C-A7099B8C5154}"/>
               </a:ext>
             </a:extLst>
           </p:cNvPr>
@@ -21202,7 +19422,7 @@
           <p:cNvPr id="9" name="">
             <a:extLst xmlns:a="http://schemas.openxmlformats.org/drawingml/2006/main">
               <a:ext uri="{FF2B5EF4-FFF2-40B4-BE49-F238E27FC236}">
-                <a16:creationId xmlns:a16="http://schemas.microsoft.com/office/drawing/2014/main" id="{88E374BC-0093-4B4C-8393-D68C92DAB6BE}"/>
+                <a16:creationId xmlns:a16="http://schemas.microsoft.com/office/drawing/2014/main" id="{7FBE914B-B7D8-43BF-84B8-1EBCBCA94F87}"/>
               </a:ext>
             </a:extLst>
           </p:cNvPr>
@@ -21259,7 +19479,7 @@
           <p:cNvPr id="10" name="">
             <a:extLst xmlns:a="http://schemas.openxmlformats.org/drawingml/2006/main">
               <a:ext uri="{FF2B5EF4-FFF2-40B4-BE49-F238E27FC236}">
-                <a16:creationId xmlns:a16="http://schemas.microsoft.com/office/drawing/2014/main" id="{E4680187-A3C1-4FEC-BD69-7C9CB5BB532C}"/>
+                <a16:creationId xmlns:a16="http://schemas.microsoft.com/office/drawing/2014/main" id="{84FE75B3-35AC-4B7E-B41D-73C050707B4A}"/>
               </a:ext>
             </a:extLst>
           </p:cNvPr>
@@ -21316,7 +19536,7 @@
           <p:cNvPr id="11" name="">
             <a:extLst xmlns:a="http://schemas.openxmlformats.org/drawingml/2006/main">
               <a:ext uri="{FF2B5EF4-FFF2-40B4-BE49-F238E27FC236}">
-                <a16:creationId xmlns:a16="http://schemas.microsoft.com/office/drawing/2014/main" id="{D69C6022-6389-4B81-8E1C-08B7C1BADD71}"/>
+                <a16:creationId xmlns:a16="http://schemas.microsoft.com/office/drawing/2014/main" id="{06882A9F-5776-463D-81E1-78C581045A5D}"/>
               </a:ext>
             </a:extLst>
           </p:cNvPr>
@@ -21373,7 +19593,7 @@
           <p:cNvPr id="12" name="">
             <a:extLst xmlns:a="http://schemas.openxmlformats.org/drawingml/2006/main">
               <a:ext uri="{FF2B5EF4-FFF2-40B4-BE49-F238E27FC236}">
-                <a16:creationId xmlns:a16="http://schemas.microsoft.com/office/drawing/2014/main" id="{154F0E56-9D94-4391-97D4-FED09171B3BD}"/>
+                <a16:creationId xmlns:a16="http://schemas.microsoft.com/office/drawing/2014/main" id="{F4441458-A5D1-4D21-B67E-7D833448D547}"/>
               </a:ext>
             </a:extLst>
           </p:cNvPr>
@@ -21428,7 +19648,7 @@
     </p:spTree>
     <p:extLst>
       <p:ext uri="{BB962C8B-B14F-4D97-AF65-F5344CB8AC3E}">
-        <p14:creationId xmlns:p14="http://schemas.microsoft.com/office/powerpoint/2010/main" val="1157045258"/>
+        <p14:creationId xmlns:p14="http://schemas.microsoft.com/office/powerpoint/2010/main" val="1259538996"/>
       </p:ext>
     </p:extLst>
   </p:cSld>
@@ -21459,7 +19679,7 @@
           <p:cNvPr id="7" name="">
             <a:extLst xmlns:a="http://schemas.openxmlformats.org/drawingml/2006/main">
               <a:ext uri="{FF2B5EF4-FFF2-40B4-BE49-F238E27FC236}">
-                <a16:creationId xmlns:a16="http://schemas.microsoft.com/office/drawing/2014/main" id="{1B1D0500-CC2A-46C8-AE47-39B9938F5240}"/>
+                <a16:creationId xmlns:a16="http://schemas.microsoft.com/office/drawing/2014/main" id="{BCBC45EF-AD49-410E-B357-1335B53440DB}"/>
               </a:ext>
             </a:extLst>
           </p:cNvPr>
@@ -21489,7 +19709,7 @@
           <p:cNvPr id="2" name="">
             <a:extLst xmlns:a="http://schemas.openxmlformats.org/drawingml/2006/main">
               <a:ext uri="{FF2B5EF4-FFF2-40B4-BE49-F238E27FC236}">
-                <a16:creationId xmlns:a16="http://schemas.microsoft.com/office/drawing/2014/main" id="{C8B9C962-FA0E-424E-9D17-935A41487E3E}"/>
+                <a16:creationId xmlns:a16="http://schemas.microsoft.com/office/drawing/2014/main" id="{A97D1C17-24CB-41CE-9D7F-816ED4E65133}"/>
               </a:ext>
             </a:extLst>
           </p:cNvPr>
@@ -21550,7 +19770,7 @@
           <p:nvPr/>
         </p:nvPicPr>
         <p:blipFill>
-          <a:blip xmlns:r="http://schemas.openxmlformats.org/officeDocument/2006/relationships" xmlns:a="http://schemas.openxmlformats.org/drawingml/2006/main" r:embed="Rfbe976fd28174d08"/>
+          <a:blip xmlns:r="http://schemas.openxmlformats.org/officeDocument/2006/relationships" xmlns:a="http://schemas.openxmlformats.org/drawingml/2006/main" r:embed="R0dcfa3df369f48b5"/>
           <a:stretch xmlns:a="http://schemas.openxmlformats.org/drawingml/2006/main"/>
         </p:blipFill>
         <p:spPr>
@@ -21568,7 +19788,7 @@
           <p:cNvPr id="4" name="">
             <a:extLst xmlns:a="http://schemas.openxmlformats.org/drawingml/2006/main">
               <a:ext uri="{FF2B5EF4-FFF2-40B4-BE49-F238E27FC236}">
-                <a16:creationId xmlns:a16="http://schemas.microsoft.com/office/drawing/2014/main" id="{70EB601B-2344-4C3B-9A20-51D0F50ECF15}"/>
+                <a16:creationId xmlns:a16="http://schemas.microsoft.com/office/drawing/2014/main" id="{73ED7115-200D-4CD0-A9DB-E4A95A7A9543}"/>
               </a:ext>
             </a:extLst>
           </p:cNvPr>
@@ -21598,7 +19818,7 @@
           <p:cNvPr id="5" name="">
             <a:extLst xmlns:a="http://schemas.openxmlformats.org/drawingml/2006/main">
               <a:ext uri="{FF2B5EF4-FFF2-40B4-BE49-F238E27FC236}">
-                <a16:creationId xmlns:a16="http://schemas.microsoft.com/office/drawing/2014/main" id="{D67E69B3-98DB-4AC4-932F-FCA30B86A868}"/>
+                <a16:creationId xmlns:a16="http://schemas.microsoft.com/office/drawing/2014/main" id="{0C5C72CB-1221-4244-AAB8-FE5F878C6814}"/>
               </a:ext>
             </a:extLst>
           </p:cNvPr>
@@ -21655,7 +19875,7 @@
           <p:cNvPr id="6" name="">
             <a:extLst xmlns:a="http://schemas.openxmlformats.org/drawingml/2006/main">
               <a:ext uri="{FF2B5EF4-FFF2-40B4-BE49-F238E27FC236}">
-                <a16:creationId xmlns:a16="http://schemas.microsoft.com/office/drawing/2014/main" id="{E0FAB365-B2C5-4BEA-B67D-F28892F51484}"/>
+                <a16:creationId xmlns:a16="http://schemas.microsoft.com/office/drawing/2014/main" id="{7363C0FE-AC09-422E-BF8C-9F2A533CC284}"/>
               </a:ext>
             </a:extLst>
           </p:cNvPr>
@@ -21710,7 +19930,7 @@
     </p:spTree>
     <p:extLst>
       <p:ext uri="{BB962C8B-B14F-4D97-AF65-F5344CB8AC3E}">
-        <p14:creationId xmlns:p14="http://schemas.microsoft.com/office/powerpoint/2010/main" val="842378725"/>
+        <p14:creationId xmlns:p14="http://schemas.microsoft.com/office/powerpoint/2010/main" val="748166842"/>
       </p:ext>
     </p:extLst>
   </p:cSld>
@@ -21741,7 +19961,7 @@
           <p:cNvPr id="7" name="">
             <a:extLst xmlns:a="http://schemas.openxmlformats.org/drawingml/2006/main">
               <a:ext uri="{FF2B5EF4-FFF2-40B4-BE49-F238E27FC236}">
-                <a16:creationId xmlns:a16="http://schemas.microsoft.com/office/drawing/2014/main" id="{3FA446D7-115B-4A98-8E26-9651734B1778}"/>
+                <a16:creationId xmlns:a16="http://schemas.microsoft.com/office/drawing/2014/main" id="{38A7E0A4-8029-4791-8BD8-B8AE50F72F16}"/>
               </a:ext>
             </a:extLst>
           </p:cNvPr>
@@ -21771,7 +19991,7 @@
           <p:cNvPr id="2" name="">
             <a:extLst xmlns:a="http://schemas.openxmlformats.org/drawingml/2006/main">
               <a:ext uri="{FF2B5EF4-FFF2-40B4-BE49-F238E27FC236}">
-                <a16:creationId xmlns:a16="http://schemas.microsoft.com/office/drawing/2014/main" id="{545EBE43-ED43-41C3-AC45-0712D547F42C}"/>
+                <a16:creationId xmlns:a16="http://schemas.microsoft.com/office/drawing/2014/main" id="{78339C97-E772-41E6-9F66-1EDF1B067161}"/>
               </a:ext>
             </a:extLst>
           </p:cNvPr>
@@ -21832,7 +20052,7 @@
           <p:nvPr/>
         </p:nvPicPr>
         <p:blipFill>
-          <a:blip xmlns:r="http://schemas.openxmlformats.org/officeDocument/2006/relationships" xmlns:a="http://schemas.openxmlformats.org/drawingml/2006/main" r:embed="Rfa925bdd6e7c458f"/>
+          <a:blip xmlns:r="http://schemas.openxmlformats.org/officeDocument/2006/relationships" xmlns:a="http://schemas.openxmlformats.org/drawingml/2006/main" r:embed="Rc9e17316fbc64b28"/>
           <a:stretch xmlns:a="http://schemas.openxmlformats.org/drawingml/2006/main"/>
         </p:blipFill>
         <p:spPr>
@@ -21850,7 +20070,7 @@
           <p:cNvPr id="4" name="">
             <a:extLst xmlns:a="http://schemas.openxmlformats.org/drawingml/2006/main">
               <a:ext uri="{FF2B5EF4-FFF2-40B4-BE49-F238E27FC236}">
-                <a16:creationId xmlns:a16="http://schemas.microsoft.com/office/drawing/2014/main" id="{9F37B9CE-EC2D-4D45-BC65-7E2E6A11FB25}"/>
+                <a16:creationId xmlns:a16="http://schemas.microsoft.com/office/drawing/2014/main" id="{F4F94E84-C132-40EB-B09A-C438B75FD1DC}"/>
               </a:ext>
             </a:extLst>
           </p:cNvPr>
@@ -21880,7 +20100,7 @@
           <p:cNvPr id="5" name="">
             <a:extLst xmlns:a="http://schemas.openxmlformats.org/drawingml/2006/main">
               <a:ext uri="{FF2B5EF4-FFF2-40B4-BE49-F238E27FC236}">
-                <a16:creationId xmlns:a16="http://schemas.microsoft.com/office/drawing/2014/main" id="{DA3FDACA-A71C-4FE8-99B6-82F0DFA4C3D7}"/>
+                <a16:creationId xmlns:a16="http://schemas.microsoft.com/office/drawing/2014/main" id="{2C547C0D-B800-4398-BB10-90E25B75D09F}"/>
               </a:ext>
             </a:extLst>
           </p:cNvPr>
@@ -21937,7 +20157,7 @@
           <p:cNvPr id="6" name="">
             <a:extLst xmlns:a="http://schemas.openxmlformats.org/drawingml/2006/main">
               <a:ext uri="{FF2B5EF4-FFF2-40B4-BE49-F238E27FC236}">
-                <a16:creationId xmlns:a16="http://schemas.microsoft.com/office/drawing/2014/main" id="{C6C33A39-4E1B-4811-8B3B-3AFF3711C0F2}"/>
+                <a16:creationId xmlns:a16="http://schemas.microsoft.com/office/drawing/2014/main" id="{50B7254D-0DF3-47CE-96B8-D18E2040397F}"/>
               </a:ext>
             </a:extLst>
           </p:cNvPr>
@@ -21992,7 +20212,7 @@
     </p:spTree>
     <p:extLst>
       <p:ext uri="{BB962C8B-B14F-4D97-AF65-F5344CB8AC3E}">
-        <p14:creationId xmlns:p14="http://schemas.microsoft.com/office/powerpoint/2010/main" val="282413772"/>
+        <p14:creationId xmlns:p14="http://schemas.microsoft.com/office/powerpoint/2010/main" val="225491157"/>
       </p:ext>
     </p:extLst>
   </p:cSld>

--- a/IUEA_Teaching_Plan/decks/CML3112_Week13_Design_Infrastructure.pptx
+++ b/IUEA_Teaching_Plan/decks/CML3112_Week13_Design_Infrastructure.pptx
@@ -427,7 +427,7 @@
 </file>
 
 <file path=ppt/notesSlides/notesSlide1.xml><?xml version="1.0" encoding="utf-8"?>
-<p:notes xmlns:p="http://schemas.openxmlformats.org/presentationml/2006/main">
+<p:notes xmlns:a="http://schemas.openxmlformats.org/drawingml/2006/main" xmlns:p="http://schemas.openxmlformats.org/presentationml/2006/main">
   <p:cSld>
     <p:spTree>
       <p:nvGrpSpPr>
@@ -436,13 +436,13 @@
         <p:nvPr/>
       </p:nvGrpSpPr>
       <p:grpSpPr>
-        <a:xfrm xmlns:a="http://schemas.openxmlformats.org/drawingml/2006/main"/>
+        <a:xfrm/>
       </p:grpSpPr>
       <p:sp>
         <p:nvSpPr>
           <p:cNvPr id="2" name="Slide Image Placeholder 1"/>
           <p:cNvSpPr>
-            <a:spLocks xmlns:a="http://schemas.openxmlformats.org/drawingml/2006/main" noGrp="1"/>
+            <a:spLocks noGrp="1"/>
           </p:cNvSpPr>
           <p:nvPr>
             <p:ph type="sldImg" idx="0"/>
@@ -454,7 +454,7 @@
         <p:nvSpPr>
           <p:cNvPr id="3" name="Notes Placeholder 2"/>
           <p:cNvSpPr>
-            <a:spLocks xmlns:a="http://schemas.openxmlformats.org/drawingml/2006/main" noGrp="1"/>
+            <a:spLocks noGrp="1"/>
           </p:cNvSpPr>
           <p:nvPr>
             <p:ph type="body" idx="1"/>
@@ -462,106 +462,91 @@
         </p:nvSpPr>
         <p:spPr/>
         <p:txBody>
-          <a:bodyPr xmlns:a="http://schemas.openxmlformats.org/drawingml/2006/main"/>
-          <a:lstStyle xmlns:a="http://schemas.openxmlformats.org/drawingml/2006/main"/>
-          <a:p xmlns:a="http://schemas.openxmlformats.org/drawingml/2006/main">
-            <a:r>
-              <a:t>PURPOSE</a:t>
-            </a:r>
-          </a:p>
-          <a:p xmlns:a="http://schemas.openxmlformats.org/drawingml/2006/main">
+          <a:bodyPr/>
+          <a:lstStyle/>
+          <a:p>
             <a:r>
               <a:t>Making the project understandable and runnable</a:t>
             </a:r>
           </a:p>
-          <a:p xmlns:a="http://schemas.openxmlformats.org/drawingml/2006/main">
+          <a:p>
+            <a:r>
+              <a:t>CML3112, Week 13, slide 1</a:t>
+            </a:r>
+          </a:p>
+          <a:p>
             <a:r>
               <a:t/>
             </a:r>
           </a:p>
-          <a:p xmlns:a="http://schemas.openxmlformats.org/drawingml/2006/main">
-            <a:r>
-              <a:t>CONNECT</a:t>
-            </a:r>
-          </a:p>
-          <a:p xmlns:a="http://schemas.openxmlformats.org/drawingml/2006/main">
-            <a:r>
-              <a:t>Previous slide: the preceding week.</a:t>
-            </a:r>
-          </a:p>
-          <a:p xmlns:a="http://schemas.openxmlformats.org/drawingml/2006/main">
+          <a:p>
+            <a:r>
+              <a:t>Explanation to give</a:t>
+            </a:r>
+          </a:p>
+          <a:p>
+            <a:r>
+              <a:t>The handover should reproduce the result using the files and instructions alone. Saved output is insufficient evidence.</a:t>
+            </a:r>
+          </a:p>
+          <a:p>
             <a:r>
               <a:t/>
             </a:r>
           </a:p>
-          <a:p xmlns:a="http://schemas.openxmlformats.org/drawingml/2006/main">
-            <a:r>
-              <a:t>EXPLAIN</a:t>
-            </a:r>
-          </a:p>
-          <a:p xmlns:a="http://schemas.openxmlformats.org/drawingml/2006/main">
+          <a:p>
+            <a:r>
+              <a:t>Worked illustration / lecturer answer</a:t>
+            </a:r>
+          </a:p>
+          <a:p>
+            <a:r>
+              <a:t>Restart, load the stated data and follow the README literally. A mismatch between a documented filename and the actual file is a handover defect to fix.</a:t>
+            </a:r>
+          </a:p>
+          <a:p>
+            <a:r>
+              <a:t/>
+            </a:r>
+          </a:p>
+          <a:p>
+            <a:r>
+              <a:t>Misconception to address</a:t>
+            </a:r>
+          </a:p>
+          <a:p>
+            <a:r>
+              <a:t>Use this as an orientation to the lesson. Terms and syntax will be unpacked on their own slides; students do not need to know them in advance.</a:t>
+            </a:r>
+          </a:p>
+          <a:p>
+            <a:r>
+              <a:t/>
+            </a:r>
+          </a:p>
+          <a:p>
+            <a:r>
+              <a:t>On this slide</a:t>
+            </a:r>
+          </a:p>
+          <a:p>
             <a:r>
               <a:t>Civil Engineering and Architecture</a:t>
             </a:r>
           </a:p>
-          <a:p xmlns:a="http://schemas.openxmlformats.org/drawingml/2006/main">
+          <a:p>
             <a:r>
               <a:t/>
             </a:r>
           </a:p>
-          <a:p xmlns:a="http://schemas.openxmlformats.org/drawingml/2006/main">
-            <a:r>
-              <a:t>LECTURER CUE</a:t>
-            </a:r>
-          </a:p>
-          <a:p xmlns:a="http://schemas.openxmlformats.org/drawingml/2006/main">
-            <a:r>
-              <a:t>Use PowerPoint Presenter View for these notes. Teach one example, pause for every learner to predict, then work an analogous example together. The practice notebook is a learning aid, not an extra graded upload.</a:t>
-            </a:r>
-          </a:p>
-          <a:p xmlns:a="http://schemas.openxmlformats.org/drawingml/2006/main">
-            <a:r>
-              <a:t/>
-            </a:r>
-          </a:p>
-          <a:p xmlns:a="http://schemas.openxmlformats.org/drawingml/2006/main">
-            <a:r>
-              <a:t>TEACHING MODE</a:t>
-            </a:r>
-          </a:p>
-          <a:p xmlns:a="http://schemas.openxmlformats.org/drawingml/2006/main">
-            <a:r>
-              <a:t>Demonstrate first. Read each new symbol aloud, trace the values and compare the shown output. Learners repeat worked examples individually after class.</a:t>
-            </a:r>
-          </a:p>
-          <a:p xmlns:a="http://schemas.openxmlformats.org/drawingml/2006/main">
-            <a:r>
-              <a:t/>
-            </a:r>
-          </a:p>
-          <a:p xmlns:a="http://schemas.openxmlformats.org/drawingml/2006/main">
-            <a:r>
-              <a:t>NEXT</a:t>
-            </a:r>
-          </a:p>
-          <a:p xmlns:a="http://schemas.openxmlformats.org/drawingml/2006/main">
-            <a:r>
-              <a:t>Today’s learning.</a:t>
-            </a:r>
-          </a:p>
-          <a:p xmlns:a="http://schemas.openxmlformats.org/drawingml/2006/main">
-            <a:r>
-              <a:t/>
-            </a:r>
-          </a:p>
-          <a:p xmlns:a="http://schemas.openxmlformats.org/drawingml/2006/main">
-            <a:r>
-              <a:t>REFERENCES</a:t>
-            </a:r>
-          </a:p>
-          <a:p xmlns:a="http://schemas.openxmlformats.org/drawingml/2006/main">
-            <a:r>
-              <a:t/>
+          <a:p>
+            <a:r>
+              <a:t>Continue to</a:t>
+            </a:r>
+          </a:p>
+          <a:p>
+            <a:r>
+              <a:t>Today’s learning</a:t>
             </a:r>
           </a:p>
         </p:txBody>
@@ -570,7 +555,7 @@
         <p:nvSpPr>
           <p:cNvPr id="4" name="Slide Number Placeholder 3"/>
           <p:cNvSpPr>
-            <a:spLocks xmlns:a="http://schemas.openxmlformats.org/drawingml/2006/main" noGrp="1"/>
+            <a:spLocks noGrp="1"/>
           </p:cNvSpPr>
           <p:nvPr>
             <p:ph type="sldNum" idx="5"/>
@@ -578,21 +563,21 @@
         </p:nvSpPr>
         <p:spPr/>
         <p:txBody>
-          <a:bodyPr xmlns:a="http://schemas.openxmlformats.org/drawingml/2006/main"/>
-          <a:lstStyle xmlns:a="http://schemas.openxmlformats.org/drawingml/2006/main"/>
-          <a:p xmlns:a="http://schemas.openxmlformats.org/drawingml/2006/main"/>
+          <a:bodyPr/>
+          <a:lstStyle/>
+          <a:p/>
         </p:txBody>
       </p:sp>
     </p:spTree>
   </p:cSld>
   <p:clrMapOvr>
-    <a:masterClrMapping xmlns:a="http://schemas.openxmlformats.org/drawingml/2006/main"/>
+    <a:masterClrMapping/>
   </p:clrMapOvr>
 </p:notes>
 </file>
 
 <file path=ppt/notesSlides/notesSlide10.xml><?xml version="1.0" encoding="utf-8"?>
-<p:notes xmlns:p="http://schemas.openxmlformats.org/presentationml/2006/main">
+<p:notes xmlns:a="http://schemas.openxmlformats.org/drawingml/2006/main" xmlns:p="http://schemas.openxmlformats.org/presentationml/2006/main">
   <p:cSld>
     <p:spTree>
       <p:nvGrpSpPr>
@@ -601,13 +586,13 @@
         <p:nvPr/>
       </p:nvGrpSpPr>
       <p:grpSpPr>
-        <a:xfrm xmlns:a="http://schemas.openxmlformats.org/drawingml/2006/main"/>
+        <a:xfrm/>
       </p:grpSpPr>
       <p:sp>
         <p:nvSpPr>
           <p:cNvPr id="2" name="Slide Image Placeholder 1"/>
           <p:cNvSpPr>
-            <a:spLocks xmlns:a="http://schemas.openxmlformats.org/drawingml/2006/main" noGrp="1"/>
+            <a:spLocks noGrp="1"/>
           </p:cNvSpPr>
           <p:nvPr>
             <p:ph type="sldImg" idx="0"/>
@@ -619,7 +604,7 @@
         <p:nvSpPr>
           <p:cNvPr id="3" name="Notes Placeholder 2"/>
           <p:cNvSpPr>
-            <a:spLocks xmlns:a="http://schemas.openxmlformats.org/drawingml/2006/main" noGrp="1"/>
+            <a:spLocks noGrp="1"/>
           </p:cNvSpPr>
           <p:nvPr>
             <p:ph type="body" idx="1"/>
@@ -627,126 +612,111 @@
         </p:nvSpPr>
         <p:spPr/>
         <p:txBody>
-          <a:bodyPr xmlns:a="http://schemas.openxmlformats.org/drawingml/2006/main"/>
-          <a:lstStyle xmlns:a="http://schemas.openxmlformats.org/drawingml/2006/main"/>
-          <a:p xmlns:a="http://schemas.openxmlformats.org/drawingml/2006/main">
-            <a:r>
-              <a:t>PURPOSE</a:t>
-            </a:r>
-          </a:p>
-          <a:p xmlns:a="http://schemas.openxmlformats.org/drawingml/2006/main">
+          <a:bodyPr/>
+          <a:lstStyle/>
+          <a:p>
             <a:r>
               <a:t>Saved outputs can hide missing steps</a:t>
             </a:r>
           </a:p>
-          <a:p xmlns:a="http://schemas.openxmlformats.org/drawingml/2006/main">
+          <a:p>
+            <a:r>
+              <a:t>CML3112, Week 13, slide 10</a:t>
+            </a:r>
+          </a:p>
+          <a:p>
             <a:r>
               <a:t/>
             </a:r>
           </a:p>
-          <a:p xmlns:a="http://schemas.openxmlformats.org/drawingml/2006/main">
-            <a:r>
-              <a:t>CONNECT</a:t>
-            </a:r>
-          </a:p>
-          <a:p xmlns:a="http://schemas.openxmlformats.org/drawingml/2006/main">
-            <a:r>
-              <a:t>Previous slide: A reproducible notebook starts fresh.</a:t>
-            </a:r>
-          </a:p>
-          <a:p xmlns:a="http://schemas.openxmlformats.org/drawingml/2006/main">
+          <a:p>
+            <a:r>
+              <a:t>Explanation to give</a:t>
+            </a:r>
+          </a:p>
+          <a:p>
+            <a:r>
+              <a:t>A reproducible handover gives another person enough files and instructions to obtain the reported result from a fresh environment. Saved outputs can survive even when the code no longer produces them.</a:t>
+            </a:r>
+          </a:p>
+          <a:p>
             <a:r>
               <a:t/>
             </a:r>
           </a:p>
-          <a:p xmlns:a="http://schemas.openxmlformats.org/drawingml/2006/main">
-            <a:r>
-              <a:t>EXPLAIN</a:t>
-            </a:r>
-          </a:p>
-          <a:p xmlns:a="http://schemas.openxmlformats.org/drawingml/2006/main">
+          <a:p>
+            <a:r>
+              <a:t>Worked illustration / lecturer answer</a:t>
+            </a:r>
+          </a:p>
+          <a:p>
+            <a:r>
+              <a:t>Restart, load the documented data and run from the first cell. If a later cell relies on a deleted variable, the clean run reveals the missing step. Record the required Python libraries and versions.</a:t>
+            </a:r>
+          </a:p>
+          <a:p>
+            <a:r>
+              <a:t/>
+            </a:r>
+          </a:p>
+          <a:p>
+            <a:r>
+              <a:t>Misconception to address</a:t>
+            </a:r>
+          </a:p>
+          <a:p>
+            <a:r>
+              <a:t>Restarting the runtime clears variables; it does not necessarily restore deleted data files. Re-upload or locate the documented inputs before the fresh run.</a:t>
+            </a:r>
+          </a:p>
+          <a:p>
+            <a:r>
+              <a:t/>
+            </a:r>
+          </a:p>
+          <a:p>
+            <a:r>
+              <a:t>On this slide</a:t>
+            </a:r>
+          </a:p>
+          <a:p>
             <a:r>
               <a:t>A notebook can display an old answer after its inputs have changed.</a:t>
             </a:r>
           </a:p>
-          <a:p xmlns:a="http://schemas.openxmlformats.org/drawingml/2006/main">
+          <a:p>
             <a:r>
               <a:t/>
             </a:r>
           </a:p>
-          <a:p xmlns:a="http://schemas.openxmlformats.org/drawingml/2006/main">
+          <a:p>
             <a:r>
               <a:t>A fresh session begins without the old variables.</a:t>
             </a:r>
           </a:p>
-          <a:p xmlns:a="http://schemas.openxmlformats.org/drawingml/2006/main">
+          <a:p>
             <a:r>
               <a:t/>
             </a:r>
           </a:p>
-          <a:p xmlns:a="http://schemas.openxmlformats.org/drawingml/2006/main">
+          <a:p>
             <a:r>
               <a:t>Restarting and running all tests whether the stated order creates the result.</a:t>
             </a:r>
           </a:p>
-          <a:p xmlns:a="http://schemas.openxmlformats.org/drawingml/2006/main">
+          <a:p>
             <a:r>
               <a:t/>
             </a:r>
           </a:p>
-          <a:p xmlns:a="http://schemas.openxmlformats.org/drawingml/2006/main">
-            <a:r>
-              <a:t>LECTURER CUE</a:t>
-            </a:r>
-          </a:p>
-          <a:p xmlns:a="http://schemas.openxmlformats.org/drawingml/2006/main">
-            <a:r>
-              <a:t>Demonstrate a clean run from a fresh session with the actual files. If a variable exists only from an earlier manual cell run, fix the run order.</a:t>
-            </a:r>
-          </a:p>
-          <a:p xmlns:a="http://schemas.openxmlformats.org/drawingml/2006/main">
-            <a:r>
-              <a:t/>
-            </a:r>
-          </a:p>
-          <a:p xmlns:a="http://schemas.openxmlformats.org/drawingml/2006/main">
-            <a:r>
-              <a:t>TEACHING MODE</a:t>
-            </a:r>
-          </a:p>
-          <a:p xmlns:a="http://schemas.openxmlformats.org/drawingml/2006/main">
-            <a:r>
-              <a:t>Demonstrate first. Read each new symbol aloud, trace the values and compare the shown output. Learners repeat worked examples individually after class.</a:t>
-            </a:r>
-          </a:p>
-          <a:p xmlns:a="http://schemas.openxmlformats.org/drawingml/2006/main">
-            <a:r>
-              <a:t/>
-            </a:r>
-          </a:p>
-          <a:p xmlns:a="http://schemas.openxmlformats.org/drawingml/2006/main">
-            <a:r>
-              <a:t>NEXT</a:t>
-            </a:r>
-          </a:p>
-          <a:p xmlns:a="http://schemas.openxmlformats.org/drawingml/2006/main">
-            <a:r>
-              <a:t>A path names where a file is found.</a:t>
-            </a:r>
-          </a:p>
-          <a:p xmlns:a="http://schemas.openxmlformats.org/drawingml/2006/main">
-            <a:r>
-              <a:t/>
-            </a:r>
-          </a:p>
-          <a:p xmlns:a="http://schemas.openxmlformats.org/drawingml/2006/main">
-            <a:r>
-              <a:t>REFERENCES</a:t>
-            </a:r>
-          </a:p>
-          <a:p xmlns:a="http://schemas.openxmlformats.org/drawingml/2006/main">
-            <a:r>
-              <a:t/>
+          <a:p>
+            <a:r>
+              <a:t>Continue to</a:t>
+            </a:r>
+          </a:p>
+          <a:p>
+            <a:r>
+              <a:t>A path names where a file is found</a:t>
             </a:r>
           </a:p>
         </p:txBody>
@@ -755,7 +725,7 @@
         <p:nvSpPr>
           <p:cNvPr id="4" name="Slide Number Placeholder 3"/>
           <p:cNvSpPr>
-            <a:spLocks xmlns:a="http://schemas.openxmlformats.org/drawingml/2006/main" noGrp="1"/>
+            <a:spLocks noGrp="1"/>
           </p:cNvSpPr>
           <p:nvPr>
             <p:ph type="sldNum" idx="5"/>
@@ -763,21 +733,21 @@
         </p:nvSpPr>
         <p:spPr/>
         <p:txBody>
-          <a:bodyPr xmlns:a="http://schemas.openxmlformats.org/drawingml/2006/main"/>
-          <a:lstStyle xmlns:a="http://schemas.openxmlformats.org/drawingml/2006/main"/>
-          <a:p xmlns:a="http://schemas.openxmlformats.org/drawingml/2006/main"/>
+          <a:bodyPr/>
+          <a:lstStyle/>
+          <a:p/>
         </p:txBody>
       </p:sp>
     </p:spTree>
   </p:cSld>
   <p:clrMapOvr>
-    <a:masterClrMapping xmlns:a="http://schemas.openxmlformats.org/drawingml/2006/main"/>
+    <a:masterClrMapping/>
   </p:clrMapOvr>
 </p:notes>
 </file>
 
 <file path=ppt/notesSlides/notesSlide11.xml><?xml version="1.0" encoding="utf-8"?>
-<p:notes xmlns:p="http://schemas.openxmlformats.org/presentationml/2006/main">
+<p:notes xmlns:a="http://schemas.openxmlformats.org/drawingml/2006/main" xmlns:p="http://schemas.openxmlformats.org/presentationml/2006/main">
   <p:cSld>
     <p:spTree>
       <p:nvGrpSpPr>
@@ -786,13 +756,13 @@
         <p:nvPr/>
       </p:nvGrpSpPr>
       <p:grpSpPr>
-        <a:xfrm xmlns:a="http://schemas.openxmlformats.org/drawingml/2006/main"/>
+        <a:xfrm/>
       </p:grpSpPr>
       <p:sp>
         <p:nvSpPr>
           <p:cNvPr id="2" name="Slide Image Placeholder 1"/>
           <p:cNvSpPr>
-            <a:spLocks xmlns:a="http://schemas.openxmlformats.org/drawingml/2006/main" noGrp="1"/>
+            <a:spLocks noGrp="1"/>
           </p:cNvSpPr>
           <p:nvPr>
             <p:ph type="sldImg" idx="0"/>
@@ -804,7 +774,7 @@
         <p:nvSpPr>
           <p:cNvPr id="3" name="Notes Placeholder 2"/>
           <p:cNvSpPr>
-            <a:spLocks xmlns:a="http://schemas.openxmlformats.org/drawingml/2006/main" noGrp="1"/>
+            <a:spLocks noGrp="1"/>
           </p:cNvSpPr>
           <p:nvPr>
             <p:ph type="body" idx="1"/>
@@ -812,126 +782,111 @@
         </p:nvSpPr>
         <p:spPr/>
         <p:txBody>
-          <a:bodyPr xmlns:a="http://schemas.openxmlformats.org/drawingml/2006/main"/>
-          <a:lstStyle xmlns:a="http://schemas.openxmlformats.org/drawingml/2006/main"/>
-          <a:p xmlns:a="http://schemas.openxmlformats.org/drawingml/2006/main">
-            <a:r>
-              <a:t>PURPOSE</a:t>
-            </a:r>
-          </a:p>
-          <a:p xmlns:a="http://schemas.openxmlformats.org/drawingml/2006/main">
+          <a:bodyPr/>
+          <a:lstStyle/>
+          <a:p>
             <a:r>
               <a:t>A path names where a file is found</a:t>
             </a:r>
           </a:p>
-          <a:p xmlns:a="http://schemas.openxmlformats.org/drawingml/2006/main">
+          <a:p>
+            <a:r>
+              <a:t>CML3112, Week 13, slide 11</a:t>
+            </a:r>
+          </a:p>
+          <a:p>
             <a:r>
               <a:t/>
             </a:r>
           </a:p>
-          <a:p xmlns:a="http://schemas.openxmlformats.org/drawingml/2006/main">
-            <a:r>
-              <a:t>CONNECT</a:t>
-            </a:r>
-          </a:p>
-          <a:p xmlns:a="http://schemas.openxmlformats.org/drawingml/2006/main">
-            <a:r>
-              <a:t>Previous slide: Saved outputs can hide missing steps.</a:t>
-            </a:r>
-          </a:p>
-          <a:p xmlns:a="http://schemas.openxmlformats.org/drawingml/2006/main">
+          <a:p>
+            <a:r>
+              <a:t>Explanation to give</a:t>
+            </a:r>
+          </a:p>
+          <a:p>
+            <a:r>
+              <a:t>A path identifies where a file is found. A relative path starts from the current working directory. Explain each folder component and the final filename.</a:t>
+            </a:r>
+          </a:p>
+          <a:p>
             <a:r>
               <a:t/>
             </a:r>
           </a:p>
-          <a:p xmlns:a="http://schemas.openxmlformats.org/drawingml/2006/main">
-            <a:r>
-              <a:t>EXPLAIN</a:t>
-            </a:r>
-          </a:p>
-          <a:p xmlns:a="http://schemas.openxmlformats.org/drawingml/2006/main">
+          <a:p>
+            <a:r>
+              <a:t>Worked illustration / lecturer answer</a:t>
+            </a:r>
+          </a:p>
+          <a:p>
+            <a:r>
+              <a:t>data/readings.csv means the readings.csv file inside a data folder under the current working directory. A path from your own Downloads folder will usually fail on another person's machine.</a:t>
+            </a:r>
+          </a:p>
+          <a:p>
+            <a:r>
+              <a:t/>
+            </a:r>
+          </a:p>
+          <a:p>
+            <a:r>
+              <a:t>Misconception to address</a:t>
+            </a:r>
+          </a:p>
+          <a:p>
+            <a:r>
+              <a:t>The working directory is not automatically the notebook's own folder in every tool. Check it and organise the project rather than hard-coding a personal absolute path.</a:t>
+            </a:r>
+          </a:p>
+          <a:p>
+            <a:r>
+              <a:t/>
+            </a:r>
+          </a:p>
+          <a:p>
+            <a:r>
+              <a:t>On this slide</a:t>
+            </a:r>
+          </a:p>
+          <a:p>
             <a:r>
               <a:t>A relative path is interpreted from the current working folder.</a:t>
             </a:r>
           </a:p>
-          <a:p xmlns:a="http://schemas.openxmlformats.org/drawingml/2006/main">
+          <a:p>
             <a:r>
               <a:t/>
             </a:r>
           </a:p>
-          <a:p xmlns:a="http://schemas.openxmlformats.org/drawingml/2006/main">
+          <a:p>
             <a:r>
               <a:t>Package versions describe the software used to run the code.</a:t>
             </a:r>
           </a:p>
-          <a:p xmlns:a="http://schemas.openxmlformats.org/drawingml/2006/main">
+          <a:p>
             <a:r>
               <a:t/>
             </a:r>
           </a:p>
-          <a:p xmlns:a="http://schemas.openxmlformats.org/drawingml/2006/main">
+          <a:p>
             <a:r>
               <a:t>The README must give both run instructions and data-access instructions.</a:t>
             </a:r>
           </a:p>
-          <a:p xmlns:a="http://schemas.openxmlformats.org/drawingml/2006/main">
+          <a:p>
             <a:r>
               <a:t/>
             </a:r>
           </a:p>
-          <a:p xmlns:a="http://schemas.openxmlformats.org/drawingml/2006/main">
-            <a:r>
-              <a:t>LECTURER CUE</a:t>
-            </a:r>
-          </a:p>
-          <a:p xmlns:a="http://schemas.openxmlformats.org/drawingml/2006/main">
-            <a:r>
-              <a:t>Explain every dependency and test a relative path. Include data-access instructions if the data cannot be redistributed.</a:t>
-            </a:r>
-          </a:p>
-          <a:p xmlns:a="http://schemas.openxmlformats.org/drawingml/2006/main">
-            <a:r>
-              <a:t/>
-            </a:r>
-          </a:p>
-          <a:p xmlns:a="http://schemas.openxmlformats.org/drawingml/2006/main">
-            <a:r>
-              <a:t>TEACHING MODE</a:t>
-            </a:r>
-          </a:p>
-          <a:p xmlns:a="http://schemas.openxmlformats.org/drawingml/2006/main">
-            <a:r>
-              <a:t>Demonstrate first. Read each new symbol aloud, trace the values and compare the shown output. Learners repeat worked examples individually after class.</a:t>
-            </a:r>
-          </a:p>
-          <a:p xmlns:a="http://schemas.openxmlformats.org/drawingml/2006/main">
-            <a:r>
-              <a:t/>
-            </a:r>
-          </a:p>
-          <a:p xmlns:a="http://schemas.openxmlformats.org/drawingml/2006/main">
-            <a:r>
-              <a:t>NEXT</a:t>
-            </a:r>
-          </a:p>
-          <a:p xmlns:a="http://schemas.openxmlformats.org/drawingml/2006/main">
-            <a:r>
-              <a:t>Read the path example.</a:t>
-            </a:r>
-          </a:p>
-          <a:p xmlns:a="http://schemas.openxmlformats.org/drawingml/2006/main">
-            <a:r>
-              <a:t/>
-            </a:r>
-          </a:p>
-          <a:p xmlns:a="http://schemas.openxmlformats.org/drawingml/2006/main">
-            <a:r>
-              <a:t>REFERENCES</a:t>
-            </a:r>
-          </a:p>
-          <a:p xmlns:a="http://schemas.openxmlformats.org/drawingml/2006/main">
-            <a:r>
-              <a:t/>
+          <a:p>
+            <a:r>
+              <a:t>Continue to</a:t>
+            </a:r>
+          </a:p>
+          <a:p>
+            <a:r>
+              <a:t>Read the path example</a:t>
             </a:r>
           </a:p>
         </p:txBody>
@@ -940,7 +895,7 @@
         <p:nvSpPr>
           <p:cNvPr id="4" name="Slide Number Placeholder 3"/>
           <p:cNvSpPr>
-            <a:spLocks xmlns:a="http://schemas.openxmlformats.org/drawingml/2006/main" noGrp="1"/>
+            <a:spLocks noGrp="1"/>
           </p:cNvSpPr>
           <p:nvPr>
             <p:ph type="sldNum" idx="5"/>
@@ -948,21 +903,21 @@
         </p:nvSpPr>
         <p:spPr/>
         <p:txBody>
-          <a:bodyPr xmlns:a="http://schemas.openxmlformats.org/drawingml/2006/main"/>
-          <a:lstStyle xmlns:a="http://schemas.openxmlformats.org/drawingml/2006/main"/>
-          <a:p xmlns:a="http://schemas.openxmlformats.org/drawingml/2006/main"/>
+          <a:bodyPr/>
+          <a:lstStyle/>
+          <a:p/>
         </p:txBody>
       </p:sp>
     </p:spTree>
   </p:cSld>
   <p:clrMapOvr>
-    <a:masterClrMapping xmlns:a="http://schemas.openxmlformats.org/drawingml/2006/main"/>
+    <a:masterClrMapping/>
   </p:clrMapOvr>
 </p:notes>
 </file>
 
 <file path=ppt/notesSlides/notesSlide12.xml><?xml version="1.0" encoding="utf-8"?>
-<p:notes xmlns:p="http://schemas.openxmlformats.org/presentationml/2006/main">
+<p:notes xmlns:a="http://schemas.openxmlformats.org/drawingml/2006/main" xmlns:p="http://schemas.openxmlformats.org/presentationml/2006/main">
   <p:cSld>
     <p:spTree>
       <p:nvGrpSpPr>
@@ -971,13 +926,13 @@
         <p:nvPr/>
       </p:nvGrpSpPr>
       <p:grpSpPr>
-        <a:xfrm xmlns:a="http://schemas.openxmlformats.org/drawingml/2006/main"/>
+        <a:xfrm/>
       </p:grpSpPr>
       <p:sp>
         <p:nvSpPr>
           <p:cNvPr id="2" name="Slide Image Placeholder 1"/>
           <p:cNvSpPr>
-            <a:spLocks xmlns:a="http://schemas.openxmlformats.org/drawingml/2006/main" noGrp="1"/>
+            <a:spLocks noGrp="1"/>
           </p:cNvSpPr>
           <p:nvPr>
             <p:ph type="sldImg" idx="0"/>
@@ -989,7 +944,7 @@
         <p:nvSpPr>
           <p:cNvPr id="3" name="Notes Placeholder 2"/>
           <p:cNvSpPr>
-            <a:spLocks xmlns:a="http://schemas.openxmlformats.org/drawingml/2006/main" noGrp="1"/>
+            <a:spLocks noGrp="1"/>
           </p:cNvSpPr>
           <p:nvPr>
             <p:ph type="body" idx="1"/>
@@ -997,116 +952,96 @@
         </p:nvSpPr>
         <p:spPr/>
         <p:txBody>
-          <a:bodyPr xmlns:a="http://schemas.openxmlformats.org/drawingml/2006/main"/>
-          <a:lstStyle xmlns:a="http://schemas.openxmlformats.org/drawingml/2006/main"/>
-          <a:p xmlns:a="http://schemas.openxmlformats.org/drawingml/2006/main">
-            <a:r>
-              <a:t>PURPOSE</a:t>
-            </a:r>
-          </a:p>
-          <a:p xmlns:a="http://schemas.openxmlformats.org/drawingml/2006/main">
+          <a:bodyPr/>
+          <a:lstStyle/>
+          <a:p>
             <a:r>
               <a:t>Read the path example</a:t>
             </a:r>
           </a:p>
-          <a:p xmlns:a="http://schemas.openxmlformats.org/drawingml/2006/main">
+          <a:p>
+            <a:r>
+              <a:t>CML3112, Week 13, slide 12</a:t>
+            </a:r>
+          </a:p>
+          <a:p>
             <a:r>
               <a:t/>
             </a:r>
           </a:p>
-          <a:p xmlns:a="http://schemas.openxmlformats.org/drawingml/2006/main">
-            <a:r>
-              <a:t>CONNECT</a:t>
-            </a:r>
-          </a:p>
-          <a:p xmlns:a="http://schemas.openxmlformats.org/drawingml/2006/main">
-            <a:r>
-              <a:t>Previous slide: A path names where a file is found.</a:t>
-            </a:r>
-          </a:p>
-          <a:p xmlns:a="http://schemas.openxmlformats.org/drawingml/2006/main">
+          <a:p>
+            <a:r>
+              <a:t>Explanation to give</a:t>
+            </a:r>
+          </a:p>
+          <a:p>
+            <a:r>
+              <a:t>A path identifies where a file is found. A relative path starts from the current working directory. Explain each folder component and the final filename.</a:t>
+            </a:r>
+          </a:p>
+          <a:p>
             <a:r>
               <a:t/>
             </a:r>
           </a:p>
-          <a:p xmlns:a="http://schemas.openxmlformats.org/drawingml/2006/main">
-            <a:r>
-              <a:t>EXPLAIN</a:t>
-            </a:r>
-          </a:p>
-          <a:p xmlns:a="http://schemas.openxmlformats.org/drawingml/2006/main">
+          <a:p>
+            <a:r>
+              <a:t>Worked illustration / lecturer answer</a:t>
+            </a:r>
+          </a:p>
+          <a:p>
+            <a:r>
+              <a:t>data/readings.csv means the readings.csv file inside a data folder under the current working directory. A path from your own Downloads folder will usually fail on another person's machine.</a:t>
+            </a:r>
+          </a:p>
+          <a:p>
+            <a:r>
+              <a:t/>
+            </a:r>
+          </a:p>
+          <a:p>
+            <a:r>
+              <a:t>Misconception to address</a:t>
+            </a:r>
+          </a:p>
+          <a:p>
+            <a:r>
+              <a:t>The working directory is not automatically the notebook's own folder in every tool. Check it and organise the project rather than hard-coding a personal absolute path.</a:t>
+            </a:r>
+          </a:p>
+          <a:p>
+            <a:r>
+              <a:t/>
+            </a:r>
+          </a:p>
+          <a:p>
+            <a:r>
+              <a:t>On this slide</a:t>
+            </a:r>
+          </a:p>
+          <a:p>
             <a:r>
               <a:t>Path and cwd: Path is a tool imported from Python’s pathlib module. Path.cwd() returns the folder where Python is currently running.</a:t>
             </a:r>
           </a:p>
-          <a:p xmlns:a="http://schemas.openxmlformats.org/drawingml/2006/main">
+          <a:p>
+            <a:r>
+              <a:t>name: The .name property gives the last folder component as text. It depends on your runtime. A different folder name is expected on another computer.</a:t>
+            </a:r>
+          </a:p>
+          <a:p>
             <a:r>
               <a:t/>
             </a:r>
           </a:p>
-          <a:p xmlns:a="http://schemas.openxmlformats.org/drawingml/2006/main">
-            <a:r>
-              <a:t>name: The .name property gives the last folder component as text. It depends on your runtime. A different folder name is expected on another computer.</a:t>
-            </a:r>
-          </a:p>
-          <a:p xmlns:a="http://schemas.openxmlformats.org/drawingml/2006/main">
-            <a:r>
-              <a:t/>
-            </a:r>
-          </a:p>
-          <a:p xmlns:a="http://schemas.openxmlformats.org/drawingml/2006/main">
-            <a:r>
-              <a:t>LECTURER CUE</a:t>
-            </a:r>
-          </a:p>
-          <a:p xmlns:a="http://schemas.openxmlformats.org/drawingml/2006/main">
-            <a:r>
-              <a:t>Explain the definitions before running or tracing the example. Point to the line or table row that produces each result.</a:t>
-            </a:r>
-          </a:p>
-          <a:p xmlns:a="http://schemas.openxmlformats.org/drawingml/2006/main">
-            <a:r>
-              <a:t/>
-            </a:r>
-          </a:p>
-          <a:p xmlns:a="http://schemas.openxmlformats.org/drawingml/2006/main">
-            <a:r>
-              <a:t>TEACHING MODE</a:t>
-            </a:r>
-          </a:p>
-          <a:p xmlns:a="http://schemas.openxmlformats.org/drawingml/2006/main">
-            <a:r>
-              <a:t>Demonstrate first. Read each new symbol aloud, trace the values and compare the shown output. Learners repeat worked examples individually after class.</a:t>
-            </a:r>
-          </a:p>
-          <a:p xmlns:a="http://schemas.openxmlformats.org/drawingml/2006/main">
-            <a:r>
-              <a:t/>
-            </a:r>
-          </a:p>
-          <a:p xmlns:a="http://schemas.openxmlformats.org/drawingml/2006/main">
-            <a:r>
-              <a:t>NEXT</a:t>
-            </a:r>
-          </a:p>
-          <a:p xmlns:a="http://schemas.openxmlformats.org/drawingml/2006/main">
-            <a:r>
-              <a:t>Worked example.</a:t>
-            </a:r>
-          </a:p>
-          <a:p xmlns:a="http://schemas.openxmlformats.org/drawingml/2006/main">
-            <a:r>
-              <a:t/>
-            </a:r>
-          </a:p>
-          <a:p xmlns:a="http://schemas.openxmlformats.org/drawingml/2006/main">
-            <a:r>
-              <a:t>REFERENCES</a:t>
-            </a:r>
-          </a:p>
-          <a:p xmlns:a="http://schemas.openxmlformats.org/drawingml/2006/main">
-            <a:r>
-              <a:t/>
+          <a:p>
+            <a:r>
+              <a:t>Continue to</a:t>
+            </a:r>
+          </a:p>
+          <a:p>
+            <a:r>
+              <a:t>Project handover in Python</a:t>
             </a:r>
           </a:p>
         </p:txBody>
@@ -1115,7 +1050,7 @@
         <p:nvSpPr>
           <p:cNvPr id="4" name="Slide Number Placeholder 3"/>
           <p:cNvSpPr>
-            <a:spLocks xmlns:a="http://schemas.openxmlformats.org/drawingml/2006/main" noGrp="1"/>
+            <a:spLocks noGrp="1"/>
           </p:cNvSpPr>
           <p:nvPr>
             <p:ph type="sldNum" idx="5"/>
@@ -1123,21 +1058,21 @@
         </p:nvSpPr>
         <p:spPr/>
         <p:txBody>
-          <a:bodyPr xmlns:a="http://schemas.openxmlformats.org/drawingml/2006/main"/>
-          <a:lstStyle xmlns:a="http://schemas.openxmlformats.org/drawingml/2006/main"/>
-          <a:p xmlns:a="http://schemas.openxmlformats.org/drawingml/2006/main"/>
+          <a:bodyPr/>
+          <a:lstStyle/>
+          <a:p/>
         </p:txBody>
       </p:sp>
     </p:spTree>
   </p:cSld>
   <p:clrMapOvr>
-    <a:masterClrMapping xmlns:a="http://schemas.openxmlformats.org/drawingml/2006/main"/>
+    <a:masterClrMapping/>
   </p:clrMapOvr>
 </p:notes>
 </file>
 
 <file path=ppt/notesSlides/notesSlide13.xml><?xml version="1.0" encoding="utf-8"?>
-<p:notes xmlns:p="http://schemas.openxmlformats.org/presentationml/2006/main">
+<p:notes xmlns:a="http://schemas.openxmlformats.org/drawingml/2006/main" xmlns:p="http://schemas.openxmlformats.org/presentationml/2006/main">
   <p:cSld>
     <p:spTree>
       <p:nvGrpSpPr>
@@ -1146,13 +1081,13 @@
         <p:nvPr/>
       </p:nvGrpSpPr>
       <p:grpSpPr>
-        <a:xfrm xmlns:a="http://schemas.openxmlformats.org/drawingml/2006/main"/>
+        <a:xfrm/>
       </p:grpSpPr>
       <p:sp>
         <p:nvSpPr>
           <p:cNvPr id="2" name="Slide Image Placeholder 1"/>
           <p:cNvSpPr>
-            <a:spLocks xmlns:a="http://schemas.openxmlformats.org/drawingml/2006/main" noGrp="1"/>
+            <a:spLocks noGrp="1"/>
           </p:cNvSpPr>
           <p:nvPr>
             <p:ph type="sldImg" idx="0"/>
@@ -1164,7 +1099,7 @@
         <p:nvSpPr>
           <p:cNvPr id="3" name="Notes Placeholder 2"/>
           <p:cNvSpPr>
-            <a:spLocks xmlns:a="http://schemas.openxmlformats.org/drawingml/2006/main" noGrp="1"/>
+            <a:spLocks noGrp="1"/>
           </p:cNvSpPr>
           <p:nvPr>
             <p:ph type="body" idx="1"/>
@@ -1172,176 +1107,126 @@
         </p:nvSpPr>
         <p:spPr/>
         <p:txBody>
-          <a:bodyPr xmlns:a="http://schemas.openxmlformats.org/drawingml/2006/main"/>
-          <a:lstStyle xmlns:a="http://schemas.openxmlformats.org/drawingml/2006/main"/>
-          <a:p xmlns:a="http://schemas.openxmlformats.org/drawingml/2006/main">
-            <a:r>
-              <a:t>PURPOSE</a:t>
-            </a:r>
-          </a:p>
-          <a:p xmlns:a="http://schemas.openxmlformats.org/drawingml/2006/main">
+          <a:bodyPr/>
+          <a:lstStyle/>
+          <a:p>
             <a:r>
               <a:t>Project handover in Python</a:t>
             </a:r>
           </a:p>
-          <a:p xmlns:a="http://schemas.openxmlformats.org/drawingml/2006/main">
+          <a:p>
+            <a:r>
+              <a:t>CML3112, Week 13, slide 13</a:t>
+            </a:r>
+          </a:p>
+          <a:p>
             <a:r>
               <a:t/>
             </a:r>
           </a:p>
-          <a:p xmlns:a="http://schemas.openxmlformats.org/drawingml/2006/main">
-            <a:r>
-              <a:t>CONNECT</a:t>
-            </a:r>
-          </a:p>
-          <a:p xmlns:a="http://schemas.openxmlformats.org/drawingml/2006/main">
-            <a:r>
-              <a:t>Previous slide: Read the path example.</a:t>
-            </a:r>
-          </a:p>
-          <a:p xmlns:a="http://schemas.openxmlformats.org/drawingml/2006/main">
+          <a:p>
+            <a:r>
+              <a:t>Explanation to give</a:t>
+            </a:r>
+          </a:p>
+          <a:p>
+            <a:r>
+              <a:t>A reproducible handover gives another person enough files and instructions to obtain the reported result from a fresh environment. Saved outputs can survive even when the code no longer produces them.</a:t>
+            </a:r>
+          </a:p>
+          <a:p>
             <a:r>
               <a:t/>
             </a:r>
           </a:p>
-          <a:p xmlns:a="http://schemas.openxmlformats.org/drawingml/2006/main">
-            <a:r>
-              <a:t>EXPLAIN</a:t>
-            </a:r>
-          </a:p>
-          <a:p xmlns:a="http://schemas.openxmlformats.org/drawingml/2006/main">
-            <a:r>
-              <a:t>Read the code in this order:</a:t>
-            </a:r>
-          </a:p>
-          <a:p xmlns:a="http://schemas.openxmlformats.org/drawingml/2006/main">
+          <a:p>
+            <a:r>
+              <a:t>Worked illustration / lecturer answer</a:t>
+            </a:r>
+          </a:p>
+          <a:p>
+            <a:r>
+              <a:t>Restart, load the documented data and run from the first cell. If a later cell relies on a deleted variable, the clean run reveals the missing step. Record the required Python libraries and versions.</a:t>
+            </a:r>
+          </a:p>
+          <a:p>
+            <a:r>
+              <a:t/>
+            </a:r>
+          </a:p>
+          <a:p>
+            <a:r>
+              <a:t>Misconception to address</a:t>
+            </a:r>
+          </a:p>
+          <a:p>
+            <a:r>
+              <a:t>Restarting the runtime clears variables; it does not necessarily restore deleted data files. Re-upload or locate the documented inputs before the fresh run.</a:t>
+            </a:r>
+          </a:p>
+          <a:p>
+            <a:r>
+              <a:t/>
+            </a:r>
+          </a:p>
+          <a:p>
+            <a:r>
+              <a:t>Read the displayed code line by line</a:t>
+            </a:r>
+          </a:p>
+          <a:p>
             <a:r>
               <a:t>from pathlib import Path</a:t>
             </a:r>
           </a:p>
-          <a:p xmlns:a="http://schemas.openxmlformats.org/drawingml/2006/main">
+          <a:p>
+            <a:r>
+              <a:t>Bring the named tool from this library into the current Python session.</a:t>
+            </a:r>
+          </a:p>
+          <a:p>
+            <a:r>
+              <a:t/>
+            </a:r>
+          </a:p>
+          <a:p>
             <a:r>
               <a:t>print(Path.cwd().name)</a:t>
             </a:r>
           </a:p>
-          <a:p xmlns:a="http://schemas.openxmlformats.org/drawingml/2006/main">
-            <a:r>
-              <a:t># The name depends on the folder where Python is running.</a:t>
-            </a:r>
-          </a:p>
-          <a:p xmlns:a="http://schemas.openxmlformats.org/drawingml/2006/main">
+          <a:p>
+            <a:r>
+              <a:t>Evaluate the expression inside the parentheses and display it. Displaying is separate from returning a function result.</a:t>
+            </a:r>
+          </a:p>
+          <a:p>
             <a:r>
               <a:t/>
             </a:r>
           </a:p>
-          <a:p xmlns:a="http://schemas.openxmlformats.org/drawingml/2006/main">
-            <a:r>
-              <a:t>import loads a library. from selects a tool from it.</a:t>
-            </a:r>
-          </a:p>
-          <a:p xmlns:a="http://schemas.openxmlformats.org/drawingml/2006/main">
+          <a:p>
+            <a:r>
+              <a:t>Result / continuity</a:t>
+            </a:r>
+          </a:p>
+          <a:p>
+            <a:r>
+              <a:t>Read top to bottom. Run the complete example in the matching practice notebook.</a:t>
+            </a:r>
+          </a:p>
+          <a:p>
             <a:r>
               <a:t/>
             </a:r>
           </a:p>
-          <a:p xmlns:a="http://schemas.openxmlformats.org/drawingml/2006/main">
-            <a:r>
-              <a:t>print displays a value below the cell.</a:t>
-            </a:r>
-          </a:p>
-          <a:p xmlns:a="http://schemas.openxmlformats.org/drawingml/2006/main">
-            <a:r>
-              <a:t/>
-            </a:r>
-          </a:p>
-          <a:p xmlns:a="http://schemas.openxmlformats.org/drawingml/2006/main">
-            <a:r>
-              <a:t>Read top to bottom. Run the complete example in the matching practice notebook.</a:t>
-            </a:r>
-          </a:p>
-          <a:p xmlns:a="http://schemas.openxmlformats.org/drawingml/2006/main">
-            <a:r>
-              <a:t/>
-            </a:r>
-          </a:p>
-          <a:p xmlns:a="http://schemas.openxmlformats.org/drawingml/2006/main">
-            <a:r>
-              <a:t>LECTURER CUE</a:t>
-            </a:r>
-          </a:p>
-          <a:p xmlns:a="http://schemas.openxmlformats.org/drawingml/2006/main">
-            <a:r>
-              <a:t>Demonstrate a clean run from a fresh session with the actual files. If a variable exists only from an earlier manual cell run, fix the run order. Explain every dependency and test a relative path. Include data-access instructions if the data cannot be redistributed. Model actionable feedback: “Step 2 names data.csv, but the supplied file is readings.csv; please make them match.”</a:t>
-            </a:r>
-          </a:p>
-          <a:p xmlns:a="http://schemas.openxmlformats.org/drawingml/2006/main">
-            <a:r>
-              <a:t/>
-            </a:r>
-          </a:p>
-          <a:p xmlns:a="http://schemas.openxmlformats.org/drawingml/2006/main">
-            <a:r>
-              <a:t>Complete practice code:</a:t>
-            </a:r>
-          </a:p>
-          <a:p xmlns:a="http://schemas.openxmlformats.org/drawingml/2006/main">
-            <a:r>
-              <a:t>from pathlib import Path</a:t>
-            </a:r>
-          </a:p>
-          <a:p xmlns:a="http://schemas.openxmlformats.org/drawingml/2006/main">
-            <a:r>
-              <a:t>print(Path.cwd().name)</a:t>
-            </a:r>
-          </a:p>
-          <a:p xmlns:a="http://schemas.openxmlformats.org/drawingml/2006/main">
-            <a:r>
-              <a:t># The name depends on the folder where Python is running.</a:t>
-            </a:r>
-          </a:p>
-          <a:p xmlns:a="http://schemas.openxmlformats.org/drawingml/2006/main">
-            <a:r>
-              <a:t/>
-            </a:r>
-          </a:p>
-          <a:p xmlns:a="http://schemas.openxmlformats.org/drawingml/2006/main">
-            <a:r>
-              <a:t>TEACHING MODE</a:t>
-            </a:r>
-          </a:p>
-          <a:p xmlns:a="http://schemas.openxmlformats.org/drawingml/2006/main">
-            <a:r>
-              <a:t>Demonstrate first. Read each new symbol aloud, trace the values and compare the shown output. Learners repeat worked examples individually after class.</a:t>
-            </a:r>
-          </a:p>
-          <a:p xmlns:a="http://schemas.openxmlformats.org/drawingml/2006/main">
-            <a:r>
-              <a:t/>
-            </a:r>
-          </a:p>
-          <a:p xmlns:a="http://schemas.openxmlformats.org/drawingml/2006/main">
-            <a:r>
-              <a:t>NEXT</a:t>
-            </a:r>
-          </a:p>
-          <a:p xmlns:a="http://schemas.openxmlformats.org/drawingml/2006/main">
-            <a:r>
-              <a:t>Expected output.</a:t>
-            </a:r>
-          </a:p>
-          <a:p xmlns:a="http://schemas.openxmlformats.org/drawingml/2006/main">
-            <a:r>
-              <a:t/>
-            </a:r>
-          </a:p>
-          <a:p xmlns:a="http://schemas.openxmlformats.org/drawingml/2006/main">
-            <a:r>
-              <a:t>REFERENCES</a:t>
-            </a:r>
-          </a:p>
-          <a:p xmlns:a="http://schemas.openxmlformats.org/drawingml/2006/main">
-            <a:r>
-              <a:t/>
+          <a:p>
+            <a:r>
+              <a:t>Continue to</a:t>
+            </a:r>
+          </a:p>
+          <a:p>
+            <a:r>
+              <a:t>Project handover results</a:t>
             </a:r>
           </a:p>
         </p:txBody>
@@ -1350,7 +1235,7 @@
         <p:nvSpPr>
           <p:cNvPr id="4" name="Slide Number Placeholder 3"/>
           <p:cNvSpPr>
-            <a:spLocks xmlns:a="http://schemas.openxmlformats.org/drawingml/2006/main" noGrp="1"/>
+            <a:spLocks noGrp="1"/>
           </p:cNvSpPr>
           <p:nvPr>
             <p:ph type="sldNum" idx="5"/>
@@ -1358,21 +1243,21 @@
         </p:nvSpPr>
         <p:spPr/>
         <p:txBody>
-          <a:bodyPr xmlns:a="http://schemas.openxmlformats.org/drawingml/2006/main"/>
-          <a:lstStyle xmlns:a="http://schemas.openxmlformats.org/drawingml/2006/main"/>
-          <a:p xmlns:a="http://schemas.openxmlformats.org/drawingml/2006/main"/>
+          <a:bodyPr/>
+          <a:lstStyle/>
+          <a:p/>
         </p:txBody>
       </p:sp>
     </p:spTree>
   </p:cSld>
   <p:clrMapOvr>
-    <a:masterClrMapping xmlns:a="http://schemas.openxmlformats.org/drawingml/2006/main"/>
+    <a:masterClrMapping/>
   </p:clrMapOvr>
 </p:notes>
 </file>
 
 <file path=ppt/notesSlides/notesSlide14.xml><?xml version="1.0" encoding="utf-8"?>
-<p:notes xmlns:p="http://schemas.openxmlformats.org/presentationml/2006/main">
+<p:notes xmlns:a="http://schemas.openxmlformats.org/drawingml/2006/main" xmlns:p="http://schemas.openxmlformats.org/presentationml/2006/main">
   <p:cSld>
     <p:spTree>
       <p:nvGrpSpPr>
@@ -1381,13 +1266,13 @@
         <p:nvPr/>
       </p:nvGrpSpPr>
       <p:grpSpPr>
-        <a:xfrm xmlns:a="http://schemas.openxmlformats.org/drawingml/2006/main"/>
+        <a:xfrm/>
       </p:grpSpPr>
       <p:sp>
         <p:nvSpPr>
           <p:cNvPr id="2" name="Slide Image Placeholder 1"/>
           <p:cNvSpPr>
-            <a:spLocks xmlns:a="http://schemas.openxmlformats.org/drawingml/2006/main" noGrp="1"/>
+            <a:spLocks noGrp="1"/>
           </p:cNvSpPr>
           <p:nvPr>
             <p:ph type="sldImg" idx="0"/>
@@ -1399,7 +1284,7 @@
         <p:nvSpPr>
           <p:cNvPr id="3" name="Notes Placeholder 2"/>
           <p:cNvSpPr>
-            <a:spLocks xmlns:a="http://schemas.openxmlformats.org/drawingml/2006/main" noGrp="1"/>
+            <a:spLocks noGrp="1"/>
           </p:cNvSpPr>
           <p:nvPr>
             <p:ph type="body" idx="1"/>
@@ -1407,106 +1292,91 @@
         </p:nvSpPr>
         <p:spPr/>
         <p:txBody>
-          <a:bodyPr xmlns:a="http://schemas.openxmlformats.org/drawingml/2006/main"/>
-          <a:lstStyle xmlns:a="http://schemas.openxmlformats.org/drawingml/2006/main"/>
-          <a:p xmlns:a="http://schemas.openxmlformats.org/drawingml/2006/main">
-            <a:r>
-              <a:t>PURPOSE</a:t>
-            </a:r>
-          </a:p>
-          <a:p xmlns:a="http://schemas.openxmlformats.org/drawingml/2006/main">
+          <a:bodyPr/>
+          <a:lstStyle/>
+          <a:p>
             <a:r>
               <a:t>Project handover results</a:t>
             </a:r>
           </a:p>
-          <a:p xmlns:a="http://schemas.openxmlformats.org/drawingml/2006/main">
+          <a:p>
+            <a:r>
+              <a:t>CML3112, Week 13, slide 14</a:t>
+            </a:r>
+          </a:p>
+          <a:p>
             <a:r>
               <a:t/>
             </a:r>
           </a:p>
-          <a:p xmlns:a="http://schemas.openxmlformats.org/drawingml/2006/main">
-            <a:r>
-              <a:t>CONNECT</a:t>
-            </a:r>
-          </a:p>
-          <a:p xmlns:a="http://schemas.openxmlformats.org/drawingml/2006/main">
-            <a:r>
-              <a:t>Previous slide: Project handover in Python.</a:t>
-            </a:r>
-          </a:p>
-          <a:p xmlns:a="http://schemas.openxmlformats.org/drawingml/2006/main">
+          <a:p>
+            <a:r>
+              <a:t>Explanation to give</a:t>
+            </a:r>
+          </a:p>
+          <a:p>
+            <a:r>
+              <a:t>A reproducible handover gives another person enough files and instructions to obtain the reported result from a fresh environment. Saved outputs can survive even when the code no longer produces them.</a:t>
+            </a:r>
+          </a:p>
+          <a:p>
             <a:r>
               <a:t/>
             </a:r>
           </a:p>
-          <a:p xmlns:a="http://schemas.openxmlformats.org/drawingml/2006/main">
-            <a:r>
-              <a:t>EXPLAIN</a:t>
-            </a:r>
-          </a:p>
-          <a:p xmlns:a="http://schemas.openxmlformats.org/drawingml/2006/main">
+          <a:p>
+            <a:r>
+              <a:t>Worked illustration / lecturer answer</a:t>
+            </a:r>
+          </a:p>
+          <a:p>
+            <a:r>
+              <a:t>Restart, load the documented data and run from the first cell. If a later cell relies on a deleted variable, the clean run reveals the missing step. Record the required Python libraries and versions.</a:t>
+            </a:r>
+          </a:p>
+          <a:p>
+            <a:r>
+              <a:t/>
+            </a:r>
+          </a:p>
+          <a:p>
+            <a:r>
+              <a:t>Misconception to address</a:t>
+            </a:r>
+          </a:p>
+          <a:p>
+            <a:r>
+              <a:t>Restarting the runtime clears variables; it does not necessarily restore deleted data files. Re-upload or locate the documented inputs before the fresh run.</a:t>
+            </a:r>
+          </a:p>
+          <a:p>
+            <a:r>
+              <a:t/>
+            </a:r>
+          </a:p>
+          <a:p>
+            <a:r>
+              <a:t>On this slide</a:t>
+            </a:r>
+          </a:p>
+          <a:p>
             <a:r>
               <a:t>Your current working folder name; it is environment-dependent.</a:t>
             </a:r>
           </a:p>
-          <a:p xmlns:a="http://schemas.openxmlformats.org/drawingml/2006/main">
+          <a:p>
             <a:r>
               <a:t/>
             </a:r>
           </a:p>
-          <a:p xmlns:a="http://schemas.openxmlformats.org/drawingml/2006/main">
-            <a:r>
-              <a:t>LECTURER CUE</a:t>
-            </a:r>
-          </a:p>
-          <a:p xmlns:a="http://schemas.openxmlformats.org/drawingml/2006/main">
-            <a:r>
-              <a:t>Compare the actual output character by character with this practice result. If it differs, read the first error and check the input, units, names and execution order. Do not copy this practice output into a graded answer.</a:t>
-            </a:r>
-          </a:p>
-          <a:p xmlns:a="http://schemas.openxmlformats.org/drawingml/2006/main">
-            <a:r>
-              <a:t/>
-            </a:r>
-          </a:p>
-          <a:p xmlns:a="http://schemas.openxmlformats.org/drawingml/2006/main">
-            <a:r>
-              <a:t>TEACHING MODE</a:t>
-            </a:r>
-          </a:p>
-          <a:p xmlns:a="http://schemas.openxmlformats.org/drawingml/2006/main">
-            <a:r>
-              <a:t>Demonstrate first. Read each new symbol aloud, trace the values and compare the shown output. Learners repeat worked examples individually after class.</a:t>
-            </a:r>
-          </a:p>
-          <a:p xmlns:a="http://schemas.openxmlformats.org/drawingml/2006/main">
-            <a:r>
-              <a:t/>
-            </a:r>
-          </a:p>
-          <a:p xmlns:a="http://schemas.openxmlformats.org/drawingml/2006/main">
-            <a:r>
-              <a:t>NEXT</a:t>
-            </a:r>
-          </a:p>
-          <a:p xmlns:a="http://schemas.openxmlformats.org/drawingml/2006/main">
-            <a:r>
-              <a:t>Tell another person what the project needs.</a:t>
-            </a:r>
-          </a:p>
-          <a:p xmlns:a="http://schemas.openxmlformats.org/drawingml/2006/main">
-            <a:r>
-              <a:t/>
-            </a:r>
-          </a:p>
-          <a:p xmlns:a="http://schemas.openxmlformats.org/drawingml/2006/main">
-            <a:r>
-              <a:t>REFERENCES</a:t>
-            </a:r>
-          </a:p>
-          <a:p xmlns:a="http://schemas.openxmlformats.org/drawingml/2006/main">
-            <a:r>
-              <a:t/>
+          <a:p>
+            <a:r>
+              <a:t>Continue to</a:t>
+            </a:r>
+          </a:p>
+          <a:p>
+            <a:r>
+              <a:t>Tell another person what the project needs</a:t>
             </a:r>
           </a:p>
         </p:txBody>
@@ -1515,7 +1385,7 @@
         <p:nvSpPr>
           <p:cNvPr id="4" name="Slide Number Placeholder 3"/>
           <p:cNvSpPr>
-            <a:spLocks xmlns:a="http://schemas.openxmlformats.org/drawingml/2006/main" noGrp="1"/>
+            <a:spLocks noGrp="1"/>
           </p:cNvSpPr>
           <p:nvPr>
             <p:ph type="sldNum" idx="5"/>
@@ -1523,21 +1393,21 @@
         </p:nvSpPr>
         <p:spPr/>
         <p:txBody>
-          <a:bodyPr xmlns:a="http://schemas.openxmlformats.org/drawingml/2006/main"/>
-          <a:lstStyle xmlns:a="http://schemas.openxmlformats.org/drawingml/2006/main"/>
-          <a:p xmlns:a="http://schemas.openxmlformats.org/drawingml/2006/main"/>
+          <a:bodyPr/>
+          <a:lstStyle/>
+          <a:p/>
         </p:txBody>
       </p:sp>
     </p:spTree>
   </p:cSld>
   <p:clrMapOvr>
-    <a:masterClrMapping xmlns:a="http://schemas.openxmlformats.org/drawingml/2006/main"/>
+    <a:masterClrMapping/>
   </p:clrMapOvr>
 </p:notes>
 </file>
 
 <file path=ppt/notesSlides/notesSlide15.xml><?xml version="1.0" encoding="utf-8"?>
-<p:notes xmlns:p="http://schemas.openxmlformats.org/presentationml/2006/main">
+<p:notes xmlns:a="http://schemas.openxmlformats.org/drawingml/2006/main" xmlns:p="http://schemas.openxmlformats.org/presentationml/2006/main">
   <p:cSld>
     <p:spTree>
       <p:nvGrpSpPr>
@@ -1546,13 +1416,13 @@
         <p:nvPr/>
       </p:nvGrpSpPr>
       <p:grpSpPr>
-        <a:xfrm xmlns:a="http://schemas.openxmlformats.org/drawingml/2006/main"/>
+        <a:xfrm/>
       </p:grpSpPr>
       <p:sp>
         <p:nvSpPr>
           <p:cNvPr id="2" name="Slide Image Placeholder 1"/>
           <p:cNvSpPr>
-            <a:spLocks xmlns:a="http://schemas.openxmlformats.org/drawingml/2006/main" noGrp="1"/>
+            <a:spLocks noGrp="1"/>
           </p:cNvSpPr>
           <p:nvPr>
             <p:ph type="sldImg" idx="0"/>
@@ -1564,7 +1434,7 @@
         <p:nvSpPr>
           <p:cNvPr id="3" name="Notes Placeholder 2"/>
           <p:cNvSpPr>
-            <a:spLocks xmlns:a="http://schemas.openxmlformats.org/drawingml/2006/main" noGrp="1"/>
+            <a:spLocks noGrp="1"/>
           </p:cNvSpPr>
           <p:nvPr>
             <p:ph type="body" idx="1"/>
@@ -1572,116 +1442,96 @@
         </p:nvSpPr>
         <p:spPr/>
         <p:txBody>
-          <a:bodyPr xmlns:a="http://schemas.openxmlformats.org/drawingml/2006/main"/>
-          <a:lstStyle xmlns:a="http://schemas.openxmlformats.org/drawingml/2006/main"/>
-          <a:p xmlns:a="http://schemas.openxmlformats.org/drawingml/2006/main">
-            <a:r>
-              <a:t>PURPOSE</a:t>
-            </a:r>
-          </a:p>
-          <a:p xmlns:a="http://schemas.openxmlformats.org/drawingml/2006/main">
+          <a:bodyPr/>
+          <a:lstStyle/>
+          <a:p>
             <a:r>
               <a:t>Tell another person what the project needs</a:t>
             </a:r>
           </a:p>
-          <a:p xmlns:a="http://schemas.openxmlformats.org/drawingml/2006/main">
+          <a:p>
+            <a:r>
+              <a:t>CML3112, Week 13, slide 15</a:t>
+            </a:r>
+          </a:p>
+          <a:p>
             <a:r>
               <a:t/>
             </a:r>
           </a:p>
-          <a:p xmlns:a="http://schemas.openxmlformats.org/drawingml/2006/main">
-            <a:r>
-              <a:t>CONNECT</a:t>
-            </a:r>
-          </a:p>
-          <a:p xmlns:a="http://schemas.openxmlformats.org/drawingml/2006/main">
-            <a:r>
-              <a:t>Previous slide: Project handover results.</a:t>
-            </a:r>
-          </a:p>
-          <a:p xmlns:a="http://schemas.openxmlformats.org/drawingml/2006/main">
+          <a:p>
+            <a:r>
+              <a:t>Explanation to give</a:t>
+            </a:r>
+          </a:p>
+          <a:p>
+            <a:r>
+              <a:t>Treat the README as instructions for someone opening the project for the first time. Name the files, setup requirements, entry notebook and exact order needed to reproduce the result.</a:t>
+            </a:r>
+          </a:p>
+          <a:p>
             <a:r>
               <a:t/>
             </a:r>
           </a:p>
-          <a:p xmlns:a="http://schemas.openxmlformats.org/drawingml/2006/main">
-            <a:r>
-              <a:t>EXPLAIN</a:t>
-            </a:r>
-          </a:p>
-          <a:p xmlns:a="http://schemas.openxmlformats.org/drawingml/2006/main">
+          <a:p>
+            <a:r>
+              <a:t>Worked illustration / lecturer answer</a:t>
+            </a:r>
+          </a:p>
+          <a:p>
+            <a:r>
+              <a:t>Replace “run the analysis” with “Open analysis.ipynb, place readings.csv in data/, restart the runtime and run all cells.” A useful repair comment names the failed step and the corrected filename.</a:t>
+            </a:r>
+          </a:p>
+          <a:p>
+            <a:r>
+              <a:t/>
+            </a:r>
+          </a:p>
+          <a:p>
+            <a:r>
+              <a:t>Misconception to address</a:t>
+            </a:r>
+          </a:p>
+          <a:p>
+            <a:r>
+              <a:t>A repository URL proves a location exists, not that the work runs or was submitted. Contribution claims should point to specific work, not only a count of commits.</a:t>
+            </a:r>
+          </a:p>
+          <a:p>
+            <a:r>
+              <a:t/>
+            </a:r>
+          </a:p>
+          <a:p>
+            <a:r>
+              <a:t>On this slide</a:t>
+            </a:r>
+          </a:p>
+          <a:p>
             <a:r>
               <a:t>requirements.txt and versions: This text file lists required Python packages and their versions. Record the versions used in the working environment; test them with the supplied run instructions.</a:t>
             </a:r>
           </a:p>
-          <a:p xmlns:a="http://schemas.openxmlformats.org/drawingml/2006/main">
+          <a:p>
+            <a:r>
+              <a:t>Data source, permission and seed: Name the data source and any licence or permission for reuse. Record random seeds used in modelling. A seed supports repeatability; it does not repair data leakage.</a:t>
+            </a:r>
+          </a:p>
+          <a:p>
             <a:r>
               <a:t/>
             </a:r>
           </a:p>
-          <a:p xmlns:a="http://schemas.openxmlformats.org/drawingml/2006/main">
-            <a:r>
-              <a:t>Data source, permission and seed: Name the data source and any licence or permission for reuse. Record random seeds used in modelling. A seed supports repeatability; it does not repair data leakage.</a:t>
-            </a:r>
-          </a:p>
-          <a:p xmlns:a="http://schemas.openxmlformats.org/drawingml/2006/main">
-            <a:r>
-              <a:t/>
-            </a:r>
-          </a:p>
-          <a:p xmlns:a="http://schemas.openxmlformats.org/drawingml/2006/main">
-            <a:r>
-              <a:t>LECTURER CUE</a:t>
-            </a:r>
-          </a:p>
-          <a:p xmlns:a="http://schemas.openxmlformats.org/drawingml/2006/main">
-            <a:r>
-              <a:t>Explain the definitions before running or tracing the example. Point to the line or table row that produces each result.</a:t>
-            </a:r>
-          </a:p>
-          <a:p xmlns:a="http://schemas.openxmlformats.org/drawingml/2006/main">
-            <a:r>
-              <a:t/>
-            </a:r>
-          </a:p>
-          <a:p xmlns:a="http://schemas.openxmlformats.org/drawingml/2006/main">
-            <a:r>
-              <a:t>TEACHING MODE</a:t>
-            </a:r>
-          </a:p>
-          <a:p xmlns:a="http://schemas.openxmlformats.org/drawingml/2006/main">
-            <a:r>
-              <a:t>Demonstrate first. Read each new symbol aloud, trace the values and compare the shown output. Learners repeat worked examples individually after class.</a:t>
-            </a:r>
-          </a:p>
-          <a:p xmlns:a="http://schemas.openxmlformats.org/drawingml/2006/main">
-            <a:r>
-              <a:t/>
-            </a:r>
-          </a:p>
-          <a:p xmlns:a="http://schemas.openxmlformats.org/drawingml/2006/main">
-            <a:r>
-              <a:t>NEXT</a:t>
-            </a:r>
-          </a:p>
-          <a:p xmlns:a="http://schemas.openxmlformats.org/drawingml/2006/main">
-            <a:r>
-              <a:t>Run checks and contribution evidence.</a:t>
-            </a:r>
-          </a:p>
-          <a:p xmlns:a="http://schemas.openxmlformats.org/drawingml/2006/main">
-            <a:r>
-              <a:t/>
-            </a:r>
-          </a:p>
-          <a:p xmlns:a="http://schemas.openxmlformats.org/drawingml/2006/main">
-            <a:r>
-              <a:t>REFERENCES</a:t>
-            </a:r>
-          </a:p>
-          <a:p xmlns:a="http://schemas.openxmlformats.org/drawingml/2006/main">
-            <a:r>
-              <a:t/>
+          <a:p>
+            <a:r>
+              <a:t>Continue to</a:t>
+            </a:r>
+          </a:p>
+          <a:p>
+            <a:r>
+              <a:t>Run checks and contribution evidence</a:t>
             </a:r>
           </a:p>
         </p:txBody>
@@ -1690,7 +1540,7 @@
         <p:nvSpPr>
           <p:cNvPr id="4" name="Slide Number Placeholder 3"/>
           <p:cNvSpPr>
-            <a:spLocks xmlns:a="http://schemas.openxmlformats.org/drawingml/2006/main" noGrp="1"/>
+            <a:spLocks noGrp="1"/>
           </p:cNvSpPr>
           <p:nvPr>
             <p:ph type="sldNum" idx="5"/>
@@ -1698,21 +1548,21 @@
         </p:nvSpPr>
         <p:spPr/>
         <p:txBody>
-          <a:bodyPr xmlns:a="http://schemas.openxmlformats.org/drawingml/2006/main"/>
-          <a:lstStyle xmlns:a="http://schemas.openxmlformats.org/drawingml/2006/main"/>
-          <a:p xmlns:a="http://schemas.openxmlformats.org/drawingml/2006/main"/>
+          <a:bodyPr/>
+          <a:lstStyle/>
+          <a:p/>
         </p:txBody>
       </p:sp>
     </p:spTree>
   </p:cSld>
   <p:clrMapOvr>
-    <a:masterClrMapping xmlns:a="http://schemas.openxmlformats.org/drawingml/2006/main"/>
+    <a:masterClrMapping/>
   </p:clrMapOvr>
 </p:notes>
 </file>
 
 <file path=ppt/notesSlides/notesSlide16.xml><?xml version="1.0" encoding="utf-8"?>
-<p:notes xmlns:p="http://schemas.openxmlformats.org/presentationml/2006/main">
+<p:notes xmlns:a="http://schemas.openxmlformats.org/drawingml/2006/main" xmlns:p="http://schemas.openxmlformats.org/presentationml/2006/main">
   <p:cSld>
     <p:spTree>
       <p:nvGrpSpPr>
@@ -1721,13 +1571,13 @@
         <p:nvPr/>
       </p:nvGrpSpPr>
       <p:grpSpPr>
-        <a:xfrm xmlns:a="http://schemas.openxmlformats.org/drawingml/2006/main"/>
+        <a:xfrm/>
       </p:grpSpPr>
       <p:sp>
         <p:nvSpPr>
           <p:cNvPr id="2" name="Slide Image Placeholder 1"/>
           <p:cNvSpPr>
-            <a:spLocks xmlns:a="http://schemas.openxmlformats.org/drawingml/2006/main" noGrp="1"/>
+            <a:spLocks noGrp="1"/>
           </p:cNvSpPr>
           <p:nvPr>
             <p:ph type="sldImg" idx="0"/>
@@ -1739,7 +1589,7 @@
         <p:nvSpPr>
           <p:cNvPr id="3" name="Notes Placeholder 2"/>
           <p:cNvSpPr>
-            <a:spLocks xmlns:a="http://schemas.openxmlformats.org/drawingml/2006/main" noGrp="1"/>
+            <a:spLocks noGrp="1"/>
           </p:cNvSpPr>
           <p:nvPr>
             <p:ph type="body" idx="1"/>
@@ -1747,116 +1597,96 @@
         </p:nvSpPr>
         <p:spPr/>
         <p:txBody>
-          <a:bodyPr xmlns:a="http://schemas.openxmlformats.org/drawingml/2006/main"/>
-          <a:lstStyle xmlns:a="http://schemas.openxmlformats.org/drawingml/2006/main"/>
-          <a:p xmlns:a="http://schemas.openxmlformats.org/drawingml/2006/main">
-            <a:r>
-              <a:t>PURPOSE</a:t>
-            </a:r>
-          </a:p>
-          <a:p xmlns:a="http://schemas.openxmlformats.org/drawingml/2006/main">
+          <a:bodyPr/>
+          <a:lstStyle/>
+          <a:p>
             <a:r>
               <a:t>Run checks and contribution evidence</a:t>
             </a:r>
           </a:p>
-          <a:p xmlns:a="http://schemas.openxmlformats.org/drawingml/2006/main">
+          <a:p>
+            <a:r>
+              <a:t>CML3112, Week 13, slide 16</a:t>
+            </a:r>
+          </a:p>
+          <a:p>
             <a:r>
               <a:t/>
             </a:r>
           </a:p>
-          <a:p xmlns:a="http://schemas.openxmlformats.org/drawingml/2006/main">
-            <a:r>
-              <a:t>CONNECT</a:t>
-            </a:r>
-          </a:p>
-          <a:p xmlns:a="http://schemas.openxmlformats.org/drawingml/2006/main">
-            <a:r>
-              <a:t>Previous slide: Tell another person what the project needs.</a:t>
-            </a:r>
-          </a:p>
-          <a:p xmlns:a="http://schemas.openxmlformats.org/drawingml/2006/main">
+          <a:p>
+            <a:r>
+              <a:t>Explanation to give</a:t>
+            </a:r>
+          </a:p>
+          <a:p>
+            <a:r>
+              <a:t>Treat the README as instructions for someone opening the project for the first time. Name the files, setup requirements, entry notebook and exact order needed to reproduce the result.</a:t>
+            </a:r>
+          </a:p>
+          <a:p>
             <a:r>
               <a:t/>
             </a:r>
           </a:p>
-          <a:p xmlns:a="http://schemas.openxmlformats.org/drawingml/2006/main">
-            <a:r>
-              <a:t>EXPLAIN</a:t>
-            </a:r>
-          </a:p>
-          <a:p xmlns:a="http://schemas.openxmlformats.org/drawingml/2006/main">
+          <a:p>
+            <a:r>
+              <a:t>Worked illustration / lecturer answer</a:t>
+            </a:r>
+          </a:p>
+          <a:p>
+            <a:r>
+              <a:t>Replace “run the analysis” with “Open analysis.ipynb, place readings.csv in data/, restart the runtime and run all cells.” A useful repair comment names the failed step and the corrected filename.</a:t>
+            </a:r>
+          </a:p>
+          <a:p>
+            <a:r>
+              <a:t/>
+            </a:r>
+          </a:p>
+          <a:p>
+            <a:r>
+              <a:t>Misconception to address</a:t>
+            </a:r>
+          </a:p>
+          <a:p>
+            <a:r>
+              <a:t>A repository URL proves a location exists, not that the work runs or was submitted. Contribution claims should point to specific work, not only a count of commits.</a:t>
+            </a:r>
+          </a:p>
+          <a:p>
+            <a:r>
+              <a:t/>
+            </a:r>
+          </a:p>
+          <a:p>
+            <a:r>
+              <a:t>On this slide</a:t>
+            </a:r>
+          </a:p>
+          <a:p>
             <a:r>
               <a:t>Independent run check: Restart the session and follow your written instructions without relying on earlier variables. Record the first failure and its repair.</a:t>
             </a:r>
           </a:p>
-          <a:p xmlns:a="http://schemas.openxmlformats.org/drawingml/2006/main">
+          <a:p>
+            <a:r>
+              <a:t>Contribution evidence: A record of each person’s work, tied to files, commits or explanations. It does not require making a private repository public.</a:t>
+            </a:r>
+          </a:p>
+          <a:p>
             <a:r>
               <a:t/>
             </a:r>
           </a:p>
-          <a:p xmlns:a="http://schemas.openxmlformats.org/drawingml/2006/main">
-            <a:r>
-              <a:t>Contribution evidence: A record of each person’s work, tied to files, commits or explanations. It does not require making a private repository public.</a:t>
-            </a:r>
-          </a:p>
-          <a:p xmlns:a="http://schemas.openxmlformats.org/drawingml/2006/main">
-            <a:r>
-              <a:t/>
-            </a:r>
-          </a:p>
-          <a:p xmlns:a="http://schemas.openxmlformats.org/drawingml/2006/main">
-            <a:r>
-              <a:t>LECTURER CUE</a:t>
-            </a:r>
-          </a:p>
-          <a:p xmlns:a="http://schemas.openxmlformats.org/drawingml/2006/main">
-            <a:r>
-              <a:t>Explain the definitions before running or tracing the example. Point to the line or table row that produces each result.</a:t>
-            </a:r>
-          </a:p>
-          <a:p xmlns:a="http://schemas.openxmlformats.org/drawingml/2006/main">
-            <a:r>
-              <a:t/>
-            </a:r>
-          </a:p>
-          <a:p xmlns:a="http://schemas.openxmlformats.org/drawingml/2006/main">
-            <a:r>
-              <a:t>TEACHING MODE</a:t>
-            </a:r>
-          </a:p>
-          <a:p xmlns:a="http://schemas.openxmlformats.org/drawingml/2006/main">
-            <a:r>
-              <a:t>Demonstrate first. Read each new symbol aloud, trace the values and compare the shown output. Learners repeat worked examples individually after class.</a:t>
-            </a:r>
-          </a:p>
-          <a:p xmlns:a="http://schemas.openxmlformats.org/drawingml/2006/main">
-            <a:r>
-              <a:t/>
-            </a:r>
-          </a:p>
-          <a:p xmlns:a="http://schemas.openxmlformats.org/drawingml/2006/main">
-            <a:r>
-              <a:t>NEXT</a:t>
-            </a:r>
-          </a:p>
-          <a:p xmlns:a="http://schemas.openxmlformats.org/drawingml/2006/main">
-            <a:r>
-              <a:t>Useful feedback identifies an exact repair.</a:t>
-            </a:r>
-          </a:p>
-          <a:p xmlns:a="http://schemas.openxmlformats.org/drawingml/2006/main">
-            <a:r>
-              <a:t/>
-            </a:r>
-          </a:p>
-          <a:p xmlns:a="http://schemas.openxmlformats.org/drawingml/2006/main">
-            <a:r>
-              <a:t>REFERENCES</a:t>
-            </a:r>
-          </a:p>
-          <a:p xmlns:a="http://schemas.openxmlformats.org/drawingml/2006/main">
-            <a:r>
-              <a:t/>
+          <a:p>
+            <a:r>
+              <a:t>Continue to</a:t>
+            </a:r>
+          </a:p>
+          <a:p>
+            <a:r>
+              <a:t>Useful feedback identifies an exact repair</a:t>
             </a:r>
           </a:p>
         </p:txBody>
@@ -1865,7 +1695,7 @@
         <p:nvSpPr>
           <p:cNvPr id="4" name="Slide Number Placeholder 3"/>
           <p:cNvSpPr>
-            <a:spLocks xmlns:a="http://schemas.openxmlformats.org/drawingml/2006/main" noGrp="1"/>
+            <a:spLocks noGrp="1"/>
           </p:cNvSpPr>
           <p:nvPr>
             <p:ph type="sldNum" idx="5"/>
@@ -1873,21 +1703,21 @@
         </p:nvSpPr>
         <p:spPr/>
         <p:txBody>
-          <a:bodyPr xmlns:a="http://schemas.openxmlformats.org/drawingml/2006/main"/>
-          <a:lstStyle xmlns:a="http://schemas.openxmlformats.org/drawingml/2006/main"/>
-          <a:p xmlns:a="http://schemas.openxmlformats.org/drawingml/2006/main"/>
+          <a:bodyPr/>
+          <a:lstStyle/>
+          <a:p/>
         </p:txBody>
       </p:sp>
     </p:spTree>
   </p:cSld>
   <p:clrMapOvr>
-    <a:masterClrMapping xmlns:a="http://schemas.openxmlformats.org/drawingml/2006/main"/>
+    <a:masterClrMapping/>
   </p:clrMapOvr>
 </p:notes>
 </file>
 
 <file path=ppt/notesSlides/notesSlide17.xml><?xml version="1.0" encoding="utf-8"?>
-<p:notes xmlns:p="http://schemas.openxmlformats.org/presentationml/2006/main">
+<p:notes xmlns:a="http://schemas.openxmlformats.org/drawingml/2006/main" xmlns:p="http://schemas.openxmlformats.org/presentationml/2006/main">
   <p:cSld>
     <p:spTree>
       <p:nvGrpSpPr>
@@ -1896,13 +1726,13 @@
         <p:nvPr/>
       </p:nvGrpSpPr>
       <p:grpSpPr>
-        <a:xfrm xmlns:a="http://schemas.openxmlformats.org/drawingml/2006/main"/>
+        <a:xfrm/>
       </p:grpSpPr>
       <p:sp>
         <p:nvSpPr>
           <p:cNvPr id="2" name="Slide Image Placeholder 1"/>
           <p:cNvSpPr>
-            <a:spLocks xmlns:a="http://schemas.openxmlformats.org/drawingml/2006/main" noGrp="1"/>
+            <a:spLocks noGrp="1"/>
           </p:cNvSpPr>
           <p:nvPr>
             <p:ph type="sldImg" idx="0"/>
@@ -1914,7 +1744,7 @@
         <p:nvSpPr>
           <p:cNvPr id="3" name="Notes Placeholder 2"/>
           <p:cNvSpPr>
-            <a:spLocks xmlns:a="http://schemas.openxmlformats.org/drawingml/2006/main" noGrp="1"/>
+            <a:spLocks noGrp="1"/>
           </p:cNvSpPr>
           <p:nvPr>
             <p:ph type="body" idx="1"/>
@@ -1922,126 +1752,111 @@
         </p:nvSpPr>
         <p:spPr/>
         <p:txBody>
-          <a:bodyPr xmlns:a="http://schemas.openxmlformats.org/drawingml/2006/main"/>
-          <a:lstStyle xmlns:a="http://schemas.openxmlformats.org/drawingml/2006/main"/>
-          <a:p xmlns:a="http://schemas.openxmlformats.org/drawingml/2006/main">
-            <a:r>
-              <a:t>PURPOSE</a:t>
-            </a:r>
-          </a:p>
-          <a:p xmlns:a="http://schemas.openxmlformats.org/drawingml/2006/main">
+          <a:bodyPr/>
+          <a:lstStyle/>
+          <a:p>
             <a:r>
               <a:t>Useful feedback identifies an exact repair</a:t>
             </a:r>
           </a:p>
-          <a:p xmlns:a="http://schemas.openxmlformats.org/drawingml/2006/main">
+          <a:p>
+            <a:r>
+              <a:t>CML3112, Week 13, slide 17</a:t>
+            </a:r>
+          </a:p>
+          <a:p>
             <a:r>
               <a:t/>
             </a:r>
           </a:p>
-          <a:p xmlns:a="http://schemas.openxmlformats.org/drawingml/2006/main">
-            <a:r>
-              <a:t>CONNECT</a:t>
-            </a:r>
-          </a:p>
-          <a:p xmlns:a="http://schemas.openxmlformats.org/drawingml/2006/main">
-            <a:r>
-              <a:t>Previous slide: Run checks and contribution evidence.</a:t>
-            </a:r>
-          </a:p>
-          <a:p xmlns:a="http://schemas.openxmlformats.org/drawingml/2006/main">
+          <a:p>
+            <a:r>
+              <a:t>Explanation to give</a:t>
+            </a:r>
+          </a:p>
+          <a:p>
+            <a:r>
+              <a:t>Treat the README as instructions for someone opening the project for the first time. Name the files, setup requirements, entry notebook and exact order needed to reproduce the result.</a:t>
+            </a:r>
+          </a:p>
+          <a:p>
             <a:r>
               <a:t/>
             </a:r>
           </a:p>
-          <a:p xmlns:a="http://schemas.openxmlformats.org/drawingml/2006/main">
-            <a:r>
-              <a:t>EXPLAIN</a:t>
-            </a:r>
-          </a:p>
-          <a:p xmlns:a="http://schemas.openxmlformats.org/drawingml/2006/main">
+          <a:p>
+            <a:r>
+              <a:t>Worked illustration / lecturer answer</a:t>
+            </a:r>
+          </a:p>
+          <a:p>
+            <a:r>
+              <a:t>Replace “run the analysis” with “Open analysis.ipynb, place readings.csv in data/, restart the runtime and run all cells.” A useful repair comment names the failed step and the corrected filename.</a:t>
+            </a:r>
+          </a:p>
+          <a:p>
+            <a:r>
+              <a:t/>
+            </a:r>
+          </a:p>
+          <a:p>
+            <a:r>
+              <a:t>Misconception to address</a:t>
+            </a:r>
+          </a:p>
+          <a:p>
+            <a:r>
+              <a:t>A repository URL proves a location exists, not that the work runs or was submitted. Contribution claims should point to specific work, not only a count of commits.</a:t>
+            </a:r>
+          </a:p>
+          <a:p>
+            <a:r>
+              <a:t/>
+            </a:r>
+          </a:p>
+          <a:p>
+            <a:r>
+              <a:t>On this slide</a:t>
+            </a:r>
+          </a:p>
+          <a:p>
             <a:r>
               <a:t>Vague feedback: "It does not work."</a:t>
             </a:r>
           </a:p>
-          <a:p xmlns:a="http://schemas.openxmlformats.org/drawingml/2006/main">
+          <a:p>
             <a:r>
               <a:t/>
             </a:r>
           </a:p>
-          <a:p xmlns:a="http://schemas.openxmlformats.org/drawingml/2006/main">
+          <a:p>
             <a:r>
               <a:t>Useful feedback: "Step 2 names data.csv, but the supplied file is readings.csv."</a:t>
             </a:r>
           </a:p>
-          <a:p xmlns:a="http://schemas.openxmlformats.org/drawingml/2006/main">
+          <a:p>
             <a:r>
               <a:t/>
             </a:r>
           </a:p>
-          <a:p xmlns:a="http://schemas.openxmlformats.org/drawingml/2006/main">
+          <a:p>
             <a:r>
               <a:t>The repair is to make the instructions and actual filename agree.</a:t>
             </a:r>
           </a:p>
-          <a:p xmlns:a="http://schemas.openxmlformats.org/drawingml/2006/main">
+          <a:p>
             <a:r>
               <a:t/>
             </a:r>
           </a:p>
-          <a:p xmlns:a="http://schemas.openxmlformats.org/drawingml/2006/main">
-            <a:r>
-              <a:t>LECTURER CUE</a:t>
-            </a:r>
-          </a:p>
-          <a:p xmlns:a="http://schemas.openxmlformats.org/drawingml/2006/main">
-            <a:r>
-              <a:t>Model actionable feedback: “Step 2 names data.csv, but the supplied file is readings.csv; please make them match.”</a:t>
-            </a:r>
-          </a:p>
-          <a:p xmlns:a="http://schemas.openxmlformats.org/drawingml/2006/main">
-            <a:r>
-              <a:t/>
-            </a:r>
-          </a:p>
-          <a:p xmlns:a="http://schemas.openxmlformats.org/drawingml/2006/main">
-            <a:r>
-              <a:t>TEACHING MODE</a:t>
-            </a:r>
-          </a:p>
-          <a:p xmlns:a="http://schemas.openxmlformats.org/drawingml/2006/main">
-            <a:r>
-              <a:t>Demonstrate first. Read each new symbol aloud, trace the values and compare the shown output. Learners repeat worked examples individually after class.</a:t>
-            </a:r>
-          </a:p>
-          <a:p xmlns:a="http://schemas.openxmlformats.org/drawingml/2006/main">
-            <a:r>
-              <a:t/>
-            </a:r>
-          </a:p>
-          <a:p xmlns:a="http://schemas.openxmlformats.org/drawingml/2006/main">
-            <a:r>
-              <a:t>NEXT</a:t>
-            </a:r>
-          </a:p>
-          <a:p xmlns:a="http://schemas.openxmlformats.org/drawingml/2006/main">
-            <a:r>
-              <a:t>Revision example and answer.</a:t>
-            </a:r>
-          </a:p>
-          <a:p xmlns:a="http://schemas.openxmlformats.org/drawingml/2006/main">
-            <a:r>
-              <a:t/>
-            </a:r>
-          </a:p>
-          <a:p xmlns:a="http://schemas.openxmlformats.org/drawingml/2006/main">
-            <a:r>
-              <a:t>REFERENCES</a:t>
-            </a:r>
-          </a:p>
-          <a:p xmlns:a="http://schemas.openxmlformats.org/drawingml/2006/main">
-            <a:r>
-              <a:t/>
+          <a:p>
+            <a:r>
+              <a:t>Continue to</a:t>
+            </a:r>
+          </a:p>
+          <a:p>
+            <a:r>
+              <a:t>Revision example and answer</a:t>
             </a:r>
           </a:p>
         </p:txBody>
@@ -2050,7 +1865,7 @@
         <p:nvSpPr>
           <p:cNvPr id="4" name="Slide Number Placeholder 3"/>
           <p:cNvSpPr>
-            <a:spLocks xmlns:a="http://schemas.openxmlformats.org/drawingml/2006/main" noGrp="1"/>
+            <a:spLocks noGrp="1"/>
           </p:cNvSpPr>
           <p:nvPr>
             <p:ph type="sldNum" idx="5"/>
@@ -2058,21 +1873,21 @@
         </p:nvSpPr>
         <p:spPr/>
         <p:txBody>
-          <a:bodyPr xmlns:a="http://schemas.openxmlformats.org/drawingml/2006/main"/>
-          <a:lstStyle xmlns:a="http://schemas.openxmlformats.org/drawingml/2006/main"/>
-          <a:p xmlns:a="http://schemas.openxmlformats.org/drawingml/2006/main"/>
+          <a:bodyPr/>
+          <a:lstStyle/>
+          <a:p/>
         </p:txBody>
       </p:sp>
     </p:spTree>
   </p:cSld>
   <p:clrMapOvr>
-    <a:masterClrMapping xmlns:a="http://schemas.openxmlformats.org/drawingml/2006/main"/>
+    <a:masterClrMapping/>
   </p:clrMapOvr>
 </p:notes>
 </file>
 
 <file path=ppt/notesSlides/notesSlide18.xml><?xml version="1.0" encoding="utf-8"?>
-<p:notes xmlns:p="http://schemas.openxmlformats.org/presentationml/2006/main">
+<p:notes xmlns:a="http://schemas.openxmlformats.org/drawingml/2006/main" xmlns:p="http://schemas.openxmlformats.org/presentationml/2006/main">
   <p:cSld>
     <p:spTree>
       <p:nvGrpSpPr>
@@ -2081,13 +1896,13 @@
         <p:nvPr/>
       </p:nvGrpSpPr>
       <p:grpSpPr>
-        <a:xfrm xmlns:a="http://schemas.openxmlformats.org/drawingml/2006/main"/>
+        <a:xfrm/>
       </p:grpSpPr>
       <p:sp>
         <p:nvSpPr>
           <p:cNvPr id="2" name="Slide Image Placeholder 1"/>
           <p:cNvSpPr>
-            <a:spLocks xmlns:a="http://schemas.openxmlformats.org/drawingml/2006/main" noGrp="1"/>
+            <a:spLocks noGrp="1"/>
           </p:cNvSpPr>
           <p:nvPr>
             <p:ph type="sldImg" idx="0"/>
@@ -2099,7 +1914,7 @@
         <p:nvSpPr>
           <p:cNvPr id="3" name="Notes Placeholder 2"/>
           <p:cNvSpPr>
-            <a:spLocks xmlns:a="http://schemas.openxmlformats.org/drawingml/2006/main" noGrp="1"/>
+            <a:spLocks noGrp="1"/>
           </p:cNvSpPr>
           <p:nvPr>
             <p:ph type="body" idx="1"/>
@@ -2107,116 +1922,86 @@
         </p:nvSpPr>
         <p:spPr/>
         <p:txBody>
-          <a:bodyPr xmlns:a="http://schemas.openxmlformats.org/drawingml/2006/main"/>
-          <a:lstStyle xmlns:a="http://schemas.openxmlformats.org/drawingml/2006/main"/>
-          <a:p xmlns:a="http://schemas.openxmlformats.org/drawingml/2006/main">
-            <a:r>
-              <a:t>PURPOSE</a:t>
-            </a:r>
-          </a:p>
-          <a:p xmlns:a="http://schemas.openxmlformats.org/drawingml/2006/main">
+          <a:bodyPr/>
+          <a:lstStyle/>
+          <a:p>
             <a:r>
               <a:t>Revision example and answer</a:t>
             </a:r>
           </a:p>
-          <a:p xmlns:a="http://schemas.openxmlformats.org/drawingml/2006/main">
+          <a:p>
+            <a:r>
+              <a:t>CML3112, Week 13, slide 18</a:t>
+            </a:r>
+          </a:p>
+          <a:p>
             <a:r>
               <a:t/>
             </a:r>
           </a:p>
-          <a:p xmlns:a="http://schemas.openxmlformats.org/drawingml/2006/main">
-            <a:r>
-              <a:t>CONNECT</a:t>
-            </a:r>
-          </a:p>
-          <a:p xmlns:a="http://schemas.openxmlformats.org/drawingml/2006/main">
-            <a:r>
-              <a:t>Previous slide: Useful feedback identifies an exact repair.</a:t>
-            </a:r>
-          </a:p>
-          <a:p xmlns:a="http://schemas.openxmlformats.org/drawingml/2006/main">
+          <a:p>
+            <a:r>
+              <a:t>Explanation to give</a:t>
+            </a:r>
+          </a:p>
+          <a:p>
+            <a:r>
+              <a:t>Use the displayed example as a short individual revision question, then explain the reasoning behind its answer.</a:t>
+            </a:r>
+          </a:p>
+          <a:p>
             <a:r>
               <a:t/>
             </a:r>
           </a:p>
-          <a:p xmlns:a="http://schemas.openxmlformats.org/drawingml/2006/main">
-            <a:r>
-              <a:t>EXPLAIN</a:t>
-            </a:r>
-          </a:p>
-          <a:p xmlns:a="http://schemas.openxmlformats.org/drawingml/2006/main">
+          <a:p>
+            <a:r>
+              <a:t>Worked illustration / lecturer answer</a:t>
+            </a:r>
+          </a:p>
+          <a:p>
             <a:r>
               <a:t>Check: restart the notebook runtime and follow your README exactly, without using remembered variables.</a:t>
             </a:r>
           </a:p>
-          <a:p xmlns:a="http://schemas.openxmlformats.org/drawingml/2006/main">
+          <a:p>
             <a:r>
               <a:t/>
             </a:r>
           </a:p>
-          <a:p xmlns:a="http://schemas.openxmlformats.org/drawingml/2006/main">
+          <a:p>
             <a:r>
               <a:t>If Step 2 names data.csv but the file is readings.csv, correct the filename in the instructions. Run again from the beginning and record the successful result.</a:t>
             </a:r>
           </a:p>
-          <a:p xmlns:a="http://schemas.openxmlformats.org/drawingml/2006/main">
+          <a:p>
             <a:r>
               <a:t/>
             </a:r>
           </a:p>
-          <a:p xmlns:a="http://schemas.openxmlformats.org/drawingml/2006/main">
-            <a:r>
-              <a:t>LECTURER CUE</a:t>
-            </a:r>
-          </a:p>
-          <a:p xmlns:a="http://schemas.openxmlformats.org/drawingml/2006/main">
-            <a:r>
-              <a:t>Give silent thinking time, then let pairs discuss. Rotate who types. This is practice, not a graded quiz. Expected response: Revise that step and repeat. A claim that the notebook runs is supported by a fresh run, not by saved outputs alone.</a:t>
-            </a:r>
-          </a:p>
-          <a:p xmlns:a="http://schemas.openxmlformats.org/drawingml/2006/main">
+          <a:p>
+            <a:r>
+              <a:t>Misconception to address</a:t>
+            </a:r>
+          </a:p>
+          <a:p>
+            <a:r>
+              <a:t>Trace the operation that changes the value rather than accepting a memorised output. For notebook-state examples, specify which cell is repeated and whether the initialisation ran again.</a:t>
+            </a:r>
+          </a:p>
+          <a:p>
             <a:r>
               <a:t/>
             </a:r>
           </a:p>
-          <a:p xmlns:a="http://schemas.openxmlformats.org/drawingml/2006/main">
-            <a:r>
-              <a:t>TEACHING MODE</a:t>
-            </a:r>
-          </a:p>
-          <a:p xmlns:a="http://schemas.openxmlformats.org/drawingml/2006/main">
-            <a:r>
-              <a:t>Demonstrate first. Read each new symbol aloud, trace the values and compare the shown output. Learners repeat worked examples individually after class.</a:t>
-            </a:r>
-          </a:p>
-          <a:p xmlns:a="http://schemas.openxmlformats.org/drawingml/2006/main">
-            <a:r>
-              <a:t/>
-            </a:r>
-          </a:p>
-          <a:p xmlns:a="http://schemas.openxmlformats.org/drawingml/2006/main">
-            <a:r>
-              <a:t>NEXT</a:t>
-            </a:r>
-          </a:p>
-          <a:p xmlns:a="http://schemas.openxmlformats.org/drawingml/2006/main">
-            <a:r>
-              <a:t>Preparing for the assignment.</a:t>
-            </a:r>
-          </a:p>
-          <a:p xmlns:a="http://schemas.openxmlformats.org/drawingml/2006/main">
-            <a:r>
-              <a:t/>
-            </a:r>
-          </a:p>
-          <a:p xmlns:a="http://schemas.openxmlformats.org/drawingml/2006/main">
-            <a:r>
-              <a:t>REFERENCES</a:t>
-            </a:r>
-          </a:p>
-          <a:p xmlns:a="http://schemas.openxmlformats.org/drawingml/2006/main">
-            <a:r>
-              <a:t/>
+          <a:p>
+            <a:r>
+              <a:t>Continue to</a:t>
+            </a:r>
+          </a:p>
+          <a:p>
+            <a:r>
+              <a:t>Preparing for the assignment</a:t>
             </a:r>
           </a:p>
         </p:txBody>
@@ -2225,7 +2010,7 @@
         <p:nvSpPr>
           <p:cNvPr id="4" name="Slide Number Placeholder 3"/>
           <p:cNvSpPr>
-            <a:spLocks xmlns:a="http://schemas.openxmlformats.org/drawingml/2006/main" noGrp="1"/>
+            <a:spLocks noGrp="1"/>
           </p:cNvSpPr>
           <p:nvPr>
             <p:ph type="sldNum" idx="5"/>
@@ -2233,21 +2018,21 @@
         </p:nvSpPr>
         <p:spPr/>
         <p:txBody>
-          <a:bodyPr xmlns:a="http://schemas.openxmlformats.org/drawingml/2006/main"/>
-          <a:lstStyle xmlns:a="http://schemas.openxmlformats.org/drawingml/2006/main"/>
-          <a:p xmlns:a="http://schemas.openxmlformats.org/drawingml/2006/main"/>
+          <a:bodyPr/>
+          <a:lstStyle/>
+          <a:p/>
         </p:txBody>
       </p:sp>
     </p:spTree>
   </p:cSld>
   <p:clrMapOvr>
-    <a:masterClrMapping xmlns:a="http://schemas.openxmlformats.org/drawingml/2006/main"/>
+    <a:masterClrMapping/>
   </p:clrMapOvr>
 </p:notes>
 </file>
 
 <file path=ppt/notesSlides/notesSlide19.xml><?xml version="1.0" encoding="utf-8"?>
-<p:notes xmlns:p="http://schemas.openxmlformats.org/presentationml/2006/main">
+<p:notes xmlns:a="http://schemas.openxmlformats.org/drawingml/2006/main" xmlns:p="http://schemas.openxmlformats.org/presentationml/2006/main">
   <p:cSld>
     <p:spTree>
       <p:nvGrpSpPr>
@@ -2256,13 +2041,13 @@
         <p:nvPr/>
       </p:nvGrpSpPr>
       <p:grpSpPr>
-        <a:xfrm xmlns:a="http://schemas.openxmlformats.org/drawingml/2006/main"/>
+        <a:xfrm/>
       </p:grpSpPr>
       <p:sp>
         <p:nvSpPr>
           <p:cNvPr id="2" name="Slide Image Placeholder 1"/>
           <p:cNvSpPr>
-            <a:spLocks xmlns:a="http://schemas.openxmlformats.org/drawingml/2006/main" noGrp="1"/>
+            <a:spLocks noGrp="1"/>
           </p:cNvSpPr>
           <p:nvPr>
             <p:ph type="sldImg" idx="0"/>
@@ -2274,7 +2059,7 @@
         <p:nvSpPr>
           <p:cNvPr id="3" name="Notes Placeholder 2"/>
           <p:cNvSpPr>
-            <a:spLocks xmlns:a="http://schemas.openxmlformats.org/drawingml/2006/main" noGrp="1"/>
+            <a:spLocks noGrp="1"/>
           </p:cNvSpPr>
           <p:nvPr>
             <p:ph type="body" idx="1"/>
@@ -2282,136 +2067,121 @@
         </p:nvSpPr>
         <p:spPr/>
         <p:txBody>
-          <a:bodyPr xmlns:a="http://schemas.openxmlformats.org/drawingml/2006/main"/>
-          <a:lstStyle xmlns:a="http://schemas.openxmlformats.org/drawingml/2006/main"/>
-          <a:p xmlns:a="http://schemas.openxmlformats.org/drawingml/2006/main">
-            <a:r>
-              <a:t>PURPOSE</a:t>
-            </a:r>
-          </a:p>
-          <a:p xmlns:a="http://schemas.openxmlformats.org/drawingml/2006/main">
+          <a:bodyPr/>
+          <a:lstStyle/>
+          <a:p>
             <a:r>
               <a:t>Preparing for the assignment</a:t>
             </a:r>
           </a:p>
-          <a:p xmlns:a="http://schemas.openxmlformats.org/drawingml/2006/main">
+          <a:p>
+            <a:r>
+              <a:t>CML3112, Week 13, slide 19</a:t>
+            </a:r>
+          </a:p>
+          <a:p>
             <a:r>
               <a:t/>
             </a:r>
           </a:p>
-          <a:p xmlns:a="http://schemas.openxmlformats.org/drawingml/2006/main">
-            <a:r>
-              <a:t>CONNECT</a:t>
-            </a:r>
-          </a:p>
-          <a:p xmlns:a="http://schemas.openxmlformats.org/drawingml/2006/main">
-            <a:r>
-              <a:t>Previous slide: Revision example and answer.</a:t>
-            </a:r>
-          </a:p>
-          <a:p xmlns:a="http://schemas.openxmlformats.org/drawingml/2006/main">
+          <a:p>
+            <a:r>
+              <a:t>Explanation to give</a:t>
+            </a:r>
+          </a:p>
+          <a:p>
+            <a:r>
+              <a:t>Week 13 adds no new weekly assignment notebook. Use the time to make the existing project reproducible and prepare for the offline test.</a:t>
+            </a:r>
+          </a:p>
+          <a:p>
             <a:r>
               <a:t/>
             </a:r>
           </a:p>
-          <a:p xmlns:a="http://schemas.openxmlformats.org/drawingml/2006/main">
-            <a:r>
-              <a:t>EXPLAIN</a:t>
-            </a:r>
-          </a:p>
-          <a:p xmlns:a="http://schemas.openxmlformats.org/drawingml/2006/main">
+          <a:p>
+            <a:r>
+              <a:t>Worked illustration / lecturer answer</a:t>
+            </a:r>
+          </a:p>
+          <a:p>
+            <a:r>
+              <a:t>Open the project README, restart and follow its steps. Then rehearse locating and reopening the complete test notebook on the prepared offline computer.</a:t>
+            </a:r>
+          </a:p>
+          <a:p>
+            <a:r>
+              <a:t/>
+            </a:r>
+          </a:p>
+          <a:p>
+            <a:r>
+              <a:t>Misconception to address</a:t>
+            </a:r>
+          </a:p>
+          <a:p>
+            <a:r>
+              <a:t>Quiz 13 is a separate activity when activated. Do not invent an A13 upload or require students to submit an extra weekly report.</a:t>
+            </a:r>
+          </a:p>
+          <a:p>
+            <a:r>
+              <a:t/>
+            </a:r>
+          </a:p>
+          <a:p>
+            <a:r>
+              <a:t>On this slide</a:t>
+            </a:r>
+          </a:p>
+          <a:p>
             <a:r>
               <a:t>No new weekly assignment.</a:t>
             </a:r>
           </a:p>
-          <a:p xmlns:a="http://schemas.openxmlformats.org/drawingml/2006/main">
+          <a:p>
             <a:r>
               <a:t/>
             </a:r>
           </a:p>
-          <a:p xmlns:a="http://schemas.openxmlformats.org/drawingml/2006/main">
+          <a:p>
             <a:r>
               <a:t>Continue the official project deliverables and Week 13 quiz.</a:t>
             </a:r>
           </a:p>
-          <a:p xmlns:a="http://schemas.openxmlformats.org/drawingml/2006/main">
+          <a:p>
             <a:r>
               <a:t/>
             </a:r>
           </a:p>
-          <a:p xmlns:a="http://schemas.openxmlformats.org/drawingml/2006/main">
+          <a:p>
             <a:r>
               <a:t>Rehearse offline TEST2 saving and the published function interfaces before Week 14.</a:t>
             </a:r>
           </a:p>
-          <a:p xmlns:a="http://schemas.openxmlformats.org/drawingml/2006/main">
+          <a:p>
             <a:r>
               <a:t/>
             </a:r>
           </a:p>
-          <a:p xmlns:a="http://schemas.openxmlformats.org/drawingml/2006/main">
+          <a:p>
             <a:r>
               <a:t>Do not add an extra upload.</a:t>
             </a:r>
           </a:p>
-          <a:p xmlns:a="http://schemas.openxmlformats.org/drawingml/2006/main">
+          <a:p>
             <a:r>
               <a:t/>
             </a:r>
           </a:p>
-          <a:p xmlns:a="http://schemas.openxmlformats.org/drawingml/2006/main">
-            <a:r>
-              <a:t>LECTURER CUE</a:t>
-            </a:r>
-          </a:p>
-          <a:p xmlns:a="http://schemas.openxmlformats.org/drawingml/2006/main">
-            <a:r>
-              <a:t>No new weekly assignment. Continue the official project deliverables and Week 13 quiz. Rehearse offline TEST2 saving and the published function interfaces before Week 14. Do not add an extra upload.</a:t>
-            </a:r>
-          </a:p>
-          <a:p xmlns:a="http://schemas.openxmlformats.org/drawingml/2006/main">
-            <a:r>
-              <a:t/>
-            </a:r>
-          </a:p>
-          <a:p xmlns:a="http://schemas.openxmlformats.org/drawingml/2006/main">
-            <a:r>
-              <a:t>TEACHING MODE</a:t>
-            </a:r>
-          </a:p>
-          <a:p xmlns:a="http://schemas.openxmlformats.org/drawingml/2006/main">
-            <a:r>
-              <a:t>Demonstrate first. Read each new symbol aloud, trace the values and compare the shown output. Learners repeat worked examples individually after class.</a:t>
-            </a:r>
-          </a:p>
-          <a:p xmlns:a="http://schemas.openxmlformats.org/drawingml/2006/main">
-            <a:r>
-              <a:t/>
-            </a:r>
-          </a:p>
-          <a:p xmlns:a="http://schemas.openxmlformats.org/drawingml/2006/main">
-            <a:r>
-              <a:t>NEXT</a:t>
-            </a:r>
-          </a:p>
-          <a:p xmlns:a="http://schemas.openxmlformats.org/drawingml/2006/main">
-            <a:r>
-              <a:t>A reproducible handover.</a:t>
-            </a:r>
-          </a:p>
-          <a:p xmlns:a="http://schemas.openxmlformats.org/drawingml/2006/main">
-            <a:r>
-              <a:t/>
-            </a:r>
-          </a:p>
-          <a:p xmlns:a="http://schemas.openxmlformats.org/drawingml/2006/main">
-            <a:r>
-              <a:t>REFERENCES</a:t>
-            </a:r>
-          </a:p>
-          <a:p xmlns:a="http://schemas.openxmlformats.org/drawingml/2006/main">
-            <a:r>
-              <a:t/>
+          <a:p>
+            <a:r>
+              <a:t>Continue to</a:t>
+            </a:r>
+          </a:p>
+          <a:p>
+            <a:r>
+              <a:t>A reproducible handover</a:t>
             </a:r>
           </a:p>
         </p:txBody>
@@ -2420,7 +2190,7 @@
         <p:nvSpPr>
           <p:cNvPr id="4" name="Slide Number Placeholder 3"/>
           <p:cNvSpPr>
-            <a:spLocks xmlns:a="http://schemas.openxmlformats.org/drawingml/2006/main" noGrp="1"/>
+            <a:spLocks noGrp="1"/>
           </p:cNvSpPr>
           <p:nvPr>
             <p:ph type="sldNum" idx="5"/>
@@ -2428,21 +2198,21 @@
         </p:nvSpPr>
         <p:spPr/>
         <p:txBody>
-          <a:bodyPr xmlns:a="http://schemas.openxmlformats.org/drawingml/2006/main"/>
-          <a:lstStyle xmlns:a="http://schemas.openxmlformats.org/drawingml/2006/main"/>
-          <a:p xmlns:a="http://schemas.openxmlformats.org/drawingml/2006/main"/>
+          <a:bodyPr/>
+          <a:lstStyle/>
+          <a:p/>
         </p:txBody>
       </p:sp>
     </p:spTree>
   </p:cSld>
   <p:clrMapOvr>
-    <a:masterClrMapping xmlns:a="http://schemas.openxmlformats.org/drawingml/2006/main"/>
+    <a:masterClrMapping/>
   </p:clrMapOvr>
 </p:notes>
 </file>
 
 <file path=ppt/notesSlides/notesSlide2.xml><?xml version="1.0" encoding="utf-8"?>
-<p:notes xmlns:p="http://schemas.openxmlformats.org/presentationml/2006/main">
+<p:notes xmlns:a="http://schemas.openxmlformats.org/drawingml/2006/main" xmlns:p="http://schemas.openxmlformats.org/presentationml/2006/main">
   <p:cSld>
     <p:spTree>
       <p:nvGrpSpPr>
@@ -2451,13 +2221,13 @@
         <p:nvPr/>
       </p:nvGrpSpPr>
       <p:grpSpPr>
-        <a:xfrm xmlns:a="http://schemas.openxmlformats.org/drawingml/2006/main"/>
+        <a:xfrm/>
       </p:grpSpPr>
       <p:sp>
         <p:nvSpPr>
           <p:cNvPr id="2" name="Slide Image Placeholder 1"/>
           <p:cNvSpPr>
-            <a:spLocks xmlns:a="http://schemas.openxmlformats.org/drawingml/2006/main" noGrp="1"/>
+            <a:spLocks noGrp="1"/>
           </p:cNvSpPr>
           <p:nvPr>
             <p:ph type="sldImg" idx="0"/>
@@ -2469,7 +2239,7 @@
         <p:nvSpPr>
           <p:cNvPr id="3" name="Notes Placeholder 2"/>
           <p:cNvSpPr>
-            <a:spLocks xmlns:a="http://schemas.openxmlformats.org/drawingml/2006/main" noGrp="1"/>
+            <a:spLocks noGrp="1"/>
           </p:cNvSpPr>
           <p:nvPr>
             <p:ph type="body" idx="1"/>
@@ -2477,116 +2247,101 @@
         </p:nvSpPr>
         <p:spPr/>
         <p:txBody>
-          <a:bodyPr xmlns:a="http://schemas.openxmlformats.org/drawingml/2006/main"/>
-          <a:lstStyle xmlns:a="http://schemas.openxmlformats.org/drawingml/2006/main"/>
-          <a:p xmlns:a="http://schemas.openxmlformats.org/drawingml/2006/main">
-            <a:r>
-              <a:t>PURPOSE</a:t>
-            </a:r>
-          </a:p>
-          <a:p xmlns:a="http://schemas.openxmlformats.org/drawingml/2006/main">
+          <a:bodyPr/>
+          <a:lstStyle/>
+          <a:p>
             <a:r>
               <a:t>Today’s learning</a:t>
             </a:r>
           </a:p>
-          <a:p xmlns:a="http://schemas.openxmlformats.org/drawingml/2006/main">
+          <a:p>
+            <a:r>
+              <a:t>CML3112, Week 13, slide 2</a:t>
+            </a:r>
+          </a:p>
+          <a:p>
             <a:r>
               <a:t/>
             </a:r>
           </a:p>
-          <a:p xmlns:a="http://schemas.openxmlformats.org/drawingml/2006/main">
-            <a:r>
-              <a:t>CONNECT</a:t>
-            </a:r>
-          </a:p>
-          <a:p xmlns:a="http://schemas.openxmlformats.org/drawingml/2006/main">
-            <a:r>
-              <a:t>Previous slide: Making the project understandable and runnable.</a:t>
-            </a:r>
-          </a:p>
-          <a:p xmlns:a="http://schemas.openxmlformats.org/drawingml/2006/main">
+          <a:p>
+            <a:r>
+              <a:t>Explanation to give</a:t>
+            </a:r>
+          </a:p>
+          <a:p>
+            <a:r>
+              <a:t>The handover should reproduce the result using the files and instructions alone. Saved output is insufficient evidence.</a:t>
+            </a:r>
+          </a:p>
+          <a:p>
             <a:r>
               <a:t/>
             </a:r>
           </a:p>
-          <a:p xmlns:a="http://schemas.openxmlformats.org/drawingml/2006/main">
-            <a:r>
-              <a:t>EXPLAIN</a:t>
-            </a:r>
-          </a:p>
-          <a:p xmlns:a="http://schemas.openxmlformats.org/drawingml/2006/main">
+          <a:p>
+            <a:r>
+              <a:t>Worked illustration / lecturer answer</a:t>
+            </a:r>
+          </a:p>
+          <a:p>
+            <a:r>
+              <a:t>Restart, load the stated data and follow the README literally. A mismatch between a documented filename and the actual file is a handover defect to fix.</a:t>
+            </a:r>
+          </a:p>
+          <a:p>
+            <a:r>
+              <a:t/>
+            </a:r>
+          </a:p>
+          <a:p>
+            <a:r>
+              <a:t>Misconception to address</a:t>
+            </a:r>
+          </a:p>
+          <a:p>
+            <a:r>
+              <a:t>At the end, check the specific outcome shown here using a small previously demonstrated example. A completed file without an explanation is not evidence of understanding.</a:t>
+            </a:r>
+          </a:p>
+          <a:p>
+            <a:r>
+              <a:t/>
+            </a:r>
+          </a:p>
+          <a:p>
+            <a:r>
+              <a:t>On this slide</a:t>
+            </a:r>
+          </a:p>
+          <a:p>
             <a:r>
               <a:t>Run the project from a fresh session.</a:t>
             </a:r>
           </a:p>
-          <a:p xmlns:a="http://schemas.openxmlformats.org/drawingml/2006/main">
+          <a:p>
             <a:r>
               <a:t/>
             </a:r>
           </a:p>
-          <a:p xmlns:a="http://schemas.openxmlformats.org/drawingml/2006/main">
+          <a:p>
             <a:r>
               <a:t>Repair unclear run instructions using a fresh run.</a:t>
             </a:r>
           </a:p>
-          <a:p xmlns:a="http://schemas.openxmlformats.org/drawingml/2006/main">
+          <a:p>
             <a:r>
               <a:t/>
             </a:r>
           </a:p>
-          <a:p xmlns:a="http://schemas.openxmlformats.org/drawingml/2006/main">
-            <a:r>
-              <a:t>LECTURER CUE</a:t>
-            </a:r>
-          </a:p>
-          <a:p xmlns:a="http://schemas.openxmlformats.org/drawingml/2006/main">
-            <a:r>
-              <a:t>Ask learners to explain this goal in ordinary language. The first successful attempt matters more than covering optional extensions. Defer: Package refactoring, complex repository layout and extra tooling are optional. Keep a working simple notebook.</a:t>
-            </a:r>
-          </a:p>
-          <a:p xmlns:a="http://schemas.openxmlformats.org/drawingml/2006/main">
-            <a:r>
-              <a:t/>
-            </a:r>
-          </a:p>
-          <a:p xmlns:a="http://schemas.openxmlformats.org/drawingml/2006/main">
-            <a:r>
-              <a:t>TEACHING MODE</a:t>
-            </a:r>
-          </a:p>
-          <a:p xmlns:a="http://schemas.openxmlformats.org/drawingml/2006/main">
-            <a:r>
-              <a:t>Demonstrate first. Read each new symbol aloud, trace the values and compare the shown output. Learners repeat worked examples individually after class.</a:t>
-            </a:r>
-          </a:p>
-          <a:p xmlns:a="http://schemas.openxmlformats.org/drawingml/2006/main">
-            <a:r>
-              <a:t/>
-            </a:r>
-          </a:p>
-          <a:p xmlns:a="http://schemas.openxmlformats.org/drawingml/2006/main">
-            <a:r>
-              <a:t>NEXT</a:t>
-            </a:r>
-          </a:p>
-          <a:p xmlns:a="http://schemas.openxmlformats.org/drawingml/2006/main">
-            <a:r>
-              <a:t>Connection to the previous lesson.</a:t>
-            </a:r>
-          </a:p>
-          <a:p xmlns:a="http://schemas.openxmlformats.org/drawingml/2006/main">
-            <a:r>
-              <a:t/>
-            </a:r>
-          </a:p>
-          <a:p xmlns:a="http://schemas.openxmlformats.org/drawingml/2006/main">
-            <a:r>
-              <a:t>REFERENCES</a:t>
-            </a:r>
-          </a:p>
-          <a:p xmlns:a="http://schemas.openxmlformats.org/drawingml/2006/main">
-            <a:r>
-              <a:t/>
+          <a:p>
+            <a:r>
+              <a:t>Continue to</a:t>
+            </a:r>
+          </a:p>
+          <a:p>
+            <a:r>
+              <a:t>Connection to the previous lesson</a:t>
             </a:r>
           </a:p>
         </p:txBody>
@@ -2595,7 +2350,7 @@
         <p:nvSpPr>
           <p:cNvPr id="4" name="Slide Number Placeholder 3"/>
           <p:cNvSpPr>
-            <a:spLocks xmlns:a="http://schemas.openxmlformats.org/drawingml/2006/main" noGrp="1"/>
+            <a:spLocks noGrp="1"/>
           </p:cNvSpPr>
           <p:nvPr>
             <p:ph type="sldNum" idx="5"/>
@@ -2603,21 +2358,21 @@
         </p:nvSpPr>
         <p:spPr/>
         <p:txBody>
-          <a:bodyPr xmlns:a="http://schemas.openxmlformats.org/drawingml/2006/main"/>
-          <a:lstStyle xmlns:a="http://schemas.openxmlformats.org/drawingml/2006/main"/>
-          <a:p xmlns:a="http://schemas.openxmlformats.org/drawingml/2006/main"/>
+          <a:bodyPr/>
+          <a:lstStyle/>
+          <a:p/>
         </p:txBody>
       </p:sp>
     </p:spTree>
   </p:cSld>
   <p:clrMapOvr>
-    <a:masterClrMapping xmlns:a="http://schemas.openxmlformats.org/drawingml/2006/main"/>
+    <a:masterClrMapping/>
   </p:clrMapOvr>
 </p:notes>
 </file>
 
 <file path=ppt/notesSlides/notesSlide20.xml><?xml version="1.0" encoding="utf-8"?>
-<p:notes xmlns:p="http://schemas.openxmlformats.org/presentationml/2006/main">
+<p:notes xmlns:a="http://schemas.openxmlformats.org/drawingml/2006/main" xmlns:p="http://schemas.openxmlformats.org/presentationml/2006/main">
   <p:cSld>
     <p:spTree>
       <p:nvGrpSpPr>
@@ -2626,13 +2381,13 @@
         <p:nvPr/>
       </p:nvGrpSpPr>
       <p:grpSpPr>
-        <a:xfrm xmlns:a="http://schemas.openxmlformats.org/drawingml/2006/main"/>
+        <a:xfrm/>
       </p:grpSpPr>
       <p:sp>
         <p:nvSpPr>
           <p:cNvPr id="2" name="Slide Image Placeholder 1"/>
           <p:cNvSpPr>
-            <a:spLocks xmlns:a="http://schemas.openxmlformats.org/drawingml/2006/main" noGrp="1"/>
+            <a:spLocks noGrp="1"/>
           </p:cNvSpPr>
           <p:nvPr>
             <p:ph type="sldImg" idx="0"/>
@@ -2644,7 +2399,7 @@
         <p:nvSpPr>
           <p:cNvPr id="3" name="Notes Placeholder 2"/>
           <p:cNvSpPr>
-            <a:spLocks xmlns:a="http://schemas.openxmlformats.org/drawingml/2006/main" noGrp="1"/>
+            <a:spLocks noGrp="1"/>
           </p:cNvSpPr>
           <p:nvPr>
             <p:ph type="body" idx="1"/>
@@ -2652,136 +2407,121 @@
         </p:nvSpPr>
         <p:spPr/>
         <p:txBody>
-          <a:bodyPr xmlns:a="http://schemas.openxmlformats.org/drawingml/2006/main"/>
-          <a:lstStyle xmlns:a="http://schemas.openxmlformats.org/drawingml/2006/main"/>
-          <a:p xmlns:a="http://schemas.openxmlformats.org/drawingml/2006/main">
-            <a:r>
-              <a:t>PURPOSE</a:t>
-            </a:r>
-          </a:p>
-          <a:p xmlns:a="http://schemas.openxmlformats.org/drawingml/2006/main">
+          <a:bodyPr/>
+          <a:lstStyle/>
+          <a:p>
             <a:r>
               <a:t>A reproducible handover</a:t>
             </a:r>
           </a:p>
-          <a:p xmlns:a="http://schemas.openxmlformats.org/drawingml/2006/main">
+          <a:p>
+            <a:r>
+              <a:t>CML3112, Week 13, slide 20</a:t>
+            </a:r>
+          </a:p>
+          <a:p>
             <a:r>
               <a:t/>
             </a:r>
           </a:p>
-          <a:p xmlns:a="http://schemas.openxmlformats.org/drawingml/2006/main">
-            <a:r>
-              <a:t>CONNECT</a:t>
-            </a:r>
-          </a:p>
-          <a:p xmlns:a="http://schemas.openxmlformats.org/drawingml/2006/main">
-            <a:r>
-              <a:t>Previous slide: Preparing for the assignment.</a:t>
-            </a:r>
-          </a:p>
-          <a:p xmlns:a="http://schemas.openxmlformats.org/drawingml/2006/main">
+          <a:p>
+            <a:r>
+              <a:t>Explanation to give</a:t>
+            </a:r>
+          </a:p>
+          <a:p>
+            <a:r>
+              <a:t>A reproducible handover gives another person enough files and instructions to obtain the reported result from a fresh environment. Saved outputs can survive even when the code no longer produces them.</a:t>
+            </a:r>
+          </a:p>
+          <a:p>
             <a:r>
               <a:t/>
             </a:r>
           </a:p>
-          <a:p xmlns:a="http://schemas.openxmlformats.org/drawingml/2006/main">
-            <a:r>
-              <a:t>EXPLAIN</a:t>
-            </a:r>
-          </a:p>
-          <a:p xmlns:a="http://schemas.openxmlformats.org/drawingml/2006/main">
+          <a:p>
+            <a:r>
+              <a:t>Worked illustration / lecturer answer</a:t>
+            </a:r>
+          </a:p>
+          <a:p>
+            <a:r>
+              <a:t>Restart, load the documented data and run from the first cell. If a later cell relies on a deleted variable, the clean run reveals the missing step. Record the required Python libraries and versions.</a:t>
+            </a:r>
+          </a:p>
+          <a:p>
+            <a:r>
+              <a:t/>
+            </a:r>
+          </a:p>
+          <a:p>
+            <a:r>
+              <a:t>Misconception to address</a:t>
+            </a:r>
+          </a:p>
+          <a:p>
+            <a:r>
+              <a:t>Restarting the runtime clears variables; it does not necessarily restore deleted data files. Re-upload or locate the documented inputs before the fresh run.</a:t>
+            </a:r>
+          </a:p>
+          <a:p>
+            <a:r>
+              <a:t/>
+            </a:r>
+          </a:p>
+          <a:p>
+            <a:r>
+              <a:t>On this slide</a:t>
+            </a:r>
+          </a:p>
+          <a:p>
             <a:r>
               <a:t>An absolute path from your own computer will usually fail elsewhere.</a:t>
             </a:r>
           </a:p>
-          <a:p xmlns:a="http://schemas.openxmlformats.org/drawingml/2006/main">
+          <a:p>
             <a:r>
               <a:t/>
             </a:r>
           </a:p>
-          <a:p xmlns:a="http://schemas.openxmlformats.org/drawingml/2006/main">
+          <a:p>
             <a:r>
               <a:t>A relative path starts from the current working folder.</a:t>
             </a:r>
           </a:p>
-          <a:p xmlns:a="http://schemas.openxmlformats.org/drawingml/2006/main">
+          <a:p>
             <a:r>
               <a:t/>
             </a:r>
           </a:p>
-          <a:p xmlns:a="http://schemas.openxmlformats.org/drawingml/2006/main">
+          <a:p>
             <a:r>
               <a:t>Record dependencies and actual versions, and fix randomness where appropriate; identical results across all machines are not guaranteed by a seed alone.</a:t>
             </a:r>
           </a:p>
-          <a:p xmlns:a="http://schemas.openxmlformats.org/drawingml/2006/main">
+          <a:p>
             <a:r>
               <a:t/>
             </a:r>
           </a:p>
-          <a:p xmlns:a="http://schemas.openxmlformats.org/drawingml/2006/main">
+          <a:p>
             <a:r>
               <a:t>Captions should state a supported finding and its scope.</a:t>
             </a:r>
           </a:p>
-          <a:p xmlns:a="http://schemas.openxmlformats.org/drawingml/2006/main">
+          <a:p>
             <a:r>
               <a:t/>
             </a:r>
           </a:p>
-          <a:p xmlns:a="http://schemas.openxmlformats.org/drawingml/2006/main">
-            <a:r>
-              <a:t>LECTURER CUE</a:t>
-            </a:r>
-          </a:p>
-          <a:p xmlns:a="http://schemas.openxmlformats.org/drawingml/2006/main">
-            <a:r>
-              <a:t>Teach these concepts before the weekly quiz. Use changed numbers for practice. This slide supplies concepts, not the quiz key.</a:t>
-            </a:r>
-          </a:p>
-          <a:p xmlns:a="http://schemas.openxmlformats.org/drawingml/2006/main">
-            <a:r>
-              <a:t/>
-            </a:r>
-          </a:p>
-          <a:p xmlns:a="http://schemas.openxmlformats.org/drawingml/2006/main">
-            <a:r>
-              <a:t>TEACHING MODE</a:t>
-            </a:r>
-          </a:p>
-          <a:p xmlns:a="http://schemas.openxmlformats.org/drawingml/2006/main">
-            <a:r>
-              <a:t>Demonstrate first. Read each new symbol aloud, trace the values and compare the shown output. Learners repeat worked examples individually after class.</a:t>
-            </a:r>
-          </a:p>
-          <a:p xmlns:a="http://schemas.openxmlformats.org/drawingml/2006/main">
-            <a:r>
-              <a:t/>
-            </a:r>
-          </a:p>
-          <a:p xmlns:a="http://schemas.openxmlformats.org/drawingml/2006/main">
-            <a:r>
-              <a:t>NEXT</a:t>
-            </a:r>
-          </a:p>
-          <a:p xmlns:a="http://schemas.openxmlformats.org/drawingml/2006/main">
-            <a:r>
-              <a:t>A reproducible handover continued.</a:t>
-            </a:r>
-          </a:p>
-          <a:p xmlns:a="http://schemas.openxmlformats.org/drawingml/2006/main">
-            <a:r>
-              <a:t/>
-            </a:r>
-          </a:p>
-          <a:p xmlns:a="http://schemas.openxmlformats.org/drawingml/2006/main">
-            <a:r>
-              <a:t>REFERENCES</a:t>
-            </a:r>
-          </a:p>
-          <a:p xmlns:a="http://schemas.openxmlformats.org/drawingml/2006/main">
-            <a:r>
-              <a:t/>
+          <a:p>
+            <a:r>
+              <a:t>Continue to</a:t>
+            </a:r>
+          </a:p>
+          <a:p>
+            <a:r>
+              <a:t>A reproducible handover continued</a:t>
             </a:r>
           </a:p>
         </p:txBody>
@@ -2790,7 +2530,7 @@
         <p:nvSpPr>
           <p:cNvPr id="4" name="Slide Number Placeholder 3"/>
           <p:cNvSpPr>
-            <a:spLocks xmlns:a="http://schemas.openxmlformats.org/drawingml/2006/main" noGrp="1"/>
+            <a:spLocks noGrp="1"/>
           </p:cNvSpPr>
           <p:nvPr>
             <p:ph type="sldNum" idx="5"/>
@@ -2798,21 +2538,21 @@
         </p:nvSpPr>
         <p:spPr/>
         <p:txBody>
-          <a:bodyPr xmlns:a="http://schemas.openxmlformats.org/drawingml/2006/main"/>
-          <a:lstStyle xmlns:a="http://schemas.openxmlformats.org/drawingml/2006/main"/>
-          <a:p xmlns:a="http://schemas.openxmlformats.org/drawingml/2006/main"/>
+          <a:bodyPr/>
+          <a:lstStyle/>
+          <a:p/>
         </p:txBody>
       </p:sp>
     </p:spTree>
   </p:cSld>
   <p:clrMapOvr>
-    <a:masterClrMapping xmlns:a="http://schemas.openxmlformats.org/drawingml/2006/main"/>
+    <a:masterClrMapping/>
   </p:clrMapOvr>
 </p:notes>
 </file>
 
 <file path=ppt/notesSlides/notesSlide21.xml><?xml version="1.0" encoding="utf-8"?>
-<p:notes xmlns:p="http://schemas.openxmlformats.org/presentationml/2006/main">
+<p:notes xmlns:a="http://schemas.openxmlformats.org/drawingml/2006/main" xmlns:p="http://schemas.openxmlformats.org/presentationml/2006/main">
   <p:cSld>
     <p:spTree>
       <p:nvGrpSpPr>
@@ -2821,13 +2561,13 @@
         <p:nvPr/>
       </p:nvGrpSpPr>
       <p:grpSpPr>
-        <a:xfrm xmlns:a="http://schemas.openxmlformats.org/drawingml/2006/main"/>
+        <a:xfrm/>
       </p:grpSpPr>
       <p:sp>
         <p:nvSpPr>
           <p:cNvPr id="2" name="Slide Image Placeholder 1"/>
           <p:cNvSpPr>
-            <a:spLocks xmlns:a="http://schemas.openxmlformats.org/drawingml/2006/main" noGrp="1"/>
+            <a:spLocks noGrp="1"/>
           </p:cNvSpPr>
           <p:nvPr>
             <p:ph type="sldImg" idx="0"/>
@@ -2839,7 +2579,7 @@
         <p:nvSpPr>
           <p:cNvPr id="3" name="Notes Placeholder 2"/>
           <p:cNvSpPr>
-            <a:spLocks xmlns:a="http://schemas.openxmlformats.org/drawingml/2006/main" noGrp="1"/>
+            <a:spLocks noGrp="1"/>
           </p:cNvSpPr>
           <p:nvPr>
             <p:ph type="body" idx="1"/>
@@ -2847,106 +2587,91 @@
         </p:nvSpPr>
         <p:spPr/>
         <p:txBody>
-          <a:bodyPr xmlns:a="http://schemas.openxmlformats.org/drawingml/2006/main"/>
-          <a:lstStyle xmlns:a="http://schemas.openxmlformats.org/drawingml/2006/main"/>
-          <a:p xmlns:a="http://schemas.openxmlformats.org/drawingml/2006/main">
-            <a:r>
-              <a:t>PURPOSE</a:t>
-            </a:r>
-          </a:p>
-          <a:p xmlns:a="http://schemas.openxmlformats.org/drawingml/2006/main">
+          <a:bodyPr/>
+          <a:lstStyle/>
+          <a:p>
             <a:r>
               <a:t>A reproducible handover continued</a:t>
             </a:r>
           </a:p>
-          <a:p xmlns:a="http://schemas.openxmlformats.org/drawingml/2006/main">
+          <a:p>
+            <a:r>
+              <a:t>CML3112, Week 13, slide 21</a:t>
+            </a:r>
+          </a:p>
+          <a:p>
             <a:r>
               <a:t/>
             </a:r>
           </a:p>
-          <a:p xmlns:a="http://schemas.openxmlformats.org/drawingml/2006/main">
-            <a:r>
-              <a:t>CONNECT</a:t>
-            </a:r>
-          </a:p>
-          <a:p xmlns:a="http://schemas.openxmlformats.org/drawingml/2006/main">
-            <a:r>
-              <a:t>Previous slide: A reproducible handover.</a:t>
-            </a:r>
-          </a:p>
-          <a:p xmlns:a="http://schemas.openxmlformats.org/drawingml/2006/main">
+          <a:p>
+            <a:r>
+              <a:t>Explanation to give</a:t>
+            </a:r>
+          </a:p>
+          <a:p>
+            <a:r>
+              <a:t>A reproducible handover gives another person enough files and instructions to obtain the reported result from a fresh environment. Saved outputs can survive even when the code no longer produces them.</a:t>
+            </a:r>
+          </a:p>
+          <a:p>
             <a:r>
               <a:t/>
             </a:r>
           </a:p>
-          <a:p xmlns:a="http://schemas.openxmlformats.org/drawingml/2006/main">
-            <a:r>
-              <a:t>EXPLAIN</a:t>
-            </a:r>
-          </a:p>
-          <a:p xmlns:a="http://schemas.openxmlformats.org/drawingml/2006/main">
+          <a:p>
+            <a:r>
+              <a:t>Worked illustration / lecturer answer</a:t>
+            </a:r>
+          </a:p>
+          <a:p>
+            <a:r>
+              <a:t>Restart, load the documented data and run from the first cell. If a later cell relies on a deleted variable, the clean run reveals the missing step. Record the required Python libraries and versions.</a:t>
+            </a:r>
+          </a:p>
+          <a:p>
+            <a:r>
+              <a:t/>
+            </a:r>
+          </a:p>
+          <a:p>
+            <a:r>
+              <a:t>Misconception to address</a:t>
+            </a:r>
+          </a:p>
+          <a:p>
+            <a:r>
+              <a:t>Restarting the runtime clears variables; it does not necessarily restore deleted data files. Re-upload or locate the documented inputs before the fresh run.</a:t>
+            </a:r>
+          </a:p>
+          <a:p>
+            <a:r>
+              <a:t/>
+            </a:r>
+          </a:p>
+          <a:p>
+            <a:r>
+              <a:t>On this slide</a:t>
+            </a:r>
+          </a:p>
+          <a:p>
             <a:r>
               <a:t>Remove conflicting cell assignments and verify a fresh run before submission.</a:t>
             </a:r>
           </a:p>
-          <a:p xmlns:a="http://schemas.openxmlformats.org/drawingml/2006/main">
+          <a:p>
             <a:r>
               <a:t/>
             </a:r>
           </a:p>
-          <a:p xmlns:a="http://schemas.openxmlformats.org/drawingml/2006/main">
-            <a:r>
-              <a:t>LECTURER CUE</a:t>
-            </a:r>
-          </a:p>
-          <a:p xmlns:a="http://schemas.openxmlformats.org/drawingml/2006/main">
-            <a:r>
-              <a:t>Teach these concepts before the weekly quiz. Use changed numbers for practice. This slide supplies concepts, not the quiz key.</a:t>
-            </a:r>
-          </a:p>
-          <a:p xmlns:a="http://schemas.openxmlformats.org/drawingml/2006/main">
-            <a:r>
-              <a:t/>
-            </a:r>
-          </a:p>
-          <a:p xmlns:a="http://schemas.openxmlformats.org/drawingml/2006/main">
-            <a:r>
-              <a:t>TEACHING MODE</a:t>
-            </a:r>
-          </a:p>
-          <a:p xmlns:a="http://schemas.openxmlformats.org/drawingml/2006/main">
-            <a:r>
-              <a:t>Demonstrate first. Read each new symbol aloud, trace the values and compare the shown output. Learners repeat worked examples individually after class.</a:t>
-            </a:r>
-          </a:p>
-          <a:p xmlns:a="http://schemas.openxmlformats.org/drawingml/2006/main">
-            <a:r>
-              <a:t/>
-            </a:r>
-          </a:p>
-          <a:p xmlns:a="http://schemas.openxmlformats.org/drawingml/2006/main">
-            <a:r>
-              <a:t>NEXT</a:t>
-            </a:r>
-          </a:p>
-          <a:p xmlns:a="http://schemas.openxmlformats.org/drawingml/2006/main">
-            <a:r>
-              <a:t>Project preparation.</a:t>
-            </a:r>
-          </a:p>
-          <a:p xmlns:a="http://schemas.openxmlformats.org/drawingml/2006/main">
-            <a:r>
-              <a:t/>
-            </a:r>
-          </a:p>
-          <a:p xmlns:a="http://schemas.openxmlformats.org/drawingml/2006/main">
-            <a:r>
-              <a:t>REFERENCES</a:t>
-            </a:r>
-          </a:p>
-          <a:p xmlns:a="http://schemas.openxmlformats.org/drawingml/2006/main">
-            <a:r>
-              <a:t/>
+          <a:p>
+            <a:r>
+              <a:t>Continue to</a:t>
+            </a:r>
+          </a:p>
+          <a:p>
+            <a:r>
+              <a:t>Project preparation</a:t>
             </a:r>
           </a:p>
         </p:txBody>
@@ -2955,7 +2680,7 @@
         <p:nvSpPr>
           <p:cNvPr id="4" name="Slide Number Placeholder 3"/>
           <p:cNvSpPr>
-            <a:spLocks xmlns:a="http://schemas.openxmlformats.org/drawingml/2006/main" noGrp="1"/>
+            <a:spLocks noGrp="1"/>
           </p:cNvSpPr>
           <p:nvPr>
             <p:ph type="sldNum" idx="5"/>
@@ -2963,21 +2688,21 @@
         </p:nvSpPr>
         <p:spPr/>
         <p:txBody>
-          <a:bodyPr xmlns:a="http://schemas.openxmlformats.org/drawingml/2006/main"/>
-          <a:lstStyle xmlns:a="http://schemas.openxmlformats.org/drawingml/2006/main"/>
-          <a:p xmlns:a="http://schemas.openxmlformats.org/drawingml/2006/main"/>
+          <a:bodyPr/>
+          <a:lstStyle/>
+          <a:p/>
         </p:txBody>
       </p:sp>
     </p:spTree>
   </p:cSld>
   <p:clrMapOvr>
-    <a:masterClrMapping xmlns:a="http://schemas.openxmlformats.org/drawingml/2006/main"/>
+    <a:masterClrMapping/>
   </p:clrMapOvr>
 </p:notes>
 </file>
 
 <file path=ppt/notesSlides/notesSlide22.xml><?xml version="1.0" encoding="utf-8"?>
-<p:notes xmlns:p="http://schemas.openxmlformats.org/presentationml/2006/main">
+<p:notes xmlns:a="http://schemas.openxmlformats.org/drawingml/2006/main" xmlns:p="http://schemas.openxmlformats.org/presentationml/2006/main">
   <p:cSld>
     <p:spTree>
       <p:nvGrpSpPr>
@@ -2986,13 +2711,13 @@
         <p:nvPr/>
       </p:nvGrpSpPr>
       <p:grpSpPr>
-        <a:xfrm xmlns:a="http://schemas.openxmlformats.org/drawingml/2006/main"/>
+        <a:xfrm/>
       </p:grpSpPr>
       <p:sp>
         <p:nvSpPr>
           <p:cNvPr id="2" name="Slide Image Placeholder 1"/>
           <p:cNvSpPr>
-            <a:spLocks xmlns:a="http://schemas.openxmlformats.org/drawingml/2006/main" noGrp="1"/>
+            <a:spLocks noGrp="1"/>
           </p:cNvSpPr>
           <p:nvPr>
             <p:ph type="sldImg" idx="0"/>
@@ -3004,7 +2729,7 @@
         <p:nvSpPr>
           <p:cNvPr id="3" name="Notes Placeholder 2"/>
           <p:cNvSpPr>
-            <a:spLocks xmlns:a="http://schemas.openxmlformats.org/drawingml/2006/main" noGrp="1"/>
+            <a:spLocks noGrp="1"/>
           </p:cNvSpPr>
           <p:nvPr>
             <p:ph type="body" idx="1"/>
@@ -3012,136 +2737,121 @@
         </p:nvSpPr>
         <p:spPr/>
         <p:txBody>
-          <a:bodyPr xmlns:a="http://schemas.openxmlformats.org/drawingml/2006/main"/>
-          <a:lstStyle xmlns:a="http://schemas.openxmlformats.org/drawingml/2006/main"/>
-          <a:p xmlns:a="http://schemas.openxmlformats.org/drawingml/2006/main">
-            <a:r>
-              <a:t>PURPOSE</a:t>
-            </a:r>
-          </a:p>
-          <a:p xmlns:a="http://schemas.openxmlformats.org/drawingml/2006/main">
+          <a:bodyPr/>
+          <a:lstStyle/>
+          <a:p>
             <a:r>
               <a:t>Project preparation</a:t>
             </a:r>
           </a:p>
-          <a:p xmlns:a="http://schemas.openxmlformats.org/drawingml/2006/main">
+          <a:p>
+            <a:r>
+              <a:t>CML3112, Week 13, slide 22</a:t>
+            </a:r>
+          </a:p>
+          <a:p>
             <a:r>
               <a:t/>
             </a:r>
           </a:p>
-          <a:p xmlns:a="http://schemas.openxmlformats.org/drawingml/2006/main">
-            <a:r>
-              <a:t>CONNECT</a:t>
-            </a:r>
-          </a:p>
-          <a:p xmlns:a="http://schemas.openxmlformats.org/drawingml/2006/main">
-            <a:r>
-              <a:t>Previous slide: A reproducible handover continued.</a:t>
-            </a:r>
-          </a:p>
-          <a:p xmlns:a="http://schemas.openxmlformats.org/drawingml/2006/main">
+          <a:p>
+            <a:r>
+              <a:t>Explanation to give</a:t>
+            </a:r>
+          </a:p>
+          <a:p>
+            <a:r>
+              <a:t>Make contribution evidence specific enough to check. A seed records the starting state of random choices; a contribution log records who produced and explained which work.</a:t>
+            </a:r>
+          </a:p>
+          <a:p>
             <a:r>
               <a:t/>
             </a:r>
           </a:p>
-          <a:p xmlns:a="http://schemas.openxmlformats.org/drawingml/2006/main">
-            <a:r>
-              <a:t>EXPLAIN</a:t>
-            </a:r>
-          </a:p>
-          <a:p xmlns:a="http://schemas.openxmlformats.org/drawingml/2006/main">
+          <a:p>
+            <a:r>
+              <a:t>Worked illustration / lecturer answer</a:t>
+            </a:r>
+          </a:p>
+          <a:p>
+            <a:r>
+              <a:t>Name a file, function or chart and the decision behind it. Match that entry to meaningful repository history. Disclose AI assistance according to the assessment policy.</a:t>
+            </a:r>
+          </a:p>
+          <a:p>
+            <a:r>
+              <a:t/>
+            </a:r>
+          </a:p>
+          <a:p>
+            <a:r>
+              <a:t>Misconception to address</a:t>
+            </a:r>
+          </a:p>
+          <a:p>
+            <a:r>
+              <a:t>Many commits do not necessarily mean substantial work, and a seed does not establish accuracy. Both are supporting evidence, not replacements for the analysis.</a:t>
+            </a:r>
+          </a:p>
+          <a:p>
+            <a:r>
+              <a:t/>
+            </a:r>
+          </a:p>
+          <a:p>
+            <a:r>
+              <a:t>On this slide</a:t>
+            </a:r>
+          </a:p>
+          <a:p>
             <a:r>
               <a:t>Use the published machine learning project brief.</a:t>
             </a:r>
           </a:p>
-          <a:p xmlns:a="http://schemas.openxmlformats.org/drawingml/2006/main">
+          <a:p>
             <a:r>
               <a:t/>
             </a:r>
           </a:p>
-          <a:p xmlns:a="http://schemas.openxmlformats.org/drawingml/2006/main">
+          <a:p>
             <a:r>
               <a:t>Build the evidence gradually in your project notebook.</a:t>
             </a:r>
           </a:p>
-          <a:p xmlns:a="http://schemas.openxmlformats.org/drawingml/2006/main">
+          <a:p>
             <a:r>
               <a:t/>
             </a:r>
           </a:p>
-          <a:p xmlns:a="http://schemas.openxmlformats.org/drawingml/2006/main">
+          <a:p>
             <a:r>
               <a:t>Keep raw data, labelled charts, run instructions and individual contributions.</a:t>
             </a:r>
           </a:p>
-          <a:p xmlns:a="http://schemas.openxmlformats.org/drawingml/2006/main">
+          <a:p>
             <a:r>
               <a:t/>
             </a:r>
           </a:p>
-          <a:p xmlns:a="http://schemas.openxmlformats.org/drawingml/2006/main">
+          <a:p>
             <a:r>
               <a:t>Published deadline: 15 Dec 2026, 11:00 Kampala</a:t>
             </a:r>
           </a:p>
-          <a:p xmlns:a="http://schemas.openxmlformats.org/drawingml/2006/main">
+          <a:p>
             <a:r>
               <a:t/>
             </a:r>
           </a:p>
-          <a:p xmlns:a="http://schemas.openxmlformats.org/drawingml/2006/main">
-            <a:r>
-              <a:t>LECTURER CUE</a:t>
-            </a:r>
-          </a:p>
-          <a:p xmlns:a="http://schemas.openxmlformats.org/drawingml/2006/main">
-            <a:r>
-              <a:t>Explain the released brief now. Confirm its grading-release checks before assigning it. Avoid treating weekly practice as a substitute for the project evidence. The project brief remains authoritative.</a:t>
-            </a:r>
-          </a:p>
-          <a:p xmlns:a="http://schemas.openxmlformats.org/drawingml/2006/main">
-            <a:r>
-              <a:t/>
-            </a:r>
-          </a:p>
-          <a:p xmlns:a="http://schemas.openxmlformats.org/drawingml/2006/main">
-            <a:r>
-              <a:t>TEACHING MODE</a:t>
-            </a:r>
-          </a:p>
-          <a:p xmlns:a="http://schemas.openxmlformats.org/drawingml/2006/main">
-            <a:r>
-              <a:t>Demonstrate first. Read each new symbol aloud, trace the values and compare the shown output. Learners repeat worked examples individually after class.</a:t>
-            </a:r>
-          </a:p>
-          <a:p xmlns:a="http://schemas.openxmlformats.org/drawingml/2006/main">
-            <a:r>
-              <a:t/>
-            </a:r>
-          </a:p>
-          <a:p xmlns:a="http://schemas.openxmlformats.org/drawingml/2006/main">
-            <a:r>
-              <a:t>NEXT</a:t>
-            </a:r>
-          </a:p>
-          <a:p xmlns:a="http://schemas.openxmlformats.org/drawingml/2006/main">
-            <a:r>
-              <a:t>Week 13 quiz.</a:t>
-            </a:r>
-          </a:p>
-          <a:p xmlns:a="http://schemas.openxmlformats.org/drawingml/2006/main">
-            <a:r>
-              <a:t/>
-            </a:r>
-          </a:p>
-          <a:p xmlns:a="http://schemas.openxmlformats.org/drawingml/2006/main">
-            <a:r>
-              <a:t>REFERENCES</a:t>
-            </a:r>
-          </a:p>
-          <a:p xmlns:a="http://schemas.openxmlformats.org/drawingml/2006/main">
-            <a:r>
-              <a:t/>
+          <a:p>
+            <a:r>
+              <a:t>Continue to</a:t>
+            </a:r>
+          </a:p>
+          <a:p>
+            <a:r>
+              <a:t>Week 13 quiz</a:t>
             </a:r>
           </a:p>
         </p:txBody>
@@ -3150,7 +2860,7 @@
         <p:nvSpPr>
           <p:cNvPr id="4" name="Slide Number Placeholder 3"/>
           <p:cNvSpPr>
-            <a:spLocks xmlns:a="http://schemas.openxmlformats.org/drawingml/2006/main" noGrp="1"/>
+            <a:spLocks noGrp="1"/>
           </p:cNvSpPr>
           <p:nvPr>
             <p:ph type="sldNum" idx="5"/>
@@ -3158,21 +2868,21 @@
         </p:nvSpPr>
         <p:spPr/>
         <p:txBody>
-          <a:bodyPr xmlns:a="http://schemas.openxmlformats.org/drawingml/2006/main"/>
-          <a:lstStyle xmlns:a="http://schemas.openxmlformats.org/drawingml/2006/main"/>
-          <a:p xmlns:a="http://schemas.openxmlformats.org/drawingml/2006/main"/>
+          <a:bodyPr/>
+          <a:lstStyle/>
+          <a:p/>
         </p:txBody>
       </p:sp>
     </p:spTree>
   </p:cSld>
   <p:clrMapOvr>
-    <a:masterClrMapping xmlns:a="http://schemas.openxmlformats.org/drawingml/2006/main"/>
+    <a:masterClrMapping/>
   </p:clrMapOvr>
 </p:notes>
 </file>
 
 <file path=ppt/notesSlides/notesSlide23.xml><?xml version="1.0" encoding="utf-8"?>
-<p:notes xmlns:p="http://schemas.openxmlformats.org/presentationml/2006/main">
+<p:notes xmlns:a="http://schemas.openxmlformats.org/drawingml/2006/main" xmlns:p="http://schemas.openxmlformats.org/presentationml/2006/main">
   <p:cSld>
     <p:spTree>
       <p:nvGrpSpPr>
@@ -3181,13 +2891,13 @@
         <p:nvPr/>
       </p:nvGrpSpPr>
       <p:grpSpPr>
-        <a:xfrm xmlns:a="http://schemas.openxmlformats.org/drawingml/2006/main"/>
+        <a:xfrm/>
       </p:grpSpPr>
       <p:sp>
         <p:nvSpPr>
           <p:cNvPr id="2" name="Slide Image Placeholder 1"/>
           <p:cNvSpPr>
-            <a:spLocks xmlns:a="http://schemas.openxmlformats.org/drawingml/2006/main" noGrp="1"/>
+            <a:spLocks noGrp="1"/>
           </p:cNvSpPr>
           <p:nvPr>
             <p:ph type="sldImg" idx="0"/>
@@ -3199,7 +2909,7 @@
         <p:nvSpPr>
           <p:cNvPr id="3" name="Notes Placeholder 2"/>
           <p:cNvSpPr>
-            <a:spLocks xmlns:a="http://schemas.openxmlformats.org/drawingml/2006/main" noGrp="1"/>
+            <a:spLocks noGrp="1"/>
           </p:cNvSpPr>
           <p:nvPr>
             <p:ph type="body" idx="1"/>
@@ -3207,136 +2917,121 @@
         </p:nvSpPr>
         <p:spPr/>
         <p:txBody>
-          <a:bodyPr xmlns:a="http://schemas.openxmlformats.org/drawingml/2006/main"/>
-          <a:lstStyle xmlns:a="http://schemas.openxmlformats.org/drawingml/2006/main"/>
-          <a:p xmlns:a="http://schemas.openxmlformats.org/drawingml/2006/main">
-            <a:r>
-              <a:t>PURPOSE</a:t>
-            </a:r>
-          </a:p>
-          <a:p xmlns:a="http://schemas.openxmlformats.org/drawingml/2006/main">
+          <a:bodyPr/>
+          <a:lstStyle/>
+          <a:p>
             <a:r>
               <a:t>Week 13 quiz</a:t>
             </a:r>
           </a:p>
-          <a:p xmlns:a="http://schemas.openxmlformats.org/drawingml/2006/main">
+          <a:p>
+            <a:r>
+              <a:t>CML3112, Week 13, slide 23</a:t>
+            </a:r>
+          </a:p>
+          <a:p>
             <a:r>
               <a:t/>
             </a:r>
           </a:p>
-          <a:p xmlns:a="http://schemas.openxmlformats.org/drawingml/2006/main">
-            <a:r>
-              <a:t>CONNECT</a:t>
-            </a:r>
-          </a:p>
-          <a:p xmlns:a="http://schemas.openxmlformats.org/drawingml/2006/main">
-            <a:r>
-              <a:t>Previous slide: Project preparation.</a:t>
-            </a:r>
-          </a:p>
-          <a:p xmlns:a="http://schemas.openxmlformats.org/drawingml/2006/main">
+          <a:p>
+            <a:r>
+              <a:t>Explanation to give</a:t>
+            </a:r>
+          </a:p>
+          <a:p>
+            <a:r>
+              <a:t>This is the CML3112 Week 1 quiz. The student link opens the response form; it does not activate its window. In Quiz Controls use open_W1_CML3112 when ready and read the logged closing time.</a:t>
+            </a:r>
+          </a:p>
+          <a:p>
             <a:r>
               <a:t/>
             </a:r>
           </a:p>
-          <a:p xmlns:a="http://schemas.openxmlformats.org/drawingml/2006/main">
-            <a:r>
-              <a:t>EXPLAIN</a:t>
-            </a:r>
-          </a:p>
-          <a:p xmlns:a="http://schemas.openxmlformats.org/drawingml/2006/main">
+          <a:p>
+            <a:r>
+              <a:t>Worked illustration / lecturer answer</a:t>
+            </a:r>
+          </a:p>
+          <a:p>
+            <a:r>
+              <a:t>Explain the distinction between the expected answering time and availability: five minutes of questions can still be available for 24 hours after activation. Enter the learner’s own Student Registration Number and use the registered Google account.</a:t>
+            </a:r>
+          </a:p>
+          <a:p>
+            <a:r>
+              <a:t/>
+            </a:r>
+          </a:p>
+          <a:p>
+            <a:r>
+              <a:t>Misconception to address</a:t>
+            </a:r>
+          </a:p>
+          <a:p>
+            <a:r>
+              <a:t>Read the exact live cutoff before announcing it. Do not promise a new attempt to somebody who already submitted. Quiz catch-up and assignment uploads are separate forms.</a:t>
+            </a:r>
+          </a:p>
+          <a:p>
+            <a:r>
+              <a:t/>
+            </a:r>
+          </a:p>
+          <a:p>
+            <a:r>
+              <a:t>On this slide</a:t>
+            </a:r>
+          </a:p>
+          <a:p>
             <a:r>
               <a:t>Answer individually after the lecturer activates the quiz.</a:t>
             </a:r>
           </a:p>
-          <a:p xmlns:a="http://schemas.openxmlformats.org/drawingml/2006/main">
+          <a:p>
             <a:r>
               <a:t/>
             </a:r>
           </a:p>
-          <a:p xmlns:a="http://schemas.openxmlformats.org/drawingml/2006/main">
+          <a:p>
             <a:r>
               <a:t>Available for 24 hours from activation.</a:t>
             </a:r>
           </a:p>
-          <a:p xmlns:a="http://schemas.openxmlformats.org/drawingml/2006/main">
+          <a:p>
             <a:r>
               <a:t/>
             </a:r>
           </a:p>
-          <a:p xmlns:a="http://schemas.openxmlformats.org/drawingml/2006/main">
+          <a:p>
             <a:r>
               <a:t>Use your Student Registration Number and registered account.</a:t>
             </a:r>
           </a:p>
-          <a:p xmlns:a="http://schemas.openxmlformats.org/drawingml/2006/main">
+          <a:p>
             <a:r>
               <a:t/>
             </a:r>
           </a:p>
-          <a:p xmlns:a="http://schemas.openxmlformats.org/drawingml/2006/main">
-            <a:r>
-              <a:t>The lecturer will confirm the exact closing time.</a:t>
-            </a:r>
-          </a:p>
-          <a:p xmlns:a="http://schemas.openxmlformats.org/drawingml/2006/main">
+          <a:p>
+            <a:r>
+              <a:t>Check the announced quiz closing time.</a:t>
+            </a:r>
+          </a:p>
+          <a:p>
             <a:r>
               <a:t/>
             </a:r>
           </a:p>
-          <a:p xmlns:a="http://schemas.openxmlformats.org/drawingml/2006/main">
-            <a:r>
-              <a:t>LECTURER CUE</a:t>
-            </a:r>
-          </a:p>
-          <a:p xmlns:a="http://schemas.openxmlformats.org/drawingml/2006/main">
-            <a:r>
-              <a:t>Activate the matching open_W13_CML3112 function in Quiz Controls, then confirm the 24-hour close time. Opening this slide or clicking its link does not activate the form. The 24 hours is the availability window. Keep existing quiz scoring and form rules. Do not show private answer keys.</a:t>
-            </a:r>
-          </a:p>
-          <a:p xmlns:a="http://schemas.openxmlformats.org/drawingml/2006/main">
-            <a:r>
-              <a:t/>
-            </a:r>
-          </a:p>
-          <a:p xmlns:a="http://schemas.openxmlformats.org/drawingml/2006/main">
-            <a:r>
-              <a:t>TEACHING MODE</a:t>
-            </a:r>
-          </a:p>
-          <a:p xmlns:a="http://schemas.openxmlformats.org/drawingml/2006/main">
-            <a:r>
-              <a:t>Demonstrate first. Read each new symbol aloud, trace the values and compare the shown output. Learners repeat worked examples individually after class.</a:t>
-            </a:r>
-          </a:p>
-          <a:p xmlns:a="http://schemas.openxmlformats.org/drawingml/2006/main">
-            <a:r>
-              <a:t/>
-            </a:r>
-          </a:p>
-          <a:p xmlns:a="http://schemas.openxmlformats.org/drawingml/2006/main">
-            <a:r>
-              <a:t>NEXT</a:t>
-            </a:r>
-          </a:p>
-          <a:p xmlns:a="http://schemas.openxmlformats.org/drawingml/2006/main">
-            <a:r>
-              <a:t>Before you leave.</a:t>
-            </a:r>
-          </a:p>
-          <a:p xmlns:a="http://schemas.openxmlformats.org/drawingml/2006/main">
-            <a:r>
-              <a:t/>
-            </a:r>
-          </a:p>
-          <a:p xmlns:a="http://schemas.openxmlformats.org/drawingml/2006/main">
-            <a:r>
-              <a:t>REFERENCES</a:t>
-            </a:r>
-          </a:p>
-          <a:p xmlns:a="http://schemas.openxmlformats.org/drawingml/2006/main">
-            <a:r>
-              <a:t/>
+          <a:p>
+            <a:r>
+              <a:t>Continue to</a:t>
+            </a:r>
+          </a:p>
+          <a:p>
+            <a:r>
+              <a:t>Revision and submission checklist</a:t>
             </a:r>
           </a:p>
         </p:txBody>
@@ -3345,7 +3040,7 @@
         <p:nvSpPr>
           <p:cNvPr id="4" name="Slide Number Placeholder 3"/>
           <p:cNvSpPr>
-            <a:spLocks xmlns:a="http://schemas.openxmlformats.org/drawingml/2006/main" noGrp="1"/>
+            <a:spLocks noGrp="1"/>
           </p:cNvSpPr>
           <p:nvPr>
             <p:ph type="sldNum" idx="5"/>
@@ -3353,21 +3048,21 @@
         </p:nvSpPr>
         <p:spPr/>
         <p:txBody>
-          <a:bodyPr xmlns:a="http://schemas.openxmlformats.org/drawingml/2006/main"/>
-          <a:lstStyle xmlns:a="http://schemas.openxmlformats.org/drawingml/2006/main"/>
-          <a:p xmlns:a="http://schemas.openxmlformats.org/drawingml/2006/main"/>
+          <a:bodyPr/>
+          <a:lstStyle/>
+          <a:p/>
         </p:txBody>
       </p:sp>
     </p:spTree>
   </p:cSld>
   <p:clrMapOvr>
-    <a:masterClrMapping xmlns:a="http://schemas.openxmlformats.org/drawingml/2006/main"/>
+    <a:masterClrMapping/>
   </p:clrMapOvr>
 </p:notes>
 </file>
 
 <file path=ppt/notesSlides/notesSlide24.xml><?xml version="1.0" encoding="utf-8"?>
-<p:notes xmlns:p="http://schemas.openxmlformats.org/presentationml/2006/main">
+<p:notes xmlns:a="http://schemas.openxmlformats.org/drawingml/2006/main" xmlns:p="http://schemas.openxmlformats.org/presentationml/2006/main">
   <p:cSld>
     <p:spTree>
       <p:nvGrpSpPr>
@@ -3376,13 +3071,13 @@
         <p:nvPr/>
       </p:nvGrpSpPr>
       <p:grpSpPr>
-        <a:xfrm xmlns:a="http://schemas.openxmlformats.org/drawingml/2006/main"/>
+        <a:xfrm/>
       </p:grpSpPr>
       <p:sp>
         <p:nvSpPr>
           <p:cNvPr id="2" name="Slide Image Placeholder 1"/>
           <p:cNvSpPr>
-            <a:spLocks xmlns:a="http://schemas.openxmlformats.org/drawingml/2006/main" noGrp="1"/>
+            <a:spLocks noGrp="1"/>
           </p:cNvSpPr>
           <p:nvPr>
             <p:ph type="sldImg" idx="0"/>
@@ -3394,7 +3089,7 @@
         <p:nvSpPr>
           <p:cNvPr id="3" name="Notes Placeholder 2"/>
           <p:cNvSpPr>
-            <a:spLocks xmlns:a="http://schemas.openxmlformats.org/drawingml/2006/main" noGrp="1"/>
+            <a:spLocks noGrp="1"/>
           </p:cNvSpPr>
           <p:nvPr>
             <p:ph type="body" idx="1"/>
@@ -3402,116 +3097,101 @@
         </p:nvSpPr>
         <p:spPr/>
         <p:txBody>
-          <a:bodyPr xmlns:a="http://schemas.openxmlformats.org/drawingml/2006/main"/>
-          <a:lstStyle xmlns:a="http://schemas.openxmlformats.org/drawingml/2006/main"/>
-          <a:p xmlns:a="http://schemas.openxmlformats.org/drawingml/2006/main">
-            <a:r>
-              <a:t>PURPOSE</a:t>
-            </a:r>
-          </a:p>
-          <a:p xmlns:a="http://schemas.openxmlformats.org/drawingml/2006/main">
+          <a:bodyPr/>
+          <a:lstStyle/>
+          <a:p>
             <a:r>
               <a:t>Revision and submission checklist</a:t>
             </a:r>
           </a:p>
-          <a:p xmlns:a="http://schemas.openxmlformats.org/drawingml/2006/main">
+          <a:p>
+            <a:r>
+              <a:t>CML3112, Week 13, slide 24</a:t>
+            </a:r>
+          </a:p>
+          <a:p>
             <a:r>
               <a:t/>
             </a:r>
           </a:p>
-          <a:p xmlns:a="http://schemas.openxmlformats.org/drawingml/2006/main">
-            <a:r>
-              <a:t>CONNECT</a:t>
-            </a:r>
-          </a:p>
-          <a:p xmlns:a="http://schemas.openxmlformats.org/drawingml/2006/main">
-            <a:r>
-              <a:t>Previous slide: Week 13 quiz.</a:t>
-            </a:r>
-          </a:p>
-          <a:p xmlns:a="http://schemas.openxmlformats.org/drawingml/2006/main">
+          <a:p>
+            <a:r>
+              <a:t>Explanation to give</a:t>
+            </a:r>
+          </a:p>
+          <a:p>
+            <a:r>
+              <a:t>The handover should reproduce the result using the files and instructions alone. Saved output is insufficient evidence.</a:t>
+            </a:r>
+          </a:p>
+          <a:p>
             <a:r>
               <a:t/>
             </a:r>
           </a:p>
-          <a:p xmlns:a="http://schemas.openxmlformats.org/drawingml/2006/main">
-            <a:r>
-              <a:t>EXPLAIN</a:t>
-            </a:r>
-          </a:p>
-          <a:p xmlns:a="http://schemas.openxmlformats.org/drawingml/2006/main">
+          <a:p>
+            <a:r>
+              <a:t>Worked illustration / lecturer answer</a:t>
+            </a:r>
+          </a:p>
+          <a:p>
+            <a:r>
+              <a:t>Restart, load the stated data and follow the README literally. A mismatch between a documented filename and the actual file is a handover defect to fix.</a:t>
+            </a:r>
+          </a:p>
+          <a:p>
+            <a:r>
+              <a:t/>
+            </a:r>
+          </a:p>
+          <a:p>
+            <a:r>
+              <a:t>Misconception to address</a:t>
+            </a:r>
+          </a:p>
+          <a:p>
+            <a:r>
+              <a:t>Close by identifying the actual saved file and its correct submission route. Read the live deadline. For current weekly notebook tasks, students upload their own work, not the practice notebook, ZIP or grading files.</a:t>
+            </a:r>
+          </a:p>
+          <a:p>
+            <a:r>
+              <a:t/>
+            </a:r>
+          </a:p>
+          <a:p>
+            <a:r>
+              <a:t>On this slide</a:t>
+            </a:r>
+          </a:p>
+          <a:p>
             <a:r>
               <a:t>Another learner can follow your README and reproduce the stated result.</a:t>
             </a:r>
           </a:p>
-          <a:p xmlns:a="http://schemas.openxmlformats.org/drawingml/2006/main">
+          <a:p>
             <a:r>
               <a:t/>
             </a:r>
           </a:p>
-          <a:p xmlns:a="http://schemas.openxmlformats.org/drawingml/2006/main">
+          <a:p>
             <a:r>
               <a:t>Save your work and check the required submission files.</a:t>
             </a:r>
           </a:p>
-          <a:p xmlns:a="http://schemas.openxmlformats.org/drawingml/2006/main">
+          <a:p>
             <a:r>
               <a:t/>
             </a:r>
           </a:p>
-          <a:p xmlns:a="http://schemas.openxmlformats.org/drawingml/2006/main">
-            <a:r>
-              <a:t>LECTURER CUE</a:t>
-            </a:r>
-          </a:p>
-          <a:p xmlns:a="http://schemas.openxmlformats.org/drawingml/2006/main">
-            <a:r>
-              <a:t>Ask every learner for an individual response. Record one misconception to revisit at the start of the next class. If a deadline changed, announce the exact Kampala date and update the source registry before rebuilding slides.</a:t>
-            </a:r>
-          </a:p>
-          <a:p xmlns:a="http://schemas.openxmlformats.org/drawingml/2006/main">
-            <a:r>
-              <a:t/>
-            </a:r>
-          </a:p>
-          <a:p xmlns:a="http://schemas.openxmlformats.org/drawingml/2006/main">
-            <a:r>
-              <a:t>TEACHING MODE</a:t>
-            </a:r>
-          </a:p>
-          <a:p xmlns:a="http://schemas.openxmlformats.org/drawingml/2006/main">
-            <a:r>
-              <a:t>Demonstrate first. Read each new symbol aloud, trace the values and compare the shown output. Learners repeat worked examples individually after class.</a:t>
-            </a:r>
-          </a:p>
-          <a:p xmlns:a="http://schemas.openxmlformats.org/drawingml/2006/main">
-            <a:r>
-              <a:t/>
-            </a:r>
-          </a:p>
-          <a:p xmlns:a="http://schemas.openxmlformats.org/drawingml/2006/main">
-            <a:r>
-              <a:t>NEXT</a:t>
-            </a:r>
-          </a:p>
-          <a:p xmlns:a="http://schemas.openxmlformats.org/drawingml/2006/main">
-            <a:r>
-              <a:t>Optional revision video.</a:t>
-            </a:r>
-          </a:p>
-          <a:p xmlns:a="http://schemas.openxmlformats.org/drawingml/2006/main">
-            <a:r>
-              <a:t/>
-            </a:r>
-          </a:p>
-          <a:p xmlns:a="http://schemas.openxmlformats.org/drawingml/2006/main">
-            <a:r>
-              <a:t>REFERENCES</a:t>
-            </a:r>
-          </a:p>
-          <a:p xmlns:a="http://schemas.openxmlformats.org/drawingml/2006/main">
-            <a:r>
-              <a:t/>
+          <a:p>
+            <a:r>
+              <a:t>Continue to</a:t>
+            </a:r>
+          </a:p>
+          <a:p>
+            <a:r>
+              <a:t>Optional revision video</a:t>
             </a:r>
           </a:p>
         </p:txBody>
@@ -3520,7 +3200,7 @@
         <p:nvSpPr>
           <p:cNvPr id="4" name="Slide Number Placeholder 3"/>
           <p:cNvSpPr>
-            <a:spLocks xmlns:a="http://schemas.openxmlformats.org/drawingml/2006/main" noGrp="1"/>
+            <a:spLocks noGrp="1"/>
           </p:cNvSpPr>
           <p:nvPr>
             <p:ph type="sldNum" idx="5"/>
@@ -3528,21 +3208,21 @@
         </p:nvSpPr>
         <p:spPr/>
         <p:txBody>
-          <a:bodyPr xmlns:a="http://schemas.openxmlformats.org/drawingml/2006/main"/>
-          <a:lstStyle xmlns:a="http://schemas.openxmlformats.org/drawingml/2006/main"/>
-          <a:p xmlns:a="http://schemas.openxmlformats.org/drawingml/2006/main"/>
+          <a:bodyPr/>
+          <a:lstStyle/>
+          <a:p/>
         </p:txBody>
       </p:sp>
     </p:spTree>
   </p:cSld>
   <p:clrMapOvr>
-    <a:masterClrMapping xmlns:a="http://schemas.openxmlformats.org/drawingml/2006/main"/>
+    <a:masterClrMapping/>
   </p:clrMapOvr>
 </p:notes>
 </file>
 
 <file path=ppt/notesSlides/notesSlide25.xml><?xml version="1.0" encoding="utf-8"?>
-<p:notes xmlns:p="http://schemas.openxmlformats.org/presentationml/2006/main">
+<p:notes xmlns:a="http://schemas.openxmlformats.org/drawingml/2006/main" xmlns:p="http://schemas.openxmlformats.org/presentationml/2006/main">
   <p:cSld>
     <p:spTree>
       <p:nvGrpSpPr>
@@ -3551,13 +3231,13 @@
         <p:nvPr/>
       </p:nvGrpSpPr>
       <p:grpSpPr>
-        <a:xfrm xmlns:a="http://schemas.openxmlformats.org/drawingml/2006/main"/>
+        <a:xfrm/>
       </p:grpSpPr>
       <p:sp>
         <p:nvSpPr>
           <p:cNvPr id="2" name="Slide Image Placeholder 1"/>
           <p:cNvSpPr>
-            <a:spLocks xmlns:a="http://schemas.openxmlformats.org/drawingml/2006/main" noGrp="1"/>
+            <a:spLocks noGrp="1"/>
           </p:cNvSpPr>
           <p:nvPr>
             <p:ph type="sldImg" idx="0"/>
@@ -3569,7 +3249,7 @@
         <p:nvSpPr>
           <p:cNvPr id="3" name="Notes Placeholder 2"/>
           <p:cNvSpPr>
-            <a:spLocks xmlns:a="http://schemas.openxmlformats.org/drawingml/2006/main" noGrp="1"/>
+            <a:spLocks noGrp="1"/>
           </p:cNvSpPr>
           <p:nvPr>
             <p:ph type="body" idx="1"/>
@@ -3577,151 +3257,126 @@
         </p:nvSpPr>
         <p:spPr/>
         <p:txBody>
-          <a:bodyPr xmlns:a="http://schemas.openxmlformats.org/drawingml/2006/main"/>
-          <a:lstStyle xmlns:a="http://schemas.openxmlformats.org/drawingml/2006/main"/>
-          <a:p xmlns:a="http://schemas.openxmlformats.org/drawingml/2006/main">
-            <a:r>
-              <a:t>PURPOSE</a:t>
-            </a:r>
-          </a:p>
-          <a:p xmlns:a="http://schemas.openxmlformats.org/drawingml/2006/main">
+          <a:bodyPr/>
+          <a:lstStyle/>
+          <a:p>
             <a:r>
               <a:t>Optional revision video</a:t>
             </a:r>
           </a:p>
-          <a:p xmlns:a="http://schemas.openxmlformats.org/drawingml/2006/main">
+          <a:p>
+            <a:r>
+              <a:t>CML3112, Week 13, slide 25</a:t>
+            </a:r>
+          </a:p>
+          <a:p>
             <a:r>
               <a:t/>
             </a:r>
           </a:p>
-          <a:p xmlns:a="http://schemas.openxmlformats.org/drawingml/2006/main">
-            <a:r>
-              <a:t>CONNECT</a:t>
-            </a:r>
-          </a:p>
-          <a:p xmlns:a="http://schemas.openxmlformats.org/drawingml/2006/main">
-            <a:r>
-              <a:t>Previous slide: Revision and submission checklist.</a:t>
-            </a:r>
-          </a:p>
-          <a:p xmlns:a="http://schemas.openxmlformats.org/drawingml/2006/main">
+          <a:p>
+            <a:r>
+              <a:t>Explanation to give</a:t>
+            </a:r>
+          </a:p>
+          <a:p>
+            <a:r>
+              <a:t>Give the viewing question before playing the excerpt: Why keep history, and what is a repository?</a:t>
+            </a:r>
+          </a:p>
+          <a:p>
             <a:r>
               <a:t/>
             </a:r>
           </a:p>
-          <a:p xmlns:a="http://schemas.openxmlformats.org/drawingml/2006/main">
-            <a:r>
-              <a:t>EXPLAIN</a:t>
-            </a:r>
-          </a:p>
-          <a:p xmlns:a="http://schemas.openxmlformats.org/drawingml/2006/main">
+          <a:p>
+            <a:r>
+              <a:t>Worked illustration / lecturer answer</a:t>
+            </a:r>
+          </a:p>
+          <a:p>
+            <a:r>
+              <a:t>Use the adjacent worked example as the explanation if the video cannot load. Pause after the relevant example and connect its terms to the names and units already used in this lesson. Preview the displayed link and excerpt before class.</a:t>
+            </a:r>
+          </a:p>
+          <a:p>
+            <a:r>
+              <a:t/>
+            </a:r>
+          </a:p>
+          <a:p>
+            <a:r>
+              <a:t>Misconception to address</a:t>
+            </a:r>
+          </a:p>
+          <a:p>
+            <a:r>
+              <a:t>The video is supporting revision, not a replacement for defining the symbols or a requirement to watch a full tutorial during limited class time.</a:t>
+            </a:r>
+          </a:p>
+          <a:p>
+            <a:r>
+              <a:t/>
+            </a:r>
+          </a:p>
+          <a:p>
+            <a:r>
+              <a:t>On this slide</a:t>
+            </a:r>
+          </a:p>
+          <a:p>
             <a:r>
               <a:t>For revision after class.</a:t>
             </a:r>
           </a:p>
-          <a:p xmlns:a="http://schemas.openxmlformats.org/drawingml/2006/main">
+          <a:p>
             <a:r>
               <a:t/>
             </a:r>
           </a:p>
-          <a:p xmlns:a="http://schemas.openxmlformats.org/drawingml/2006/main">
+          <a:p>
             <a:r>
               <a:t>CodeWithChris</a:t>
             </a:r>
           </a:p>
-          <a:p xmlns:a="http://schemas.openxmlformats.org/drawingml/2006/main">
+          <a:p>
             <a:r>
               <a:t>GitHub Tutorial for Beginners (2025)</a:t>
             </a:r>
           </a:p>
-          <a:p xmlns:a="http://schemas.openxmlformats.org/drawingml/2006/main">
+          <a:p>
             <a:r>
               <a:t/>
             </a:r>
           </a:p>
-          <a:p xmlns:a="http://schemas.openxmlformats.org/drawingml/2006/main">
+          <a:p>
             <a:r>
               <a:t>00:00–02:10, then 03:35–06:08 (4 min 43 sec total)</a:t>
             </a:r>
           </a:p>
-          <a:p xmlns:a="http://schemas.openxmlformats.org/drawingml/2006/main">
+          <a:p>
             <a:r>
               <a:t/>
             </a:r>
           </a:p>
-          <a:p xmlns:a="http://schemas.openxmlformats.org/drawingml/2006/main">
+          <a:p>
             <a:r>
               <a:t>Listening question: Why keep history, and what is a repository?</a:t>
             </a:r>
           </a:p>
-          <a:p xmlns:a="http://schemas.openxmlformats.org/drawingml/2006/main">
+          <a:p>
             <a:r>
               <a:t/>
             </a:r>
           </a:p>
-          <a:p xmlns:a="http://schemas.openxmlformats.org/drawingml/2006/main">
-            <a:r>
-              <a:t>LECTURER CUE</a:t>
-            </a:r>
-          </a:p>
-          <a:p xmlns:a="http://schemas.openxmlformats.org/drawingml/2006/main">
-            <a:r>
-              <a:t>Title, channel, 19:53 runtime and chapter boundaries checked on the video page on 15 September 2026. Desktop installation is optional. The originally shared t=167 link starts at installation.</a:t>
-            </a:r>
-          </a:p>
-          <a:p xmlns:a="http://schemas.openxmlformats.org/drawingml/2006/main">
-            <a:r>
-              <a:t>After viewing: Explain the difference between saving a file and recording a commit. Then make one browser-based commit.</a:t>
-            </a:r>
-          </a:p>
-          <a:p xmlns:a="http://schemas.openxmlformats.org/drawingml/2006/main">
-            <a:r>
-              <a:t>Preview before class and stop after the selected short excerpt. If playback fails, teach the worked example. Video is optional. Source: https://www.youtube.com/watch?v=v5gnvDUWqFM</a:t>
-            </a:r>
-          </a:p>
-          <a:p xmlns:a="http://schemas.openxmlformats.org/drawingml/2006/main">
-            <a:r>
-              <a:t/>
-            </a:r>
-          </a:p>
-          <a:p xmlns:a="http://schemas.openxmlformats.org/drawingml/2006/main">
-            <a:r>
-              <a:t>TEACHING MODE</a:t>
-            </a:r>
-          </a:p>
-          <a:p xmlns:a="http://schemas.openxmlformats.org/drawingml/2006/main">
-            <a:r>
-              <a:t>Demonstrate first. Read each new symbol aloud, trace the values and compare the shown output. Learners repeat worked examples individually after class.</a:t>
-            </a:r>
-          </a:p>
-          <a:p xmlns:a="http://schemas.openxmlformats.org/drawingml/2006/main">
-            <a:r>
-              <a:t/>
-            </a:r>
-          </a:p>
-          <a:p xmlns:a="http://schemas.openxmlformats.org/drawingml/2006/main">
-            <a:r>
-              <a:t>NEXT</a:t>
-            </a:r>
-          </a:p>
-          <a:p xmlns:a="http://schemas.openxmlformats.org/drawingml/2006/main">
-            <a:r>
-              <a:t>independent revision and the issued task.</a:t>
-            </a:r>
-          </a:p>
-          <a:p xmlns:a="http://schemas.openxmlformats.org/drawingml/2006/main">
-            <a:r>
-              <a:t/>
-            </a:r>
-          </a:p>
-          <a:p xmlns:a="http://schemas.openxmlformats.org/drawingml/2006/main">
-            <a:r>
-              <a:t>REFERENCES</a:t>
-            </a:r>
-          </a:p>
-          <a:p xmlns:a="http://schemas.openxmlformats.org/drawingml/2006/main">
-            <a:r>
-              <a:t/>
+          <a:p>
+            <a:r>
+              <a:t>Reference / existing resource</a:t>
+            </a:r>
+          </a:p>
+          <a:p>
+            <a:r>
+              <a:t>https://www.youtube.com/watch?v=v5gnvDUWqFM</a:t>
             </a:r>
           </a:p>
         </p:txBody>
@@ -3730,7 +3385,7 @@
         <p:nvSpPr>
           <p:cNvPr id="4" name="Slide Number Placeholder 3"/>
           <p:cNvSpPr>
-            <a:spLocks xmlns:a="http://schemas.openxmlformats.org/drawingml/2006/main" noGrp="1"/>
+            <a:spLocks noGrp="1"/>
           </p:cNvSpPr>
           <p:nvPr>
             <p:ph type="sldNum" idx="5"/>
@@ -3738,21 +3393,21 @@
         </p:nvSpPr>
         <p:spPr/>
         <p:txBody>
-          <a:bodyPr xmlns:a="http://schemas.openxmlformats.org/drawingml/2006/main"/>
-          <a:lstStyle xmlns:a="http://schemas.openxmlformats.org/drawingml/2006/main"/>
-          <a:p xmlns:a="http://schemas.openxmlformats.org/drawingml/2006/main"/>
+          <a:bodyPr/>
+          <a:lstStyle/>
+          <a:p/>
         </p:txBody>
       </p:sp>
     </p:spTree>
   </p:cSld>
   <p:clrMapOvr>
-    <a:masterClrMapping xmlns:a="http://schemas.openxmlformats.org/drawingml/2006/main"/>
+    <a:masterClrMapping/>
   </p:clrMapOvr>
 </p:notes>
 </file>
 
 <file path=ppt/notesSlides/notesSlide3.xml><?xml version="1.0" encoding="utf-8"?>
-<p:notes xmlns:p="http://schemas.openxmlformats.org/presentationml/2006/main">
+<p:notes xmlns:a="http://schemas.openxmlformats.org/drawingml/2006/main" xmlns:p="http://schemas.openxmlformats.org/presentationml/2006/main">
   <p:cSld>
     <p:spTree>
       <p:nvGrpSpPr>
@@ -3761,13 +3416,13 @@
         <p:nvPr/>
       </p:nvGrpSpPr>
       <p:grpSpPr>
-        <a:xfrm xmlns:a="http://schemas.openxmlformats.org/drawingml/2006/main"/>
+        <a:xfrm/>
       </p:grpSpPr>
       <p:sp>
         <p:nvSpPr>
           <p:cNvPr id="2" name="Slide Image Placeholder 1"/>
           <p:cNvSpPr>
-            <a:spLocks xmlns:a="http://schemas.openxmlformats.org/drawingml/2006/main" noGrp="1"/>
+            <a:spLocks noGrp="1"/>
           </p:cNvSpPr>
           <p:nvPr>
             <p:ph type="sldImg" idx="0"/>
@@ -3779,7 +3434,7 @@
         <p:nvSpPr>
           <p:cNvPr id="3" name="Notes Placeholder 2"/>
           <p:cNvSpPr>
-            <a:spLocks xmlns:a="http://schemas.openxmlformats.org/drawingml/2006/main" noGrp="1"/>
+            <a:spLocks noGrp="1"/>
           </p:cNvSpPr>
           <p:nvPr>
             <p:ph type="body" idx="1"/>
@@ -3787,106 +3442,91 @@
         </p:nvSpPr>
         <p:spPr/>
         <p:txBody>
-          <a:bodyPr xmlns:a="http://schemas.openxmlformats.org/drawingml/2006/main"/>
-          <a:lstStyle xmlns:a="http://schemas.openxmlformats.org/drawingml/2006/main"/>
-          <a:p xmlns:a="http://schemas.openxmlformats.org/drawingml/2006/main">
-            <a:r>
-              <a:t>PURPOSE</a:t>
-            </a:r>
-          </a:p>
-          <a:p xmlns:a="http://schemas.openxmlformats.org/drawingml/2006/main">
+          <a:bodyPr/>
+          <a:lstStyle/>
+          <a:p>
             <a:r>
               <a:t>Connection to the previous lesson</a:t>
             </a:r>
           </a:p>
-          <a:p xmlns:a="http://schemas.openxmlformats.org/drawingml/2006/main">
+          <a:p>
+            <a:r>
+              <a:t>CML3112, Week 13, slide 3</a:t>
+            </a:r>
+          </a:p>
+          <a:p>
             <a:r>
               <a:t/>
             </a:r>
           </a:p>
-          <a:p xmlns:a="http://schemas.openxmlformats.org/drawingml/2006/main">
-            <a:r>
-              <a:t>CONNECT</a:t>
-            </a:r>
-          </a:p>
-          <a:p xmlns:a="http://schemas.openxmlformats.org/drawingml/2006/main">
-            <a:r>
-              <a:t>Previous slide: Today’s learning.</a:t>
-            </a:r>
-          </a:p>
-          <a:p xmlns:a="http://schemas.openxmlformats.org/drawingml/2006/main">
+          <a:p>
+            <a:r>
+              <a:t>Explanation to give</a:t>
+            </a:r>
+          </a:p>
+          <a:p>
+            <a:r>
+              <a:t>The handover should reproduce the result using the files and instructions alone. Saved output is insufficient evidence.</a:t>
+            </a:r>
+          </a:p>
+          <a:p>
             <a:r>
               <a:t/>
             </a:r>
           </a:p>
-          <a:p xmlns:a="http://schemas.openxmlformats.org/drawingml/2006/main">
-            <a:r>
-              <a:t>EXPLAIN</a:t>
-            </a:r>
-          </a:p>
-          <a:p xmlns:a="http://schemas.openxmlformats.org/drawingml/2006/main">
+          <a:p>
+            <a:r>
+              <a:t>Worked illustration / lecturer answer</a:t>
+            </a:r>
+          </a:p>
+          <a:p>
+            <a:r>
+              <a:t>Restart, load the stated data and follow the README literally. A mismatch between a documented filename and the actual file is a handover defect to fix.</a:t>
+            </a:r>
+          </a:p>
+          <a:p>
+            <a:r>
+              <a:t/>
+            </a:r>
+          </a:p>
+          <a:p>
+            <a:r>
+              <a:t>Misconception to address</a:t>
+            </a:r>
+          </a:p>
+          <a:p>
+            <a:r>
+              <a:t>Connect this to the previous result named on this slide. Demonstrate the first step again if necessary; there is no requirement for partner work before the explanation.</a:t>
+            </a:r>
+          </a:p>
+          <a:p>
+            <a:r>
+              <a:t/>
+            </a:r>
+          </a:p>
+          <a:p>
+            <a:r>
+              <a:t>On this slide</a:t>
+            </a:r>
+          </a:p>
+          <a:p>
             <a:r>
               <a:t>The models and charts already exist. The remaining task is to make the evidence understandable and runnable from the supplied files.</a:t>
             </a:r>
           </a:p>
-          <a:p xmlns:a="http://schemas.openxmlformats.org/drawingml/2006/main">
+          <a:p>
             <a:r>
               <a:t/>
             </a:r>
           </a:p>
-          <a:p xmlns:a="http://schemas.openxmlformats.org/drawingml/2006/main">
-            <a:r>
-              <a:t>LECTURER CUE</a:t>
-            </a:r>
-          </a:p>
-          <a:p xmlns:a="http://schemas.openxmlformats.org/drawingml/2006/main">
-            <a:r>
-              <a:t>Explain the definitions before running or tracing the example. Point to the line or table row that produces each result.</a:t>
-            </a:r>
-          </a:p>
-          <a:p xmlns:a="http://schemas.openxmlformats.org/drawingml/2006/main">
-            <a:r>
-              <a:t/>
-            </a:r>
-          </a:p>
-          <a:p xmlns:a="http://schemas.openxmlformats.org/drawingml/2006/main">
-            <a:r>
-              <a:t>TEACHING MODE</a:t>
-            </a:r>
-          </a:p>
-          <a:p xmlns:a="http://schemas.openxmlformats.org/drawingml/2006/main">
-            <a:r>
-              <a:t>Demonstrate first. Read each new symbol aloud, trace the values and compare the shown output. Learners repeat worked examples individually after class.</a:t>
-            </a:r>
-          </a:p>
-          <a:p xmlns:a="http://schemas.openxmlformats.org/drawingml/2006/main">
-            <a:r>
-              <a:t/>
-            </a:r>
-          </a:p>
-          <a:p xmlns:a="http://schemas.openxmlformats.org/drawingml/2006/main">
-            <a:r>
-              <a:t>NEXT</a:t>
-            </a:r>
-          </a:p>
-          <a:p xmlns:a="http://schemas.openxmlformats.org/drawingml/2006/main">
-            <a:r>
-              <a:t>Why this week’s tools are needed.</a:t>
-            </a:r>
-          </a:p>
-          <a:p xmlns:a="http://schemas.openxmlformats.org/drawingml/2006/main">
-            <a:r>
-              <a:t/>
-            </a:r>
-          </a:p>
-          <a:p xmlns:a="http://schemas.openxmlformats.org/drawingml/2006/main">
-            <a:r>
-              <a:t>REFERENCES</a:t>
-            </a:r>
-          </a:p>
-          <a:p xmlns:a="http://schemas.openxmlformats.org/drawingml/2006/main">
-            <a:r>
-              <a:t/>
+          <a:p>
+            <a:r>
+              <a:t>Continue to</a:t>
+            </a:r>
+          </a:p>
+          <a:p>
+            <a:r>
+              <a:t>Why this week’s tools are needed</a:t>
             </a:r>
           </a:p>
         </p:txBody>
@@ -3895,7 +3535,7 @@
         <p:nvSpPr>
           <p:cNvPr id="4" name="Slide Number Placeholder 3"/>
           <p:cNvSpPr>
-            <a:spLocks xmlns:a="http://schemas.openxmlformats.org/drawingml/2006/main" noGrp="1"/>
+            <a:spLocks noGrp="1"/>
           </p:cNvSpPr>
           <p:nvPr>
             <p:ph type="sldNum" idx="5"/>
@@ -3903,21 +3543,21 @@
         </p:nvSpPr>
         <p:spPr/>
         <p:txBody>
-          <a:bodyPr xmlns:a="http://schemas.openxmlformats.org/drawingml/2006/main"/>
-          <a:lstStyle xmlns:a="http://schemas.openxmlformats.org/drawingml/2006/main"/>
-          <a:p xmlns:a="http://schemas.openxmlformats.org/drawingml/2006/main"/>
+          <a:bodyPr/>
+          <a:lstStyle/>
+          <a:p/>
         </p:txBody>
       </p:sp>
     </p:spTree>
   </p:cSld>
   <p:clrMapOvr>
-    <a:masterClrMapping xmlns:a="http://schemas.openxmlformats.org/drawingml/2006/main"/>
+    <a:masterClrMapping/>
   </p:clrMapOvr>
 </p:notes>
 </file>
 
 <file path=ppt/notesSlides/notesSlide4.xml><?xml version="1.0" encoding="utf-8"?>
-<p:notes xmlns:p="http://schemas.openxmlformats.org/presentationml/2006/main">
+<p:notes xmlns:a="http://schemas.openxmlformats.org/drawingml/2006/main" xmlns:p="http://schemas.openxmlformats.org/presentationml/2006/main">
   <p:cSld>
     <p:spTree>
       <p:nvGrpSpPr>
@@ -3926,13 +3566,13 @@
         <p:nvPr/>
       </p:nvGrpSpPr>
       <p:grpSpPr>
-        <a:xfrm xmlns:a="http://schemas.openxmlformats.org/drawingml/2006/main"/>
+        <a:xfrm/>
       </p:grpSpPr>
       <p:sp>
         <p:nvSpPr>
           <p:cNvPr id="2" name="Slide Image Placeholder 1"/>
           <p:cNvSpPr>
-            <a:spLocks xmlns:a="http://schemas.openxmlformats.org/drawingml/2006/main" noGrp="1"/>
+            <a:spLocks noGrp="1"/>
           </p:cNvSpPr>
           <p:nvPr>
             <p:ph type="sldImg" idx="0"/>
@@ -3944,7 +3584,7 @@
         <p:nvSpPr>
           <p:cNvPr id="3" name="Notes Placeholder 2"/>
           <p:cNvSpPr>
-            <a:spLocks xmlns:a="http://schemas.openxmlformats.org/drawingml/2006/main" noGrp="1"/>
+            <a:spLocks noGrp="1"/>
           </p:cNvSpPr>
           <p:nvPr>
             <p:ph type="body" idx="1"/>
@@ -3952,106 +3592,91 @@
         </p:nvSpPr>
         <p:spPr/>
         <p:txBody>
-          <a:bodyPr xmlns:a="http://schemas.openxmlformats.org/drawingml/2006/main"/>
-          <a:lstStyle xmlns:a="http://schemas.openxmlformats.org/drawingml/2006/main"/>
-          <a:p xmlns:a="http://schemas.openxmlformats.org/drawingml/2006/main">
-            <a:r>
-              <a:t>PURPOSE</a:t>
-            </a:r>
-          </a:p>
-          <a:p xmlns:a="http://schemas.openxmlformats.org/drawingml/2006/main">
+          <a:bodyPr/>
+          <a:lstStyle/>
+          <a:p>
             <a:r>
               <a:t>Why this week’s tools are needed</a:t>
             </a:r>
           </a:p>
-          <a:p xmlns:a="http://schemas.openxmlformats.org/drawingml/2006/main">
+          <a:p>
+            <a:r>
+              <a:t>CML3112, Week 13, slide 4</a:t>
+            </a:r>
+          </a:p>
+          <a:p>
             <a:r>
               <a:t/>
             </a:r>
           </a:p>
-          <a:p xmlns:a="http://schemas.openxmlformats.org/drawingml/2006/main">
-            <a:r>
-              <a:t>CONNECT</a:t>
-            </a:r>
-          </a:p>
-          <a:p xmlns:a="http://schemas.openxmlformats.org/drawingml/2006/main">
-            <a:r>
-              <a:t>Previous slide: Connection to the previous lesson.</a:t>
-            </a:r>
-          </a:p>
-          <a:p xmlns:a="http://schemas.openxmlformats.org/drawingml/2006/main">
+          <a:p>
+            <a:r>
+              <a:t>Explanation to give</a:t>
+            </a:r>
+          </a:p>
+          <a:p>
+            <a:r>
+              <a:t>The handover should reproduce the result using the files and instructions alone. Saved output is insufficient evidence.</a:t>
+            </a:r>
+          </a:p>
+          <a:p>
             <a:r>
               <a:t/>
             </a:r>
           </a:p>
-          <a:p xmlns:a="http://schemas.openxmlformats.org/drawingml/2006/main">
-            <a:r>
-              <a:t>EXPLAIN</a:t>
-            </a:r>
-          </a:p>
-          <a:p xmlns:a="http://schemas.openxmlformats.org/drawingml/2006/main">
-            <a:r>
-              <a:t>A project is ready for handover when its files and written instructions reproduce its results in a fresh session. Today we check that evidence ourselves.</a:t>
-            </a:r>
-          </a:p>
-          <a:p xmlns:a="http://schemas.openxmlformats.org/drawingml/2006/main">
+          <a:p>
+            <a:r>
+              <a:t>Worked illustration / lecturer answer</a:t>
+            </a:r>
+          </a:p>
+          <a:p>
+            <a:r>
+              <a:t>Restart, load the stated data and follow the README literally. A mismatch between a documented filename and the actual file is a handover defect to fix.</a:t>
+            </a:r>
+          </a:p>
+          <a:p>
             <a:r>
               <a:t/>
             </a:r>
           </a:p>
-          <a:p xmlns:a="http://schemas.openxmlformats.org/drawingml/2006/main">
-            <a:r>
-              <a:t>LECTURER CUE</a:t>
-            </a:r>
-          </a:p>
-          <a:p xmlns:a="http://schemas.openxmlformats.org/drawingml/2006/main">
-            <a:r>
-              <a:t>A building team records indoor temperature to investigate comfort. Civil students can discuss construction and inspection; architecture students can discuss shading and ventilation. Explain the quantities before using them.</a:t>
-            </a:r>
-          </a:p>
-          <a:p xmlns:a="http://schemas.openxmlformats.org/drawingml/2006/main">
+          <a:p>
+            <a:r>
+              <a:t>Misconception to address</a:t>
+            </a:r>
+          </a:p>
+          <a:p>
+            <a:r>
+              <a:t>Connect this to the previous result named on this slide. Demonstrate the first step again if necessary; there is no requirement for partner work before the explanation.</a:t>
+            </a:r>
+          </a:p>
+          <a:p>
             <a:r>
               <a:t/>
             </a:r>
           </a:p>
-          <a:p xmlns:a="http://schemas.openxmlformats.org/drawingml/2006/main">
-            <a:r>
-              <a:t>TEACHING MODE</a:t>
-            </a:r>
-          </a:p>
-          <a:p xmlns:a="http://schemas.openxmlformats.org/drawingml/2006/main">
-            <a:r>
-              <a:t>Demonstrate first. Read each new symbol aloud, trace the values and compare the shown output. Learners repeat worked examples individually after class.</a:t>
-            </a:r>
-          </a:p>
-          <a:p xmlns:a="http://schemas.openxmlformats.org/drawingml/2006/main">
+          <a:p>
+            <a:r>
+              <a:t>On this slide</a:t>
+            </a:r>
+          </a:p>
+          <a:p>
+            <a:r>
+              <a:t>A project is ready for handover when its files and written instructions reproduce its results in a fresh session. Check each claim against the results in your notebook.</a:t>
+            </a:r>
+          </a:p>
+          <a:p>
             <a:r>
               <a:t/>
             </a:r>
           </a:p>
-          <a:p xmlns:a="http://schemas.openxmlformats.org/drawingml/2006/main">
-            <a:r>
-              <a:t>NEXT</a:t>
-            </a:r>
-          </a:p>
-          <a:p xmlns:a="http://schemas.openxmlformats.org/drawingml/2006/main">
-            <a:r>
-              <a:t>Reproducibility and Dependency.</a:t>
-            </a:r>
-          </a:p>
-          <a:p xmlns:a="http://schemas.openxmlformats.org/drawingml/2006/main">
-            <a:r>
-              <a:t/>
-            </a:r>
-          </a:p>
-          <a:p xmlns:a="http://schemas.openxmlformats.org/drawingml/2006/main">
-            <a:r>
-              <a:t>REFERENCES</a:t>
-            </a:r>
-          </a:p>
-          <a:p xmlns:a="http://schemas.openxmlformats.org/drawingml/2006/main">
-            <a:r>
-              <a:t/>
+          <a:p>
+            <a:r>
+              <a:t>Continue to</a:t>
+            </a:r>
+          </a:p>
+          <a:p>
+            <a:r>
+              <a:t>Reproducibility and Dependency</a:t>
             </a:r>
           </a:p>
         </p:txBody>
@@ -4060,7 +3685,7 @@
         <p:nvSpPr>
           <p:cNvPr id="4" name="Slide Number Placeholder 3"/>
           <p:cNvSpPr>
-            <a:spLocks xmlns:a="http://schemas.openxmlformats.org/drawingml/2006/main" noGrp="1"/>
+            <a:spLocks noGrp="1"/>
           </p:cNvSpPr>
           <p:nvPr>
             <p:ph type="sldNum" idx="5"/>
@@ -4068,21 +3693,21 @@
         </p:nvSpPr>
         <p:spPr/>
         <p:txBody>
-          <a:bodyPr xmlns:a="http://schemas.openxmlformats.org/drawingml/2006/main"/>
-          <a:lstStyle xmlns:a="http://schemas.openxmlformats.org/drawingml/2006/main"/>
-          <a:p xmlns:a="http://schemas.openxmlformats.org/drawingml/2006/main"/>
+          <a:bodyPr/>
+          <a:lstStyle/>
+          <a:p/>
         </p:txBody>
       </p:sp>
     </p:spTree>
   </p:cSld>
   <p:clrMapOvr>
-    <a:masterClrMapping xmlns:a="http://schemas.openxmlformats.org/drawingml/2006/main"/>
+    <a:masterClrMapping/>
   </p:clrMapOvr>
 </p:notes>
 </file>
 
 <file path=ppt/notesSlides/notesSlide5.xml><?xml version="1.0" encoding="utf-8"?>
-<p:notes xmlns:p="http://schemas.openxmlformats.org/presentationml/2006/main">
+<p:notes xmlns:a="http://schemas.openxmlformats.org/drawingml/2006/main" xmlns:p="http://schemas.openxmlformats.org/presentationml/2006/main">
   <p:cSld>
     <p:spTree>
       <p:nvGrpSpPr>
@@ -4091,13 +3716,13 @@
         <p:nvPr/>
       </p:nvGrpSpPr>
       <p:grpSpPr>
-        <a:xfrm xmlns:a="http://schemas.openxmlformats.org/drawingml/2006/main"/>
+        <a:xfrm/>
       </p:grpSpPr>
       <p:sp>
         <p:nvSpPr>
           <p:cNvPr id="2" name="Slide Image Placeholder 1"/>
           <p:cNvSpPr>
-            <a:spLocks xmlns:a="http://schemas.openxmlformats.org/drawingml/2006/main" noGrp="1"/>
+            <a:spLocks noGrp="1"/>
           </p:cNvSpPr>
           <p:nvPr>
             <p:ph type="sldImg" idx="0"/>
@@ -4109,7 +3734,7 @@
         <p:nvSpPr>
           <p:cNvPr id="3" name="Notes Placeholder 2"/>
           <p:cNvSpPr>
-            <a:spLocks xmlns:a="http://schemas.openxmlformats.org/drawingml/2006/main" noGrp="1"/>
+            <a:spLocks noGrp="1"/>
           </p:cNvSpPr>
           <p:nvPr>
             <p:ph type="body" idx="1"/>
@@ -4117,116 +3742,96 @@
         </p:nvSpPr>
         <p:spPr/>
         <p:txBody>
-          <a:bodyPr xmlns:a="http://schemas.openxmlformats.org/drawingml/2006/main"/>
-          <a:lstStyle xmlns:a="http://schemas.openxmlformats.org/drawingml/2006/main"/>
-          <a:p xmlns:a="http://schemas.openxmlformats.org/drawingml/2006/main">
-            <a:r>
-              <a:t>PURPOSE</a:t>
-            </a:r>
-          </a:p>
-          <a:p xmlns:a="http://schemas.openxmlformats.org/drawingml/2006/main">
+          <a:bodyPr/>
+          <a:lstStyle/>
+          <a:p>
             <a:r>
               <a:t>Reproducibility and Dependency</a:t>
             </a:r>
           </a:p>
-          <a:p xmlns:a="http://schemas.openxmlformats.org/drawingml/2006/main">
+          <a:p>
+            <a:r>
+              <a:t>CML3112, Week 13, slide 5</a:t>
+            </a:r>
+          </a:p>
+          <a:p>
             <a:r>
               <a:t/>
             </a:r>
           </a:p>
-          <a:p xmlns:a="http://schemas.openxmlformats.org/drawingml/2006/main">
-            <a:r>
-              <a:t>CONNECT</a:t>
-            </a:r>
-          </a:p>
-          <a:p xmlns:a="http://schemas.openxmlformats.org/drawingml/2006/main">
-            <a:r>
-              <a:t>Previous slide: Why this week’s tools are needed.</a:t>
-            </a:r>
-          </a:p>
-          <a:p xmlns:a="http://schemas.openxmlformats.org/drawingml/2006/main">
+          <a:p>
+            <a:r>
+              <a:t>Explanation to give</a:t>
+            </a:r>
+          </a:p>
+          <a:p>
+            <a:r>
+              <a:t>A reproducible handover gives another person enough files and instructions to obtain the reported result from a fresh environment. Saved outputs can survive even when the code no longer produces them.</a:t>
+            </a:r>
+          </a:p>
+          <a:p>
             <a:r>
               <a:t/>
             </a:r>
           </a:p>
-          <a:p xmlns:a="http://schemas.openxmlformats.org/drawingml/2006/main">
-            <a:r>
-              <a:t>EXPLAIN</a:t>
-            </a:r>
-          </a:p>
-          <a:p xmlns:a="http://schemas.openxmlformats.org/drawingml/2006/main">
+          <a:p>
+            <a:r>
+              <a:t>Worked illustration / lecturer answer</a:t>
+            </a:r>
+          </a:p>
+          <a:p>
+            <a:r>
+              <a:t>Restart, load the documented data and run from the first cell. If a later cell relies on a deleted variable, the clean run reveals the missing step. Record the required Python libraries and versions.</a:t>
+            </a:r>
+          </a:p>
+          <a:p>
+            <a:r>
+              <a:t/>
+            </a:r>
+          </a:p>
+          <a:p>
+            <a:r>
+              <a:t>Misconception to address</a:t>
+            </a:r>
+          </a:p>
+          <a:p>
+            <a:r>
+              <a:t>Restarting the runtime clears variables; it does not necessarily restore deleted data files. Re-upload or locate the documented inputs before the fresh run.</a:t>
+            </a:r>
+          </a:p>
+          <a:p>
+            <a:r>
+              <a:t/>
+            </a:r>
+          </a:p>
+          <a:p>
+            <a:r>
+              <a:t>On this slide</a:t>
+            </a:r>
+          </a:p>
+          <a:p>
             <a:r>
               <a:t>Reproducibility: Another person can use the stated data, environment and steps to check the result. Terminology varies; state the operational test.</a:t>
             </a:r>
           </a:p>
-          <a:p xmlns:a="http://schemas.openxmlformats.org/drawingml/2006/main">
+          <a:p>
+            <a:r>
+              <a:t>Dependency: A package your code needs. Record versions actually used, rather than guessing them.</a:t>
+            </a:r>
+          </a:p>
+          <a:p>
             <a:r>
               <a:t/>
             </a:r>
           </a:p>
-          <a:p xmlns:a="http://schemas.openxmlformats.org/drawingml/2006/main">
-            <a:r>
-              <a:t>Dependency: A package your code needs. Record versions actually used, rather than guessing them.</a:t>
-            </a:r>
-          </a:p>
-          <a:p xmlns:a="http://schemas.openxmlformats.org/drawingml/2006/main">
-            <a:r>
-              <a:t/>
-            </a:r>
-          </a:p>
-          <a:p xmlns:a="http://schemas.openxmlformats.org/drawingml/2006/main">
-            <a:r>
-              <a:t>LECTURER CUE</a:t>
-            </a:r>
-          </a:p>
-          <a:p xmlns:a="http://schemas.openxmlformats.org/drawingml/2006/main">
-            <a:r>
-              <a:t>Explain the definitions before running or tracing the example. Point to the line or table row that produces each result.</a:t>
-            </a:r>
-          </a:p>
-          <a:p xmlns:a="http://schemas.openxmlformats.org/drawingml/2006/main">
-            <a:r>
-              <a:t/>
-            </a:r>
-          </a:p>
-          <a:p xmlns:a="http://schemas.openxmlformats.org/drawingml/2006/main">
-            <a:r>
-              <a:t>TEACHING MODE</a:t>
-            </a:r>
-          </a:p>
-          <a:p xmlns:a="http://schemas.openxmlformats.org/drawingml/2006/main">
-            <a:r>
-              <a:t>Demonstrate first. Read each new symbol aloud, trace the values and compare the shown output. Learners repeat worked examples individually after class.</a:t>
-            </a:r>
-          </a:p>
-          <a:p xmlns:a="http://schemas.openxmlformats.org/drawingml/2006/main">
-            <a:r>
-              <a:t/>
-            </a:r>
-          </a:p>
-          <a:p xmlns:a="http://schemas.openxmlformats.org/drawingml/2006/main">
-            <a:r>
-              <a:t>NEXT</a:t>
-            </a:r>
-          </a:p>
-          <a:p xmlns:a="http://schemas.openxmlformats.org/drawingml/2006/main">
-            <a:r>
-              <a:t>Relative path and README.</a:t>
-            </a:r>
-          </a:p>
-          <a:p xmlns:a="http://schemas.openxmlformats.org/drawingml/2006/main">
-            <a:r>
-              <a:t/>
-            </a:r>
-          </a:p>
-          <a:p xmlns:a="http://schemas.openxmlformats.org/drawingml/2006/main">
-            <a:r>
-              <a:t>REFERENCES</a:t>
-            </a:r>
-          </a:p>
-          <a:p xmlns:a="http://schemas.openxmlformats.org/drawingml/2006/main">
-            <a:r>
-              <a:t/>
+          <a:p>
+            <a:r>
+              <a:t>Continue to</a:t>
+            </a:r>
+          </a:p>
+          <a:p>
+            <a:r>
+              <a:t>Relative path and README</a:t>
             </a:r>
           </a:p>
         </p:txBody>
@@ -4235,7 +3840,7 @@
         <p:nvSpPr>
           <p:cNvPr id="4" name="Slide Number Placeholder 3"/>
           <p:cNvSpPr>
-            <a:spLocks xmlns:a="http://schemas.openxmlformats.org/drawingml/2006/main" noGrp="1"/>
+            <a:spLocks noGrp="1"/>
           </p:cNvSpPr>
           <p:nvPr>
             <p:ph type="sldNum" idx="5"/>
@@ -4243,21 +3848,21 @@
         </p:nvSpPr>
         <p:spPr/>
         <p:txBody>
-          <a:bodyPr xmlns:a="http://schemas.openxmlformats.org/drawingml/2006/main"/>
-          <a:lstStyle xmlns:a="http://schemas.openxmlformats.org/drawingml/2006/main"/>
-          <a:p xmlns:a="http://schemas.openxmlformats.org/drawingml/2006/main"/>
+          <a:bodyPr/>
+          <a:lstStyle/>
+          <a:p/>
         </p:txBody>
       </p:sp>
     </p:spTree>
   </p:cSld>
   <p:clrMapOvr>
-    <a:masterClrMapping xmlns:a="http://schemas.openxmlformats.org/drawingml/2006/main"/>
+    <a:masterClrMapping/>
   </p:clrMapOvr>
 </p:notes>
 </file>
 
 <file path=ppt/notesSlides/notesSlide6.xml><?xml version="1.0" encoding="utf-8"?>
-<p:notes xmlns:p="http://schemas.openxmlformats.org/presentationml/2006/main">
+<p:notes xmlns:a="http://schemas.openxmlformats.org/drawingml/2006/main" xmlns:p="http://schemas.openxmlformats.org/presentationml/2006/main">
   <p:cSld>
     <p:spTree>
       <p:nvGrpSpPr>
@@ -4266,13 +3871,13 @@
         <p:nvPr/>
       </p:nvGrpSpPr>
       <p:grpSpPr>
-        <a:xfrm xmlns:a="http://schemas.openxmlformats.org/drawingml/2006/main"/>
+        <a:xfrm/>
       </p:grpSpPr>
       <p:sp>
         <p:nvSpPr>
           <p:cNvPr id="2" name="Slide Image Placeholder 1"/>
           <p:cNvSpPr>
-            <a:spLocks xmlns:a="http://schemas.openxmlformats.org/drawingml/2006/main" noGrp="1"/>
+            <a:spLocks noGrp="1"/>
           </p:cNvSpPr>
           <p:nvPr>
             <p:ph type="sldImg" idx="0"/>
@@ -4284,7 +3889,7 @@
         <p:nvSpPr>
           <p:cNvPr id="3" name="Notes Placeholder 2"/>
           <p:cNvSpPr>
-            <a:spLocks xmlns:a="http://schemas.openxmlformats.org/drawingml/2006/main" noGrp="1"/>
+            <a:spLocks noGrp="1"/>
           </p:cNvSpPr>
           <p:nvPr>
             <p:ph type="body" idx="1"/>
@@ -4292,116 +3897,96 @@
         </p:nvSpPr>
         <p:spPr/>
         <p:txBody>
-          <a:bodyPr xmlns:a="http://schemas.openxmlformats.org/drawingml/2006/main"/>
-          <a:lstStyle xmlns:a="http://schemas.openxmlformats.org/drawingml/2006/main"/>
-          <a:p xmlns:a="http://schemas.openxmlformats.org/drawingml/2006/main">
-            <a:r>
-              <a:t>PURPOSE</a:t>
-            </a:r>
-          </a:p>
-          <a:p xmlns:a="http://schemas.openxmlformats.org/drawingml/2006/main">
+          <a:bodyPr/>
+          <a:lstStyle/>
+          <a:p>
             <a:r>
               <a:t>Relative path and README</a:t>
             </a:r>
           </a:p>
-          <a:p xmlns:a="http://schemas.openxmlformats.org/drawingml/2006/main">
+          <a:p>
+            <a:r>
+              <a:t>CML3112, Week 13, slide 6</a:t>
+            </a:r>
+          </a:p>
+          <a:p>
             <a:r>
               <a:t/>
             </a:r>
           </a:p>
-          <a:p xmlns:a="http://schemas.openxmlformats.org/drawingml/2006/main">
-            <a:r>
-              <a:t>CONNECT</a:t>
-            </a:r>
-          </a:p>
-          <a:p xmlns:a="http://schemas.openxmlformats.org/drawingml/2006/main">
-            <a:r>
-              <a:t>Previous slide: Reproducibility and Dependency.</a:t>
-            </a:r>
-          </a:p>
-          <a:p xmlns:a="http://schemas.openxmlformats.org/drawingml/2006/main">
+          <a:p>
+            <a:r>
+              <a:t>Explanation to give</a:t>
+            </a:r>
+          </a:p>
+          <a:p>
+            <a:r>
+              <a:t>A path identifies where a file is found. A relative path starts from the current working directory. Explain each folder component and the final filename.</a:t>
+            </a:r>
+          </a:p>
+          <a:p>
             <a:r>
               <a:t/>
             </a:r>
           </a:p>
-          <a:p xmlns:a="http://schemas.openxmlformats.org/drawingml/2006/main">
-            <a:r>
-              <a:t>EXPLAIN</a:t>
-            </a:r>
-          </a:p>
-          <a:p xmlns:a="http://schemas.openxmlformats.org/drawingml/2006/main">
+          <a:p>
+            <a:r>
+              <a:t>Worked illustration / lecturer answer</a:t>
+            </a:r>
+          </a:p>
+          <a:p>
+            <a:r>
+              <a:t>data/readings.csv means the readings.csv file inside a data folder under the current working directory. A path from your own Downloads folder will usually fail on another person's machine.</a:t>
+            </a:r>
+          </a:p>
+          <a:p>
+            <a:r>
+              <a:t/>
+            </a:r>
+          </a:p>
+          <a:p>
+            <a:r>
+              <a:t>Misconception to address</a:t>
+            </a:r>
+          </a:p>
+          <a:p>
+            <a:r>
+              <a:t>The working directory is not automatically the notebook's own folder in every tool. Check it and organise the project rather than hard-coding a personal absolute path.</a:t>
+            </a:r>
+          </a:p>
+          <a:p>
+            <a:r>
+              <a:t/>
+            </a:r>
+          </a:p>
+          <a:p>
+            <a:r>
+              <a:t>On this slide</a:t>
+            </a:r>
+          </a:p>
+          <a:p>
             <a:r>
               <a:t>Relative path: A location interpreted from the current working folder. It is not always relative to the notebook file itself.</a:t>
             </a:r>
           </a:p>
-          <a:p xmlns:a="http://schemas.openxmlformats.org/drawingml/2006/main">
+          <a:p>
+            <a:r>
+              <a:t>README: The project’s instructions: question, files, data source, environment, run order, results and limitations.</a:t>
+            </a:r>
+          </a:p>
+          <a:p>
             <a:r>
               <a:t/>
             </a:r>
           </a:p>
-          <a:p xmlns:a="http://schemas.openxmlformats.org/drawingml/2006/main">
-            <a:r>
-              <a:t>README: The project’s instructions: question, files, data source, environment, run order, results and limitations.</a:t>
-            </a:r>
-          </a:p>
-          <a:p xmlns:a="http://schemas.openxmlformats.org/drawingml/2006/main">
-            <a:r>
-              <a:t/>
-            </a:r>
-          </a:p>
-          <a:p xmlns:a="http://schemas.openxmlformats.org/drawingml/2006/main">
-            <a:r>
-              <a:t>LECTURER CUE</a:t>
-            </a:r>
-          </a:p>
-          <a:p xmlns:a="http://schemas.openxmlformats.org/drawingml/2006/main">
-            <a:r>
-              <a:t>Explain the definitions before running or tracing the example. Point to the line or table row that produces each result.</a:t>
-            </a:r>
-          </a:p>
-          <a:p xmlns:a="http://schemas.openxmlformats.org/drawingml/2006/main">
-            <a:r>
-              <a:t/>
-            </a:r>
-          </a:p>
-          <a:p xmlns:a="http://schemas.openxmlformats.org/drawingml/2006/main">
-            <a:r>
-              <a:t>TEACHING MODE</a:t>
-            </a:r>
-          </a:p>
-          <a:p xmlns:a="http://schemas.openxmlformats.org/drawingml/2006/main">
-            <a:r>
-              <a:t>Demonstrate first. Read each new symbol aloud, trace the values and compare the shown output. Learners repeat worked examples individually after class.</a:t>
-            </a:r>
-          </a:p>
-          <a:p xmlns:a="http://schemas.openxmlformats.org/drawingml/2006/main">
-            <a:r>
-              <a:t/>
-            </a:r>
-          </a:p>
-          <a:p xmlns:a="http://schemas.openxmlformats.org/drawingml/2006/main">
-            <a:r>
-              <a:t>NEXT</a:t>
-            </a:r>
-          </a:p>
-          <a:p xmlns:a="http://schemas.openxmlformats.org/drawingml/2006/main">
-            <a:r>
-              <a:t>A useful README.</a:t>
-            </a:r>
-          </a:p>
-          <a:p xmlns:a="http://schemas.openxmlformats.org/drawingml/2006/main">
-            <a:r>
-              <a:t/>
-            </a:r>
-          </a:p>
-          <a:p xmlns:a="http://schemas.openxmlformats.org/drawingml/2006/main">
-            <a:r>
-              <a:t>REFERENCES</a:t>
-            </a:r>
-          </a:p>
-          <a:p xmlns:a="http://schemas.openxmlformats.org/drawingml/2006/main">
-            <a:r>
-              <a:t/>
+          <a:p>
+            <a:r>
+              <a:t>Continue to</a:t>
+            </a:r>
+          </a:p>
+          <a:p>
+            <a:r>
+              <a:t>A useful README</a:t>
             </a:r>
           </a:p>
         </p:txBody>
@@ -4410,7 +3995,7 @@
         <p:nvSpPr>
           <p:cNvPr id="4" name="Slide Number Placeholder 3"/>
           <p:cNvSpPr>
-            <a:spLocks xmlns:a="http://schemas.openxmlformats.org/drawingml/2006/main" noGrp="1"/>
+            <a:spLocks noGrp="1"/>
           </p:cNvSpPr>
           <p:nvPr>
             <p:ph type="sldNum" idx="5"/>
@@ -4418,21 +4003,21 @@
         </p:nvSpPr>
         <p:spPr/>
         <p:txBody>
-          <a:bodyPr xmlns:a="http://schemas.openxmlformats.org/drawingml/2006/main"/>
-          <a:lstStyle xmlns:a="http://schemas.openxmlformats.org/drawingml/2006/main"/>
-          <a:p xmlns:a="http://schemas.openxmlformats.org/drawingml/2006/main"/>
+          <a:bodyPr/>
+          <a:lstStyle/>
+          <a:p/>
         </p:txBody>
       </p:sp>
     </p:spTree>
   </p:cSld>
   <p:clrMapOvr>
-    <a:masterClrMapping xmlns:a="http://schemas.openxmlformats.org/drawingml/2006/main"/>
+    <a:masterClrMapping/>
   </p:clrMapOvr>
 </p:notes>
 </file>
 
 <file path=ppt/notesSlides/notesSlide7.xml><?xml version="1.0" encoding="utf-8"?>
-<p:notes xmlns:p="http://schemas.openxmlformats.org/presentationml/2006/main">
+<p:notes xmlns:a="http://schemas.openxmlformats.org/drawingml/2006/main" xmlns:p="http://schemas.openxmlformats.org/presentationml/2006/main">
   <p:cSld>
     <p:spTree>
       <p:nvGrpSpPr>
@@ -4441,13 +4026,13 @@
         <p:nvPr/>
       </p:nvGrpSpPr>
       <p:grpSpPr>
-        <a:xfrm xmlns:a="http://schemas.openxmlformats.org/drawingml/2006/main"/>
+        <a:xfrm/>
       </p:grpSpPr>
       <p:sp>
         <p:nvSpPr>
           <p:cNvPr id="2" name="Slide Image Placeholder 1"/>
           <p:cNvSpPr>
-            <a:spLocks xmlns:a="http://schemas.openxmlformats.org/drawingml/2006/main" noGrp="1"/>
+            <a:spLocks noGrp="1"/>
           </p:cNvSpPr>
           <p:nvPr>
             <p:ph type="sldImg" idx="0"/>
@@ -4459,7 +4044,7 @@
         <p:nvSpPr>
           <p:cNvPr id="3" name="Notes Placeholder 2"/>
           <p:cNvSpPr>
-            <a:spLocks xmlns:a="http://schemas.openxmlformats.org/drawingml/2006/main" noGrp="1"/>
+            <a:spLocks noGrp="1"/>
           </p:cNvSpPr>
           <p:nvPr>
             <p:ph type="body" idx="1"/>
@@ -4467,136 +4052,121 @@
         </p:nvSpPr>
         <p:spPr/>
         <p:txBody>
-          <a:bodyPr xmlns:a="http://schemas.openxmlformats.org/drawingml/2006/main"/>
-          <a:lstStyle xmlns:a="http://schemas.openxmlformats.org/drawingml/2006/main"/>
-          <a:p xmlns:a="http://schemas.openxmlformats.org/drawingml/2006/main">
-            <a:r>
-              <a:t>PURPOSE</a:t>
-            </a:r>
-          </a:p>
-          <a:p xmlns:a="http://schemas.openxmlformats.org/drawingml/2006/main">
+          <a:bodyPr/>
+          <a:lstStyle/>
+          <a:p>
             <a:r>
               <a:t>A useful README</a:t>
             </a:r>
           </a:p>
-          <a:p xmlns:a="http://schemas.openxmlformats.org/drawingml/2006/main">
+          <a:p>
+            <a:r>
+              <a:t>CML3112, Week 13, slide 7</a:t>
+            </a:r>
+          </a:p>
+          <a:p>
             <a:r>
               <a:t/>
             </a:r>
           </a:p>
-          <a:p xmlns:a="http://schemas.openxmlformats.org/drawingml/2006/main">
-            <a:r>
-              <a:t>CONNECT</a:t>
-            </a:r>
-          </a:p>
-          <a:p xmlns:a="http://schemas.openxmlformats.org/drawingml/2006/main">
-            <a:r>
-              <a:t>Previous slide: Relative path and README.</a:t>
-            </a:r>
-          </a:p>
-          <a:p xmlns:a="http://schemas.openxmlformats.org/drawingml/2006/main">
+          <a:p>
+            <a:r>
+              <a:t>Explanation to give</a:t>
+            </a:r>
+          </a:p>
+          <a:p>
+            <a:r>
+              <a:t>Treat the README as instructions for someone opening the project for the first time. Name the files, setup requirements, entry notebook and exact order needed to reproduce the result.</a:t>
+            </a:r>
+          </a:p>
+          <a:p>
             <a:r>
               <a:t/>
             </a:r>
           </a:p>
-          <a:p xmlns:a="http://schemas.openxmlformats.org/drawingml/2006/main">
-            <a:r>
-              <a:t>EXPLAIN</a:t>
-            </a:r>
-          </a:p>
-          <a:p xmlns:a="http://schemas.openxmlformats.org/drawingml/2006/main">
+          <a:p>
+            <a:r>
+              <a:t>Worked illustration / lecturer answer</a:t>
+            </a:r>
+          </a:p>
+          <a:p>
+            <a:r>
+              <a:t>Replace “run the analysis” with “Open analysis.ipynb, place readings.csv in data/, restart the runtime and run all cells.” A useful repair comment names the failed step and the corrected filename.</a:t>
+            </a:r>
+          </a:p>
+          <a:p>
+            <a:r>
+              <a:t/>
+            </a:r>
+          </a:p>
+          <a:p>
+            <a:r>
+              <a:t>Misconception to address</a:t>
+            </a:r>
+          </a:p>
+          <a:p>
+            <a:r>
+              <a:t>A repository URL proves a location exists, not that the work runs or was submitted. Contribution claims should point to specific work, not only a count of commits.</a:t>
+            </a:r>
+          </a:p>
+          <a:p>
+            <a:r>
+              <a:t/>
+            </a:r>
+          </a:p>
+          <a:p>
+            <a:r>
+              <a:t>On this slide</a:t>
+            </a:r>
+          </a:p>
+          <a:p>
             <a:r>
               <a:t>State the engineering question and target unit.</a:t>
             </a:r>
           </a:p>
-          <a:p xmlns:a="http://schemas.openxmlformats.org/drawingml/2006/main">
+          <a:p>
             <a:r>
               <a:t/>
             </a:r>
           </a:p>
-          <a:p xmlns:a="http://schemas.openxmlformats.org/drawingml/2006/main">
+          <a:p>
             <a:r>
               <a:t>List the supplied data and required software versions.</a:t>
             </a:r>
           </a:p>
-          <a:p xmlns:a="http://schemas.openxmlformats.org/drawingml/2006/main">
+          <a:p>
             <a:r>
               <a:t/>
             </a:r>
           </a:p>
-          <a:p xmlns:a="http://schemas.openxmlformats.org/drawingml/2006/main">
+          <a:p>
             <a:r>
               <a:t>Give the order for running the notebook from a fresh session.</a:t>
             </a:r>
           </a:p>
-          <a:p xmlns:a="http://schemas.openxmlformats.org/drawingml/2006/main">
+          <a:p>
             <a:r>
               <a:t/>
             </a:r>
           </a:p>
-          <a:p xmlns:a="http://schemas.openxmlformats.org/drawingml/2006/main">
+          <a:p>
             <a:r>
               <a:t>State limitations and each member’s contribution.</a:t>
             </a:r>
           </a:p>
-          <a:p xmlns:a="http://schemas.openxmlformats.org/drawingml/2006/main">
+          <a:p>
             <a:r>
               <a:t/>
             </a:r>
           </a:p>
-          <a:p xmlns:a="http://schemas.openxmlformats.org/drawingml/2006/main">
-            <a:r>
-              <a:t>LECTURER CUE</a:t>
-            </a:r>
-          </a:p>
-          <a:p xmlns:a="http://schemas.openxmlformats.org/drawingml/2006/main">
-            <a:r>
-              <a:t>Explain the definitions before running or tracing the example. Point to the line or table row that produces each result.</a:t>
-            </a:r>
-          </a:p>
-          <a:p xmlns:a="http://schemas.openxmlformats.org/drawingml/2006/main">
-            <a:r>
-              <a:t/>
-            </a:r>
-          </a:p>
-          <a:p xmlns:a="http://schemas.openxmlformats.org/drawingml/2006/main">
-            <a:r>
-              <a:t>TEACHING MODE</a:t>
-            </a:r>
-          </a:p>
-          <a:p xmlns:a="http://schemas.openxmlformats.org/drawingml/2006/main">
-            <a:r>
-              <a:t>Demonstrate first. Read each new symbol aloud, trace the values and compare the shown output. Learners repeat worked examples individually after class.</a:t>
-            </a:r>
-          </a:p>
-          <a:p xmlns:a="http://schemas.openxmlformats.org/drawingml/2006/main">
-            <a:r>
-              <a:t/>
-            </a:r>
-          </a:p>
-          <a:p xmlns:a="http://schemas.openxmlformats.org/drawingml/2006/main">
-            <a:r>
-              <a:t>NEXT</a:t>
-            </a:r>
-          </a:p>
-          <a:p xmlns:a="http://schemas.openxmlformats.org/drawingml/2006/main">
-            <a:r>
-              <a:t>Someone else needs to reproduce the result.</a:t>
-            </a:r>
-          </a:p>
-          <a:p xmlns:a="http://schemas.openxmlformats.org/drawingml/2006/main">
-            <a:r>
-              <a:t/>
-            </a:r>
-          </a:p>
-          <a:p xmlns:a="http://schemas.openxmlformats.org/drawingml/2006/main">
-            <a:r>
-              <a:t>REFERENCES</a:t>
-            </a:r>
-          </a:p>
-          <a:p xmlns:a="http://schemas.openxmlformats.org/drawingml/2006/main">
-            <a:r>
-              <a:t/>
+          <a:p>
+            <a:r>
+              <a:t>Continue to</a:t>
+            </a:r>
+          </a:p>
+          <a:p>
+            <a:r>
+              <a:t>Someone else needs to reproduce the result</a:t>
             </a:r>
           </a:p>
         </p:txBody>
@@ -4605,7 +4175,7 @@
         <p:nvSpPr>
           <p:cNvPr id="4" name="Slide Number Placeholder 3"/>
           <p:cNvSpPr>
-            <a:spLocks xmlns:a="http://schemas.openxmlformats.org/drawingml/2006/main" noGrp="1"/>
+            <a:spLocks noGrp="1"/>
           </p:cNvSpPr>
           <p:nvPr>
             <p:ph type="sldNum" idx="5"/>
@@ -4613,21 +4183,21 @@
         </p:nvSpPr>
         <p:spPr/>
         <p:txBody>
-          <a:bodyPr xmlns:a="http://schemas.openxmlformats.org/drawingml/2006/main"/>
-          <a:lstStyle xmlns:a="http://schemas.openxmlformats.org/drawingml/2006/main"/>
-          <a:p xmlns:a="http://schemas.openxmlformats.org/drawingml/2006/main"/>
+          <a:bodyPr/>
+          <a:lstStyle/>
+          <a:p/>
         </p:txBody>
       </p:sp>
     </p:spTree>
   </p:cSld>
   <p:clrMapOvr>
-    <a:masterClrMapping xmlns:a="http://schemas.openxmlformats.org/drawingml/2006/main"/>
+    <a:masterClrMapping/>
   </p:clrMapOvr>
 </p:notes>
 </file>
 
 <file path=ppt/notesSlides/notesSlide8.xml><?xml version="1.0" encoding="utf-8"?>
-<p:notes xmlns:p="http://schemas.openxmlformats.org/presentationml/2006/main">
+<p:notes xmlns:a="http://schemas.openxmlformats.org/drawingml/2006/main" xmlns:p="http://schemas.openxmlformats.org/presentationml/2006/main">
   <p:cSld>
     <p:spTree>
       <p:nvGrpSpPr>
@@ -4636,13 +4206,13 @@
         <p:nvPr/>
       </p:nvGrpSpPr>
       <p:grpSpPr>
-        <a:xfrm xmlns:a="http://schemas.openxmlformats.org/drawingml/2006/main"/>
+        <a:xfrm/>
       </p:grpSpPr>
       <p:sp>
         <p:nvSpPr>
           <p:cNvPr id="2" name="Slide Image Placeholder 1"/>
           <p:cNvSpPr>
-            <a:spLocks xmlns:a="http://schemas.openxmlformats.org/drawingml/2006/main" noGrp="1"/>
+            <a:spLocks noGrp="1"/>
           </p:cNvSpPr>
           <p:nvPr>
             <p:ph type="sldImg" idx="0"/>
@@ -4654,7 +4224,7 @@
         <p:nvSpPr>
           <p:cNvPr id="3" name="Notes Placeholder 2"/>
           <p:cNvSpPr>
-            <a:spLocks xmlns:a="http://schemas.openxmlformats.org/drawingml/2006/main" noGrp="1"/>
+            <a:spLocks noGrp="1"/>
           </p:cNvSpPr>
           <p:nvPr>
             <p:ph type="body" idx="1"/>
@@ -4662,106 +4232,91 @@
         </p:nvSpPr>
         <p:spPr/>
         <p:txBody>
-          <a:bodyPr xmlns:a="http://schemas.openxmlformats.org/drawingml/2006/main"/>
-          <a:lstStyle xmlns:a="http://schemas.openxmlformats.org/drawingml/2006/main"/>
-          <a:p xmlns:a="http://schemas.openxmlformats.org/drawingml/2006/main">
-            <a:r>
-              <a:t>PURPOSE</a:t>
-            </a:r>
-          </a:p>
-          <a:p xmlns:a="http://schemas.openxmlformats.org/drawingml/2006/main">
+          <a:bodyPr/>
+          <a:lstStyle/>
+          <a:p>
             <a:r>
               <a:t>Someone else needs to reproduce the result</a:t>
             </a:r>
           </a:p>
-          <a:p xmlns:a="http://schemas.openxmlformats.org/drawingml/2006/main">
+          <a:p>
+            <a:r>
+              <a:t>CML3112, Week 13, slide 8</a:t>
+            </a:r>
+          </a:p>
+          <a:p>
             <a:r>
               <a:t/>
             </a:r>
           </a:p>
-          <a:p xmlns:a="http://schemas.openxmlformats.org/drawingml/2006/main">
-            <a:r>
-              <a:t>CONNECT</a:t>
-            </a:r>
-          </a:p>
-          <a:p xmlns:a="http://schemas.openxmlformats.org/drawingml/2006/main">
-            <a:r>
-              <a:t>Previous slide: A useful README.</a:t>
-            </a:r>
-          </a:p>
-          <a:p xmlns:a="http://schemas.openxmlformats.org/drawingml/2006/main">
+          <a:p>
+            <a:r>
+              <a:t>Explanation to give</a:t>
+            </a:r>
+          </a:p>
+          <a:p>
+            <a:r>
+              <a:t>Describe a handover as a reproducibility test carried out with only the delivered files and written directions. The person checking it should not need your memory of previous actions.</a:t>
+            </a:r>
+          </a:p>
+          <a:p>
             <a:r>
               <a:t/>
             </a:r>
           </a:p>
-          <a:p xmlns:a="http://schemas.openxmlformats.org/drawingml/2006/main">
-            <a:r>
-              <a:t>EXPLAIN</a:t>
-            </a:r>
-          </a:p>
-          <a:p xmlns:a="http://schemas.openxmlformats.org/drawingml/2006/main">
+          <a:p>
+            <a:r>
+              <a:t>Worked illustration / lecturer answer</a:t>
+            </a:r>
+          </a:p>
+          <a:p>
+            <a:r>
+              <a:t>Close the runtime, start fresh and follow the README literally. If it names data.csv while the folder contains readings.csv, repair the instructions and repeat the check.</a:t>
+            </a:r>
+          </a:p>
+          <a:p>
+            <a:r>
+              <a:t/>
+            </a:r>
+          </a:p>
+          <a:p>
+            <a:r>
+              <a:t>Misconception to address</a:t>
+            </a:r>
+          </a:p>
+          <a:p>
+            <a:r>
+              <a:t>A screenshot of a successful old output is not proof that today's package works from a clean start.</a:t>
+            </a:r>
+          </a:p>
+          <a:p>
+            <a:r>
+              <a:t/>
+            </a:r>
+          </a:p>
+          <a:p>
+            <a:r>
+              <a:t>On this slide</a:t>
+            </a:r>
+          </a:p>
+          <a:p>
             <a:r>
               <a:t>Which instructions would a new user need?</a:t>
             </a:r>
           </a:p>
-          <a:p xmlns:a="http://schemas.openxmlformats.org/drawingml/2006/main">
+          <a:p>
             <a:r>
               <a:t/>
             </a:r>
           </a:p>
-          <a:p xmlns:a="http://schemas.openxmlformats.org/drawingml/2006/main">
-            <a:r>
-              <a:t>LECTURER CUE</a:t>
-            </a:r>
-          </a:p>
-          <a:p xmlns:a="http://schemas.openxmlformats.org/drawingml/2006/main">
-            <a:r>
-              <a:t>Ask students to describe what they see before introducing terminology. Generated conceptual teaching illustration.  Source: figs/experiential/ASSET_SOURCES.md.</a:t>
-            </a:r>
-          </a:p>
-          <a:p xmlns:a="http://schemas.openxmlformats.org/drawingml/2006/main">
-            <a:r>
-              <a:t/>
-            </a:r>
-          </a:p>
-          <a:p xmlns:a="http://schemas.openxmlformats.org/drawingml/2006/main">
-            <a:r>
-              <a:t>TEACHING MODE</a:t>
-            </a:r>
-          </a:p>
-          <a:p xmlns:a="http://schemas.openxmlformats.org/drawingml/2006/main">
-            <a:r>
-              <a:t>Demonstrate first. Read each new symbol aloud, trace the values and compare the shown output. Learners repeat worked examples individually after class.</a:t>
-            </a:r>
-          </a:p>
-          <a:p xmlns:a="http://schemas.openxmlformats.org/drawingml/2006/main">
-            <a:r>
-              <a:t/>
-            </a:r>
-          </a:p>
-          <a:p xmlns:a="http://schemas.openxmlformats.org/drawingml/2006/main">
-            <a:r>
-              <a:t>NEXT</a:t>
-            </a:r>
-          </a:p>
-          <a:p xmlns:a="http://schemas.openxmlformats.org/drawingml/2006/main">
-            <a:r>
-              <a:t>A reproducible notebook starts fresh.</a:t>
-            </a:r>
-          </a:p>
-          <a:p xmlns:a="http://schemas.openxmlformats.org/drawingml/2006/main">
-            <a:r>
-              <a:t/>
-            </a:r>
-          </a:p>
-          <a:p xmlns:a="http://schemas.openxmlformats.org/drawingml/2006/main">
-            <a:r>
-              <a:t>REFERENCES</a:t>
-            </a:r>
-          </a:p>
-          <a:p xmlns:a="http://schemas.openxmlformats.org/drawingml/2006/main">
-            <a:r>
-              <a:t/>
+          <a:p>
+            <a:r>
+              <a:t>Continue to</a:t>
+            </a:r>
+          </a:p>
+          <a:p>
+            <a:r>
+              <a:t>A reproducible notebook starts fresh</a:t>
             </a:r>
           </a:p>
         </p:txBody>
@@ -4770,7 +4325,7 @@
         <p:nvSpPr>
           <p:cNvPr id="4" name="Slide Number Placeholder 3"/>
           <p:cNvSpPr>
-            <a:spLocks xmlns:a="http://schemas.openxmlformats.org/drawingml/2006/main" noGrp="1"/>
+            <a:spLocks noGrp="1"/>
           </p:cNvSpPr>
           <p:nvPr>
             <p:ph type="sldNum" idx="5"/>
@@ -4778,21 +4333,21 @@
         </p:nvSpPr>
         <p:spPr/>
         <p:txBody>
-          <a:bodyPr xmlns:a="http://schemas.openxmlformats.org/drawingml/2006/main"/>
-          <a:lstStyle xmlns:a="http://schemas.openxmlformats.org/drawingml/2006/main"/>
-          <a:p xmlns:a="http://schemas.openxmlformats.org/drawingml/2006/main"/>
+          <a:bodyPr/>
+          <a:lstStyle/>
+          <a:p/>
         </p:txBody>
       </p:sp>
     </p:spTree>
   </p:cSld>
   <p:clrMapOvr>
-    <a:masterClrMapping xmlns:a="http://schemas.openxmlformats.org/drawingml/2006/main"/>
+    <a:masterClrMapping/>
   </p:clrMapOvr>
 </p:notes>
 </file>
 
 <file path=ppt/notesSlides/notesSlide9.xml><?xml version="1.0" encoding="utf-8"?>
-<p:notes xmlns:p="http://schemas.openxmlformats.org/presentationml/2006/main">
+<p:notes xmlns:a="http://schemas.openxmlformats.org/drawingml/2006/main" xmlns:p="http://schemas.openxmlformats.org/presentationml/2006/main">
   <p:cSld>
     <p:spTree>
       <p:nvGrpSpPr>
@@ -4801,13 +4356,13 @@
         <p:nvPr/>
       </p:nvGrpSpPr>
       <p:grpSpPr>
-        <a:xfrm xmlns:a="http://schemas.openxmlformats.org/drawingml/2006/main"/>
+        <a:xfrm/>
       </p:grpSpPr>
       <p:sp>
         <p:nvSpPr>
           <p:cNvPr id="2" name="Slide Image Placeholder 1"/>
           <p:cNvSpPr>
-            <a:spLocks xmlns:a="http://schemas.openxmlformats.org/drawingml/2006/main" noGrp="1"/>
+            <a:spLocks noGrp="1"/>
           </p:cNvSpPr>
           <p:nvPr>
             <p:ph type="sldImg" idx="0"/>
@@ -4819,7 +4374,7 @@
         <p:nvSpPr>
           <p:cNvPr id="3" name="Notes Placeholder 2"/>
           <p:cNvSpPr>
-            <a:spLocks xmlns:a="http://schemas.openxmlformats.org/drawingml/2006/main" noGrp="1"/>
+            <a:spLocks noGrp="1"/>
           </p:cNvSpPr>
           <p:nvPr>
             <p:ph type="body" idx="1"/>
@@ -4827,111 +4382,91 @@
         </p:nvSpPr>
         <p:spPr/>
         <p:txBody>
-          <a:bodyPr xmlns:a="http://schemas.openxmlformats.org/drawingml/2006/main"/>
-          <a:lstStyle xmlns:a="http://schemas.openxmlformats.org/drawingml/2006/main"/>
-          <a:p xmlns:a="http://schemas.openxmlformats.org/drawingml/2006/main">
-            <a:r>
-              <a:t>PURPOSE</a:t>
-            </a:r>
-          </a:p>
-          <a:p xmlns:a="http://schemas.openxmlformats.org/drawingml/2006/main">
+          <a:bodyPr/>
+          <a:lstStyle/>
+          <a:p>
             <a:r>
               <a:t>A reproducible notebook starts fresh</a:t>
             </a:r>
           </a:p>
-          <a:p xmlns:a="http://schemas.openxmlformats.org/drawingml/2006/main">
+          <a:p>
+            <a:r>
+              <a:t>CML3112, Week 13, slide 9</a:t>
+            </a:r>
+          </a:p>
+          <a:p>
             <a:r>
               <a:t/>
             </a:r>
           </a:p>
-          <a:p xmlns:a="http://schemas.openxmlformats.org/drawingml/2006/main">
-            <a:r>
-              <a:t>CONNECT</a:t>
-            </a:r>
-          </a:p>
-          <a:p xmlns:a="http://schemas.openxmlformats.org/drawingml/2006/main">
-            <a:r>
-              <a:t>Previous slide: Someone else needs to reproduce the result.</a:t>
-            </a:r>
-          </a:p>
-          <a:p xmlns:a="http://schemas.openxmlformats.org/drawingml/2006/main">
+          <a:p>
+            <a:r>
+              <a:t>Explanation to give</a:t>
+            </a:r>
+          </a:p>
+          <a:p>
+            <a:r>
+              <a:t>A reproducible handover gives another person enough files and instructions to obtain the reported result from a fresh environment. Saved outputs can survive even when the code no longer produces them.</a:t>
+            </a:r>
+          </a:p>
+          <a:p>
             <a:r>
               <a:t/>
             </a:r>
           </a:p>
-          <a:p xmlns:a="http://schemas.openxmlformats.org/drawingml/2006/main">
-            <a:r>
-              <a:t>EXPLAIN</a:t>
-            </a:r>
-          </a:p>
-          <a:p xmlns:a="http://schemas.openxmlformats.org/drawingml/2006/main">
+          <a:p>
+            <a:r>
+              <a:t>Worked illustration / lecturer answer</a:t>
+            </a:r>
+          </a:p>
+          <a:p>
+            <a:r>
+              <a:t>Restart, load the documented data and run from the first cell. If a later cell relies on a deleted variable, the clean run reveals the missing step. Record the required Python libraries and versions.</a:t>
+            </a:r>
+          </a:p>
+          <a:p>
+            <a:r>
+              <a:t/>
+            </a:r>
+          </a:p>
+          <a:p>
+            <a:r>
+              <a:t>Misconception to address</a:t>
+            </a:r>
+          </a:p>
+          <a:p>
+            <a:r>
+              <a:t>Restarting the runtime clears variables; it does not necessarily restore deleted data files. Re-upload or locate the documented inputs before the fresh run.</a:t>
+            </a:r>
+          </a:p>
+          <a:p>
+            <a:r>
+              <a:t/>
+            </a:r>
+          </a:p>
+          <a:p>
+            <a:r>
+              <a:t>On this slide</a:t>
+            </a:r>
+          </a:p>
+          <a:p>
             <a:r>
               <a:t>The saved outputs must agree with a fresh run in the stated order.</a:t>
             </a:r>
           </a:p>
-          <a:p xmlns:a="http://schemas.openxmlformats.org/drawingml/2006/main">
+          <a:p>
             <a:r>
               <a:t/>
             </a:r>
           </a:p>
-          <a:p xmlns:a="http://schemas.openxmlformats.org/drawingml/2006/main">
-            <a:r>
-              <a:t>LECTURER CUE</a:t>
-            </a:r>
-          </a:p>
-          <a:p xmlns:a="http://schemas.openxmlformats.org/drawingml/2006/main">
-            <a:r>
-              <a:t>Demonstrate restarting, uploading the issued data, and running all. The same result also depends on data, package versions and any random seeds.</a:t>
-            </a:r>
-          </a:p>
-          <a:p xmlns:a="http://schemas.openxmlformats.org/drawingml/2006/main">
-            <a:r>
-              <a:t>Source: existing course illustration figs/execution_trap.png. These are illustrative examples, not this cohort’s assessed results.</a:t>
-            </a:r>
-          </a:p>
-          <a:p xmlns:a="http://schemas.openxmlformats.org/drawingml/2006/main">
-            <a:r>
-              <a:t/>
-            </a:r>
-          </a:p>
-          <a:p xmlns:a="http://schemas.openxmlformats.org/drawingml/2006/main">
-            <a:r>
-              <a:t>TEACHING MODE</a:t>
-            </a:r>
-          </a:p>
-          <a:p xmlns:a="http://schemas.openxmlformats.org/drawingml/2006/main">
-            <a:r>
-              <a:t>Demonstrate first. Read each new symbol aloud, trace the values and compare the shown output. Learners repeat worked examples individually after class.</a:t>
-            </a:r>
-          </a:p>
-          <a:p xmlns:a="http://schemas.openxmlformats.org/drawingml/2006/main">
-            <a:r>
-              <a:t/>
-            </a:r>
-          </a:p>
-          <a:p xmlns:a="http://schemas.openxmlformats.org/drawingml/2006/main">
-            <a:r>
-              <a:t>NEXT</a:t>
-            </a:r>
-          </a:p>
-          <a:p xmlns:a="http://schemas.openxmlformats.org/drawingml/2006/main">
-            <a:r>
-              <a:t>Saved outputs can hide missing steps.</a:t>
-            </a:r>
-          </a:p>
-          <a:p xmlns:a="http://schemas.openxmlformats.org/drawingml/2006/main">
-            <a:r>
-              <a:t/>
-            </a:r>
-          </a:p>
-          <a:p xmlns:a="http://schemas.openxmlformats.org/drawingml/2006/main">
-            <a:r>
-              <a:t>REFERENCES</a:t>
-            </a:r>
-          </a:p>
-          <a:p xmlns:a="http://schemas.openxmlformats.org/drawingml/2006/main">
-            <a:r>
-              <a:t>Source: existing course illustration figs/execution_trap.png. These are illustrative examples, not this cohort’s assessed results.</a:t>
+          <a:p>
+            <a:r>
+              <a:t>Continue to</a:t>
+            </a:r>
+          </a:p>
+          <a:p>
+            <a:r>
+              <a:t>Saved outputs can hide missing steps</a:t>
             </a:r>
           </a:p>
         </p:txBody>
@@ -4940,7 +4475,7 @@
         <p:nvSpPr>
           <p:cNvPr id="4" name="Slide Number Placeholder 3"/>
           <p:cNvSpPr>
-            <a:spLocks xmlns:a="http://schemas.openxmlformats.org/drawingml/2006/main" noGrp="1"/>
+            <a:spLocks noGrp="1"/>
           </p:cNvSpPr>
           <p:nvPr>
             <p:ph type="sldNum" idx="5"/>
@@ -4948,15 +4483,15 @@
         </p:nvSpPr>
         <p:spPr/>
         <p:txBody>
-          <a:bodyPr xmlns:a="http://schemas.openxmlformats.org/drawingml/2006/main"/>
-          <a:lstStyle xmlns:a="http://schemas.openxmlformats.org/drawingml/2006/main"/>
-          <a:p xmlns:a="http://schemas.openxmlformats.org/drawingml/2006/main"/>
+          <a:bodyPr/>
+          <a:lstStyle/>
+          <a:p/>
         </p:txBody>
       </p:sp>
     </p:spTree>
   </p:cSld>
   <p:clrMapOvr>
-    <a:masterClrMapping xmlns:a="http://schemas.openxmlformats.org/drawingml/2006/main"/>
+    <a:masterClrMapping/>
   </p:clrMapOvr>
 </p:notes>
 </file>
@@ -15023,11 +14558,11 @@
 </file>
 
 <file path=ppt/slides/slide23.xml><?xml version="1.0" encoding="utf-8"?>
-<p:sld xmlns:p="http://schemas.openxmlformats.org/presentationml/2006/main">
+<p:sld xmlns:a="http://schemas.openxmlformats.org/drawingml/2006/main" xmlns:ns2="http://schemas.microsoft.com/office/drawing/2014/main" xmlns:ns4="http://schemas.microsoft.com/office/powerpoint/2010/main" xmlns:p="http://schemas.openxmlformats.org/presentationml/2006/main" xmlns:r="http://schemas.openxmlformats.org/officeDocument/2006/relationships">
   <p:cSld>
     <p:bg>
       <p:bgPr>
-        <a:solidFill xmlns:a="http://schemas.openxmlformats.org/drawingml/2006/main">
+        <a:solidFill>
           <a:srgbClr val="FFFFFF"/>
         </a:solidFill>
       </p:bgPr>
@@ -15039,34 +14574,34 @@
         <p:nvPr/>
       </p:nvGrpSpPr>
       <p:grpSpPr>
-        <a:xfrm xmlns:a="http://schemas.openxmlformats.org/drawingml/2006/main"/>
+        <a:xfrm/>
       </p:grpSpPr>
       <p:sp>
         <p:nvSpPr>
           <p:cNvPr id="18" name="">
-            <a:extLst xmlns:a="http://schemas.openxmlformats.org/drawingml/2006/main">
-              <a:ext uri="{FF2B5EF4-FFF2-40B4-BE49-F238E27FC236}">
-                <a16:creationId xmlns:a16="http://schemas.microsoft.com/office/drawing/2014/main" id="{CB4796DF-237E-4AB0-A784-101EB2EFEFC3}"/>
-              </a:ext>
-            </a:extLst>
-          </p:cNvPr>
-          <p:cNvSpPr>
-            <a:spLocks xmlns:a="http://schemas.openxmlformats.org/drawingml/2006/main" noGrp="1"/>
-          </p:cNvSpPr>
-          <p:nvPr/>
-        </p:nvSpPr>
-        <p:spPr>
-          <a:xfrm xmlns:a="http://schemas.openxmlformats.org/drawingml/2006/main">
+            <a:extLst>
+              <a:ext uri="{FF2B5EF4-FFF2-40B4-BE49-F238E27FC236}">
+                <ns2:creationId id="{CB4796DF-237E-4AB0-A784-101EB2EFEFC3}"/>
+              </a:ext>
+            </a:extLst>
+          </p:cNvPr>
+          <p:cNvSpPr>
+            <a:spLocks noGrp="1"/>
+          </p:cNvSpPr>
+          <p:nvPr/>
+        </p:nvSpPr>
+        <p:spPr>
+          <a:xfrm>
             <a:off x="0" y="0"/>
             <a:ext cx="12191695" cy="1390650"/>
           </a:xfrm>
-          <a:prstGeom xmlns:a="http://schemas.openxmlformats.org/drawingml/2006/main" prst="rect">
-            <a:avLst/>
-          </a:prstGeom>
-          <a:solidFill xmlns:a="http://schemas.openxmlformats.org/drawingml/2006/main">
+          <a:prstGeom prst="rect">
+            <a:avLst/>
+          </a:prstGeom>
+          <a:solidFill>
             <a:srgbClr val="1C3144"/>
           </a:solidFill>
-          <a:ln xmlns:a="http://schemas.openxmlformats.org/drawingml/2006/main" w="0">
+          <a:ln w="0">
             <a:noFill/>
           </a:ln>
         </p:spPr>
@@ -15074,36 +14609,36 @@
       <p:sp>
         <p:nvSpPr>
           <p:cNvPr id="2" name="">
-            <a:extLst xmlns:a="http://schemas.openxmlformats.org/drawingml/2006/main">
-              <a:ext uri="{FF2B5EF4-FFF2-40B4-BE49-F238E27FC236}">
-                <a16:creationId xmlns:a16="http://schemas.microsoft.com/office/drawing/2014/main" id="{F8963FE1-0F6D-46BF-A210-E9EA2741F27C}"/>
-              </a:ext>
-            </a:extLst>
-          </p:cNvPr>
-          <p:cNvSpPr>
-            <a:spLocks xmlns:a="http://schemas.openxmlformats.org/drawingml/2006/main" noGrp="1"/>
-          </p:cNvSpPr>
-          <p:nvPr/>
-        </p:nvSpPr>
-        <p:spPr>
-          <a:xfrm xmlns:a="http://schemas.openxmlformats.org/drawingml/2006/main">
+            <a:extLst>
+              <a:ext uri="{FF2B5EF4-FFF2-40B4-BE49-F238E27FC236}">
+                <ns2:creationId id="{F8963FE1-0F6D-46BF-A210-E9EA2741F27C}"/>
+              </a:ext>
+            </a:extLst>
+          </p:cNvPr>
+          <p:cNvSpPr>
+            <a:spLocks noGrp="1"/>
+          </p:cNvSpPr>
+          <p:nvPr/>
+        </p:nvSpPr>
+        <p:spPr>
+          <a:xfrm>
             <a:off x="590550" y="180975"/>
             <a:ext cx="11049000" cy="285750"/>
           </a:xfrm>
-          <a:prstGeom xmlns:a="http://schemas.openxmlformats.org/drawingml/2006/main" prst="rect">
-            <a:avLst/>
-          </a:prstGeom>
-          <a:noFill xmlns:a="http://schemas.openxmlformats.org/drawingml/2006/main"/>
-          <a:ln xmlns:a="http://schemas.openxmlformats.org/drawingml/2006/main" w="0">
-            <a:noFill/>
-          </a:ln>
-        </p:spPr>
-        <p:txBody>
-          <a:bodyPr xmlns:a="http://schemas.openxmlformats.org/drawingml/2006/main">
+          <a:prstGeom prst="rect">
+            <a:avLst/>
+          </a:prstGeom>
+          <a:noFill/>
+          <a:ln w="0">
+            <a:noFill/>
+          </a:ln>
+        </p:spPr>
+        <p:txBody>
+          <a:bodyPr>
             <a:noAutofit/>
           </a:bodyPr>
-          <a:lstStyle xmlns:a="http://schemas.openxmlformats.org/drawingml/2006/main"/>
-          <a:p xmlns:a="http://schemas.openxmlformats.org/drawingml/2006/main">
+          <a:lstStyle/>
+          <a:p>
             <a:pPr>
               <a:defRPr sz="1500" b="1">
                 <a:solidFill>
@@ -15131,36 +14666,36 @@
       <p:sp>
         <p:nvSpPr>
           <p:cNvPr id="3" name="">
-            <a:extLst xmlns:a="http://schemas.openxmlformats.org/drawingml/2006/main">
-              <a:ext uri="{FF2B5EF4-FFF2-40B4-BE49-F238E27FC236}">
-                <a16:creationId xmlns:a16="http://schemas.microsoft.com/office/drawing/2014/main" id="{E1E30B5E-9A82-4BB4-BB13-D7B971BA02B2}"/>
-              </a:ext>
-            </a:extLst>
-          </p:cNvPr>
-          <p:cNvSpPr>
-            <a:spLocks xmlns:a="http://schemas.openxmlformats.org/drawingml/2006/main" noGrp="1"/>
-          </p:cNvSpPr>
-          <p:nvPr/>
-        </p:nvSpPr>
-        <p:spPr>
-          <a:xfrm xmlns:a="http://schemas.openxmlformats.org/drawingml/2006/main">
+            <a:extLst>
+              <a:ext uri="{FF2B5EF4-FFF2-40B4-BE49-F238E27FC236}">
+                <ns2:creationId id="{E1E30B5E-9A82-4BB4-BB13-D7B971BA02B2}"/>
+              </a:ext>
+            </a:extLst>
+          </p:cNvPr>
+          <p:cNvSpPr>
+            <a:spLocks noGrp="1"/>
+          </p:cNvSpPr>
+          <p:nvPr/>
+        </p:nvSpPr>
+        <p:spPr>
+          <a:xfrm>
             <a:off x="590550" y="523875"/>
             <a:ext cx="11049000" cy="809625"/>
           </a:xfrm>
-          <a:prstGeom xmlns:a="http://schemas.openxmlformats.org/drawingml/2006/main" prst="rect">
-            <a:avLst/>
-          </a:prstGeom>
-          <a:noFill xmlns:a="http://schemas.openxmlformats.org/drawingml/2006/main"/>
-          <a:ln xmlns:a="http://schemas.openxmlformats.org/drawingml/2006/main" w="0">
-            <a:noFill/>
-          </a:ln>
-        </p:spPr>
-        <p:txBody>
-          <a:bodyPr xmlns:a="http://schemas.openxmlformats.org/drawingml/2006/main">
+          <a:prstGeom prst="rect">
+            <a:avLst/>
+          </a:prstGeom>
+          <a:noFill/>
+          <a:ln w="0">
+            <a:noFill/>
+          </a:ln>
+        </p:spPr>
+        <p:txBody>
+          <a:bodyPr>
             <a:noAutofit/>
           </a:bodyPr>
-          <a:lstStyle xmlns:a="http://schemas.openxmlformats.org/drawingml/2006/main"/>
-          <a:p xmlns:a="http://schemas.openxmlformats.org/drawingml/2006/main">
+          <a:lstStyle/>
+          <a:p>
             <a:pPr>
               <a:defRPr sz="3150" b="1">
                 <a:solidFill>
@@ -15188,36 +14723,36 @@
       <p:sp>
         <p:nvSpPr>
           <p:cNvPr id="4" name="">
-            <a:extLst xmlns:a="http://schemas.openxmlformats.org/drawingml/2006/main">
-              <a:ext uri="{FF2B5EF4-FFF2-40B4-BE49-F238E27FC236}">
-                <a16:creationId xmlns:a16="http://schemas.microsoft.com/office/drawing/2014/main" id="{E6574369-8734-41CB-8FF0-F8FBD225280C}"/>
-              </a:ext>
-            </a:extLst>
-          </p:cNvPr>
-          <p:cNvSpPr>
-            <a:spLocks xmlns:a="http://schemas.openxmlformats.org/drawingml/2006/main" noGrp="1"/>
-          </p:cNvSpPr>
-          <p:nvPr/>
-        </p:nvSpPr>
-        <p:spPr>
-          <a:xfrm xmlns:a="http://schemas.openxmlformats.org/drawingml/2006/main">
+            <a:extLst>
+              <a:ext uri="{FF2B5EF4-FFF2-40B4-BE49-F238E27FC236}">
+                <ns2:creationId id="{E6574369-8734-41CB-8FF0-F8FBD225280C}"/>
+              </a:ext>
+            </a:extLst>
+          </p:cNvPr>
+          <p:cNvSpPr>
+            <a:spLocks noGrp="1"/>
+          </p:cNvSpPr>
+          <p:nvPr/>
+        </p:nvSpPr>
+        <p:spPr>
+          <a:xfrm>
             <a:off x="590550" y="1724025"/>
             <a:ext cx="619125" cy="571500"/>
           </a:xfrm>
-          <a:prstGeom xmlns:a="http://schemas.openxmlformats.org/drawingml/2006/main" prst="rect">
-            <a:avLst/>
-          </a:prstGeom>
-          <a:noFill xmlns:a="http://schemas.openxmlformats.org/drawingml/2006/main"/>
-          <a:ln xmlns:a="http://schemas.openxmlformats.org/drawingml/2006/main" w="0">
-            <a:noFill/>
-          </a:ln>
-        </p:spPr>
-        <p:txBody>
-          <a:bodyPr xmlns:a="http://schemas.openxmlformats.org/drawingml/2006/main">
+          <a:prstGeom prst="rect">
+            <a:avLst/>
+          </a:prstGeom>
+          <a:noFill/>
+          <a:ln w="0">
+            <a:noFill/>
+          </a:ln>
+        </p:spPr>
+        <p:txBody>
+          <a:bodyPr>
             <a:noAutofit/>
           </a:bodyPr>
-          <a:lstStyle xmlns:a="http://schemas.openxmlformats.org/drawingml/2006/main"/>
-          <a:p xmlns:a="http://schemas.openxmlformats.org/drawingml/2006/main">
+          <a:lstStyle/>
+          <a:p>
             <a:pPr>
               <a:defRPr sz="2550" b="1">
                 <a:solidFill>
@@ -15245,36 +14780,36 @@
       <p:sp>
         <p:nvSpPr>
           <p:cNvPr id="5" name="">
-            <a:extLst xmlns:a="http://schemas.openxmlformats.org/drawingml/2006/main">
-              <a:ext uri="{FF2B5EF4-FFF2-40B4-BE49-F238E27FC236}">
-                <a16:creationId xmlns:a16="http://schemas.microsoft.com/office/drawing/2014/main" id="{644D5B76-5D40-4FA4-BB57-D7522C66E542}"/>
-              </a:ext>
-            </a:extLst>
-          </p:cNvPr>
-          <p:cNvSpPr>
-            <a:spLocks xmlns:a="http://schemas.openxmlformats.org/drawingml/2006/main" noGrp="1"/>
-          </p:cNvSpPr>
-          <p:nvPr/>
-        </p:nvSpPr>
-        <p:spPr>
-          <a:xfrm xmlns:a="http://schemas.openxmlformats.org/drawingml/2006/main">
+            <a:extLst>
+              <a:ext uri="{FF2B5EF4-FFF2-40B4-BE49-F238E27FC236}">
+                <ns2:creationId id="{644D5B76-5D40-4FA4-BB57-D7522C66E542}"/>
+              </a:ext>
+            </a:extLst>
+          </p:cNvPr>
+          <p:cNvSpPr>
+            <a:spLocks noGrp="1"/>
+          </p:cNvSpPr>
+          <p:nvPr/>
+        </p:nvSpPr>
+        <p:spPr>
+          <a:xfrm>
             <a:off x="1381125" y="1724025"/>
             <a:ext cx="7143750" cy="721519"/>
           </a:xfrm>
-          <a:prstGeom xmlns:a="http://schemas.openxmlformats.org/drawingml/2006/main" prst="rect">
-            <a:avLst/>
-          </a:prstGeom>
-          <a:noFill xmlns:a="http://schemas.openxmlformats.org/drawingml/2006/main"/>
-          <a:ln xmlns:a="http://schemas.openxmlformats.org/drawingml/2006/main" w="0">
-            <a:noFill/>
-          </a:ln>
-        </p:spPr>
-        <p:txBody>
-          <a:bodyPr xmlns:a="http://schemas.openxmlformats.org/drawingml/2006/main">
+          <a:prstGeom prst="rect">
+            <a:avLst/>
+          </a:prstGeom>
+          <a:noFill/>
+          <a:ln w="0">
+            <a:noFill/>
+          </a:ln>
+        </p:spPr>
+        <p:txBody>
+          <a:bodyPr>
             <a:noAutofit/>
           </a:bodyPr>
-          <a:lstStyle xmlns:a="http://schemas.openxmlformats.org/drawingml/2006/main"/>
-          <a:p xmlns:a="http://schemas.openxmlformats.org/drawingml/2006/main">
+          <a:lstStyle/>
+          <a:p>
             <a:pPr>
               <a:defRPr sz="2250" b="0">
                 <a:solidFill>
@@ -15302,36 +14837,36 @@
       <p:sp>
         <p:nvSpPr>
           <p:cNvPr id="6" name="">
-            <a:extLst xmlns:a="http://schemas.openxmlformats.org/drawingml/2006/main">
-              <a:ext uri="{FF2B5EF4-FFF2-40B4-BE49-F238E27FC236}">
-                <a16:creationId xmlns:a16="http://schemas.microsoft.com/office/drawing/2014/main" id="{4C549966-FAB8-467F-A767-688707230381}"/>
-              </a:ext>
-            </a:extLst>
-          </p:cNvPr>
-          <p:cNvSpPr>
-            <a:spLocks xmlns:a="http://schemas.openxmlformats.org/drawingml/2006/main" noGrp="1"/>
-          </p:cNvSpPr>
-          <p:nvPr/>
-        </p:nvSpPr>
-        <p:spPr>
-          <a:xfrm xmlns:a="http://schemas.openxmlformats.org/drawingml/2006/main">
+            <a:extLst>
+              <a:ext uri="{FF2B5EF4-FFF2-40B4-BE49-F238E27FC236}">
+                <ns2:creationId id="{4C549966-FAB8-467F-A767-688707230381}"/>
+              </a:ext>
+            </a:extLst>
+          </p:cNvPr>
+          <p:cNvSpPr>
+            <a:spLocks noGrp="1"/>
+          </p:cNvSpPr>
+          <p:nvPr/>
+        </p:nvSpPr>
+        <p:spPr>
+          <a:xfrm>
             <a:off x="590550" y="2521744"/>
             <a:ext cx="619125" cy="571500"/>
           </a:xfrm>
-          <a:prstGeom xmlns:a="http://schemas.openxmlformats.org/drawingml/2006/main" prst="rect">
-            <a:avLst/>
-          </a:prstGeom>
-          <a:noFill xmlns:a="http://schemas.openxmlformats.org/drawingml/2006/main"/>
-          <a:ln xmlns:a="http://schemas.openxmlformats.org/drawingml/2006/main" w="0">
-            <a:noFill/>
-          </a:ln>
-        </p:spPr>
-        <p:txBody>
-          <a:bodyPr xmlns:a="http://schemas.openxmlformats.org/drawingml/2006/main">
+          <a:prstGeom prst="rect">
+            <a:avLst/>
+          </a:prstGeom>
+          <a:noFill/>
+          <a:ln w="0">
+            <a:noFill/>
+          </a:ln>
+        </p:spPr>
+        <p:txBody>
+          <a:bodyPr>
             <a:noAutofit/>
           </a:bodyPr>
-          <a:lstStyle xmlns:a="http://schemas.openxmlformats.org/drawingml/2006/main"/>
-          <a:p xmlns:a="http://schemas.openxmlformats.org/drawingml/2006/main">
+          <a:lstStyle/>
+          <a:p>
             <a:pPr>
               <a:defRPr sz="2550" b="1">
                 <a:solidFill>
@@ -15359,36 +14894,36 @@
       <p:sp>
         <p:nvSpPr>
           <p:cNvPr id="7" name="">
-            <a:extLst xmlns:a="http://schemas.openxmlformats.org/drawingml/2006/main">
-              <a:ext uri="{FF2B5EF4-FFF2-40B4-BE49-F238E27FC236}">
-                <a16:creationId xmlns:a16="http://schemas.microsoft.com/office/drawing/2014/main" id="{949EDB49-11A8-44E9-8BB5-563F9512231F}"/>
-              </a:ext>
-            </a:extLst>
-          </p:cNvPr>
-          <p:cNvSpPr>
-            <a:spLocks xmlns:a="http://schemas.openxmlformats.org/drawingml/2006/main" noGrp="1"/>
-          </p:cNvSpPr>
-          <p:nvPr/>
-        </p:nvSpPr>
-        <p:spPr>
-          <a:xfrm xmlns:a="http://schemas.openxmlformats.org/drawingml/2006/main">
+            <a:extLst>
+              <a:ext uri="{FF2B5EF4-FFF2-40B4-BE49-F238E27FC236}">
+                <ns2:creationId id="{949EDB49-11A8-44E9-8BB5-563F9512231F}"/>
+              </a:ext>
+            </a:extLst>
+          </p:cNvPr>
+          <p:cNvSpPr>
+            <a:spLocks noGrp="1"/>
+          </p:cNvSpPr>
+          <p:nvPr/>
+        </p:nvSpPr>
+        <p:spPr>
+          <a:xfrm>
             <a:off x="1381125" y="2521744"/>
             <a:ext cx="7143750" cy="721519"/>
           </a:xfrm>
-          <a:prstGeom xmlns:a="http://schemas.openxmlformats.org/drawingml/2006/main" prst="rect">
-            <a:avLst/>
-          </a:prstGeom>
-          <a:noFill xmlns:a="http://schemas.openxmlformats.org/drawingml/2006/main"/>
-          <a:ln xmlns:a="http://schemas.openxmlformats.org/drawingml/2006/main" w="0">
-            <a:noFill/>
-          </a:ln>
-        </p:spPr>
-        <p:txBody>
-          <a:bodyPr xmlns:a="http://schemas.openxmlformats.org/drawingml/2006/main">
+          <a:prstGeom prst="rect">
+            <a:avLst/>
+          </a:prstGeom>
+          <a:noFill/>
+          <a:ln w="0">
+            <a:noFill/>
+          </a:ln>
+        </p:spPr>
+        <p:txBody>
+          <a:bodyPr>
             <a:noAutofit/>
           </a:bodyPr>
-          <a:lstStyle xmlns:a="http://schemas.openxmlformats.org/drawingml/2006/main"/>
-          <a:p xmlns:a="http://schemas.openxmlformats.org/drawingml/2006/main">
+          <a:lstStyle/>
+          <a:p>
             <a:pPr>
               <a:defRPr sz="2250" b="0">
                 <a:solidFill>
@@ -15416,36 +14951,36 @@
       <p:sp>
         <p:nvSpPr>
           <p:cNvPr id="8" name="">
-            <a:extLst xmlns:a="http://schemas.openxmlformats.org/drawingml/2006/main">
-              <a:ext uri="{FF2B5EF4-FFF2-40B4-BE49-F238E27FC236}">
-                <a16:creationId xmlns:a16="http://schemas.microsoft.com/office/drawing/2014/main" id="{8479EDB4-F9DF-4A77-880E-EB31EA0E16BB}"/>
-              </a:ext>
-            </a:extLst>
-          </p:cNvPr>
-          <p:cNvSpPr>
-            <a:spLocks xmlns:a="http://schemas.openxmlformats.org/drawingml/2006/main" noGrp="1"/>
-          </p:cNvSpPr>
-          <p:nvPr/>
-        </p:nvSpPr>
-        <p:spPr>
-          <a:xfrm xmlns:a="http://schemas.openxmlformats.org/drawingml/2006/main">
+            <a:extLst>
+              <a:ext uri="{FF2B5EF4-FFF2-40B4-BE49-F238E27FC236}">
+                <ns2:creationId id="{8479EDB4-F9DF-4A77-880E-EB31EA0E16BB}"/>
+              </a:ext>
+            </a:extLst>
+          </p:cNvPr>
+          <p:cNvSpPr>
+            <a:spLocks noGrp="1"/>
+          </p:cNvSpPr>
+          <p:nvPr/>
+        </p:nvSpPr>
+        <p:spPr>
+          <a:xfrm>
             <a:off x="590550" y="3319463"/>
             <a:ext cx="619125" cy="571500"/>
           </a:xfrm>
-          <a:prstGeom xmlns:a="http://schemas.openxmlformats.org/drawingml/2006/main" prst="rect">
-            <a:avLst/>
-          </a:prstGeom>
-          <a:noFill xmlns:a="http://schemas.openxmlformats.org/drawingml/2006/main"/>
-          <a:ln xmlns:a="http://schemas.openxmlformats.org/drawingml/2006/main" w="0">
-            <a:noFill/>
-          </a:ln>
-        </p:spPr>
-        <p:txBody>
-          <a:bodyPr xmlns:a="http://schemas.openxmlformats.org/drawingml/2006/main">
+          <a:prstGeom prst="rect">
+            <a:avLst/>
+          </a:prstGeom>
+          <a:noFill/>
+          <a:ln w="0">
+            <a:noFill/>
+          </a:ln>
+        </p:spPr>
+        <p:txBody>
+          <a:bodyPr>
             <a:noAutofit/>
           </a:bodyPr>
-          <a:lstStyle xmlns:a="http://schemas.openxmlformats.org/drawingml/2006/main"/>
-          <a:p xmlns:a="http://schemas.openxmlformats.org/drawingml/2006/main">
+          <a:lstStyle/>
+          <a:p>
             <a:pPr>
               <a:defRPr sz="2550" b="1">
                 <a:solidFill>
@@ -15473,36 +15008,36 @@
       <p:sp>
         <p:nvSpPr>
           <p:cNvPr id="9" name="">
-            <a:extLst xmlns:a="http://schemas.openxmlformats.org/drawingml/2006/main">
-              <a:ext uri="{FF2B5EF4-FFF2-40B4-BE49-F238E27FC236}">
-                <a16:creationId xmlns:a16="http://schemas.microsoft.com/office/drawing/2014/main" id="{F001566A-45A6-45F0-8B6F-5C07C49DAB9E}"/>
-              </a:ext>
-            </a:extLst>
-          </p:cNvPr>
-          <p:cNvSpPr>
-            <a:spLocks xmlns:a="http://schemas.openxmlformats.org/drawingml/2006/main" noGrp="1"/>
-          </p:cNvSpPr>
-          <p:nvPr/>
-        </p:nvSpPr>
-        <p:spPr>
-          <a:xfrm xmlns:a="http://schemas.openxmlformats.org/drawingml/2006/main">
+            <a:extLst>
+              <a:ext uri="{FF2B5EF4-FFF2-40B4-BE49-F238E27FC236}">
+                <ns2:creationId id="{F001566A-45A6-45F0-8B6F-5C07C49DAB9E}"/>
+              </a:ext>
+            </a:extLst>
+          </p:cNvPr>
+          <p:cNvSpPr>
+            <a:spLocks noGrp="1"/>
+          </p:cNvSpPr>
+          <p:nvPr/>
+        </p:nvSpPr>
+        <p:spPr>
+          <a:xfrm>
             <a:off x="1381125" y="3319463"/>
             <a:ext cx="7143750" cy="721519"/>
           </a:xfrm>
-          <a:prstGeom xmlns:a="http://schemas.openxmlformats.org/drawingml/2006/main" prst="rect">
-            <a:avLst/>
-          </a:prstGeom>
-          <a:noFill xmlns:a="http://schemas.openxmlformats.org/drawingml/2006/main"/>
-          <a:ln xmlns:a="http://schemas.openxmlformats.org/drawingml/2006/main" w="0">
-            <a:noFill/>
-          </a:ln>
-        </p:spPr>
-        <p:txBody>
-          <a:bodyPr xmlns:a="http://schemas.openxmlformats.org/drawingml/2006/main">
+          <a:prstGeom prst="rect">
+            <a:avLst/>
+          </a:prstGeom>
+          <a:noFill/>
+          <a:ln w="0">
+            <a:noFill/>
+          </a:ln>
+        </p:spPr>
+        <p:txBody>
+          <a:bodyPr>
             <a:noAutofit/>
           </a:bodyPr>
-          <a:lstStyle xmlns:a="http://schemas.openxmlformats.org/drawingml/2006/main"/>
-          <a:p xmlns:a="http://schemas.openxmlformats.org/drawingml/2006/main">
+          <a:lstStyle/>
+          <a:p>
             <a:pPr>
               <a:defRPr sz="2250" b="0">
                 <a:solidFill>
@@ -15530,36 +15065,36 @@
       <p:sp>
         <p:nvSpPr>
           <p:cNvPr id="10" name="">
-            <a:extLst xmlns:a="http://schemas.openxmlformats.org/drawingml/2006/main">
-              <a:ext uri="{FF2B5EF4-FFF2-40B4-BE49-F238E27FC236}">
-                <a16:creationId xmlns:a16="http://schemas.microsoft.com/office/drawing/2014/main" id="{14822BAB-243B-4D60-8F8E-C4F5DC2D223A}"/>
-              </a:ext>
-            </a:extLst>
-          </p:cNvPr>
-          <p:cNvSpPr>
-            <a:spLocks xmlns:a="http://schemas.openxmlformats.org/drawingml/2006/main" noGrp="1"/>
-          </p:cNvSpPr>
-          <p:nvPr/>
-        </p:nvSpPr>
-        <p:spPr>
-          <a:xfrm xmlns:a="http://schemas.openxmlformats.org/drawingml/2006/main">
+            <a:extLst>
+              <a:ext uri="{FF2B5EF4-FFF2-40B4-BE49-F238E27FC236}">
+                <ns2:creationId id="{14822BAB-243B-4D60-8F8E-C4F5DC2D223A}"/>
+              </a:ext>
+            </a:extLst>
+          </p:cNvPr>
+          <p:cNvSpPr>
+            <a:spLocks noGrp="1"/>
+          </p:cNvSpPr>
+          <p:nvPr/>
+        </p:nvSpPr>
+        <p:spPr>
+          <a:xfrm>
             <a:off x="590550" y="4117181"/>
             <a:ext cx="619125" cy="571500"/>
           </a:xfrm>
-          <a:prstGeom xmlns:a="http://schemas.openxmlformats.org/drawingml/2006/main" prst="rect">
-            <a:avLst/>
-          </a:prstGeom>
-          <a:noFill xmlns:a="http://schemas.openxmlformats.org/drawingml/2006/main"/>
-          <a:ln xmlns:a="http://schemas.openxmlformats.org/drawingml/2006/main" w="0">
-            <a:noFill/>
-          </a:ln>
-        </p:spPr>
-        <p:txBody>
-          <a:bodyPr xmlns:a="http://schemas.openxmlformats.org/drawingml/2006/main">
+          <a:prstGeom prst="rect">
+            <a:avLst/>
+          </a:prstGeom>
+          <a:noFill/>
+          <a:ln w="0">
+            <a:noFill/>
+          </a:ln>
+        </p:spPr>
+        <p:txBody>
+          <a:bodyPr>
             <a:noAutofit/>
           </a:bodyPr>
-          <a:lstStyle xmlns:a="http://schemas.openxmlformats.org/drawingml/2006/main"/>
-          <a:p xmlns:a="http://schemas.openxmlformats.org/drawingml/2006/main">
+          <a:lstStyle/>
+          <a:p>
             <a:pPr>
               <a:defRPr sz="2550" b="1">
                 <a:solidFill>
@@ -15587,36 +15122,36 @@
       <p:sp>
         <p:nvSpPr>
           <p:cNvPr id="11" name="">
-            <a:extLst xmlns:a="http://schemas.openxmlformats.org/drawingml/2006/main">
-              <a:ext uri="{FF2B5EF4-FFF2-40B4-BE49-F238E27FC236}">
-                <a16:creationId xmlns:a16="http://schemas.microsoft.com/office/drawing/2014/main" id="{6EF53307-1A49-4812-BFF5-1A41C1490E4C}"/>
-              </a:ext>
-            </a:extLst>
-          </p:cNvPr>
-          <p:cNvSpPr>
-            <a:spLocks xmlns:a="http://schemas.openxmlformats.org/drawingml/2006/main" noGrp="1"/>
-          </p:cNvSpPr>
-          <p:nvPr/>
-        </p:nvSpPr>
-        <p:spPr>
-          <a:xfrm xmlns:a="http://schemas.openxmlformats.org/drawingml/2006/main">
+            <a:extLst>
+              <a:ext uri="{FF2B5EF4-FFF2-40B4-BE49-F238E27FC236}">
+                <ns2:creationId id="{6EF53307-1A49-4812-BFF5-1A41C1490E4C}"/>
+              </a:ext>
+            </a:extLst>
+          </p:cNvPr>
+          <p:cNvSpPr>
+            <a:spLocks noGrp="1"/>
+          </p:cNvSpPr>
+          <p:nvPr/>
+        </p:nvSpPr>
+        <p:spPr>
+          <a:xfrm>
             <a:off x="1381125" y="4117181"/>
             <a:ext cx="7143750" cy="721519"/>
           </a:xfrm>
-          <a:prstGeom xmlns:a="http://schemas.openxmlformats.org/drawingml/2006/main" prst="rect">
-            <a:avLst/>
-          </a:prstGeom>
-          <a:noFill xmlns:a="http://schemas.openxmlformats.org/drawingml/2006/main"/>
-          <a:ln xmlns:a="http://schemas.openxmlformats.org/drawingml/2006/main" w="0">
-            <a:noFill/>
-          </a:ln>
-        </p:spPr>
-        <p:txBody>
-          <a:bodyPr xmlns:a="http://schemas.openxmlformats.org/drawingml/2006/main">
+          <a:prstGeom prst="rect">
+            <a:avLst/>
+          </a:prstGeom>
+          <a:noFill/>
+          <a:ln w="0">
+            <a:noFill/>
+          </a:ln>
+        </p:spPr>
+        <p:txBody>
+          <a:bodyPr>
             <a:noAutofit/>
           </a:bodyPr>
-          <a:lstStyle xmlns:a="http://schemas.openxmlformats.org/drawingml/2006/main"/>
-          <a:p xmlns:a="http://schemas.openxmlformats.org/drawingml/2006/main">
+          <a:lstStyle/>
+          <a:p>
             <a:pPr>
               <a:defRPr sz="2250" b="0">
                 <a:solidFill>
@@ -15636,7 +15171,7 @@
                 <a:ea typeface="Calibri"/>
                 <a:cs typeface="Calibri"/>
               </a:rPr>
-              <a:t>The lecturer will confirm the exact closing time.</a:t>
+              <a:t>Check the announced quiz closing time.</a:t>
             </a:r>
           </a:p>
         </p:txBody>
@@ -15645,20 +15180,20 @@
         <p:nvPicPr>
           <p:cNvPr id="29" name=""/>
           <p:cNvPicPr>
-            <a:picLocks xmlns:a="http://schemas.openxmlformats.org/drawingml/2006/main" noChangeAspect="1"/>
+            <a:picLocks noChangeAspect="1"/>
           </p:cNvPicPr>
           <p:nvPr/>
         </p:nvPicPr>
         <p:blipFill>
-          <a:blip xmlns:r="http://schemas.openxmlformats.org/officeDocument/2006/relationships" xmlns:a="http://schemas.openxmlformats.org/drawingml/2006/main" r:embed="R908b455da4d14d1c"/>
-          <a:stretch xmlns:a="http://schemas.openxmlformats.org/drawingml/2006/main"/>
+          <a:blip r:embed="R908b455da4d14d1c"/>
+          <a:stretch/>
         </p:blipFill>
         <p:spPr>
-          <a:xfrm xmlns:a="http://schemas.openxmlformats.org/drawingml/2006/main">
+          <a:xfrm>
             <a:off x="9134475" y="2095500"/>
             <a:ext cx="2190750" cy="2190750"/>
           </a:xfrm>
-          <a:prstGeom xmlns:a="http://schemas.openxmlformats.org/drawingml/2006/main" prst="rect">
+          <a:prstGeom prst="rect">
             <a:avLst/>
           </a:prstGeom>
         </p:spPr>
@@ -15666,36 +15201,36 @@
       <p:sp>
         <p:nvSpPr>
           <p:cNvPr id="13" name="">
-            <a:extLst xmlns:a="http://schemas.openxmlformats.org/drawingml/2006/main">
-              <a:ext uri="{FF2B5EF4-FFF2-40B4-BE49-F238E27FC236}">
-                <a16:creationId xmlns:a16="http://schemas.microsoft.com/office/drawing/2014/main" id="{1633EC32-D95C-4D1F-B216-60D06E31C111}"/>
-              </a:ext>
-            </a:extLst>
-          </p:cNvPr>
-          <p:cNvSpPr>
-            <a:spLocks xmlns:a="http://schemas.openxmlformats.org/drawingml/2006/main" noGrp="1"/>
-          </p:cNvSpPr>
-          <p:nvPr/>
-        </p:nvSpPr>
-        <p:spPr>
-          <a:xfrm xmlns:a="http://schemas.openxmlformats.org/drawingml/2006/main">
+            <a:extLst>
+              <a:ext uri="{FF2B5EF4-FFF2-40B4-BE49-F238E27FC236}">
+                <ns2:creationId id="{1633EC32-D95C-4D1F-B216-60D06E31C111}"/>
+              </a:ext>
+            </a:extLst>
+          </p:cNvPr>
+          <p:cNvSpPr>
+            <a:spLocks noGrp="1"/>
+          </p:cNvSpPr>
+          <p:nvPr/>
+        </p:nvSpPr>
+        <p:spPr>
+          <a:xfrm>
             <a:off x="9239250" y="4400550"/>
             <a:ext cx="2190750" cy="381000"/>
           </a:xfrm>
-          <a:prstGeom xmlns:a="http://schemas.openxmlformats.org/drawingml/2006/main" prst="rect">
-            <a:avLst/>
-          </a:prstGeom>
-          <a:noFill xmlns:a="http://schemas.openxmlformats.org/drawingml/2006/main"/>
-          <a:ln xmlns:a="http://schemas.openxmlformats.org/drawingml/2006/main" w="0">
-            <a:noFill/>
-          </a:ln>
-        </p:spPr>
-        <p:txBody>
-          <a:bodyPr xmlns:a="http://schemas.openxmlformats.org/drawingml/2006/main">
+          <a:prstGeom prst="rect">
+            <a:avLst/>
+          </a:prstGeom>
+          <a:noFill/>
+          <a:ln w="0">
+            <a:noFill/>
+          </a:ln>
+        </p:spPr>
+        <p:txBody>
+          <a:bodyPr>
             <a:noAutofit/>
           </a:bodyPr>
-          <a:lstStyle xmlns:a="http://schemas.openxmlformats.org/drawingml/2006/main"/>
-          <a:p xmlns:a="http://schemas.openxmlformats.org/drawingml/2006/main">
+          <a:lstStyle/>
+          <a:p>
             <a:pPr>
               <a:defRPr sz="2100" b="1">
                 <a:solidFill>
@@ -15723,29 +15258,29 @@
       <p:sp>
         <p:nvSpPr>
           <p:cNvPr id="14" name="">
-            <a:extLst xmlns:a="http://schemas.openxmlformats.org/drawingml/2006/main">
-              <a:ext uri="{FF2B5EF4-FFF2-40B4-BE49-F238E27FC236}">
-                <a16:creationId xmlns:a16="http://schemas.microsoft.com/office/drawing/2014/main" id="{6466F8D5-ECC7-4913-8058-1939055D48C0}"/>
-              </a:ext>
-            </a:extLst>
-          </p:cNvPr>
-          <p:cNvSpPr>
-            <a:spLocks xmlns:a="http://schemas.openxmlformats.org/drawingml/2006/main" noGrp="1"/>
-          </p:cNvSpPr>
-          <p:nvPr/>
-        </p:nvSpPr>
-        <p:spPr>
-          <a:xfrm xmlns:a="http://schemas.openxmlformats.org/drawingml/2006/main">
+            <a:extLst>
+              <a:ext uri="{FF2B5EF4-FFF2-40B4-BE49-F238E27FC236}">
+                <ns2:creationId id="{6466F8D5-ECC7-4913-8058-1939055D48C0}"/>
+              </a:ext>
+            </a:extLst>
+          </p:cNvPr>
+          <p:cNvSpPr>
+            <a:spLocks noGrp="1"/>
+          </p:cNvSpPr>
+          <p:nvPr/>
+        </p:nvSpPr>
+        <p:spPr>
+          <a:xfrm>
             <a:off x="590550" y="5143500"/>
             <a:ext cx="11010900" cy="657225"/>
           </a:xfrm>
-          <a:prstGeom xmlns:a="http://schemas.openxmlformats.org/drawingml/2006/main" prst="rect">
-            <a:avLst/>
-          </a:prstGeom>
-          <a:solidFill xmlns:a="http://schemas.openxmlformats.org/drawingml/2006/main">
+          <a:prstGeom prst="rect">
+            <a:avLst/>
+          </a:prstGeom>
+          <a:solidFill>
             <a:srgbClr val="E5F1EE"/>
           </a:solidFill>
-          <a:ln xmlns:a="http://schemas.openxmlformats.org/drawingml/2006/main" w="0">
+          <a:ln w="0">
             <a:noFill/>
           </a:ln>
         </p:spPr>
@@ -15753,36 +15288,36 @@
       <p:sp>
         <p:nvSpPr>
           <p:cNvPr id="15" name="">
-            <a:extLst xmlns:a="http://schemas.openxmlformats.org/drawingml/2006/main">
-              <a:ext uri="{FF2B5EF4-FFF2-40B4-BE49-F238E27FC236}">
-                <a16:creationId xmlns:a16="http://schemas.microsoft.com/office/drawing/2014/main" id="{B1938A7D-4B54-4A90-8052-1F1A4AF026F3}"/>
-              </a:ext>
-            </a:extLst>
-          </p:cNvPr>
-          <p:cNvSpPr>
-            <a:spLocks xmlns:a="http://schemas.openxmlformats.org/drawingml/2006/main" noGrp="1"/>
-          </p:cNvSpPr>
-          <p:nvPr/>
-        </p:nvSpPr>
-        <p:spPr>
-          <a:xfrm xmlns:a="http://schemas.openxmlformats.org/drawingml/2006/main">
+            <a:extLst>
+              <a:ext uri="{FF2B5EF4-FFF2-40B4-BE49-F238E27FC236}">
+                <ns2:creationId id="{B1938A7D-4B54-4A90-8052-1F1A4AF026F3}"/>
+              </a:ext>
+            </a:extLst>
+          </p:cNvPr>
+          <p:cNvSpPr>
+            <a:spLocks noGrp="1"/>
+          </p:cNvSpPr>
+          <p:nvPr/>
+        </p:nvSpPr>
+        <p:spPr>
+          <a:xfrm>
             <a:off x="800100" y="5267325"/>
             <a:ext cx="10572750" cy="457200"/>
           </a:xfrm>
-          <a:prstGeom xmlns:a="http://schemas.openxmlformats.org/drawingml/2006/main" prst="rect">
-            <a:avLst/>
-          </a:prstGeom>
-          <a:noFill xmlns:a="http://schemas.openxmlformats.org/drawingml/2006/main"/>
-          <a:ln xmlns:a="http://schemas.openxmlformats.org/drawingml/2006/main" w="0">
-            <a:noFill/>
-          </a:ln>
-        </p:spPr>
-        <p:txBody>
-          <a:bodyPr xmlns:a="http://schemas.openxmlformats.org/drawingml/2006/main">
+          <a:prstGeom prst="rect">
+            <a:avLst/>
+          </a:prstGeom>
+          <a:noFill/>
+          <a:ln w="0">
+            <a:noFill/>
+          </a:ln>
+        </p:spPr>
+        <p:txBody>
+          <a:bodyPr>
             <a:noAutofit/>
           </a:bodyPr>
-          <a:lstStyle xmlns:a="http://schemas.openxmlformats.org/drawingml/2006/main"/>
-          <a:p xmlns:a="http://schemas.openxmlformats.org/drawingml/2006/main">
+          <a:lstStyle/>
+          <a:p>
             <a:pPr>
               <a:defRPr sz="2250" b="1">
                 <a:solidFill>
@@ -15801,7 +15336,7 @@
                 <a:latin typeface="Calibri"/>
                 <a:ea typeface="Calibri"/>
                 <a:cs typeface="Calibri"/>
-                <a:hlinkClick xmlns:r="http://schemas.openxmlformats.org/officeDocument/2006/relationships" r:id="Rf1dffac276874c77"/>
+                <a:hlinkClick r:id="Rf1dffac276874c77"/>
               </a:rPr>
               <a:t>Open this week’s quiz</a:t>
             </a:r>
@@ -15811,36 +15346,36 @@
       <p:sp>
         <p:nvSpPr>
           <p:cNvPr id="16" name="">
-            <a:extLst xmlns:a="http://schemas.openxmlformats.org/drawingml/2006/main">
-              <a:ext uri="{FF2B5EF4-FFF2-40B4-BE49-F238E27FC236}">
-                <a16:creationId xmlns:a16="http://schemas.microsoft.com/office/drawing/2014/main" id="{AF732491-56BD-472B-8202-570C4B3F2F99}"/>
-              </a:ext>
-            </a:extLst>
-          </p:cNvPr>
-          <p:cNvSpPr>
-            <a:spLocks xmlns:a="http://schemas.openxmlformats.org/drawingml/2006/main" noGrp="1"/>
-          </p:cNvSpPr>
-          <p:nvPr/>
-        </p:nvSpPr>
-        <p:spPr>
-          <a:xfrm xmlns:a="http://schemas.openxmlformats.org/drawingml/2006/main">
+            <a:extLst>
+              <a:ext uri="{FF2B5EF4-FFF2-40B4-BE49-F238E27FC236}">
+                <ns2:creationId id="{AF732491-56BD-472B-8202-570C4B3F2F99}"/>
+              </a:ext>
+            </a:extLst>
+          </p:cNvPr>
+          <p:cNvSpPr>
+            <a:spLocks noGrp="1"/>
+          </p:cNvSpPr>
+          <p:nvPr/>
+        </p:nvSpPr>
+        <p:spPr>
+          <a:xfrm>
             <a:off x="685800" y="5972175"/>
             <a:ext cx="10668000" cy="304800"/>
           </a:xfrm>
-          <a:prstGeom xmlns:a="http://schemas.openxmlformats.org/drawingml/2006/main" prst="rect">
-            <a:avLst/>
-          </a:prstGeom>
-          <a:noFill xmlns:a="http://schemas.openxmlformats.org/drawingml/2006/main"/>
-          <a:ln xmlns:a="http://schemas.openxmlformats.org/drawingml/2006/main" w="0">
-            <a:noFill/>
-          </a:ln>
-        </p:spPr>
-        <p:txBody>
-          <a:bodyPr xmlns:a="http://schemas.openxmlformats.org/drawingml/2006/main">
+          <a:prstGeom prst="rect">
+            <a:avLst/>
+          </a:prstGeom>
+          <a:noFill/>
+          <a:ln w="0">
+            <a:noFill/>
+          </a:ln>
+        </p:spPr>
+        <p:txBody>
+          <a:bodyPr>
             <a:noAutofit/>
           </a:bodyPr>
-          <a:lstStyle xmlns:a="http://schemas.openxmlformats.org/drawingml/2006/main"/>
-          <a:p xmlns:a="http://schemas.openxmlformats.org/drawingml/2006/main">
+          <a:lstStyle/>
+          <a:p>
             <a:pPr>
               <a:defRPr sz="1275" b="0">
                 <a:solidFill>
@@ -15868,36 +15403,36 @@
       <p:sp>
         <p:nvSpPr>
           <p:cNvPr id="17" name="">
-            <a:extLst xmlns:a="http://schemas.openxmlformats.org/drawingml/2006/main">
-              <a:ext uri="{FF2B5EF4-FFF2-40B4-BE49-F238E27FC236}">
-                <a16:creationId xmlns:a16="http://schemas.microsoft.com/office/drawing/2014/main" id="{209EA90E-5F1F-4496-AC3A-B54CA9F9EF7E}"/>
-              </a:ext>
-            </a:extLst>
-          </p:cNvPr>
-          <p:cNvSpPr>
-            <a:spLocks xmlns:a="http://schemas.openxmlformats.org/drawingml/2006/main" noGrp="1"/>
-          </p:cNvSpPr>
-          <p:nvPr/>
-        </p:nvSpPr>
-        <p:spPr>
-          <a:xfrm xmlns:a="http://schemas.openxmlformats.org/drawingml/2006/main">
+            <a:extLst>
+              <a:ext uri="{FF2B5EF4-FFF2-40B4-BE49-F238E27FC236}">
+                <ns2:creationId id="{209EA90E-5F1F-4496-AC3A-B54CA9F9EF7E}"/>
+              </a:ext>
+            </a:extLst>
+          </p:cNvPr>
+          <p:cNvSpPr>
+            <a:spLocks noGrp="1"/>
+          </p:cNvSpPr>
+          <p:nvPr/>
+        </p:nvSpPr>
+        <p:spPr>
+          <a:xfrm>
             <a:off x="590550" y="6524625"/>
             <a:ext cx="10810875" cy="219075"/>
           </a:xfrm>
-          <a:prstGeom xmlns:a="http://schemas.openxmlformats.org/drawingml/2006/main" prst="rect">
-            <a:avLst/>
-          </a:prstGeom>
-          <a:noFill xmlns:a="http://schemas.openxmlformats.org/drawingml/2006/main"/>
-          <a:ln xmlns:a="http://schemas.openxmlformats.org/drawingml/2006/main" w="0">
-            <a:noFill/>
-          </a:ln>
-        </p:spPr>
-        <p:txBody>
-          <a:bodyPr xmlns:a="http://schemas.openxmlformats.org/drawingml/2006/main">
+          <a:prstGeom prst="rect">
+            <a:avLst/>
+          </a:prstGeom>
+          <a:noFill/>
+          <a:ln w="0">
+            <a:noFill/>
+          </a:ln>
+        </p:spPr>
+        <p:txBody>
+          <a:bodyPr>
             <a:noAutofit/>
           </a:bodyPr>
-          <a:lstStyle xmlns:a="http://schemas.openxmlformats.org/drawingml/2006/main"/>
-          <a:p xmlns:a="http://schemas.openxmlformats.org/drawingml/2006/main">
+          <a:lstStyle/>
+          <a:p>
             <a:pPr>
               <a:defRPr sz="1200" b="0">
                 <a:solidFill>
@@ -15925,7 +15460,7 @@
     </p:spTree>
     <p:extLst>
       <p:ext uri="{BB962C8B-B14F-4D97-AF65-F5344CB8AC3E}">
-        <p14:creationId xmlns:p14="http://schemas.microsoft.com/office/powerpoint/2010/main" val="1845507475"/>
+        <ns4:creationId val="1845507475"/>
       </p:ext>
     </p:extLst>
   </p:cSld>
@@ -15933,11 +15468,11 @@
 </file>
 
 <file path=ppt/slides/slide24.xml><?xml version="1.0" encoding="utf-8"?>
-<p:sld xmlns:p="http://schemas.openxmlformats.org/presentationml/2006/main">
+<p:sld xmlns:a="http://schemas.openxmlformats.org/drawingml/2006/main" xmlns:ns2="http://schemas.microsoft.com/office/drawing/2014/main" xmlns:ns3="http://schemas.microsoft.com/office/powerpoint/2010/main" xmlns:p="http://schemas.openxmlformats.org/presentationml/2006/main">
   <p:cSld>
     <p:bg>
       <p:bgPr>
-        <a:solidFill xmlns:a="http://schemas.openxmlformats.org/drawingml/2006/main">
+        <a:solidFill>
           <a:srgbClr val="1C3144"/>
         </a:solidFill>
       </p:bgPr>
@@ -15949,41 +15484,41 @@
         <p:nvPr/>
       </p:nvGrpSpPr>
       <p:grpSpPr>
-        <a:xfrm xmlns:a="http://schemas.openxmlformats.org/drawingml/2006/main"/>
+        <a:xfrm/>
       </p:grpSpPr>
       <p:sp>
         <p:nvSpPr>
           <p:cNvPr id="7" name="">
-            <a:extLst xmlns:a="http://schemas.openxmlformats.org/drawingml/2006/main">
-              <a:ext uri="{FF2B5EF4-FFF2-40B4-BE49-F238E27FC236}">
-                <a16:creationId xmlns:a16="http://schemas.microsoft.com/office/drawing/2014/main" id="{731B9F94-74E6-4C0D-BB9E-140A92AB050C}"/>
-              </a:ext>
-            </a:extLst>
-          </p:cNvPr>
-          <p:cNvSpPr>
-            <a:spLocks xmlns:a="http://schemas.openxmlformats.org/drawingml/2006/main" noGrp="1"/>
-          </p:cNvSpPr>
-          <p:nvPr/>
-        </p:nvSpPr>
-        <p:spPr>
-          <a:xfrm xmlns:a="http://schemas.openxmlformats.org/drawingml/2006/main">
+            <a:extLst>
+              <a:ext uri="{FF2B5EF4-FFF2-40B4-BE49-F238E27FC236}">
+                <ns2:creationId id="{731B9F94-74E6-4C0D-BB9E-140A92AB050C}"/>
+              </a:ext>
+            </a:extLst>
+          </p:cNvPr>
+          <p:cNvSpPr>
+            <a:spLocks noGrp="1"/>
+          </p:cNvSpPr>
+          <p:nvPr/>
+        </p:nvSpPr>
+        <p:spPr>
+          <a:xfrm>
             <a:off x="590550" y="180975"/>
             <a:ext cx="11049000" cy="285750"/>
           </a:xfrm>
-          <a:prstGeom xmlns:a="http://schemas.openxmlformats.org/drawingml/2006/main" prst="rect">
-            <a:avLst/>
-          </a:prstGeom>
-          <a:noFill xmlns:a="http://schemas.openxmlformats.org/drawingml/2006/main"/>
-          <a:ln xmlns:a="http://schemas.openxmlformats.org/drawingml/2006/main" w="0">
-            <a:noFill/>
-          </a:ln>
-        </p:spPr>
-        <p:txBody>
-          <a:bodyPr xmlns:a="http://schemas.openxmlformats.org/drawingml/2006/main">
+          <a:prstGeom prst="rect">
+            <a:avLst/>
+          </a:prstGeom>
+          <a:noFill/>
+          <a:ln w="0">
+            <a:noFill/>
+          </a:ln>
+        </p:spPr>
+        <p:txBody>
+          <a:bodyPr>
             <a:noAutofit/>
           </a:bodyPr>
-          <a:lstStyle xmlns:a="http://schemas.openxmlformats.org/drawingml/2006/main"/>
-          <a:p xmlns:a="http://schemas.openxmlformats.org/drawingml/2006/main">
+          <a:lstStyle/>
+          <a:p>
             <a:pPr>
               <a:defRPr sz="1500" b="1">
                 <a:solidFill>
@@ -16011,36 +15546,36 @@
       <p:sp>
         <p:nvSpPr>
           <p:cNvPr id="2" name="">
-            <a:extLst xmlns:a="http://schemas.openxmlformats.org/drawingml/2006/main">
-              <a:ext uri="{FF2B5EF4-FFF2-40B4-BE49-F238E27FC236}">
-                <a16:creationId xmlns:a16="http://schemas.microsoft.com/office/drawing/2014/main" id="{4CE049DC-74B3-4331-B91A-FA2CF4161DC8}"/>
-              </a:ext>
-            </a:extLst>
-          </p:cNvPr>
-          <p:cNvSpPr>
-            <a:spLocks xmlns:a="http://schemas.openxmlformats.org/drawingml/2006/main" noGrp="1"/>
-          </p:cNvSpPr>
-          <p:nvPr/>
-        </p:nvSpPr>
-        <p:spPr>
-          <a:xfrm xmlns:a="http://schemas.openxmlformats.org/drawingml/2006/main">
+            <a:extLst>
+              <a:ext uri="{FF2B5EF4-FFF2-40B4-BE49-F238E27FC236}">
+                <ns2:creationId id="{4CE049DC-74B3-4331-B91A-FA2CF4161DC8}"/>
+              </a:ext>
+            </a:extLst>
+          </p:cNvPr>
+          <p:cNvSpPr>
+            <a:spLocks noGrp="1"/>
+          </p:cNvSpPr>
+          <p:nvPr/>
+        </p:nvSpPr>
+        <p:spPr>
+          <a:xfrm>
             <a:off x="590550" y="523875"/>
             <a:ext cx="11049000" cy="809625"/>
           </a:xfrm>
-          <a:prstGeom xmlns:a="http://schemas.openxmlformats.org/drawingml/2006/main" prst="rect">
-            <a:avLst/>
-          </a:prstGeom>
-          <a:noFill xmlns:a="http://schemas.openxmlformats.org/drawingml/2006/main"/>
-          <a:ln xmlns:a="http://schemas.openxmlformats.org/drawingml/2006/main" w="0">
-            <a:noFill/>
-          </a:ln>
-        </p:spPr>
-        <p:txBody>
-          <a:bodyPr xmlns:a="http://schemas.openxmlformats.org/drawingml/2006/main">
+          <a:prstGeom prst="rect">
+            <a:avLst/>
+          </a:prstGeom>
+          <a:noFill/>
+          <a:ln w="0">
+            <a:noFill/>
+          </a:ln>
+        </p:spPr>
+        <p:txBody>
+          <a:bodyPr>
             <a:noAutofit/>
           </a:bodyPr>
-          <a:lstStyle xmlns:a="http://schemas.openxmlformats.org/drawingml/2006/main"/>
-          <a:p xmlns:a="http://schemas.openxmlformats.org/drawingml/2006/main">
+          <a:lstStyle/>
+          <a:p>
             <a:pPr>
               <a:defRPr sz="3150" b="1">
                 <a:solidFill>
@@ -16068,36 +15603,36 @@
       <p:sp>
         <p:nvSpPr>
           <p:cNvPr id="3" name="">
-            <a:extLst xmlns:a="http://schemas.openxmlformats.org/drawingml/2006/main">
-              <a:ext uri="{FF2B5EF4-FFF2-40B4-BE49-F238E27FC236}">
-                <a16:creationId xmlns:a16="http://schemas.microsoft.com/office/drawing/2014/main" id="{C4178C6A-8E71-49F0-ABC5-14B8577E3E84}"/>
-              </a:ext>
-            </a:extLst>
-          </p:cNvPr>
-          <p:cNvSpPr>
-            <a:spLocks xmlns:a="http://schemas.openxmlformats.org/drawingml/2006/main" noGrp="1"/>
-          </p:cNvSpPr>
-          <p:nvPr/>
-        </p:nvSpPr>
-        <p:spPr>
-          <a:xfrm xmlns:a="http://schemas.openxmlformats.org/drawingml/2006/main">
+            <a:extLst>
+              <a:ext uri="{FF2B5EF4-FFF2-40B4-BE49-F238E27FC236}">
+                <ns2:creationId id="{C4178C6A-8E71-49F0-ABC5-14B8577E3E84}"/>
+              </a:ext>
+            </a:extLst>
+          </p:cNvPr>
+          <p:cNvSpPr>
+            <a:spLocks noGrp="1"/>
+          </p:cNvSpPr>
+          <p:nvPr/>
+        </p:nvSpPr>
+        <p:spPr>
+          <a:xfrm>
             <a:off x="619125" y="1619250"/>
             <a:ext cx="2857500" cy="495300"/>
           </a:xfrm>
-          <a:prstGeom xmlns:a="http://schemas.openxmlformats.org/drawingml/2006/main" prst="rect">
-            <a:avLst/>
-          </a:prstGeom>
-          <a:noFill xmlns:a="http://schemas.openxmlformats.org/drawingml/2006/main"/>
-          <a:ln xmlns:a="http://schemas.openxmlformats.org/drawingml/2006/main" w="0">
-            <a:noFill/>
-          </a:ln>
-        </p:spPr>
-        <p:txBody>
-          <a:bodyPr xmlns:a="http://schemas.openxmlformats.org/drawingml/2006/main">
+          <a:prstGeom prst="rect">
+            <a:avLst/>
+          </a:prstGeom>
+          <a:noFill/>
+          <a:ln w="0">
+            <a:noFill/>
+          </a:ln>
+        </p:spPr>
+        <p:txBody>
+          <a:bodyPr>
             <a:noAutofit/>
           </a:bodyPr>
-          <a:lstStyle xmlns:a="http://schemas.openxmlformats.org/drawingml/2006/main"/>
-          <a:p xmlns:a="http://schemas.openxmlformats.org/drawingml/2006/main">
+          <a:lstStyle/>
+          <a:p>
             <a:pPr>
               <a:defRPr sz="1950" b="1">
                 <a:solidFill>
@@ -16125,36 +15660,36 @@
       <p:sp>
         <p:nvSpPr>
           <p:cNvPr id="4" name="">
-            <a:extLst xmlns:a="http://schemas.openxmlformats.org/drawingml/2006/main">
-              <a:ext uri="{FF2B5EF4-FFF2-40B4-BE49-F238E27FC236}">
-                <a16:creationId xmlns:a16="http://schemas.microsoft.com/office/drawing/2014/main" id="{17C3C600-BC82-416D-A770-72C84B8D0CFE}"/>
-              </a:ext>
-            </a:extLst>
-          </p:cNvPr>
-          <p:cNvSpPr>
-            <a:spLocks xmlns:a="http://schemas.openxmlformats.org/drawingml/2006/main" noGrp="1"/>
-          </p:cNvSpPr>
-          <p:nvPr/>
-        </p:nvSpPr>
-        <p:spPr>
-          <a:xfrm xmlns:a="http://schemas.openxmlformats.org/drawingml/2006/main">
+            <a:extLst>
+              <a:ext uri="{FF2B5EF4-FFF2-40B4-BE49-F238E27FC236}">
+                <ns2:creationId id="{17C3C600-BC82-416D-A770-72C84B8D0CFE}"/>
+              </a:ext>
+            </a:extLst>
+          </p:cNvPr>
+          <p:cNvSpPr>
+            <a:spLocks noGrp="1"/>
+          </p:cNvSpPr>
+          <p:nvPr/>
+        </p:nvSpPr>
+        <p:spPr>
+          <a:xfrm>
             <a:off x="619125" y="2295525"/>
             <a:ext cx="10810875" cy="3095625"/>
           </a:xfrm>
-          <a:prstGeom xmlns:a="http://schemas.openxmlformats.org/drawingml/2006/main" prst="rect">
-            <a:avLst/>
-          </a:prstGeom>
-          <a:noFill xmlns:a="http://schemas.openxmlformats.org/drawingml/2006/main"/>
-          <a:ln xmlns:a="http://schemas.openxmlformats.org/drawingml/2006/main" w="0">
-            <a:noFill/>
-          </a:ln>
-        </p:spPr>
-        <p:txBody>
-          <a:bodyPr xmlns:a="http://schemas.openxmlformats.org/drawingml/2006/main">
+          <a:prstGeom prst="rect">
+            <a:avLst/>
+          </a:prstGeom>
+          <a:noFill/>
+          <a:ln w="0">
+            <a:noFill/>
+          </a:ln>
+        </p:spPr>
+        <p:txBody>
+          <a:bodyPr>
             <a:noAutofit/>
           </a:bodyPr>
-          <a:lstStyle xmlns:a="http://schemas.openxmlformats.org/drawingml/2006/main"/>
-          <a:p xmlns:a="http://schemas.openxmlformats.org/drawingml/2006/main">
+          <a:lstStyle/>
+          <a:p>
             <a:pPr>
               <a:defRPr sz="2850" b="0">
                 <a:solidFill>
@@ -16177,12 +15712,12 @@
               <a:t>Another learner can follow your README and reproduce the stated result.</a:t>
             </a:r>
           </a:p>
-          <a:p xmlns:a="http://schemas.openxmlformats.org/drawingml/2006/main">
+          <a:p>
             <a:r>
               <a:t/>
             </a:r>
           </a:p>
-          <a:p xmlns:a="http://schemas.openxmlformats.org/drawingml/2006/main">
+          <a:p>
             <a:pPr>
               <a:defRPr sz="2850" b="0">
                 <a:solidFill>
@@ -16210,36 +15745,36 @@
       <p:sp>
         <p:nvSpPr>
           <p:cNvPr id="5" name="">
-            <a:extLst xmlns:a="http://schemas.openxmlformats.org/drawingml/2006/main">
-              <a:ext uri="{FF2B5EF4-FFF2-40B4-BE49-F238E27FC236}">
-                <a16:creationId xmlns:a16="http://schemas.microsoft.com/office/drawing/2014/main" id="{582DB20B-7BA7-42F4-B62C-31445EE9A754}"/>
-              </a:ext>
-            </a:extLst>
-          </p:cNvPr>
-          <p:cNvSpPr>
-            <a:spLocks xmlns:a="http://schemas.openxmlformats.org/drawingml/2006/main" noGrp="1"/>
-          </p:cNvSpPr>
-          <p:nvPr/>
-        </p:nvSpPr>
-        <p:spPr>
-          <a:xfrm xmlns:a="http://schemas.openxmlformats.org/drawingml/2006/main">
+            <a:extLst>
+              <a:ext uri="{FF2B5EF4-FFF2-40B4-BE49-F238E27FC236}">
+                <ns2:creationId id="{582DB20B-7BA7-42F4-B62C-31445EE9A754}"/>
+              </a:ext>
+            </a:extLst>
+          </p:cNvPr>
+          <p:cNvSpPr>
+            <a:spLocks noGrp="1"/>
+          </p:cNvSpPr>
+          <p:nvPr/>
+        </p:nvSpPr>
+        <p:spPr>
+          <a:xfrm>
             <a:off x="619125" y="5791200"/>
             <a:ext cx="10810875" cy="542925"/>
           </a:xfrm>
-          <a:prstGeom xmlns:a="http://schemas.openxmlformats.org/drawingml/2006/main" prst="rect">
-            <a:avLst/>
-          </a:prstGeom>
-          <a:noFill xmlns:a="http://schemas.openxmlformats.org/drawingml/2006/main"/>
-          <a:ln xmlns:a="http://schemas.openxmlformats.org/drawingml/2006/main" w="0">
-            <a:noFill/>
-          </a:ln>
-        </p:spPr>
-        <p:txBody>
-          <a:bodyPr xmlns:a="http://schemas.openxmlformats.org/drawingml/2006/main">
+          <a:prstGeom prst="rect">
+            <a:avLst/>
+          </a:prstGeom>
+          <a:noFill/>
+          <a:ln w="0">
+            <a:noFill/>
+          </a:ln>
+        </p:spPr>
+        <p:txBody>
+          <a:bodyPr>
             <a:noAutofit/>
           </a:bodyPr>
-          <a:lstStyle xmlns:a="http://schemas.openxmlformats.org/drawingml/2006/main"/>
-          <a:p xmlns:a="http://schemas.openxmlformats.org/drawingml/2006/main">
+          <a:lstStyle/>
+          <a:p>
             <a:pPr>
               <a:defRPr sz="1800" b="0">
                 <a:solidFill>
@@ -16259,7 +15794,7 @@
                 <a:ea typeface="Calibri"/>
                 <a:cs typeface="Calibri"/>
               </a:rPr>
-              <a:t>Point to your evidence. Save your work.</a:t>
+              <a:t>Check your answers against the example, then save your work.</a:t>
             </a:r>
           </a:p>
         </p:txBody>
@@ -16267,36 +15802,36 @@
       <p:sp>
         <p:nvSpPr>
           <p:cNvPr id="6" name="">
-            <a:extLst xmlns:a="http://schemas.openxmlformats.org/drawingml/2006/main">
-              <a:ext uri="{FF2B5EF4-FFF2-40B4-BE49-F238E27FC236}">
-                <a16:creationId xmlns:a16="http://schemas.microsoft.com/office/drawing/2014/main" id="{3D445078-840B-45DF-A28B-062F8111F6F5}"/>
-              </a:ext>
-            </a:extLst>
-          </p:cNvPr>
-          <p:cNvSpPr>
-            <a:spLocks xmlns:a="http://schemas.openxmlformats.org/drawingml/2006/main" noGrp="1"/>
-          </p:cNvSpPr>
-          <p:nvPr/>
-        </p:nvSpPr>
-        <p:spPr>
-          <a:xfrm xmlns:a="http://schemas.openxmlformats.org/drawingml/2006/main">
+            <a:extLst>
+              <a:ext uri="{FF2B5EF4-FFF2-40B4-BE49-F238E27FC236}">
+                <ns2:creationId id="{3D445078-840B-45DF-A28B-062F8111F6F5}"/>
+              </a:ext>
+            </a:extLst>
+          </p:cNvPr>
+          <p:cNvSpPr>
+            <a:spLocks noGrp="1"/>
+          </p:cNvSpPr>
+          <p:nvPr/>
+        </p:nvSpPr>
+        <p:spPr>
+          <a:xfrm>
             <a:off x="590550" y="6524625"/>
             <a:ext cx="10810875" cy="219075"/>
           </a:xfrm>
-          <a:prstGeom xmlns:a="http://schemas.openxmlformats.org/drawingml/2006/main" prst="rect">
-            <a:avLst/>
-          </a:prstGeom>
-          <a:noFill xmlns:a="http://schemas.openxmlformats.org/drawingml/2006/main"/>
-          <a:ln xmlns:a="http://schemas.openxmlformats.org/drawingml/2006/main" w="0">
-            <a:noFill/>
-          </a:ln>
-        </p:spPr>
-        <p:txBody>
-          <a:bodyPr xmlns:a="http://schemas.openxmlformats.org/drawingml/2006/main">
+          <a:prstGeom prst="rect">
+            <a:avLst/>
+          </a:prstGeom>
+          <a:noFill/>
+          <a:ln w="0">
+            <a:noFill/>
+          </a:ln>
+        </p:spPr>
+        <p:txBody>
+          <a:bodyPr>
             <a:noAutofit/>
           </a:bodyPr>
-          <a:lstStyle xmlns:a="http://schemas.openxmlformats.org/drawingml/2006/main"/>
-          <a:p xmlns:a="http://schemas.openxmlformats.org/drawingml/2006/main">
+          <a:lstStyle/>
+          <a:p>
             <a:pPr>
               <a:defRPr sz="1200" b="0">
                 <a:solidFill>
@@ -16324,7 +15859,7 @@
     </p:spTree>
     <p:extLst>
       <p:ext uri="{BB962C8B-B14F-4D97-AF65-F5344CB8AC3E}">
-        <p14:creationId xmlns:p14="http://schemas.microsoft.com/office/powerpoint/2010/main" val="1639421737"/>
+        <ns3:creationId val="1639421737"/>
       </p:ext>
     </p:extLst>
   </p:cSld>
@@ -17560,11 +17095,11 @@
 </file>
 
 <file path=ppt/slides/slide4.xml><?xml version="1.0" encoding="utf-8"?>
-<p:sld xmlns:p="http://schemas.openxmlformats.org/presentationml/2006/main">
+<p:sld xmlns:a="http://schemas.openxmlformats.org/drawingml/2006/main" xmlns:ns2="http://schemas.microsoft.com/office/drawing/2014/main" xmlns:ns3="http://schemas.microsoft.com/office/powerpoint/2010/main" xmlns:p="http://schemas.openxmlformats.org/presentationml/2006/main">
   <p:cSld>
     <p:bg>
       <p:bgPr>
-        <a:solidFill xmlns:a="http://schemas.openxmlformats.org/drawingml/2006/main">
+        <a:solidFill>
           <a:srgbClr val="FFFFFF"/>
         </a:solidFill>
       </p:bgPr>
@@ -17576,34 +17111,34 @@
         <p:nvPr/>
       </p:nvGrpSpPr>
       <p:grpSpPr>
-        <a:xfrm xmlns:a="http://schemas.openxmlformats.org/drawingml/2006/main"/>
+        <a:xfrm/>
       </p:grpSpPr>
       <p:sp>
         <p:nvSpPr>
           <p:cNvPr id="8" name="">
-            <a:extLst xmlns:a="http://schemas.openxmlformats.org/drawingml/2006/main">
-              <a:ext uri="{FF2B5EF4-FFF2-40B4-BE49-F238E27FC236}">
-                <a16:creationId xmlns:a16="http://schemas.microsoft.com/office/drawing/2014/main" id="{95AE2998-1526-4F90-A34B-D61B25EA286B}"/>
-              </a:ext>
-            </a:extLst>
-          </p:cNvPr>
-          <p:cNvSpPr>
-            <a:spLocks xmlns:a="http://schemas.openxmlformats.org/drawingml/2006/main" noGrp="1"/>
-          </p:cNvSpPr>
-          <p:nvPr/>
-        </p:nvSpPr>
-        <p:spPr>
-          <a:xfrm xmlns:a="http://schemas.openxmlformats.org/drawingml/2006/main">
+            <a:extLst>
+              <a:ext uri="{FF2B5EF4-FFF2-40B4-BE49-F238E27FC236}">
+                <ns2:creationId id="{95AE2998-1526-4F90-A34B-D61B25EA286B}"/>
+              </a:ext>
+            </a:extLst>
+          </p:cNvPr>
+          <p:cNvSpPr>
+            <a:spLocks noGrp="1"/>
+          </p:cNvSpPr>
+          <p:nvPr/>
+        </p:nvSpPr>
+        <p:spPr>
+          <a:xfrm>
             <a:off x="0" y="0"/>
             <a:ext cx="12191695" cy="1390650"/>
           </a:xfrm>
-          <a:prstGeom xmlns:a="http://schemas.openxmlformats.org/drawingml/2006/main" prst="rect">
-            <a:avLst/>
-          </a:prstGeom>
-          <a:solidFill xmlns:a="http://schemas.openxmlformats.org/drawingml/2006/main">
+          <a:prstGeom prst="rect">
+            <a:avLst/>
+          </a:prstGeom>
+          <a:solidFill>
             <a:srgbClr val="1C3144"/>
           </a:solidFill>
-          <a:ln xmlns:a="http://schemas.openxmlformats.org/drawingml/2006/main" w="0">
+          <a:ln w="0">
             <a:noFill/>
           </a:ln>
         </p:spPr>
@@ -17611,36 +17146,36 @@
       <p:sp>
         <p:nvSpPr>
           <p:cNvPr id="2" name="">
-            <a:extLst xmlns:a="http://schemas.openxmlformats.org/drawingml/2006/main">
-              <a:ext uri="{FF2B5EF4-FFF2-40B4-BE49-F238E27FC236}">
-                <a16:creationId xmlns:a16="http://schemas.microsoft.com/office/drawing/2014/main" id="{073E37FD-CBDE-4569-AE7F-DFBA9689ED9A}"/>
-              </a:ext>
-            </a:extLst>
-          </p:cNvPr>
-          <p:cNvSpPr>
-            <a:spLocks xmlns:a="http://schemas.openxmlformats.org/drawingml/2006/main" noGrp="1"/>
-          </p:cNvSpPr>
-          <p:nvPr/>
-        </p:nvSpPr>
-        <p:spPr>
-          <a:xfrm xmlns:a="http://schemas.openxmlformats.org/drawingml/2006/main">
+            <a:extLst>
+              <a:ext uri="{FF2B5EF4-FFF2-40B4-BE49-F238E27FC236}">
+                <ns2:creationId id="{073E37FD-CBDE-4569-AE7F-DFBA9689ED9A}"/>
+              </a:ext>
+            </a:extLst>
+          </p:cNvPr>
+          <p:cNvSpPr>
+            <a:spLocks noGrp="1"/>
+          </p:cNvSpPr>
+          <p:nvPr/>
+        </p:nvSpPr>
+        <p:spPr>
+          <a:xfrm>
             <a:off x="590550" y="180975"/>
             <a:ext cx="11049000" cy="285750"/>
           </a:xfrm>
-          <a:prstGeom xmlns:a="http://schemas.openxmlformats.org/drawingml/2006/main" prst="rect">
-            <a:avLst/>
-          </a:prstGeom>
-          <a:noFill xmlns:a="http://schemas.openxmlformats.org/drawingml/2006/main"/>
-          <a:ln xmlns:a="http://schemas.openxmlformats.org/drawingml/2006/main" w="0">
-            <a:noFill/>
-          </a:ln>
-        </p:spPr>
-        <p:txBody>
-          <a:bodyPr xmlns:a="http://schemas.openxmlformats.org/drawingml/2006/main">
+          <a:prstGeom prst="rect">
+            <a:avLst/>
+          </a:prstGeom>
+          <a:noFill/>
+          <a:ln w="0">
+            <a:noFill/>
+          </a:ln>
+        </p:spPr>
+        <p:txBody>
+          <a:bodyPr>
             <a:noAutofit/>
           </a:bodyPr>
-          <a:lstStyle xmlns:a="http://schemas.openxmlformats.org/drawingml/2006/main"/>
-          <a:p xmlns:a="http://schemas.openxmlformats.org/drawingml/2006/main">
+          <a:lstStyle/>
+          <a:p>
             <a:pPr>
               <a:defRPr sz="1500" b="1">
                 <a:solidFill>
@@ -17668,36 +17203,36 @@
       <p:sp>
         <p:nvSpPr>
           <p:cNvPr id="3" name="">
-            <a:extLst xmlns:a="http://schemas.openxmlformats.org/drawingml/2006/main">
-              <a:ext uri="{FF2B5EF4-FFF2-40B4-BE49-F238E27FC236}">
-                <a16:creationId xmlns:a16="http://schemas.microsoft.com/office/drawing/2014/main" id="{D15158E0-15D4-422A-BCC6-E11E857B6927}"/>
-              </a:ext>
-            </a:extLst>
-          </p:cNvPr>
-          <p:cNvSpPr>
-            <a:spLocks xmlns:a="http://schemas.openxmlformats.org/drawingml/2006/main" noGrp="1"/>
-          </p:cNvSpPr>
-          <p:nvPr/>
-        </p:nvSpPr>
-        <p:spPr>
-          <a:xfrm xmlns:a="http://schemas.openxmlformats.org/drawingml/2006/main">
+            <a:extLst>
+              <a:ext uri="{FF2B5EF4-FFF2-40B4-BE49-F238E27FC236}">
+                <ns2:creationId id="{D15158E0-15D4-422A-BCC6-E11E857B6927}"/>
+              </a:ext>
+            </a:extLst>
+          </p:cNvPr>
+          <p:cNvSpPr>
+            <a:spLocks noGrp="1"/>
+          </p:cNvSpPr>
+          <p:nvPr/>
+        </p:nvSpPr>
+        <p:spPr>
+          <a:xfrm>
             <a:off x="590550" y="523875"/>
             <a:ext cx="11049000" cy="809625"/>
           </a:xfrm>
-          <a:prstGeom xmlns:a="http://schemas.openxmlformats.org/drawingml/2006/main" prst="rect">
-            <a:avLst/>
-          </a:prstGeom>
-          <a:noFill xmlns:a="http://schemas.openxmlformats.org/drawingml/2006/main"/>
-          <a:ln xmlns:a="http://schemas.openxmlformats.org/drawingml/2006/main" w="0">
-            <a:noFill/>
-          </a:ln>
-        </p:spPr>
-        <p:txBody>
-          <a:bodyPr xmlns:a="http://schemas.openxmlformats.org/drawingml/2006/main">
+          <a:prstGeom prst="rect">
+            <a:avLst/>
+          </a:prstGeom>
+          <a:noFill/>
+          <a:ln w="0">
+            <a:noFill/>
+          </a:ln>
+        </p:spPr>
+        <p:txBody>
+          <a:bodyPr>
             <a:noAutofit/>
           </a:bodyPr>
-          <a:lstStyle xmlns:a="http://schemas.openxmlformats.org/drawingml/2006/main"/>
-          <a:p xmlns:a="http://schemas.openxmlformats.org/drawingml/2006/main">
+          <a:lstStyle/>
+          <a:p>
             <a:pPr>
               <a:defRPr sz="3150" b="1">
                 <a:solidFill>
@@ -17725,29 +17260,29 @@
       <p:sp>
         <p:nvSpPr>
           <p:cNvPr id="4" name="">
-            <a:extLst xmlns:a="http://schemas.openxmlformats.org/drawingml/2006/main">
-              <a:ext uri="{FF2B5EF4-FFF2-40B4-BE49-F238E27FC236}">
-                <a16:creationId xmlns:a16="http://schemas.microsoft.com/office/drawing/2014/main" id="{E7CD5203-855F-477F-9D95-9BC2629947B1}"/>
-              </a:ext>
-            </a:extLst>
-          </p:cNvPr>
-          <p:cNvSpPr>
-            <a:spLocks xmlns:a="http://schemas.openxmlformats.org/drawingml/2006/main" noGrp="1"/>
-          </p:cNvSpPr>
-          <p:nvPr/>
-        </p:nvSpPr>
-        <p:spPr>
-          <a:xfrm xmlns:a="http://schemas.openxmlformats.org/drawingml/2006/main">
+            <a:extLst>
+              <a:ext uri="{FF2B5EF4-FFF2-40B4-BE49-F238E27FC236}">
+                <ns2:creationId id="{E7CD5203-855F-477F-9D95-9BC2629947B1}"/>
+              </a:ext>
+            </a:extLst>
+          </p:cNvPr>
+          <p:cNvSpPr>
+            <a:spLocks noGrp="1"/>
+          </p:cNvSpPr>
+          <p:nvPr/>
+        </p:nvSpPr>
+        <p:spPr>
+          <a:xfrm>
             <a:off x="590550" y="1752600"/>
             <a:ext cx="4476750" cy="4200525"/>
           </a:xfrm>
-          <a:prstGeom xmlns:a="http://schemas.openxmlformats.org/drawingml/2006/main" prst="rect">
-            <a:avLst/>
-          </a:prstGeom>
-          <a:solidFill xmlns:a="http://schemas.openxmlformats.org/drawingml/2006/main">
+          <a:prstGeom prst="rect">
+            <a:avLst/>
+          </a:prstGeom>
+          <a:solidFill>
             <a:srgbClr val="2E7D6F"/>
           </a:solidFill>
-          <a:ln xmlns:a="http://schemas.openxmlformats.org/drawingml/2006/main" w="0">
+          <a:ln w="0">
             <a:noFill/>
           </a:ln>
         </p:spPr>
@@ -17755,36 +17290,36 @@
       <p:sp>
         <p:nvSpPr>
           <p:cNvPr id="5" name="">
-            <a:extLst xmlns:a="http://schemas.openxmlformats.org/drawingml/2006/main">
-              <a:ext uri="{FF2B5EF4-FFF2-40B4-BE49-F238E27FC236}">
-                <a16:creationId xmlns:a16="http://schemas.microsoft.com/office/drawing/2014/main" id="{A4C8FE03-D12E-48CA-B170-CDE376898AAC}"/>
-              </a:ext>
-            </a:extLst>
-          </p:cNvPr>
-          <p:cNvSpPr>
-            <a:spLocks xmlns:a="http://schemas.openxmlformats.org/drawingml/2006/main" noGrp="1"/>
-          </p:cNvSpPr>
-          <p:nvPr/>
-        </p:nvSpPr>
-        <p:spPr>
-          <a:xfrm xmlns:a="http://schemas.openxmlformats.org/drawingml/2006/main">
+            <a:extLst>
+              <a:ext uri="{FF2B5EF4-FFF2-40B4-BE49-F238E27FC236}">
+                <ns2:creationId id="{A4C8FE03-D12E-48CA-B170-CDE376898AAC}"/>
+              </a:ext>
+            </a:extLst>
+          </p:cNvPr>
+          <p:cNvSpPr>
+            <a:spLocks noGrp="1"/>
+          </p:cNvSpPr>
+          <p:nvPr/>
+        </p:nvSpPr>
+        <p:spPr>
+          <a:xfrm>
             <a:off x="866775" y="2124075"/>
             <a:ext cx="3905250" cy="3419475"/>
           </a:xfrm>
-          <a:prstGeom xmlns:a="http://schemas.openxmlformats.org/drawingml/2006/main" prst="rect">
-            <a:avLst/>
-          </a:prstGeom>
-          <a:noFill xmlns:a="http://schemas.openxmlformats.org/drawingml/2006/main"/>
-          <a:ln xmlns:a="http://schemas.openxmlformats.org/drawingml/2006/main" w="0">
-            <a:noFill/>
-          </a:ln>
-        </p:spPr>
-        <p:txBody>
-          <a:bodyPr xmlns:a="http://schemas.openxmlformats.org/drawingml/2006/main">
+          <a:prstGeom prst="rect">
+            <a:avLst/>
+          </a:prstGeom>
+          <a:noFill/>
+          <a:ln w="0">
+            <a:noFill/>
+          </a:ln>
+        </p:spPr>
+        <p:txBody>
+          <a:bodyPr>
             <a:noAutofit/>
           </a:bodyPr>
-          <a:lstStyle xmlns:a="http://schemas.openxmlformats.org/drawingml/2006/main"/>
-          <a:p xmlns:a="http://schemas.openxmlformats.org/drawingml/2006/main">
+          <a:lstStyle/>
+          <a:p>
             <a:pPr>
               <a:defRPr sz="2700" b="1">
                 <a:solidFill>
@@ -17812,36 +17347,36 @@
       <p:sp>
         <p:nvSpPr>
           <p:cNvPr id="6" name="">
-            <a:extLst xmlns:a="http://schemas.openxmlformats.org/drawingml/2006/main">
-              <a:ext uri="{FF2B5EF4-FFF2-40B4-BE49-F238E27FC236}">
-                <a16:creationId xmlns:a16="http://schemas.microsoft.com/office/drawing/2014/main" id="{328A6272-3460-4AB1-A032-D5719D98DF03}"/>
-              </a:ext>
-            </a:extLst>
-          </p:cNvPr>
-          <p:cNvSpPr>
-            <a:spLocks xmlns:a="http://schemas.openxmlformats.org/drawingml/2006/main" noGrp="1"/>
-          </p:cNvSpPr>
-          <p:nvPr/>
-        </p:nvSpPr>
-        <p:spPr>
-          <a:xfrm xmlns:a="http://schemas.openxmlformats.org/drawingml/2006/main">
+            <a:extLst>
+              <a:ext uri="{FF2B5EF4-FFF2-40B4-BE49-F238E27FC236}">
+                <ns2:creationId id="{328A6272-3460-4AB1-A032-D5719D98DF03}"/>
+              </a:ext>
+            </a:extLst>
+          </p:cNvPr>
+          <p:cNvSpPr>
+            <a:spLocks noGrp="1"/>
+          </p:cNvSpPr>
+          <p:nvPr/>
+        </p:nvSpPr>
+        <p:spPr>
+          <a:xfrm>
             <a:off x="5534025" y="2000250"/>
             <a:ext cx="5905500" cy="3876675"/>
           </a:xfrm>
-          <a:prstGeom xmlns:a="http://schemas.openxmlformats.org/drawingml/2006/main" prst="rect">
-            <a:avLst/>
-          </a:prstGeom>
-          <a:noFill xmlns:a="http://schemas.openxmlformats.org/drawingml/2006/main"/>
-          <a:ln xmlns:a="http://schemas.openxmlformats.org/drawingml/2006/main" w="0">
-            <a:noFill/>
-          </a:ln>
-        </p:spPr>
-        <p:txBody>
-          <a:bodyPr xmlns:a="http://schemas.openxmlformats.org/drawingml/2006/main">
+          <a:prstGeom prst="rect">
+            <a:avLst/>
+          </a:prstGeom>
+          <a:noFill/>
+          <a:ln w="0">
+            <a:noFill/>
+          </a:ln>
+        </p:spPr>
+        <p:txBody>
+          <a:bodyPr>
             <a:noAutofit/>
           </a:bodyPr>
-          <a:lstStyle xmlns:a="http://schemas.openxmlformats.org/drawingml/2006/main"/>
-          <a:p xmlns:a="http://schemas.openxmlformats.org/drawingml/2006/main">
+          <a:lstStyle/>
+          <a:p>
             <a:pPr>
               <a:defRPr sz="2250" b="0">
                 <a:solidFill>
@@ -17861,7 +17396,7 @@
                 <a:ea typeface="Calibri"/>
                 <a:cs typeface="Calibri"/>
               </a:rPr>
-              <a:t>Today we check that evidence ourselves.</a:t>
+              <a:t>Check each claim against the results in your notebook.</a:t>
             </a:r>
           </a:p>
         </p:txBody>
@@ -17869,36 +17404,36 @@
       <p:sp>
         <p:nvSpPr>
           <p:cNvPr id="7" name="">
-            <a:extLst xmlns:a="http://schemas.openxmlformats.org/drawingml/2006/main">
-              <a:ext uri="{FF2B5EF4-FFF2-40B4-BE49-F238E27FC236}">
-                <a16:creationId xmlns:a16="http://schemas.microsoft.com/office/drawing/2014/main" id="{EABF7038-2072-428C-AE32-1203D6A728CC}"/>
-              </a:ext>
-            </a:extLst>
-          </p:cNvPr>
-          <p:cNvSpPr>
-            <a:spLocks xmlns:a="http://schemas.openxmlformats.org/drawingml/2006/main" noGrp="1"/>
-          </p:cNvSpPr>
-          <p:nvPr/>
-        </p:nvSpPr>
-        <p:spPr>
-          <a:xfrm xmlns:a="http://schemas.openxmlformats.org/drawingml/2006/main">
+            <a:extLst>
+              <a:ext uri="{FF2B5EF4-FFF2-40B4-BE49-F238E27FC236}">
+                <ns2:creationId id="{EABF7038-2072-428C-AE32-1203D6A728CC}"/>
+              </a:ext>
+            </a:extLst>
+          </p:cNvPr>
+          <p:cNvSpPr>
+            <a:spLocks noGrp="1"/>
+          </p:cNvSpPr>
+          <p:nvPr/>
+        </p:nvSpPr>
+        <p:spPr>
+          <a:xfrm>
             <a:off x="590550" y="6524625"/>
             <a:ext cx="10810875" cy="219075"/>
           </a:xfrm>
-          <a:prstGeom xmlns:a="http://schemas.openxmlformats.org/drawingml/2006/main" prst="rect">
-            <a:avLst/>
-          </a:prstGeom>
-          <a:noFill xmlns:a="http://schemas.openxmlformats.org/drawingml/2006/main"/>
-          <a:ln xmlns:a="http://schemas.openxmlformats.org/drawingml/2006/main" w="0">
-            <a:noFill/>
-          </a:ln>
-        </p:spPr>
-        <p:txBody>
-          <a:bodyPr xmlns:a="http://schemas.openxmlformats.org/drawingml/2006/main">
+          <a:prstGeom prst="rect">
+            <a:avLst/>
+          </a:prstGeom>
+          <a:noFill/>
+          <a:ln w="0">
+            <a:noFill/>
+          </a:ln>
+        </p:spPr>
+        <p:txBody>
+          <a:bodyPr>
             <a:noAutofit/>
           </a:bodyPr>
-          <a:lstStyle xmlns:a="http://schemas.openxmlformats.org/drawingml/2006/main"/>
-          <a:p xmlns:a="http://schemas.openxmlformats.org/drawingml/2006/main">
+          <a:lstStyle/>
+          <a:p>
             <a:pPr>
               <a:defRPr sz="1200" b="0">
                 <a:solidFill>
@@ -17926,7 +17461,7 @@
     </p:spTree>
     <p:extLst>
       <p:ext uri="{BB962C8B-B14F-4D97-AF65-F5344CB8AC3E}">
-        <p14:creationId xmlns:p14="http://schemas.microsoft.com/office/powerpoint/2010/main" val="5382248"/>
+        <ns3:creationId val="5382248"/>
       </p:ext>
     </p:extLst>
   </p:cSld>

--- a/IUEA_Teaching_Plan/decks/CML3112_Week13_Design_Infrastructure.pptx
+++ b/IUEA_Teaching_Plan/decks/CML3112_Week13_Design_Infrastructure.pptx
@@ -42,11 +42,11 @@
     <p:sldId xmlns:r="http://schemas.openxmlformats.org/officeDocument/2006/relationships" id="271" r:id="R34cbbe7b7ccd4c6c"/>
     <p:sldId xmlns:r="http://schemas.openxmlformats.org/officeDocument/2006/relationships" id="272" r:id="Ra27e1b028e9a4199"/>
     <p:sldId xmlns:r="http://schemas.openxmlformats.org/officeDocument/2006/relationships" id="273" r:id="R202496cb979b4f52"/>
-    <p:sldId xmlns:r="http://schemas.openxmlformats.org/officeDocument/2006/relationships" id="274" r:id="Rb0fb31df72f7497b"/>
+    <p:sldId xmlns:ns0="http://schemas.openxmlformats.org/officeDocument/2006/relationships" id="298" ns0:id="rId30"/>
     <p:sldId xmlns:r="http://schemas.openxmlformats.org/officeDocument/2006/relationships" id="275" r:id="Re92f0ceb97584ec0"/>
     <p:sldId xmlns:r="http://schemas.openxmlformats.org/officeDocument/2006/relationships" id="276" r:id="R4a54a964634548c0"/>
     <p:sldId xmlns:r="http://schemas.openxmlformats.org/officeDocument/2006/relationships" id="277" r:id="R9c72958e4e9e4a15"/>
-    <p:sldId xmlns:r="http://schemas.openxmlformats.org/officeDocument/2006/relationships" id="278" r:id="Ra741ceb981b54509"/>
+    <p:sldId xmlns:ns0="http://schemas.openxmlformats.org/officeDocument/2006/relationships" id="297" ns0:id="rId47"/>
     <p:sldId xmlns:r="http://schemas.openxmlformats.org/officeDocument/2006/relationships" id="279" r:id="R23b101d855b8469b"/>
     <p:sldId xmlns:r="http://schemas.openxmlformats.org/officeDocument/2006/relationships" id="280" r:id="R1bcebadd973b41b6"/>
   </p:sldIdLst>
@@ -2679,7 +2679,7 @@
 </file>
 
 <file path=ppt/notesSlides/notesSlide35.xml><?xml version="1.0" encoding="utf-8"?>
-<p:notes xmlns:p="http://schemas.openxmlformats.org/presentationml/2006/main">
+<p:notes xmlns:a="http://schemas.openxmlformats.org/drawingml/2006/main" xmlns:p="http://schemas.openxmlformats.org/presentationml/2006/main" xmlns:r="http://schemas.openxmlformats.org/officeDocument/2006/relationships">
   <p:cSld>
     <p:spTree>
       <p:nvGrpSpPr>
@@ -2688,16 +2688,21 @@
         <p:nvPr/>
       </p:nvGrpSpPr>
       <p:grpSpPr>
-        <a:xfrm xmlns:a="http://schemas.openxmlformats.org/drawingml/2006/main"/>
+        <a:xfrm>
+          <a:off x="0" y="0"/>
+          <a:ext cx="0" cy="0"/>
+          <a:chOff x="0" y="0"/>
+          <a:chExt cx="0" cy="0"/>
+        </a:xfrm>
       </p:grpSpPr>
       <p:sp>
         <p:nvSpPr>
           <p:cNvPr id="2" name="Slide Image Placeholder 1"/>
           <p:cNvSpPr>
-            <a:spLocks xmlns:a="http://schemas.openxmlformats.org/drawingml/2006/main" noGrp="1"/>
+            <a:spLocks noGrp="1"/>
           </p:cNvSpPr>
           <p:nvPr>
-            <p:ph type="sldImg" idx="0"/>
+            <p:ph type="sldImg" idx="2"/>
           </p:nvPr>
         </p:nvSpPr>
         <p:spPr/>
@@ -2706,37 +2711,31 @@
         <p:nvSpPr>
           <p:cNvPr id="3" name="Notes Placeholder 2"/>
           <p:cNvSpPr>
-            <a:spLocks xmlns:a="http://schemas.openxmlformats.org/drawingml/2006/main" noGrp="1"/>
+            <a:spLocks noGrp="1"/>
           </p:cNvSpPr>
           <p:nvPr>
-            <p:ph type="body" idx="1"/>
+            <p:ph type="body" idx="3" sz="quarter"/>
           </p:nvPr>
         </p:nvSpPr>
         <p:spPr/>
         <p:txBody>
-          <a:bodyPr xmlns:a="http://schemas.openxmlformats.org/drawingml/2006/main"/>
-          <a:lstStyle xmlns:a="http://schemas.openxmlformats.org/drawingml/2006/main"/>
-          <a:p xmlns:a="http://schemas.openxmlformats.org/drawingml/2006/main">
-            <a:r>
-              <a:t>Let us be clear about what to do after class.</a:t>
-            </a:r>
-          </a:p>
-          <a:p xmlns:a="http://schemas.openxmlformats.org/drawingml/2006/main"/>
-          <a:p xmlns:a="http://schemas.openxmlformats.org/drawingml/2006/main">
-            <a:r>
-              <a:t>There is no new weekly assignment this week. We continue with the official project deliverables, and we complete the Week 13 quiz.</a:t>
-            </a:r>
-          </a:p>
-          <a:p xmlns:a="http://schemas.openxmlformats.org/drawingml/2006/main"/>
-          <a:p xmlns:a="http://schemas.openxmlformats.org/drawingml/2006/main">
-            <a:r>
-              <a:t>We also prepare for Colab Test 2 in Week 14. Practise saving your test notebook and submitting it, and revise the published function interfaces. An interface is the function name, its inputs and what it returns, and the test expects them exactly as published.</a:t>
-            </a:r>
-          </a:p>
-          <a:p xmlns:a="http://schemas.openxmlformats.org/drawingml/2006/main"/>
-          <a:p xmlns:a="http://schemas.openxmlformats.org/drawingml/2006/main">
-            <a:r>
-              <a:t>Please do not add an extra upload. Nothing beyond the official deliverables is being asked for.</a:t>
+          <a:bodyPr/>
+          <a:lstStyle/>
+          <a:p>
+            <a:r>
+              <a:t>There is no new assignment this week. Block 2 closes with two things.</a:t>
+            </a:r>
+          </a:p>
+          <a:p/>
+          <a:p>
+            <a:r>
+              <a:t>The first is the Block 2 assignment pack, which is part A from Week 11 and part B from Week 12, forty marks in all, due Monday 7 December at 23:59 Kampala time. The second is the Block 2 quiz, fifteen questions across Weeks 11, 12 and 13, which opens after today's class.</a:t>
+            </a:r>
+          </a:p>
+          <a:p/>
+          <a:p>
+            <a:r>
+              <a:t>Next week is Practical Test 2. Rehearse saving your test notebook and submitting it, and revise the function interfaces. An interface is the function name, its inputs and what it returns, and the test expects them exactly as published.</a:t>
             </a:r>
           </a:p>
         </p:txBody>
@@ -2745,23 +2744,18 @@
         <p:nvSpPr>
           <p:cNvPr id="4" name="Slide Number Placeholder 3"/>
           <p:cNvSpPr>
-            <a:spLocks xmlns:a="http://schemas.openxmlformats.org/drawingml/2006/main" noGrp="1"/>
+            <a:spLocks noGrp="1"/>
           </p:cNvSpPr>
           <p:nvPr>
-            <p:ph type="sldNum" idx="5"/>
+            <p:ph type="sldNum" idx="5" sz="quarter"/>
           </p:nvPr>
         </p:nvSpPr>
         <p:spPr/>
-        <p:txBody>
-          <a:bodyPr xmlns:a="http://schemas.openxmlformats.org/drawingml/2006/main"/>
-          <a:lstStyle xmlns:a="http://schemas.openxmlformats.org/drawingml/2006/main"/>
-          <a:p xmlns:a="http://schemas.openxmlformats.org/drawingml/2006/main"/>
-        </p:txBody>
       </p:sp>
     </p:spTree>
   </p:cSld>
   <p:clrMapOvr>
-    <a:masterClrMapping xmlns:a="http://schemas.openxmlformats.org/drawingml/2006/main"/>
+    <a:masterClrMapping/>
   </p:clrMapOvr>
 </p:notes>
 </file>
@@ -3037,7 +3031,7 @@
 </file>
 
 <file path=ppt/notesSlides/notesSlide39.xml><?xml version="1.0" encoding="utf-8"?>
-<p:notes xmlns:p="http://schemas.openxmlformats.org/presentationml/2006/main">
+<p:notes xmlns:a="http://schemas.openxmlformats.org/drawingml/2006/main" xmlns:p="http://schemas.openxmlformats.org/presentationml/2006/main" xmlns:r="http://schemas.openxmlformats.org/officeDocument/2006/relationships">
   <p:cSld>
     <p:spTree>
       <p:nvGrpSpPr>
@@ -3046,16 +3040,21 @@
         <p:nvPr/>
       </p:nvGrpSpPr>
       <p:grpSpPr>
-        <a:xfrm xmlns:a="http://schemas.openxmlformats.org/drawingml/2006/main"/>
+        <a:xfrm>
+          <a:off x="0" y="0"/>
+          <a:ext cx="0" cy="0"/>
+          <a:chOff x="0" y="0"/>
+          <a:chExt cx="0" cy="0"/>
+        </a:xfrm>
       </p:grpSpPr>
       <p:sp>
         <p:nvSpPr>
           <p:cNvPr id="2" name="Slide Image Placeholder 1"/>
           <p:cNvSpPr>
-            <a:spLocks xmlns:a="http://schemas.openxmlformats.org/drawingml/2006/main" noGrp="1"/>
+            <a:spLocks noGrp="1"/>
           </p:cNvSpPr>
           <p:nvPr>
-            <p:ph type="sldImg" idx="0"/>
+            <p:ph type="sldImg" idx="2"/>
           </p:nvPr>
         </p:nvSpPr>
         <p:spPr/>
@@ -3064,31 +3063,31 @@
         <p:nvSpPr>
           <p:cNvPr id="3" name="Notes Placeholder 2"/>
           <p:cNvSpPr>
-            <a:spLocks xmlns:a="http://schemas.openxmlformats.org/drawingml/2006/main" noGrp="1"/>
+            <a:spLocks noGrp="1"/>
           </p:cNvSpPr>
           <p:nvPr>
-            <p:ph type="body" idx="1"/>
+            <p:ph type="body" idx="3" sz="quarter"/>
           </p:nvPr>
         </p:nvSpPr>
         <p:spPr/>
         <p:txBody>
-          <a:bodyPr xmlns:a="http://schemas.openxmlformats.org/drawingml/2006/main"/>
-          <a:lstStyle xmlns:a="http://schemas.openxmlformats.org/drawingml/2006/main"/>
-          <a:p xmlns:a="http://schemas.openxmlformats.org/drawingml/2006/main">
-            <a:r>
-              <a:t>The Week 13 quiz is next.</a:t>
-            </a:r>
-          </a:p>
-          <a:p xmlns:a="http://schemas.openxmlformats.org/drawingml/2006/main"/>
-          <a:p xmlns:a="http://schemas.openxmlformats.org/drawingml/2006/main">
-            <a:r>
-              <a:t>Answer it individually. It opens when we activate it, and it then stays open for 24 hours. Use your Student Registration Number and your registered account when you sign in. The quiz link is on the slide.</a:t>
-            </a:r>
-          </a:p>
-          <a:p xmlns:a="http://schemas.openxmlformats.org/drawingml/2006/main"/>
-          <a:p xmlns:a="http://schemas.openxmlformats.org/drawingml/2006/main">
-            <a:r>
-              <a:t>Check the announced closing time, and do not leave it until the last minutes. Once the quiz is active, answer it on your own.</a:t>
+          <a:bodyPr/>
+          <a:lstStyle/>
+          <a:p>
+            <a:r>
+              <a:t>The Block 2 quiz is three short forms, one for each week of the block, with five questions each. Together they are fifteen questions and fifteen marks.</a:t>
+            </a:r>
+          </a:p>
+          <a:p/>
+          <a:p>
+            <a:r>
+              <a:t>The forms open after today's class, when the lecturer activates them, and each stays open for twenty-four hours. Open them one after the other and answer individually, using your Student Registration Number and your registered account.</a:t>
+            </a:r>
+          </a:p>
+          <a:p/>
+          <a:p>
+            <a:r>
+              <a:t>This quiz replaces the three weekly quizzes of Weeks 11, 12 and 13. Like the assignment pack, it counts in full and is not dropped.</a:t>
             </a:r>
           </a:p>
         </p:txBody>
@@ -3097,23 +3096,18 @@
         <p:nvSpPr>
           <p:cNvPr id="4" name="Slide Number Placeholder 3"/>
           <p:cNvSpPr>
-            <a:spLocks xmlns:a="http://schemas.openxmlformats.org/drawingml/2006/main" noGrp="1"/>
+            <a:spLocks noGrp="1"/>
           </p:cNvSpPr>
           <p:nvPr>
-            <p:ph type="sldNum" idx="5"/>
+            <p:ph type="sldNum" idx="5" sz="quarter"/>
           </p:nvPr>
         </p:nvSpPr>
         <p:spPr/>
-        <p:txBody>
-          <a:bodyPr xmlns:a="http://schemas.openxmlformats.org/drawingml/2006/main"/>
-          <a:lstStyle xmlns:a="http://schemas.openxmlformats.org/drawingml/2006/main"/>
-          <a:p xmlns:a="http://schemas.openxmlformats.org/drawingml/2006/main"/>
-        </p:txBody>
       </p:sp>
     </p:spTree>
   </p:cSld>
   <p:clrMapOvr>
-    <a:masterClrMapping xmlns:a="http://schemas.openxmlformats.org/drawingml/2006/main"/>
+    <a:masterClrMapping/>
   </p:clrMapOvr>
 </p:notes>
 </file>
@@ -33560,201 +33554,85 @@
 </file>
 
 <file path=ppt/slides/slide35.xml><?xml version="1.0" encoding="utf-8"?>
-<p:sld xmlns:p="http://schemas.openxmlformats.org/presentationml/2006/main">
+<p:sld xmlns:a="http://schemas.openxmlformats.org/drawingml/2006/main" xmlns:p="http://schemas.openxmlformats.org/presentationml/2006/main" xmlns:r="http://schemas.openxmlformats.org/officeDocument/2006/relationships">
   <p:cSld>
-    <p:bg>
-      <p:bgPr>
-        <a:solidFill xmlns:a="http://schemas.openxmlformats.org/drawingml/2006/main">
-          <a:srgbClr val="FFFFFF"/>
-        </a:solidFill>
-      </p:bgPr>
-    </p:bg>
     <p:spTree>
       <p:nvGrpSpPr>
         <p:cNvPr id="1" name=""/>
         <p:cNvGrpSpPr/>
         <p:nvPr/>
       </p:nvGrpSpPr>
-      <p:grpSpPr>
-        <a:xfrm xmlns:a="http://schemas.openxmlformats.org/drawingml/2006/main"/>
-      </p:grpSpPr>
+      <p:grpSpPr/>
       <p:sp>
         <p:nvSpPr>
-          <p:cNvPr id="13" name="">
-            <a:extLst xmlns:a="http://schemas.openxmlformats.org/drawingml/2006/main">
-              <a:ext uri="{FF2B5EF4-FFF2-40B4-BE49-F238E27FC236}">
-                <a16:creationId xmlns:a16="http://schemas.microsoft.com/office/drawing/2014/main" id="{30ED0D34-31B2-4F5E-A89E-A63823609F15}"/>
-              </a:ext>
-            </a:extLst>
-          </p:cNvPr>
-          <p:cNvSpPr>
-            <a:spLocks xmlns:a="http://schemas.openxmlformats.org/drawingml/2006/main" noGrp="1"/>
-          </p:cNvSpPr>
+          <p:cNvPr id="2" name="Rectangle 1"/>
+          <p:cNvSpPr/>
           <p:nvPr/>
         </p:nvSpPr>
         <p:spPr>
-          <a:xfrm xmlns:a="http://schemas.openxmlformats.org/drawingml/2006/main">
+          <a:xfrm>
             <a:off x="0" y="0"/>
-            <a:ext cx="12191695" cy="1390650"/>
+            <a:ext cx="12192000" cy="1397000"/>
           </a:xfrm>
-          <a:prstGeom xmlns:a="http://schemas.openxmlformats.org/drawingml/2006/main" prst="rect">
+          <a:prstGeom prst="rect">
             <a:avLst/>
           </a:prstGeom>
-          <a:solidFill xmlns:a="http://schemas.openxmlformats.org/drawingml/2006/main">
+          <a:solidFill>
             <a:srgbClr val="1C3144"/>
           </a:solidFill>
-          <a:ln xmlns:a="http://schemas.openxmlformats.org/drawingml/2006/main" w="0">
+          <a:ln>
             <a:noFill/>
           </a:ln>
+          <a:effectLst/>
         </p:spPr>
-        <p:txBody xmlns:a="http://schemas.openxmlformats.org/drawingml/2006/main">
-          <a:bodyPr/>
-          <a:p/>
+        <p:style>
+          <a:lnRef idx="1">
+            <a:schemeClr val="accent1"/>
+          </a:lnRef>
+          <a:fillRef idx="3">
+            <a:schemeClr val="accent1"/>
+          </a:fillRef>
+          <a:effectRef idx="2">
+            <a:schemeClr val="accent1"/>
+          </a:effectRef>
+          <a:fontRef idx="minor">
+            <a:schemeClr val="lt1"/>
+          </a:fontRef>
+        </p:style>
+        <p:txBody>
+          <a:bodyPr rtlCol="0" anchor="ctr"/>
+          <a:lstStyle/>
+          <a:p>
+            <a:pPr algn="ctr"/>
+          </a:p>
         </p:txBody>
       </p:sp>
       <p:sp>
         <p:nvSpPr>
-          <p:cNvPr id="2" name="">
-            <a:extLst xmlns:a="http://schemas.openxmlformats.org/drawingml/2006/main">
-              <a:ext uri="{FF2B5EF4-FFF2-40B4-BE49-F238E27FC236}">
-                <a16:creationId xmlns:a16="http://schemas.microsoft.com/office/drawing/2014/main" id="{70B913EB-5E3D-44D1-8ED9-1B6074354719}"/>
-              </a:ext>
-            </a:extLst>
-          </p:cNvPr>
-          <p:cNvSpPr>
-            <a:spLocks xmlns:a="http://schemas.openxmlformats.org/drawingml/2006/main" noGrp="1"/>
-          </p:cNvSpPr>
+          <p:cNvPr id="3" name="TextBox 2"/>
+          <p:cNvSpPr txBox="1"/>
           <p:nvPr/>
         </p:nvSpPr>
         <p:spPr>
-          <a:xfrm xmlns:a="http://schemas.openxmlformats.org/drawingml/2006/main">
-            <a:off x="590550" y="180975"/>
-            <a:ext cx="11049000" cy="285750"/>
+          <a:xfrm>
+            <a:off x="584200" y="177800"/>
+            <a:ext cx="11049000" cy="279400"/>
           </a:xfrm>
-          <a:prstGeom xmlns:a="http://schemas.openxmlformats.org/drawingml/2006/main" prst="rect">
+          <a:prstGeom prst="rect">
             <a:avLst/>
           </a:prstGeom>
-          <a:noFill xmlns:a="http://schemas.openxmlformats.org/drawingml/2006/main"/>
-          <a:ln xmlns:a="http://schemas.openxmlformats.org/drawingml/2006/main" w="0">
-            <a:noFill/>
-          </a:ln>
+          <a:noFill/>
         </p:spPr>
         <p:txBody>
-          <a:bodyPr xmlns:a="http://schemas.openxmlformats.org/drawingml/2006/main">
-            <a:noAutofit/>
+          <a:bodyPr wrap="square">
+            <a:spAutoFit/>
           </a:bodyPr>
-          <a:lstStyle xmlns:a="http://schemas.openxmlformats.org/drawingml/2006/main">
-            <a:defPPr>
-              <a:defRPr sz="1500" b="1">
-                <a:solidFill>
-                  <a:srgbClr val="E4572E"/>
-                </a:solidFill>
-                <a:latin typeface="Calibri"/>
-                <a:ea typeface="Calibri"/>
-                <a:cs typeface="Calibri"/>
-              </a:defRPr>
-            </a:defPPr>
-            <a:lvl1pPr>
-              <a:defRPr sz="1500" b="1">
-                <a:solidFill>
-                  <a:srgbClr val="E4572E"/>
-                </a:solidFill>
-                <a:latin typeface="Calibri"/>
-                <a:ea typeface="Calibri"/>
-                <a:cs typeface="Calibri"/>
-              </a:defRPr>
-            </a:lvl1pPr>
-            <a:lvl2pPr>
-              <a:defRPr sz="1500" b="1">
-                <a:solidFill>
-                  <a:srgbClr val="E4572E"/>
-                </a:solidFill>
-                <a:latin typeface="Calibri"/>
-                <a:ea typeface="Calibri"/>
-                <a:cs typeface="Calibri"/>
-              </a:defRPr>
-            </a:lvl2pPr>
-            <a:lvl3pPr>
-              <a:defRPr sz="1500" b="1">
-                <a:solidFill>
-                  <a:srgbClr val="E4572E"/>
-                </a:solidFill>
-                <a:latin typeface="Calibri"/>
-                <a:ea typeface="Calibri"/>
-                <a:cs typeface="Calibri"/>
-              </a:defRPr>
-            </a:lvl3pPr>
-            <a:lvl4pPr>
-              <a:defRPr sz="1500" b="1">
-                <a:solidFill>
-                  <a:srgbClr val="E4572E"/>
-                </a:solidFill>
-                <a:latin typeface="Calibri"/>
-                <a:ea typeface="Calibri"/>
-                <a:cs typeface="Calibri"/>
-              </a:defRPr>
-            </a:lvl4pPr>
-            <a:lvl5pPr>
-              <a:defRPr sz="1500" b="1">
-                <a:solidFill>
-                  <a:srgbClr val="E4572E"/>
-                </a:solidFill>
-                <a:latin typeface="Calibri"/>
-                <a:ea typeface="Calibri"/>
-                <a:cs typeface="Calibri"/>
-              </a:defRPr>
-            </a:lvl5pPr>
-            <a:lvl6pPr>
-              <a:defRPr sz="1500" b="1">
-                <a:solidFill>
-                  <a:srgbClr val="E4572E"/>
-                </a:solidFill>
-                <a:latin typeface="Calibri"/>
-                <a:ea typeface="Calibri"/>
-                <a:cs typeface="Calibri"/>
-              </a:defRPr>
-            </a:lvl6pPr>
-            <a:lvl7pPr>
-              <a:defRPr sz="1500" b="1">
-                <a:solidFill>
-                  <a:srgbClr val="E4572E"/>
-                </a:solidFill>
-                <a:latin typeface="Calibri"/>
-                <a:ea typeface="Calibri"/>
-                <a:cs typeface="Calibri"/>
-              </a:defRPr>
-            </a:lvl7pPr>
-            <a:lvl8pPr>
-              <a:defRPr sz="1500" b="1">
-                <a:solidFill>
-                  <a:srgbClr val="E4572E"/>
-                </a:solidFill>
-                <a:latin typeface="Calibri"/>
-                <a:ea typeface="Calibri"/>
-                <a:cs typeface="Calibri"/>
-              </a:defRPr>
-            </a:lvl8pPr>
-            <a:lvl9pPr>
-              <a:defRPr sz="1500" b="1">
-                <a:solidFill>
-                  <a:srgbClr val="E4572E"/>
-                </a:solidFill>
-                <a:latin typeface="Calibri"/>
-                <a:ea typeface="Calibri"/>
-                <a:cs typeface="Calibri"/>
-              </a:defRPr>
-            </a:lvl9pPr>
-          </a:lstStyle>
-          <a:p xmlns:a="http://schemas.openxmlformats.org/drawingml/2006/main">
+          <a:lstStyle/>
+          <a:p>
             <a:pPr>
-              <a:defRPr sz="1500" b="1">
-                <a:solidFill>
-                  <a:srgbClr val="E4572E"/>
-                </a:solidFill>
-                <a:latin typeface="Calibri"/>
-                <a:ea typeface="Calibri"/>
-                <a:cs typeface="Calibri"/>
-              </a:defRPr>
+              <a:spcAft>
+                <a:spcPts val="0"/>
+              </a:spcAft>
             </a:pPr>
             <a:r>
               <a:rPr sz="1500" b="1">
@@ -33762,482 +33640,128 @@
                   <a:srgbClr val="E4572E"/>
                 </a:solidFill>
                 <a:latin typeface="Calibri"/>
-                <a:ea typeface="Calibri"/>
-                <a:cs typeface="Calibri"/>
-              </a:rPr>
-              <a:t>WHAT TO DO</a:t>
+              </a:rPr>
+              <a:t>ASSESSMENT</a:t>
             </a:r>
           </a:p>
         </p:txBody>
       </p:sp>
       <p:sp>
         <p:nvSpPr>
-          <p:cNvPr id="3" name="">
-            <a:extLst xmlns:a="http://schemas.openxmlformats.org/drawingml/2006/main">
-              <a:ext uri="{FF2B5EF4-FFF2-40B4-BE49-F238E27FC236}">
-                <a16:creationId xmlns:a16="http://schemas.microsoft.com/office/drawing/2014/main" id="{C710C6C3-A318-4328-AE4B-8498CF4CCFD5}"/>
-              </a:ext>
-            </a:extLst>
-          </p:cNvPr>
-          <p:cNvSpPr>
-            <a:spLocks xmlns:a="http://schemas.openxmlformats.org/drawingml/2006/main" noGrp="1"/>
-          </p:cNvSpPr>
+          <p:cNvPr id="4" name="TextBox 3"/>
+          <p:cNvSpPr txBox="1"/>
           <p:nvPr/>
         </p:nvSpPr>
         <p:spPr>
-          <a:xfrm xmlns:a="http://schemas.openxmlformats.org/drawingml/2006/main">
-            <a:off x="590550" y="523875"/>
-            <a:ext cx="11049000" cy="809625"/>
+          <a:xfrm>
+            <a:off x="584200" y="520700"/>
+            <a:ext cx="11049000" cy="812800"/>
           </a:xfrm>
-          <a:prstGeom xmlns:a="http://schemas.openxmlformats.org/drawingml/2006/main" prst="rect">
+          <a:prstGeom prst="rect">
             <a:avLst/>
           </a:prstGeom>
-          <a:noFill xmlns:a="http://schemas.openxmlformats.org/drawingml/2006/main"/>
-          <a:ln xmlns:a="http://schemas.openxmlformats.org/drawingml/2006/main" w="0">
-            <a:noFill/>
-          </a:ln>
+          <a:noFill/>
         </p:spPr>
         <p:txBody>
-          <a:bodyPr xmlns:a="http://schemas.openxmlformats.org/drawingml/2006/main">
-            <a:noAutofit/>
+          <a:bodyPr wrap="square">
+            <a:spAutoFit/>
           </a:bodyPr>
-          <a:lstStyle xmlns:a="http://schemas.openxmlformats.org/drawingml/2006/main">
-            <a:defPPr>
-              <a:defRPr sz="3150" b="1">
+          <a:lstStyle/>
+          <a:p>
+            <a:pPr>
+              <a:spcAft>
+                <a:spcPts val="0"/>
+              </a:spcAft>
+            </a:pPr>
+            <a:r>
+              <a:rPr sz="3150" b="1">
                 <a:solidFill>
                   <a:srgbClr val="FFFFFF"/>
                 </a:solidFill>
                 <a:latin typeface="Calibri"/>
-                <a:ea typeface="Calibri"/>
-                <a:cs typeface="Calibri"/>
-              </a:defRPr>
-            </a:defPPr>
-            <a:lvl1pPr>
-              <a:defRPr sz="3150" b="1">
-                <a:solidFill>
-                  <a:srgbClr val="FFFFFF"/>
-                </a:solidFill>
-                <a:latin typeface="Calibri"/>
-                <a:ea typeface="Calibri"/>
-                <a:cs typeface="Calibri"/>
-              </a:defRPr>
-            </a:lvl1pPr>
-            <a:lvl2pPr>
-              <a:defRPr sz="3150" b="1">
-                <a:solidFill>
-                  <a:srgbClr val="FFFFFF"/>
-                </a:solidFill>
-                <a:latin typeface="Calibri"/>
-                <a:ea typeface="Calibri"/>
-                <a:cs typeface="Calibri"/>
-              </a:defRPr>
-            </a:lvl2pPr>
-            <a:lvl3pPr>
-              <a:defRPr sz="3150" b="1">
-                <a:solidFill>
-                  <a:srgbClr val="FFFFFF"/>
-                </a:solidFill>
-                <a:latin typeface="Calibri"/>
-                <a:ea typeface="Calibri"/>
-                <a:cs typeface="Calibri"/>
-              </a:defRPr>
-            </a:lvl3pPr>
-            <a:lvl4pPr>
-              <a:defRPr sz="3150" b="1">
-                <a:solidFill>
-                  <a:srgbClr val="FFFFFF"/>
-                </a:solidFill>
-                <a:latin typeface="Calibri"/>
-                <a:ea typeface="Calibri"/>
-                <a:cs typeface="Calibri"/>
-              </a:defRPr>
-            </a:lvl4pPr>
-            <a:lvl5pPr>
-              <a:defRPr sz="3150" b="1">
-                <a:solidFill>
-                  <a:srgbClr val="FFFFFF"/>
-                </a:solidFill>
-                <a:latin typeface="Calibri"/>
-                <a:ea typeface="Calibri"/>
-                <a:cs typeface="Calibri"/>
-              </a:defRPr>
-            </a:lvl5pPr>
-            <a:lvl6pPr>
-              <a:defRPr sz="3150" b="1">
-                <a:solidFill>
-                  <a:srgbClr val="FFFFFF"/>
-                </a:solidFill>
-                <a:latin typeface="Calibri"/>
-                <a:ea typeface="Calibri"/>
-                <a:cs typeface="Calibri"/>
-              </a:defRPr>
-            </a:lvl6pPr>
-            <a:lvl7pPr>
-              <a:defRPr sz="3150" b="1">
-                <a:solidFill>
-                  <a:srgbClr val="FFFFFF"/>
-                </a:solidFill>
-                <a:latin typeface="Calibri"/>
-                <a:ea typeface="Calibri"/>
-                <a:cs typeface="Calibri"/>
-              </a:defRPr>
-            </a:lvl7pPr>
-            <a:lvl8pPr>
-              <a:defRPr sz="3150" b="1">
-                <a:solidFill>
-                  <a:srgbClr val="FFFFFF"/>
-                </a:solidFill>
-                <a:latin typeface="Calibri"/>
-                <a:ea typeface="Calibri"/>
-                <a:cs typeface="Calibri"/>
-              </a:defRPr>
-            </a:lvl8pPr>
-            <a:lvl9pPr>
-              <a:defRPr sz="3150" b="1">
-                <a:solidFill>
-                  <a:srgbClr val="FFFFFF"/>
-                </a:solidFill>
-                <a:latin typeface="Calibri"/>
-                <a:ea typeface="Calibri"/>
-                <a:cs typeface="Calibri"/>
-              </a:defRPr>
-            </a:lvl9pPr>
-          </a:lstStyle>
-          <a:p xmlns:a="http://schemas.openxmlformats.org/drawingml/2006/main">
-            <a:pPr>
-              <a:defRPr sz="3150" b="1">
-                <a:solidFill>
-                  <a:srgbClr val="FFFFFF"/>
-                </a:solidFill>
-                <a:latin typeface="Calibri"/>
-                <a:ea typeface="Calibri"/>
-                <a:cs typeface="Calibri"/>
-              </a:defRPr>
-            </a:pPr>
-            <a:r>
-              <a:rPr sz="3150" b="1">
-                <a:solidFill>
-                  <a:srgbClr val="FFFFFF"/>
-                </a:solidFill>
-                <a:latin typeface="Calibri"/>
-                <a:ea typeface="Calibri"/>
-                <a:cs typeface="Calibri"/>
-              </a:rPr>
-              <a:t>Preparing for the assignment</a:t>
+              </a:rPr>
+              <a:t>Block 2 closes after today</a:t>
             </a:r>
           </a:p>
         </p:txBody>
       </p:sp>
       <p:sp>
         <p:nvSpPr>
-          <p:cNvPr id="4" name="">
-            <a:extLst xmlns:a="http://schemas.openxmlformats.org/drawingml/2006/main">
-              <a:ext uri="{FF2B5EF4-FFF2-40B4-BE49-F238E27FC236}">
-                <a16:creationId xmlns:a16="http://schemas.microsoft.com/office/drawing/2014/main" id="{C1E72BEF-CACB-4BA2-9E48-949FD0DBDDE9}"/>
-              </a:ext>
-            </a:extLst>
-          </p:cNvPr>
-          <p:cNvSpPr>
-            <a:spLocks xmlns:a="http://schemas.openxmlformats.org/drawingml/2006/main" noGrp="1"/>
-          </p:cNvSpPr>
+          <p:cNvPr id="5" name="Rectangle 4"/>
+          <p:cNvSpPr/>
           <p:nvPr/>
         </p:nvSpPr>
         <p:spPr>
-          <a:xfrm xmlns:a="http://schemas.openxmlformats.org/drawingml/2006/main">
-            <a:off x="590550" y="1781175"/>
-            <a:ext cx="619125" cy="571500"/>
+          <a:xfrm>
+            <a:off x="584200" y="1752600"/>
+            <a:ext cx="4470400" cy="4203700"/>
           </a:xfrm>
-          <a:prstGeom xmlns:a="http://schemas.openxmlformats.org/drawingml/2006/main" prst="rect">
+          <a:prstGeom prst="rect">
             <a:avLst/>
           </a:prstGeom>
-          <a:noFill xmlns:a="http://schemas.openxmlformats.org/drawingml/2006/main"/>
-          <a:ln xmlns:a="http://schemas.openxmlformats.org/drawingml/2006/main" w="0">
+          <a:solidFill>
+            <a:srgbClr val="2E7D6F"/>
+          </a:solidFill>
+          <a:ln>
             <a:noFill/>
           </a:ln>
+          <a:effectLst/>
         </p:spPr>
+        <p:style>
+          <a:lnRef idx="1">
+            <a:schemeClr val="accent1"/>
+          </a:lnRef>
+          <a:fillRef idx="3">
+            <a:schemeClr val="accent1"/>
+          </a:fillRef>
+          <a:effectRef idx="2">
+            <a:schemeClr val="accent1"/>
+          </a:effectRef>
+          <a:fontRef idx="minor">
+            <a:schemeClr val="lt1"/>
+          </a:fontRef>
+        </p:style>
         <p:txBody>
-          <a:bodyPr xmlns:a="http://schemas.openxmlformats.org/drawingml/2006/main">
-            <a:noAutofit/>
-          </a:bodyPr>
-          <a:lstStyle xmlns:a="http://schemas.openxmlformats.org/drawingml/2006/main">
-            <a:defPPr>
-              <a:defRPr sz="2550" b="1">
-                <a:solidFill>
-                  <a:srgbClr val="E4572E"/>
-                </a:solidFill>
-                <a:latin typeface="Calibri"/>
-                <a:ea typeface="Calibri"/>
-                <a:cs typeface="Calibri"/>
-              </a:defRPr>
-            </a:defPPr>
-            <a:lvl1pPr>
-              <a:defRPr sz="2550" b="1">
-                <a:solidFill>
-                  <a:srgbClr val="E4572E"/>
-                </a:solidFill>
-                <a:latin typeface="Calibri"/>
-                <a:ea typeface="Calibri"/>
-                <a:cs typeface="Calibri"/>
-              </a:defRPr>
-            </a:lvl1pPr>
-            <a:lvl2pPr>
-              <a:defRPr sz="2550" b="1">
-                <a:solidFill>
-                  <a:srgbClr val="E4572E"/>
-                </a:solidFill>
-                <a:latin typeface="Calibri"/>
-                <a:ea typeface="Calibri"/>
-                <a:cs typeface="Calibri"/>
-              </a:defRPr>
-            </a:lvl2pPr>
-            <a:lvl3pPr>
-              <a:defRPr sz="2550" b="1">
-                <a:solidFill>
-                  <a:srgbClr val="E4572E"/>
-                </a:solidFill>
-                <a:latin typeface="Calibri"/>
-                <a:ea typeface="Calibri"/>
-                <a:cs typeface="Calibri"/>
-              </a:defRPr>
-            </a:lvl3pPr>
-            <a:lvl4pPr>
-              <a:defRPr sz="2550" b="1">
-                <a:solidFill>
-                  <a:srgbClr val="E4572E"/>
-                </a:solidFill>
-                <a:latin typeface="Calibri"/>
-                <a:ea typeface="Calibri"/>
-                <a:cs typeface="Calibri"/>
-              </a:defRPr>
-            </a:lvl4pPr>
-            <a:lvl5pPr>
-              <a:defRPr sz="2550" b="1">
-                <a:solidFill>
-                  <a:srgbClr val="E4572E"/>
-                </a:solidFill>
-                <a:latin typeface="Calibri"/>
-                <a:ea typeface="Calibri"/>
-                <a:cs typeface="Calibri"/>
-              </a:defRPr>
-            </a:lvl5pPr>
-            <a:lvl6pPr>
-              <a:defRPr sz="2550" b="1">
-                <a:solidFill>
-                  <a:srgbClr val="E4572E"/>
-                </a:solidFill>
-                <a:latin typeface="Calibri"/>
-                <a:ea typeface="Calibri"/>
-                <a:cs typeface="Calibri"/>
-              </a:defRPr>
-            </a:lvl6pPr>
-            <a:lvl7pPr>
-              <a:defRPr sz="2550" b="1">
-                <a:solidFill>
-                  <a:srgbClr val="E4572E"/>
-                </a:solidFill>
-                <a:latin typeface="Calibri"/>
-                <a:ea typeface="Calibri"/>
-                <a:cs typeface="Calibri"/>
-              </a:defRPr>
-            </a:lvl7pPr>
-            <a:lvl8pPr>
-              <a:defRPr sz="2550" b="1">
-                <a:solidFill>
-                  <a:srgbClr val="E4572E"/>
-                </a:solidFill>
-                <a:latin typeface="Calibri"/>
-                <a:ea typeface="Calibri"/>
-                <a:cs typeface="Calibri"/>
-              </a:defRPr>
-            </a:lvl8pPr>
-            <a:lvl9pPr>
-              <a:defRPr sz="2550" b="1">
-                <a:solidFill>
-                  <a:srgbClr val="E4572E"/>
-                </a:solidFill>
-                <a:latin typeface="Calibri"/>
-                <a:ea typeface="Calibri"/>
-                <a:cs typeface="Calibri"/>
-              </a:defRPr>
-            </a:lvl9pPr>
-          </a:lstStyle>
-          <a:p xmlns:a="http://schemas.openxmlformats.org/drawingml/2006/main">
-            <a:pPr>
-              <a:defRPr sz="2550" b="1">
-                <a:solidFill>
-                  <a:srgbClr val="E4572E"/>
-                </a:solidFill>
-                <a:latin typeface="Calibri"/>
-                <a:ea typeface="Calibri"/>
-                <a:cs typeface="Calibri"/>
-              </a:defRPr>
-            </a:pPr>
-            <a:r>
-              <a:rPr sz="2550" b="1">
-                <a:solidFill>
-                  <a:srgbClr val="E4572E"/>
-                </a:solidFill>
-                <a:latin typeface="Calibri"/>
-                <a:ea typeface="Calibri"/>
-                <a:cs typeface="Calibri"/>
-              </a:rPr>
-              <a:t>01</a:t>
-            </a:r>
+          <a:bodyPr rtlCol="0" anchor="ctr"/>
+          <a:lstStyle/>
+          <a:p>
+            <a:pPr algn="ctr"/>
           </a:p>
         </p:txBody>
       </p:sp>
       <p:sp>
         <p:nvSpPr>
-          <p:cNvPr id="5" name="">
-            <a:extLst xmlns:a="http://schemas.openxmlformats.org/drawingml/2006/main">
-              <a:ext uri="{FF2B5EF4-FFF2-40B4-BE49-F238E27FC236}">
-                <a16:creationId xmlns:a16="http://schemas.microsoft.com/office/drawing/2014/main" id="{2731EC6A-DD9C-49F0-AA07-2F49E00E0B1A}"/>
-              </a:ext>
-            </a:extLst>
-          </p:cNvPr>
-          <p:cNvSpPr>
-            <a:spLocks xmlns:a="http://schemas.openxmlformats.org/drawingml/2006/main" noGrp="1"/>
-          </p:cNvSpPr>
+          <p:cNvPr id="6" name="TextBox 5"/>
+          <p:cNvSpPr txBox="1"/>
           <p:nvPr/>
         </p:nvSpPr>
         <p:spPr>
-          <a:xfrm xmlns:a="http://schemas.openxmlformats.org/drawingml/2006/main">
-            <a:off x="1381125" y="1781175"/>
-            <a:ext cx="10096500" cy="992981"/>
+          <a:xfrm>
+            <a:off x="863600" y="2032000"/>
+            <a:ext cx="3911600" cy="3683000"/>
           </a:xfrm>
-          <a:prstGeom xmlns:a="http://schemas.openxmlformats.org/drawingml/2006/main" prst="rect">
+          <a:prstGeom prst="rect">
             <a:avLst/>
           </a:prstGeom>
-          <a:noFill xmlns:a="http://schemas.openxmlformats.org/drawingml/2006/main"/>
-          <a:ln xmlns:a="http://schemas.openxmlformats.org/drawingml/2006/main" w="0">
-            <a:noFill/>
-          </a:ln>
+          <a:noFill/>
         </p:spPr>
         <p:txBody>
-          <a:bodyPr xmlns:a="http://schemas.openxmlformats.org/drawingml/2006/main">
-            <a:noAutofit/>
+          <a:bodyPr wrap="square">
+            <a:spAutoFit/>
           </a:bodyPr>
-          <a:lstStyle xmlns:a="http://schemas.openxmlformats.org/drawingml/2006/main">
-            <a:defPPr>
-              <a:defRPr sz="2250" b="0">
-                <a:solidFill>
-                  <a:srgbClr val="1C3144"/>
-                </a:solidFill>
-                <a:latin typeface="Calibri"/>
-                <a:ea typeface="Calibri"/>
-                <a:cs typeface="Calibri"/>
-              </a:defRPr>
-            </a:defPPr>
-            <a:lvl1pPr>
-              <a:defRPr sz="2250" b="0">
-                <a:solidFill>
-                  <a:srgbClr val="1C3144"/>
-                </a:solidFill>
-                <a:latin typeface="Calibri"/>
-                <a:ea typeface="Calibri"/>
-                <a:cs typeface="Calibri"/>
-              </a:defRPr>
-            </a:lvl1pPr>
-            <a:lvl2pPr>
-              <a:defRPr sz="2250" b="0">
-                <a:solidFill>
-                  <a:srgbClr val="1C3144"/>
-                </a:solidFill>
-                <a:latin typeface="Calibri"/>
-                <a:ea typeface="Calibri"/>
-                <a:cs typeface="Calibri"/>
-              </a:defRPr>
-            </a:lvl2pPr>
-            <a:lvl3pPr>
-              <a:defRPr sz="2250" b="0">
-                <a:solidFill>
-                  <a:srgbClr val="1C3144"/>
-                </a:solidFill>
-                <a:latin typeface="Calibri"/>
-                <a:ea typeface="Calibri"/>
-                <a:cs typeface="Calibri"/>
-              </a:defRPr>
-            </a:lvl3pPr>
-            <a:lvl4pPr>
-              <a:defRPr sz="2250" b="0">
-                <a:solidFill>
-                  <a:srgbClr val="1C3144"/>
-                </a:solidFill>
-                <a:latin typeface="Calibri"/>
-                <a:ea typeface="Calibri"/>
-                <a:cs typeface="Calibri"/>
-              </a:defRPr>
-            </a:lvl4pPr>
-            <a:lvl5pPr>
-              <a:defRPr sz="2250" b="0">
-                <a:solidFill>
-                  <a:srgbClr val="1C3144"/>
-                </a:solidFill>
-                <a:latin typeface="Calibri"/>
-                <a:ea typeface="Calibri"/>
-                <a:cs typeface="Calibri"/>
-              </a:defRPr>
-            </a:lvl5pPr>
-            <a:lvl6pPr>
-              <a:defRPr sz="2250" b="0">
-                <a:solidFill>
-                  <a:srgbClr val="1C3144"/>
-                </a:solidFill>
-                <a:latin typeface="Calibri"/>
-                <a:ea typeface="Calibri"/>
-                <a:cs typeface="Calibri"/>
-              </a:defRPr>
-            </a:lvl6pPr>
-            <a:lvl7pPr>
-              <a:defRPr sz="2250" b="0">
-                <a:solidFill>
-                  <a:srgbClr val="1C3144"/>
-                </a:solidFill>
-                <a:latin typeface="Calibri"/>
-                <a:ea typeface="Calibri"/>
-                <a:cs typeface="Calibri"/>
-              </a:defRPr>
-            </a:lvl7pPr>
-            <a:lvl8pPr>
-              <a:defRPr sz="2250" b="0">
-                <a:solidFill>
-                  <a:srgbClr val="1C3144"/>
-                </a:solidFill>
-                <a:latin typeface="Calibri"/>
-                <a:ea typeface="Calibri"/>
-                <a:cs typeface="Calibri"/>
-              </a:defRPr>
-            </a:lvl8pPr>
-            <a:lvl9pPr>
-              <a:defRPr sz="2250" b="0">
-                <a:solidFill>
-                  <a:srgbClr val="1C3144"/>
-                </a:solidFill>
-                <a:latin typeface="Calibri"/>
-                <a:ea typeface="Calibri"/>
-                <a:cs typeface="Calibri"/>
-              </a:defRPr>
-            </a:lvl9pPr>
-          </a:lstStyle>
-          <a:p xmlns:a="http://schemas.openxmlformats.org/drawingml/2006/main">
+          <a:lstStyle/>
+          <a:p>
             <a:pPr>
-              <a:defRPr sz="2250" b="0">
-                <a:solidFill>
-                  <a:srgbClr val="1C3144"/>
-                </a:solidFill>
-                <a:latin typeface="Calibri"/>
-                <a:ea typeface="Calibri"/>
-                <a:cs typeface="Calibri"/>
-              </a:defRPr>
+              <a:spcAft>
+                <a:spcPts val="0"/>
+              </a:spcAft>
             </a:pPr>
             <a:r>
-              <a:rPr sz="2250" b="0">
-                <a:solidFill>
-                  <a:srgbClr val="1C3144"/>
-                </a:solidFill>
-                <a:latin typeface="Calibri"/>
-                <a:ea typeface="Calibri"/>
-                <a:cs typeface="Calibri"/>
+              <a:rPr sz="2600" b="1">
+                <a:solidFill>
+                  <a:srgbClr val="FFFFFF"/>
+                </a:solidFill>
+                <a:latin typeface="Calibri"/>
               </a:rPr>
               <a:t>No new weekly assignment.</a:t>
             </a:r>
@@ -34246,1104 +33770,108 @@
       </p:sp>
       <p:sp>
         <p:nvSpPr>
-          <p:cNvPr id="6" name="">
-            <a:extLst xmlns:a="http://schemas.openxmlformats.org/drawingml/2006/main">
-              <a:ext uri="{FF2B5EF4-FFF2-40B4-BE49-F238E27FC236}">
-                <a16:creationId xmlns:a16="http://schemas.microsoft.com/office/drawing/2014/main" id="{3DEE033D-B877-4121-AB0B-532910C425A4}"/>
-              </a:ext>
-            </a:extLst>
-          </p:cNvPr>
-          <p:cNvSpPr>
-            <a:spLocks xmlns:a="http://schemas.openxmlformats.org/drawingml/2006/main" noGrp="1"/>
-          </p:cNvSpPr>
+          <p:cNvPr id="7" name="TextBox 6"/>
+          <p:cNvSpPr txBox="1"/>
           <p:nvPr/>
         </p:nvSpPr>
         <p:spPr>
-          <a:xfrm xmlns:a="http://schemas.openxmlformats.org/drawingml/2006/main">
-            <a:off x="590550" y="2850356"/>
-            <a:ext cx="619125" cy="571500"/>
+          <a:xfrm>
+            <a:off x="5435600" y="1905000"/>
+            <a:ext cx="5969000" cy="3937000"/>
           </a:xfrm>
-          <a:prstGeom xmlns:a="http://schemas.openxmlformats.org/drawingml/2006/main" prst="rect">
+          <a:prstGeom prst="rect">
             <a:avLst/>
           </a:prstGeom>
-          <a:noFill xmlns:a="http://schemas.openxmlformats.org/drawingml/2006/main"/>
-          <a:ln xmlns:a="http://schemas.openxmlformats.org/drawingml/2006/main" w="0">
-            <a:noFill/>
-          </a:ln>
+          <a:noFill/>
         </p:spPr>
         <p:txBody>
-          <a:bodyPr xmlns:a="http://schemas.openxmlformats.org/drawingml/2006/main">
-            <a:noAutofit/>
+          <a:bodyPr wrap="square">
+            <a:spAutoFit/>
           </a:bodyPr>
-          <a:lstStyle xmlns:a="http://schemas.openxmlformats.org/drawingml/2006/main">
-            <a:defPPr>
-              <a:defRPr sz="2550" b="1">
-                <a:solidFill>
-                  <a:srgbClr val="E4572E"/>
-                </a:solidFill>
-                <a:latin typeface="Calibri"/>
-                <a:ea typeface="Calibri"/>
-                <a:cs typeface="Calibri"/>
-              </a:defRPr>
-            </a:defPPr>
-            <a:lvl1pPr>
-              <a:defRPr sz="2550" b="1">
-                <a:solidFill>
-                  <a:srgbClr val="E4572E"/>
-                </a:solidFill>
-                <a:latin typeface="Calibri"/>
-                <a:ea typeface="Calibri"/>
-                <a:cs typeface="Calibri"/>
-              </a:defRPr>
-            </a:lvl1pPr>
-            <a:lvl2pPr>
-              <a:defRPr sz="2550" b="1">
-                <a:solidFill>
-                  <a:srgbClr val="E4572E"/>
-                </a:solidFill>
-                <a:latin typeface="Calibri"/>
-                <a:ea typeface="Calibri"/>
-                <a:cs typeface="Calibri"/>
-              </a:defRPr>
-            </a:lvl2pPr>
-            <a:lvl3pPr>
-              <a:defRPr sz="2550" b="1">
-                <a:solidFill>
-                  <a:srgbClr val="E4572E"/>
-                </a:solidFill>
-                <a:latin typeface="Calibri"/>
-                <a:ea typeface="Calibri"/>
-                <a:cs typeface="Calibri"/>
-              </a:defRPr>
-            </a:lvl3pPr>
-            <a:lvl4pPr>
-              <a:defRPr sz="2550" b="1">
-                <a:solidFill>
-                  <a:srgbClr val="E4572E"/>
-                </a:solidFill>
-                <a:latin typeface="Calibri"/>
-                <a:ea typeface="Calibri"/>
-                <a:cs typeface="Calibri"/>
-              </a:defRPr>
-            </a:lvl4pPr>
-            <a:lvl5pPr>
-              <a:defRPr sz="2550" b="1">
-                <a:solidFill>
-                  <a:srgbClr val="E4572E"/>
-                </a:solidFill>
-                <a:latin typeface="Calibri"/>
-                <a:ea typeface="Calibri"/>
-                <a:cs typeface="Calibri"/>
-              </a:defRPr>
-            </a:lvl5pPr>
-            <a:lvl6pPr>
-              <a:defRPr sz="2550" b="1">
-                <a:solidFill>
-                  <a:srgbClr val="E4572E"/>
-                </a:solidFill>
-                <a:latin typeface="Calibri"/>
-                <a:ea typeface="Calibri"/>
-                <a:cs typeface="Calibri"/>
-              </a:defRPr>
-            </a:lvl6pPr>
-            <a:lvl7pPr>
-              <a:defRPr sz="2550" b="1">
-                <a:solidFill>
-                  <a:srgbClr val="E4572E"/>
-                </a:solidFill>
-                <a:latin typeface="Calibri"/>
-                <a:ea typeface="Calibri"/>
-                <a:cs typeface="Calibri"/>
-              </a:defRPr>
-            </a:lvl7pPr>
-            <a:lvl8pPr>
-              <a:defRPr sz="2550" b="1">
-                <a:solidFill>
-                  <a:srgbClr val="E4572E"/>
-                </a:solidFill>
-                <a:latin typeface="Calibri"/>
-                <a:ea typeface="Calibri"/>
-                <a:cs typeface="Calibri"/>
-              </a:defRPr>
-            </a:lvl8pPr>
-            <a:lvl9pPr>
-              <a:defRPr sz="2550" b="1">
-                <a:solidFill>
-                  <a:srgbClr val="E4572E"/>
-                </a:solidFill>
-                <a:latin typeface="Calibri"/>
-                <a:ea typeface="Calibri"/>
-                <a:cs typeface="Calibri"/>
-              </a:defRPr>
-            </a:lvl9pPr>
-          </a:lstStyle>
-          <a:p xmlns:a="http://schemas.openxmlformats.org/drawingml/2006/main">
+          <a:lstStyle/>
+          <a:p>
             <a:pPr>
-              <a:defRPr sz="2550" b="1">
-                <a:solidFill>
-                  <a:srgbClr val="E4572E"/>
-                </a:solidFill>
-                <a:latin typeface="Calibri"/>
-                <a:ea typeface="Calibri"/>
-                <a:cs typeface="Calibri"/>
-              </a:defRPr>
+              <a:spcAft>
+                <a:spcPts val="900"/>
+              </a:spcAft>
             </a:pPr>
             <a:r>
-              <a:rPr sz="2550" b="1">
-                <a:solidFill>
-                  <a:srgbClr val="E4572E"/>
-                </a:solidFill>
-                <a:latin typeface="Calibri"/>
-                <a:ea typeface="Calibri"/>
-                <a:cs typeface="Calibri"/>
-              </a:rPr>
-              <a:t>02</a:t>
+              <a:rPr sz="2200" b="0">
+                <a:solidFill>
+                  <a:srgbClr val="1C3144"/>
+                </a:solidFill>
+                <a:latin typeface="Calibri"/>
+              </a:rPr>
+              <a:t>The Block 2 pack, A10 and A11 for 40 marks, is due Monday 7 December 2026, 23:59 Kampala time.</a:t>
+            </a:r>
+          </a:p>
+          <a:p>
+            <a:pPr>
+              <a:spcAft>
+                <a:spcPts val="900"/>
+              </a:spcAft>
+            </a:pPr>
+            <a:r>
+              <a:rPr sz="2200" b="0">
+                <a:solidFill>
+                  <a:srgbClr val="1C3144"/>
+                </a:solidFill>
+                <a:latin typeface="Calibri"/>
+              </a:rPr>
+              <a:t>The Block 2 quiz covers Weeks 11, 12 and 13. It opens after today's class.</a:t>
+            </a:r>
+          </a:p>
+          <a:p>
+            <a:pPr>
+              <a:spcAft>
+                <a:spcPts val="900"/>
+              </a:spcAft>
+            </a:pPr>
+            <a:r>
+              <a:rPr sz="2200" b="0">
+                <a:solidFill>
+                  <a:srgbClr val="1C3144"/>
+                </a:solidFill>
+                <a:latin typeface="Calibri"/>
+              </a:rPr>
+              <a:t>Next week is Practical Test 2. Rehearse saving and submitting your test notebook, and revise the published function interfaces.</a:t>
             </a:r>
           </a:p>
         </p:txBody>
       </p:sp>
       <p:sp>
         <p:nvSpPr>
-          <p:cNvPr id="7" name="">
-            <a:extLst xmlns:a="http://schemas.openxmlformats.org/drawingml/2006/main">
-              <a:ext uri="{FF2B5EF4-FFF2-40B4-BE49-F238E27FC236}">
-                <a16:creationId xmlns:a16="http://schemas.microsoft.com/office/drawing/2014/main" id="{7656EA73-97D6-4ADC-AC48-7CB3ADF44C81}"/>
-              </a:ext>
-            </a:extLst>
-          </p:cNvPr>
-          <p:cNvSpPr>
-            <a:spLocks xmlns:a="http://schemas.openxmlformats.org/drawingml/2006/main" noGrp="1"/>
-          </p:cNvSpPr>
+          <p:cNvPr id="8" name="TextBox 7"/>
+          <p:cNvSpPr txBox="1"/>
           <p:nvPr/>
         </p:nvSpPr>
         <p:spPr>
-          <a:xfrm xmlns:a="http://schemas.openxmlformats.org/drawingml/2006/main">
-            <a:off x="1381125" y="2850356"/>
-            <a:ext cx="10096500" cy="992981"/>
+          <a:xfrm>
+            <a:off x="584200" y="6524625"/>
+            <a:ext cx="10807700" cy="215900"/>
           </a:xfrm>
-          <a:prstGeom xmlns:a="http://schemas.openxmlformats.org/drawingml/2006/main" prst="rect">
+          <a:prstGeom prst="rect">
             <a:avLst/>
           </a:prstGeom>
-          <a:noFill xmlns:a="http://schemas.openxmlformats.org/drawingml/2006/main"/>
-          <a:ln xmlns:a="http://schemas.openxmlformats.org/drawingml/2006/main" w="0">
-            <a:noFill/>
-          </a:ln>
+          <a:noFill/>
         </p:spPr>
         <p:txBody>
-          <a:bodyPr xmlns:a="http://schemas.openxmlformats.org/drawingml/2006/main">
-            <a:noAutofit/>
+          <a:bodyPr wrap="square">
+            <a:spAutoFit/>
           </a:bodyPr>
-          <a:lstStyle xmlns:a="http://schemas.openxmlformats.org/drawingml/2006/main">
-            <a:defPPr>
-              <a:defRPr sz="2250" b="0">
-                <a:solidFill>
-                  <a:srgbClr val="1C3144"/>
-                </a:solidFill>
-                <a:latin typeface="Calibri"/>
-                <a:ea typeface="Calibri"/>
-                <a:cs typeface="Calibri"/>
-              </a:defRPr>
-            </a:defPPr>
-            <a:lvl1pPr>
-              <a:defRPr sz="2250" b="0">
-                <a:solidFill>
-                  <a:srgbClr val="1C3144"/>
-                </a:solidFill>
-                <a:latin typeface="Calibri"/>
-                <a:ea typeface="Calibri"/>
-                <a:cs typeface="Calibri"/>
-              </a:defRPr>
-            </a:lvl1pPr>
-            <a:lvl2pPr>
-              <a:defRPr sz="2250" b="0">
-                <a:solidFill>
-                  <a:srgbClr val="1C3144"/>
-                </a:solidFill>
-                <a:latin typeface="Calibri"/>
-                <a:ea typeface="Calibri"/>
-                <a:cs typeface="Calibri"/>
-              </a:defRPr>
-            </a:lvl2pPr>
-            <a:lvl3pPr>
-              <a:defRPr sz="2250" b="0">
-                <a:solidFill>
-                  <a:srgbClr val="1C3144"/>
-                </a:solidFill>
-                <a:latin typeface="Calibri"/>
-                <a:ea typeface="Calibri"/>
-                <a:cs typeface="Calibri"/>
-              </a:defRPr>
-            </a:lvl3pPr>
-            <a:lvl4pPr>
-              <a:defRPr sz="2250" b="0">
-                <a:solidFill>
-                  <a:srgbClr val="1C3144"/>
-                </a:solidFill>
-                <a:latin typeface="Calibri"/>
-                <a:ea typeface="Calibri"/>
-                <a:cs typeface="Calibri"/>
-              </a:defRPr>
-            </a:lvl4pPr>
-            <a:lvl5pPr>
-              <a:defRPr sz="2250" b="0">
-                <a:solidFill>
-                  <a:srgbClr val="1C3144"/>
-                </a:solidFill>
-                <a:latin typeface="Calibri"/>
-                <a:ea typeface="Calibri"/>
-                <a:cs typeface="Calibri"/>
-              </a:defRPr>
-            </a:lvl5pPr>
-            <a:lvl6pPr>
-              <a:defRPr sz="2250" b="0">
-                <a:solidFill>
-                  <a:srgbClr val="1C3144"/>
-                </a:solidFill>
-                <a:latin typeface="Calibri"/>
-                <a:ea typeface="Calibri"/>
-                <a:cs typeface="Calibri"/>
-              </a:defRPr>
-            </a:lvl6pPr>
-            <a:lvl7pPr>
-              <a:defRPr sz="2250" b="0">
-                <a:solidFill>
-                  <a:srgbClr val="1C3144"/>
-                </a:solidFill>
-                <a:latin typeface="Calibri"/>
-                <a:ea typeface="Calibri"/>
-                <a:cs typeface="Calibri"/>
-              </a:defRPr>
-            </a:lvl7pPr>
-            <a:lvl8pPr>
-              <a:defRPr sz="2250" b="0">
-                <a:solidFill>
-                  <a:srgbClr val="1C3144"/>
-                </a:solidFill>
-                <a:latin typeface="Calibri"/>
-                <a:ea typeface="Calibri"/>
-                <a:cs typeface="Calibri"/>
-              </a:defRPr>
-            </a:lvl8pPr>
-            <a:lvl9pPr>
-              <a:defRPr sz="2250" b="0">
-                <a:solidFill>
-                  <a:srgbClr val="1C3144"/>
-                </a:solidFill>
-                <a:latin typeface="Calibri"/>
-                <a:ea typeface="Calibri"/>
-                <a:cs typeface="Calibri"/>
-              </a:defRPr>
-            </a:lvl9pPr>
-          </a:lstStyle>
-          <a:p xmlns:a="http://schemas.openxmlformats.org/drawingml/2006/main">
+          <a:lstStyle/>
+          <a:p>
             <a:pPr>
-              <a:defRPr sz="2250" b="0">
-                <a:solidFill>
-                  <a:srgbClr val="1C3144"/>
-                </a:solidFill>
-                <a:latin typeface="Calibri"/>
-                <a:ea typeface="Calibri"/>
-                <a:cs typeface="Calibri"/>
-              </a:defRPr>
+              <a:spcAft>
+                <a:spcPts val="0"/>
+              </a:spcAft>
             </a:pPr>
             <a:r>
-              <a:rPr sz="2250" b="0">
-                <a:solidFill>
-                  <a:srgbClr val="1C3144"/>
-                </a:solidFill>
-                <a:latin typeface="Calibri"/>
-                <a:ea typeface="Calibri"/>
-                <a:cs typeface="Calibri"/>
-              </a:rPr>
-              <a:t>Continue the official project deliverables and Week 13 quiz.</a:t>
-            </a:r>
-          </a:p>
-        </p:txBody>
-      </p:sp>
-      <p:sp>
-        <p:nvSpPr>
-          <p:cNvPr id="8" name="">
-            <a:extLst xmlns:a="http://schemas.openxmlformats.org/drawingml/2006/main">
-              <a:ext uri="{FF2B5EF4-FFF2-40B4-BE49-F238E27FC236}">
-                <a16:creationId xmlns:a16="http://schemas.microsoft.com/office/drawing/2014/main" id="{F56AE526-C4A4-405B-8096-4244C2D61F89}"/>
-              </a:ext>
-            </a:extLst>
-          </p:cNvPr>
-          <p:cNvSpPr>
-            <a:spLocks xmlns:a="http://schemas.openxmlformats.org/drawingml/2006/main" noGrp="1"/>
-          </p:cNvSpPr>
-          <p:nvPr/>
-        </p:nvSpPr>
-        <p:spPr>
-          <a:xfrm xmlns:a="http://schemas.openxmlformats.org/drawingml/2006/main">
-            <a:off x="590550" y="3919538"/>
-            <a:ext cx="619125" cy="571500"/>
-          </a:xfrm>
-          <a:prstGeom xmlns:a="http://schemas.openxmlformats.org/drawingml/2006/main" prst="rect">
-            <a:avLst/>
-          </a:prstGeom>
-          <a:noFill xmlns:a="http://schemas.openxmlformats.org/drawingml/2006/main"/>
-          <a:ln xmlns:a="http://schemas.openxmlformats.org/drawingml/2006/main" w="0">
-            <a:noFill/>
-          </a:ln>
-        </p:spPr>
-        <p:txBody>
-          <a:bodyPr xmlns:a="http://schemas.openxmlformats.org/drawingml/2006/main">
-            <a:noAutofit/>
-          </a:bodyPr>
-          <a:lstStyle xmlns:a="http://schemas.openxmlformats.org/drawingml/2006/main">
-            <a:defPPr>
-              <a:defRPr sz="2550" b="1">
-                <a:solidFill>
-                  <a:srgbClr val="E4572E"/>
-                </a:solidFill>
-                <a:latin typeface="Calibri"/>
-                <a:ea typeface="Calibri"/>
-                <a:cs typeface="Calibri"/>
-              </a:defRPr>
-            </a:defPPr>
-            <a:lvl1pPr>
-              <a:defRPr sz="2550" b="1">
-                <a:solidFill>
-                  <a:srgbClr val="E4572E"/>
-                </a:solidFill>
-                <a:latin typeface="Calibri"/>
-                <a:ea typeface="Calibri"/>
-                <a:cs typeface="Calibri"/>
-              </a:defRPr>
-            </a:lvl1pPr>
-            <a:lvl2pPr>
-              <a:defRPr sz="2550" b="1">
-                <a:solidFill>
-                  <a:srgbClr val="E4572E"/>
-                </a:solidFill>
-                <a:latin typeface="Calibri"/>
-                <a:ea typeface="Calibri"/>
-                <a:cs typeface="Calibri"/>
-              </a:defRPr>
-            </a:lvl2pPr>
-            <a:lvl3pPr>
-              <a:defRPr sz="2550" b="1">
-                <a:solidFill>
-                  <a:srgbClr val="E4572E"/>
-                </a:solidFill>
-                <a:latin typeface="Calibri"/>
-                <a:ea typeface="Calibri"/>
-                <a:cs typeface="Calibri"/>
-              </a:defRPr>
-            </a:lvl3pPr>
-            <a:lvl4pPr>
-              <a:defRPr sz="2550" b="1">
-                <a:solidFill>
-                  <a:srgbClr val="E4572E"/>
-                </a:solidFill>
-                <a:latin typeface="Calibri"/>
-                <a:ea typeface="Calibri"/>
-                <a:cs typeface="Calibri"/>
-              </a:defRPr>
-            </a:lvl4pPr>
-            <a:lvl5pPr>
-              <a:defRPr sz="2550" b="1">
-                <a:solidFill>
-                  <a:srgbClr val="E4572E"/>
-                </a:solidFill>
-                <a:latin typeface="Calibri"/>
-                <a:ea typeface="Calibri"/>
-                <a:cs typeface="Calibri"/>
-              </a:defRPr>
-            </a:lvl5pPr>
-            <a:lvl6pPr>
-              <a:defRPr sz="2550" b="1">
-                <a:solidFill>
-                  <a:srgbClr val="E4572E"/>
-                </a:solidFill>
-                <a:latin typeface="Calibri"/>
-                <a:ea typeface="Calibri"/>
-                <a:cs typeface="Calibri"/>
-              </a:defRPr>
-            </a:lvl6pPr>
-            <a:lvl7pPr>
-              <a:defRPr sz="2550" b="1">
-                <a:solidFill>
-                  <a:srgbClr val="E4572E"/>
-                </a:solidFill>
-                <a:latin typeface="Calibri"/>
-                <a:ea typeface="Calibri"/>
-                <a:cs typeface="Calibri"/>
-              </a:defRPr>
-            </a:lvl7pPr>
-            <a:lvl8pPr>
-              <a:defRPr sz="2550" b="1">
-                <a:solidFill>
-                  <a:srgbClr val="E4572E"/>
-                </a:solidFill>
-                <a:latin typeface="Calibri"/>
-                <a:ea typeface="Calibri"/>
-                <a:cs typeface="Calibri"/>
-              </a:defRPr>
-            </a:lvl8pPr>
-            <a:lvl9pPr>
-              <a:defRPr sz="2550" b="1">
-                <a:solidFill>
-                  <a:srgbClr val="E4572E"/>
-                </a:solidFill>
-                <a:latin typeface="Calibri"/>
-                <a:ea typeface="Calibri"/>
-                <a:cs typeface="Calibri"/>
-              </a:defRPr>
-            </a:lvl9pPr>
-          </a:lstStyle>
-          <a:p xmlns:a="http://schemas.openxmlformats.org/drawingml/2006/main">
-            <a:pPr>
-              <a:defRPr sz="2550" b="1">
-                <a:solidFill>
-                  <a:srgbClr val="E4572E"/>
-                </a:solidFill>
-                <a:latin typeface="Calibri"/>
-                <a:ea typeface="Calibri"/>
-                <a:cs typeface="Calibri"/>
-              </a:defRPr>
-            </a:pPr>
-            <a:r>
-              <a:rPr sz="2550" b="1">
-                <a:solidFill>
-                  <a:srgbClr val="E4572E"/>
-                </a:solidFill>
-                <a:latin typeface="Calibri"/>
-                <a:ea typeface="Calibri"/>
-                <a:cs typeface="Calibri"/>
-              </a:rPr>
-              <a:t>03</a:t>
-            </a:r>
-          </a:p>
-        </p:txBody>
-      </p:sp>
-      <p:sp>
-        <p:nvSpPr>
-          <p:cNvPr id="9" name="">
-            <a:extLst xmlns:a="http://schemas.openxmlformats.org/drawingml/2006/main">
-              <a:ext uri="{FF2B5EF4-FFF2-40B4-BE49-F238E27FC236}">
-                <a16:creationId xmlns:a16="http://schemas.microsoft.com/office/drawing/2014/main" id="{6E2EF02D-A70E-4A3C-A177-B8B223B9E0F1}"/>
-              </a:ext>
-            </a:extLst>
-          </p:cNvPr>
-          <p:cNvSpPr>
-            <a:spLocks xmlns:a="http://schemas.openxmlformats.org/drawingml/2006/main" noGrp="1"/>
-          </p:cNvSpPr>
-          <p:nvPr/>
-        </p:nvSpPr>
-        <p:spPr>
-          <a:xfrm xmlns:a="http://schemas.openxmlformats.org/drawingml/2006/main">
-            <a:off x="1381125" y="3919538"/>
-            <a:ext cx="10096500" cy="992981"/>
-          </a:xfrm>
-          <a:prstGeom xmlns:a="http://schemas.openxmlformats.org/drawingml/2006/main" prst="rect">
-            <a:avLst/>
-          </a:prstGeom>
-          <a:noFill xmlns:a="http://schemas.openxmlformats.org/drawingml/2006/main"/>
-          <a:ln xmlns:a="http://schemas.openxmlformats.org/drawingml/2006/main" w="0">
-            <a:noFill/>
-          </a:ln>
-        </p:spPr>
-        <p:txBody>
-          <a:bodyPr xmlns:a="http://schemas.openxmlformats.org/drawingml/2006/main">
-            <a:noAutofit/>
-          </a:bodyPr>
-          <a:lstStyle xmlns:a="http://schemas.openxmlformats.org/drawingml/2006/main">
-            <a:defPPr>
-              <a:defRPr sz="2250" b="0">
-                <a:solidFill>
-                  <a:srgbClr val="1C3144"/>
-                </a:solidFill>
-                <a:latin typeface="Calibri"/>
-                <a:ea typeface="Calibri"/>
-                <a:cs typeface="Calibri"/>
-              </a:defRPr>
-            </a:defPPr>
-            <a:lvl1pPr>
-              <a:defRPr sz="2250" b="0">
-                <a:solidFill>
-                  <a:srgbClr val="1C3144"/>
-                </a:solidFill>
-                <a:latin typeface="Calibri"/>
-                <a:ea typeface="Calibri"/>
-                <a:cs typeface="Calibri"/>
-              </a:defRPr>
-            </a:lvl1pPr>
-            <a:lvl2pPr>
-              <a:defRPr sz="2250" b="0">
-                <a:solidFill>
-                  <a:srgbClr val="1C3144"/>
-                </a:solidFill>
-                <a:latin typeface="Calibri"/>
-                <a:ea typeface="Calibri"/>
-                <a:cs typeface="Calibri"/>
-              </a:defRPr>
-            </a:lvl2pPr>
-            <a:lvl3pPr>
-              <a:defRPr sz="2250" b="0">
-                <a:solidFill>
-                  <a:srgbClr val="1C3144"/>
-                </a:solidFill>
-                <a:latin typeface="Calibri"/>
-                <a:ea typeface="Calibri"/>
-                <a:cs typeface="Calibri"/>
-              </a:defRPr>
-            </a:lvl3pPr>
-            <a:lvl4pPr>
-              <a:defRPr sz="2250" b="0">
-                <a:solidFill>
-                  <a:srgbClr val="1C3144"/>
-                </a:solidFill>
-                <a:latin typeface="Calibri"/>
-                <a:ea typeface="Calibri"/>
-                <a:cs typeface="Calibri"/>
-              </a:defRPr>
-            </a:lvl4pPr>
-            <a:lvl5pPr>
-              <a:defRPr sz="2250" b="0">
-                <a:solidFill>
-                  <a:srgbClr val="1C3144"/>
-                </a:solidFill>
-                <a:latin typeface="Calibri"/>
-                <a:ea typeface="Calibri"/>
-                <a:cs typeface="Calibri"/>
-              </a:defRPr>
-            </a:lvl5pPr>
-            <a:lvl6pPr>
-              <a:defRPr sz="2250" b="0">
-                <a:solidFill>
-                  <a:srgbClr val="1C3144"/>
-                </a:solidFill>
-                <a:latin typeface="Calibri"/>
-                <a:ea typeface="Calibri"/>
-                <a:cs typeface="Calibri"/>
-              </a:defRPr>
-            </a:lvl6pPr>
-            <a:lvl7pPr>
-              <a:defRPr sz="2250" b="0">
-                <a:solidFill>
-                  <a:srgbClr val="1C3144"/>
-                </a:solidFill>
-                <a:latin typeface="Calibri"/>
-                <a:ea typeface="Calibri"/>
-                <a:cs typeface="Calibri"/>
-              </a:defRPr>
-            </a:lvl7pPr>
-            <a:lvl8pPr>
-              <a:defRPr sz="2250" b="0">
-                <a:solidFill>
-                  <a:srgbClr val="1C3144"/>
-                </a:solidFill>
-                <a:latin typeface="Calibri"/>
-                <a:ea typeface="Calibri"/>
-                <a:cs typeface="Calibri"/>
-              </a:defRPr>
-            </a:lvl8pPr>
-            <a:lvl9pPr>
-              <a:defRPr sz="2250" b="0">
-                <a:solidFill>
-                  <a:srgbClr val="1C3144"/>
-                </a:solidFill>
-                <a:latin typeface="Calibri"/>
-                <a:ea typeface="Calibri"/>
-                <a:cs typeface="Calibri"/>
-              </a:defRPr>
-            </a:lvl9pPr>
-          </a:lstStyle>
-          <a:p xmlns:a="http://schemas.openxmlformats.org/drawingml/2006/main">
-            <a:pPr>
-              <a:defRPr sz="2250" b="0">
-                <a:solidFill>
-                  <a:srgbClr val="1C3144"/>
-                </a:solidFill>
-                <a:latin typeface="Calibri"/>
-                <a:ea typeface="Calibri"/>
-                <a:cs typeface="Calibri"/>
-              </a:defRPr>
-            </a:pPr>
-            <a:r>
-              <a:rPr sz="2250" b="0">
-                <a:solidFill>
-                  <a:srgbClr val="1C3144"/>
-                </a:solidFill>
-                <a:latin typeface="Calibri"/>
-                <a:ea typeface="Calibri"/>
-                <a:cs typeface="Calibri"/>
-              </a:rPr>
-              <a:t>Rehearse Colab Test 2 saving and submission and the published function interfaces before Week 14.</a:t>
-            </a:r>
-          </a:p>
-        </p:txBody>
-      </p:sp>
-      <p:sp>
-        <p:nvSpPr>
-          <p:cNvPr id="10" name="">
-            <a:extLst xmlns:a="http://schemas.openxmlformats.org/drawingml/2006/main">
-              <a:ext uri="{FF2B5EF4-FFF2-40B4-BE49-F238E27FC236}">
-                <a16:creationId xmlns:a16="http://schemas.microsoft.com/office/drawing/2014/main" id="{1783B367-BD40-4036-8FE2-73245DC8E484}"/>
-              </a:ext>
-            </a:extLst>
-          </p:cNvPr>
-          <p:cNvSpPr>
-            <a:spLocks xmlns:a="http://schemas.openxmlformats.org/drawingml/2006/main" noGrp="1"/>
-          </p:cNvSpPr>
-          <p:nvPr/>
-        </p:nvSpPr>
-        <p:spPr>
-          <a:xfrm xmlns:a="http://schemas.openxmlformats.org/drawingml/2006/main">
-            <a:off x="590550" y="4988719"/>
-            <a:ext cx="619125" cy="571500"/>
-          </a:xfrm>
-          <a:prstGeom xmlns:a="http://schemas.openxmlformats.org/drawingml/2006/main" prst="rect">
-            <a:avLst/>
-          </a:prstGeom>
-          <a:noFill xmlns:a="http://schemas.openxmlformats.org/drawingml/2006/main"/>
-          <a:ln xmlns:a="http://schemas.openxmlformats.org/drawingml/2006/main" w="0">
-            <a:noFill/>
-          </a:ln>
-        </p:spPr>
-        <p:txBody>
-          <a:bodyPr xmlns:a="http://schemas.openxmlformats.org/drawingml/2006/main">
-            <a:noAutofit/>
-          </a:bodyPr>
-          <a:lstStyle xmlns:a="http://schemas.openxmlformats.org/drawingml/2006/main">
-            <a:defPPr>
-              <a:defRPr sz="2550" b="1">
-                <a:solidFill>
-                  <a:srgbClr val="E4572E"/>
-                </a:solidFill>
-                <a:latin typeface="Calibri"/>
-                <a:ea typeface="Calibri"/>
-                <a:cs typeface="Calibri"/>
-              </a:defRPr>
-            </a:defPPr>
-            <a:lvl1pPr>
-              <a:defRPr sz="2550" b="1">
-                <a:solidFill>
-                  <a:srgbClr val="E4572E"/>
-                </a:solidFill>
-                <a:latin typeface="Calibri"/>
-                <a:ea typeface="Calibri"/>
-                <a:cs typeface="Calibri"/>
-              </a:defRPr>
-            </a:lvl1pPr>
-            <a:lvl2pPr>
-              <a:defRPr sz="2550" b="1">
-                <a:solidFill>
-                  <a:srgbClr val="E4572E"/>
-                </a:solidFill>
-                <a:latin typeface="Calibri"/>
-                <a:ea typeface="Calibri"/>
-                <a:cs typeface="Calibri"/>
-              </a:defRPr>
-            </a:lvl2pPr>
-            <a:lvl3pPr>
-              <a:defRPr sz="2550" b="1">
-                <a:solidFill>
-                  <a:srgbClr val="E4572E"/>
-                </a:solidFill>
-                <a:latin typeface="Calibri"/>
-                <a:ea typeface="Calibri"/>
-                <a:cs typeface="Calibri"/>
-              </a:defRPr>
-            </a:lvl3pPr>
-            <a:lvl4pPr>
-              <a:defRPr sz="2550" b="1">
-                <a:solidFill>
-                  <a:srgbClr val="E4572E"/>
-                </a:solidFill>
-                <a:latin typeface="Calibri"/>
-                <a:ea typeface="Calibri"/>
-                <a:cs typeface="Calibri"/>
-              </a:defRPr>
-            </a:lvl4pPr>
-            <a:lvl5pPr>
-              <a:defRPr sz="2550" b="1">
-                <a:solidFill>
-                  <a:srgbClr val="E4572E"/>
-                </a:solidFill>
-                <a:latin typeface="Calibri"/>
-                <a:ea typeface="Calibri"/>
-                <a:cs typeface="Calibri"/>
-              </a:defRPr>
-            </a:lvl5pPr>
-            <a:lvl6pPr>
-              <a:defRPr sz="2550" b="1">
-                <a:solidFill>
-                  <a:srgbClr val="E4572E"/>
-                </a:solidFill>
-                <a:latin typeface="Calibri"/>
-                <a:ea typeface="Calibri"/>
-                <a:cs typeface="Calibri"/>
-              </a:defRPr>
-            </a:lvl6pPr>
-            <a:lvl7pPr>
-              <a:defRPr sz="2550" b="1">
-                <a:solidFill>
-                  <a:srgbClr val="E4572E"/>
-                </a:solidFill>
-                <a:latin typeface="Calibri"/>
-                <a:ea typeface="Calibri"/>
-                <a:cs typeface="Calibri"/>
-              </a:defRPr>
-            </a:lvl7pPr>
-            <a:lvl8pPr>
-              <a:defRPr sz="2550" b="1">
-                <a:solidFill>
-                  <a:srgbClr val="E4572E"/>
-                </a:solidFill>
-                <a:latin typeface="Calibri"/>
-                <a:ea typeface="Calibri"/>
-                <a:cs typeface="Calibri"/>
-              </a:defRPr>
-            </a:lvl8pPr>
-            <a:lvl9pPr>
-              <a:defRPr sz="2550" b="1">
-                <a:solidFill>
-                  <a:srgbClr val="E4572E"/>
-                </a:solidFill>
-                <a:latin typeface="Calibri"/>
-                <a:ea typeface="Calibri"/>
-                <a:cs typeface="Calibri"/>
-              </a:defRPr>
-            </a:lvl9pPr>
-          </a:lstStyle>
-          <a:p xmlns:a="http://schemas.openxmlformats.org/drawingml/2006/main">
-            <a:pPr>
-              <a:defRPr sz="2550" b="1">
-                <a:solidFill>
-                  <a:srgbClr val="E4572E"/>
-                </a:solidFill>
-                <a:latin typeface="Calibri"/>
-                <a:ea typeface="Calibri"/>
-                <a:cs typeface="Calibri"/>
-              </a:defRPr>
-            </a:pPr>
-            <a:r>
-              <a:rPr sz="2550" b="1">
-                <a:solidFill>
-                  <a:srgbClr val="E4572E"/>
-                </a:solidFill>
-                <a:latin typeface="Calibri"/>
-                <a:ea typeface="Calibri"/>
-                <a:cs typeface="Calibri"/>
-              </a:rPr>
-              <a:t>04</a:t>
-            </a:r>
-          </a:p>
-        </p:txBody>
-      </p:sp>
-      <p:sp>
-        <p:nvSpPr>
-          <p:cNvPr id="11" name="">
-            <a:extLst xmlns:a="http://schemas.openxmlformats.org/drawingml/2006/main">
-              <a:ext uri="{FF2B5EF4-FFF2-40B4-BE49-F238E27FC236}">
-                <a16:creationId xmlns:a16="http://schemas.microsoft.com/office/drawing/2014/main" id="{5F7EB1D2-9878-465B-B093-B6E99E037C45}"/>
-              </a:ext>
-            </a:extLst>
-          </p:cNvPr>
-          <p:cNvSpPr>
-            <a:spLocks xmlns:a="http://schemas.openxmlformats.org/drawingml/2006/main" noGrp="1"/>
-          </p:cNvSpPr>
-          <p:nvPr/>
-        </p:nvSpPr>
-        <p:spPr>
-          <a:xfrm xmlns:a="http://schemas.openxmlformats.org/drawingml/2006/main">
-            <a:off x="1381125" y="4988719"/>
-            <a:ext cx="10096500" cy="992981"/>
-          </a:xfrm>
-          <a:prstGeom xmlns:a="http://schemas.openxmlformats.org/drawingml/2006/main" prst="rect">
-            <a:avLst/>
-          </a:prstGeom>
-          <a:noFill xmlns:a="http://schemas.openxmlformats.org/drawingml/2006/main"/>
-          <a:ln xmlns:a="http://schemas.openxmlformats.org/drawingml/2006/main" w="0">
-            <a:noFill/>
-          </a:ln>
-        </p:spPr>
-        <p:txBody>
-          <a:bodyPr xmlns:a="http://schemas.openxmlformats.org/drawingml/2006/main">
-            <a:noAutofit/>
-          </a:bodyPr>
-          <a:lstStyle xmlns:a="http://schemas.openxmlformats.org/drawingml/2006/main">
-            <a:defPPr>
-              <a:defRPr sz="2250" b="0">
-                <a:solidFill>
-                  <a:srgbClr val="1C3144"/>
-                </a:solidFill>
-                <a:latin typeface="Calibri"/>
-                <a:ea typeface="Calibri"/>
-                <a:cs typeface="Calibri"/>
-              </a:defRPr>
-            </a:defPPr>
-            <a:lvl1pPr>
-              <a:defRPr sz="2250" b="0">
-                <a:solidFill>
-                  <a:srgbClr val="1C3144"/>
-                </a:solidFill>
-                <a:latin typeface="Calibri"/>
-                <a:ea typeface="Calibri"/>
-                <a:cs typeface="Calibri"/>
-              </a:defRPr>
-            </a:lvl1pPr>
-            <a:lvl2pPr>
-              <a:defRPr sz="2250" b="0">
-                <a:solidFill>
-                  <a:srgbClr val="1C3144"/>
-                </a:solidFill>
-                <a:latin typeface="Calibri"/>
-                <a:ea typeface="Calibri"/>
-                <a:cs typeface="Calibri"/>
-              </a:defRPr>
-            </a:lvl2pPr>
-            <a:lvl3pPr>
-              <a:defRPr sz="2250" b="0">
-                <a:solidFill>
-                  <a:srgbClr val="1C3144"/>
-                </a:solidFill>
-                <a:latin typeface="Calibri"/>
-                <a:ea typeface="Calibri"/>
-                <a:cs typeface="Calibri"/>
-              </a:defRPr>
-            </a:lvl3pPr>
-            <a:lvl4pPr>
-              <a:defRPr sz="2250" b="0">
-                <a:solidFill>
-                  <a:srgbClr val="1C3144"/>
-                </a:solidFill>
-                <a:latin typeface="Calibri"/>
-                <a:ea typeface="Calibri"/>
-                <a:cs typeface="Calibri"/>
-              </a:defRPr>
-            </a:lvl4pPr>
-            <a:lvl5pPr>
-              <a:defRPr sz="2250" b="0">
-                <a:solidFill>
-                  <a:srgbClr val="1C3144"/>
-                </a:solidFill>
-                <a:latin typeface="Calibri"/>
-                <a:ea typeface="Calibri"/>
-                <a:cs typeface="Calibri"/>
-              </a:defRPr>
-            </a:lvl5pPr>
-            <a:lvl6pPr>
-              <a:defRPr sz="2250" b="0">
-                <a:solidFill>
-                  <a:srgbClr val="1C3144"/>
-                </a:solidFill>
-                <a:latin typeface="Calibri"/>
-                <a:ea typeface="Calibri"/>
-                <a:cs typeface="Calibri"/>
-              </a:defRPr>
-            </a:lvl6pPr>
-            <a:lvl7pPr>
-              <a:defRPr sz="2250" b="0">
-                <a:solidFill>
-                  <a:srgbClr val="1C3144"/>
-                </a:solidFill>
-                <a:latin typeface="Calibri"/>
-                <a:ea typeface="Calibri"/>
-                <a:cs typeface="Calibri"/>
-              </a:defRPr>
-            </a:lvl7pPr>
-            <a:lvl8pPr>
-              <a:defRPr sz="2250" b="0">
-                <a:solidFill>
-                  <a:srgbClr val="1C3144"/>
-                </a:solidFill>
-                <a:latin typeface="Calibri"/>
-                <a:ea typeface="Calibri"/>
-                <a:cs typeface="Calibri"/>
-              </a:defRPr>
-            </a:lvl8pPr>
-            <a:lvl9pPr>
-              <a:defRPr sz="2250" b="0">
-                <a:solidFill>
-                  <a:srgbClr val="1C3144"/>
-                </a:solidFill>
-                <a:latin typeface="Calibri"/>
-                <a:ea typeface="Calibri"/>
-                <a:cs typeface="Calibri"/>
-              </a:defRPr>
-            </a:lvl9pPr>
-          </a:lstStyle>
-          <a:p xmlns:a="http://schemas.openxmlformats.org/drawingml/2006/main">
-            <a:pPr>
-              <a:defRPr sz="2250" b="0">
-                <a:solidFill>
-                  <a:srgbClr val="1C3144"/>
-                </a:solidFill>
-                <a:latin typeface="Calibri"/>
-                <a:ea typeface="Calibri"/>
-                <a:cs typeface="Calibri"/>
-              </a:defRPr>
-            </a:pPr>
-            <a:r>
-              <a:rPr sz="2250" b="0">
-                <a:solidFill>
-                  <a:srgbClr val="1C3144"/>
-                </a:solidFill>
-                <a:latin typeface="Calibri"/>
-                <a:ea typeface="Calibri"/>
-                <a:cs typeface="Calibri"/>
-              </a:rPr>
-              <a:t>Do not add an extra upload.</a:t>
-            </a:r>
-          </a:p>
-        </p:txBody>
-      </p:sp>
-      <p:sp>
-        <p:nvSpPr>
-          <p:cNvPr id="12" name="">
-            <a:extLst xmlns:a="http://schemas.openxmlformats.org/drawingml/2006/main">
-              <a:ext uri="{FF2B5EF4-FFF2-40B4-BE49-F238E27FC236}">
-                <a16:creationId xmlns:a16="http://schemas.microsoft.com/office/drawing/2014/main" id="{786B6755-6E50-44B4-A9D2-1A0114FA2349}"/>
-              </a:ext>
-            </a:extLst>
-          </p:cNvPr>
-          <p:cNvSpPr>
-            <a:spLocks xmlns:a="http://schemas.openxmlformats.org/drawingml/2006/main" noGrp="1"/>
-          </p:cNvSpPr>
-          <p:nvPr/>
-        </p:nvSpPr>
-        <p:spPr>
-          <a:xfrm xmlns:a="http://schemas.openxmlformats.org/drawingml/2006/main">
-            <a:off x="590550" y="6524625"/>
-            <a:ext cx="10810875" cy="219075"/>
-          </a:xfrm>
-          <a:prstGeom xmlns:a="http://schemas.openxmlformats.org/drawingml/2006/main" prst="rect">
-            <a:avLst/>
-          </a:prstGeom>
-          <a:noFill xmlns:a="http://schemas.openxmlformats.org/drawingml/2006/main"/>
-          <a:ln xmlns:a="http://schemas.openxmlformats.org/drawingml/2006/main" w="0">
-            <a:noFill/>
-          </a:ln>
-        </p:spPr>
-        <p:txBody>
-          <a:bodyPr xmlns:a="http://schemas.openxmlformats.org/drawingml/2006/main">
-            <a:noAutofit/>
-          </a:bodyPr>
-          <a:lstStyle xmlns:a="http://schemas.openxmlformats.org/drawingml/2006/main">
-            <a:defPPr>
-              <a:defRPr sz="1200" b="0">
+              <a:rPr sz="1200" b="0">
                 <a:solidFill>
                   <a:srgbClr val="6B7A8A"/>
                 </a:solidFill>
                 <a:latin typeface="Calibri"/>
-                <a:ea typeface="Calibri"/>
-                <a:cs typeface="Calibri"/>
-              </a:defRPr>
-            </a:defPPr>
-            <a:lvl1pPr>
-              <a:defRPr sz="1200" b="0">
-                <a:solidFill>
-                  <a:srgbClr val="6B7A8A"/>
-                </a:solidFill>
-                <a:latin typeface="Calibri"/>
-                <a:ea typeface="Calibri"/>
-                <a:cs typeface="Calibri"/>
-              </a:defRPr>
-            </a:lvl1pPr>
-            <a:lvl2pPr>
-              <a:defRPr sz="1200" b="0">
-                <a:solidFill>
-                  <a:srgbClr val="6B7A8A"/>
-                </a:solidFill>
-                <a:latin typeface="Calibri"/>
-                <a:ea typeface="Calibri"/>
-                <a:cs typeface="Calibri"/>
-              </a:defRPr>
-            </a:lvl2pPr>
-            <a:lvl3pPr>
-              <a:defRPr sz="1200" b="0">
-                <a:solidFill>
-                  <a:srgbClr val="6B7A8A"/>
-                </a:solidFill>
-                <a:latin typeface="Calibri"/>
-                <a:ea typeface="Calibri"/>
-                <a:cs typeface="Calibri"/>
-              </a:defRPr>
-            </a:lvl3pPr>
-            <a:lvl4pPr>
-              <a:defRPr sz="1200" b="0">
-                <a:solidFill>
-                  <a:srgbClr val="6B7A8A"/>
-                </a:solidFill>
-                <a:latin typeface="Calibri"/>
-                <a:ea typeface="Calibri"/>
-                <a:cs typeface="Calibri"/>
-              </a:defRPr>
-            </a:lvl4pPr>
-            <a:lvl5pPr>
-              <a:defRPr sz="1200" b="0">
-                <a:solidFill>
-                  <a:srgbClr val="6B7A8A"/>
-                </a:solidFill>
-                <a:latin typeface="Calibri"/>
-                <a:ea typeface="Calibri"/>
-                <a:cs typeface="Calibri"/>
-              </a:defRPr>
-            </a:lvl5pPr>
-            <a:lvl6pPr>
-              <a:defRPr sz="1200" b="0">
-                <a:solidFill>
-                  <a:srgbClr val="6B7A8A"/>
-                </a:solidFill>
-                <a:latin typeface="Calibri"/>
-                <a:ea typeface="Calibri"/>
-                <a:cs typeface="Calibri"/>
-              </a:defRPr>
-            </a:lvl6pPr>
-            <a:lvl7pPr>
-              <a:defRPr sz="1200" b="0">
-                <a:solidFill>
-                  <a:srgbClr val="6B7A8A"/>
-                </a:solidFill>
-                <a:latin typeface="Calibri"/>
-                <a:ea typeface="Calibri"/>
-                <a:cs typeface="Calibri"/>
-              </a:defRPr>
-            </a:lvl7pPr>
-            <a:lvl8pPr>
-              <a:defRPr sz="1200" b="0">
-                <a:solidFill>
-                  <a:srgbClr val="6B7A8A"/>
-                </a:solidFill>
-                <a:latin typeface="Calibri"/>
-                <a:ea typeface="Calibri"/>
-                <a:cs typeface="Calibri"/>
-              </a:defRPr>
-            </a:lvl8pPr>
-            <a:lvl9pPr>
-              <a:defRPr sz="1200" b="0">
-                <a:solidFill>
-                  <a:srgbClr val="6B7A8A"/>
-                </a:solidFill>
-                <a:latin typeface="Calibri"/>
-                <a:ea typeface="Calibri"/>
-                <a:cs typeface="Calibri"/>
-              </a:defRPr>
-            </a:lvl9pPr>
-          </a:lstStyle>
-          <a:p xmlns:a="http://schemas.openxmlformats.org/drawingml/2006/main">
-            <a:pPr>
-              <a:defRPr sz="1200" b="0">
-                <a:solidFill>
-                  <a:srgbClr val="6B7A8A"/>
-                </a:solidFill>
-                <a:latin typeface="Calibri"/>
-                <a:ea typeface="Calibri"/>
-                <a:cs typeface="Calibri"/>
-              </a:defRPr>
-            </a:pPr>
-            <a:r>
-              <a:rPr sz="1200" b="0">
-                <a:solidFill>
-                  <a:srgbClr val="6B7A8A"/>
-                </a:solidFill>
-                <a:latin typeface="Calibri"/>
-                <a:ea typeface="Calibri"/>
-                <a:cs typeface="Calibri"/>
               </a:rPr>
               <a:t>CML3112   Week 13   35</a:t>
             </a:r>
@@ -35351,12 +33879,10 @@
         </p:txBody>
       </p:sp>
     </p:spTree>
-    <p:extLst>
-      <p:ext uri="{BB962C8B-B14F-4D97-AF65-F5344CB8AC3E}">
-        <p14:creationId xmlns:p14="http://schemas.microsoft.com/office/powerpoint/2010/main" val="525815609"/>
-      </p:ext>
-    </p:extLst>
   </p:cSld>
+  <p:clrMapOvr>
+    <a:masterClrMapping/>
+  </p:clrMapOvr>
 </p:sld>
 </file>
 
@@ -39692,201 +38218,85 @@
 </file>
 
 <file path=ppt/slides/slide39.xml><?xml version="1.0" encoding="utf-8"?>
-<p:sld xmlns:p="http://schemas.openxmlformats.org/presentationml/2006/main">
+<p:sld xmlns:a="http://schemas.openxmlformats.org/drawingml/2006/main" xmlns:p="http://schemas.openxmlformats.org/presentationml/2006/main" xmlns:r="http://schemas.openxmlformats.org/officeDocument/2006/relationships">
   <p:cSld>
-    <p:bg>
-      <p:bgPr>
-        <a:solidFill xmlns:a="http://schemas.openxmlformats.org/drawingml/2006/main">
-          <a:srgbClr val="FFFFFF"/>
-        </a:solidFill>
-      </p:bgPr>
-    </p:bg>
     <p:spTree>
       <p:nvGrpSpPr>
         <p:cNvPr id="1" name=""/>
         <p:cNvGrpSpPr/>
         <p:nvPr/>
       </p:nvGrpSpPr>
-      <p:grpSpPr>
-        <a:xfrm xmlns:a="http://schemas.openxmlformats.org/drawingml/2006/main"/>
-      </p:grpSpPr>
+      <p:grpSpPr/>
       <p:sp>
         <p:nvSpPr>
-          <p:cNvPr id="18" name="">
-            <a:extLst xmlns:a="http://schemas.openxmlformats.org/drawingml/2006/main">
-              <a:ext uri="{FF2B5EF4-FFF2-40B4-BE49-F238E27FC236}">
-                <a16:creationId xmlns:a16="http://schemas.microsoft.com/office/drawing/2014/main" id="{F1B6DC75-5BED-420F-85B2-7F3BDFA11952}"/>
-              </a:ext>
-            </a:extLst>
-          </p:cNvPr>
-          <p:cNvSpPr>
-            <a:spLocks xmlns:a="http://schemas.openxmlformats.org/drawingml/2006/main" noGrp="1"/>
-          </p:cNvSpPr>
+          <p:cNvPr id="2" name="Rectangle 1"/>
+          <p:cNvSpPr/>
           <p:nvPr/>
         </p:nvSpPr>
         <p:spPr>
-          <a:xfrm xmlns:a="http://schemas.openxmlformats.org/drawingml/2006/main">
+          <a:xfrm>
             <a:off x="0" y="0"/>
-            <a:ext cx="12191695" cy="1390650"/>
+            <a:ext cx="12192000" cy="1397000"/>
           </a:xfrm>
-          <a:prstGeom xmlns:a="http://schemas.openxmlformats.org/drawingml/2006/main" prst="rect">
+          <a:prstGeom prst="rect">
             <a:avLst/>
           </a:prstGeom>
-          <a:solidFill xmlns:a="http://schemas.openxmlformats.org/drawingml/2006/main">
+          <a:solidFill>
             <a:srgbClr val="1C3144"/>
           </a:solidFill>
-          <a:ln xmlns:a="http://schemas.openxmlformats.org/drawingml/2006/main" w="0">
+          <a:ln>
             <a:noFill/>
           </a:ln>
+          <a:effectLst/>
         </p:spPr>
-        <p:txBody xmlns:a="http://schemas.openxmlformats.org/drawingml/2006/main">
-          <a:bodyPr/>
-          <a:p/>
+        <p:style>
+          <a:lnRef idx="1">
+            <a:schemeClr val="accent1"/>
+          </a:lnRef>
+          <a:fillRef idx="3">
+            <a:schemeClr val="accent1"/>
+          </a:fillRef>
+          <a:effectRef idx="2">
+            <a:schemeClr val="accent1"/>
+          </a:effectRef>
+          <a:fontRef idx="minor">
+            <a:schemeClr val="lt1"/>
+          </a:fontRef>
+        </p:style>
+        <p:txBody>
+          <a:bodyPr rtlCol="0" anchor="ctr"/>
+          <a:lstStyle/>
+          <a:p>
+            <a:pPr algn="ctr"/>
+          </a:p>
         </p:txBody>
       </p:sp>
       <p:sp>
         <p:nvSpPr>
-          <p:cNvPr id="2" name="">
-            <a:extLst xmlns:a="http://schemas.openxmlformats.org/drawingml/2006/main">
-              <a:ext uri="{FF2B5EF4-FFF2-40B4-BE49-F238E27FC236}">
-                <a16:creationId xmlns:a16="http://schemas.microsoft.com/office/drawing/2014/main" id="{D61B729B-312A-49C2-867C-BF37E2506BFB}"/>
-              </a:ext>
-            </a:extLst>
-          </p:cNvPr>
-          <p:cNvSpPr>
-            <a:spLocks xmlns:a="http://schemas.openxmlformats.org/drawingml/2006/main" noGrp="1"/>
-          </p:cNvSpPr>
+          <p:cNvPr id="3" name="TextBox 2"/>
+          <p:cNvSpPr txBox="1"/>
           <p:nvPr/>
         </p:nvSpPr>
         <p:spPr>
-          <a:xfrm xmlns:a="http://schemas.openxmlformats.org/drawingml/2006/main">
-            <a:off x="590550" y="180975"/>
-            <a:ext cx="11049000" cy="285750"/>
+          <a:xfrm>
+            <a:off x="584200" y="177800"/>
+            <a:ext cx="11049000" cy="279400"/>
           </a:xfrm>
-          <a:prstGeom xmlns:a="http://schemas.openxmlformats.org/drawingml/2006/main" prst="rect">
+          <a:prstGeom prst="rect">
             <a:avLst/>
           </a:prstGeom>
-          <a:noFill xmlns:a="http://schemas.openxmlformats.org/drawingml/2006/main"/>
-          <a:ln xmlns:a="http://schemas.openxmlformats.org/drawingml/2006/main" w="0">
-            <a:noFill/>
-          </a:ln>
+          <a:noFill/>
         </p:spPr>
         <p:txBody>
-          <a:bodyPr xmlns:a="http://schemas.openxmlformats.org/drawingml/2006/main">
-            <a:noAutofit/>
+          <a:bodyPr wrap="square">
+            <a:spAutoFit/>
           </a:bodyPr>
-          <a:lstStyle xmlns:a="http://schemas.openxmlformats.org/drawingml/2006/main">
-            <a:defPPr>
-              <a:defRPr sz="1500" b="1">
-                <a:solidFill>
-                  <a:srgbClr val="E4572E"/>
-                </a:solidFill>
-                <a:latin typeface="Calibri"/>
-                <a:ea typeface="Calibri"/>
-                <a:cs typeface="Calibri"/>
-              </a:defRPr>
-            </a:defPPr>
-            <a:lvl1pPr>
-              <a:defRPr sz="1500" b="1">
-                <a:solidFill>
-                  <a:srgbClr val="E4572E"/>
-                </a:solidFill>
-                <a:latin typeface="Calibri"/>
-                <a:ea typeface="Calibri"/>
-                <a:cs typeface="Calibri"/>
-              </a:defRPr>
-            </a:lvl1pPr>
-            <a:lvl2pPr>
-              <a:defRPr sz="1500" b="1">
-                <a:solidFill>
-                  <a:srgbClr val="E4572E"/>
-                </a:solidFill>
-                <a:latin typeface="Calibri"/>
-                <a:ea typeface="Calibri"/>
-                <a:cs typeface="Calibri"/>
-              </a:defRPr>
-            </a:lvl2pPr>
-            <a:lvl3pPr>
-              <a:defRPr sz="1500" b="1">
-                <a:solidFill>
-                  <a:srgbClr val="E4572E"/>
-                </a:solidFill>
-                <a:latin typeface="Calibri"/>
-                <a:ea typeface="Calibri"/>
-                <a:cs typeface="Calibri"/>
-              </a:defRPr>
-            </a:lvl3pPr>
-            <a:lvl4pPr>
-              <a:defRPr sz="1500" b="1">
-                <a:solidFill>
-                  <a:srgbClr val="E4572E"/>
-                </a:solidFill>
-                <a:latin typeface="Calibri"/>
-                <a:ea typeface="Calibri"/>
-                <a:cs typeface="Calibri"/>
-              </a:defRPr>
-            </a:lvl4pPr>
-            <a:lvl5pPr>
-              <a:defRPr sz="1500" b="1">
-                <a:solidFill>
-                  <a:srgbClr val="E4572E"/>
-                </a:solidFill>
-                <a:latin typeface="Calibri"/>
-                <a:ea typeface="Calibri"/>
-                <a:cs typeface="Calibri"/>
-              </a:defRPr>
-            </a:lvl5pPr>
-            <a:lvl6pPr>
-              <a:defRPr sz="1500" b="1">
-                <a:solidFill>
-                  <a:srgbClr val="E4572E"/>
-                </a:solidFill>
-                <a:latin typeface="Calibri"/>
-                <a:ea typeface="Calibri"/>
-                <a:cs typeface="Calibri"/>
-              </a:defRPr>
-            </a:lvl6pPr>
-            <a:lvl7pPr>
-              <a:defRPr sz="1500" b="1">
-                <a:solidFill>
-                  <a:srgbClr val="E4572E"/>
-                </a:solidFill>
-                <a:latin typeface="Calibri"/>
-                <a:ea typeface="Calibri"/>
-                <a:cs typeface="Calibri"/>
-              </a:defRPr>
-            </a:lvl7pPr>
-            <a:lvl8pPr>
-              <a:defRPr sz="1500" b="1">
-                <a:solidFill>
-                  <a:srgbClr val="E4572E"/>
-                </a:solidFill>
-                <a:latin typeface="Calibri"/>
-                <a:ea typeface="Calibri"/>
-                <a:cs typeface="Calibri"/>
-              </a:defRPr>
-            </a:lvl8pPr>
-            <a:lvl9pPr>
-              <a:defRPr sz="1500" b="1">
-                <a:solidFill>
-                  <a:srgbClr val="E4572E"/>
-                </a:solidFill>
-                <a:latin typeface="Calibri"/>
-                <a:ea typeface="Calibri"/>
-                <a:cs typeface="Calibri"/>
-              </a:defRPr>
-            </a:lvl9pPr>
-          </a:lstStyle>
-          <a:p xmlns:a="http://schemas.openxmlformats.org/drawingml/2006/main">
+          <a:lstStyle/>
+          <a:p>
             <a:pPr>
-              <a:defRPr sz="1500" b="1">
-                <a:solidFill>
-                  <a:srgbClr val="E4572E"/>
-                </a:solidFill>
-                <a:latin typeface="Calibri"/>
-                <a:ea typeface="Calibri"/>
-                <a:cs typeface="Calibri"/>
-              </a:defRPr>
+              <a:spcAft>
+                <a:spcPts val="0"/>
+              </a:spcAft>
             </a:pPr>
             <a:r>
               <a:rPr sz="1500" b="1">
@@ -39894,8 +38304,6 @@
                   <a:srgbClr val="E4572E"/>
                 </a:solidFill>
                 <a:latin typeface="Calibri"/>
-                <a:ea typeface="Calibri"/>
-                <a:cs typeface="Calibri"/>
               </a:rPr>
               <a:t>QUIZ ACCESS</a:t>
             </a:r>
@@ -39904,314 +38312,76 @@
       </p:sp>
       <p:sp>
         <p:nvSpPr>
-          <p:cNvPr id="3" name="">
-            <a:extLst xmlns:a="http://schemas.openxmlformats.org/drawingml/2006/main">
-              <a:ext uri="{FF2B5EF4-FFF2-40B4-BE49-F238E27FC236}">
-                <a16:creationId xmlns:a16="http://schemas.microsoft.com/office/drawing/2014/main" id="{BFA00BB4-FB3A-4907-BE06-46BAC08C7AF4}"/>
-              </a:ext>
-            </a:extLst>
-          </p:cNvPr>
-          <p:cNvSpPr>
-            <a:spLocks xmlns:a="http://schemas.openxmlformats.org/drawingml/2006/main" noGrp="1"/>
-          </p:cNvSpPr>
+          <p:cNvPr id="4" name="TextBox 3"/>
+          <p:cNvSpPr txBox="1"/>
           <p:nvPr/>
         </p:nvSpPr>
         <p:spPr>
-          <a:xfrm xmlns:a="http://schemas.openxmlformats.org/drawingml/2006/main">
-            <a:off x="590550" y="523875"/>
-            <a:ext cx="11049000" cy="809625"/>
+          <a:xfrm>
+            <a:off x="584200" y="520700"/>
+            <a:ext cx="11049000" cy="812800"/>
           </a:xfrm>
-          <a:prstGeom xmlns:a="http://schemas.openxmlformats.org/drawingml/2006/main" prst="rect">
+          <a:prstGeom prst="rect">
             <a:avLst/>
           </a:prstGeom>
-          <a:noFill xmlns:a="http://schemas.openxmlformats.org/drawingml/2006/main"/>
-          <a:ln xmlns:a="http://schemas.openxmlformats.org/drawingml/2006/main" w="0">
-            <a:noFill/>
-          </a:ln>
+          <a:noFill/>
         </p:spPr>
         <p:txBody>
-          <a:bodyPr xmlns:a="http://schemas.openxmlformats.org/drawingml/2006/main">
-            <a:noAutofit/>
+          <a:bodyPr wrap="square">
+            <a:spAutoFit/>
           </a:bodyPr>
-          <a:lstStyle xmlns:a="http://schemas.openxmlformats.org/drawingml/2006/main">
-            <a:defPPr>
-              <a:defRPr sz="3150" b="1">
+          <a:lstStyle/>
+          <a:p>
+            <a:pPr>
+              <a:spcAft>
+                <a:spcPts val="0"/>
+              </a:spcAft>
+            </a:pPr>
+            <a:r>
+              <a:rPr sz="3150" b="1">
                 <a:solidFill>
                   <a:srgbClr val="FFFFFF"/>
                 </a:solidFill>
                 <a:latin typeface="Calibri"/>
-                <a:ea typeface="Calibri"/>
-                <a:cs typeface="Calibri"/>
-              </a:defRPr>
-            </a:defPPr>
-            <a:lvl1pPr>
-              <a:defRPr sz="3150" b="1">
-                <a:solidFill>
-                  <a:srgbClr val="FFFFFF"/>
-                </a:solidFill>
-                <a:latin typeface="Calibri"/>
-                <a:ea typeface="Calibri"/>
-                <a:cs typeface="Calibri"/>
-              </a:defRPr>
-            </a:lvl1pPr>
-            <a:lvl2pPr>
-              <a:defRPr sz="3150" b="1">
-                <a:solidFill>
-                  <a:srgbClr val="FFFFFF"/>
-                </a:solidFill>
-                <a:latin typeface="Calibri"/>
-                <a:ea typeface="Calibri"/>
-                <a:cs typeface="Calibri"/>
-              </a:defRPr>
-            </a:lvl2pPr>
-            <a:lvl3pPr>
-              <a:defRPr sz="3150" b="1">
-                <a:solidFill>
-                  <a:srgbClr val="FFFFFF"/>
-                </a:solidFill>
-                <a:latin typeface="Calibri"/>
-                <a:ea typeface="Calibri"/>
-                <a:cs typeface="Calibri"/>
-              </a:defRPr>
-            </a:lvl3pPr>
-            <a:lvl4pPr>
-              <a:defRPr sz="3150" b="1">
-                <a:solidFill>
-                  <a:srgbClr val="FFFFFF"/>
-                </a:solidFill>
-                <a:latin typeface="Calibri"/>
-                <a:ea typeface="Calibri"/>
-                <a:cs typeface="Calibri"/>
-              </a:defRPr>
-            </a:lvl4pPr>
-            <a:lvl5pPr>
-              <a:defRPr sz="3150" b="1">
-                <a:solidFill>
-                  <a:srgbClr val="FFFFFF"/>
-                </a:solidFill>
-                <a:latin typeface="Calibri"/>
-                <a:ea typeface="Calibri"/>
-                <a:cs typeface="Calibri"/>
-              </a:defRPr>
-            </a:lvl5pPr>
-            <a:lvl6pPr>
-              <a:defRPr sz="3150" b="1">
-                <a:solidFill>
-                  <a:srgbClr val="FFFFFF"/>
-                </a:solidFill>
-                <a:latin typeface="Calibri"/>
-                <a:ea typeface="Calibri"/>
-                <a:cs typeface="Calibri"/>
-              </a:defRPr>
-            </a:lvl6pPr>
-            <a:lvl7pPr>
-              <a:defRPr sz="3150" b="1">
-                <a:solidFill>
-                  <a:srgbClr val="FFFFFF"/>
-                </a:solidFill>
-                <a:latin typeface="Calibri"/>
-                <a:ea typeface="Calibri"/>
-                <a:cs typeface="Calibri"/>
-              </a:defRPr>
-            </a:lvl7pPr>
-            <a:lvl8pPr>
-              <a:defRPr sz="3150" b="1">
-                <a:solidFill>
-                  <a:srgbClr val="FFFFFF"/>
-                </a:solidFill>
-                <a:latin typeface="Calibri"/>
-                <a:ea typeface="Calibri"/>
-                <a:cs typeface="Calibri"/>
-              </a:defRPr>
-            </a:lvl8pPr>
-            <a:lvl9pPr>
-              <a:defRPr sz="3150" b="1">
-                <a:solidFill>
-                  <a:srgbClr val="FFFFFF"/>
-                </a:solidFill>
-                <a:latin typeface="Calibri"/>
-                <a:ea typeface="Calibri"/>
-                <a:cs typeface="Calibri"/>
-              </a:defRPr>
-            </a:lvl9pPr>
-          </a:lstStyle>
-          <a:p xmlns:a="http://schemas.openxmlformats.org/drawingml/2006/main">
-            <a:pPr>
-              <a:defRPr sz="3150" b="1">
-                <a:solidFill>
-                  <a:srgbClr val="FFFFFF"/>
-                </a:solidFill>
-                <a:latin typeface="Calibri"/>
-                <a:ea typeface="Calibri"/>
-                <a:cs typeface="Calibri"/>
-              </a:defRPr>
-            </a:pPr>
-            <a:r>
-              <a:rPr sz="3150" b="1">
-                <a:solidFill>
-                  <a:srgbClr val="FFFFFF"/>
-                </a:solidFill>
-                <a:latin typeface="Calibri"/>
-                <a:ea typeface="Calibri"/>
-                <a:cs typeface="Calibri"/>
-              </a:rPr>
-              <a:t>Week 13 quiz</a:t>
+              </a:rPr>
+              <a:t>Block 2 quiz: three forms, 15 questions</a:t>
             </a:r>
           </a:p>
         </p:txBody>
       </p:sp>
       <p:sp>
         <p:nvSpPr>
-          <p:cNvPr id="4" name="">
-            <a:extLst xmlns:a="http://schemas.openxmlformats.org/drawingml/2006/main">
-              <a:ext uri="{FF2B5EF4-FFF2-40B4-BE49-F238E27FC236}">
-                <a16:creationId xmlns:a16="http://schemas.microsoft.com/office/drawing/2014/main" id="{5E6C41FA-E78D-4E50-A339-6B7E4C20A675}"/>
-              </a:ext>
-            </a:extLst>
-          </p:cNvPr>
-          <p:cNvSpPr>
-            <a:spLocks xmlns:a="http://schemas.openxmlformats.org/drawingml/2006/main" noGrp="1"/>
-          </p:cNvSpPr>
+          <p:cNvPr id="5" name="TextBox 4"/>
+          <p:cNvSpPr txBox="1"/>
           <p:nvPr/>
         </p:nvSpPr>
         <p:spPr>
-          <a:xfrm xmlns:a="http://schemas.openxmlformats.org/drawingml/2006/main">
-            <a:off x="590550" y="1724025"/>
-            <a:ext cx="619125" cy="571500"/>
+          <a:xfrm>
+            <a:off x="584200" y="1676400"/>
+            <a:ext cx="762000" cy="508000"/>
           </a:xfrm>
-          <a:prstGeom xmlns:a="http://schemas.openxmlformats.org/drawingml/2006/main" prst="rect">
+          <a:prstGeom prst="rect">
             <a:avLst/>
           </a:prstGeom>
-          <a:noFill xmlns:a="http://schemas.openxmlformats.org/drawingml/2006/main"/>
-          <a:ln xmlns:a="http://schemas.openxmlformats.org/drawingml/2006/main" w="0">
-            <a:noFill/>
-          </a:ln>
+          <a:noFill/>
         </p:spPr>
         <p:txBody>
-          <a:bodyPr xmlns:a="http://schemas.openxmlformats.org/drawingml/2006/main">
-            <a:noAutofit/>
+          <a:bodyPr wrap="square">
+            <a:spAutoFit/>
           </a:bodyPr>
-          <a:lstStyle xmlns:a="http://schemas.openxmlformats.org/drawingml/2006/main">
-            <a:defPPr>
-              <a:defRPr sz="2550" b="1">
-                <a:solidFill>
-                  <a:srgbClr val="E4572E"/>
-                </a:solidFill>
-                <a:latin typeface="Calibri"/>
-                <a:ea typeface="Calibri"/>
-                <a:cs typeface="Calibri"/>
-              </a:defRPr>
-            </a:defPPr>
-            <a:lvl1pPr>
-              <a:defRPr sz="2550" b="1">
-                <a:solidFill>
-                  <a:srgbClr val="E4572E"/>
-                </a:solidFill>
-                <a:latin typeface="Calibri"/>
-                <a:ea typeface="Calibri"/>
-                <a:cs typeface="Calibri"/>
-              </a:defRPr>
-            </a:lvl1pPr>
-            <a:lvl2pPr>
-              <a:defRPr sz="2550" b="1">
-                <a:solidFill>
-                  <a:srgbClr val="E4572E"/>
-                </a:solidFill>
-                <a:latin typeface="Calibri"/>
-                <a:ea typeface="Calibri"/>
-                <a:cs typeface="Calibri"/>
-              </a:defRPr>
-            </a:lvl2pPr>
-            <a:lvl3pPr>
-              <a:defRPr sz="2550" b="1">
-                <a:solidFill>
-                  <a:srgbClr val="E4572E"/>
-                </a:solidFill>
-                <a:latin typeface="Calibri"/>
-                <a:ea typeface="Calibri"/>
-                <a:cs typeface="Calibri"/>
-              </a:defRPr>
-            </a:lvl3pPr>
-            <a:lvl4pPr>
-              <a:defRPr sz="2550" b="1">
-                <a:solidFill>
-                  <a:srgbClr val="E4572E"/>
-                </a:solidFill>
-                <a:latin typeface="Calibri"/>
-                <a:ea typeface="Calibri"/>
-                <a:cs typeface="Calibri"/>
-              </a:defRPr>
-            </a:lvl4pPr>
-            <a:lvl5pPr>
-              <a:defRPr sz="2550" b="1">
-                <a:solidFill>
-                  <a:srgbClr val="E4572E"/>
-                </a:solidFill>
-                <a:latin typeface="Calibri"/>
-                <a:ea typeface="Calibri"/>
-                <a:cs typeface="Calibri"/>
-              </a:defRPr>
-            </a:lvl5pPr>
-            <a:lvl6pPr>
-              <a:defRPr sz="2550" b="1">
-                <a:solidFill>
-                  <a:srgbClr val="E4572E"/>
-                </a:solidFill>
-                <a:latin typeface="Calibri"/>
-                <a:ea typeface="Calibri"/>
-                <a:cs typeface="Calibri"/>
-              </a:defRPr>
-            </a:lvl6pPr>
-            <a:lvl7pPr>
-              <a:defRPr sz="2550" b="1">
-                <a:solidFill>
-                  <a:srgbClr val="E4572E"/>
-                </a:solidFill>
-                <a:latin typeface="Calibri"/>
-                <a:ea typeface="Calibri"/>
-                <a:cs typeface="Calibri"/>
-              </a:defRPr>
-            </a:lvl7pPr>
-            <a:lvl8pPr>
-              <a:defRPr sz="2550" b="1">
-                <a:solidFill>
-                  <a:srgbClr val="E4572E"/>
-                </a:solidFill>
-                <a:latin typeface="Calibri"/>
-                <a:ea typeface="Calibri"/>
-                <a:cs typeface="Calibri"/>
-              </a:defRPr>
-            </a:lvl8pPr>
-            <a:lvl9pPr>
-              <a:defRPr sz="2550" b="1">
-                <a:solidFill>
-                  <a:srgbClr val="E4572E"/>
-                </a:solidFill>
-                <a:latin typeface="Calibri"/>
-                <a:ea typeface="Calibri"/>
-                <a:cs typeface="Calibri"/>
-              </a:defRPr>
-            </a:lvl9pPr>
-          </a:lstStyle>
-          <a:p xmlns:a="http://schemas.openxmlformats.org/drawingml/2006/main">
+          <a:lstStyle/>
+          <a:p>
             <a:pPr>
-              <a:defRPr sz="2550" b="1">
-                <a:solidFill>
-                  <a:srgbClr val="E4572E"/>
-                </a:solidFill>
-                <a:latin typeface="Calibri"/>
-                <a:ea typeface="Calibri"/>
-                <a:cs typeface="Calibri"/>
-              </a:defRPr>
+              <a:spcAft>
+                <a:spcPts val="0"/>
+              </a:spcAft>
             </a:pPr>
             <a:r>
-              <a:rPr sz="2550" b="1">
-                <a:solidFill>
-                  <a:srgbClr val="E4572E"/>
-                </a:solidFill>
-                <a:latin typeface="Calibri"/>
-                <a:ea typeface="Calibri"/>
-                <a:cs typeface="Calibri"/>
+              <a:rPr sz="3000" b="1">
+                <a:solidFill>
+                  <a:srgbClr val="E4572E"/>
+                </a:solidFill>
+                <a:latin typeface="Calibri"/>
               </a:rPr>
               <a:t>01</a:t>
             </a:r>
@@ -40220,1799 +38390,420 @@
       </p:sp>
       <p:sp>
         <p:nvSpPr>
-          <p:cNvPr id="5" name="">
-            <a:extLst xmlns:a="http://schemas.openxmlformats.org/drawingml/2006/main">
-              <a:ext uri="{FF2B5EF4-FFF2-40B4-BE49-F238E27FC236}">
-                <a16:creationId xmlns:a16="http://schemas.microsoft.com/office/drawing/2014/main" id="{509C042B-164B-4D2D-80DE-08AF09A8C6CE}"/>
-              </a:ext>
-            </a:extLst>
-          </p:cNvPr>
-          <p:cNvSpPr>
-            <a:spLocks xmlns:a="http://schemas.openxmlformats.org/drawingml/2006/main" noGrp="1"/>
-          </p:cNvSpPr>
+          <p:cNvPr id="6" name="TextBox 5"/>
+          <p:cNvSpPr txBox="1"/>
           <p:nvPr/>
         </p:nvSpPr>
         <p:spPr>
-          <a:xfrm xmlns:a="http://schemas.openxmlformats.org/drawingml/2006/main">
-            <a:off x="1381125" y="1724025"/>
-            <a:ext cx="7143750" cy="721519"/>
+          <a:xfrm>
+            <a:off x="1422400" y="1701800"/>
+            <a:ext cx="10160000" cy="381000"/>
           </a:xfrm>
-          <a:prstGeom xmlns:a="http://schemas.openxmlformats.org/drawingml/2006/main" prst="rect">
+          <a:prstGeom prst="rect">
             <a:avLst/>
           </a:prstGeom>
-          <a:noFill xmlns:a="http://schemas.openxmlformats.org/drawingml/2006/main"/>
-          <a:ln xmlns:a="http://schemas.openxmlformats.org/drawingml/2006/main" w="0">
-            <a:noFill/>
-          </a:ln>
+          <a:noFill/>
         </p:spPr>
         <p:txBody>
-          <a:bodyPr xmlns:a="http://schemas.openxmlformats.org/drawingml/2006/main">
-            <a:noAutofit/>
+          <a:bodyPr wrap="square">
+            <a:spAutoFit/>
           </a:bodyPr>
-          <a:lstStyle xmlns:a="http://schemas.openxmlformats.org/drawingml/2006/main">
-            <a:defPPr>
-              <a:defRPr sz="2250" b="0">
-                <a:solidFill>
-                  <a:srgbClr val="1C3144"/>
-                </a:solidFill>
-                <a:latin typeface="Calibri"/>
-                <a:ea typeface="Calibri"/>
-                <a:cs typeface="Calibri"/>
-              </a:defRPr>
-            </a:defPPr>
-            <a:lvl1pPr>
-              <a:defRPr sz="2250" b="0">
-                <a:solidFill>
-                  <a:srgbClr val="1C3144"/>
-                </a:solidFill>
-                <a:latin typeface="Calibri"/>
-                <a:ea typeface="Calibri"/>
-                <a:cs typeface="Calibri"/>
-              </a:defRPr>
-            </a:lvl1pPr>
-            <a:lvl2pPr>
-              <a:defRPr sz="2250" b="0">
-                <a:solidFill>
-                  <a:srgbClr val="1C3144"/>
-                </a:solidFill>
-                <a:latin typeface="Calibri"/>
-                <a:ea typeface="Calibri"/>
-                <a:cs typeface="Calibri"/>
-              </a:defRPr>
-            </a:lvl2pPr>
-            <a:lvl3pPr>
-              <a:defRPr sz="2250" b="0">
-                <a:solidFill>
-                  <a:srgbClr val="1C3144"/>
-                </a:solidFill>
-                <a:latin typeface="Calibri"/>
-                <a:ea typeface="Calibri"/>
-                <a:cs typeface="Calibri"/>
-              </a:defRPr>
-            </a:lvl3pPr>
-            <a:lvl4pPr>
-              <a:defRPr sz="2250" b="0">
-                <a:solidFill>
-                  <a:srgbClr val="1C3144"/>
-                </a:solidFill>
-                <a:latin typeface="Calibri"/>
-                <a:ea typeface="Calibri"/>
-                <a:cs typeface="Calibri"/>
-              </a:defRPr>
-            </a:lvl4pPr>
-            <a:lvl5pPr>
-              <a:defRPr sz="2250" b="0">
-                <a:solidFill>
-                  <a:srgbClr val="1C3144"/>
-                </a:solidFill>
-                <a:latin typeface="Calibri"/>
-                <a:ea typeface="Calibri"/>
-                <a:cs typeface="Calibri"/>
-              </a:defRPr>
-            </a:lvl5pPr>
-            <a:lvl6pPr>
-              <a:defRPr sz="2250" b="0">
-                <a:solidFill>
-                  <a:srgbClr val="1C3144"/>
-                </a:solidFill>
-                <a:latin typeface="Calibri"/>
-                <a:ea typeface="Calibri"/>
-                <a:cs typeface="Calibri"/>
-              </a:defRPr>
-            </a:lvl6pPr>
-            <a:lvl7pPr>
-              <a:defRPr sz="2250" b="0">
-                <a:solidFill>
-                  <a:srgbClr val="1C3144"/>
-                </a:solidFill>
-                <a:latin typeface="Calibri"/>
-                <a:ea typeface="Calibri"/>
-                <a:cs typeface="Calibri"/>
-              </a:defRPr>
-            </a:lvl7pPr>
-            <a:lvl8pPr>
-              <a:defRPr sz="2250" b="0">
-                <a:solidFill>
-                  <a:srgbClr val="1C3144"/>
-                </a:solidFill>
-                <a:latin typeface="Calibri"/>
-                <a:ea typeface="Calibri"/>
-                <a:cs typeface="Calibri"/>
-              </a:defRPr>
-            </a:lvl8pPr>
-            <a:lvl9pPr>
-              <a:defRPr sz="2250" b="0">
-                <a:solidFill>
-                  <a:srgbClr val="1C3144"/>
-                </a:solidFill>
-                <a:latin typeface="Calibri"/>
-                <a:ea typeface="Calibri"/>
-                <a:cs typeface="Calibri"/>
-              </a:defRPr>
-            </a:lvl9pPr>
-          </a:lstStyle>
-          <a:p xmlns:a="http://schemas.openxmlformats.org/drawingml/2006/main">
+          <a:lstStyle/>
+          <a:p>
             <a:pPr>
-              <a:defRPr sz="2250" b="0">
-                <a:solidFill>
-                  <a:srgbClr val="1C3144"/>
-                </a:solidFill>
-                <a:latin typeface="Calibri"/>
-                <a:ea typeface="Calibri"/>
-                <a:cs typeface="Calibri"/>
-              </a:defRPr>
+              <a:spcAft>
+                <a:spcPts val="0"/>
+              </a:spcAft>
             </a:pPr>
             <a:r>
-              <a:rPr sz="2250" b="0">
-                <a:solidFill>
-                  <a:srgbClr val="1C3144"/>
-                </a:solidFill>
-                <a:latin typeface="Calibri"/>
-                <a:ea typeface="Calibri"/>
-                <a:cs typeface="Calibri"/>
-              </a:rPr>
-              <a:t>Answer individually after the lecturer activates the quiz.</a:t>
+              <a:rPr sz="2100" b="1">
+                <a:solidFill>
+                  <a:srgbClr val="1C3144"/>
+                </a:solidFill>
+                <a:latin typeface="Calibri"/>
+              </a:rPr>
+              <a:t>Week 11 form (5 questions)</a:t>
             </a:r>
           </a:p>
         </p:txBody>
       </p:sp>
       <p:sp>
         <p:nvSpPr>
-          <p:cNvPr id="6" name="">
-            <a:extLst xmlns:a="http://schemas.openxmlformats.org/drawingml/2006/main">
-              <a:ext uri="{FF2B5EF4-FFF2-40B4-BE49-F238E27FC236}">
-                <a16:creationId xmlns:a16="http://schemas.microsoft.com/office/drawing/2014/main" id="{9091EFF8-3A27-4DDE-AC32-F18D2F1DD9B2}"/>
-              </a:ext>
-            </a:extLst>
-          </p:cNvPr>
-          <p:cNvSpPr>
-            <a:spLocks xmlns:a="http://schemas.openxmlformats.org/drawingml/2006/main" noGrp="1"/>
-          </p:cNvSpPr>
+          <p:cNvPr id="7" name="TextBox 6"/>
+          <p:cNvSpPr txBox="1"/>
           <p:nvPr/>
         </p:nvSpPr>
         <p:spPr>
-          <a:xfrm xmlns:a="http://schemas.openxmlformats.org/drawingml/2006/main">
-            <a:off x="590550" y="2521744"/>
-            <a:ext cx="619125" cy="571500"/>
+          <a:xfrm>
+            <a:off x="1422400" y="2108200"/>
+            <a:ext cx="10160000" cy="381000"/>
           </a:xfrm>
-          <a:prstGeom xmlns:a="http://schemas.openxmlformats.org/drawingml/2006/main" prst="rect">
+          <a:prstGeom prst="rect">
             <a:avLst/>
           </a:prstGeom>
-          <a:noFill xmlns:a="http://schemas.openxmlformats.org/drawingml/2006/main"/>
-          <a:ln xmlns:a="http://schemas.openxmlformats.org/drawingml/2006/main" w="0">
-            <a:noFill/>
-          </a:ln>
+          <a:noFill/>
         </p:spPr>
         <p:txBody>
-          <a:bodyPr xmlns:a="http://schemas.openxmlformats.org/drawingml/2006/main">
-            <a:noAutofit/>
+          <a:bodyPr wrap="none">
+            <a:spAutoFit/>
           </a:bodyPr>
-          <a:lstStyle xmlns:a="http://schemas.openxmlformats.org/drawingml/2006/main">
-            <a:defPPr>
-              <a:defRPr sz="2550" b="1">
-                <a:solidFill>
-                  <a:srgbClr val="E4572E"/>
-                </a:solidFill>
-                <a:latin typeface="Calibri"/>
-                <a:ea typeface="Calibri"/>
-                <a:cs typeface="Calibri"/>
-              </a:defRPr>
-            </a:defPPr>
-            <a:lvl1pPr>
-              <a:defRPr sz="2550" b="1">
-                <a:solidFill>
-                  <a:srgbClr val="E4572E"/>
-                </a:solidFill>
-                <a:latin typeface="Calibri"/>
-                <a:ea typeface="Calibri"/>
-                <a:cs typeface="Calibri"/>
-              </a:defRPr>
-            </a:lvl1pPr>
-            <a:lvl2pPr>
-              <a:defRPr sz="2550" b="1">
-                <a:solidFill>
-                  <a:srgbClr val="E4572E"/>
-                </a:solidFill>
-                <a:latin typeface="Calibri"/>
-                <a:ea typeface="Calibri"/>
-                <a:cs typeface="Calibri"/>
-              </a:defRPr>
-            </a:lvl2pPr>
-            <a:lvl3pPr>
-              <a:defRPr sz="2550" b="1">
-                <a:solidFill>
-                  <a:srgbClr val="E4572E"/>
-                </a:solidFill>
-                <a:latin typeface="Calibri"/>
-                <a:ea typeface="Calibri"/>
-                <a:cs typeface="Calibri"/>
-              </a:defRPr>
-            </a:lvl3pPr>
-            <a:lvl4pPr>
-              <a:defRPr sz="2550" b="1">
-                <a:solidFill>
-                  <a:srgbClr val="E4572E"/>
-                </a:solidFill>
-                <a:latin typeface="Calibri"/>
-                <a:ea typeface="Calibri"/>
-                <a:cs typeface="Calibri"/>
-              </a:defRPr>
-            </a:lvl4pPr>
-            <a:lvl5pPr>
-              <a:defRPr sz="2550" b="1">
-                <a:solidFill>
-                  <a:srgbClr val="E4572E"/>
-                </a:solidFill>
-                <a:latin typeface="Calibri"/>
-                <a:ea typeface="Calibri"/>
-                <a:cs typeface="Calibri"/>
-              </a:defRPr>
-            </a:lvl5pPr>
-            <a:lvl6pPr>
-              <a:defRPr sz="2550" b="1">
-                <a:solidFill>
-                  <a:srgbClr val="E4572E"/>
-                </a:solidFill>
-                <a:latin typeface="Calibri"/>
-                <a:ea typeface="Calibri"/>
-                <a:cs typeface="Calibri"/>
-              </a:defRPr>
-            </a:lvl6pPr>
-            <a:lvl7pPr>
-              <a:defRPr sz="2550" b="1">
-                <a:solidFill>
-                  <a:srgbClr val="E4572E"/>
-                </a:solidFill>
-                <a:latin typeface="Calibri"/>
-                <a:ea typeface="Calibri"/>
-                <a:cs typeface="Calibri"/>
-              </a:defRPr>
-            </a:lvl7pPr>
-            <a:lvl8pPr>
-              <a:defRPr sz="2550" b="1">
-                <a:solidFill>
-                  <a:srgbClr val="E4572E"/>
-                </a:solidFill>
-                <a:latin typeface="Calibri"/>
-                <a:ea typeface="Calibri"/>
-                <a:cs typeface="Calibri"/>
-              </a:defRPr>
-            </a:lvl8pPr>
-            <a:lvl9pPr>
-              <a:defRPr sz="2550" b="1">
-                <a:solidFill>
-                  <a:srgbClr val="E4572E"/>
-                </a:solidFill>
-                <a:latin typeface="Calibri"/>
-                <a:ea typeface="Calibri"/>
-                <a:cs typeface="Calibri"/>
-              </a:defRPr>
-            </a:lvl9pPr>
-          </a:lstStyle>
-          <a:p xmlns:a="http://schemas.openxmlformats.org/drawingml/2006/main">
-            <a:pPr>
-              <a:defRPr sz="2550" b="1">
-                <a:solidFill>
-                  <a:srgbClr val="E4572E"/>
-                </a:solidFill>
-                <a:latin typeface="Calibri"/>
-                <a:ea typeface="Calibri"/>
-                <a:cs typeface="Calibri"/>
-              </a:defRPr>
-            </a:pPr>
-            <a:r>
-              <a:rPr sz="2550" b="1">
-                <a:solidFill>
-                  <a:srgbClr val="E4572E"/>
-                </a:solidFill>
-                <a:latin typeface="Calibri"/>
-                <a:ea typeface="Calibri"/>
-                <a:cs typeface="Calibri"/>
-              </a:rPr>
-              <a:t>02</a:t>
+          <a:lstStyle/>
+          <a:p>
+            <a:r>
+              <a:rPr sz="1900" u="sng">
+                <a:solidFill>
+                  <a:srgbClr val="2E7D6F"/>
+                </a:solidFill>
+                <a:latin typeface="Calibri"/>
+                <a:hlinkClick r:id="rId2"/>
+              </a:rPr>
+              <a:t>Open the Week 11 quiz form</a:t>
             </a:r>
           </a:p>
         </p:txBody>
       </p:sp>
       <p:sp>
         <p:nvSpPr>
-          <p:cNvPr id="7" name="">
-            <a:extLst xmlns:a="http://schemas.openxmlformats.org/drawingml/2006/main">
-              <a:ext uri="{FF2B5EF4-FFF2-40B4-BE49-F238E27FC236}">
-                <a16:creationId xmlns:a16="http://schemas.microsoft.com/office/drawing/2014/main" id="{0C0FBFE6-5BA0-46E2-BADB-D19001DB1AC9}"/>
-              </a:ext>
-            </a:extLst>
-          </p:cNvPr>
-          <p:cNvSpPr>
-            <a:spLocks xmlns:a="http://schemas.openxmlformats.org/drawingml/2006/main" noGrp="1"/>
-          </p:cNvSpPr>
+          <p:cNvPr id="8" name="TextBox 7"/>
+          <p:cNvSpPr txBox="1"/>
           <p:nvPr/>
         </p:nvSpPr>
         <p:spPr>
-          <a:xfrm xmlns:a="http://schemas.openxmlformats.org/drawingml/2006/main">
-            <a:off x="1381125" y="2521744"/>
-            <a:ext cx="7143750" cy="721519"/>
+          <a:xfrm>
+            <a:off x="584200" y="2794000"/>
+            <a:ext cx="762000" cy="508000"/>
           </a:xfrm>
-          <a:prstGeom xmlns:a="http://schemas.openxmlformats.org/drawingml/2006/main" prst="rect">
+          <a:prstGeom prst="rect">
             <a:avLst/>
           </a:prstGeom>
-          <a:noFill xmlns:a="http://schemas.openxmlformats.org/drawingml/2006/main"/>
-          <a:ln xmlns:a="http://schemas.openxmlformats.org/drawingml/2006/main" w="0">
-            <a:noFill/>
-          </a:ln>
+          <a:noFill/>
         </p:spPr>
         <p:txBody>
-          <a:bodyPr xmlns:a="http://schemas.openxmlformats.org/drawingml/2006/main">
-            <a:noAutofit/>
+          <a:bodyPr wrap="square">
+            <a:spAutoFit/>
           </a:bodyPr>
-          <a:lstStyle xmlns:a="http://schemas.openxmlformats.org/drawingml/2006/main">
-            <a:defPPr>
-              <a:defRPr sz="2250" b="0">
-                <a:solidFill>
-                  <a:srgbClr val="1C3144"/>
-                </a:solidFill>
-                <a:latin typeface="Calibri"/>
-                <a:ea typeface="Calibri"/>
-                <a:cs typeface="Calibri"/>
-              </a:defRPr>
-            </a:defPPr>
-            <a:lvl1pPr>
-              <a:defRPr sz="2250" b="0">
-                <a:solidFill>
-                  <a:srgbClr val="1C3144"/>
-                </a:solidFill>
-                <a:latin typeface="Calibri"/>
-                <a:ea typeface="Calibri"/>
-                <a:cs typeface="Calibri"/>
-              </a:defRPr>
-            </a:lvl1pPr>
-            <a:lvl2pPr>
-              <a:defRPr sz="2250" b="0">
-                <a:solidFill>
-                  <a:srgbClr val="1C3144"/>
-                </a:solidFill>
-                <a:latin typeface="Calibri"/>
-                <a:ea typeface="Calibri"/>
-                <a:cs typeface="Calibri"/>
-              </a:defRPr>
-            </a:lvl2pPr>
-            <a:lvl3pPr>
-              <a:defRPr sz="2250" b="0">
-                <a:solidFill>
-                  <a:srgbClr val="1C3144"/>
-                </a:solidFill>
-                <a:latin typeface="Calibri"/>
-                <a:ea typeface="Calibri"/>
-                <a:cs typeface="Calibri"/>
-              </a:defRPr>
-            </a:lvl3pPr>
-            <a:lvl4pPr>
-              <a:defRPr sz="2250" b="0">
-                <a:solidFill>
-                  <a:srgbClr val="1C3144"/>
-                </a:solidFill>
-                <a:latin typeface="Calibri"/>
-                <a:ea typeface="Calibri"/>
-                <a:cs typeface="Calibri"/>
-              </a:defRPr>
-            </a:lvl4pPr>
-            <a:lvl5pPr>
-              <a:defRPr sz="2250" b="0">
-                <a:solidFill>
-                  <a:srgbClr val="1C3144"/>
-                </a:solidFill>
-                <a:latin typeface="Calibri"/>
-                <a:ea typeface="Calibri"/>
-                <a:cs typeface="Calibri"/>
-              </a:defRPr>
-            </a:lvl5pPr>
-            <a:lvl6pPr>
-              <a:defRPr sz="2250" b="0">
-                <a:solidFill>
-                  <a:srgbClr val="1C3144"/>
-                </a:solidFill>
-                <a:latin typeface="Calibri"/>
-                <a:ea typeface="Calibri"/>
-                <a:cs typeface="Calibri"/>
-              </a:defRPr>
-            </a:lvl6pPr>
-            <a:lvl7pPr>
-              <a:defRPr sz="2250" b="0">
-                <a:solidFill>
-                  <a:srgbClr val="1C3144"/>
-                </a:solidFill>
-                <a:latin typeface="Calibri"/>
-                <a:ea typeface="Calibri"/>
-                <a:cs typeface="Calibri"/>
-              </a:defRPr>
-            </a:lvl7pPr>
-            <a:lvl8pPr>
-              <a:defRPr sz="2250" b="0">
-                <a:solidFill>
-                  <a:srgbClr val="1C3144"/>
-                </a:solidFill>
-                <a:latin typeface="Calibri"/>
-                <a:ea typeface="Calibri"/>
-                <a:cs typeface="Calibri"/>
-              </a:defRPr>
-            </a:lvl8pPr>
-            <a:lvl9pPr>
-              <a:defRPr sz="2250" b="0">
-                <a:solidFill>
-                  <a:srgbClr val="1C3144"/>
-                </a:solidFill>
-                <a:latin typeface="Calibri"/>
-                <a:ea typeface="Calibri"/>
-                <a:cs typeface="Calibri"/>
-              </a:defRPr>
-            </a:lvl9pPr>
-          </a:lstStyle>
-          <a:p xmlns:a="http://schemas.openxmlformats.org/drawingml/2006/main">
+          <a:lstStyle/>
+          <a:p>
             <a:pPr>
-              <a:defRPr sz="2250" b="0">
-                <a:solidFill>
-                  <a:srgbClr val="1C3144"/>
-                </a:solidFill>
-                <a:latin typeface="Calibri"/>
-                <a:ea typeface="Calibri"/>
-                <a:cs typeface="Calibri"/>
-              </a:defRPr>
+              <a:spcAft>
+                <a:spcPts val="0"/>
+              </a:spcAft>
             </a:pPr>
             <a:r>
-              <a:rPr sz="2250" b="0">
-                <a:solidFill>
-                  <a:srgbClr val="1C3144"/>
-                </a:solidFill>
-                <a:latin typeface="Calibri"/>
-                <a:ea typeface="Calibri"/>
-                <a:cs typeface="Calibri"/>
-              </a:rPr>
-              <a:t>Available for 24 hours from activation.</a:t>
+              <a:rPr sz="3000" b="1">
+                <a:solidFill>
+                  <a:srgbClr val="E4572E"/>
+                </a:solidFill>
+                <a:latin typeface="Calibri"/>
+              </a:rPr>
+              <a:t>02</a:t>
             </a:r>
           </a:p>
         </p:txBody>
       </p:sp>
       <p:sp>
         <p:nvSpPr>
-          <p:cNvPr id="8" name="">
-            <a:extLst xmlns:a="http://schemas.openxmlformats.org/drawingml/2006/main">
-              <a:ext uri="{FF2B5EF4-FFF2-40B4-BE49-F238E27FC236}">
-                <a16:creationId xmlns:a16="http://schemas.microsoft.com/office/drawing/2014/main" id="{455AD0AC-6989-4F76-9574-4C6BD27EF0D2}"/>
-              </a:ext>
-            </a:extLst>
-          </p:cNvPr>
-          <p:cNvSpPr>
-            <a:spLocks xmlns:a="http://schemas.openxmlformats.org/drawingml/2006/main" noGrp="1"/>
-          </p:cNvSpPr>
+          <p:cNvPr id="9" name="TextBox 8"/>
+          <p:cNvSpPr txBox="1"/>
           <p:nvPr/>
         </p:nvSpPr>
         <p:spPr>
-          <a:xfrm xmlns:a="http://schemas.openxmlformats.org/drawingml/2006/main">
-            <a:off x="590550" y="3319463"/>
-            <a:ext cx="619125" cy="571500"/>
+          <a:xfrm>
+            <a:off x="1422400" y="2819400"/>
+            <a:ext cx="10160000" cy="381000"/>
           </a:xfrm>
-          <a:prstGeom xmlns:a="http://schemas.openxmlformats.org/drawingml/2006/main" prst="rect">
+          <a:prstGeom prst="rect">
             <a:avLst/>
           </a:prstGeom>
-          <a:noFill xmlns:a="http://schemas.openxmlformats.org/drawingml/2006/main"/>
-          <a:ln xmlns:a="http://schemas.openxmlformats.org/drawingml/2006/main" w="0">
-            <a:noFill/>
-          </a:ln>
+          <a:noFill/>
         </p:spPr>
         <p:txBody>
-          <a:bodyPr xmlns:a="http://schemas.openxmlformats.org/drawingml/2006/main">
-            <a:noAutofit/>
+          <a:bodyPr wrap="square">
+            <a:spAutoFit/>
           </a:bodyPr>
-          <a:lstStyle xmlns:a="http://schemas.openxmlformats.org/drawingml/2006/main">
-            <a:defPPr>
-              <a:defRPr sz="2550" b="1">
-                <a:solidFill>
-                  <a:srgbClr val="E4572E"/>
-                </a:solidFill>
-                <a:latin typeface="Calibri"/>
-                <a:ea typeface="Calibri"/>
-                <a:cs typeface="Calibri"/>
-              </a:defRPr>
-            </a:defPPr>
-            <a:lvl1pPr>
-              <a:defRPr sz="2550" b="1">
-                <a:solidFill>
-                  <a:srgbClr val="E4572E"/>
-                </a:solidFill>
-                <a:latin typeface="Calibri"/>
-                <a:ea typeface="Calibri"/>
-                <a:cs typeface="Calibri"/>
-              </a:defRPr>
-            </a:lvl1pPr>
-            <a:lvl2pPr>
-              <a:defRPr sz="2550" b="1">
-                <a:solidFill>
-                  <a:srgbClr val="E4572E"/>
-                </a:solidFill>
-                <a:latin typeface="Calibri"/>
-                <a:ea typeface="Calibri"/>
-                <a:cs typeface="Calibri"/>
-              </a:defRPr>
-            </a:lvl2pPr>
-            <a:lvl3pPr>
-              <a:defRPr sz="2550" b="1">
-                <a:solidFill>
-                  <a:srgbClr val="E4572E"/>
-                </a:solidFill>
-                <a:latin typeface="Calibri"/>
-                <a:ea typeface="Calibri"/>
-                <a:cs typeface="Calibri"/>
-              </a:defRPr>
-            </a:lvl3pPr>
-            <a:lvl4pPr>
-              <a:defRPr sz="2550" b="1">
-                <a:solidFill>
-                  <a:srgbClr val="E4572E"/>
-                </a:solidFill>
-                <a:latin typeface="Calibri"/>
-                <a:ea typeface="Calibri"/>
-                <a:cs typeface="Calibri"/>
-              </a:defRPr>
-            </a:lvl4pPr>
-            <a:lvl5pPr>
-              <a:defRPr sz="2550" b="1">
-                <a:solidFill>
-                  <a:srgbClr val="E4572E"/>
-                </a:solidFill>
-                <a:latin typeface="Calibri"/>
-                <a:ea typeface="Calibri"/>
-                <a:cs typeface="Calibri"/>
-              </a:defRPr>
-            </a:lvl5pPr>
-            <a:lvl6pPr>
-              <a:defRPr sz="2550" b="1">
-                <a:solidFill>
-                  <a:srgbClr val="E4572E"/>
-                </a:solidFill>
-                <a:latin typeface="Calibri"/>
-                <a:ea typeface="Calibri"/>
-                <a:cs typeface="Calibri"/>
-              </a:defRPr>
-            </a:lvl6pPr>
-            <a:lvl7pPr>
-              <a:defRPr sz="2550" b="1">
-                <a:solidFill>
-                  <a:srgbClr val="E4572E"/>
-                </a:solidFill>
-                <a:latin typeface="Calibri"/>
-                <a:ea typeface="Calibri"/>
-                <a:cs typeface="Calibri"/>
-              </a:defRPr>
-            </a:lvl7pPr>
-            <a:lvl8pPr>
-              <a:defRPr sz="2550" b="1">
-                <a:solidFill>
-                  <a:srgbClr val="E4572E"/>
-                </a:solidFill>
-                <a:latin typeface="Calibri"/>
-                <a:ea typeface="Calibri"/>
-                <a:cs typeface="Calibri"/>
-              </a:defRPr>
-            </a:lvl8pPr>
-            <a:lvl9pPr>
-              <a:defRPr sz="2550" b="1">
-                <a:solidFill>
-                  <a:srgbClr val="E4572E"/>
-                </a:solidFill>
-                <a:latin typeface="Calibri"/>
-                <a:ea typeface="Calibri"/>
-                <a:cs typeface="Calibri"/>
-              </a:defRPr>
-            </a:lvl9pPr>
-          </a:lstStyle>
-          <a:p xmlns:a="http://schemas.openxmlformats.org/drawingml/2006/main">
+          <a:lstStyle/>
+          <a:p>
             <a:pPr>
-              <a:defRPr sz="2550" b="1">
-                <a:solidFill>
-                  <a:srgbClr val="E4572E"/>
-                </a:solidFill>
-                <a:latin typeface="Calibri"/>
-                <a:ea typeface="Calibri"/>
-                <a:cs typeface="Calibri"/>
-              </a:defRPr>
+              <a:spcAft>
+                <a:spcPts val="0"/>
+              </a:spcAft>
             </a:pPr>
             <a:r>
-              <a:rPr sz="2550" b="1">
-                <a:solidFill>
-                  <a:srgbClr val="E4572E"/>
-                </a:solidFill>
-                <a:latin typeface="Calibri"/>
-                <a:ea typeface="Calibri"/>
-                <a:cs typeface="Calibri"/>
-              </a:rPr>
-              <a:t>03</a:t>
+              <a:rPr sz="2100" b="1">
+                <a:solidFill>
+                  <a:srgbClr val="1C3144"/>
+                </a:solidFill>
+                <a:latin typeface="Calibri"/>
+              </a:rPr>
+              <a:t>Week 12 form (5 questions)</a:t>
             </a:r>
           </a:p>
         </p:txBody>
       </p:sp>
       <p:sp>
         <p:nvSpPr>
-          <p:cNvPr id="9" name="">
-            <a:extLst xmlns:a="http://schemas.openxmlformats.org/drawingml/2006/main">
-              <a:ext uri="{FF2B5EF4-FFF2-40B4-BE49-F238E27FC236}">
-                <a16:creationId xmlns:a16="http://schemas.microsoft.com/office/drawing/2014/main" id="{50FF0028-D19E-4E1B-8149-247630A8745F}"/>
-              </a:ext>
-            </a:extLst>
-          </p:cNvPr>
-          <p:cNvSpPr>
-            <a:spLocks xmlns:a="http://schemas.openxmlformats.org/drawingml/2006/main" noGrp="1"/>
-          </p:cNvSpPr>
+          <p:cNvPr id="10" name="TextBox 9"/>
+          <p:cNvSpPr txBox="1"/>
           <p:nvPr/>
         </p:nvSpPr>
         <p:spPr>
-          <a:xfrm xmlns:a="http://schemas.openxmlformats.org/drawingml/2006/main">
-            <a:off x="1381125" y="3319463"/>
-            <a:ext cx="7143750" cy="721519"/>
+          <a:xfrm>
+            <a:off x="1422400" y="3225800"/>
+            <a:ext cx="10160000" cy="381000"/>
           </a:xfrm>
-          <a:prstGeom xmlns:a="http://schemas.openxmlformats.org/drawingml/2006/main" prst="rect">
+          <a:prstGeom prst="rect">
             <a:avLst/>
           </a:prstGeom>
-          <a:noFill xmlns:a="http://schemas.openxmlformats.org/drawingml/2006/main"/>
-          <a:ln xmlns:a="http://schemas.openxmlformats.org/drawingml/2006/main" w="0">
-            <a:noFill/>
-          </a:ln>
+          <a:noFill/>
         </p:spPr>
         <p:txBody>
-          <a:bodyPr xmlns:a="http://schemas.openxmlformats.org/drawingml/2006/main">
-            <a:noAutofit/>
+          <a:bodyPr wrap="none">
+            <a:spAutoFit/>
           </a:bodyPr>
-          <a:lstStyle xmlns:a="http://schemas.openxmlformats.org/drawingml/2006/main">
-            <a:defPPr>
-              <a:defRPr sz="2250" b="0">
-                <a:solidFill>
-                  <a:srgbClr val="1C3144"/>
-                </a:solidFill>
-                <a:latin typeface="Calibri"/>
-                <a:ea typeface="Calibri"/>
-                <a:cs typeface="Calibri"/>
-              </a:defRPr>
-            </a:defPPr>
-            <a:lvl1pPr>
-              <a:defRPr sz="2250" b="0">
-                <a:solidFill>
-                  <a:srgbClr val="1C3144"/>
-                </a:solidFill>
-                <a:latin typeface="Calibri"/>
-                <a:ea typeface="Calibri"/>
-                <a:cs typeface="Calibri"/>
-              </a:defRPr>
-            </a:lvl1pPr>
-            <a:lvl2pPr>
-              <a:defRPr sz="2250" b="0">
-                <a:solidFill>
-                  <a:srgbClr val="1C3144"/>
-                </a:solidFill>
-                <a:latin typeface="Calibri"/>
-                <a:ea typeface="Calibri"/>
-                <a:cs typeface="Calibri"/>
-              </a:defRPr>
-            </a:lvl2pPr>
-            <a:lvl3pPr>
-              <a:defRPr sz="2250" b="0">
-                <a:solidFill>
-                  <a:srgbClr val="1C3144"/>
-                </a:solidFill>
-                <a:latin typeface="Calibri"/>
-                <a:ea typeface="Calibri"/>
-                <a:cs typeface="Calibri"/>
-              </a:defRPr>
-            </a:lvl3pPr>
-            <a:lvl4pPr>
-              <a:defRPr sz="2250" b="0">
-                <a:solidFill>
-                  <a:srgbClr val="1C3144"/>
-                </a:solidFill>
-                <a:latin typeface="Calibri"/>
-                <a:ea typeface="Calibri"/>
-                <a:cs typeface="Calibri"/>
-              </a:defRPr>
-            </a:lvl4pPr>
-            <a:lvl5pPr>
-              <a:defRPr sz="2250" b="0">
-                <a:solidFill>
-                  <a:srgbClr val="1C3144"/>
-                </a:solidFill>
-                <a:latin typeface="Calibri"/>
-                <a:ea typeface="Calibri"/>
-                <a:cs typeface="Calibri"/>
-              </a:defRPr>
-            </a:lvl5pPr>
-            <a:lvl6pPr>
-              <a:defRPr sz="2250" b="0">
-                <a:solidFill>
-                  <a:srgbClr val="1C3144"/>
-                </a:solidFill>
-                <a:latin typeface="Calibri"/>
-                <a:ea typeface="Calibri"/>
-                <a:cs typeface="Calibri"/>
-              </a:defRPr>
-            </a:lvl6pPr>
-            <a:lvl7pPr>
-              <a:defRPr sz="2250" b="0">
-                <a:solidFill>
-                  <a:srgbClr val="1C3144"/>
-                </a:solidFill>
-                <a:latin typeface="Calibri"/>
-                <a:ea typeface="Calibri"/>
-                <a:cs typeface="Calibri"/>
-              </a:defRPr>
-            </a:lvl7pPr>
-            <a:lvl8pPr>
-              <a:defRPr sz="2250" b="0">
-                <a:solidFill>
-                  <a:srgbClr val="1C3144"/>
-                </a:solidFill>
-                <a:latin typeface="Calibri"/>
-                <a:ea typeface="Calibri"/>
-                <a:cs typeface="Calibri"/>
-              </a:defRPr>
-            </a:lvl8pPr>
-            <a:lvl9pPr>
-              <a:defRPr sz="2250" b="0">
-                <a:solidFill>
-                  <a:srgbClr val="1C3144"/>
-                </a:solidFill>
-                <a:latin typeface="Calibri"/>
-                <a:ea typeface="Calibri"/>
-                <a:cs typeface="Calibri"/>
-              </a:defRPr>
-            </a:lvl9pPr>
-          </a:lstStyle>
-          <a:p xmlns:a="http://schemas.openxmlformats.org/drawingml/2006/main">
-            <a:pPr>
-              <a:defRPr sz="2250" b="0">
-                <a:solidFill>
-                  <a:srgbClr val="1C3144"/>
-                </a:solidFill>
-                <a:latin typeface="Calibri"/>
-                <a:ea typeface="Calibri"/>
-                <a:cs typeface="Calibri"/>
-              </a:defRPr>
-            </a:pPr>
-            <a:r>
-              <a:rPr sz="2250" b="0">
-                <a:solidFill>
-                  <a:srgbClr val="1C3144"/>
-                </a:solidFill>
-                <a:latin typeface="Calibri"/>
-                <a:ea typeface="Calibri"/>
-                <a:cs typeface="Calibri"/>
-              </a:rPr>
-              <a:t>Use your Student Registration Number and registered account.</a:t>
+          <a:lstStyle/>
+          <a:p>
+            <a:r>
+              <a:rPr sz="1900" u="sng">
+                <a:solidFill>
+                  <a:srgbClr val="2E7D6F"/>
+                </a:solidFill>
+                <a:latin typeface="Calibri"/>
+                <a:hlinkClick r:id="rId3"/>
+              </a:rPr>
+              <a:t>Open the Week 12 quiz form</a:t>
             </a:r>
           </a:p>
         </p:txBody>
       </p:sp>
       <p:sp>
         <p:nvSpPr>
-          <p:cNvPr id="10" name="">
-            <a:extLst xmlns:a="http://schemas.openxmlformats.org/drawingml/2006/main">
-              <a:ext uri="{FF2B5EF4-FFF2-40B4-BE49-F238E27FC236}">
-                <a16:creationId xmlns:a16="http://schemas.microsoft.com/office/drawing/2014/main" id="{1E606DF3-07DC-4282-BCE2-46B53ECAAA8C}"/>
-              </a:ext>
-            </a:extLst>
-          </p:cNvPr>
-          <p:cNvSpPr>
-            <a:spLocks xmlns:a="http://schemas.openxmlformats.org/drawingml/2006/main" noGrp="1"/>
-          </p:cNvSpPr>
+          <p:cNvPr id="11" name="TextBox 10"/>
+          <p:cNvSpPr txBox="1"/>
           <p:nvPr/>
         </p:nvSpPr>
         <p:spPr>
-          <a:xfrm xmlns:a="http://schemas.openxmlformats.org/drawingml/2006/main">
-            <a:off x="590550" y="4117181"/>
-            <a:ext cx="619125" cy="571500"/>
+          <a:xfrm>
+            <a:off x="584200" y="3911600"/>
+            <a:ext cx="762000" cy="508000"/>
           </a:xfrm>
-          <a:prstGeom xmlns:a="http://schemas.openxmlformats.org/drawingml/2006/main" prst="rect">
+          <a:prstGeom prst="rect">
             <a:avLst/>
           </a:prstGeom>
-          <a:noFill xmlns:a="http://schemas.openxmlformats.org/drawingml/2006/main"/>
-          <a:ln xmlns:a="http://schemas.openxmlformats.org/drawingml/2006/main" w="0">
-            <a:noFill/>
-          </a:ln>
+          <a:noFill/>
         </p:spPr>
         <p:txBody>
-          <a:bodyPr xmlns:a="http://schemas.openxmlformats.org/drawingml/2006/main">
-            <a:noAutofit/>
+          <a:bodyPr wrap="square">
+            <a:spAutoFit/>
           </a:bodyPr>
-          <a:lstStyle xmlns:a="http://schemas.openxmlformats.org/drawingml/2006/main">
-            <a:defPPr>
-              <a:defRPr sz="2550" b="1">
-                <a:solidFill>
-                  <a:srgbClr val="E4572E"/>
-                </a:solidFill>
-                <a:latin typeface="Calibri"/>
-                <a:ea typeface="Calibri"/>
-                <a:cs typeface="Calibri"/>
-              </a:defRPr>
-            </a:defPPr>
-            <a:lvl1pPr>
-              <a:defRPr sz="2550" b="1">
-                <a:solidFill>
-                  <a:srgbClr val="E4572E"/>
-                </a:solidFill>
-                <a:latin typeface="Calibri"/>
-                <a:ea typeface="Calibri"/>
-                <a:cs typeface="Calibri"/>
-              </a:defRPr>
-            </a:lvl1pPr>
-            <a:lvl2pPr>
-              <a:defRPr sz="2550" b="1">
-                <a:solidFill>
-                  <a:srgbClr val="E4572E"/>
-                </a:solidFill>
-                <a:latin typeface="Calibri"/>
-                <a:ea typeface="Calibri"/>
-                <a:cs typeface="Calibri"/>
-              </a:defRPr>
-            </a:lvl2pPr>
-            <a:lvl3pPr>
-              <a:defRPr sz="2550" b="1">
-                <a:solidFill>
-                  <a:srgbClr val="E4572E"/>
-                </a:solidFill>
-                <a:latin typeface="Calibri"/>
-                <a:ea typeface="Calibri"/>
-                <a:cs typeface="Calibri"/>
-              </a:defRPr>
-            </a:lvl3pPr>
-            <a:lvl4pPr>
-              <a:defRPr sz="2550" b="1">
-                <a:solidFill>
-                  <a:srgbClr val="E4572E"/>
-                </a:solidFill>
-                <a:latin typeface="Calibri"/>
-                <a:ea typeface="Calibri"/>
-                <a:cs typeface="Calibri"/>
-              </a:defRPr>
-            </a:lvl4pPr>
-            <a:lvl5pPr>
-              <a:defRPr sz="2550" b="1">
-                <a:solidFill>
-                  <a:srgbClr val="E4572E"/>
-                </a:solidFill>
-                <a:latin typeface="Calibri"/>
-                <a:ea typeface="Calibri"/>
-                <a:cs typeface="Calibri"/>
-              </a:defRPr>
-            </a:lvl5pPr>
-            <a:lvl6pPr>
-              <a:defRPr sz="2550" b="1">
-                <a:solidFill>
-                  <a:srgbClr val="E4572E"/>
-                </a:solidFill>
-                <a:latin typeface="Calibri"/>
-                <a:ea typeface="Calibri"/>
-                <a:cs typeface="Calibri"/>
-              </a:defRPr>
-            </a:lvl6pPr>
-            <a:lvl7pPr>
-              <a:defRPr sz="2550" b="1">
-                <a:solidFill>
-                  <a:srgbClr val="E4572E"/>
-                </a:solidFill>
-                <a:latin typeface="Calibri"/>
-                <a:ea typeface="Calibri"/>
-                <a:cs typeface="Calibri"/>
-              </a:defRPr>
-            </a:lvl7pPr>
-            <a:lvl8pPr>
-              <a:defRPr sz="2550" b="1">
-                <a:solidFill>
-                  <a:srgbClr val="E4572E"/>
-                </a:solidFill>
-                <a:latin typeface="Calibri"/>
-                <a:ea typeface="Calibri"/>
-                <a:cs typeface="Calibri"/>
-              </a:defRPr>
-            </a:lvl8pPr>
-            <a:lvl9pPr>
-              <a:defRPr sz="2550" b="1">
-                <a:solidFill>
-                  <a:srgbClr val="E4572E"/>
-                </a:solidFill>
-                <a:latin typeface="Calibri"/>
-                <a:ea typeface="Calibri"/>
-                <a:cs typeface="Calibri"/>
-              </a:defRPr>
-            </a:lvl9pPr>
-          </a:lstStyle>
-          <a:p xmlns:a="http://schemas.openxmlformats.org/drawingml/2006/main">
+          <a:lstStyle/>
+          <a:p>
             <a:pPr>
-              <a:defRPr sz="2550" b="1">
-                <a:solidFill>
-                  <a:srgbClr val="E4572E"/>
-                </a:solidFill>
-                <a:latin typeface="Calibri"/>
-                <a:ea typeface="Calibri"/>
-                <a:cs typeface="Calibri"/>
-              </a:defRPr>
+              <a:spcAft>
+                <a:spcPts val="0"/>
+              </a:spcAft>
             </a:pPr>
             <a:r>
-              <a:rPr sz="2550" b="1">
-                <a:solidFill>
-                  <a:srgbClr val="E4572E"/>
-                </a:solidFill>
-                <a:latin typeface="Calibri"/>
-                <a:ea typeface="Calibri"/>
-                <a:cs typeface="Calibri"/>
-              </a:rPr>
-              <a:t>04</a:t>
+              <a:rPr sz="3000" b="1">
+                <a:solidFill>
+                  <a:srgbClr val="E4572E"/>
+                </a:solidFill>
+                <a:latin typeface="Calibri"/>
+              </a:rPr>
+              <a:t>03</a:t>
             </a:r>
           </a:p>
         </p:txBody>
       </p:sp>
       <p:sp>
         <p:nvSpPr>
-          <p:cNvPr id="11" name="">
-            <a:extLst xmlns:a="http://schemas.openxmlformats.org/drawingml/2006/main">
-              <a:ext uri="{FF2B5EF4-FFF2-40B4-BE49-F238E27FC236}">
-                <a16:creationId xmlns:a16="http://schemas.microsoft.com/office/drawing/2014/main" id="{A8166936-C41B-447D-BA02-7C9ED72D8130}"/>
-              </a:ext>
-            </a:extLst>
-          </p:cNvPr>
-          <p:cNvSpPr>
-            <a:spLocks xmlns:a="http://schemas.openxmlformats.org/drawingml/2006/main" noGrp="1"/>
-          </p:cNvSpPr>
+          <p:cNvPr id="12" name="TextBox 11"/>
+          <p:cNvSpPr txBox="1"/>
           <p:nvPr/>
         </p:nvSpPr>
         <p:spPr>
-          <a:xfrm xmlns:a="http://schemas.openxmlformats.org/drawingml/2006/main">
-            <a:off x="1381125" y="4117181"/>
-            <a:ext cx="7143750" cy="721519"/>
+          <a:xfrm>
+            <a:off x="1422400" y="3937000"/>
+            <a:ext cx="10160000" cy="381000"/>
           </a:xfrm>
-          <a:prstGeom xmlns:a="http://schemas.openxmlformats.org/drawingml/2006/main" prst="rect">
+          <a:prstGeom prst="rect">
             <a:avLst/>
           </a:prstGeom>
-          <a:noFill xmlns:a="http://schemas.openxmlformats.org/drawingml/2006/main"/>
-          <a:ln xmlns:a="http://schemas.openxmlformats.org/drawingml/2006/main" w="0">
-            <a:noFill/>
-          </a:ln>
+          <a:noFill/>
         </p:spPr>
         <p:txBody>
-          <a:bodyPr xmlns:a="http://schemas.openxmlformats.org/drawingml/2006/main">
-            <a:noAutofit/>
+          <a:bodyPr wrap="square">
+            <a:spAutoFit/>
           </a:bodyPr>
-          <a:lstStyle xmlns:a="http://schemas.openxmlformats.org/drawingml/2006/main">
-            <a:defPPr>
-              <a:defRPr sz="2250" b="0">
-                <a:solidFill>
-                  <a:srgbClr val="1C3144"/>
-                </a:solidFill>
-                <a:latin typeface="Calibri"/>
-                <a:ea typeface="Calibri"/>
-                <a:cs typeface="Calibri"/>
-              </a:defRPr>
-            </a:defPPr>
-            <a:lvl1pPr>
-              <a:defRPr sz="2250" b="0">
-                <a:solidFill>
-                  <a:srgbClr val="1C3144"/>
-                </a:solidFill>
-                <a:latin typeface="Calibri"/>
-                <a:ea typeface="Calibri"/>
-                <a:cs typeface="Calibri"/>
-              </a:defRPr>
-            </a:lvl1pPr>
-            <a:lvl2pPr>
-              <a:defRPr sz="2250" b="0">
-                <a:solidFill>
-                  <a:srgbClr val="1C3144"/>
-                </a:solidFill>
-                <a:latin typeface="Calibri"/>
-                <a:ea typeface="Calibri"/>
-                <a:cs typeface="Calibri"/>
-              </a:defRPr>
-            </a:lvl2pPr>
-            <a:lvl3pPr>
-              <a:defRPr sz="2250" b="0">
-                <a:solidFill>
-                  <a:srgbClr val="1C3144"/>
-                </a:solidFill>
-                <a:latin typeface="Calibri"/>
-                <a:ea typeface="Calibri"/>
-                <a:cs typeface="Calibri"/>
-              </a:defRPr>
-            </a:lvl3pPr>
-            <a:lvl4pPr>
-              <a:defRPr sz="2250" b="0">
-                <a:solidFill>
-                  <a:srgbClr val="1C3144"/>
-                </a:solidFill>
-                <a:latin typeface="Calibri"/>
-                <a:ea typeface="Calibri"/>
-                <a:cs typeface="Calibri"/>
-              </a:defRPr>
-            </a:lvl4pPr>
-            <a:lvl5pPr>
-              <a:defRPr sz="2250" b="0">
-                <a:solidFill>
-                  <a:srgbClr val="1C3144"/>
-                </a:solidFill>
-                <a:latin typeface="Calibri"/>
-                <a:ea typeface="Calibri"/>
-                <a:cs typeface="Calibri"/>
-              </a:defRPr>
-            </a:lvl5pPr>
-            <a:lvl6pPr>
-              <a:defRPr sz="2250" b="0">
-                <a:solidFill>
-                  <a:srgbClr val="1C3144"/>
-                </a:solidFill>
-                <a:latin typeface="Calibri"/>
-                <a:ea typeface="Calibri"/>
-                <a:cs typeface="Calibri"/>
-              </a:defRPr>
-            </a:lvl6pPr>
-            <a:lvl7pPr>
-              <a:defRPr sz="2250" b="0">
-                <a:solidFill>
-                  <a:srgbClr val="1C3144"/>
-                </a:solidFill>
-                <a:latin typeface="Calibri"/>
-                <a:ea typeface="Calibri"/>
-                <a:cs typeface="Calibri"/>
-              </a:defRPr>
-            </a:lvl7pPr>
-            <a:lvl8pPr>
-              <a:defRPr sz="2250" b="0">
-                <a:solidFill>
-                  <a:srgbClr val="1C3144"/>
-                </a:solidFill>
-                <a:latin typeface="Calibri"/>
-                <a:ea typeface="Calibri"/>
-                <a:cs typeface="Calibri"/>
-              </a:defRPr>
-            </a:lvl8pPr>
-            <a:lvl9pPr>
-              <a:defRPr sz="2250" b="0">
-                <a:solidFill>
-                  <a:srgbClr val="1C3144"/>
-                </a:solidFill>
-                <a:latin typeface="Calibri"/>
-                <a:ea typeface="Calibri"/>
-                <a:cs typeface="Calibri"/>
-              </a:defRPr>
-            </a:lvl9pPr>
-          </a:lstStyle>
-          <a:p xmlns:a="http://schemas.openxmlformats.org/drawingml/2006/main">
+          <a:lstStyle/>
+          <a:p>
             <a:pPr>
-              <a:defRPr sz="2250" b="0">
-                <a:solidFill>
-                  <a:srgbClr val="1C3144"/>
-                </a:solidFill>
-                <a:latin typeface="Calibri"/>
-                <a:ea typeface="Calibri"/>
-                <a:cs typeface="Calibri"/>
-              </a:defRPr>
+              <a:spcAft>
+                <a:spcPts val="0"/>
+              </a:spcAft>
             </a:pPr>
             <a:r>
-              <a:rPr sz="2250" b="0">
-                <a:solidFill>
-                  <a:srgbClr val="1C3144"/>
-                </a:solidFill>
-                <a:latin typeface="Calibri"/>
-                <a:ea typeface="Calibri"/>
-                <a:cs typeface="Calibri"/>
-              </a:rPr>
-              <a:t>Check the announced quiz closing time.</a:t>
-            </a:r>
-          </a:p>
-        </p:txBody>
-      </p:sp>
-      <p:pic>
-        <p:nvPicPr>
-          <p:cNvPr id="12" name="">
-            <a:extLst xmlns:a="http://schemas.openxmlformats.org/drawingml/2006/main">
-              <a:ext uri="{FF2B5EF4-FFF2-40B4-BE49-F238E27FC236}">
-                <a16:creationId xmlns:a16="http://schemas.microsoft.com/office/drawing/2014/main" id="{204612D1-0AEF-4D00-B662-D6B63D26E240}"/>
-              </a:ext>
-            </a:extLst>
-          </p:cNvPr>
-          <p:cNvPicPr>
-            <a:picLocks xmlns:a="http://schemas.openxmlformats.org/drawingml/2006/main" noChangeAspect="1"/>
-          </p:cNvPicPr>
-          <p:nvPr/>
-        </p:nvPicPr>
-        <p:blipFill>
-          <a:blip xmlns:r="http://schemas.openxmlformats.org/officeDocument/2006/relationships" xmlns:a="http://schemas.openxmlformats.org/drawingml/2006/main" r:embed="R1b63554f02df4103"/>
-          <a:stretch xmlns:a="http://schemas.openxmlformats.org/drawingml/2006/main"/>
-        </p:blipFill>
-        <p:spPr>
-          <a:xfrm xmlns:a="http://schemas.openxmlformats.org/drawingml/2006/main">
-            <a:off x="9134475" y="2095500"/>
-            <a:ext cx="2190750" cy="2190750"/>
-          </a:xfrm>
-          <a:prstGeom xmlns:a="http://schemas.openxmlformats.org/drawingml/2006/main" prst="rect">
-            <a:avLst/>
-          </a:prstGeom>
-        </p:spPr>
-      </p:pic>
-      <p:sp>
-        <p:nvSpPr>
-          <p:cNvPr id="13" name="">
-            <a:extLst xmlns:a="http://schemas.openxmlformats.org/drawingml/2006/main">
-              <a:ext uri="{FF2B5EF4-FFF2-40B4-BE49-F238E27FC236}">
-                <a16:creationId xmlns:a16="http://schemas.microsoft.com/office/drawing/2014/main" id="{2A6A6985-E4A3-440C-9473-966DE0FDE667}"/>
-              </a:ext>
-            </a:extLst>
-          </p:cNvPr>
-          <p:cNvSpPr>
-            <a:spLocks xmlns:a="http://schemas.openxmlformats.org/drawingml/2006/main" noGrp="1"/>
-          </p:cNvSpPr>
-          <p:nvPr/>
-        </p:nvSpPr>
-        <p:spPr>
-          <a:xfrm xmlns:a="http://schemas.openxmlformats.org/drawingml/2006/main">
-            <a:off x="9239250" y="4400550"/>
-            <a:ext cx="2190750" cy="381000"/>
-          </a:xfrm>
-          <a:prstGeom xmlns:a="http://schemas.openxmlformats.org/drawingml/2006/main" prst="rect">
-            <a:avLst/>
-          </a:prstGeom>
-          <a:noFill xmlns:a="http://schemas.openxmlformats.org/drawingml/2006/main"/>
-          <a:ln xmlns:a="http://schemas.openxmlformats.org/drawingml/2006/main" w="0">
-            <a:noFill/>
-          </a:ln>
-        </p:spPr>
-        <p:txBody>
-          <a:bodyPr xmlns:a="http://schemas.openxmlformats.org/drawingml/2006/main">
-            <a:noAutofit/>
-          </a:bodyPr>
-          <a:lstStyle xmlns:a="http://schemas.openxmlformats.org/drawingml/2006/main">
-            <a:defPPr>
-              <a:defRPr sz="2100" b="1">
-                <a:solidFill>
-                  <a:srgbClr val="E4572E"/>
-                </a:solidFill>
-                <a:latin typeface="Calibri"/>
-                <a:ea typeface="Calibri"/>
-                <a:cs typeface="Calibri"/>
-              </a:defRPr>
-            </a:defPPr>
-            <a:lvl1pPr>
-              <a:defRPr sz="2100" b="1">
-                <a:solidFill>
-                  <a:srgbClr val="E4572E"/>
-                </a:solidFill>
-                <a:latin typeface="Calibri"/>
-                <a:ea typeface="Calibri"/>
-                <a:cs typeface="Calibri"/>
-              </a:defRPr>
-            </a:lvl1pPr>
-            <a:lvl2pPr>
-              <a:defRPr sz="2100" b="1">
-                <a:solidFill>
-                  <a:srgbClr val="E4572E"/>
-                </a:solidFill>
-                <a:latin typeface="Calibri"/>
-                <a:ea typeface="Calibri"/>
-                <a:cs typeface="Calibri"/>
-              </a:defRPr>
-            </a:lvl2pPr>
-            <a:lvl3pPr>
-              <a:defRPr sz="2100" b="1">
-                <a:solidFill>
-                  <a:srgbClr val="E4572E"/>
-                </a:solidFill>
-                <a:latin typeface="Calibri"/>
-                <a:ea typeface="Calibri"/>
-                <a:cs typeface="Calibri"/>
-              </a:defRPr>
-            </a:lvl3pPr>
-            <a:lvl4pPr>
-              <a:defRPr sz="2100" b="1">
-                <a:solidFill>
-                  <a:srgbClr val="E4572E"/>
-                </a:solidFill>
-                <a:latin typeface="Calibri"/>
-                <a:ea typeface="Calibri"/>
-                <a:cs typeface="Calibri"/>
-              </a:defRPr>
-            </a:lvl4pPr>
-            <a:lvl5pPr>
-              <a:defRPr sz="2100" b="1">
-                <a:solidFill>
-                  <a:srgbClr val="E4572E"/>
-                </a:solidFill>
-                <a:latin typeface="Calibri"/>
-                <a:ea typeface="Calibri"/>
-                <a:cs typeface="Calibri"/>
-              </a:defRPr>
-            </a:lvl5pPr>
-            <a:lvl6pPr>
-              <a:defRPr sz="2100" b="1">
-                <a:solidFill>
-                  <a:srgbClr val="E4572E"/>
-                </a:solidFill>
-                <a:latin typeface="Calibri"/>
-                <a:ea typeface="Calibri"/>
-                <a:cs typeface="Calibri"/>
-              </a:defRPr>
-            </a:lvl6pPr>
-            <a:lvl7pPr>
-              <a:defRPr sz="2100" b="1">
-                <a:solidFill>
-                  <a:srgbClr val="E4572E"/>
-                </a:solidFill>
-                <a:latin typeface="Calibri"/>
-                <a:ea typeface="Calibri"/>
-                <a:cs typeface="Calibri"/>
-              </a:defRPr>
-            </a:lvl7pPr>
-            <a:lvl8pPr>
-              <a:defRPr sz="2100" b="1">
-                <a:solidFill>
-                  <a:srgbClr val="E4572E"/>
-                </a:solidFill>
-                <a:latin typeface="Calibri"/>
-                <a:ea typeface="Calibri"/>
-                <a:cs typeface="Calibri"/>
-              </a:defRPr>
-            </a:lvl8pPr>
-            <a:lvl9pPr>
-              <a:defRPr sz="2100" b="1">
-                <a:solidFill>
-                  <a:srgbClr val="E4572E"/>
-                </a:solidFill>
-                <a:latin typeface="Calibri"/>
-                <a:ea typeface="Calibri"/>
-                <a:cs typeface="Calibri"/>
-              </a:defRPr>
-            </a:lvl9pPr>
-          </a:lstStyle>
-          <a:p xmlns:a="http://schemas.openxmlformats.org/drawingml/2006/main">
-            <a:pPr>
-              <a:defRPr sz="2100" b="1">
-                <a:solidFill>
-                  <a:srgbClr val="E4572E"/>
-                </a:solidFill>
-                <a:latin typeface="Calibri"/>
-                <a:ea typeface="Calibri"/>
-                <a:cs typeface="Calibri"/>
-              </a:defRPr>
-            </a:pPr>
-            <a:r>
               <a:rPr sz="2100" b="1">
                 <a:solidFill>
-                  <a:srgbClr val="E4572E"/>
-                </a:solidFill>
-                <a:latin typeface="Calibri"/>
-                <a:ea typeface="Calibri"/>
-                <a:cs typeface="Calibri"/>
-              </a:rPr>
-              <a:t>24 HOURS</a:t>
+                  <a:srgbClr val="1C3144"/>
+                </a:solidFill>
+                <a:latin typeface="Calibri"/>
+              </a:rPr>
+              <a:t>Week 13 form (5 questions)</a:t>
             </a:r>
           </a:p>
         </p:txBody>
       </p:sp>
       <p:sp>
         <p:nvSpPr>
-          <p:cNvPr id="14" name="">
-            <a:extLst xmlns:a="http://schemas.openxmlformats.org/drawingml/2006/main">
-              <a:ext uri="{FF2B5EF4-FFF2-40B4-BE49-F238E27FC236}">
-                <a16:creationId xmlns:a16="http://schemas.microsoft.com/office/drawing/2014/main" id="{30C1175B-68EF-40C5-8BF5-B24B68CF856E}"/>
-              </a:ext>
-            </a:extLst>
-          </p:cNvPr>
-          <p:cNvSpPr>
-            <a:spLocks xmlns:a="http://schemas.openxmlformats.org/drawingml/2006/main" noGrp="1"/>
-          </p:cNvSpPr>
+          <p:cNvPr id="13" name="TextBox 12"/>
+          <p:cNvSpPr txBox="1"/>
           <p:nvPr/>
         </p:nvSpPr>
         <p:spPr>
-          <a:xfrm xmlns:a="http://schemas.openxmlformats.org/drawingml/2006/main">
-            <a:off x="590550" y="5143500"/>
-            <a:ext cx="11010900" cy="657225"/>
+          <a:xfrm>
+            <a:off x="1422400" y="4343400"/>
+            <a:ext cx="10160000" cy="381000"/>
           </a:xfrm>
-          <a:prstGeom xmlns:a="http://schemas.openxmlformats.org/drawingml/2006/main" prst="rect">
+          <a:prstGeom prst="rect">
             <a:avLst/>
           </a:prstGeom>
-          <a:solidFill xmlns:a="http://schemas.openxmlformats.org/drawingml/2006/main">
-            <a:srgbClr val="E5F1EE"/>
-          </a:solidFill>
-          <a:ln xmlns:a="http://schemas.openxmlformats.org/drawingml/2006/main" w="0">
-            <a:noFill/>
-          </a:ln>
+          <a:noFill/>
         </p:spPr>
-        <p:txBody xmlns:a="http://schemas.openxmlformats.org/drawingml/2006/main">
-          <a:bodyPr/>
-          <a:p/>
+        <p:txBody>
+          <a:bodyPr wrap="none">
+            <a:spAutoFit/>
+          </a:bodyPr>
+          <a:lstStyle/>
+          <a:p>
+            <a:r>
+              <a:rPr sz="1900" u="sng">
+                <a:solidFill>
+                  <a:srgbClr val="2E7D6F"/>
+                </a:solidFill>
+                <a:latin typeface="Calibri"/>
+                <a:hlinkClick r:id="rId4"/>
+              </a:rPr>
+              <a:t>Open the Week 13 quiz form</a:t>
+            </a:r>
+          </a:p>
         </p:txBody>
       </p:sp>
       <p:sp>
         <p:nvSpPr>
-          <p:cNvPr id="15" name="">
-            <a:extLst xmlns:a="http://schemas.openxmlformats.org/drawingml/2006/main">
-              <a:ext uri="{FF2B5EF4-FFF2-40B4-BE49-F238E27FC236}">
-                <a16:creationId xmlns:a16="http://schemas.microsoft.com/office/drawing/2014/main" id="{6781C475-B4FB-41AA-9E08-271C81544C91}"/>
-              </a:ext>
-            </a:extLst>
-          </p:cNvPr>
-          <p:cNvSpPr>
-            <a:spLocks xmlns:a="http://schemas.openxmlformats.org/drawingml/2006/main" noGrp="1"/>
-          </p:cNvSpPr>
+          <p:cNvPr id="14" name="Rectangle 13"/>
+          <p:cNvSpPr/>
           <p:nvPr/>
         </p:nvSpPr>
         <p:spPr>
-          <a:xfrm xmlns:a="http://schemas.openxmlformats.org/drawingml/2006/main">
-            <a:off x="800100" y="5267325"/>
-            <a:ext cx="10572750" cy="457200"/>
+          <a:xfrm>
+            <a:off x="0" y="5461000"/>
+            <a:ext cx="12192000" cy="939800"/>
           </a:xfrm>
-          <a:prstGeom xmlns:a="http://schemas.openxmlformats.org/drawingml/2006/main" prst="rect">
+          <a:prstGeom prst="rect">
             <a:avLst/>
           </a:prstGeom>
-          <a:noFill xmlns:a="http://schemas.openxmlformats.org/drawingml/2006/main"/>
-          <a:ln xmlns:a="http://schemas.openxmlformats.org/drawingml/2006/main" w="0">
+          <a:solidFill>
+            <a:srgbClr val="E5F1EE"/>
+          </a:solidFill>
+          <a:ln>
             <a:noFill/>
           </a:ln>
+          <a:effectLst/>
         </p:spPr>
+        <p:style>
+          <a:lnRef idx="1">
+            <a:schemeClr val="accent1"/>
+          </a:lnRef>
+          <a:fillRef idx="3">
+            <a:schemeClr val="accent1"/>
+          </a:fillRef>
+          <a:effectRef idx="2">
+            <a:schemeClr val="accent1"/>
+          </a:effectRef>
+          <a:fontRef idx="minor">
+            <a:schemeClr val="lt1"/>
+          </a:fontRef>
+        </p:style>
         <p:txBody>
-          <a:bodyPr xmlns:a="http://schemas.openxmlformats.org/drawingml/2006/main">
-            <a:noAutofit/>
-          </a:bodyPr>
-          <a:lstStyle xmlns:a="http://schemas.openxmlformats.org/drawingml/2006/main">
-            <a:defPPr>
-              <a:defRPr sz="2250" b="1">
-                <a:solidFill>
-                  <a:srgbClr val="2E7D6F"/>
-                </a:solidFill>
-                <a:latin typeface="Calibri"/>
-                <a:ea typeface="Calibri"/>
-                <a:cs typeface="Calibri"/>
-              </a:defRPr>
-            </a:defPPr>
-            <a:lvl1pPr>
-              <a:defRPr sz="2250" b="1">
-                <a:solidFill>
-                  <a:srgbClr val="2E7D6F"/>
-                </a:solidFill>
-                <a:latin typeface="Calibri"/>
-                <a:ea typeface="Calibri"/>
-                <a:cs typeface="Calibri"/>
-              </a:defRPr>
-            </a:lvl1pPr>
-            <a:lvl2pPr>
-              <a:defRPr sz="2250" b="1">
-                <a:solidFill>
-                  <a:srgbClr val="2E7D6F"/>
-                </a:solidFill>
-                <a:latin typeface="Calibri"/>
-                <a:ea typeface="Calibri"/>
-                <a:cs typeface="Calibri"/>
-              </a:defRPr>
-            </a:lvl2pPr>
-            <a:lvl3pPr>
-              <a:defRPr sz="2250" b="1">
-                <a:solidFill>
-                  <a:srgbClr val="2E7D6F"/>
-                </a:solidFill>
-                <a:latin typeface="Calibri"/>
-                <a:ea typeface="Calibri"/>
-                <a:cs typeface="Calibri"/>
-              </a:defRPr>
-            </a:lvl3pPr>
-            <a:lvl4pPr>
-              <a:defRPr sz="2250" b="1">
-                <a:solidFill>
-                  <a:srgbClr val="2E7D6F"/>
-                </a:solidFill>
-                <a:latin typeface="Calibri"/>
-                <a:ea typeface="Calibri"/>
-                <a:cs typeface="Calibri"/>
-              </a:defRPr>
-            </a:lvl4pPr>
-            <a:lvl5pPr>
-              <a:defRPr sz="2250" b="1">
-                <a:solidFill>
-                  <a:srgbClr val="2E7D6F"/>
-                </a:solidFill>
-                <a:latin typeface="Calibri"/>
-                <a:ea typeface="Calibri"/>
-                <a:cs typeface="Calibri"/>
-              </a:defRPr>
-            </a:lvl5pPr>
-            <a:lvl6pPr>
-              <a:defRPr sz="2250" b="1">
-                <a:solidFill>
-                  <a:srgbClr val="2E7D6F"/>
-                </a:solidFill>
-                <a:latin typeface="Calibri"/>
-                <a:ea typeface="Calibri"/>
-                <a:cs typeface="Calibri"/>
-              </a:defRPr>
-            </a:lvl6pPr>
-            <a:lvl7pPr>
-              <a:defRPr sz="2250" b="1">
-                <a:solidFill>
-                  <a:srgbClr val="2E7D6F"/>
-                </a:solidFill>
-                <a:latin typeface="Calibri"/>
-                <a:ea typeface="Calibri"/>
-                <a:cs typeface="Calibri"/>
-              </a:defRPr>
-            </a:lvl7pPr>
-            <a:lvl8pPr>
-              <a:defRPr sz="2250" b="1">
-                <a:solidFill>
-                  <a:srgbClr val="2E7D6F"/>
-                </a:solidFill>
-                <a:latin typeface="Calibri"/>
-                <a:ea typeface="Calibri"/>
-                <a:cs typeface="Calibri"/>
-              </a:defRPr>
-            </a:lvl8pPr>
-            <a:lvl9pPr>
-              <a:defRPr sz="2250" b="1">
-                <a:solidFill>
-                  <a:srgbClr val="2E7D6F"/>
-                </a:solidFill>
-                <a:latin typeface="Calibri"/>
-                <a:ea typeface="Calibri"/>
-                <a:cs typeface="Calibri"/>
-              </a:defRPr>
-            </a:lvl9pPr>
-          </a:lstStyle>
-          <a:p xmlns:a="http://schemas.openxmlformats.org/drawingml/2006/main">
-            <a:pPr>
-              <a:defRPr sz="2250" b="1">
-                <a:solidFill>
-                  <a:srgbClr val="2E7D6F"/>
-                </a:solidFill>
-                <a:latin typeface="Calibri"/>
-                <a:ea typeface="Calibri"/>
-                <a:cs typeface="Calibri"/>
-              </a:defRPr>
-            </a:pPr>
-            <a:r>
-              <a:rPr sz="2250" b="1">
-                <a:solidFill>
-                  <a:srgbClr val="2E7D6F"/>
-                </a:solidFill>
-                <a:latin typeface="Calibri"/>
-                <a:ea typeface="Calibri"/>
-                <a:cs typeface="Calibri"/>
-                <a:hlinkClick xmlns:r="http://schemas.openxmlformats.org/officeDocument/2006/relationships" r:id="R14a6075be8054072"/>
-              </a:rPr>
-              <a:t>Open this week’s quiz</a:t>
-            </a:r>
+          <a:bodyPr rtlCol="0" anchor="ctr"/>
+          <a:lstStyle/>
+          <a:p>
+            <a:pPr algn="ctr"/>
           </a:p>
         </p:txBody>
       </p:sp>
       <p:sp>
         <p:nvSpPr>
-          <p:cNvPr id="16" name="">
-            <a:extLst xmlns:a="http://schemas.openxmlformats.org/drawingml/2006/main">
-              <a:ext uri="{FF2B5EF4-FFF2-40B4-BE49-F238E27FC236}">
-                <a16:creationId xmlns:a16="http://schemas.microsoft.com/office/drawing/2014/main" id="{35E8732B-C652-4546-BCE9-905C46C3E1AF}"/>
-              </a:ext>
-            </a:extLst>
-          </p:cNvPr>
-          <p:cNvSpPr>
-            <a:spLocks xmlns:a="http://schemas.openxmlformats.org/drawingml/2006/main" noGrp="1"/>
-          </p:cNvSpPr>
+          <p:cNvPr id="15" name="TextBox 14"/>
+          <p:cNvSpPr txBox="1"/>
           <p:nvPr/>
         </p:nvSpPr>
         <p:spPr>
-          <a:xfrm xmlns:a="http://schemas.openxmlformats.org/drawingml/2006/main">
-            <a:off x="685800" y="5972175"/>
-            <a:ext cx="10668000" cy="304800"/>
+          <a:xfrm>
+            <a:off x="584200" y="5562600"/>
+            <a:ext cx="11049000" cy="787400"/>
           </a:xfrm>
-          <a:prstGeom xmlns:a="http://schemas.openxmlformats.org/drawingml/2006/main" prst="rect">
+          <a:prstGeom prst="rect">
             <a:avLst/>
           </a:prstGeom>
-          <a:noFill xmlns:a="http://schemas.openxmlformats.org/drawingml/2006/main"/>
-          <a:ln xmlns:a="http://schemas.openxmlformats.org/drawingml/2006/main" w="0">
-            <a:noFill/>
-          </a:ln>
+          <a:noFill/>
         </p:spPr>
         <p:txBody>
-          <a:bodyPr xmlns:a="http://schemas.openxmlformats.org/drawingml/2006/main">
-            <a:noAutofit/>
+          <a:bodyPr wrap="square">
+            <a:spAutoFit/>
           </a:bodyPr>
-          <a:lstStyle xmlns:a="http://schemas.openxmlformats.org/drawingml/2006/main">
-            <a:defPPr>
-              <a:defRPr sz="1275" b="0">
-                <a:solidFill>
-                  <a:srgbClr val="6B7A8A"/>
-                </a:solidFill>
-                <a:latin typeface="Calibri"/>
-                <a:ea typeface="Calibri"/>
-                <a:cs typeface="Calibri"/>
-              </a:defRPr>
-            </a:defPPr>
-            <a:lvl1pPr>
-              <a:defRPr sz="1275" b="0">
-                <a:solidFill>
-                  <a:srgbClr val="6B7A8A"/>
-                </a:solidFill>
-                <a:latin typeface="Calibri"/>
-                <a:ea typeface="Calibri"/>
-                <a:cs typeface="Calibri"/>
-              </a:defRPr>
-            </a:lvl1pPr>
-            <a:lvl2pPr>
-              <a:defRPr sz="1275" b="0">
-                <a:solidFill>
-                  <a:srgbClr val="6B7A8A"/>
-                </a:solidFill>
-                <a:latin typeface="Calibri"/>
-                <a:ea typeface="Calibri"/>
-                <a:cs typeface="Calibri"/>
-              </a:defRPr>
-            </a:lvl2pPr>
-            <a:lvl3pPr>
-              <a:defRPr sz="1275" b="0">
-                <a:solidFill>
-                  <a:srgbClr val="6B7A8A"/>
-                </a:solidFill>
-                <a:latin typeface="Calibri"/>
-                <a:ea typeface="Calibri"/>
-                <a:cs typeface="Calibri"/>
-              </a:defRPr>
-            </a:lvl3pPr>
-            <a:lvl4pPr>
-              <a:defRPr sz="1275" b="0">
-                <a:solidFill>
-                  <a:srgbClr val="6B7A8A"/>
-                </a:solidFill>
-                <a:latin typeface="Calibri"/>
-                <a:ea typeface="Calibri"/>
-                <a:cs typeface="Calibri"/>
-              </a:defRPr>
-            </a:lvl4pPr>
-            <a:lvl5pPr>
-              <a:defRPr sz="1275" b="0">
-                <a:solidFill>
-                  <a:srgbClr val="6B7A8A"/>
-                </a:solidFill>
-                <a:latin typeface="Calibri"/>
-                <a:ea typeface="Calibri"/>
-                <a:cs typeface="Calibri"/>
-              </a:defRPr>
-            </a:lvl5pPr>
-            <a:lvl6pPr>
-              <a:defRPr sz="1275" b="0">
-                <a:solidFill>
-                  <a:srgbClr val="6B7A8A"/>
-                </a:solidFill>
-                <a:latin typeface="Calibri"/>
-                <a:ea typeface="Calibri"/>
-                <a:cs typeface="Calibri"/>
-              </a:defRPr>
-            </a:lvl6pPr>
-            <a:lvl7pPr>
-              <a:defRPr sz="1275" b="0">
-                <a:solidFill>
-                  <a:srgbClr val="6B7A8A"/>
-                </a:solidFill>
-                <a:latin typeface="Calibri"/>
-                <a:ea typeface="Calibri"/>
-                <a:cs typeface="Calibri"/>
-              </a:defRPr>
-            </a:lvl7pPr>
-            <a:lvl8pPr>
-              <a:defRPr sz="1275" b="0">
-                <a:solidFill>
-                  <a:srgbClr val="6B7A8A"/>
-                </a:solidFill>
-                <a:latin typeface="Calibri"/>
-                <a:ea typeface="Calibri"/>
-                <a:cs typeface="Calibri"/>
-              </a:defRPr>
-            </a:lvl8pPr>
-            <a:lvl9pPr>
-              <a:defRPr sz="1275" b="0">
-                <a:solidFill>
-                  <a:srgbClr val="6B7A8A"/>
-                </a:solidFill>
-                <a:latin typeface="Calibri"/>
-                <a:ea typeface="Calibri"/>
-                <a:cs typeface="Calibri"/>
-              </a:defRPr>
-            </a:lvl9pPr>
-          </a:lstStyle>
-          <a:p xmlns:a="http://schemas.openxmlformats.org/drawingml/2006/main">
+          <a:lstStyle/>
+          <a:p>
             <a:pPr>
-              <a:defRPr sz="1275" b="0">
-                <a:solidFill>
-                  <a:srgbClr val="6B7A8A"/>
-                </a:solidFill>
-                <a:latin typeface="Calibri"/>
-                <a:ea typeface="Calibri"/>
-                <a:cs typeface="Calibri"/>
-              </a:defRPr>
+              <a:spcAft>
+                <a:spcPts val="0"/>
+              </a:spcAft>
             </a:pPr>
             <a:r>
-              <a:rPr sz="1275" b="0">
-                <a:solidFill>
-                  <a:srgbClr val="6B7A8A"/>
-                </a:solidFill>
-                <a:latin typeface="Calibri"/>
-                <a:ea typeface="Calibri"/>
-                <a:cs typeface="Calibri"/>
-              </a:rPr>
-              <a:t>https://forms.gle/SBN8HWXnKnXX34qw9</a:t>
+              <a:rPr sz="1800" b="1">
+                <a:solidFill>
+                  <a:srgbClr val="2E7D6F"/>
+                </a:solidFill>
+                <a:latin typeface="Calibri"/>
+              </a:rPr>
+              <a:t>Opens after today's class. Each form stays open for 24 hours. Use your Student Registration Number and registered account.</a:t>
             </a:r>
           </a:p>
         </p:txBody>
       </p:sp>
       <p:sp>
         <p:nvSpPr>
-          <p:cNvPr id="17" name="">
-            <a:extLst xmlns:a="http://schemas.openxmlformats.org/drawingml/2006/main">
-              <a:ext uri="{FF2B5EF4-FFF2-40B4-BE49-F238E27FC236}">
-                <a16:creationId xmlns:a16="http://schemas.microsoft.com/office/drawing/2014/main" id="{6FDF2739-758C-4597-A8C6-127ED3480785}"/>
-              </a:ext>
-            </a:extLst>
-          </p:cNvPr>
-          <p:cNvSpPr>
-            <a:spLocks xmlns:a="http://schemas.openxmlformats.org/drawingml/2006/main" noGrp="1"/>
-          </p:cNvSpPr>
+          <p:cNvPr id="16" name="TextBox 15"/>
+          <p:cNvSpPr txBox="1"/>
           <p:nvPr/>
         </p:nvSpPr>
         <p:spPr>
-          <a:xfrm xmlns:a="http://schemas.openxmlformats.org/drawingml/2006/main">
-            <a:off x="590550" y="6524625"/>
-            <a:ext cx="10810875" cy="219075"/>
+          <a:xfrm>
+            <a:off x="584200" y="6524625"/>
+            <a:ext cx="10807700" cy="215900"/>
           </a:xfrm>
-          <a:prstGeom xmlns:a="http://schemas.openxmlformats.org/drawingml/2006/main" prst="rect">
+          <a:prstGeom prst="rect">
             <a:avLst/>
           </a:prstGeom>
-          <a:noFill xmlns:a="http://schemas.openxmlformats.org/drawingml/2006/main"/>
-          <a:ln xmlns:a="http://schemas.openxmlformats.org/drawingml/2006/main" w="0">
-            <a:noFill/>
-          </a:ln>
+          <a:noFill/>
         </p:spPr>
         <p:txBody>
-          <a:bodyPr xmlns:a="http://schemas.openxmlformats.org/drawingml/2006/main">
-            <a:noAutofit/>
+          <a:bodyPr wrap="square">
+            <a:spAutoFit/>
           </a:bodyPr>
-          <a:lstStyle xmlns:a="http://schemas.openxmlformats.org/drawingml/2006/main">
-            <a:defPPr>
-              <a:defRPr sz="1200" b="0">
+          <a:lstStyle/>
+          <a:p>
+            <a:pPr>
+              <a:spcAft>
+                <a:spcPts val="0"/>
+              </a:spcAft>
+            </a:pPr>
+            <a:r>
+              <a:rPr sz="1200" b="0">
                 <a:solidFill>
                   <a:srgbClr val="6B7A8A"/>
                 </a:solidFill>
                 <a:latin typeface="Calibri"/>
-                <a:ea typeface="Calibri"/>
-                <a:cs typeface="Calibri"/>
-              </a:defRPr>
-            </a:defPPr>
-            <a:lvl1pPr>
-              <a:defRPr sz="1200" b="0">
-                <a:solidFill>
-                  <a:srgbClr val="6B7A8A"/>
-                </a:solidFill>
-                <a:latin typeface="Calibri"/>
-                <a:ea typeface="Calibri"/>
-                <a:cs typeface="Calibri"/>
-              </a:defRPr>
-            </a:lvl1pPr>
-            <a:lvl2pPr>
-              <a:defRPr sz="1200" b="0">
-                <a:solidFill>
-                  <a:srgbClr val="6B7A8A"/>
-                </a:solidFill>
-                <a:latin typeface="Calibri"/>
-                <a:ea typeface="Calibri"/>
-                <a:cs typeface="Calibri"/>
-              </a:defRPr>
-            </a:lvl2pPr>
-            <a:lvl3pPr>
-              <a:defRPr sz="1200" b="0">
-                <a:solidFill>
-                  <a:srgbClr val="6B7A8A"/>
-                </a:solidFill>
-                <a:latin typeface="Calibri"/>
-                <a:ea typeface="Calibri"/>
-                <a:cs typeface="Calibri"/>
-              </a:defRPr>
-            </a:lvl3pPr>
-            <a:lvl4pPr>
-              <a:defRPr sz="1200" b="0">
-                <a:solidFill>
-                  <a:srgbClr val="6B7A8A"/>
-                </a:solidFill>
-                <a:latin typeface="Calibri"/>
-                <a:ea typeface="Calibri"/>
-                <a:cs typeface="Calibri"/>
-              </a:defRPr>
-            </a:lvl4pPr>
-            <a:lvl5pPr>
-              <a:defRPr sz="1200" b="0">
-                <a:solidFill>
-                  <a:srgbClr val="6B7A8A"/>
-                </a:solidFill>
-                <a:latin typeface="Calibri"/>
-                <a:ea typeface="Calibri"/>
-                <a:cs typeface="Calibri"/>
-              </a:defRPr>
-            </a:lvl5pPr>
-            <a:lvl6pPr>
-              <a:defRPr sz="1200" b="0">
-                <a:solidFill>
-                  <a:srgbClr val="6B7A8A"/>
-                </a:solidFill>
-                <a:latin typeface="Calibri"/>
-                <a:ea typeface="Calibri"/>
-                <a:cs typeface="Calibri"/>
-              </a:defRPr>
-            </a:lvl6pPr>
-            <a:lvl7pPr>
-              <a:defRPr sz="1200" b="0">
-                <a:solidFill>
-                  <a:srgbClr val="6B7A8A"/>
-                </a:solidFill>
-                <a:latin typeface="Calibri"/>
-                <a:ea typeface="Calibri"/>
-                <a:cs typeface="Calibri"/>
-              </a:defRPr>
-            </a:lvl7pPr>
-            <a:lvl8pPr>
-              <a:defRPr sz="1200" b="0">
-                <a:solidFill>
-                  <a:srgbClr val="6B7A8A"/>
-                </a:solidFill>
-                <a:latin typeface="Calibri"/>
-                <a:ea typeface="Calibri"/>
-                <a:cs typeface="Calibri"/>
-              </a:defRPr>
-            </a:lvl8pPr>
-            <a:lvl9pPr>
-              <a:defRPr sz="1200" b="0">
-                <a:solidFill>
-                  <a:srgbClr val="6B7A8A"/>
-                </a:solidFill>
-                <a:latin typeface="Calibri"/>
-                <a:ea typeface="Calibri"/>
-                <a:cs typeface="Calibri"/>
-              </a:defRPr>
-            </a:lvl9pPr>
-          </a:lstStyle>
-          <a:p xmlns:a="http://schemas.openxmlformats.org/drawingml/2006/main">
-            <a:pPr>
-              <a:defRPr sz="1200" b="0">
-                <a:solidFill>
-                  <a:srgbClr val="6B7A8A"/>
-                </a:solidFill>
-                <a:latin typeface="Calibri"/>
-                <a:ea typeface="Calibri"/>
-                <a:cs typeface="Calibri"/>
-              </a:defRPr>
-            </a:pPr>
-            <a:r>
-              <a:rPr sz="1200" b="0">
-                <a:solidFill>
-                  <a:srgbClr val="6B7A8A"/>
-                </a:solidFill>
-                <a:latin typeface="Calibri"/>
-                <a:ea typeface="Calibri"/>
-                <a:cs typeface="Calibri"/>
               </a:rPr>
               <a:t>CML3112   Week 13   39</a:t>
             </a:r>
@@ -42020,12 +38811,10 @@
         </p:txBody>
       </p:sp>
     </p:spTree>
-    <p:extLst>
-      <p:ext uri="{BB962C8B-B14F-4D97-AF65-F5344CB8AC3E}">
-        <p14:creationId xmlns:p14="http://schemas.microsoft.com/office/powerpoint/2010/main" val="1834236711"/>
-      </p:ext>
-    </p:extLst>
   </p:cSld>
+  <p:clrMapOvr>
+    <a:masterClrMapping/>
+  </p:clrMapOvr>
 </p:sld>
 </file>
 
@@ -44516,7 +41305,7 @@
                 <a:ea typeface="Calibri"/>
                 <a:cs typeface="Calibri"/>
               </a:rPr>
-              <a:t>Save your work and check the required submission files.</a:t>
+              <a:t>Check that the required files are in place.</a:t>
             </a:r>
           </a:p>
         </p:txBody>
